--- a/docs/proposals/softbank-ultraman-caravan/SB様提示用_1022ミーティング資料.pptx
+++ b/docs/proposals/softbank-ultraman-caravan/SB様提示用_1022ミーティング資料.pptx
@@ -11697,7 +11697,7 @@
                 <a:latin typeface="Meiryo"/>
                 <a:ea typeface="Meiryo"/>
               </a:rPr>
-              <a:t>② 仮申請フロー</a:t>
+              <a:t>② 仮申請フロー(別紙「仮申請のご案内」参照)</a:t>
             </a:r>
           </a:p>
           <a:p>
@@ -11714,7 +11714,7 @@
                 <a:latin typeface="Meiryo"/>
                 <a:ea typeface="Meiryo"/>
               </a:rPr>
-              <a:t>・イベントキット・ノベルティ等は品目ごとに仮申請(備品/配布用を明記)</a:t>
+              <a:t>・貴社ご担当者1名を事前登録→品目ごとに仮申請→約1週間で可否回答</a:t>
             </a:r>
           </a:p>
           <a:p>
@@ -11731,7 +11731,7 @@
                 <a:latin typeface="Meiryo"/>
                 <a:ea typeface="Meiryo"/>
               </a:rPr>
-              <a:t>・仮申請をもって正式回答(約1週間)</a:t>
+              <a:t>・入力項目:企画商品名(「ノベルティ ○○」表記)・キャラクター・商品カテゴリー</a:t>
             </a:r>
           </a:p>
           <a:p>
@@ -11748,7 +11748,7 @@
                 <a:latin typeface="Meiryo"/>
                 <a:ea typeface="Meiryo"/>
               </a:rPr>
-              <a:t>・申請窓口はご担当1名に集約(通知が1名にのみ届くため)</a:t>
+              <a:t>　(配布物=1〜16/会場装飾=店舗備品)・製造原価単価・予定数量・材質・サイズ等</a:t>
             </a:r>
           </a:p>
           <a:p>
@@ -11765,7 +11765,7 @@
                 <a:latin typeface="Meiryo"/>
                 <a:ea typeface="Meiryo"/>
               </a:rPr>
-              <a:t>・作成許諾ロイヤリティ:作成費用の20%(製造数量ベース)</a:t>
+              <a:t>・作成許諾ロイヤリティ:作成費用の20%(製造原価単価×数量が算定基礎)</a:t>
             </a:r>
           </a:p>
         </p:txBody>

--- a/docs/proposals/softbank-ultraman-caravan/SB様提示用_1022ミーティング資料.pptx
+++ b/docs/proposals/softbank-ultraman-caravan/SB様提示用_1022ミーティング資料.pptx
@@ -15,6 +15,7 @@
     <p:sldId id="263" r:id="rId14"/>
     <p:sldId id="264" r:id="rId15"/>
     <p:sldId id="265" r:id="rId16"/>
+    <p:sldId id="266" r:id="rId17"/>
   </p:sldIdLst>
   <p:sldSz cx="12191695" cy="6858000" type="screen4x3"/>
   <p:notesSz cx="6858000" cy="9144000"/>
@@ -3489,7 +3490,7 @@
                 <a:latin typeface="Meiryo"/>
                 <a:ea typeface="Meiryo"/>
               </a:rPr>
-              <a:t>4. スケジュールと次のステップ</a:t>
+              <a:t>4. 制作物・権利まわりの進め方</a:t>
             </a:r>
           </a:p>
         </p:txBody>
@@ -3529,7 +3530,7 @@
                 <a:latin typeface="Meiryo"/>
                 <a:ea typeface="Meiryo"/>
               </a:rPr>
-              <a:t>2027年1月開始に向けた逆算スケジュールです</a:t>
+              <a:t>キャンペーンビジュアルの確定を起点に、仮申請フローで各制作物を確定していきます</a:t>
             </a:r>
           </a:p>
         </p:txBody>
@@ -3650,6 +3651,847 @@
                 <a:ea typeface="Meiryo"/>
               </a:rPr>
               <a:t>10</a:t>
+            </a:r>
+          </a:p>
+        </p:txBody>
+      </p:sp>
+      <p:sp>
+        <p:nvSpPr>
+          <p:cNvPr id="8" name="Rounded Rectangle 7"/>
+          <p:cNvSpPr/>
+          <p:nvPr/>
+        </p:nvSpPr>
+        <p:spPr>
+          <a:xfrm>
+            <a:off x="640080" y="1463040"/>
+            <a:ext cx="5303520" cy="2286000"/>
+          </a:xfrm>
+          <a:prstGeom prst="roundRect">
+            <a:avLst>
+              <a:gd name="adj" fmla="val 6000"/>
+            </a:avLst>
+          </a:prstGeom>
+          <a:solidFill>
+            <a:srgbClr val="F2F4F6"/>
+          </a:solidFill>
+          <a:ln>
+            <a:noFill/>
+          </a:ln>
+          <a:effectLst/>
+        </p:spPr>
+        <p:style>
+          <a:lnRef idx="1">
+            <a:schemeClr val="accent1"/>
+          </a:lnRef>
+          <a:fillRef idx="3">
+            <a:schemeClr val="accent1"/>
+          </a:fillRef>
+          <a:effectRef idx="2">
+            <a:schemeClr val="accent1"/>
+          </a:effectRef>
+          <a:fontRef idx="minor">
+            <a:schemeClr val="lt1"/>
+          </a:fontRef>
+        </p:style>
+        <p:txBody>
+          <a:bodyPr rtlCol="0" anchor="ctr"/>
+          <a:lstStyle/>
+          <a:p>
+            <a:pPr algn="ctr"/>
+          </a:p>
+        </p:txBody>
+      </p:sp>
+      <p:sp>
+        <p:nvSpPr>
+          <p:cNvPr id="9" name="TextBox 8"/>
+          <p:cNvSpPr txBox="1"/>
+          <p:nvPr/>
+        </p:nvSpPr>
+        <p:spPr>
+          <a:xfrm>
+            <a:off x="868680" y="1591056"/>
+            <a:ext cx="4846320" cy="2029968"/>
+          </a:xfrm>
+          <a:prstGeom prst="rect">
+            <a:avLst/>
+          </a:prstGeom>
+          <a:noFill/>
+        </p:spPr>
+        <p:txBody>
+          <a:bodyPr wrap="square" anchor="t" lIns="0" rIns="0" tIns="0" bIns="0">
+            <a:spAutoFit/>
+          </a:bodyPr>
+          <a:lstStyle/>
+          <a:p>
+            <a:pPr algn="l">
+              <a:spcAft>
+                <a:spcPts val="400"/>
+              </a:spcAft>
+            </a:pPr>
+            <a:r>
+              <a:rPr sz="1300" b="1">
+                <a:solidFill>
+                  <a:srgbClr val="C00000"/>
+                </a:solidFill>
+                <a:latin typeface="Meiryo"/>
+                <a:ea typeface="Meiryo"/>
+              </a:rPr>
+              <a:t>① キャンペーン名称・キービジュアルの策定(11月中)</a:t>
+            </a:r>
+          </a:p>
+          <a:p>
+            <a:pPr algn="l">
+              <a:spcAft>
+                <a:spcPts val="400"/>
+              </a:spcAft>
+            </a:pPr>
+            <a:r>
+              <a:rPr sz="1100" b="0">
+                <a:solidFill>
+                  <a:srgbClr val="1A1A1A"/>
+                </a:solidFill>
+                <a:latin typeface="Meiryo"/>
+                <a:ea typeface="Meiryo"/>
+              </a:rPr>
+              <a:t>・名称とKVを両社で確定(ノベルティ可否判定の基準になります)</a:t>
+            </a:r>
+          </a:p>
+          <a:p>
+            <a:pPr algn="l">
+              <a:spcAft>
+                <a:spcPts val="400"/>
+              </a:spcAft>
+            </a:pPr>
+            <a:r>
+              <a:rPr sz="1100" b="0">
+                <a:solidFill>
+                  <a:srgbClr val="1A1A1A"/>
+                </a:solidFill>
+                <a:latin typeface="Meiryo"/>
+                <a:ea typeface="Meiryo"/>
+              </a:rPr>
+              <a:t>・素材:複数ヒーローの集合ビジュアル、色調の揃った個体素材、ブランドロゴ</a:t>
+            </a:r>
+          </a:p>
+          <a:p>
+            <a:pPr algn="l">
+              <a:spcAft>
+                <a:spcPts val="400"/>
+              </a:spcAft>
+            </a:pPr>
+            <a:r>
+              <a:rPr sz="1100" b="0">
+                <a:solidFill>
+                  <a:srgbClr val="1A1A1A"/>
+                </a:solidFill>
+                <a:latin typeface="Meiryo"/>
+                <a:ea typeface="Meiryo"/>
+              </a:rPr>
+              <a:t>・貴社デザイン部門向けに素材の使い方をレクチャー(監修回数の最小化)</a:t>
+            </a:r>
+          </a:p>
+          <a:p>
+            <a:pPr algn="l">
+              <a:spcAft>
+                <a:spcPts val="400"/>
+              </a:spcAft>
+            </a:pPr>
+            <a:r>
+              <a:rPr sz="1100" b="0">
+                <a:solidFill>
+                  <a:srgbClr val="1A1A1A"/>
+                </a:solidFill>
+                <a:latin typeface="Meiryo"/>
+                <a:ea typeface="Meiryo"/>
+              </a:rPr>
+              <a:t>・中国工場の春節前量産(1月末まで)から逆算し、11月中の確定が必要</a:t>
+            </a:r>
+          </a:p>
+        </p:txBody>
+      </p:sp>
+      <p:sp>
+        <p:nvSpPr>
+          <p:cNvPr id="10" name="Rounded Rectangle 9"/>
+          <p:cNvSpPr/>
+          <p:nvPr/>
+        </p:nvSpPr>
+        <p:spPr>
+          <a:xfrm>
+            <a:off x="6217920" y="1463040"/>
+            <a:ext cx="5303520" cy="2286000"/>
+          </a:xfrm>
+          <a:prstGeom prst="roundRect">
+            <a:avLst>
+              <a:gd name="adj" fmla="val 6000"/>
+            </a:avLst>
+          </a:prstGeom>
+          <a:solidFill>
+            <a:srgbClr val="F2F4F6"/>
+          </a:solidFill>
+          <a:ln>
+            <a:noFill/>
+          </a:ln>
+          <a:effectLst/>
+        </p:spPr>
+        <p:style>
+          <a:lnRef idx="1">
+            <a:schemeClr val="accent1"/>
+          </a:lnRef>
+          <a:fillRef idx="3">
+            <a:schemeClr val="accent1"/>
+          </a:fillRef>
+          <a:effectRef idx="2">
+            <a:schemeClr val="accent1"/>
+          </a:effectRef>
+          <a:fontRef idx="minor">
+            <a:schemeClr val="lt1"/>
+          </a:fontRef>
+        </p:style>
+        <p:txBody>
+          <a:bodyPr rtlCol="0" anchor="ctr"/>
+          <a:lstStyle/>
+          <a:p>
+            <a:pPr algn="ctr"/>
+          </a:p>
+        </p:txBody>
+      </p:sp>
+      <p:sp>
+        <p:nvSpPr>
+          <p:cNvPr id="11" name="TextBox 10"/>
+          <p:cNvSpPr txBox="1"/>
+          <p:nvPr/>
+        </p:nvSpPr>
+        <p:spPr>
+          <a:xfrm>
+            <a:off x="6446520" y="1591056"/>
+            <a:ext cx="4846320" cy="2029968"/>
+          </a:xfrm>
+          <a:prstGeom prst="rect">
+            <a:avLst/>
+          </a:prstGeom>
+          <a:noFill/>
+        </p:spPr>
+        <p:txBody>
+          <a:bodyPr wrap="square" anchor="t" lIns="0" rIns="0" tIns="0" bIns="0">
+            <a:spAutoFit/>
+          </a:bodyPr>
+          <a:lstStyle/>
+          <a:p>
+            <a:pPr algn="l">
+              <a:spcAft>
+                <a:spcPts val="400"/>
+              </a:spcAft>
+            </a:pPr>
+            <a:r>
+              <a:rPr sz="1300" b="1">
+                <a:solidFill>
+                  <a:srgbClr val="C00000"/>
+                </a:solidFill>
+                <a:latin typeface="Meiryo"/>
+                <a:ea typeface="Meiryo"/>
+              </a:rPr>
+              <a:t>② 仮申請フロー(別紙「仮申請のご案内」参照)</a:t>
+            </a:r>
+          </a:p>
+          <a:p>
+            <a:pPr algn="l">
+              <a:spcAft>
+                <a:spcPts val="400"/>
+              </a:spcAft>
+            </a:pPr>
+            <a:r>
+              <a:rPr sz="1100" b="0">
+                <a:solidFill>
+                  <a:srgbClr val="1A1A1A"/>
+                </a:solidFill>
+                <a:latin typeface="Meiryo"/>
+                <a:ea typeface="Meiryo"/>
+              </a:rPr>
+              <a:t>・貴社ご担当者1名を事前登録→品目ごとに仮申請→約1週間で可否回答</a:t>
+            </a:r>
+          </a:p>
+          <a:p>
+            <a:pPr algn="l">
+              <a:spcAft>
+                <a:spcPts val="400"/>
+              </a:spcAft>
+            </a:pPr>
+            <a:r>
+              <a:rPr sz="1100" b="0">
+                <a:solidFill>
+                  <a:srgbClr val="1A1A1A"/>
+                </a:solidFill>
+                <a:latin typeface="Meiryo"/>
+                <a:ea typeface="Meiryo"/>
+              </a:rPr>
+              <a:t>・入力項目:企画商品名(「ノベルティ ○○」表記)・キャラクター・商品カテゴリー</a:t>
+            </a:r>
+          </a:p>
+          <a:p>
+            <a:pPr algn="l">
+              <a:spcAft>
+                <a:spcPts val="400"/>
+              </a:spcAft>
+            </a:pPr>
+            <a:r>
+              <a:rPr sz="1100" b="0">
+                <a:solidFill>
+                  <a:srgbClr val="1A1A1A"/>
+                </a:solidFill>
+                <a:latin typeface="Meiryo"/>
+                <a:ea typeface="Meiryo"/>
+              </a:rPr>
+              <a:t>　(配布物=1〜16/会場装飾=店舗備品)・製造原価単価・予定数量・材質・サイズ等</a:t>
+            </a:r>
+          </a:p>
+          <a:p>
+            <a:pPr algn="l">
+              <a:spcAft>
+                <a:spcPts val="400"/>
+              </a:spcAft>
+            </a:pPr>
+            <a:r>
+              <a:rPr sz="1100" b="0">
+                <a:solidFill>
+                  <a:srgbClr val="1A1A1A"/>
+                </a:solidFill>
+                <a:latin typeface="Meiryo"/>
+                <a:ea typeface="Meiryo"/>
+              </a:rPr>
+              <a:t>・作成許諾ロイヤリティ:作成費用の20%(製造原価単価×数量が算定基礎)</a:t>
+            </a:r>
+          </a:p>
+        </p:txBody>
+      </p:sp>
+      <p:sp>
+        <p:nvSpPr>
+          <p:cNvPr id="12" name="Rounded Rectangle 11"/>
+          <p:cNvSpPr/>
+          <p:nvPr/>
+        </p:nvSpPr>
+        <p:spPr>
+          <a:xfrm>
+            <a:off x="640080" y="3931920"/>
+            <a:ext cx="5303520" cy="2103120"/>
+          </a:xfrm>
+          <a:prstGeom prst="roundRect">
+            <a:avLst>
+              <a:gd name="adj" fmla="val 6000"/>
+            </a:avLst>
+          </a:prstGeom>
+          <a:solidFill>
+            <a:srgbClr val="F2F4F6"/>
+          </a:solidFill>
+          <a:ln>
+            <a:noFill/>
+          </a:ln>
+          <a:effectLst/>
+        </p:spPr>
+        <p:style>
+          <a:lnRef idx="1">
+            <a:schemeClr val="accent1"/>
+          </a:lnRef>
+          <a:fillRef idx="3">
+            <a:schemeClr val="accent1"/>
+          </a:fillRef>
+          <a:effectRef idx="2">
+            <a:schemeClr val="accent1"/>
+          </a:effectRef>
+          <a:fontRef idx="minor">
+            <a:schemeClr val="lt1"/>
+          </a:fontRef>
+        </p:style>
+        <p:txBody>
+          <a:bodyPr rtlCol="0" anchor="ctr"/>
+          <a:lstStyle/>
+          <a:p>
+            <a:pPr algn="ctr"/>
+          </a:p>
+        </p:txBody>
+      </p:sp>
+      <p:sp>
+        <p:nvSpPr>
+          <p:cNvPr id="13" name="TextBox 12"/>
+          <p:cNvSpPr txBox="1"/>
+          <p:nvPr/>
+        </p:nvSpPr>
+        <p:spPr>
+          <a:xfrm>
+            <a:off x="868680" y="4059936"/>
+            <a:ext cx="4846320" cy="1847088"/>
+          </a:xfrm>
+          <a:prstGeom prst="rect">
+            <a:avLst/>
+          </a:prstGeom>
+          <a:noFill/>
+        </p:spPr>
+        <p:txBody>
+          <a:bodyPr wrap="square" anchor="t" lIns="0" rIns="0" tIns="0" bIns="0">
+            <a:spAutoFit/>
+          </a:bodyPr>
+          <a:lstStyle/>
+          <a:p>
+            <a:pPr algn="l">
+              <a:spcAft>
+                <a:spcPts val="400"/>
+              </a:spcAft>
+            </a:pPr>
+            <a:r>
+              <a:rPr sz="1300" b="1">
+                <a:solidFill>
+                  <a:srgbClr val="C00000"/>
+                </a:solidFill>
+                <a:latin typeface="Meiryo"/>
+                <a:ea typeface="Meiryo"/>
+              </a:rPr>
+              <a:t>③ ノベルティのカテゴリー</a:t>
+            </a:r>
+          </a:p>
+          <a:p>
+            <a:pPr algn="l">
+              <a:spcAft>
+                <a:spcPts val="400"/>
+              </a:spcAft>
+            </a:pPr>
+            <a:r>
+              <a:rPr sz="1100" b="0">
+                <a:solidFill>
+                  <a:srgbClr val="1A1A1A"/>
+                </a:solidFill>
+                <a:latin typeface="Meiryo"/>
+                <a:ea typeface="Meiryo"/>
+              </a:rPr>
+              <a:t>・制作可能:トートバッグ・タオル・BOXティッシュ等(キャンペーンデザイン使用)</a:t>
+            </a:r>
+          </a:p>
+          <a:p>
+            <a:pPr algn="l">
+              <a:spcAft>
+                <a:spcPts val="400"/>
+              </a:spcAft>
+            </a:pPr>
+            <a:r>
+              <a:rPr sz="1100" b="0">
+                <a:solidFill>
+                  <a:srgbClr val="1A1A1A"/>
+                </a:solidFill>
+                <a:latin typeface="Meiryo"/>
+                <a:ea typeface="Meiryo"/>
+              </a:rPr>
+              <a:t>・制作不可:お子様向け玩具(フィギュア・ソフビ等)・菓子類・ランチボックス等</a:t>
+            </a:r>
+          </a:p>
+          <a:p>
+            <a:pPr algn="l">
+              <a:spcAft>
+                <a:spcPts val="400"/>
+              </a:spcAft>
+            </a:pPr>
+            <a:r>
+              <a:rPr sz="1100" b="0">
+                <a:solidFill>
+                  <a:srgbClr val="1A1A1A"/>
+                </a:solidFill>
+                <a:latin typeface="Meiryo"/>
+                <a:ea typeface="Meiryo"/>
+              </a:rPr>
+              <a:t>・タオルは一般仕様(ループタオル・ミニタオルは避ける)</a:t>
+            </a:r>
+          </a:p>
+        </p:txBody>
+      </p:sp>
+      <p:sp>
+        <p:nvSpPr>
+          <p:cNvPr id="14" name="Rounded Rectangle 13"/>
+          <p:cNvSpPr/>
+          <p:nvPr/>
+        </p:nvSpPr>
+        <p:spPr>
+          <a:xfrm>
+            <a:off x="6217920" y="3931920"/>
+            <a:ext cx="5303520" cy="2103120"/>
+          </a:xfrm>
+          <a:prstGeom prst="roundRect">
+            <a:avLst>
+              <a:gd name="adj" fmla="val 6000"/>
+            </a:avLst>
+          </a:prstGeom>
+          <a:solidFill>
+            <a:srgbClr val="F2F4F6"/>
+          </a:solidFill>
+          <a:ln>
+            <a:noFill/>
+          </a:ln>
+          <a:effectLst/>
+        </p:spPr>
+        <p:style>
+          <a:lnRef idx="1">
+            <a:schemeClr val="accent1"/>
+          </a:lnRef>
+          <a:fillRef idx="3">
+            <a:schemeClr val="accent1"/>
+          </a:fillRef>
+          <a:effectRef idx="2">
+            <a:schemeClr val="accent1"/>
+          </a:effectRef>
+          <a:fontRef idx="minor">
+            <a:schemeClr val="lt1"/>
+          </a:fontRef>
+        </p:style>
+        <p:txBody>
+          <a:bodyPr rtlCol="0" anchor="ctr"/>
+          <a:lstStyle/>
+          <a:p>
+            <a:pPr algn="ctr"/>
+          </a:p>
+        </p:txBody>
+      </p:sp>
+      <p:sp>
+        <p:nvSpPr>
+          <p:cNvPr id="15" name="TextBox 14"/>
+          <p:cNvSpPr txBox="1"/>
+          <p:nvPr/>
+        </p:nvSpPr>
+        <p:spPr>
+          <a:xfrm>
+            <a:off x="6446520" y="4059936"/>
+            <a:ext cx="4846320" cy="1847088"/>
+          </a:xfrm>
+          <a:prstGeom prst="rect">
+            <a:avLst/>
+          </a:prstGeom>
+          <a:noFill/>
+        </p:spPr>
+        <p:txBody>
+          <a:bodyPr wrap="square" anchor="t" lIns="0" rIns="0" tIns="0" bIns="0">
+            <a:spAutoFit/>
+          </a:bodyPr>
+          <a:lstStyle/>
+          <a:p>
+            <a:pPr algn="l">
+              <a:spcAft>
+                <a:spcPts val="400"/>
+              </a:spcAft>
+            </a:pPr>
+            <a:r>
+              <a:rPr sz="1300" b="1">
+                <a:solidFill>
+                  <a:srgbClr val="C00000"/>
+                </a:solidFill>
+                <a:latin typeface="Meiryo"/>
+                <a:ea typeface="Meiryo"/>
+              </a:rPr>
+              <a:t>④ 修了証・配布物</a:t>
+            </a:r>
+          </a:p>
+          <a:p>
+            <a:pPr algn="l">
+              <a:spcAft>
+                <a:spcPts val="400"/>
+              </a:spcAft>
+            </a:pPr>
+            <a:r>
+              <a:rPr sz="1100" b="0">
+                <a:solidFill>
+                  <a:srgbClr val="1A1A1A"/>
+                </a:solidFill>
+                <a:latin typeface="Meiryo"/>
+                <a:ea typeface="Meiryo"/>
+              </a:rPr>
+              <a:t>・既存の修了証は当社既存イベント専用のため本件では使用しません</a:t>
+            </a:r>
+          </a:p>
+          <a:p>
+            <a:pPr algn="l">
+              <a:spcAft>
+                <a:spcPts val="400"/>
+              </a:spcAft>
+            </a:pPr>
+            <a:r>
+              <a:rPr sz="1100" b="0">
+                <a:solidFill>
+                  <a:srgbClr val="1A1A1A"/>
+                </a:solidFill>
+                <a:latin typeface="Meiryo"/>
+                <a:ea typeface="Meiryo"/>
+              </a:rPr>
+              <a:t>・案A:貴社のミッション(クイズ等)と連動したオリジナル修了証を貴社制作</a:t>
+            </a:r>
+          </a:p>
+          <a:p>
+            <a:pPr algn="l">
+              <a:spcAft>
+                <a:spcPts val="400"/>
+              </a:spcAft>
+            </a:pPr>
+            <a:r>
+              <a:rPr sz="1100" b="0">
+                <a:solidFill>
+                  <a:srgbClr val="1A1A1A"/>
+                </a:solidFill>
+                <a:latin typeface="Meiryo"/>
+                <a:ea typeface="Meiryo"/>
+              </a:rPr>
+              <a:t>・案B:キャンペーンビジュアルのステッカーを貴社制作・全員配布</a:t>
+            </a:r>
+          </a:p>
+          <a:p>
+            <a:pPr algn="l">
+              <a:spcAft>
+                <a:spcPts val="400"/>
+              </a:spcAft>
+            </a:pPr>
+            <a:r>
+              <a:rPr sz="1100" b="0">
+                <a:solidFill>
+                  <a:srgbClr val="1A1A1A"/>
+                </a:solidFill>
+                <a:latin typeface="Meiryo"/>
+                <a:ea typeface="Meiryo"/>
+              </a:rPr>
+              <a:t>・配布の目的(体験型か告知型か)に応じて選択</a:t>
+            </a:r>
+          </a:p>
+        </p:txBody>
+      </p:sp>
+    </p:spTree>
+  </p:cSld>
+  <p:clrMapOvr>
+    <a:masterClrMapping/>
+  </p:clrMapOvr>
+</p:sld>
+</file>
+
+<file path=ppt/slides/slide11.xml><?xml version="1.0" encoding="utf-8"?>
+<p:sld xmlns:a="http://schemas.openxmlformats.org/drawingml/2006/main" xmlns:p="http://schemas.openxmlformats.org/presentationml/2006/main" xmlns:r="http://schemas.openxmlformats.org/officeDocument/2006/relationships">
+  <p:cSld>
+    <p:spTree>
+      <p:nvGrpSpPr>
+        <p:cNvPr id="1" name=""/>
+        <p:cNvGrpSpPr/>
+        <p:nvPr/>
+      </p:nvGrpSpPr>
+      <p:grpSpPr/>
+      <p:pic>
+        <p:nvPicPr>
+          <p:cNvPr id="2" name="Picture 1" descr="band_header.png"/>
+          <p:cNvPicPr>
+            <a:picLocks noChangeAspect="1"/>
+          </p:cNvPicPr>
+          <p:nvPr/>
+        </p:nvPicPr>
+        <p:blipFill>
+          <a:blip r:embed="rId2"/>
+          <a:stretch>
+            <a:fillRect/>
+          </a:stretch>
+        </p:blipFill>
+        <p:spPr>
+          <a:xfrm>
+            <a:off x="0" y="0"/>
+            <a:ext cx="12191695" cy="786384"/>
+          </a:xfrm>
+          <a:prstGeom prst="rect">
+            <a:avLst/>
+          </a:prstGeom>
+        </p:spPr>
+      </p:pic>
+      <p:sp>
+        <p:nvSpPr>
+          <p:cNvPr id="3" name="TextBox 2"/>
+          <p:cNvSpPr txBox="1"/>
+          <p:nvPr/>
+        </p:nvSpPr>
+        <p:spPr>
+          <a:xfrm>
+            <a:off x="457200" y="73152"/>
+            <a:ext cx="10241280" cy="640080"/>
+          </a:xfrm>
+          <a:prstGeom prst="rect">
+            <a:avLst/>
+          </a:prstGeom>
+          <a:noFill/>
+        </p:spPr>
+        <p:txBody>
+          <a:bodyPr wrap="square" anchor="ctr" lIns="0" rIns="0" tIns="0" bIns="0">
+            <a:spAutoFit/>
+          </a:bodyPr>
+          <a:lstStyle/>
+          <a:p>
+            <a:pPr algn="l">
+              <a:spcAft>
+                <a:spcPts val="500"/>
+              </a:spcAft>
+            </a:pPr>
+            <a:r>
+              <a:rPr sz="2100" b="1">
+                <a:solidFill>
+                  <a:srgbClr val="FFFFFF"/>
+                </a:solidFill>
+                <a:latin typeface="Meiryo"/>
+                <a:ea typeface="Meiryo"/>
+              </a:rPr>
+              <a:t>4. スケジュールと次のステップ</a:t>
+            </a:r>
+          </a:p>
+        </p:txBody>
+      </p:sp>
+      <p:sp>
+        <p:nvSpPr>
+          <p:cNvPr id="4" name="TextBox 3"/>
+          <p:cNvSpPr txBox="1"/>
+          <p:nvPr/>
+        </p:nvSpPr>
+        <p:spPr>
+          <a:xfrm>
+            <a:off x="502920" y="896112"/>
+            <a:ext cx="11155680" cy="365760"/>
+          </a:xfrm>
+          <a:prstGeom prst="rect">
+            <a:avLst/>
+          </a:prstGeom>
+          <a:noFill/>
+        </p:spPr>
+        <p:txBody>
+          <a:bodyPr wrap="square" anchor="t" lIns="0" rIns="0" tIns="0" bIns="0">
+            <a:spAutoFit/>
+          </a:bodyPr>
+          <a:lstStyle/>
+          <a:p>
+            <a:pPr algn="l">
+              <a:spcAft>
+                <a:spcPts val="500"/>
+              </a:spcAft>
+            </a:pPr>
+            <a:r>
+              <a:rPr sz="1250" b="0">
+                <a:solidFill>
+                  <a:srgbClr val="5A626B"/>
+                </a:solidFill>
+                <a:latin typeface="Meiryo"/>
+                <a:ea typeface="Meiryo"/>
+              </a:rPr>
+              <a:t>2027年1月開始に向けた逆算スケジュールです</a:t>
+            </a:r>
+          </a:p>
+        </p:txBody>
+      </p:sp>
+      <p:sp>
+        <p:nvSpPr>
+          <p:cNvPr id="5" name="TextBox 4"/>
+          <p:cNvSpPr txBox="1"/>
+          <p:nvPr/>
+        </p:nvSpPr>
+        <p:spPr>
+          <a:xfrm>
+            <a:off x="4727448" y="6547104"/>
+            <a:ext cx="2743200" cy="256032"/>
+          </a:xfrm>
+          <a:prstGeom prst="rect">
+            <a:avLst/>
+          </a:prstGeom>
+          <a:noFill/>
+        </p:spPr>
+        <p:txBody>
+          <a:bodyPr wrap="square" anchor="t" lIns="0" rIns="0" tIns="0" bIns="0">
+            <a:spAutoFit/>
+          </a:bodyPr>
+          <a:lstStyle/>
+          <a:p>
+            <a:pPr algn="ctr">
+              <a:spcAft>
+                <a:spcPts val="500"/>
+              </a:spcAft>
+            </a:pPr>
+            <a:r>
+              <a:rPr sz="800" b="0">
+                <a:solidFill>
+                  <a:srgbClr val="8E949B"/>
+                </a:solidFill>
+                <a:latin typeface="Meiryo"/>
+                <a:ea typeface="Meiryo"/>
+              </a:rPr>
+              <a:t>© TSUBURAYA PRODUCTIONS</a:t>
+            </a:r>
+          </a:p>
+        </p:txBody>
+      </p:sp>
+      <p:sp>
+        <p:nvSpPr>
+          <p:cNvPr id="6" name="TextBox 5"/>
+          <p:cNvSpPr txBox="1"/>
+          <p:nvPr/>
+        </p:nvSpPr>
+        <p:spPr>
+          <a:xfrm>
+            <a:off x="9372600" y="6492240"/>
+            <a:ext cx="2011680" cy="274320"/>
+          </a:xfrm>
+          <a:prstGeom prst="rect">
+            <a:avLst/>
+          </a:prstGeom>
+          <a:noFill/>
+        </p:spPr>
+        <p:txBody>
+          <a:bodyPr wrap="square" anchor="t" lIns="0" rIns="0" tIns="0" bIns="0">
+            <a:spAutoFit/>
+          </a:bodyPr>
+          <a:lstStyle/>
+          <a:p>
+            <a:pPr algn="r">
+              <a:spcAft>
+                <a:spcPts val="500"/>
+              </a:spcAft>
+            </a:pPr>
+            <a:r>
+              <a:rPr sz="1000" b="1">
+                <a:solidFill>
+                  <a:srgbClr val="C00000"/>
+                </a:solidFill>
+                <a:latin typeface="Meiryo"/>
+                <a:ea typeface="Meiryo"/>
+              </a:rPr>
+              <a:t>Strictly Confidential</a:t>
+            </a:r>
+          </a:p>
+        </p:txBody>
+      </p:sp>
+      <p:sp>
+        <p:nvSpPr>
+          <p:cNvPr id="7" name="TextBox 6"/>
+          <p:cNvSpPr txBox="1"/>
+          <p:nvPr/>
+        </p:nvSpPr>
+        <p:spPr>
+          <a:xfrm>
+            <a:off x="11521440" y="6492240"/>
+            <a:ext cx="457200" cy="274320"/>
+          </a:xfrm>
+          <a:prstGeom prst="rect">
+            <a:avLst/>
+          </a:prstGeom>
+          <a:noFill/>
+        </p:spPr>
+        <p:txBody>
+          <a:bodyPr wrap="square" anchor="t" lIns="0" rIns="0" tIns="0" bIns="0">
+            <a:spAutoFit/>
+          </a:bodyPr>
+          <a:lstStyle/>
+          <a:p>
+            <a:pPr algn="r">
+              <a:spcAft>
+                <a:spcPts val="500"/>
+              </a:spcAft>
+            </a:pPr>
+            <a:r>
+              <a:rPr sz="1000" b="0">
+                <a:solidFill>
+                  <a:srgbClr val="8E949B"/>
+                </a:solidFill>
+                <a:latin typeface="Meiryo"/>
+                <a:ea typeface="Meiryo"/>
+              </a:rPr>
+              <a:t>11</a:t>
             </a:r>
           </a:p>
         </p:txBody>
@@ -7503,7 +8345,7 @@
                 <a:latin typeface="Meiryo"/>
                 <a:ea typeface="Meiryo"/>
               </a:rPr>
-              <a:t>3. ご提供価格(ソフトバンク様特別プラン)</a:t>
+              <a:t>2. 連絡体制と回答リードタイム</a:t>
             </a:r>
           </a:p>
         </p:txBody>
@@ -7543,7 +8385,7 @@
                 <a:latin typeface="Meiryo"/>
                 <a:ea typeface="Meiryo"/>
               </a:rPr>
-              <a:t>通常販売価格から大幅な特別価格でご提供します。本特別価格は年間契約+最低開催数保証のご締結を前提とした本件限りの条件です</a:t>
+              <a:t>貴社の取りまとめ窓口と当社の総合窓口を1対1でつなぎ、当社内で用件別に振り分けます</a:t>
             </a:r>
           </a:p>
         </p:txBody>
@@ -7668,706 +8510,22 @@
           </a:p>
         </p:txBody>
       </p:sp>
-      <p:graphicFrame>
-        <p:nvGraphicFramePr>
-          <p:cNvPr id="8" name="Table 7"/>
-          <p:cNvGraphicFramePr>
-            <a:graphicFrameLocks noGrp="1"/>
-          </p:cNvGraphicFramePr>
-          <p:nvPr/>
-        </p:nvGraphicFramePr>
-        <p:xfrm>
-          <a:off x="640080" y="1417320"/>
-          <a:ext cx="6309358" cy="2194560"/>
-        </p:xfrm>
-        <a:graphic>
-          <a:graphicData uri="http://schemas.openxmlformats.org/drawingml/2006/table">
-            <a:tbl>
-              <a:tblPr firstRow="1" bandRow="1">
-                <a:tableStyleId>{5C22544A-7EE6-4342-B048-85BDC9FD1C3A}</a:tableStyleId>
-              </a:tblPr>
-              <a:tblGrid>
-                <a:gridCol w="2575248"/>
-                <a:gridCol w="1673911"/>
-                <a:gridCol w="2060199"/>
-              </a:tblGrid>
-              <a:tr h="548640">
-                <a:tc>
-                  <a:txBody>
-                    <a:bodyPr/>
-                    <a:lstStyle/>
-                    <a:p>
-                      <a:r>
-                        <a:rPr sz="1150" b="1">
-                          <a:solidFill>
-                            <a:srgbClr val="FFFFFF"/>
-                          </a:solidFill>
-                          <a:latin typeface="Meiryo"/>
-                          <a:ea typeface="Meiryo"/>
-                        </a:rPr>
-                        <a:t>キャラクターイベント稼働費</a:t>
-                      </a:r>
-                    </a:p>
-                  </a:txBody>
-                  <a:tcPr anchor="ctr" marL="73152" marR="73152">
-                    <a:solidFill>
-                      <a:srgbClr val="232278"/>
-                    </a:solidFill>
-                  </a:tcPr>
-                </a:tc>
-                <a:tc>
-                  <a:txBody>
-                    <a:bodyPr/>
-                    <a:lstStyle/>
-                    <a:p>
-                      <a:r>
-                        <a:rPr sz="1150" b="1">
-                          <a:solidFill>
-                            <a:srgbClr val="FFFFFF"/>
-                          </a:solidFill>
-                          <a:latin typeface="Meiryo"/>
-                          <a:ea typeface="Meiryo"/>
-                        </a:rPr>
-                        <a:t>通常販売価格</a:t>
-                      </a:r>
-                    </a:p>
-                  </a:txBody>
-                  <a:tcPr anchor="ctr" marL="73152" marR="73152">
-                    <a:solidFill>
-                      <a:srgbClr val="232278"/>
-                    </a:solidFill>
-                  </a:tcPr>
-                </a:tc>
-                <a:tc>
-                  <a:txBody>
-                    <a:bodyPr/>
-                    <a:lstStyle/>
-                    <a:p>
-                      <a:r>
-                        <a:rPr sz="1150" b="1">
-                          <a:solidFill>
-                            <a:srgbClr val="FFFFFF"/>
-                          </a:solidFill>
-                          <a:latin typeface="Meiryo"/>
-                          <a:ea typeface="Meiryo"/>
-                        </a:rPr>
-                        <a:t>SB様特別価格</a:t>
-                      </a:r>
-                    </a:p>
-                  </a:txBody>
-                  <a:tcPr anchor="ctr" marL="73152" marR="73152">
-                    <a:solidFill>
-                      <a:srgbClr val="232278"/>
-                    </a:solidFill>
-                  </a:tcPr>
-                </a:tc>
-              </a:tr>
-              <a:tr h="548640">
-                <a:tc>
-                  <a:txBody>
-                    <a:bodyPr/>
-                    <a:lstStyle/>
-                    <a:p>
-                      <a:r>
-                        <a:rPr sz="1150" b="1">
-                          <a:solidFill>
-                            <a:srgbClr val="1A1A1A"/>
-                          </a:solidFill>
-                          <a:latin typeface="Meiryo"/>
-                          <a:ea typeface="Meiryo"/>
-                        </a:rPr>
-                        <a:t>1日稼働(1日最大5回公演)</a:t>
-                      </a:r>
-                    </a:p>
-                  </a:txBody>
-                  <a:tcPr anchor="ctr" marL="73152" marR="73152">
-                    <a:solidFill>
-                      <a:srgbClr val="FFFFFF"/>
-                    </a:solidFill>
-                  </a:tcPr>
-                </a:tc>
-                <a:tc>
-                  <a:txBody>
-                    <a:bodyPr/>
-                    <a:lstStyle/>
-                    <a:p>
-                      <a:r>
-                        <a:rPr sz="1150" b="0">
-                          <a:solidFill>
-                            <a:srgbClr val="1A1A1A"/>
-                          </a:solidFill>
-                          <a:latin typeface="Meiryo"/>
-                          <a:ea typeface="Meiryo"/>
-                        </a:rPr>
-                        <a:t>225,000円/日</a:t>
-                      </a:r>
-                    </a:p>
-                  </a:txBody>
-                  <a:tcPr anchor="ctr" marL="73152" marR="73152">
-                    <a:solidFill>
-                      <a:srgbClr val="FFFFFF"/>
-                    </a:solidFill>
-                  </a:tcPr>
-                </a:tc>
-                <a:tc>
-                  <a:txBody>
-                    <a:bodyPr/>
-                    <a:lstStyle/>
-                    <a:p>
-                      <a:r>
-                        <a:rPr sz="1150" b="1">
-                          <a:solidFill>
-                            <a:srgbClr val="C00000"/>
-                          </a:solidFill>
-                          <a:latin typeface="Meiryo"/>
-                          <a:ea typeface="Meiryo"/>
-                        </a:rPr>
-                        <a:t>100,000円/日(▲55.6%)</a:t>
-                      </a:r>
-                    </a:p>
-                  </a:txBody>
-                  <a:tcPr anchor="ctr" marL="73152" marR="73152">
-                    <a:solidFill>
-                      <a:srgbClr val="FFFFFF"/>
-                    </a:solidFill>
-                  </a:tcPr>
-                </a:tc>
-              </a:tr>
-              <a:tr h="548640">
-                <a:tc>
-                  <a:txBody>
-                    <a:bodyPr/>
-                    <a:lstStyle/>
-                    <a:p>
-                      <a:r>
-                        <a:rPr sz="1150" b="1">
-                          <a:solidFill>
-                            <a:srgbClr val="1A1A1A"/>
-                          </a:solidFill>
-                          <a:latin typeface="Meiryo"/>
-                          <a:ea typeface="Meiryo"/>
-                        </a:rPr>
-                        <a:t>土日2日間(1開催)</a:t>
-                      </a:r>
-                    </a:p>
-                  </a:txBody>
-                  <a:tcPr anchor="ctr" marL="73152" marR="73152">
-                    <a:solidFill>
-                      <a:srgbClr val="F2F4F6"/>
-                    </a:solidFill>
-                  </a:tcPr>
-                </a:tc>
-                <a:tc>
-                  <a:txBody>
-                    <a:bodyPr/>
-                    <a:lstStyle/>
-                    <a:p>
-                      <a:r>
-                        <a:rPr sz="1150" b="0">
-                          <a:solidFill>
-                            <a:srgbClr val="1A1A1A"/>
-                          </a:solidFill>
-                          <a:latin typeface="Meiryo"/>
-                          <a:ea typeface="Meiryo"/>
-                        </a:rPr>
-                        <a:t>450,000円</a:t>
-                      </a:r>
-                    </a:p>
-                  </a:txBody>
-                  <a:tcPr anchor="ctr" marL="73152" marR="73152">
-                    <a:solidFill>
-                      <a:srgbClr val="F2F4F6"/>
-                    </a:solidFill>
-                  </a:tcPr>
-                </a:tc>
-                <a:tc>
-                  <a:txBody>
-                    <a:bodyPr/>
-                    <a:lstStyle/>
-                    <a:p>
-                      <a:r>
-                        <a:rPr sz="1150" b="1">
-                          <a:solidFill>
-                            <a:srgbClr val="C00000"/>
-                          </a:solidFill>
-                          <a:latin typeface="Meiryo"/>
-                          <a:ea typeface="Meiryo"/>
-                        </a:rPr>
-                        <a:t>200,000円</a:t>
-                      </a:r>
-                    </a:p>
-                  </a:txBody>
-                  <a:tcPr anchor="ctr" marL="73152" marR="73152">
-                    <a:solidFill>
-                      <a:srgbClr val="F2F4F6"/>
-                    </a:solidFill>
-                  </a:tcPr>
-                </a:tc>
-              </a:tr>
-              <a:tr h="548640">
-                <a:tc>
-                  <a:txBody>
-                    <a:bodyPr/>
-                    <a:lstStyle/>
-                    <a:p>
-                      <a:r>
-                        <a:rPr sz="1150" b="1">
-                          <a:solidFill>
-                            <a:srgbClr val="1A1A1A"/>
-                          </a:solidFill>
-                          <a:latin typeface="Meiryo"/>
-                          <a:ea typeface="Meiryo"/>
-                        </a:rPr>
-                        <a:t>3連休通し(3日間)</a:t>
-                      </a:r>
-                    </a:p>
-                  </a:txBody>
-                  <a:tcPr anchor="ctr" marL="73152" marR="73152">
-                    <a:solidFill>
-                      <a:srgbClr val="FFFFFF"/>
-                    </a:solidFill>
-                  </a:tcPr>
-                </a:tc>
-                <a:tc>
-                  <a:txBody>
-                    <a:bodyPr/>
-                    <a:lstStyle/>
-                    <a:p>
-                      <a:r>
-                        <a:rPr sz="1150" b="0">
-                          <a:solidFill>
-                            <a:srgbClr val="1A1A1A"/>
-                          </a:solidFill>
-                          <a:latin typeface="Meiryo"/>
-                          <a:ea typeface="Meiryo"/>
-                        </a:rPr>
-                        <a:t>675,000円</a:t>
-                      </a:r>
-                    </a:p>
-                  </a:txBody>
-                  <a:tcPr anchor="ctr" marL="73152" marR="73152">
-                    <a:solidFill>
-                      <a:srgbClr val="FFFFFF"/>
-                    </a:solidFill>
-                  </a:tcPr>
-                </a:tc>
-                <a:tc>
-                  <a:txBody>
-                    <a:bodyPr/>
-                    <a:lstStyle/>
-                    <a:p>
-                      <a:r>
-                        <a:rPr sz="1150" b="1">
-                          <a:solidFill>
-                            <a:srgbClr val="C00000"/>
-                          </a:solidFill>
-                          <a:latin typeface="Meiryo"/>
-                          <a:ea typeface="Meiryo"/>
-                        </a:rPr>
-                        <a:t>300,000円</a:t>
-                      </a:r>
-                    </a:p>
-                  </a:txBody>
-                  <a:tcPr anchor="ctr" marL="73152" marR="73152">
-                    <a:solidFill>
-                      <a:srgbClr val="FFFFFF"/>
-                    </a:solidFill>
-                  </a:tcPr>
-                </a:tc>
-              </a:tr>
-            </a:tbl>
-          </a:graphicData>
-        </a:graphic>
-      </p:graphicFrame>
-      <p:sp>
-        <p:nvSpPr>
-          <p:cNvPr id="9" name="TextBox 8"/>
-          <p:cNvSpPr txBox="1"/>
+      <p:sp>
+        <p:nvSpPr>
+          <p:cNvPr id="8" name="Rounded Rectangle 7"/>
+          <p:cNvSpPr/>
           <p:nvPr/>
         </p:nvSpPr>
         <p:spPr>
           <a:xfrm>
-            <a:off x="640080" y="3703320"/>
-            <a:ext cx="6309360" cy="1097280"/>
+            <a:off x="4023360" y="1463040"/>
+            <a:ext cx="4114800" cy="640080"/>
           </a:xfrm>
-          <a:prstGeom prst="rect">
+          <a:prstGeom prst="roundRect">
             <a:avLst/>
           </a:prstGeom>
-          <a:noFill/>
-        </p:spPr>
-        <p:txBody>
-          <a:bodyPr wrap="square" anchor="t" lIns="0" rIns="0" tIns="0" bIns="0">
-            <a:spAutoFit/>
-          </a:bodyPr>
-          <a:lstStyle/>
-          <a:p>
-            <a:pPr algn="l">
-              <a:spcAft>
-                <a:spcPts val="300"/>
-              </a:spcAft>
-            </a:pPr>
-            <a:r>
-              <a:rPr sz="1050" b="0">
-                <a:solidFill>
-                  <a:srgbClr val="5A626B"/>
-                </a:solidFill>
-                <a:latin typeface="Meiryo"/>
-                <a:ea typeface="Meiryo"/>
-              </a:rPr>
-              <a:t>特別価格の内訳(1日):キャラクター使用料 40,000円/担当 35,000円/スーツアクター 25,000円</a:t>
-            </a:r>
-          </a:p>
-          <a:p>
-            <a:pPr algn="l">
-              <a:spcAft>
-                <a:spcPts val="300"/>
-              </a:spcAft>
-            </a:pPr>
-            <a:r>
-              <a:rPr sz="1050" b="0">
-                <a:solidFill>
-                  <a:srgbClr val="5A626B"/>
-                </a:solidFill>
-                <a:latin typeface="Meiryo"/>
-                <a:ea typeface="Meiryo"/>
-              </a:rPr>
-              <a:t>通常販売価格は同一スコープ(キャラクター使用料+担当+アクター・5回公演対応)での当社標準価格です</a:t>
-            </a:r>
-          </a:p>
-        </p:txBody>
-      </p:sp>
-      <p:graphicFrame>
-        <p:nvGraphicFramePr>
-          <p:cNvPr id="10" name="Table 9"/>
-          <p:cNvGraphicFramePr>
-            <a:graphicFrameLocks noGrp="1"/>
-          </p:cNvGraphicFramePr>
-          <p:nvPr/>
-        </p:nvGraphicFramePr>
-        <p:xfrm>
-          <a:off x="7223760" y="1417320"/>
-          <a:ext cx="4297679" cy="3291839"/>
-        </p:xfrm>
-        <a:graphic>
-          <a:graphicData uri="http://schemas.openxmlformats.org/drawingml/2006/table">
-            <a:tbl>
-              <a:tblPr firstRow="1" bandRow="1">
-                <a:tableStyleId>{5C22544A-7EE6-4342-B048-85BDC9FD1C3A}</a:tableStyleId>
-              </a:tblPr>
-              <a:tblGrid>
-                <a:gridCol w="2079522"/>
-                <a:gridCol w="2218157"/>
-              </a:tblGrid>
-              <a:tr h="548639">
-                <a:tc>
-                  <a:txBody>
-                    <a:bodyPr/>
-                    <a:lstStyle/>
-                    <a:p>
-                      <a:r>
-                        <a:rPr sz="1100" b="1">
-                          <a:solidFill>
-                            <a:srgbClr val="FFFFFF"/>
-                          </a:solidFill>
-                          <a:latin typeface="Meiryo"/>
-                          <a:ea typeface="Meiryo"/>
-                        </a:rPr>
-                        <a:t>その他の費目</a:t>
-                      </a:r>
-                    </a:p>
-                  </a:txBody>
-                  <a:tcPr anchor="ctr" marL="73152" marR="73152">
-                    <a:solidFill>
-                      <a:srgbClr val="232278"/>
-                    </a:solidFill>
-                  </a:tcPr>
-                </a:tc>
-                <a:tc>
-                  <a:txBody>
-                    <a:bodyPr/>
-                    <a:lstStyle/>
-                    <a:p>
-                      <a:r>
-                        <a:rPr sz="1100" b="1">
-                          <a:solidFill>
-                            <a:srgbClr val="FFFFFF"/>
-                          </a:solidFill>
-                          <a:latin typeface="Meiryo"/>
-                          <a:ea typeface="Meiryo"/>
-                        </a:rPr>
-                        <a:t>金額</a:t>
-                      </a:r>
-                    </a:p>
-                  </a:txBody>
-                  <a:tcPr anchor="ctr" marL="73152" marR="73152">
-                    <a:solidFill>
-                      <a:srgbClr val="232278"/>
-                    </a:solidFill>
-                  </a:tcPr>
-                </a:tc>
-              </a:tr>
-              <a:tr h="548639">
-                <a:tc>
-                  <a:txBody>
-                    <a:bodyPr/>
-                    <a:lstStyle/>
-                    <a:p>
-                      <a:r>
-                        <a:rPr sz="1100" b="1">
-                          <a:solidFill>
-                            <a:srgbClr val="1A1A1A"/>
-                          </a:solidFill>
-                          <a:latin typeface="Meiryo"/>
-                          <a:ea typeface="Meiryo"/>
-                        </a:rPr>
-                        <a:t>年間IP使用料</a:t>
-                      </a:r>
-                    </a:p>
-                  </a:txBody>
-                  <a:tcPr anchor="ctr" marL="73152" marR="73152">
-                    <a:solidFill>
-                      <a:srgbClr val="FFFFFF"/>
-                    </a:solidFill>
-                  </a:tcPr>
-                </a:tc>
-                <a:tc>
-                  <a:txBody>
-                    <a:bodyPr/>
-                    <a:lstStyle/>
-                    <a:p>
-                      <a:r>
-                        <a:rPr sz="1100" b="0">
-                          <a:solidFill>
-                            <a:srgbClr val="1A1A1A"/>
-                          </a:solidFill>
-                          <a:latin typeface="Meiryo"/>
-                          <a:ea typeface="Meiryo"/>
-                        </a:rPr>
-                        <a:t>2,000万円/年</a:t>
-                      </a:r>
-                    </a:p>
-                  </a:txBody>
-                  <a:tcPr anchor="ctr" marL="73152" marR="73152">
-                    <a:solidFill>
-                      <a:srgbClr val="FFFFFF"/>
-                    </a:solidFill>
-                  </a:tcPr>
-                </a:tc>
-              </a:tr>
-              <a:tr h="548639">
-                <a:tc>
-                  <a:txBody>
-                    <a:bodyPr/>
-                    <a:lstStyle/>
-                    <a:p>
-                      <a:r>
-                        <a:rPr sz="1100" b="1">
-                          <a:solidFill>
-                            <a:srgbClr val="1A1A1A"/>
-                          </a:solidFill>
-                          <a:latin typeface="Meiryo"/>
-                          <a:ea typeface="Meiryo"/>
-                        </a:rPr>
-                        <a:t>作成許諾ロイヤリティ</a:t>
-                      </a:r>
-                    </a:p>
-                  </a:txBody>
-                  <a:tcPr anchor="ctr" marL="73152" marR="73152">
-                    <a:solidFill>
-                      <a:srgbClr val="F2F4F6"/>
-                    </a:solidFill>
-                  </a:tcPr>
-                </a:tc>
-                <a:tc>
-                  <a:txBody>
-                    <a:bodyPr/>
-                    <a:lstStyle/>
-                    <a:p>
-                      <a:r>
-                        <a:rPr sz="1100" b="0">
-                          <a:solidFill>
-                            <a:srgbClr val="1A1A1A"/>
-                          </a:solidFill>
-                          <a:latin typeface="Meiryo"/>
-                          <a:ea typeface="Meiryo"/>
-                        </a:rPr>
-                        <a:t>作成費用の20%</a:t>
-                      </a:r>
-                    </a:p>
-                  </a:txBody>
-                  <a:tcPr anchor="ctr" marL="73152" marR="73152">
-                    <a:solidFill>
-                      <a:srgbClr val="F2F4F6"/>
-                    </a:solidFill>
-                  </a:tcPr>
-                </a:tc>
-              </a:tr>
-              <a:tr h="548639">
-                <a:tc>
-                  <a:txBody>
-                    <a:bodyPr/>
-                    <a:lstStyle/>
-                    <a:p>
-                      <a:r>
-                        <a:rPr sz="1100" b="1">
-                          <a:solidFill>
-                            <a:srgbClr val="1A1A1A"/>
-                          </a:solidFill>
-                          <a:latin typeface="Meiryo"/>
-                          <a:ea typeface="Meiryo"/>
-                        </a:rPr>
-                        <a:t>フル運営オプション</a:t>
-                      </a:r>
-                    </a:p>
-                  </a:txBody>
-                  <a:tcPr anchor="ctr" marL="73152" marR="73152">
-                    <a:solidFill>
-                      <a:srgbClr val="FFFFFF"/>
-                    </a:solidFill>
-                  </a:tcPr>
-                </a:tc>
-                <a:tc>
-                  <a:txBody>
-                    <a:bodyPr/>
-                    <a:lstStyle/>
-                    <a:p>
-                      <a:r>
-                        <a:rPr sz="1100" b="0">
-                          <a:solidFill>
-                            <a:srgbClr val="1A1A1A"/>
-                          </a:solidFill>
-                          <a:latin typeface="Meiryo"/>
-                          <a:ea typeface="Meiryo"/>
-                        </a:rPr>
-                        <a:t>+220,000円/日</a:t>
-                      </a:r>
-                    </a:p>
-                  </a:txBody>
-                  <a:tcPr anchor="ctr" marL="73152" marR="73152">
-                    <a:solidFill>
-                      <a:srgbClr val="FFFFFF"/>
-                    </a:solidFill>
-                  </a:tcPr>
-                </a:tc>
-              </a:tr>
-              <a:tr h="548639">
-                <a:tc>
-                  <a:txBody>
-                    <a:bodyPr/>
-                    <a:lstStyle/>
-                    <a:p>
-                      <a:r>
-                        <a:rPr sz="1100" b="1">
-                          <a:solidFill>
-                            <a:srgbClr val="1A1A1A"/>
-                          </a:solidFill>
-                          <a:latin typeface="Meiryo"/>
-                          <a:ea typeface="Meiryo"/>
-                        </a:rPr>
-                        <a:t>現場諸経費</a:t>
-                      </a:r>
-                    </a:p>
-                  </a:txBody>
-                  <a:tcPr anchor="ctr" marL="73152" marR="73152">
-                    <a:solidFill>
-                      <a:srgbClr val="F2F4F6"/>
-                    </a:solidFill>
-                  </a:tcPr>
-                </a:tc>
-                <a:tc>
-                  <a:txBody>
-                    <a:bodyPr/>
-                    <a:lstStyle/>
-                    <a:p>
-                      <a:r>
-                        <a:rPr sz="1100" b="0">
-                          <a:solidFill>
-                            <a:srgbClr val="1A1A1A"/>
-                          </a:solidFill>
-                          <a:latin typeface="Meiryo"/>
-                          <a:ea typeface="Meiryo"/>
-                        </a:rPr>
-                        <a:t>20,000円/日</a:t>
-                      </a:r>
-                    </a:p>
-                  </a:txBody>
-                  <a:tcPr anchor="ctr" marL="73152" marR="73152">
-                    <a:solidFill>
-                      <a:srgbClr val="F2F4F6"/>
-                    </a:solidFill>
-                  </a:tcPr>
-                </a:tc>
-              </a:tr>
-              <a:tr h="548644">
-                <a:tc>
-                  <a:txBody>
-                    <a:bodyPr/>
-                    <a:lstStyle/>
-                    <a:p>
-                      <a:r>
-                        <a:rPr sz="1100" b="1">
-                          <a:solidFill>
-                            <a:srgbClr val="1A1A1A"/>
-                          </a:solidFill>
-                          <a:latin typeface="Meiryo"/>
-                          <a:ea typeface="Meiryo"/>
-                        </a:rPr>
-                        <a:t>実費</a:t>
-                      </a:r>
-                    </a:p>
-                  </a:txBody>
-                  <a:tcPr anchor="ctr" marL="73152" marR="73152">
-                    <a:solidFill>
-                      <a:srgbClr val="FFFFFF"/>
-                    </a:solidFill>
-                  </a:tcPr>
-                </a:tc>
-                <a:tc>
-                  <a:txBody>
-                    <a:bodyPr/>
-                    <a:lstStyle/>
-                    <a:p>
-                      <a:r>
-                        <a:rPr sz="1100" b="0">
-                          <a:solidFill>
-                            <a:srgbClr val="1A1A1A"/>
-                          </a:solidFill>
-                          <a:latin typeface="Meiryo"/>
-                          <a:ea typeface="Meiryo"/>
-                        </a:rPr>
-                        <a:t>交通運搬・宿泊・スーツ送料(基準料金表)</a:t>
-                      </a:r>
-                    </a:p>
-                  </a:txBody>
-                  <a:tcPr anchor="ctr" marL="73152" marR="73152">
-                    <a:solidFill>
-                      <a:srgbClr val="FFFFFF"/>
-                    </a:solidFill>
-                  </a:tcPr>
-                </a:tc>
-              </a:tr>
-            </a:tbl>
-          </a:graphicData>
-        </a:graphic>
-      </p:graphicFrame>
-      <p:sp>
-        <p:nvSpPr>
-          <p:cNvPr id="11" name="Rounded Rectangle 10"/>
-          <p:cNvSpPr/>
-          <p:nvPr/>
-        </p:nvSpPr>
-        <p:spPr>
-          <a:xfrm>
-            <a:off x="640080" y="4892040"/>
-            <a:ext cx="10881360" cy="1188720"/>
-          </a:xfrm>
-          <a:prstGeom prst="roundRect">
-            <a:avLst>
-              <a:gd name="adj" fmla="val 7000"/>
-            </a:avLst>
-          </a:prstGeom>
           <a:solidFill>
-            <a:srgbClr val="F2F4F6"/>
+            <a:srgbClr val="232278"/>
           </a:solidFill>
           <a:ln>
             <a:noFill/>
@@ -8398,14 +8556,14 @@
       </p:sp>
       <p:sp>
         <p:nvSpPr>
-          <p:cNvPr id="12" name="TextBox 11"/>
+          <p:cNvPr id="9" name="TextBox 8"/>
           <p:cNvSpPr txBox="1"/>
           <p:nvPr/>
         </p:nvSpPr>
         <p:spPr>
           <a:xfrm>
-            <a:off x="914400" y="5029200"/>
-            <a:ext cx="10332720" cy="1005840"/>
+            <a:off x="4023360" y="1463040"/>
+            <a:ext cx="4114800" cy="640080"/>
           </a:xfrm>
           <a:prstGeom prst="rect">
             <a:avLst/>
@@ -8413,42 +8571,611 @@
           <a:noFill/>
         </p:spPr>
         <p:txBody>
+          <a:bodyPr wrap="square" anchor="ctr" lIns="0" rIns="0" tIns="0" bIns="0">
+            <a:spAutoFit/>
+          </a:bodyPr>
+          <a:lstStyle/>
+          <a:p>
+            <a:pPr algn="ctr">
+              <a:spcAft>
+                <a:spcPts val="500"/>
+              </a:spcAft>
+            </a:pPr>
+            <a:r>
+              <a:rPr sz="1300" b="1">
+                <a:solidFill>
+                  <a:srgbClr val="FFFFFF"/>
+                </a:solidFill>
+                <a:latin typeface="Meiryo"/>
+                <a:ea typeface="Meiryo"/>
+              </a:rPr>
+              <a:t>ソフトバンク様 取りまとめ窓口(1部署)</a:t>
+            </a:r>
+          </a:p>
+        </p:txBody>
+      </p:sp>
+      <p:sp>
+        <p:nvSpPr>
+          <p:cNvPr id="10" name="TextBox 9"/>
+          <p:cNvSpPr txBox="1"/>
+          <p:nvPr/>
+        </p:nvSpPr>
+        <p:spPr>
+          <a:xfrm>
+            <a:off x="4023360" y="2148840"/>
+            <a:ext cx="4114800" cy="320040"/>
+          </a:xfrm>
+          <a:prstGeom prst="rect">
+            <a:avLst/>
+          </a:prstGeom>
+          <a:noFill/>
+        </p:spPr>
+        <p:txBody>
           <a:bodyPr wrap="square" anchor="t" lIns="0" rIns="0" tIns="0" bIns="0">
             <a:spAutoFit/>
           </a:bodyPr>
           <a:lstStyle/>
           <a:p>
-            <a:pPr algn="l">
+            <a:pPr algn="ctr">
               <a:spcAft>
-                <a:spcPts val="400"/>
+                <a:spcPts val="500"/>
               </a:spcAft>
             </a:pPr>
             <a:r>
-              <a:rPr sz="1250" b="1">
+              <a:rPr sz="1200" b="1">
                 <a:solidFill>
-                  <a:srgbClr val="C00000"/>
+                  <a:srgbClr val="5A626B"/>
                 </a:solidFill>
                 <a:latin typeface="Meiryo"/>
                 <a:ea typeface="Meiryo"/>
               </a:rPr>
-              <a:t>年間IP使用料に含まれるもの</a:t>
-            </a:r>
-          </a:p>
-          <a:p>
-            <a:pPr algn="l">
+              <a:t>↓ 連絡　↑ 回答</a:t>
+            </a:r>
+          </a:p>
+        </p:txBody>
+      </p:sp>
+      <p:sp>
+        <p:nvSpPr>
+          <p:cNvPr id="11" name="Rounded Rectangle 10"/>
+          <p:cNvSpPr/>
+          <p:nvPr/>
+        </p:nvSpPr>
+        <p:spPr>
+          <a:xfrm>
+            <a:off x="4023360" y="2468880"/>
+            <a:ext cx="4114800" cy="640080"/>
+          </a:xfrm>
+          <a:prstGeom prst="roundRect">
+            <a:avLst/>
+          </a:prstGeom>
+          <a:solidFill>
+            <a:srgbClr val="1F338C"/>
+          </a:solidFill>
+          <a:ln>
+            <a:noFill/>
+          </a:ln>
+          <a:effectLst/>
+        </p:spPr>
+        <p:style>
+          <a:lnRef idx="1">
+            <a:schemeClr val="accent1"/>
+          </a:lnRef>
+          <a:fillRef idx="3">
+            <a:schemeClr val="accent1"/>
+          </a:fillRef>
+          <a:effectRef idx="2">
+            <a:schemeClr val="accent1"/>
+          </a:effectRef>
+          <a:fontRef idx="minor">
+            <a:schemeClr val="lt1"/>
+          </a:fontRef>
+        </p:style>
+        <p:txBody>
+          <a:bodyPr rtlCol="0" anchor="ctr"/>
+          <a:lstStyle/>
+          <a:p>
+            <a:pPr algn="ctr"/>
+          </a:p>
+        </p:txBody>
+      </p:sp>
+      <p:sp>
+        <p:nvSpPr>
+          <p:cNvPr id="12" name="TextBox 11"/>
+          <p:cNvSpPr txBox="1"/>
+          <p:nvPr/>
+        </p:nvSpPr>
+        <p:spPr>
+          <a:xfrm>
+            <a:off x="4023360" y="2468880"/>
+            <a:ext cx="4114800" cy="640080"/>
+          </a:xfrm>
+          <a:prstGeom prst="rect">
+            <a:avLst/>
+          </a:prstGeom>
+          <a:noFill/>
+        </p:spPr>
+        <p:txBody>
+          <a:bodyPr wrap="square" anchor="ctr" lIns="0" rIns="0" tIns="0" bIns="0">
+            <a:spAutoFit/>
+          </a:bodyPr>
+          <a:lstStyle/>
+          <a:p>
+            <a:pPr algn="ctr">
               <a:spcAft>
-                <a:spcPts val="400"/>
+                <a:spcPts val="500"/>
               </a:spcAft>
             </a:pPr>
             <a:r>
-              <a:rPr sz="1150" b="0">
+              <a:rPr sz="1300" b="1">
                 <a:solidFill>
-                  <a:srgbClr val="1A1A1A"/>
+                  <a:srgbClr val="FFFFFF"/>
                 </a:solidFill>
                 <a:latin typeface="Meiryo"/>
                 <a:ea typeface="Meiryo"/>
               </a:rPr>
-              <a:t>店頭イベント・イベントキット・店頭訴求ツール・LP/Web・SNSでのIP利用、作成物の監修対応、8ヒーローの選択・切替、キャラクター素材・運営マニュアルの提供</a:t>
+              <a:t>円谷プロ 総合窓口(専用メーリングリスト)</a:t>
+            </a:r>
+          </a:p>
+        </p:txBody>
+      </p:sp>
+      <p:sp>
+        <p:nvSpPr>
+          <p:cNvPr id="13" name="TextBox 12"/>
+          <p:cNvSpPr txBox="1"/>
+          <p:nvPr/>
+        </p:nvSpPr>
+        <p:spPr>
+          <a:xfrm>
+            <a:off x="640080" y="3154680"/>
+            <a:ext cx="10881360" cy="320040"/>
+          </a:xfrm>
+          <a:prstGeom prst="rect">
+            <a:avLst/>
+          </a:prstGeom>
+          <a:noFill/>
+        </p:spPr>
+        <p:txBody>
+          <a:bodyPr wrap="square" anchor="t" lIns="0" rIns="0" tIns="0" bIns="0">
+            <a:spAutoFit/>
+          </a:bodyPr>
+          <a:lstStyle/>
+          <a:p>
+            <a:pPr algn="ctr">
+              <a:spcAft>
+                <a:spcPts val="500"/>
+              </a:spcAft>
+            </a:pPr>
+            <a:r>
+              <a:rPr sz="1100" b="0">
+                <a:solidFill>
+                  <a:srgbClr val="5A626B"/>
+                </a:solidFill>
+                <a:latin typeface="Meiryo"/>
+                <a:ea typeface="Meiryo"/>
+              </a:rPr>
+              <a:t>当社内で用件別に振り分け</a:t>
+            </a:r>
+          </a:p>
+        </p:txBody>
+      </p:sp>
+      <p:graphicFrame>
+        <p:nvGraphicFramePr>
+          <p:cNvPr id="14" name="Table 13"/>
+          <p:cNvGraphicFramePr>
+            <a:graphicFrameLocks noGrp="1"/>
+          </p:cNvGraphicFramePr>
+          <p:nvPr/>
+        </p:nvGraphicFramePr>
+        <p:xfrm>
+          <a:off x="640080" y="3520440"/>
+          <a:ext cx="10881360" cy="2514600"/>
+        </p:xfrm>
+        <a:graphic>
+          <a:graphicData uri="http://schemas.openxmlformats.org/drawingml/2006/table">
+            <a:tbl>
+              <a:tblPr firstRow="1" bandRow="1">
+                <a:tableStyleId>{5C22544A-7EE6-4342-B048-85BDC9FD1C3A}</a:tableStyleId>
+              </a:tblPr>
+              <a:tblGrid>
+                <a:gridCol w="2020824"/>
+                <a:gridCol w="5440680"/>
+                <a:gridCol w="3419856"/>
+              </a:tblGrid>
+              <a:tr h="502920">
+                <a:tc>
+                  <a:txBody>
+                    <a:bodyPr/>
+                    <a:lstStyle/>
+                    <a:p>
+                      <a:r>
+                        <a:rPr sz="1100" b="1">
+                          <a:solidFill>
+                            <a:srgbClr val="FFFFFF"/>
+                          </a:solidFill>
+                          <a:latin typeface="Meiryo"/>
+                          <a:ea typeface="Meiryo"/>
+                        </a:rPr>
+                        <a:t>窓口</a:t>
+                      </a:r>
+                    </a:p>
+                  </a:txBody>
+                  <a:tcPr anchor="ctr" marL="73152" marR="73152">
+                    <a:solidFill>
+                      <a:srgbClr val="232278"/>
+                    </a:solidFill>
+                  </a:tcPr>
+                </a:tc>
+                <a:tc>
+                  <a:txBody>
+                    <a:bodyPr/>
+                    <a:lstStyle/>
+                    <a:p>
+                      <a:r>
+                        <a:rPr sz="1100" b="1">
+                          <a:solidFill>
+                            <a:srgbClr val="FFFFFF"/>
+                          </a:solidFill>
+                          <a:latin typeface="Meiryo"/>
+                          <a:ea typeface="Meiryo"/>
+                        </a:rPr>
+                        <a:t>用件</a:t>
+                      </a:r>
+                    </a:p>
+                  </a:txBody>
+                  <a:tcPr anchor="ctr" marL="73152" marR="73152">
+                    <a:solidFill>
+                      <a:srgbClr val="232278"/>
+                    </a:solidFill>
+                  </a:tcPr>
+                </a:tc>
+                <a:tc>
+                  <a:txBody>
+                    <a:bodyPr/>
+                    <a:lstStyle/>
+                    <a:p>
+                      <a:r>
+                        <a:rPr sz="1100" b="1">
+                          <a:solidFill>
+                            <a:srgbClr val="FFFFFF"/>
+                          </a:solidFill>
+                          <a:latin typeface="Meiryo"/>
+                          <a:ea typeface="Meiryo"/>
+                        </a:rPr>
+                        <a:t>回答の目安</a:t>
+                      </a:r>
+                    </a:p>
+                  </a:txBody>
+                  <a:tcPr anchor="ctr" marL="73152" marR="73152">
+                    <a:solidFill>
+                      <a:srgbClr val="232278"/>
+                    </a:solidFill>
+                  </a:tcPr>
+                </a:tc>
+              </a:tr>
+              <a:tr h="502920">
+                <a:tc>
+                  <a:txBody>
+                    <a:bodyPr/>
+                    <a:lstStyle/>
+                    <a:p>
+                      <a:r>
+                        <a:rPr sz="1100" b="1">
+                          <a:solidFill>
+                            <a:srgbClr val="1A1A1A"/>
+                          </a:solidFill>
+                          <a:latin typeface="Meiryo"/>
+                          <a:ea typeface="Meiryo"/>
+                        </a:rPr>
+                        <a:t>① イベント実施</a:t>
+                      </a:r>
+                    </a:p>
+                  </a:txBody>
+                  <a:tcPr anchor="ctr" marL="73152" marR="73152">
+                    <a:solidFill>
+                      <a:srgbClr val="FFFFFF"/>
+                    </a:solidFill>
+                  </a:tcPr>
+                </a:tc>
+                <a:tc>
+                  <a:txBody>
+                    <a:bodyPr/>
+                    <a:lstStyle/>
+                    <a:p>
+                      <a:r>
+                        <a:rPr sz="1100" b="0">
+                          <a:solidFill>
+                            <a:srgbClr val="1A1A1A"/>
+                          </a:solidFill>
+                          <a:latin typeface="Meiryo"/>
+                          <a:ea typeface="Meiryo"/>
+                        </a:rPr>
+                        <a:t>開催申請(エリア・会場・日程)のバッティング確認/実施確認書の確認</a:t>
+                      </a:r>
+                    </a:p>
+                  </a:txBody>
+                  <a:tcPr anchor="ctr" marL="73152" marR="73152">
+                    <a:solidFill>
+                      <a:srgbClr val="FFFFFF"/>
+                    </a:solidFill>
+                  </a:tcPr>
+                </a:tc>
+                <a:tc>
+                  <a:txBody>
+                    <a:bodyPr/>
+                    <a:lstStyle/>
+                    <a:p>
+                      <a:r>
+                        <a:rPr sz="1100" b="0">
+                          <a:solidFill>
+                            <a:srgbClr val="1A1A1A"/>
+                          </a:solidFill>
+                          <a:latin typeface="Meiryo"/>
+                          <a:ea typeface="Meiryo"/>
+                        </a:rPr>
+                        <a:t>5営業日(前月1日までに確定)</a:t>
+                      </a:r>
+                    </a:p>
+                  </a:txBody>
+                  <a:tcPr anchor="ctr" marL="73152" marR="73152">
+                    <a:solidFill>
+                      <a:srgbClr val="FFFFFF"/>
+                    </a:solidFill>
+                  </a:tcPr>
+                </a:tc>
+              </a:tr>
+              <a:tr h="502920">
+                <a:tc>
+                  <a:txBody>
+                    <a:bodyPr/>
+                    <a:lstStyle/>
+                    <a:p>
+                      <a:r>
+                        <a:rPr sz="1100" b="1">
+                          <a:solidFill>
+                            <a:srgbClr val="1A1A1A"/>
+                          </a:solidFill>
+                          <a:latin typeface="Meiryo"/>
+                          <a:ea typeface="Meiryo"/>
+                        </a:rPr>
+                        <a:t>② 告知物</a:t>
+                      </a:r>
+                    </a:p>
+                  </a:txBody>
+                  <a:tcPr anchor="ctr" marL="73152" marR="73152">
+                    <a:solidFill>
+                      <a:srgbClr val="F2F4F6"/>
+                    </a:solidFill>
+                  </a:tcPr>
+                </a:tc>
+                <a:tc>
+                  <a:txBody>
+                    <a:bodyPr/>
+                    <a:lstStyle/>
+                    <a:p>
+                      <a:r>
+                        <a:rPr sz="1100" b="0">
+                          <a:solidFill>
+                            <a:srgbClr val="1A1A1A"/>
+                          </a:solidFill>
+                          <a:latin typeface="Meiryo"/>
+                          <a:ea typeface="Meiryo"/>
+                        </a:rPr>
+                        <a:t>告知物(KV・Web・チラシ等)の監修</a:t>
+                      </a:r>
+                    </a:p>
+                  </a:txBody>
+                  <a:tcPr anchor="ctr" marL="73152" marR="73152">
+                    <a:solidFill>
+                      <a:srgbClr val="F2F4F6"/>
+                    </a:solidFill>
+                  </a:tcPr>
+                </a:tc>
+                <a:tc>
+                  <a:txBody>
+                    <a:bodyPr/>
+                    <a:lstStyle/>
+                    <a:p>
+                      <a:r>
+                        <a:rPr sz="1100" b="0">
+                          <a:solidFill>
+                            <a:srgbClr val="1A1A1A"/>
+                          </a:solidFill>
+                          <a:latin typeface="Meiryo"/>
+                          <a:ea typeface="Meiryo"/>
+                        </a:rPr>
+                        <a:t>KV 3営業日/Web流用 1〜2営業日/チラシ+色校 1〜2営業日</a:t>
+                      </a:r>
+                    </a:p>
+                  </a:txBody>
+                  <a:tcPr anchor="ctr" marL="73152" marR="73152">
+                    <a:solidFill>
+                      <a:srgbClr val="F2F4F6"/>
+                    </a:solidFill>
+                  </a:tcPr>
+                </a:tc>
+              </a:tr>
+              <a:tr h="502920">
+                <a:tc>
+                  <a:txBody>
+                    <a:bodyPr/>
+                    <a:lstStyle/>
+                    <a:p>
+                      <a:r>
+                        <a:rPr sz="1100" b="1">
+                          <a:solidFill>
+                            <a:srgbClr val="1A1A1A"/>
+                          </a:solidFill>
+                          <a:latin typeface="Meiryo"/>
+                          <a:ea typeface="Meiryo"/>
+                        </a:rPr>
+                        <a:t>③ 制作物</a:t>
+                      </a:r>
+                    </a:p>
+                  </a:txBody>
+                  <a:tcPr anchor="ctr" marL="73152" marR="73152">
+                    <a:solidFill>
+                      <a:srgbClr val="FFFFFF"/>
+                    </a:solidFill>
+                  </a:tcPr>
+                </a:tc>
+                <a:tc>
+                  <a:txBody>
+                    <a:bodyPr/>
+                    <a:lstStyle/>
+                    <a:p>
+                      <a:r>
+                        <a:rPr sz="1100" b="0">
+                          <a:solidFill>
+                            <a:srgbClr val="1A1A1A"/>
+                          </a:solidFill>
+                          <a:latin typeface="Meiryo"/>
+                          <a:ea typeface="Meiryo"/>
+                        </a:rPr>
+                        <a:t>仮申請(制作可否)/ノベルティ・キット・その他制作物のデザイン監修</a:t>
+                      </a:r>
+                    </a:p>
+                  </a:txBody>
+                  <a:tcPr anchor="ctr" marL="73152" marR="73152">
+                    <a:solidFill>
+                      <a:srgbClr val="FFFFFF"/>
+                    </a:solidFill>
+                  </a:tcPr>
+                </a:tc>
+                <a:tc>
+                  <a:txBody>
+                    <a:bodyPr/>
+                    <a:lstStyle/>
+                    <a:p>
+                      <a:r>
+                        <a:rPr sz="1100" b="0">
+                          <a:solidFill>
+                            <a:srgbClr val="1A1A1A"/>
+                          </a:solidFill>
+                          <a:latin typeface="Meiryo"/>
+                          <a:ea typeface="Meiryo"/>
+                        </a:rPr>
+                        <a:t>仮申請 約5営業日/デザイン監修 5営業日</a:t>
+                      </a:r>
+                    </a:p>
+                  </a:txBody>
+                  <a:tcPr anchor="ctr" marL="73152" marR="73152">
+                    <a:solidFill>
+                      <a:srgbClr val="FFFFFF"/>
+                    </a:solidFill>
+                  </a:tcPr>
+                </a:tc>
+              </a:tr>
+              <a:tr h="502920">
+                <a:tc>
+                  <a:txBody>
+                    <a:bodyPr/>
+                    <a:lstStyle/>
+                    <a:p>
+                      <a:r>
+                        <a:rPr sz="1100" b="1">
+                          <a:solidFill>
+                            <a:srgbClr val="1A1A1A"/>
+                          </a:solidFill>
+                          <a:latin typeface="Meiryo"/>
+                          <a:ea typeface="Meiryo"/>
+                        </a:rPr>
+                        <a:t>④ 契約・精算</a:t>
+                      </a:r>
+                    </a:p>
+                  </a:txBody>
+                  <a:tcPr anchor="ctr" marL="73152" marR="73152">
+                    <a:solidFill>
+                      <a:srgbClr val="F2F4F6"/>
+                    </a:solidFill>
+                  </a:tcPr>
+                </a:tc>
+                <a:tc>
+                  <a:txBody>
+                    <a:bodyPr/>
+                    <a:lstStyle/>
+                    <a:p>
+                      <a:r>
+                        <a:rPr sz="1100" b="0">
+                          <a:solidFill>
+                            <a:srgbClr val="1A1A1A"/>
+                          </a:solidFill>
+                          <a:latin typeface="Meiryo"/>
+                          <a:ea typeface="Meiryo"/>
+                        </a:rPr>
+                        <a:t>発注・請求・最低保証の精算・実績報告</a:t>
+                      </a:r>
+                    </a:p>
+                  </a:txBody>
+                  <a:tcPr anchor="ctr" marL="73152" marR="73152">
+                    <a:solidFill>
+                      <a:srgbClr val="F2F4F6"/>
+                    </a:solidFill>
+                  </a:tcPr>
+                </a:tc>
+                <a:tc>
+                  <a:txBody>
+                    <a:bodyPr/>
+                    <a:lstStyle/>
+                    <a:p>
+                      <a:r>
+                        <a:rPr sz="1100" b="0">
+                          <a:solidFill>
+                            <a:srgbClr val="1A1A1A"/>
+                          </a:solidFill>
+                          <a:latin typeface="Meiryo"/>
+                          <a:ea typeface="Meiryo"/>
+                        </a:rPr>
+                        <a:t>随時</a:t>
+                      </a:r>
+                    </a:p>
+                  </a:txBody>
+                  <a:tcPr anchor="ctr" marL="73152" marR="73152">
+                    <a:solidFill>
+                      <a:srgbClr val="F2F4F6"/>
+                    </a:solidFill>
+                  </a:tcPr>
+                </a:tc>
+              </a:tr>
+            </a:tbl>
+          </a:graphicData>
+        </a:graphic>
+      </p:graphicFrame>
+      <p:sp>
+        <p:nvSpPr>
+          <p:cNvPr id="15" name="TextBox 14"/>
+          <p:cNvSpPr txBox="1"/>
+          <p:nvPr/>
+        </p:nvSpPr>
+        <p:spPr>
+          <a:xfrm>
+            <a:off x="640080" y="6126480"/>
+            <a:ext cx="10881360" cy="365760"/>
+          </a:xfrm>
+          <a:prstGeom prst="rect">
+            <a:avLst/>
+          </a:prstGeom>
+          <a:noFill/>
+        </p:spPr>
+        <p:txBody>
+          <a:bodyPr wrap="square" anchor="t" lIns="0" rIns="0" tIns="0" bIns="0">
+            <a:spAutoFit/>
+          </a:bodyPr>
+          <a:lstStyle/>
+          <a:p>
+            <a:pPr algn="l">
+              <a:spcAft>
+                <a:spcPts val="500"/>
+              </a:spcAft>
+            </a:pPr>
+            <a:r>
+              <a:rPr sz="1050" b="0">
+                <a:solidFill>
+                  <a:srgbClr val="5A626B"/>
+                </a:solidFill>
+                <a:latin typeface="Meiryo"/>
+                <a:ea typeface="Meiryo"/>
+              </a:rPr>
+              <a:t>※ 当社側メーリングリストは契約締結後にご案内します。開催当日の緊急連絡は会場ごとの当社担当(チーフスタッフ)と貴社運営ディレクター間で直接行います。</a:t>
             </a:r>
           </a:p>
         </p:txBody>
@@ -8530,7 +9257,7 @@
                 <a:latin typeface="Meiryo"/>
                 <a:ea typeface="Meiryo"/>
               </a:rPr>
-              <a:t>3. 実施の成立条件</a:t>
+              <a:t>3. ご提供価格(ソフトバンク様特別プラン)</a:t>
             </a:r>
           </a:p>
         </p:txBody>
@@ -8570,7 +9297,7 @@
                 <a:latin typeface="Meiryo"/>
                 <a:ea typeface="Meiryo"/>
               </a:rPr>
-              <a:t>特別価格の前提となる条件です。契約協議にて詳細を調整させてください</a:t>
+              <a:t>通常販売価格から大幅な特別価格でご提供します。本特別価格は年間契約+最低開催数保証のご締結を前提とした本件限りの条件です</a:t>
             </a:r>
           </a:p>
         </p:txBody>
@@ -8705,7 +9432,7 @@
         </p:nvGraphicFramePr>
         <p:xfrm>
           <a:off x="640080" y="1417320"/>
-          <a:ext cx="10881360" cy="4535424"/>
+          <a:ext cx="6309358" cy="2194560"/>
         </p:xfrm>
         <a:graphic>
           <a:graphicData uri="http://schemas.openxmlformats.org/drawingml/2006/table">
@@ -8714,25 +9441,25 @@
                 <a:tableStyleId>{5C22544A-7EE6-4342-B048-85BDC9FD1C3A}</a:tableStyleId>
               </a:tblPr>
               <a:tblGrid>
-                <a:gridCol w="544068"/>
-                <a:gridCol w="2720340"/>
-                <a:gridCol w="7616952"/>
+                <a:gridCol w="2575248"/>
+                <a:gridCol w="1673911"/>
+                <a:gridCol w="2060199"/>
               </a:tblGrid>
-              <a:tr h="566928">
-                <a:tc>
-                  <a:txBody>
-                    <a:bodyPr/>
-                    <a:lstStyle/>
-                    <a:p>
-                      <a:r>
-                        <a:rPr sz="1100" b="1">
+              <a:tr h="548640">
+                <a:tc>
+                  <a:txBody>
+                    <a:bodyPr/>
+                    <a:lstStyle/>
+                    <a:p>
+                      <a:r>
+                        <a:rPr sz="1150" b="1">
                           <a:solidFill>
                             <a:srgbClr val="FFFFFF"/>
                           </a:solidFill>
                           <a:latin typeface="Meiryo"/>
                           <a:ea typeface="Meiryo"/>
                         </a:rPr>
-                        <a:t>#</a:t>
+                        <a:t>キャラクターイベント稼働費</a:t>
                       </a:r>
                     </a:p>
                   </a:txBody>
@@ -8748,14 +9475,14 @@
                     <a:lstStyle/>
                     <a:p>
                       <a:r>
-                        <a:rPr sz="1100" b="1">
+                        <a:rPr sz="1150" b="1">
                           <a:solidFill>
                             <a:srgbClr val="FFFFFF"/>
                           </a:solidFill>
                           <a:latin typeface="Meiryo"/>
                           <a:ea typeface="Meiryo"/>
                         </a:rPr>
-                        <a:t>条件</a:t>
+                        <a:t>通常販売価格</a:t>
                       </a:r>
                     </a:p>
                   </a:txBody>
@@ -8771,14 +9498,14 @@
                     <a:lstStyle/>
                     <a:p>
                       <a:r>
-                        <a:rPr sz="1100" b="1">
+                        <a:rPr sz="1150" b="1">
                           <a:solidFill>
                             <a:srgbClr val="FFFFFF"/>
                           </a:solidFill>
                           <a:latin typeface="Meiryo"/>
                           <a:ea typeface="Meiryo"/>
                         </a:rPr>
-                        <a:t>内容</a:t>
+                        <a:t>SB様特別価格</a:t>
                       </a:r>
                     </a:p>
                   </a:txBody>
@@ -8789,21 +9516,21 @@
                   </a:tcPr>
                 </a:tc>
               </a:tr>
-              <a:tr h="566928">
-                <a:tc>
-                  <a:txBody>
-                    <a:bodyPr/>
-                    <a:lstStyle/>
-                    <a:p>
-                      <a:r>
-                        <a:rPr sz="1100" b="0">
-                          <a:solidFill>
-                            <a:srgbClr val="1A1A1A"/>
-                          </a:solidFill>
-                          <a:latin typeface="Meiryo"/>
-                          <a:ea typeface="Meiryo"/>
-                        </a:rPr>
-                        <a:t>1</a:t>
+              <a:tr h="548640">
+                <a:tc>
+                  <a:txBody>
+                    <a:bodyPr/>
+                    <a:lstStyle/>
+                    <a:p>
+                      <a:r>
+                        <a:rPr sz="1150" b="1">
+                          <a:solidFill>
+                            <a:srgbClr val="1A1A1A"/>
+                          </a:solidFill>
+                          <a:latin typeface="Meiryo"/>
+                          <a:ea typeface="Meiryo"/>
+                        </a:rPr>
+                        <a:t>1日稼働(1日最大5回公演)</a:t>
                       </a:r>
                     </a:p>
                   </a:txBody>
@@ -8819,14 +9546,14 @@
                     <a:lstStyle/>
                     <a:p>
                       <a:r>
-                        <a:rPr sz="1100" b="1">
-                          <a:solidFill>
-                            <a:srgbClr val="1A1A1A"/>
-                          </a:solidFill>
-                          <a:latin typeface="Meiryo"/>
-                          <a:ea typeface="Meiryo"/>
-                        </a:rPr>
-                        <a:t>契約期間・締結期限</a:t>
+                        <a:rPr sz="1150" b="0">
+                          <a:solidFill>
+                            <a:srgbClr val="1A1A1A"/>
+                          </a:solidFill>
+                          <a:latin typeface="Meiryo"/>
+                          <a:ea typeface="Meiryo"/>
+                        </a:rPr>
+                        <a:t>225,000円/日</a:t>
                       </a:r>
                     </a:p>
                   </a:txBody>
@@ -8842,14 +9569,14 @@
                     <a:lstStyle/>
                     <a:p>
                       <a:r>
-                        <a:rPr sz="1100" b="0">
-                          <a:solidFill>
-                            <a:srgbClr val="1A1A1A"/>
-                          </a:solidFill>
-                          <a:latin typeface="Meiryo"/>
-                          <a:ea typeface="Meiryo"/>
-                        </a:rPr>
-                        <a:t>2027年1月〜2029年3月(2年3ヶ月)。2026年11月末までのご締結(1月開始に必要な体制準備のため)</a:t>
+                        <a:rPr sz="1150" b="1">
+                          <a:solidFill>
+                            <a:srgbClr val="C00000"/>
+                          </a:solidFill>
+                          <a:latin typeface="Meiryo"/>
+                          <a:ea typeface="Meiryo"/>
+                        </a:rPr>
+                        <a:t>100,000円/日(▲55.6%)</a:t>
                       </a:r>
                     </a:p>
                   </a:txBody>
@@ -8860,21 +9587,21 @@
                   </a:tcPr>
                 </a:tc>
               </a:tr>
-              <a:tr h="566928">
-                <a:tc>
-                  <a:txBody>
-                    <a:bodyPr/>
-                    <a:lstStyle/>
-                    <a:p>
-                      <a:r>
-                        <a:rPr sz="1100" b="0">
-                          <a:solidFill>
-                            <a:srgbClr val="1A1A1A"/>
-                          </a:solidFill>
-                          <a:latin typeface="Meiryo"/>
-                          <a:ea typeface="Meiryo"/>
-                        </a:rPr>
-                        <a:t>2</a:t>
+              <a:tr h="548640">
+                <a:tc>
+                  <a:txBody>
+                    <a:bodyPr/>
+                    <a:lstStyle/>
+                    <a:p>
+                      <a:r>
+                        <a:rPr sz="1150" b="1">
+                          <a:solidFill>
+                            <a:srgbClr val="1A1A1A"/>
+                          </a:solidFill>
+                          <a:latin typeface="Meiryo"/>
+                          <a:ea typeface="Meiryo"/>
+                        </a:rPr>
+                        <a:t>土日2日間(1開催)</a:t>
                       </a:r>
                     </a:p>
                   </a:txBody>
@@ -8890,14 +9617,14 @@
                     <a:lstStyle/>
                     <a:p>
                       <a:r>
-                        <a:rPr sz="1100" b="1">
-                          <a:solidFill>
-                            <a:srgbClr val="1A1A1A"/>
-                          </a:solidFill>
-                          <a:latin typeface="Meiryo"/>
-                          <a:ea typeface="Meiryo"/>
-                        </a:rPr>
-                        <a:t>最低開催数保証</a:t>
+                        <a:rPr sz="1150" b="0">
+                          <a:solidFill>
+                            <a:srgbClr val="1A1A1A"/>
+                          </a:solidFill>
+                          <a:latin typeface="Meiryo"/>
+                          <a:ea typeface="Meiryo"/>
+                        </a:rPr>
+                        <a:t>450,000円</a:t>
                       </a:r>
                     </a:p>
                   </a:txBody>
@@ -8913,14 +9640,14 @@
                     <a:lstStyle/>
                     <a:p>
                       <a:r>
-                        <a:rPr sz="1100" b="0">
-                          <a:solidFill>
-                            <a:srgbClr val="1A1A1A"/>
-                          </a:solidFill>
-                          <a:latin typeface="Meiryo"/>
-                          <a:ea typeface="Meiryo"/>
-                        </a:rPr>
-                        <a:t>基準15ライン分の開催数を最低保証。未実施の場合も当該数量分を申し受け、各年度末に精算</a:t>
+                        <a:rPr sz="1150" b="1">
+                          <a:solidFill>
+                            <a:srgbClr val="C00000"/>
+                          </a:solidFill>
+                          <a:latin typeface="Meiryo"/>
+                          <a:ea typeface="Meiryo"/>
+                        </a:rPr>
+                        <a:t>200,000円</a:t>
                       </a:r>
                     </a:p>
                   </a:txBody>
@@ -8931,21 +9658,21 @@
                   </a:tcPr>
                 </a:tc>
               </a:tr>
-              <a:tr h="566928">
-                <a:tc>
-                  <a:txBody>
-                    <a:bodyPr/>
-                    <a:lstStyle/>
-                    <a:p>
-                      <a:r>
-                        <a:rPr sz="1100" b="0">
-                          <a:solidFill>
-                            <a:srgbClr val="1A1A1A"/>
-                          </a:solidFill>
-                          <a:latin typeface="Meiryo"/>
-                          <a:ea typeface="Meiryo"/>
-                        </a:rPr>
-                        <a:t>3</a:t>
+              <a:tr h="548640">
+                <a:tc>
+                  <a:txBody>
+                    <a:bodyPr/>
+                    <a:lstStyle/>
+                    <a:p>
+                      <a:r>
+                        <a:rPr sz="1150" b="1">
+                          <a:solidFill>
+                            <a:srgbClr val="1A1A1A"/>
+                          </a:solidFill>
+                          <a:latin typeface="Meiryo"/>
+                          <a:ea typeface="Meiryo"/>
+                        </a:rPr>
+                        <a:t>3連休通し(3日間)</a:t>
                       </a:r>
                     </a:p>
                   </a:txBody>
@@ -8961,14 +9688,14 @@
                     <a:lstStyle/>
                     <a:p>
                       <a:r>
-                        <a:rPr sz="1100" b="1">
-                          <a:solidFill>
-                            <a:srgbClr val="1A1A1A"/>
-                          </a:solidFill>
-                          <a:latin typeface="Meiryo"/>
-                          <a:ea typeface="Meiryo"/>
-                        </a:rPr>
-                        <a:t>開催確定とキャンセル</a:t>
+                        <a:rPr sz="1150" b="0">
+                          <a:solidFill>
+                            <a:srgbClr val="1A1A1A"/>
+                          </a:solidFill>
+                          <a:latin typeface="Meiryo"/>
+                          <a:ea typeface="Meiryo"/>
+                        </a:rPr>
+                        <a:t>675,000円</a:t>
                       </a:r>
                     </a:p>
                   </a:txBody>
@@ -8984,298 +9711,14 @@
                     <a:lstStyle/>
                     <a:p>
                       <a:r>
-                        <a:rPr sz="1100" b="0">
-                          <a:solidFill>
-                            <a:srgbClr val="1A1A1A"/>
-                          </a:solidFill>
-                          <a:latin typeface="Meiryo"/>
-                          <a:ea typeface="Meiryo"/>
-                        </a:rPr>
-                        <a:t>会場・日程は開催1ヶ月前までに確定。確定後のキャンセル料:1ヶ月前〜14日前30%/13日前〜7日前50%/6日前〜当日100%</a:t>
-                      </a:r>
-                    </a:p>
-                  </a:txBody>
-                  <a:tcPr anchor="ctr" marL="73152" marR="73152">
-                    <a:solidFill>
-                      <a:srgbClr val="FFFFFF"/>
-                    </a:solidFill>
-                  </a:tcPr>
-                </a:tc>
-              </a:tr>
-              <a:tr h="566928">
-                <a:tc>
-                  <a:txBody>
-                    <a:bodyPr/>
-                    <a:lstStyle/>
-                    <a:p>
-                      <a:r>
-                        <a:rPr sz="1100" b="0">
-                          <a:solidFill>
-                            <a:srgbClr val="1A1A1A"/>
-                          </a:solidFill>
-                          <a:latin typeface="Meiryo"/>
-                          <a:ea typeface="Meiryo"/>
-                        </a:rPr>
-                        <a:t>4</a:t>
-                      </a:r>
-                    </a:p>
-                  </a:txBody>
-                  <a:tcPr anchor="ctr" marL="73152" marR="73152">
-                    <a:solidFill>
-                      <a:srgbClr val="F2F4F6"/>
-                    </a:solidFill>
-                  </a:tcPr>
-                </a:tc>
-                <a:tc>
-                  <a:txBody>
-                    <a:bodyPr/>
-                    <a:lstStyle/>
-                    <a:p>
-                      <a:r>
-                        <a:rPr sz="1100" b="1">
-                          <a:solidFill>
-                            <a:srgbClr val="1A1A1A"/>
-                          </a:solidFill>
-                          <a:latin typeface="Meiryo"/>
-                          <a:ea typeface="Meiryo"/>
-                        </a:rPr>
-                        <a:t>ライン供給</a:t>
-                      </a:r>
-                    </a:p>
-                  </a:txBody>
-                  <a:tcPr anchor="ctr" marL="73152" marR="73152">
-                    <a:solidFill>
-                      <a:srgbClr val="F2F4F6"/>
-                    </a:solidFill>
-                  </a:tcPr>
-                </a:tc>
-                <a:tc>
-                  <a:txBody>
-                    <a:bodyPr/>
-                    <a:lstStyle/>
-                    <a:p>
-                      <a:r>
-                        <a:rPr sz="1100" b="0">
-                          <a:solidFill>
-                            <a:srgbClr val="1A1A1A"/>
-                          </a:solidFill>
-                          <a:latin typeface="Meiryo"/>
-                          <a:ea typeface="Meiryo"/>
-                        </a:rPr>
-                        <a:t>基準15ライン。余裕月(1・4・6・11・12月)は最大20ラインまで増枠可(次頁)</a:t>
-                      </a:r>
-                    </a:p>
-                  </a:txBody>
-                  <a:tcPr anchor="ctr" marL="73152" marR="73152">
-                    <a:solidFill>
-                      <a:srgbClr val="F2F4F6"/>
-                    </a:solidFill>
-                  </a:tcPr>
-                </a:tc>
-              </a:tr>
-              <a:tr h="566928">
-                <a:tc>
-                  <a:txBody>
-                    <a:bodyPr/>
-                    <a:lstStyle/>
-                    <a:p>
-                      <a:r>
-                        <a:rPr sz="1100" b="0">
-                          <a:solidFill>
-                            <a:srgbClr val="1A1A1A"/>
-                          </a:solidFill>
-                          <a:latin typeface="Meiryo"/>
-                          <a:ea typeface="Meiryo"/>
-                        </a:rPr>
-                        <a:t>5</a:t>
-                      </a:r>
-                    </a:p>
-                  </a:txBody>
-                  <a:tcPr anchor="ctr" marL="73152" marR="73152">
-                    <a:solidFill>
-                      <a:srgbClr val="FFFFFF"/>
-                    </a:solidFill>
-                  </a:tcPr>
-                </a:tc>
-                <a:tc>
-                  <a:txBody>
-                    <a:bodyPr/>
-                    <a:lstStyle/>
-                    <a:p>
-                      <a:r>
-                        <a:rPr sz="1100" b="1">
-                          <a:solidFill>
-                            <a:srgbClr val="1A1A1A"/>
-                          </a:solidFill>
-                          <a:latin typeface="Meiryo"/>
-                          <a:ea typeface="Meiryo"/>
-                        </a:rPr>
-                        <a:t>お支払い</a:t>
-                      </a:r>
-                    </a:p>
-                  </a:txBody>
-                  <a:tcPr anchor="ctr" marL="73152" marR="73152">
-                    <a:solidFill>
-                      <a:srgbClr val="FFFFFF"/>
-                    </a:solidFill>
-                  </a:tcPr>
-                </a:tc>
-                <a:tc>
-                  <a:txBody>
-                    <a:bodyPr/>
-                    <a:lstStyle/>
-                    <a:p>
-                      <a:r>
-                        <a:rPr sz="1100" b="0">
-                          <a:solidFill>
-                            <a:srgbClr val="1A1A1A"/>
-                          </a:solidFill>
-                          <a:latin typeface="Meiryo"/>
-                          <a:ea typeface="Meiryo"/>
-                        </a:rPr>
-                        <a:t>貴社EDI発注。IP使用料は年度前払い、保証分は四半期前払い(ご相談)。最低保証契約のため期間一括の発注形態をご相談</a:t>
-                      </a:r>
-                    </a:p>
-                  </a:txBody>
-                  <a:tcPr anchor="ctr" marL="73152" marR="73152">
-                    <a:solidFill>
-                      <a:srgbClr val="FFFFFF"/>
-                    </a:solidFill>
-                  </a:tcPr>
-                </a:tc>
-              </a:tr>
-              <a:tr h="566928">
-                <a:tc>
-                  <a:txBody>
-                    <a:bodyPr/>
-                    <a:lstStyle/>
-                    <a:p>
-                      <a:r>
-                        <a:rPr sz="1100" b="0">
-                          <a:solidFill>
-                            <a:srgbClr val="1A1A1A"/>
-                          </a:solidFill>
-                          <a:latin typeface="Meiryo"/>
-                          <a:ea typeface="Meiryo"/>
-                        </a:rPr>
-                        <a:t>6</a:t>
-                      </a:r>
-                    </a:p>
-                  </a:txBody>
-                  <a:tcPr anchor="ctr" marL="73152" marR="73152">
-                    <a:solidFill>
-                      <a:srgbClr val="F2F4F6"/>
-                    </a:solidFill>
-                  </a:tcPr>
-                </a:tc>
-                <a:tc>
-                  <a:txBody>
-                    <a:bodyPr/>
-                    <a:lstStyle/>
-                    <a:p>
-                      <a:r>
-                        <a:rPr sz="1100" b="1">
-                          <a:solidFill>
-                            <a:srgbClr val="1A1A1A"/>
-                          </a:solidFill>
-                          <a:latin typeface="Meiryo"/>
-                          <a:ea typeface="Meiryo"/>
-                        </a:rPr>
-                        <a:t>エリア・キャラクター</a:t>
-                      </a:r>
-                    </a:p>
-                  </a:txBody>
-                  <a:tcPr anchor="ctr" marL="73152" marR="73152">
-                    <a:solidFill>
-                      <a:srgbClr val="F2F4F6"/>
-                    </a:solidFill>
-                  </a:tcPr>
-                </a:tc>
-                <a:tc>
-                  <a:txBody>
-                    <a:bodyPr/>
-                    <a:lstStyle/>
-                    <a:p>
-                      <a:r>
-                        <a:rPr sz="1100" b="0">
-                          <a:solidFill>
-                            <a:srgbClr val="1A1A1A"/>
-                          </a:solidFill>
-                          <a:latin typeface="Meiryo"/>
-                          <a:ea typeface="Meiryo"/>
-                        </a:rPr>
-                        <a:t>北関東エリアは2027年1〜3月は実施不可(4月以降可)。ウルトラセブンは対象外。出演は8ヒーロー</a:t>
-                      </a:r>
-                    </a:p>
-                  </a:txBody>
-                  <a:tcPr anchor="ctr" marL="73152" marR="73152">
-                    <a:solidFill>
-                      <a:srgbClr val="F2F4F6"/>
-                    </a:solidFill>
-                  </a:tcPr>
-                </a:tc>
-              </a:tr>
-              <a:tr h="566928">
-                <a:tc>
-                  <a:txBody>
-                    <a:bodyPr/>
-                    <a:lstStyle/>
-                    <a:p>
-                      <a:r>
-                        <a:rPr sz="1100" b="0">
-                          <a:solidFill>
-                            <a:srgbClr val="1A1A1A"/>
-                          </a:solidFill>
-                          <a:latin typeface="Meiryo"/>
-                          <a:ea typeface="Meiryo"/>
-                        </a:rPr>
-                        <a:t>7</a:t>
-                      </a:r>
-                    </a:p>
-                  </a:txBody>
-                  <a:tcPr anchor="ctr" marL="73152" marR="73152">
-                    <a:solidFill>
-                      <a:srgbClr val="FFFFFF"/>
-                    </a:solidFill>
-                  </a:tcPr>
-                </a:tc>
-                <a:tc>
-                  <a:txBody>
-                    <a:bodyPr/>
-                    <a:lstStyle/>
-                    <a:p>
-                      <a:r>
-                        <a:rPr sz="1100" b="1">
-                          <a:solidFill>
-                            <a:srgbClr val="1A1A1A"/>
-                          </a:solidFill>
-                          <a:latin typeface="Meiryo"/>
-                          <a:ea typeface="Meiryo"/>
-                        </a:rPr>
-                        <a:t>排他条件</a:t>
-                      </a:r>
-                    </a:p>
-                  </a:txBody>
-                  <a:tcPr anchor="ctr" marL="73152" marR="73152">
-                    <a:solidFill>
-                      <a:srgbClr val="FFFFFF"/>
-                    </a:solidFill>
-                  </a:tcPr>
-                </a:tc>
-                <a:tc>
-                  <a:txBody>
-                    <a:bodyPr/>
-                    <a:lstStyle/>
-                    <a:p>
-                      <a:r>
-                        <a:rPr sz="1100" b="0">
-                          <a:solidFill>
-                            <a:srgbClr val="1A1A1A"/>
-                          </a:solidFill>
-                          <a:latin typeface="Meiryo"/>
-                          <a:ea typeface="Meiryo"/>
-                        </a:rPr>
-                        <a:t>契約期間中、当社は国内の他の携帯キャリア(3社)との店頭イベント契約を行いません</a:t>
+                        <a:rPr sz="1150" b="1">
+                          <a:solidFill>
+                            <a:srgbClr val="C00000"/>
+                          </a:solidFill>
+                          <a:latin typeface="Meiryo"/>
+                          <a:ea typeface="Meiryo"/>
+                        </a:rPr>
+                        <a:t>300,000円</a:t>
                       </a:r>
                     </a:p>
                   </a:txBody>
@@ -9298,8 +9741,8 @@
         </p:nvSpPr>
         <p:spPr>
           <a:xfrm>
-            <a:off x="640080" y="5943600"/>
-            <a:ext cx="10881360" cy="457200"/>
+            <a:off x="640080" y="3703320"/>
+            <a:ext cx="6309360" cy="1097280"/>
           </a:xfrm>
           <a:prstGeom prst="rect">
             <a:avLst/>
@@ -9314,7 +9757,7 @@
           <a:p>
             <a:pPr algn="l">
               <a:spcAft>
-                <a:spcPts val="500"/>
+                <a:spcPts val="300"/>
               </a:spcAft>
             </a:pPr>
             <a:r>
@@ -9325,7 +9768,441 @@
                 <a:latin typeface="Meiryo"/>
                 <a:ea typeface="Meiryo"/>
               </a:rPr>
-              <a:t>※ キャンセル料は7月ご提案時のスポット向け規定から、本契約(最低保証・1ヶ月前確定フロー)向けの規定に更新しています</a:t>
+              <a:t>特別価格の内訳(1日):キャラクター使用料 40,000円/担当 35,000円/スーツアクター 25,000円</a:t>
+            </a:r>
+          </a:p>
+          <a:p>
+            <a:pPr algn="l">
+              <a:spcAft>
+                <a:spcPts val="300"/>
+              </a:spcAft>
+            </a:pPr>
+            <a:r>
+              <a:rPr sz="1050" b="0">
+                <a:solidFill>
+                  <a:srgbClr val="5A626B"/>
+                </a:solidFill>
+                <a:latin typeface="Meiryo"/>
+                <a:ea typeface="Meiryo"/>
+              </a:rPr>
+              <a:t>通常販売価格は同一スコープ(キャラクター使用料+担当+アクター・5回公演対応)での当社標準価格です</a:t>
+            </a:r>
+          </a:p>
+        </p:txBody>
+      </p:sp>
+      <p:graphicFrame>
+        <p:nvGraphicFramePr>
+          <p:cNvPr id="10" name="Table 9"/>
+          <p:cNvGraphicFramePr>
+            <a:graphicFrameLocks noGrp="1"/>
+          </p:cNvGraphicFramePr>
+          <p:nvPr/>
+        </p:nvGraphicFramePr>
+        <p:xfrm>
+          <a:off x="7223760" y="1417320"/>
+          <a:ext cx="4297679" cy="3291839"/>
+        </p:xfrm>
+        <a:graphic>
+          <a:graphicData uri="http://schemas.openxmlformats.org/drawingml/2006/table">
+            <a:tbl>
+              <a:tblPr firstRow="1" bandRow="1">
+                <a:tableStyleId>{5C22544A-7EE6-4342-B048-85BDC9FD1C3A}</a:tableStyleId>
+              </a:tblPr>
+              <a:tblGrid>
+                <a:gridCol w="2079522"/>
+                <a:gridCol w="2218157"/>
+              </a:tblGrid>
+              <a:tr h="548639">
+                <a:tc>
+                  <a:txBody>
+                    <a:bodyPr/>
+                    <a:lstStyle/>
+                    <a:p>
+                      <a:r>
+                        <a:rPr sz="1100" b="1">
+                          <a:solidFill>
+                            <a:srgbClr val="FFFFFF"/>
+                          </a:solidFill>
+                          <a:latin typeface="Meiryo"/>
+                          <a:ea typeface="Meiryo"/>
+                        </a:rPr>
+                        <a:t>その他の費目</a:t>
+                      </a:r>
+                    </a:p>
+                  </a:txBody>
+                  <a:tcPr anchor="ctr" marL="73152" marR="73152">
+                    <a:solidFill>
+                      <a:srgbClr val="232278"/>
+                    </a:solidFill>
+                  </a:tcPr>
+                </a:tc>
+                <a:tc>
+                  <a:txBody>
+                    <a:bodyPr/>
+                    <a:lstStyle/>
+                    <a:p>
+                      <a:r>
+                        <a:rPr sz="1100" b="1">
+                          <a:solidFill>
+                            <a:srgbClr val="FFFFFF"/>
+                          </a:solidFill>
+                          <a:latin typeface="Meiryo"/>
+                          <a:ea typeface="Meiryo"/>
+                        </a:rPr>
+                        <a:t>金額</a:t>
+                      </a:r>
+                    </a:p>
+                  </a:txBody>
+                  <a:tcPr anchor="ctr" marL="73152" marR="73152">
+                    <a:solidFill>
+                      <a:srgbClr val="232278"/>
+                    </a:solidFill>
+                  </a:tcPr>
+                </a:tc>
+              </a:tr>
+              <a:tr h="548639">
+                <a:tc>
+                  <a:txBody>
+                    <a:bodyPr/>
+                    <a:lstStyle/>
+                    <a:p>
+                      <a:r>
+                        <a:rPr sz="1100" b="1">
+                          <a:solidFill>
+                            <a:srgbClr val="1A1A1A"/>
+                          </a:solidFill>
+                          <a:latin typeface="Meiryo"/>
+                          <a:ea typeface="Meiryo"/>
+                        </a:rPr>
+                        <a:t>年間IP使用料</a:t>
+                      </a:r>
+                    </a:p>
+                  </a:txBody>
+                  <a:tcPr anchor="ctr" marL="73152" marR="73152">
+                    <a:solidFill>
+                      <a:srgbClr val="FFFFFF"/>
+                    </a:solidFill>
+                  </a:tcPr>
+                </a:tc>
+                <a:tc>
+                  <a:txBody>
+                    <a:bodyPr/>
+                    <a:lstStyle/>
+                    <a:p>
+                      <a:r>
+                        <a:rPr sz="1100" b="0">
+                          <a:solidFill>
+                            <a:srgbClr val="1A1A1A"/>
+                          </a:solidFill>
+                          <a:latin typeface="Meiryo"/>
+                          <a:ea typeface="Meiryo"/>
+                        </a:rPr>
+                        <a:t>2,000万円/年</a:t>
+                      </a:r>
+                    </a:p>
+                  </a:txBody>
+                  <a:tcPr anchor="ctr" marL="73152" marR="73152">
+                    <a:solidFill>
+                      <a:srgbClr val="FFFFFF"/>
+                    </a:solidFill>
+                  </a:tcPr>
+                </a:tc>
+              </a:tr>
+              <a:tr h="548639">
+                <a:tc>
+                  <a:txBody>
+                    <a:bodyPr/>
+                    <a:lstStyle/>
+                    <a:p>
+                      <a:r>
+                        <a:rPr sz="1100" b="1">
+                          <a:solidFill>
+                            <a:srgbClr val="1A1A1A"/>
+                          </a:solidFill>
+                          <a:latin typeface="Meiryo"/>
+                          <a:ea typeface="Meiryo"/>
+                        </a:rPr>
+                        <a:t>作成許諾ロイヤリティ</a:t>
+                      </a:r>
+                    </a:p>
+                  </a:txBody>
+                  <a:tcPr anchor="ctr" marL="73152" marR="73152">
+                    <a:solidFill>
+                      <a:srgbClr val="F2F4F6"/>
+                    </a:solidFill>
+                  </a:tcPr>
+                </a:tc>
+                <a:tc>
+                  <a:txBody>
+                    <a:bodyPr/>
+                    <a:lstStyle/>
+                    <a:p>
+                      <a:r>
+                        <a:rPr sz="1100" b="0">
+                          <a:solidFill>
+                            <a:srgbClr val="1A1A1A"/>
+                          </a:solidFill>
+                          <a:latin typeface="Meiryo"/>
+                          <a:ea typeface="Meiryo"/>
+                        </a:rPr>
+                        <a:t>作成費用の20%</a:t>
+                      </a:r>
+                    </a:p>
+                  </a:txBody>
+                  <a:tcPr anchor="ctr" marL="73152" marR="73152">
+                    <a:solidFill>
+                      <a:srgbClr val="F2F4F6"/>
+                    </a:solidFill>
+                  </a:tcPr>
+                </a:tc>
+              </a:tr>
+              <a:tr h="548639">
+                <a:tc>
+                  <a:txBody>
+                    <a:bodyPr/>
+                    <a:lstStyle/>
+                    <a:p>
+                      <a:r>
+                        <a:rPr sz="1100" b="1">
+                          <a:solidFill>
+                            <a:srgbClr val="1A1A1A"/>
+                          </a:solidFill>
+                          <a:latin typeface="Meiryo"/>
+                          <a:ea typeface="Meiryo"/>
+                        </a:rPr>
+                        <a:t>フル運営オプション</a:t>
+                      </a:r>
+                    </a:p>
+                  </a:txBody>
+                  <a:tcPr anchor="ctr" marL="73152" marR="73152">
+                    <a:solidFill>
+                      <a:srgbClr val="FFFFFF"/>
+                    </a:solidFill>
+                  </a:tcPr>
+                </a:tc>
+                <a:tc>
+                  <a:txBody>
+                    <a:bodyPr/>
+                    <a:lstStyle/>
+                    <a:p>
+                      <a:r>
+                        <a:rPr sz="1100" b="0">
+                          <a:solidFill>
+                            <a:srgbClr val="1A1A1A"/>
+                          </a:solidFill>
+                          <a:latin typeface="Meiryo"/>
+                          <a:ea typeface="Meiryo"/>
+                        </a:rPr>
+                        <a:t>+220,000円/日</a:t>
+                      </a:r>
+                    </a:p>
+                  </a:txBody>
+                  <a:tcPr anchor="ctr" marL="73152" marR="73152">
+                    <a:solidFill>
+                      <a:srgbClr val="FFFFFF"/>
+                    </a:solidFill>
+                  </a:tcPr>
+                </a:tc>
+              </a:tr>
+              <a:tr h="548639">
+                <a:tc>
+                  <a:txBody>
+                    <a:bodyPr/>
+                    <a:lstStyle/>
+                    <a:p>
+                      <a:r>
+                        <a:rPr sz="1100" b="1">
+                          <a:solidFill>
+                            <a:srgbClr val="1A1A1A"/>
+                          </a:solidFill>
+                          <a:latin typeface="Meiryo"/>
+                          <a:ea typeface="Meiryo"/>
+                        </a:rPr>
+                        <a:t>現場諸経費</a:t>
+                      </a:r>
+                    </a:p>
+                  </a:txBody>
+                  <a:tcPr anchor="ctr" marL="73152" marR="73152">
+                    <a:solidFill>
+                      <a:srgbClr val="F2F4F6"/>
+                    </a:solidFill>
+                  </a:tcPr>
+                </a:tc>
+                <a:tc>
+                  <a:txBody>
+                    <a:bodyPr/>
+                    <a:lstStyle/>
+                    <a:p>
+                      <a:r>
+                        <a:rPr sz="1100" b="0">
+                          <a:solidFill>
+                            <a:srgbClr val="1A1A1A"/>
+                          </a:solidFill>
+                          <a:latin typeface="Meiryo"/>
+                          <a:ea typeface="Meiryo"/>
+                        </a:rPr>
+                        <a:t>20,000円/日</a:t>
+                      </a:r>
+                    </a:p>
+                  </a:txBody>
+                  <a:tcPr anchor="ctr" marL="73152" marR="73152">
+                    <a:solidFill>
+                      <a:srgbClr val="F2F4F6"/>
+                    </a:solidFill>
+                  </a:tcPr>
+                </a:tc>
+              </a:tr>
+              <a:tr h="548644">
+                <a:tc>
+                  <a:txBody>
+                    <a:bodyPr/>
+                    <a:lstStyle/>
+                    <a:p>
+                      <a:r>
+                        <a:rPr sz="1100" b="1">
+                          <a:solidFill>
+                            <a:srgbClr val="1A1A1A"/>
+                          </a:solidFill>
+                          <a:latin typeface="Meiryo"/>
+                          <a:ea typeface="Meiryo"/>
+                        </a:rPr>
+                        <a:t>実費</a:t>
+                      </a:r>
+                    </a:p>
+                  </a:txBody>
+                  <a:tcPr anchor="ctr" marL="73152" marR="73152">
+                    <a:solidFill>
+                      <a:srgbClr val="FFFFFF"/>
+                    </a:solidFill>
+                  </a:tcPr>
+                </a:tc>
+                <a:tc>
+                  <a:txBody>
+                    <a:bodyPr/>
+                    <a:lstStyle/>
+                    <a:p>
+                      <a:r>
+                        <a:rPr sz="1100" b="0">
+                          <a:solidFill>
+                            <a:srgbClr val="1A1A1A"/>
+                          </a:solidFill>
+                          <a:latin typeface="Meiryo"/>
+                          <a:ea typeface="Meiryo"/>
+                        </a:rPr>
+                        <a:t>交通運搬・宿泊・スーツ送料(基準料金表)</a:t>
+                      </a:r>
+                    </a:p>
+                  </a:txBody>
+                  <a:tcPr anchor="ctr" marL="73152" marR="73152">
+                    <a:solidFill>
+                      <a:srgbClr val="FFFFFF"/>
+                    </a:solidFill>
+                  </a:tcPr>
+                </a:tc>
+              </a:tr>
+            </a:tbl>
+          </a:graphicData>
+        </a:graphic>
+      </p:graphicFrame>
+      <p:sp>
+        <p:nvSpPr>
+          <p:cNvPr id="11" name="Rounded Rectangle 10"/>
+          <p:cNvSpPr/>
+          <p:nvPr/>
+        </p:nvSpPr>
+        <p:spPr>
+          <a:xfrm>
+            <a:off x="640080" y="4892040"/>
+            <a:ext cx="10881360" cy="1188720"/>
+          </a:xfrm>
+          <a:prstGeom prst="roundRect">
+            <a:avLst>
+              <a:gd name="adj" fmla="val 7000"/>
+            </a:avLst>
+          </a:prstGeom>
+          <a:solidFill>
+            <a:srgbClr val="F2F4F6"/>
+          </a:solidFill>
+          <a:ln>
+            <a:noFill/>
+          </a:ln>
+          <a:effectLst/>
+        </p:spPr>
+        <p:style>
+          <a:lnRef idx="1">
+            <a:schemeClr val="accent1"/>
+          </a:lnRef>
+          <a:fillRef idx="3">
+            <a:schemeClr val="accent1"/>
+          </a:fillRef>
+          <a:effectRef idx="2">
+            <a:schemeClr val="accent1"/>
+          </a:effectRef>
+          <a:fontRef idx="minor">
+            <a:schemeClr val="lt1"/>
+          </a:fontRef>
+        </p:style>
+        <p:txBody>
+          <a:bodyPr rtlCol="0" anchor="ctr"/>
+          <a:lstStyle/>
+          <a:p>
+            <a:pPr algn="ctr"/>
+          </a:p>
+        </p:txBody>
+      </p:sp>
+      <p:sp>
+        <p:nvSpPr>
+          <p:cNvPr id="12" name="TextBox 11"/>
+          <p:cNvSpPr txBox="1"/>
+          <p:nvPr/>
+        </p:nvSpPr>
+        <p:spPr>
+          <a:xfrm>
+            <a:off x="914400" y="5029200"/>
+            <a:ext cx="10332720" cy="1005840"/>
+          </a:xfrm>
+          <a:prstGeom prst="rect">
+            <a:avLst/>
+          </a:prstGeom>
+          <a:noFill/>
+        </p:spPr>
+        <p:txBody>
+          <a:bodyPr wrap="square" anchor="t" lIns="0" rIns="0" tIns="0" bIns="0">
+            <a:spAutoFit/>
+          </a:bodyPr>
+          <a:lstStyle/>
+          <a:p>
+            <a:pPr algn="l">
+              <a:spcAft>
+                <a:spcPts val="400"/>
+              </a:spcAft>
+            </a:pPr>
+            <a:r>
+              <a:rPr sz="1250" b="1">
+                <a:solidFill>
+                  <a:srgbClr val="C00000"/>
+                </a:solidFill>
+                <a:latin typeface="Meiryo"/>
+                <a:ea typeface="Meiryo"/>
+              </a:rPr>
+              <a:t>年間IP使用料に含まれるもの</a:t>
+            </a:r>
+          </a:p>
+          <a:p>
+            <a:pPr algn="l">
+              <a:spcAft>
+                <a:spcPts val="400"/>
+              </a:spcAft>
+            </a:pPr>
+            <a:r>
+              <a:rPr sz="1150" b="0">
+                <a:solidFill>
+                  <a:srgbClr val="1A1A1A"/>
+                </a:solidFill>
+                <a:latin typeface="Meiryo"/>
+                <a:ea typeface="Meiryo"/>
+              </a:rPr>
+              <a:t>店頭イベント・イベントキット・店頭訴求ツール・LP/Web・SNSでのIP利用、作成物の監修対応、8ヒーローの選択・切替、キャラクター素材・運営マニュアルの提供</a:t>
             </a:r>
           </a:p>
         </p:txBody>
@@ -9407,7 +10284,7 @@
                 <a:latin typeface="Meiryo"/>
                 <a:ea typeface="Meiryo"/>
               </a:rPr>
-              <a:t>3. ライン供給計画(2027年1月〜2029年3月)</a:t>
+              <a:t>3. 実施の成立条件</a:t>
             </a:r>
           </a:p>
         </p:txBody>
@@ -9447,7 +10324,7 @@
                 <a:latin typeface="Meiryo"/>
                 <a:ea typeface="Meiryo"/>
               </a:rPr>
-              <a:t>基準15ラインを最低保証の対象とし、余裕のある月は最大20ラインまで増枠できます。詳細は別紙(月別供給計画)をご参照ください</a:t>
+              <a:t>特別価格の前提となる条件です。契約協議にて詳細を調整させてください</a:t>
             </a:r>
           </a:p>
         </p:txBody>
@@ -9582,7 +10459,7 @@
         </p:nvGraphicFramePr>
         <p:xfrm>
           <a:off x="640080" y="1417320"/>
-          <a:ext cx="10881356" cy="1828800"/>
+          <a:ext cx="10881360" cy="4535424"/>
         </p:xfrm>
         <a:graphic>
           <a:graphicData uri="http://schemas.openxmlformats.org/drawingml/2006/table">
@@ -9591,21 +10468,11 @@
                 <a:tableStyleId>{5C22544A-7EE6-4342-B048-85BDC9FD1C3A}</a:tableStyleId>
               </a:tblPr>
               <a:tblGrid>
-                <a:gridCol w="2123192"/>
-                <a:gridCol w="729847"/>
-                <a:gridCol w="729847"/>
-                <a:gridCol w="729847"/>
-                <a:gridCol w="729847"/>
-                <a:gridCol w="729847"/>
-                <a:gridCol w="729847"/>
-                <a:gridCol w="729847"/>
-                <a:gridCol w="729847"/>
-                <a:gridCol w="729847"/>
-                <a:gridCol w="729847"/>
-                <a:gridCol w="729847"/>
-                <a:gridCol w="729847"/>
+                <a:gridCol w="544068"/>
+                <a:gridCol w="2720340"/>
+                <a:gridCol w="7616952"/>
               </a:tblGrid>
-              <a:tr h="457200">
+              <a:tr h="566928">
                 <a:tc>
                   <a:txBody>
                     <a:bodyPr/>
@@ -9619,7 +10486,7 @@
                           <a:latin typeface="Meiryo"/>
                           <a:ea typeface="Meiryo"/>
                         </a:rPr>
-                        <a:t/>
+                        <a:t>#</a:t>
                       </a:r>
                     </a:p>
                   </a:txBody>
@@ -9642,7 +10509,7 @@
                           <a:latin typeface="Meiryo"/>
                           <a:ea typeface="Meiryo"/>
                         </a:rPr>
-                        <a:t>1月</a:t>
+                        <a:t>条件</a:t>
                       </a:r>
                     </a:p>
                   </a:txBody>
@@ -9665,7 +10532,7 @@
                           <a:latin typeface="Meiryo"/>
                           <a:ea typeface="Meiryo"/>
                         </a:rPr>
-                        <a:t>2月</a:t>
+                        <a:t>内容</a:t>
                       </a:r>
                     </a:p>
                   </a:txBody>
@@ -9675,6 +10542,31 @@
                     </a:solidFill>
                   </a:tcPr>
                 </a:tc>
+              </a:tr>
+              <a:tr h="566928">
+                <a:tc>
+                  <a:txBody>
+                    <a:bodyPr/>
+                    <a:lstStyle/>
+                    <a:p>
+                      <a:r>
+                        <a:rPr sz="1100" b="0">
+                          <a:solidFill>
+                            <a:srgbClr val="1A1A1A"/>
+                          </a:solidFill>
+                          <a:latin typeface="Meiryo"/>
+                          <a:ea typeface="Meiryo"/>
+                        </a:rPr>
+                        <a:t>1</a:t>
+                      </a:r>
+                    </a:p>
+                  </a:txBody>
+                  <a:tcPr anchor="ctr" marL="73152" marR="73152">
+                    <a:solidFill>
+                      <a:srgbClr val="FFFFFF"/>
+                    </a:solidFill>
+                  </a:tcPr>
+                </a:tc>
                 <a:tc>
                   <a:txBody>
                     <a:bodyPr/>
@@ -9683,18 +10575,66 @@
                       <a:r>
                         <a:rPr sz="1100" b="1">
                           <a:solidFill>
-                            <a:srgbClr val="FFFFFF"/>
-                          </a:solidFill>
-                          <a:latin typeface="Meiryo"/>
-                          <a:ea typeface="Meiryo"/>
-                        </a:rPr>
-                        <a:t>3月</a:t>
-                      </a:r>
-                    </a:p>
-                  </a:txBody>
-                  <a:tcPr anchor="ctr" marL="73152" marR="73152">
-                    <a:solidFill>
-                      <a:srgbClr val="232278"/>
+                            <a:srgbClr val="1A1A1A"/>
+                          </a:solidFill>
+                          <a:latin typeface="Meiryo"/>
+                          <a:ea typeface="Meiryo"/>
+                        </a:rPr>
+                        <a:t>契約期間・締結期限</a:t>
+                      </a:r>
+                    </a:p>
+                  </a:txBody>
+                  <a:tcPr anchor="ctr" marL="73152" marR="73152">
+                    <a:solidFill>
+                      <a:srgbClr val="FFFFFF"/>
+                    </a:solidFill>
+                  </a:tcPr>
+                </a:tc>
+                <a:tc>
+                  <a:txBody>
+                    <a:bodyPr/>
+                    <a:lstStyle/>
+                    <a:p>
+                      <a:r>
+                        <a:rPr sz="1100" b="0">
+                          <a:solidFill>
+                            <a:srgbClr val="1A1A1A"/>
+                          </a:solidFill>
+                          <a:latin typeface="Meiryo"/>
+                          <a:ea typeface="Meiryo"/>
+                        </a:rPr>
+                        <a:t>2027年1月〜2029年3月(2年3ヶ月)。2026年11月末までのご締結(1月開始に必要な体制準備のため)</a:t>
+                      </a:r>
+                    </a:p>
+                  </a:txBody>
+                  <a:tcPr anchor="ctr" marL="73152" marR="73152">
+                    <a:solidFill>
+                      <a:srgbClr val="FFFFFF"/>
+                    </a:solidFill>
+                  </a:tcPr>
+                </a:tc>
+              </a:tr>
+              <a:tr h="566928">
+                <a:tc>
+                  <a:txBody>
+                    <a:bodyPr/>
+                    <a:lstStyle/>
+                    <a:p>
+                      <a:r>
+                        <a:rPr sz="1100" b="0">
+                          <a:solidFill>
+                            <a:srgbClr val="1A1A1A"/>
+                          </a:solidFill>
+                          <a:latin typeface="Meiryo"/>
+                          <a:ea typeface="Meiryo"/>
+                        </a:rPr>
+                        <a:t>2</a:t>
+                      </a:r>
+                    </a:p>
+                  </a:txBody>
+                  <a:tcPr anchor="ctr" marL="73152" marR="73152">
+                    <a:solidFill>
+                      <a:srgbClr val="F2F4F6"/>
                     </a:solidFill>
                   </a:tcPr>
                 </a:tc>
@@ -9706,18 +10646,66 @@
                       <a:r>
                         <a:rPr sz="1100" b="1">
                           <a:solidFill>
-                            <a:srgbClr val="FFFFFF"/>
-                          </a:solidFill>
-                          <a:latin typeface="Meiryo"/>
-                          <a:ea typeface="Meiryo"/>
-                        </a:rPr>
-                        <a:t>4月</a:t>
-                      </a:r>
-                    </a:p>
-                  </a:txBody>
-                  <a:tcPr anchor="ctr" marL="73152" marR="73152">
-                    <a:solidFill>
-                      <a:srgbClr val="232278"/>
+                            <a:srgbClr val="1A1A1A"/>
+                          </a:solidFill>
+                          <a:latin typeface="Meiryo"/>
+                          <a:ea typeface="Meiryo"/>
+                        </a:rPr>
+                        <a:t>最低開催数保証</a:t>
+                      </a:r>
+                    </a:p>
+                  </a:txBody>
+                  <a:tcPr anchor="ctr" marL="73152" marR="73152">
+                    <a:solidFill>
+                      <a:srgbClr val="F2F4F6"/>
+                    </a:solidFill>
+                  </a:tcPr>
+                </a:tc>
+                <a:tc>
+                  <a:txBody>
+                    <a:bodyPr/>
+                    <a:lstStyle/>
+                    <a:p>
+                      <a:r>
+                        <a:rPr sz="1100" b="0">
+                          <a:solidFill>
+                            <a:srgbClr val="1A1A1A"/>
+                          </a:solidFill>
+                          <a:latin typeface="Meiryo"/>
+                          <a:ea typeface="Meiryo"/>
+                        </a:rPr>
+                        <a:t>基準15ライン分の開催数を最低保証。未実施の場合も当該数量分を申し受け、各年度末に精算</a:t>
+                      </a:r>
+                    </a:p>
+                  </a:txBody>
+                  <a:tcPr anchor="ctr" marL="73152" marR="73152">
+                    <a:solidFill>
+                      <a:srgbClr val="F2F4F6"/>
+                    </a:solidFill>
+                  </a:tcPr>
+                </a:tc>
+              </a:tr>
+              <a:tr h="566928">
+                <a:tc>
+                  <a:txBody>
+                    <a:bodyPr/>
+                    <a:lstStyle/>
+                    <a:p>
+                      <a:r>
+                        <a:rPr sz="1100" b="0">
+                          <a:solidFill>
+                            <a:srgbClr val="1A1A1A"/>
+                          </a:solidFill>
+                          <a:latin typeface="Meiryo"/>
+                          <a:ea typeface="Meiryo"/>
+                        </a:rPr>
+                        <a:t>3</a:t>
+                      </a:r>
+                    </a:p>
+                  </a:txBody>
+                  <a:tcPr anchor="ctr" marL="73152" marR="73152">
+                    <a:solidFill>
+                      <a:srgbClr val="FFFFFF"/>
                     </a:solidFill>
                   </a:tcPr>
                 </a:tc>
@@ -9729,18 +10717,66 @@
                       <a:r>
                         <a:rPr sz="1100" b="1">
                           <a:solidFill>
-                            <a:srgbClr val="FFFFFF"/>
-                          </a:solidFill>
-                          <a:latin typeface="Meiryo"/>
-                          <a:ea typeface="Meiryo"/>
-                        </a:rPr>
-                        <a:t>5月</a:t>
-                      </a:r>
-                    </a:p>
-                  </a:txBody>
-                  <a:tcPr anchor="ctr" marL="73152" marR="73152">
-                    <a:solidFill>
-                      <a:srgbClr val="232278"/>
+                            <a:srgbClr val="1A1A1A"/>
+                          </a:solidFill>
+                          <a:latin typeface="Meiryo"/>
+                          <a:ea typeface="Meiryo"/>
+                        </a:rPr>
+                        <a:t>開催確定とキャンセル</a:t>
+                      </a:r>
+                    </a:p>
+                  </a:txBody>
+                  <a:tcPr anchor="ctr" marL="73152" marR="73152">
+                    <a:solidFill>
+                      <a:srgbClr val="FFFFFF"/>
+                    </a:solidFill>
+                  </a:tcPr>
+                </a:tc>
+                <a:tc>
+                  <a:txBody>
+                    <a:bodyPr/>
+                    <a:lstStyle/>
+                    <a:p>
+                      <a:r>
+                        <a:rPr sz="1100" b="0">
+                          <a:solidFill>
+                            <a:srgbClr val="1A1A1A"/>
+                          </a:solidFill>
+                          <a:latin typeface="Meiryo"/>
+                          <a:ea typeface="Meiryo"/>
+                        </a:rPr>
+                        <a:t>会場・日程は開催1ヶ月前までに確定。確定後のキャンセル料:1ヶ月前〜14日前30%/13日前〜7日前50%/6日前〜当日100%</a:t>
+                      </a:r>
+                    </a:p>
+                  </a:txBody>
+                  <a:tcPr anchor="ctr" marL="73152" marR="73152">
+                    <a:solidFill>
+                      <a:srgbClr val="FFFFFF"/>
+                    </a:solidFill>
+                  </a:tcPr>
+                </a:tc>
+              </a:tr>
+              <a:tr h="566928">
+                <a:tc>
+                  <a:txBody>
+                    <a:bodyPr/>
+                    <a:lstStyle/>
+                    <a:p>
+                      <a:r>
+                        <a:rPr sz="1100" b="0">
+                          <a:solidFill>
+                            <a:srgbClr val="1A1A1A"/>
+                          </a:solidFill>
+                          <a:latin typeface="Meiryo"/>
+                          <a:ea typeface="Meiryo"/>
+                        </a:rPr>
+                        <a:t>4</a:t>
+                      </a:r>
+                    </a:p>
+                  </a:txBody>
+                  <a:tcPr anchor="ctr" marL="73152" marR="73152">
+                    <a:solidFill>
+                      <a:srgbClr val="F2F4F6"/>
                     </a:solidFill>
                   </a:tcPr>
                 </a:tc>
@@ -9752,18 +10788,66 @@
                       <a:r>
                         <a:rPr sz="1100" b="1">
                           <a:solidFill>
-                            <a:srgbClr val="FFFFFF"/>
-                          </a:solidFill>
-                          <a:latin typeface="Meiryo"/>
-                          <a:ea typeface="Meiryo"/>
-                        </a:rPr>
-                        <a:t>6月</a:t>
-                      </a:r>
-                    </a:p>
-                  </a:txBody>
-                  <a:tcPr anchor="ctr" marL="73152" marR="73152">
-                    <a:solidFill>
-                      <a:srgbClr val="232278"/>
+                            <a:srgbClr val="1A1A1A"/>
+                          </a:solidFill>
+                          <a:latin typeface="Meiryo"/>
+                          <a:ea typeface="Meiryo"/>
+                        </a:rPr>
+                        <a:t>ライン供給</a:t>
+                      </a:r>
+                    </a:p>
+                  </a:txBody>
+                  <a:tcPr anchor="ctr" marL="73152" marR="73152">
+                    <a:solidFill>
+                      <a:srgbClr val="F2F4F6"/>
+                    </a:solidFill>
+                  </a:tcPr>
+                </a:tc>
+                <a:tc>
+                  <a:txBody>
+                    <a:bodyPr/>
+                    <a:lstStyle/>
+                    <a:p>
+                      <a:r>
+                        <a:rPr sz="1100" b="0">
+                          <a:solidFill>
+                            <a:srgbClr val="1A1A1A"/>
+                          </a:solidFill>
+                          <a:latin typeface="Meiryo"/>
+                          <a:ea typeface="Meiryo"/>
+                        </a:rPr>
+                        <a:t>基準15ライン。余裕月(1・4・6・11・12月)は最大20ラインまで増枠可(次頁)</a:t>
+                      </a:r>
+                    </a:p>
+                  </a:txBody>
+                  <a:tcPr anchor="ctr" marL="73152" marR="73152">
+                    <a:solidFill>
+                      <a:srgbClr val="F2F4F6"/>
+                    </a:solidFill>
+                  </a:tcPr>
+                </a:tc>
+              </a:tr>
+              <a:tr h="566928">
+                <a:tc>
+                  <a:txBody>
+                    <a:bodyPr/>
+                    <a:lstStyle/>
+                    <a:p>
+                      <a:r>
+                        <a:rPr sz="1100" b="0">
+                          <a:solidFill>
+                            <a:srgbClr val="1A1A1A"/>
+                          </a:solidFill>
+                          <a:latin typeface="Meiryo"/>
+                          <a:ea typeface="Meiryo"/>
+                        </a:rPr>
+                        <a:t>5</a:t>
+                      </a:r>
+                    </a:p>
+                  </a:txBody>
+                  <a:tcPr anchor="ctr" marL="73152" marR="73152">
+                    <a:solidFill>
+                      <a:srgbClr val="FFFFFF"/>
                     </a:solidFill>
                   </a:tcPr>
                 </a:tc>
@@ -9775,18 +10859,66 @@
                       <a:r>
                         <a:rPr sz="1100" b="1">
                           <a:solidFill>
-                            <a:srgbClr val="FFFFFF"/>
-                          </a:solidFill>
-                          <a:latin typeface="Meiryo"/>
-                          <a:ea typeface="Meiryo"/>
-                        </a:rPr>
-                        <a:t>7月</a:t>
-                      </a:r>
-                    </a:p>
-                  </a:txBody>
-                  <a:tcPr anchor="ctr" marL="73152" marR="73152">
-                    <a:solidFill>
-                      <a:srgbClr val="232278"/>
+                            <a:srgbClr val="1A1A1A"/>
+                          </a:solidFill>
+                          <a:latin typeface="Meiryo"/>
+                          <a:ea typeface="Meiryo"/>
+                        </a:rPr>
+                        <a:t>お支払い</a:t>
+                      </a:r>
+                    </a:p>
+                  </a:txBody>
+                  <a:tcPr anchor="ctr" marL="73152" marR="73152">
+                    <a:solidFill>
+                      <a:srgbClr val="FFFFFF"/>
+                    </a:solidFill>
+                  </a:tcPr>
+                </a:tc>
+                <a:tc>
+                  <a:txBody>
+                    <a:bodyPr/>
+                    <a:lstStyle/>
+                    <a:p>
+                      <a:r>
+                        <a:rPr sz="1100" b="0">
+                          <a:solidFill>
+                            <a:srgbClr val="1A1A1A"/>
+                          </a:solidFill>
+                          <a:latin typeface="Meiryo"/>
+                          <a:ea typeface="Meiryo"/>
+                        </a:rPr>
+                        <a:t>貴社EDI発注。IP使用料は年度前払い、保証分は四半期前払い(ご相談)。最低保証契約のため期間一括の発注形態をご相談</a:t>
+                      </a:r>
+                    </a:p>
+                  </a:txBody>
+                  <a:tcPr anchor="ctr" marL="73152" marR="73152">
+                    <a:solidFill>
+                      <a:srgbClr val="FFFFFF"/>
+                    </a:solidFill>
+                  </a:tcPr>
+                </a:tc>
+              </a:tr>
+              <a:tr h="566928">
+                <a:tc>
+                  <a:txBody>
+                    <a:bodyPr/>
+                    <a:lstStyle/>
+                    <a:p>
+                      <a:r>
+                        <a:rPr sz="1100" b="0">
+                          <a:solidFill>
+                            <a:srgbClr val="1A1A1A"/>
+                          </a:solidFill>
+                          <a:latin typeface="Meiryo"/>
+                          <a:ea typeface="Meiryo"/>
+                        </a:rPr>
+                        <a:t>6</a:t>
+                      </a:r>
+                    </a:p>
+                  </a:txBody>
+                  <a:tcPr anchor="ctr" marL="73152" marR="73152">
+                    <a:solidFill>
+                      <a:srgbClr val="F2F4F6"/>
                     </a:solidFill>
                   </a:tcPr>
                 </a:tc>
@@ -9798,18 +10930,66 @@
                       <a:r>
                         <a:rPr sz="1100" b="1">
                           <a:solidFill>
-                            <a:srgbClr val="FFFFFF"/>
-                          </a:solidFill>
-                          <a:latin typeface="Meiryo"/>
-                          <a:ea typeface="Meiryo"/>
-                        </a:rPr>
-                        <a:t>8月</a:t>
-                      </a:r>
-                    </a:p>
-                  </a:txBody>
-                  <a:tcPr anchor="ctr" marL="73152" marR="73152">
-                    <a:solidFill>
-                      <a:srgbClr val="232278"/>
+                            <a:srgbClr val="1A1A1A"/>
+                          </a:solidFill>
+                          <a:latin typeface="Meiryo"/>
+                          <a:ea typeface="Meiryo"/>
+                        </a:rPr>
+                        <a:t>エリア・キャラクター</a:t>
+                      </a:r>
+                    </a:p>
+                  </a:txBody>
+                  <a:tcPr anchor="ctr" marL="73152" marR="73152">
+                    <a:solidFill>
+                      <a:srgbClr val="F2F4F6"/>
+                    </a:solidFill>
+                  </a:tcPr>
+                </a:tc>
+                <a:tc>
+                  <a:txBody>
+                    <a:bodyPr/>
+                    <a:lstStyle/>
+                    <a:p>
+                      <a:r>
+                        <a:rPr sz="1100" b="0">
+                          <a:solidFill>
+                            <a:srgbClr val="1A1A1A"/>
+                          </a:solidFill>
+                          <a:latin typeface="Meiryo"/>
+                          <a:ea typeface="Meiryo"/>
+                        </a:rPr>
+                        <a:t>北関東エリアは2027年1〜3月は実施不可(4月以降可)。ウルトラセブンは対象外。出演は8ヒーロー</a:t>
+                      </a:r>
+                    </a:p>
+                  </a:txBody>
+                  <a:tcPr anchor="ctr" marL="73152" marR="73152">
+                    <a:solidFill>
+                      <a:srgbClr val="F2F4F6"/>
+                    </a:solidFill>
+                  </a:tcPr>
+                </a:tc>
+              </a:tr>
+              <a:tr h="566928">
+                <a:tc>
+                  <a:txBody>
+                    <a:bodyPr/>
+                    <a:lstStyle/>
+                    <a:p>
+                      <a:r>
+                        <a:rPr sz="1100" b="0">
+                          <a:solidFill>
+                            <a:srgbClr val="1A1A1A"/>
+                          </a:solidFill>
+                          <a:latin typeface="Meiryo"/>
+                          <a:ea typeface="Meiryo"/>
+                        </a:rPr>
+                        <a:t>7</a:t>
+                      </a:r>
+                    </a:p>
+                  </a:txBody>
+                  <a:tcPr anchor="ctr" marL="73152" marR="73152">
+                    <a:solidFill>
+                      <a:srgbClr val="FFFFFF"/>
                     </a:solidFill>
                   </a:tcPr>
                 </a:tc>
@@ -9821,106 +11001,12 @@
                       <a:r>
                         <a:rPr sz="1100" b="1">
                           <a:solidFill>
-                            <a:srgbClr val="FFFFFF"/>
-                          </a:solidFill>
-                          <a:latin typeface="Meiryo"/>
-                          <a:ea typeface="Meiryo"/>
-                        </a:rPr>
-                        <a:t>9月</a:t>
-                      </a:r>
-                    </a:p>
-                  </a:txBody>
-                  <a:tcPr anchor="ctr" marL="73152" marR="73152">
-                    <a:solidFill>
-                      <a:srgbClr val="232278"/>
-                    </a:solidFill>
-                  </a:tcPr>
-                </a:tc>
-                <a:tc>
-                  <a:txBody>
-                    <a:bodyPr/>
-                    <a:lstStyle/>
-                    <a:p>
-                      <a:r>
-                        <a:rPr sz="1100" b="1">
-                          <a:solidFill>
-                            <a:srgbClr val="FFFFFF"/>
-                          </a:solidFill>
-                          <a:latin typeface="Meiryo"/>
-                          <a:ea typeface="Meiryo"/>
-                        </a:rPr>
-                        <a:t>10月</a:t>
-                      </a:r>
-                    </a:p>
-                  </a:txBody>
-                  <a:tcPr anchor="ctr" marL="73152" marR="73152">
-                    <a:solidFill>
-                      <a:srgbClr val="232278"/>
-                    </a:solidFill>
-                  </a:tcPr>
-                </a:tc>
-                <a:tc>
-                  <a:txBody>
-                    <a:bodyPr/>
-                    <a:lstStyle/>
-                    <a:p>
-                      <a:r>
-                        <a:rPr sz="1100" b="1">
-                          <a:solidFill>
-                            <a:srgbClr val="FFFFFF"/>
-                          </a:solidFill>
-                          <a:latin typeface="Meiryo"/>
-                          <a:ea typeface="Meiryo"/>
-                        </a:rPr>
-                        <a:t>11月</a:t>
-                      </a:r>
-                    </a:p>
-                  </a:txBody>
-                  <a:tcPr anchor="ctr" marL="73152" marR="73152">
-                    <a:solidFill>
-                      <a:srgbClr val="232278"/>
-                    </a:solidFill>
-                  </a:tcPr>
-                </a:tc>
-                <a:tc>
-                  <a:txBody>
-                    <a:bodyPr/>
-                    <a:lstStyle/>
-                    <a:p>
-                      <a:r>
-                        <a:rPr sz="1100" b="1">
-                          <a:solidFill>
-                            <a:srgbClr val="FFFFFF"/>
-                          </a:solidFill>
-                          <a:latin typeface="Meiryo"/>
-                          <a:ea typeface="Meiryo"/>
-                        </a:rPr>
-                        <a:t>12月</a:t>
-                      </a:r>
-                    </a:p>
-                  </a:txBody>
-                  <a:tcPr anchor="ctr" marL="73152" marR="73152">
-                    <a:solidFill>
-                      <a:srgbClr val="232278"/>
-                    </a:solidFill>
-                  </a:tcPr>
-                </a:tc>
-              </a:tr>
-              <a:tr h="457200">
-                <a:tc>
-                  <a:txBody>
-                    <a:bodyPr/>
-                    <a:lstStyle/>
-                    <a:p>
-                      <a:r>
-                        <a:rPr sz="1100" b="1">
-                          <a:solidFill>
-                            <a:srgbClr val="1A1A1A"/>
-                          </a:solidFill>
-                          <a:latin typeface="Meiryo"/>
-                          <a:ea typeface="Meiryo"/>
-                        </a:rPr>
-                        <a:t>開催日数(土日)</a:t>
+                            <a:srgbClr val="1A1A1A"/>
+                          </a:solidFill>
+                          <a:latin typeface="Meiryo"/>
+                          <a:ea typeface="Meiryo"/>
+                        </a:rPr>
+                        <a:t>排他条件</a:t>
                       </a:r>
                     </a:p>
                   </a:txBody>
@@ -9943,862 +11029,7 @@
                           <a:latin typeface="Meiryo"/>
                           <a:ea typeface="Meiryo"/>
                         </a:rPr>
-                        <a:t>10</a:t>
-                      </a:r>
-                    </a:p>
-                  </a:txBody>
-                  <a:tcPr anchor="ctr" marL="73152" marR="73152">
-                    <a:solidFill>
-                      <a:srgbClr val="FFFFFF"/>
-                    </a:solidFill>
-                  </a:tcPr>
-                </a:tc>
-                <a:tc>
-                  <a:txBody>
-                    <a:bodyPr/>
-                    <a:lstStyle/>
-                    <a:p>
-                      <a:r>
-                        <a:rPr sz="1100" b="0">
-                          <a:solidFill>
-                            <a:srgbClr val="1A1A1A"/>
-                          </a:solidFill>
-                          <a:latin typeface="Meiryo"/>
-                          <a:ea typeface="Meiryo"/>
-                        </a:rPr>
-                        <a:t>8</a:t>
-                      </a:r>
-                    </a:p>
-                  </a:txBody>
-                  <a:tcPr anchor="ctr" marL="73152" marR="73152">
-                    <a:solidFill>
-                      <a:srgbClr val="FFFFFF"/>
-                    </a:solidFill>
-                  </a:tcPr>
-                </a:tc>
-                <a:tc>
-                  <a:txBody>
-                    <a:bodyPr/>
-                    <a:lstStyle/>
-                    <a:p>
-                      <a:r>
-                        <a:rPr sz="1100" b="0">
-                          <a:solidFill>
-                            <a:srgbClr val="1A1A1A"/>
-                          </a:solidFill>
-                          <a:latin typeface="Meiryo"/>
-                          <a:ea typeface="Meiryo"/>
-                        </a:rPr>
-                        <a:t>8</a:t>
-                      </a:r>
-                    </a:p>
-                  </a:txBody>
-                  <a:tcPr anchor="ctr" marL="73152" marR="73152">
-                    <a:solidFill>
-                      <a:srgbClr val="FFFFFF"/>
-                    </a:solidFill>
-                  </a:tcPr>
-                </a:tc>
-                <a:tc>
-                  <a:txBody>
-                    <a:bodyPr/>
-                    <a:lstStyle/>
-                    <a:p>
-                      <a:r>
-                        <a:rPr sz="1100" b="0">
-                          <a:solidFill>
-                            <a:srgbClr val="1A1A1A"/>
-                          </a:solidFill>
-                          <a:latin typeface="Meiryo"/>
-                          <a:ea typeface="Meiryo"/>
-                        </a:rPr>
-                        <a:t>8</a:t>
-                      </a:r>
-                    </a:p>
-                  </a:txBody>
-                  <a:tcPr anchor="ctr" marL="73152" marR="73152">
-                    <a:solidFill>
-                      <a:srgbClr val="FFFFFF"/>
-                    </a:solidFill>
-                  </a:tcPr>
-                </a:tc>
-                <a:tc>
-                  <a:txBody>
-                    <a:bodyPr/>
-                    <a:lstStyle/>
-                    <a:p>
-                      <a:r>
-                        <a:rPr sz="1100" b="0">
-                          <a:solidFill>
-                            <a:srgbClr val="1A1A1A"/>
-                          </a:solidFill>
-                          <a:latin typeface="Meiryo"/>
-                          <a:ea typeface="Meiryo"/>
-                        </a:rPr>
-                        <a:t>10</a:t>
-                      </a:r>
-                    </a:p>
-                  </a:txBody>
-                  <a:tcPr anchor="ctr" marL="73152" marR="73152">
-                    <a:solidFill>
-                      <a:srgbClr val="FFFFFF"/>
-                    </a:solidFill>
-                  </a:tcPr>
-                </a:tc>
-                <a:tc>
-                  <a:txBody>
-                    <a:bodyPr/>
-                    <a:lstStyle/>
-                    <a:p>
-                      <a:r>
-                        <a:rPr sz="1100" b="0">
-                          <a:solidFill>
-                            <a:srgbClr val="1A1A1A"/>
-                          </a:solidFill>
-                          <a:latin typeface="Meiryo"/>
-                          <a:ea typeface="Meiryo"/>
-                        </a:rPr>
-                        <a:t>8</a:t>
-                      </a:r>
-                    </a:p>
-                  </a:txBody>
-                  <a:tcPr anchor="ctr" marL="73152" marR="73152">
-                    <a:solidFill>
-                      <a:srgbClr val="FFFFFF"/>
-                    </a:solidFill>
-                  </a:tcPr>
-                </a:tc>
-                <a:tc>
-                  <a:txBody>
-                    <a:bodyPr/>
-                    <a:lstStyle/>
-                    <a:p>
-                      <a:r>
-                        <a:rPr sz="1100" b="0">
-                          <a:solidFill>
-                            <a:srgbClr val="1A1A1A"/>
-                          </a:solidFill>
-                          <a:latin typeface="Meiryo"/>
-                          <a:ea typeface="Meiryo"/>
-                        </a:rPr>
-                        <a:t>9</a:t>
-                      </a:r>
-                    </a:p>
-                  </a:txBody>
-                  <a:tcPr anchor="ctr" marL="73152" marR="73152">
-                    <a:solidFill>
-                      <a:srgbClr val="FFFFFF"/>
-                    </a:solidFill>
-                  </a:tcPr>
-                </a:tc>
-                <a:tc>
-                  <a:txBody>
-                    <a:bodyPr/>
-                    <a:lstStyle/>
-                    <a:p>
-                      <a:r>
-                        <a:rPr sz="1100" b="0">
-                          <a:solidFill>
-                            <a:srgbClr val="1A1A1A"/>
-                          </a:solidFill>
-                          <a:latin typeface="Meiryo"/>
-                          <a:ea typeface="Meiryo"/>
-                        </a:rPr>
-                        <a:t>9</a:t>
-                      </a:r>
-                    </a:p>
-                  </a:txBody>
-                  <a:tcPr anchor="ctr" marL="73152" marR="73152">
-                    <a:solidFill>
-                      <a:srgbClr val="FFFFFF"/>
-                    </a:solidFill>
-                  </a:tcPr>
-                </a:tc>
-                <a:tc>
-                  <a:txBody>
-                    <a:bodyPr/>
-                    <a:lstStyle/>
-                    <a:p>
-                      <a:r>
-                        <a:rPr sz="1100" b="0">
-                          <a:solidFill>
-                            <a:srgbClr val="1A1A1A"/>
-                          </a:solidFill>
-                          <a:latin typeface="Meiryo"/>
-                          <a:ea typeface="Meiryo"/>
-                        </a:rPr>
-                        <a:t>8</a:t>
-                      </a:r>
-                    </a:p>
-                  </a:txBody>
-                  <a:tcPr anchor="ctr" marL="73152" marR="73152">
-                    <a:solidFill>
-                      <a:srgbClr val="FFFFFF"/>
-                    </a:solidFill>
-                  </a:tcPr>
-                </a:tc>
-                <a:tc>
-                  <a:txBody>
-                    <a:bodyPr/>
-                    <a:lstStyle/>
-                    <a:p>
-                      <a:r>
-                        <a:rPr sz="1100" b="0">
-                          <a:solidFill>
-                            <a:srgbClr val="1A1A1A"/>
-                          </a:solidFill>
-                          <a:latin typeface="Meiryo"/>
-                          <a:ea typeface="Meiryo"/>
-                        </a:rPr>
-                        <a:t>10</a:t>
-                      </a:r>
-                    </a:p>
-                  </a:txBody>
-                  <a:tcPr anchor="ctr" marL="73152" marR="73152">
-                    <a:solidFill>
-                      <a:srgbClr val="FFFFFF"/>
-                    </a:solidFill>
-                  </a:tcPr>
-                </a:tc>
-                <a:tc>
-                  <a:txBody>
-                    <a:bodyPr/>
-                    <a:lstStyle/>
-                    <a:p>
-                      <a:r>
-                        <a:rPr sz="1100" b="0">
-                          <a:solidFill>
-                            <a:srgbClr val="1A1A1A"/>
-                          </a:solidFill>
-                          <a:latin typeface="Meiryo"/>
-                          <a:ea typeface="Meiryo"/>
-                        </a:rPr>
-                        <a:t>8</a:t>
-                      </a:r>
-                    </a:p>
-                  </a:txBody>
-                  <a:tcPr anchor="ctr" marL="73152" marR="73152">
-                    <a:solidFill>
-                      <a:srgbClr val="FFFFFF"/>
-                    </a:solidFill>
-                  </a:tcPr>
-                </a:tc>
-                <a:tc>
-                  <a:txBody>
-                    <a:bodyPr/>
-                    <a:lstStyle/>
-                    <a:p>
-                      <a:r>
-                        <a:rPr sz="1100" b="0">
-                          <a:solidFill>
-                            <a:srgbClr val="1A1A1A"/>
-                          </a:solidFill>
-                          <a:latin typeface="Meiryo"/>
-                          <a:ea typeface="Meiryo"/>
-                        </a:rPr>
-                        <a:t>8</a:t>
-                      </a:r>
-                    </a:p>
-                  </a:txBody>
-                  <a:tcPr anchor="ctr" marL="73152" marR="73152">
-                    <a:solidFill>
-                      <a:srgbClr val="FFFFFF"/>
-                    </a:solidFill>
-                  </a:tcPr>
-                </a:tc>
-              </a:tr>
-              <a:tr h="457200">
-                <a:tc>
-                  <a:txBody>
-                    <a:bodyPr/>
-                    <a:lstStyle/>
-                    <a:p>
-                      <a:r>
-                        <a:rPr sz="1100" b="1">
-                          <a:solidFill>
-                            <a:srgbClr val="1A1A1A"/>
-                          </a:solidFill>
-                          <a:latin typeface="Meiryo"/>
-                          <a:ea typeface="Meiryo"/>
-                        </a:rPr>
-                        <a:t>基準ライン数</a:t>
-                      </a:r>
-                    </a:p>
-                  </a:txBody>
-                  <a:tcPr anchor="ctr" marL="73152" marR="73152">
-                    <a:solidFill>
-                      <a:srgbClr val="F2F4F6"/>
-                    </a:solidFill>
-                  </a:tcPr>
-                </a:tc>
-                <a:tc>
-                  <a:txBody>
-                    <a:bodyPr/>
-                    <a:lstStyle/>
-                    <a:p>
-                      <a:r>
-                        <a:rPr sz="1100" b="0">
-                          <a:solidFill>
-                            <a:srgbClr val="1A1A1A"/>
-                          </a:solidFill>
-                          <a:latin typeface="Meiryo"/>
-                          <a:ea typeface="Meiryo"/>
-                        </a:rPr>
-                        <a:t>15</a:t>
-                      </a:r>
-                    </a:p>
-                  </a:txBody>
-                  <a:tcPr anchor="ctr" marL="73152" marR="73152">
-                    <a:solidFill>
-                      <a:srgbClr val="F2F4F6"/>
-                    </a:solidFill>
-                  </a:tcPr>
-                </a:tc>
-                <a:tc>
-                  <a:txBody>
-                    <a:bodyPr/>
-                    <a:lstStyle/>
-                    <a:p>
-                      <a:r>
-                        <a:rPr sz="1100" b="0">
-                          <a:solidFill>
-                            <a:srgbClr val="1A1A1A"/>
-                          </a:solidFill>
-                          <a:latin typeface="Meiryo"/>
-                          <a:ea typeface="Meiryo"/>
-                        </a:rPr>
-                        <a:t>15</a:t>
-                      </a:r>
-                    </a:p>
-                  </a:txBody>
-                  <a:tcPr anchor="ctr" marL="73152" marR="73152">
-                    <a:solidFill>
-                      <a:srgbClr val="F2F4F6"/>
-                    </a:solidFill>
-                  </a:tcPr>
-                </a:tc>
-                <a:tc>
-                  <a:txBody>
-                    <a:bodyPr/>
-                    <a:lstStyle/>
-                    <a:p>
-                      <a:r>
-                        <a:rPr sz="1100" b="0">
-                          <a:solidFill>
-                            <a:srgbClr val="1A1A1A"/>
-                          </a:solidFill>
-                          <a:latin typeface="Meiryo"/>
-                          <a:ea typeface="Meiryo"/>
-                        </a:rPr>
-                        <a:t>15</a:t>
-                      </a:r>
-                    </a:p>
-                  </a:txBody>
-                  <a:tcPr anchor="ctr" marL="73152" marR="73152">
-                    <a:solidFill>
-                      <a:srgbClr val="F2F4F6"/>
-                    </a:solidFill>
-                  </a:tcPr>
-                </a:tc>
-                <a:tc>
-                  <a:txBody>
-                    <a:bodyPr/>
-                    <a:lstStyle/>
-                    <a:p>
-                      <a:r>
-                        <a:rPr sz="1100" b="0">
-                          <a:solidFill>
-                            <a:srgbClr val="1A1A1A"/>
-                          </a:solidFill>
-                          <a:latin typeface="Meiryo"/>
-                          <a:ea typeface="Meiryo"/>
-                        </a:rPr>
-                        <a:t>15</a:t>
-                      </a:r>
-                    </a:p>
-                  </a:txBody>
-                  <a:tcPr anchor="ctr" marL="73152" marR="73152">
-                    <a:solidFill>
-                      <a:srgbClr val="F2F4F6"/>
-                    </a:solidFill>
-                  </a:tcPr>
-                </a:tc>
-                <a:tc>
-                  <a:txBody>
-                    <a:bodyPr/>
-                    <a:lstStyle/>
-                    <a:p>
-                      <a:r>
-                        <a:rPr sz="1100" b="0">
-                          <a:solidFill>
-                            <a:srgbClr val="1A1A1A"/>
-                          </a:solidFill>
-                          <a:latin typeface="Meiryo"/>
-                          <a:ea typeface="Meiryo"/>
-                        </a:rPr>
-                        <a:t>15</a:t>
-                      </a:r>
-                    </a:p>
-                  </a:txBody>
-                  <a:tcPr anchor="ctr" marL="73152" marR="73152">
-                    <a:solidFill>
-                      <a:srgbClr val="F2F4F6"/>
-                    </a:solidFill>
-                  </a:tcPr>
-                </a:tc>
-                <a:tc>
-                  <a:txBody>
-                    <a:bodyPr/>
-                    <a:lstStyle/>
-                    <a:p>
-                      <a:r>
-                        <a:rPr sz="1100" b="0">
-                          <a:solidFill>
-                            <a:srgbClr val="1A1A1A"/>
-                          </a:solidFill>
-                          <a:latin typeface="Meiryo"/>
-                          <a:ea typeface="Meiryo"/>
-                        </a:rPr>
-                        <a:t>15</a:t>
-                      </a:r>
-                    </a:p>
-                  </a:txBody>
-                  <a:tcPr anchor="ctr" marL="73152" marR="73152">
-                    <a:solidFill>
-                      <a:srgbClr val="F2F4F6"/>
-                    </a:solidFill>
-                  </a:tcPr>
-                </a:tc>
-                <a:tc>
-                  <a:txBody>
-                    <a:bodyPr/>
-                    <a:lstStyle/>
-                    <a:p>
-                      <a:r>
-                        <a:rPr sz="1100" b="0">
-                          <a:solidFill>
-                            <a:srgbClr val="1A1A1A"/>
-                          </a:solidFill>
-                          <a:latin typeface="Meiryo"/>
-                          <a:ea typeface="Meiryo"/>
-                        </a:rPr>
-                        <a:t>15</a:t>
-                      </a:r>
-                    </a:p>
-                  </a:txBody>
-                  <a:tcPr anchor="ctr" marL="73152" marR="73152">
-                    <a:solidFill>
-                      <a:srgbClr val="F2F4F6"/>
-                    </a:solidFill>
-                  </a:tcPr>
-                </a:tc>
-                <a:tc>
-                  <a:txBody>
-                    <a:bodyPr/>
-                    <a:lstStyle/>
-                    <a:p>
-                      <a:r>
-                        <a:rPr sz="1100" b="0">
-                          <a:solidFill>
-                            <a:srgbClr val="1A1A1A"/>
-                          </a:solidFill>
-                          <a:latin typeface="Meiryo"/>
-                          <a:ea typeface="Meiryo"/>
-                        </a:rPr>
-                        <a:t>15</a:t>
-                      </a:r>
-                    </a:p>
-                  </a:txBody>
-                  <a:tcPr anchor="ctr" marL="73152" marR="73152">
-                    <a:solidFill>
-                      <a:srgbClr val="F2F4F6"/>
-                    </a:solidFill>
-                  </a:tcPr>
-                </a:tc>
-                <a:tc>
-                  <a:txBody>
-                    <a:bodyPr/>
-                    <a:lstStyle/>
-                    <a:p>
-                      <a:r>
-                        <a:rPr sz="1100" b="0">
-                          <a:solidFill>
-                            <a:srgbClr val="1A1A1A"/>
-                          </a:solidFill>
-                          <a:latin typeface="Meiryo"/>
-                          <a:ea typeface="Meiryo"/>
-                        </a:rPr>
-                        <a:t>15</a:t>
-                      </a:r>
-                    </a:p>
-                  </a:txBody>
-                  <a:tcPr anchor="ctr" marL="73152" marR="73152">
-                    <a:solidFill>
-                      <a:srgbClr val="F2F4F6"/>
-                    </a:solidFill>
-                  </a:tcPr>
-                </a:tc>
-                <a:tc>
-                  <a:txBody>
-                    <a:bodyPr/>
-                    <a:lstStyle/>
-                    <a:p>
-                      <a:r>
-                        <a:rPr sz="1100" b="0">
-                          <a:solidFill>
-                            <a:srgbClr val="1A1A1A"/>
-                          </a:solidFill>
-                          <a:latin typeface="Meiryo"/>
-                          <a:ea typeface="Meiryo"/>
-                        </a:rPr>
-                        <a:t>15</a:t>
-                      </a:r>
-                    </a:p>
-                  </a:txBody>
-                  <a:tcPr anchor="ctr" marL="73152" marR="73152">
-                    <a:solidFill>
-                      <a:srgbClr val="F2F4F6"/>
-                    </a:solidFill>
-                  </a:tcPr>
-                </a:tc>
-                <a:tc>
-                  <a:txBody>
-                    <a:bodyPr/>
-                    <a:lstStyle/>
-                    <a:p>
-                      <a:r>
-                        <a:rPr sz="1100" b="0">
-                          <a:solidFill>
-                            <a:srgbClr val="1A1A1A"/>
-                          </a:solidFill>
-                          <a:latin typeface="Meiryo"/>
-                          <a:ea typeface="Meiryo"/>
-                        </a:rPr>
-                        <a:t>15</a:t>
-                      </a:r>
-                    </a:p>
-                  </a:txBody>
-                  <a:tcPr anchor="ctr" marL="73152" marR="73152">
-                    <a:solidFill>
-                      <a:srgbClr val="F2F4F6"/>
-                    </a:solidFill>
-                  </a:tcPr>
-                </a:tc>
-                <a:tc>
-                  <a:txBody>
-                    <a:bodyPr/>
-                    <a:lstStyle/>
-                    <a:p>
-                      <a:r>
-                        <a:rPr sz="1100" b="0">
-                          <a:solidFill>
-                            <a:srgbClr val="1A1A1A"/>
-                          </a:solidFill>
-                          <a:latin typeface="Meiryo"/>
-                          <a:ea typeface="Meiryo"/>
-                        </a:rPr>
-                        <a:t>15</a:t>
-                      </a:r>
-                    </a:p>
-                  </a:txBody>
-                  <a:tcPr anchor="ctr" marL="73152" marR="73152">
-                    <a:solidFill>
-                      <a:srgbClr val="F2F4F6"/>
-                    </a:solidFill>
-                  </a:tcPr>
-                </a:tc>
-              </a:tr>
-              <a:tr h="457200">
-                <a:tc>
-                  <a:txBody>
-                    <a:bodyPr/>
-                    <a:lstStyle/>
-                    <a:p>
-                      <a:r>
-                        <a:rPr sz="1100" b="1">
-                          <a:solidFill>
-                            <a:srgbClr val="1A1A1A"/>
-                          </a:solidFill>
-                          <a:latin typeface="Meiryo"/>
-                          <a:ea typeface="Meiryo"/>
-                        </a:rPr>
-                        <a:t>最大ライン数</a:t>
-                      </a:r>
-                    </a:p>
-                  </a:txBody>
-                  <a:tcPr anchor="ctr" marL="73152" marR="73152">
-                    <a:solidFill>
-                      <a:srgbClr val="FFFFFF"/>
-                    </a:solidFill>
-                  </a:tcPr>
-                </a:tc>
-                <a:tc>
-                  <a:txBody>
-                    <a:bodyPr/>
-                    <a:lstStyle/>
-                    <a:p>
-                      <a:r>
-                        <a:rPr sz="1100" b="1">
-                          <a:solidFill>
-                            <a:srgbClr val="C00000"/>
-                          </a:solidFill>
-                          <a:latin typeface="Meiryo"/>
-                          <a:ea typeface="Meiryo"/>
-                        </a:rPr>
-                        <a:t>20</a:t>
-                      </a:r>
-                    </a:p>
-                  </a:txBody>
-                  <a:tcPr anchor="ctr" marL="73152" marR="73152">
-                    <a:solidFill>
-                      <a:srgbClr val="FFFFFF"/>
-                    </a:solidFill>
-                  </a:tcPr>
-                </a:tc>
-                <a:tc>
-                  <a:txBody>
-                    <a:bodyPr/>
-                    <a:lstStyle/>
-                    <a:p>
-                      <a:r>
-                        <a:rPr sz="1100" b="0">
-                          <a:solidFill>
-                            <a:srgbClr val="1A1A1A"/>
-                          </a:solidFill>
-                          <a:latin typeface="Meiryo"/>
-                          <a:ea typeface="Meiryo"/>
-                        </a:rPr>
-                        <a:t>15</a:t>
-                      </a:r>
-                    </a:p>
-                  </a:txBody>
-                  <a:tcPr anchor="ctr" marL="73152" marR="73152">
-                    <a:solidFill>
-                      <a:srgbClr val="FFFFFF"/>
-                    </a:solidFill>
-                  </a:tcPr>
-                </a:tc>
-                <a:tc>
-                  <a:txBody>
-                    <a:bodyPr/>
-                    <a:lstStyle/>
-                    <a:p>
-                      <a:r>
-                        <a:rPr sz="1100" b="0">
-                          <a:solidFill>
-                            <a:srgbClr val="1A1A1A"/>
-                          </a:solidFill>
-                          <a:latin typeface="Meiryo"/>
-                          <a:ea typeface="Meiryo"/>
-                        </a:rPr>
-                        <a:t>15</a:t>
-                      </a:r>
-                    </a:p>
-                  </a:txBody>
-                  <a:tcPr anchor="ctr" marL="73152" marR="73152">
-                    <a:solidFill>
-                      <a:srgbClr val="FFFFFF"/>
-                    </a:solidFill>
-                  </a:tcPr>
-                </a:tc>
-                <a:tc>
-                  <a:txBody>
-                    <a:bodyPr/>
-                    <a:lstStyle/>
-                    <a:p>
-                      <a:r>
-                        <a:rPr sz="1100" b="1">
-                          <a:solidFill>
-                            <a:srgbClr val="C00000"/>
-                          </a:solidFill>
-                          <a:latin typeface="Meiryo"/>
-                          <a:ea typeface="Meiryo"/>
-                        </a:rPr>
-                        <a:t>20</a:t>
-                      </a:r>
-                    </a:p>
-                  </a:txBody>
-                  <a:tcPr anchor="ctr" marL="73152" marR="73152">
-                    <a:solidFill>
-                      <a:srgbClr val="FFFFFF"/>
-                    </a:solidFill>
-                  </a:tcPr>
-                </a:tc>
-                <a:tc>
-                  <a:txBody>
-                    <a:bodyPr/>
-                    <a:lstStyle/>
-                    <a:p>
-                      <a:r>
-                        <a:rPr sz="1100" b="0">
-                          <a:solidFill>
-                            <a:srgbClr val="1A1A1A"/>
-                          </a:solidFill>
-                          <a:latin typeface="Meiryo"/>
-                          <a:ea typeface="Meiryo"/>
-                        </a:rPr>
-                        <a:t>15</a:t>
-                      </a:r>
-                    </a:p>
-                  </a:txBody>
-                  <a:tcPr anchor="ctr" marL="73152" marR="73152">
-                    <a:solidFill>
-                      <a:srgbClr val="FFFFFF"/>
-                    </a:solidFill>
-                  </a:tcPr>
-                </a:tc>
-                <a:tc>
-                  <a:txBody>
-                    <a:bodyPr/>
-                    <a:lstStyle/>
-                    <a:p>
-                      <a:r>
-                        <a:rPr sz="1100" b="1">
-                          <a:solidFill>
-                            <a:srgbClr val="C00000"/>
-                          </a:solidFill>
-                          <a:latin typeface="Meiryo"/>
-                          <a:ea typeface="Meiryo"/>
-                        </a:rPr>
-                        <a:t>20</a:t>
-                      </a:r>
-                    </a:p>
-                  </a:txBody>
-                  <a:tcPr anchor="ctr" marL="73152" marR="73152">
-                    <a:solidFill>
-                      <a:srgbClr val="FFFFFF"/>
-                    </a:solidFill>
-                  </a:tcPr>
-                </a:tc>
-                <a:tc>
-                  <a:txBody>
-                    <a:bodyPr/>
-                    <a:lstStyle/>
-                    <a:p>
-                      <a:r>
-                        <a:rPr sz="1100" b="0">
-                          <a:solidFill>
-                            <a:srgbClr val="1A1A1A"/>
-                          </a:solidFill>
-                          <a:latin typeface="Meiryo"/>
-                          <a:ea typeface="Meiryo"/>
-                        </a:rPr>
-                        <a:t>15</a:t>
-                      </a:r>
-                    </a:p>
-                  </a:txBody>
-                  <a:tcPr anchor="ctr" marL="73152" marR="73152">
-                    <a:solidFill>
-                      <a:srgbClr val="FFFFFF"/>
-                    </a:solidFill>
-                  </a:tcPr>
-                </a:tc>
-                <a:tc>
-                  <a:txBody>
-                    <a:bodyPr/>
-                    <a:lstStyle/>
-                    <a:p>
-                      <a:r>
-                        <a:rPr sz="1100" b="0">
-                          <a:solidFill>
-                            <a:srgbClr val="1A1A1A"/>
-                          </a:solidFill>
-                          <a:latin typeface="Meiryo"/>
-                          <a:ea typeface="Meiryo"/>
-                        </a:rPr>
-                        <a:t>15</a:t>
-                      </a:r>
-                    </a:p>
-                  </a:txBody>
-                  <a:tcPr anchor="ctr" marL="73152" marR="73152">
-                    <a:solidFill>
-                      <a:srgbClr val="FFFFFF"/>
-                    </a:solidFill>
-                  </a:tcPr>
-                </a:tc>
-                <a:tc>
-                  <a:txBody>
-                    <a:bodyPr/>
-                    <a:lstStyle/>
-                    <a:p>
-                      <a:r>
-                        <a:rPr sz="1100" b="0">
-                          <a:solidFill>
-                            <a:srgbClr val="1A1A1A"/>
-                          </a:solidFill>
-                          <a:latin typeface="Meiryo"/>
-                          <a:ea typeface="Meiryo"/>
-                        </a:rPr>
-                        <a:t>15</a:t>
-                      </a:r>
-                    </a:p>
-                  </a:txBody>
-                  <a:tcPr anchor="ctr" marL="73152" marR="73152">
-                    <a:solidFill>
-                      <a:srgbClr val="FFFFFF"/>
-                    </a:solidFill>
-                  </a:tcPr>
-                </a:tc>
-                <a:tc>
-                  <a:txBody>
-                    <a:bodyPr/>
-                    <a:lstStyle/>
-                    <a:p>
-                      <a:r>
-                        <a:rPr sz="1100" b="0">
-                          <a:solidFill>
-                            <a:srgbClr val="1A1A1A"/>
-                          </a:solidFill>
-                          <a:latin typeface="Meiryo"/>
-                          <a:ea typeface="Meiryo"/>
-                        </a:rPr>
-                        <a:t>15</a:t>
-                      </a:r>
-                    </a:p>
-                  </a:txBody>
-                  <a:tcPr anchor="ctr" marL="73152" marR="73152">
-                    <a:solidFill>
-                      <a:srgbClr val="FFFFFF"/>
-                    </a:solidFill>
-                  </a:tcPr>
-                </a:tc>
-                <a:tc>
-                  <a:txBody>
-                    <a:bodyPr/>
-                    <a:lstStyle/>
-                    <a:p>
-                      <a:r>
-                        <a:rPr sz="1100" b="1">
-                          <a:solidFill>
-                            <a:srgbClr val="C00000"/>
-                          </a:solidFill>
-                          <a:latin typeface="Meiryo"/>
-                          <a:ea typeface="Meiryo"/>
-                        </a:rPr>
-                        <a:t>20</a:t>
-                      </a:r>
-                    </a:p>
-                  </a:txBody>
-                  <a:tcPr anchor="ctr" marL="73152" marR="73152">
-                    <a:solidFill>
-                      <a:srgbClr val="FFFFFF"/>
-                    </a:solidFill>
-                  </a:tcPr>
-                </a:tc>
-                <a:tc>
-                  <a:txBody>
-                    <a:bodyPr/>
-                    <a:lstStyle/>
-                    <a:p>
-                      <a:r>
-                        <a:rPr sz="1100" b="1">
-                          <a:solidFill>
-                            <a:srgbClr val="C00000"/>
-                          </a:solidFill>
-                          <a:latin typeface="Meiryo"/>
-                          <a:ea typeface="Meiryo"/>
-                        </a:rPr>
-                        <a:t>20</a:t>
+                        <a:t>契約期間中、当社は国内の他の携帯キャリア(3社)との店頭イベント契約を行いません</a:t>
                       </a:r>
                     </a:p>
                   </a:txBody>
@@ -10821,8 +11052,8 @@
         </p:nvSpPr>
         <p:spPr>
           <a:xfrm>
-            <a:off x="640080" y="3429000"/>
-            <a:ext cx="10881360" cy="365760"/>
+            <a:off x="640080" y="5943600"/>
+            <a:ext cx="10881360" cy="457200"/>
           </a:xfrm>
           <a:prstGeom prst="rect">
             <a:avLst/>
@@ -10848,374 +11079,7 @@
                 <a:latin typeface="Meiryo"/>
                 <a:ea typeface="Meiryo"/>
               </a:rPr>
-              <a:t>※ 2027年・2028年とも同パターン。2029年1〜3月は1月が最大20ライン、2〜3月は基準15ライン</a:t>
-            </a:r>
-          </a:p>
-        </p:txBody>
-      </p:sp>
-      <p:graphicFrame>
-        <p:nvGraphicFramePr>
-          <p:cNvPr id="10" name="Table 9"/>
-          <p:cNvGraphicFramePr>
-            <a:graphicFrameLocks noGrp="1"/>
-          </p:cNvGraphicFramePr>
-          <p:nvPr/>
-        </p:nvGraphicFramePr>
-        <p:xfrm>
-          <a:off x="640080" y="3931920"/>
-          <a:ext cx="10881360" cy="1508760"/>
-        </p:xfrm>
-        <a:graphic>
-          <a:graphicData uri="http://schemas.openxmlformats.org/drawingml/2006/table">
-            <a:tbl>
-              <a:tblPr firstRow="1" bandRow="1">
-                <a:tableStyleId>{5C22544A-7EE6-4342-B048-85BDC9FD1C3A}</a:tableStyleId>
-              </a:tblPr>
-              <a:tblGrid>
-                <a:gridCol w="3627120"/>
-                <a:gridCol w="1813560"/>
-                <a:gridCol w="2720340"/>
-                <a:gridCol w="2720340"/>
-              </a:tblGrid>
-              <a:tr h="502920">
-                <a:tc>
-                  <a:txBody>
-                    <a:bodyPr/>
-                    <a:lstStyle/>
-                    <a:p>
-                      <a:r>
-                        <a:rPr sz="1150" b="1">
-                          <a:solidFill>
-                            <a:srgbClr val="FFFFFF"/>
-                          </a:solidFill>
-                          <a:latin typeface="Meiryo"/>
-                          <a:ea typeface="Meiryo"/>
-                        </a:rPr>
-                        <a:t>27ヶ月合計</a:t>
-                      </a:r>
-                    </a:p>
-                  </a:txBody>
-                  <a:tcPr anchor="ctr" marL="73152" marR="73152">
-                    <a:solidFill>
-                      <a:srgbClr val="232278"/>
-                    </a:solidFill>
-                  </a:tcPr>
-                </a:tc>
-                <a:tc>
-                  <a:txBody>
-                    <a:bodyPr/>
-                    <a:lstStyle/>
-                    <a:p>
-                      <a:r>
-                        <a:rPr sz="1150" b="1">
-                          <a:solidFill>
-                            <a:srgbClr val="FFFFFF"/>
-                          </a:solidFill>
-                          <a:latin typeface="Meiryo"/>
-                          <a:ea typeface="Meiryo"/>
-                        </a:rPr>
-                        <a:t>開催日数</a:t>
-                      </a:r>
-                    </a:p>
-                  </a:txBody>
-                  <a:tcPr anchor="ctr" marL="73152" marR="73152">
-                    <a:solidFill>
-                      <a:srgbClr val="232278"/>
-                    </a:solidFill>
-                  </a:tcPr>
-                </a:tc>
-                <a:tc>
-                  <a:txBody>
-                    <a:bodyPr/>
-                    <a:lstStyle/>
-                    <a:p>
-                      <a:r>
-                        <a:rPr sz="1150" b="1">
-                          <a:solidFill>
-                            <a:srgbClr val="FFFFFF"/>
-                          </a:solidFill>
-                          <a:latin typeface="Meiryo"/>
-                          <a:ea typeface="Meiryo"/>
-                        </a:rPr>
-                        <a:t>開催数(ライン×日)</a:t>
-                      </a:r>
-                    </a:p>
-                  </a:txBody>
-                  <a:tcPr anchor="ctr" marL="73152" marR="73152">
-                    <a:solidFill>
-                      <a:srgbClr val="232278"/>
-                    </a:solidFill>
-                  </a:tcPr>
-                </a:tc>
-                <a:tc>
-                  <a:txBody>
-                    <a:bodyPr/>
-                    <a:lstStyle/>
-                    <a:p>
-                      <a:r>
-                        <a:rPr sz="1150" b="1">
-                          <a:solidFill>
-                            <a:srgbClr val="FFFFFF"/>
-                          </a:solidFill>
-                          <a:latin typeface="Meiryo"/>
-                          <a:ea typeface="Meiryo"/>
-                        </a:rPr>
-                        <a:t>稼働費(税別)</a:t>
-                      </a:r>
-                    </a:p>
-                  </a:txBody>
-                  <a:tcPr anchor="ctr" marL="73152" marR="73152">
-                    <a:solidFill>
-                      <a:srgbClr val="232278"/>
-                    </a:solidFill>
-                  </a:tcPr>
-                </a:tc>
-              </a:tr>
-              <a:tr h="502920">
-                <a:tc>
-                  <a:txBody>
-                    <a:bodyPr/>
-                    <a:lstStyle/>
-                    <a:p>
-                      <a:r>
-                        <a:rPr sz="1150" b="1">
-                          <a:solidFill>
-                            <a:srgbClr val="1A1A1A"/>
-                          </a:solidFill>
-                          <a:latin typeface="Meiryo"/>
-                          <a:ea typeface="Meiryo"/>
-                        </a:rPr>
-                        <a:t>基準(15ライン固定)</a:t>
-                      </a:r>
-                    </a:p>
-                  </a:txBody>
-                  <a:tcPr anchor="ctr" marL="73152" marR="73152">
-                    <a:solidFill>
-                      <a:srgbClr val="FFFFFF"/>
-                    </a:solidFill>
-                  </a:tcPr>
-                </a:tc>
-                <a:tc>
-                  <a:txBody>
-                    <a:bodyPr/>
-                    <a:lstStyle/>
-                    <a:p>
-                      <a:r>
-                        <a:rPr sz="1150" b="0">
-                          <a:solidFill>
-                            <a:srgbClr val="1A1A1A"/>
-                          </a:solidFill>
-                          <a:latin typeface="Meiryo"/>
-                          <a:ea typeface="Meiryo"/>
-                        </a:rPr>
-                        <a:t>234日</a:t>
-                      </a:r>
-                    </a:p>
-                  </a:txBody>
-                  <a:tcPr anchor="ctr" marL="73152" marR="73152">
-                    <a:solidFill>
-                      <a:srgbClr val="FFFFFF"/>
-                    </a:solidFill>
-                  </a:tcPr>
-                </a:tc>
-                <a:tc>
-                  <a:txBody>
-                    <a:bodyPr/>
-                    <a:lstStyle/>
-                    <a:p>
-                      <a:r>
-                        <a:rPr sz="1150" b="0">
-                          <a:solidFill>
-                            <a:srgbClr val="1A1A1A"/>
-                          </a:solidFill>
-                          <a:latin typeface="Meiryo"/>
-                          <a:ea typeface="Meiryo"/>
-                        </a:rPr>
-                        <a:t>3,510現場</a:t>
-                      </a:r>
-                    </a:p>
-                  </a:txBody>
-                  <a:tcPr anchor="ctr" marL="73152" marR="73152">
-                    <a:solidFill>
-                      <a:srgbClr val="FFFFFF"/>
-                    </a:solidFill>
-                  </a:tcPr>
-                </a:tc>
-                <a:tc>
-                  <a:txBody>
-                    <a:bodyPr/>
-                    <a:lstStyle/>
-                    <a:p>
-                      <a:r>
-                        <a:rPr sz="1150" b="1">
-                          <a:solidFill>
-                            <a:srgbClr val="1A1A1A"/>
-                          </a:solidFill>
-                          <a:latin typeface="Meiryo"/>
-                          <a:ea typeface="Meiryo"/>
-                        </a:rPr>
-                        <a:t>3億5,100万円</a:t>
-                      </a:r>
-                    </a:p>
-                  </a:txBody>
-                  <a:tcPr anchor="ctr" marL="73152" marR="73152">
-                    <a:solidFill>
-                      <a:srgbClr val="FFFFFF"/>
-                    </a:solidFill>
-                  </a:tcPr>
-                </a:tc>
-              </a:tr>
-              <a:tr h="502920">
-                <a:tc>
-                  <a:txBody>
-                    <a:bodyPr/>
-                    <a:lstStyle/>
-                    <a:p>
-                      <a:r>
-                        <a:rPr sz="1150" b="1">
-                          <a:solidFill>
-                            <a:srgbClr val="1A1A1A"/>
-                          </a:solidFill>
-                          <a:latin typeface="Meiryo"/>
-                          <a:ea typeface="Meiryo"/>
-                        </a:rPr>
-                        <a:t>最大(余裕月20ライン)</a:t>
-                      </a:r>
-                    </a:p>
-                  </a:txBody>
-                  <a:tcPr anchor="ctr" marL="73152" marR="73152">
-                    <a:solidFill>
-                      <a:srgbClr val="F2F4F6"/>
-                    </a:solidFill>
-                  </a:tcPr>
-                </a:tc>
-                <a:tc>
-                  <a:txBody>
-                    <a:bodyPr/>
-                    <a:lstStyle/>
-                    <a:p>
-                      <a:r>
-                        <a:rPr sz="1150" b="0">
-                          <a:solidFill>
-                            <a:srgbClr val="1A1A1A"/>
-                          </a:solidFill>
-                          <a:latin typeface="Meiryo"/>
-                          <a:ea typeface="Meiryo"/>
-                        </a:rPr>
-                        <a:t>234日</a:t>
-                      </a:r>
-                    </a:p>
-                  </a:txBody>
-                  <a:tcPr anchor="ctr" marL="73152" marR="73152">
-                    <a:solidFill>
-                      <a:srgbClr val="F2F4F6"/>
-                    </a:solidFill>
-                  </a:tcPr>
-                </a:tc>
-                <a:tc>
-                  <a:txBody>
-                    <a:bodyPr/>
-                    <a:lstStyle/>
-                    <a:p>
-                      <a:r>
-                        <a:rPr sz="1150" b="0">
-                          <a:solidFill>
-                            <a:srgbClr val="1A1A1A"/>
-                          </a:solidFill>
-                          <a:latin typeface="Meiryo"/>
-                          <a:ea typeface="Meiryo"/>
-                        </a:rPr>
-                        <a:t>3,980現場</a:t>
-                      </a:r>
-                    </a:p>
-                  </a:txBody>
-                  <a:tcPr anchor="ctr" marL="73152" marR="73152">
-                    <a:solidFill>
-                      <a:srgbClr val="F2F4F6"/>
-                    </a:solidFill>
-                  </a:tcPr>
-                </a:tc>
-                <a:tc>
-                  <a:txBody>
-                    <a:bodyPr/>
-                    <a:lstStyle/>
-                    <a:p>
-                      <a:r>
-                        <a:rPr sz="1150" b="1">
-                          <a:solidFill>
-                            <a:srgbClr val="C00000"/>
-                          </a:solidFill>
-                          <a:latin typeface="Meiryo"/>
-                          <a:ea typeface="Meiryo"/>
-                        </a:rPr>
-                        <a:t>3億9,800万円</a:t>
-                      </a:r>
-                    </a:p>
-                  </a:txBody>
-                  <a:tcPr anchor="ctr" marL="73152" marR="73152">
-                    <a:solidFill>
-                      <a:srgbClr val="F2F4F6"/>
-                    </a:solidFill>
-                  </a:tcPr>
-                </a:tc>
-              </a:tr>
-            </a:tbl>
-          </a:graphicData>
-        </a:graphic>
-      </p:graphicFrame>
-      <p:sp>
-        <p:nvSpPr>
-          <p:cNvPr id="11" name="TextBox 10"/>
-          <p:cNvSpPr txBox="1"/>
-          <p:nvPr/>
-        </p:nvSpPr>
-        <p:spPr>
-          <a:xfrm>
-            <a:off x="640080" y="5577840"/>
-            <a:ext cx="10881360" cy="731520"/>
-          </a:xfrm>
-          <a:prstGeom prst="rect">
-            <a:avLst/>
-          </a:prstGeom>
-          <a:noFill/>
-        </p:spPr>
-        <p:txBody>
-          <a:bodyPr wrap="square" anchor="t" lIns="0" rIns="0" tIns="0" bIns="0">
-            <a:spAutoFit/>
-          </a:bodyPr>
-          <a:lstStyle/>
-          <a:p>
-            <a:pPr algn="l">
-              <a:spcAft>
-                <a:spcPts val="400"/>
-              </a:spcAft>
-            </a:pPr>
-            <a:r>
-              <a:rPr sz="1100" b="0">
-                <a:solidFill>
-                  <a:srgbClr val="1A1A1A"/>
-                </a:solidFill>
-                <a:latin typeface="Meiryo"/>
-                <a:ea typeface="Meiryo"/>
-              </a:rPr>
-              <a:t>・2月・3月・8月・9月は当社主催行事との調整月のため基準15ラインでの運用となります　・増枠分は前月1日の開催確定時に確定します</a:t>
-            </a:r>
-          </a:p>
-          <a:p>
-            <a:pPr algn="l">
-              <a:spcAft>
-                <a:spcPts val="400"/>
-              </a:spcAft>
-            </a:pPr>
-            <a:r>
-              <a:rPr sz="1100" b="0">
-                <a:solidFill>
-                  <a:srgbClr val="1A1A1A"/>
-                </a:solidFill>
-                <a:latin typeface="Meiryo"/>
-                <a:ea typeface="Meiryo"/>
-              </a:rPr>
-              <a:t>・上記は稼働費のみ。年間IP使用料・現場諸経費・実費は別途</a:t>
+              <a:t>※ キャンセル料は7月ご提案時のスポット向け規定から、本契約(最低保証・1ヶ月前確定フロー)向けの規定に更新しています</a:t>
             </a:r>
           </a:p>
         </p:txBody>
@@ -11297,7 +11161,7 @@
                 <a:latin typeface="Meiryo"/>
                 <a:ea typeface="Meiryo"/>
               </a:rPr>
-              <a:t>4. 制作物・権利まわりの進め方</a:t>
+              <a:t>3. ライン供給計画(2027年1月〜2029年3月)</a:t>
             </a:r>
           </a:p>
         </p:txBody>
@@ -11337,7 +11201,7 @@
                 <a:latin typeface="Meiryo"/>
                 <a:ea typeface="Meiryo"/>
               </a:rPr>
-              <a:t>キャンペーンビジュアルの確定を起点に、仮申請フローで各制作物を確定していきます</a:t>
+              <a:t>基準15ラインを最低保証の対象とし、余裕のある月は最大20ラインまで増枠できます。詳細は別紙(月別供給計画)をご参照ください</a:t>
             </a:r>
           </a:p>
         </p:txBody>
@@ -11462,52 +11326,1247 @@
           </a:p>
         </p:txBody>
       </p:sp>
-      <p:sp>
-        <p:nvSpPr>
-          <p:cNvPr id="8" name="Rounded Rectangle 7"/>
-          <p:cNvSpPr/>
+      <p:graphicFrame>
+        <p:nvGraphicFramePr>
+          <p:cNvPr id="8" name="Table 7"/>
+          <p:cNvGraphicFramePr>
+            <a:graphicFrameLocks noGrp="1"/>
+          </p:cNvGraphicFramePr>
           <p:nvPr/>
-        </p:nvSpPr>
-        <p:spPr>
-          <a:xfrm>
-            <a:off x="640080" y="1463040"/>
-            <a:ext cx="5303520" cy="2286000"/>
-          </a:xfrm>
-          <a:prstGeom prst="roundRect">
-            <a:avLst>
-              <a:gd name="adj" fmla="val 6000"/>
-            </a:avLst>
-          </a:prstGeom>
-          <a:solidFill>
-            <a:srgbClr val="F2F4F6"/>
-          </a:solidFill>
-          <a:ln>
-            <a:noFill/>
-          </a:ln>
-          <a:effectLst/>
-        </p:spPr>
-        <p:style>
-          <a:lnRef idx="1">
-            <a:schemeClr val="accent1"/>
-          </a:lnRef>
-          <a:fillRef idx="3">
-            <a:schemeClr val="accent1"/>
-          </a:fillRef>
-          <a:effectRef idx="2">
-            <a:schemeClr val="accent1"/>
-          </a:effectRef>
-          <a:fontRef idx="minor">
-            <a:schemeClr val="lt1"/>
-          </a:fontRef>
-        </p:style>
-        <p:txBody>
-          <a:bodyPr rtlCol="0" anchor="ctr"/>
-          <a:lstStyle/>
-          <a:p>
-            <a:pPr algn="ctr"/>
-          </a:p>
-        </p:txBody>
-      </p:sp>
+        </p:nvGraphicFramePr>
+        <p:xfrm>
+          <a:off x="640080" y="1417320"/>
+          <a:ext cx="10881356" cy="1828800"/>
+        </p:xfrm>
+        <a:graphic>
+          <a:graphicData uri="http://schemas.openxmlformats.org/drawingml/2006/table">
+            <a:tbl>
+              <a:tblPr firstRow="1" bandRow="1">
+                <a:tableStyleId>{5C22544A-7EE6-4342-B048-85BDC9FD1C3A}</a:tableStyleId>
+              </a:tblPr>
+              <a:tblGrid>
+                <a:gridCol w="2123192"/>
+                <a:gridCol w="729847"/>
+                <a:gridCol w="729847"/>
+                <a:gridCol w="729847"/>
+                <a:gridCol w="729847"/>
+                <a:gridCol w="729847"/>
+                <a:gridCol w="729847"/>
+                <a:gridCol w="729847"/>
+                <a:gridCol w="729847"/>
+                <a:gridCol w="729847"/>
+                <a:gridCol w="729847"/>
+                <a:gridCol w="729847"/>
+                <a:gridCol w="729847"/>
+              </a:tblGrid>
+              <a:tr h="457200">
+                <a:tc>
+                  <a:txBody>
+                    <a:bodyPr/>
+                    <a:lstStyle/>
+                    <a:p>
+                      <a:r>
+                        <a:rPr sz="1100" b="1">
+                          <a:solidFill>
+                            <a:srgbClr val="FFFFFF"/>
+                          </a:solidFill>
+                          <a:latin typeface="Meiryo"/>
+                          <a:ea typeface="Meiryo"/>
+                        </a:rPr>
+                        <a:t/>
+                      </a:r>
+                    </a:p>
+                  </a:txBody>
+                  <a:tcPr anchor="ctr" marL="73152" marR="73152">
+                    <a:solidFill>
+                      <a:srgbClr val="232278"/>
+                    </a:solidFill>
+                  </a:tcPr>
+                </a:tc>
+                <a:tc>
+                  <a:txBody>
+                    <a:bodyPr/>
+                    <a:lstStyle/>
+                    <a:p>
+                      <a:r>
+                        <a:rPr sz="1100" b="1">
+                          <a:solidFill>
+                            <a:srgbClr val="FFFFFF"/>
+                          </a:solidFill>
+                          <a:latin typeface="Meiryo"/>
+                          <a:ea typeface="Meiryo"/>
+                        </a:rPr>
+                        <a:t>1月</a:t>
+                      </a:r>
+                    </a:p>
+                  </a:txBody>
+                  <a:tcPr anchor="ctr" marL="73152" marR="73152">
+                    <a:solidFill>
+                      <a:srgbClr val="232278"/>
+                    </a:solidFill>
+                  </a:tcPr>
+                </a:tc>
+                <a:tc>
+                  <a:txBody>
+                    <a:bodyPr/>
+                    <a:lstStyle/>
+                    <a:p>
+                      <a:r>
+                        <a:rPr sz="1100" b="1">
+                          <a:solidFill>
+                            <a:srgbClr val="FFFFFF"/>
+                          </a:solidFill>
+                          <a:latin typeface="Meiryo"/>
+                          <a:ea typeface="Meiryo"/>
+                        </a:rPr>
+                        <a:t>2月</a:t>
+                      </a:r>
+                    </a:p>
+                  </a:txBody>
+                  <a:tcPr anchor="ctr" marL="73152" marR="73152">
+                    <a:solidFill>
+                      <a:srgbClr val="232278"/>
+                    </a:solidFill>
+                  </a:tcPr>
+                </a:tc>
+                <a:tc>
+                  <a:txBody>
+                    <a:bodyPr/>
+                    <a:lstStyle/>
+                    <a:p>
+                      <a:r>
+                        <a:rPr sz="1100" b="1">
+                          <a:solidFill>
+                            <a:srgbClr val="FFFFFF"/>
+                          </a:solidFill>
+                          <a:latin typeface="Meiryo"/>
+                          <a:ea typeface="Meiryo"/>
+                        </a:rPr>
+                        <a:t>3月</a:t>
+                      </a:r>
+                    </a:p>
+                  </a:txBody>
+                  <a:tcPr anchor="ctr" marL="73152" marR="73152">
+                    <a:solidFill>
+                      <a:srgbClr val="232278"/>
+                    </a:solidFill>
+                  </a:tcPr>
+                </a:tc>
+                <a:tc>
+                  <a:txBody>
+                    <a:bodyPr/>
+                    <a:lstStyle/>
+                    <a:p>
+                      <a:r>
+                        <a:rPr sz="1100" b="1">
+                          <a:solidFill>
+                            <a:srgbClr val="FFFFFF"/>
+                          </a:solidFill>
+                          <a:latin typeface="Meiryo"/>
+                          <a:ea typeface="Meiryo"/>
+                        </a:rPr>
+                        <a:t>4月</a:t>
+                      </a:r>
+                    </a:p>
+                  </a:txBody>
+                  <a:tcPr anchor="ctr" marL="73152" marR="73152">
+                    <a:solidFill>
+                      <a:srgbClr val="232278"/>
+                    </a:solidFill>
+                  </a:tcPr>
+                </a:tc>
+                <a:tc>
+                  <a:txBody>
+                    <a:bodyPr/>
+                    <a:lstStyle/>
+                    <a:p>
+                      <a:r>
+                        <a:rPr sz="1100" b="1">
+                          <a:solidFill>
+                            <a:srgbClr val="FFFFFF"/>
+                          </a:solidFill>
+                          <a:latin typeface="Meiryo"/>
+                          <a:ea typeface="Meiryo"/>
+                        </a:rPr>
+                        <a:t>5月</a:t>
+                      </a:r>
+                    </a:p>
+                  </a:txBody>
+                  <a:tcPr anchor="ctr" marL="73152" marR="73152">
+                    <a:solidFill>
+                      <a:srgbClr val="232278"/>
+                    </a:solidFill>
+                  </a:tcPr>
+                </a:tc>
+                <a:tc>
+                  <a:txBody>
+                    <a:bodyPr/>
+                    <a:lstStyle/>
+                    <a:p>
+                      <a:r>
+                        <a:rPr sz="1100" b="1">
+                          <a:solidFill>
+                            <a:srgbClr val="FFFFFF"/>
+                          </a:solidFill>
+                          <a:latin typeface="Meiryo"/>
+                          <a:ea typeface="Meiryo"/>
+                        </a:rPr>
+                        <a:t>6月</a:t>
+                      </a:r>
+                    </a:p>
+                  </a:txBody>
+                  <a:tcPr anchor="ctr" marL="73152" marR="73152">
+                    <a:solidFill>
+                      <a:srgbClr val="232278"/>
+                    </a:solidFill>
+                  </a:tcPr>
+                </a:tc>
+                <a:tc>
+                  <a:txBody>
+                    <a:bodyPr/>
+                    <a:lstStyle/>
+                    <a:p>
+                      <a:r>
+                        <a:rPr sz="1100" b="1">
+                          <a:solidFill>
+                            <a:srgbClr val="FFFFFF"/>
+                          </a:solidFill>
+                          <a:latin typeface="Meiryo"/>
+                          <a:ea typeface="Meiryo"/>
+                        </a:rPr>
+                        <a:t>7月</a:t>
+                      </a:r>
+                    </a:p>
+                  </a:txBody>
+                  <a:tcPr anchor="ctr" marL="73152" marR="73152">
+                    <a:solidFill>
+                      <a:srgbClr val="232278"/>
+                    </a:solidFill>
+                  </a:tcPr>
+                </a:tc>
+                <a:tc>
+                  <a:txBody>
+                    <a:bodyPr/>
+                    <a:lstStyle/>
+                    <a:p>
+                      <a:r>
+                        <a:rPr sz="1100" b="1">
+                          <a:solidFill>
+                            <a:srgbClr val="FFFFFF"/>
+                          </a:solidFill>
+                          <a:latin typeface="Meiryo"/>
+                          <a:ea typeface="Meiryo"/>
+                        </a:rPr>
+                        <a:t>8月</a:t>
+                      </a:r>
+                    </a:p>
+                  </a:txBody>
+                  <a:tcPr anchor="ctr" marL="73152" marR="73152">
+                    <a:solidFill>
+                      <a:srgbClr val="232278"/>
+                    </a:solidFill>
+                  </a:tcPr>
+                </a:tc>
+                <a:tc>
+                  <a:txBody>
+                    <a:bodyPr/>
+                    <a:lstStyle/>
+                    <a:p>
+                      <a:r>
+                        <a:rPr sz="1100" b="1">
+                          <a:solidFill>
+                            <a:srgbClr val="FFFFFF"/>
+                          </a:solidFill>
+                          <a:latin typeface="Meiryo"/>
+                          <a:ea typeface="Meiryo"/>
+                        </a:rPr>
+                        <a:t>9月</a:t>
+                      </a:r>
+                    </a:p>
+                  </a:txBody>
+                  <a:tcPr anchor="ctr" marL="73152" marR="73152">
+                    <a:solidFill>
+                      <a:srgbClr val="232278"/>
+                    </a:solidFill>
+                  </a:tcPr>
+                </a:tc>
+                <a:tc>
+                  <a:txBody>
+                    <a:bodyPr/>
+                    <a:lstStyle/>
+                    <a:p>
+                      <a:r>
+                        <a:rPr sz="1100" b="1">
+                          <a:solidFill>
+                            <a:srgbClr val="FFFFFF"/>
+                          </a:solidFill>
+                          <a:latin typeface="Meiryo"/>
+                          <a:ea typeface="Meiryo"/>
+                        </a:rPr>
+                        <a:t>10月</a:t>
+                      </a:r>
+                    </a:p>
+                  </a:txBody>
+                  <a:tcPr anchor="ctr" marL="73152" marR="73152">
+                    <a:solidFill>
+                      <a:srgbClr val="232278"/>
+                    </a:solidFill>
+                  </a:tcPr>
+                </a:tc>
+                <a:tc>
+                  <a:txBody>
+                    <a:bodyPr/>
+                    <a:lstStyle/>
+                    <a:p>
+                      <a:r>
+                        <a:rPr sz="1100" b="1">
+                          <a:solidFill>
+                            <a:srgbClr val="FFFFFF"/>
+                          </a:solidFill>
+                          <a:latin typeface="Meiryo"/>
+                          <a:ea typeface="Meiryo"/>
+                        </a:rPr>
+                        <a:t>11月</a:t>
+                      </a:r>
+                    </a:p>
+                  </a:txBody>
+                  <a:tcPr anchor="ctr" marL="73152" marR="73152">
+                    <a:solidFill>
+                      <a:srgbClr val="232278"/>
+                    </a:solidFill>
+                  </a:tcPr>
+                </a:tc>
+                <a:tc>
+                  <a:txBody>
+                    <a:bodyPr/>
+                    <a:lstStyle/>
+                    <a:p>
+                      <a:r>
+                        <a:rPr sz="1100" b="1">
+                          <a:solidFill>
+                            <a:srgbClr val="FFFFFF"/>
+                          </a:solidFill>
+                          <a:latin typeface="Meiryo"/>
+                          <a:ea typeface="Meiryo"/>
+                        </a:rPr>
+                        <a:t>12月</a:t>
+                      </a:r>
+                    </a:p>
+                  </a:txBody>
+                  <a:tcPr anchor="ctr" marL="73152" marR="73152">
+                    <a:solidFill>
+                      <a:srgbClr val="232278"/>
+                    </a:solidFill>
+                  </a:tcPr>
+                </a:tc>
+              </a:tr>
+              <a:tr h="457200">
+                <a:tc>
+                  <a:txBody>
+                    <a:bodyPr/>
+                    <a:lstStyle/>
+                    <a:p>
+                      <a:r>
+                        <a:rPr sz="1100" b="1">
+                          <a:solidFill>
+                            <a:srgbClr val="1A1A1A"/>
+                          </a:solidFill>
+                          <a:latin typeface="Meiryo"/>
+                          <a:ea typeface="Meiryo"/>
+                        </a:rPr>
+                        <a:t>開催日数(土日)</a:t>
+                      </a:r>
+                    </a:p>
+                  </a:txBody>
+                  <a:tcPr anchor="ctr" marL="73152" marR="73152">
+                    <a:solidFill>
+                      <a:srgbClr val="FFFFFF"/>
+                    </a:solidFill>
+                  </a:tcPr>
+                </a:tc>
+                <a:tc>
+                  <a:txBody>
+                    <a:bodyPr/>
+                    <a:lstStyle/>
+                    <a:p>
+                      <a:r>
+                        <a:rPr sz="1100" b="0">
+                          <a:solidFill>
+                            <a:srgbClr val="1A1A1A"/>
+                          </a:solidFill>
+                          <a:latin typeface="Meiryo"/>
+                          <a:ea typeface="Meiryo"/>
+                        </a:rPr>
+                        <a:t>10</a:t>
+                      </a:r>
+                    </a:p>
+                  </a:txBody>
+                  <a:tcPr anchor="ctr" marL="73152" marR="73152">
+                    <a:solidFill>
+                      <a:srgbClr val="FFFFFF"/>
+                    </a:solidFill>
+                  </a:tcPr>
+                </a:tc>
+                <a:tc>
+                  <a:txBody>
+                    <a:bodyPr/>
+                    <a:lstStyle/>
+                    <a:p>
+                      <a:r>
+                        <a:rPr sz="1100" b="0">
+                          <a:solidFill>
+                            <a:srgbClr val="1A1A1A"/>
+                          </a:solidFill>
+                          <a:latin typeface="Meiryo"/>
+                          <a:ea typeface="Meiryo"/>
+                        </a:rPr>
+                        <a:t>8</a:t>
+                      </a:r>
+                    </a:p>
+                  </a:txBody>
+                  <a:tcPr anchor="ctr" marL="73152" marR="73152">
+                    <a:solidFill>
+                      <a:srgbClr val="FFFFFF"/>
+                    </a:solidFill>
+                  </a:tcPr>
+                </a:tc>
+                <a:tc>
+                  <a:txBody>
+                    <a:bodyPr/>
+                    <a:lstStyle/>
+                    <a:p>
+                      <a:r>
+                        <a:rPr sz="1100" b="0">
+                          <a:solidFill>
+                            <a:srgbClr val="1A1A1A"/>
+                          </a:solidFill>
+                          <a:latin typeface="Meiryo"/>
+                          <a:ea typeface="Meiryo"/>
+                        </a:rPr>
+                        <a:t>8</a:t>
+                      </a:r>
+                    </a:p>
+                  </a:txBody>
+                  <a:tcPr anchor="ctr" marL="73152" marR="73152">
+                    <a:solidFill>
+                      <a:srgbClr val="FFFFFF"/>
+                    </a:solidFill>
+                  </a:tcPr>
+                </a:tc>
+                <a:tc>
+                  <a:txBody>
+                    <a:bodyPr/>
+                    <a:lstStyle/>
+                    <a:p>
+                      <a:r>
+                        <a:rPr sz="1100" b="0">
+                          <a:solidFill>
+                            <a:srgbClr val="1A1A1A"/>
+                          </a:solidFill>
+                          <a:latin typeface="Meiryo"/>
+                          <a:ea typeface="Meiryo"/>
+                        </a:rPr>
+                        <a:t>8</a:t>
+                      </a:r>
+                    </a:p>
+                  </a:txBody>
+                  <a:tcPr anchor="ctr" marL="73152" marR="73152">
+                    <a:solidFill>
+                      <a:srgbClr val="FFFFFF"/>
+                    </a:solidFill>
+                  </a:tcPr>
+                </a:tc>
+                <a:tc>
+                  <a:txBody>
+                    <a:bodyPr/>
+                    <a:lstStyle/>
+                    <a:p>
+                      <a:r>
+                        <a:rPr sz="1100" b="0">
+                          <a:solidFill>
+                            <a:srgbClr val="1A1A1A"/>
+                          </a:solidFill>
+                          <a:latin typeface="Meiryo"/>
+                          <a:ea typeface="Meiryo"/>
+                        </a:rPr>
+                        <a:t>10</a:t>
+                      </a:r>
+                    </a:p>
+                  </a:txBody>
+                  <a:tcPr anchor="ctr" marL="73152" marR="73152">
+                    <a:solidFill>
+                      <a:srgbClr val="FFFFFF"/>
+                    </a:solidFill>
+                  </a:tcPr>
+                </a:tc>
+                <a:tc>
+                  <a:txBody>
+                    <a:bodyPr/>
+                    <a:lstStyle/>
+                    <a:p>
+                      <a:r>
+                        <a:rPr sz="1100" b="0">
+                          <a:solidFill>
+                            <a:srgbClr val="1A1A1A"/>
+                          </a:solidFill>
+                          <a:latin typeface="Meiryo"/>
+                          <a:ea typeface="Meiryo"/>
+                        </a:rPr>
+                        <a:t>8</a:t>
+                      </a:r>
+                    </a:p>
+                  </a:txBody>
+                  <a:tcPr anchor="ctr" marL="73152" marR="73152">
+                    <a:solidFill>
+                      <a:srgbClr val="FFFFFF"/>
+                    </a:solidFill>
+                  </a:tcPr>
+                </a:tc>
+                <a:tc>
+                  <a:txBody>
+                    <a:bodyPr/>
+                    <a:lstStyle/>
+                    <a:p>
+                      <a:r>
+                        <a:rPr sz="1100" b="0">
+                          <a:solidFill>
+                            <a:srgbClr val="1A1A1A"/>
+                          </a:solidFill>
+                          <a:latin typeface="Meiryo"/>
+                          <a:ea typeface="Meiryo"/>
+                        </a:rPr>
+                        <a:t>9</a:t>
+                      </a:r>
+                    </a:p>
+                  </a:txBody>
+                  <a:tcPr anchor="ctr" marL="73152" marR="73152">
+                    <a:solidFill>
+                      <a:srgbClr val="FFFFFF"/>
+                    </a:solidFill>
+                  </a:tcPr>
+                </a:tc>
+                <a:tc>
+                  <a:txBody>
+                    <a:bodyPr/>
+                    <a:lstStyle/>
+                    <a:p>
+                      <a:r>
+                        <a:rPr sz="1100" b="0">
+                          <a:solidFill>
+                            <a:srgbClr val="1A1A1A"/>
+                          </a:solidFill>
+                          <a:latin typeface="Meiryo"/>
+                          <a:ea typeface="Meiryo"/>
+                        </a:rPr>
+                        <a:t>9</a:t>
+                      </a:r>
+                    </a:p>
+                  </a:txBody>
+                  <a:tcPr anchor="ctr" marL="73152" marR="73152">
+                    <a:solidFill>
+                      <a:srgbClr val="FFFFFF"/>
+                    </a:solidFill>
+                  </a:tcPr>
+                </a:tc>
+                <a:tc>
+                  <a:txBody>
+                    <a:bodyPr/>
+                    <a:lstStyle/>
+                    <a:p>
+                      <a:r>
+                        <a:rPr sz="1100" b="0">
+                          <a:solidFill>
+                            <a:srgbClr val="1A1A1A"/>
+                          </a:solidFill>
+                          <a:latin typeface="Meiryo"/>
+                          <a:ea typeface="Meiryo"/>
+                        </a:rPr>
+                        <a:t>8</a:t>
+                      </a:r>
+                    </a:p>
+                  </a:txBody>
+                  <a:tcPr anchor="ctr" marL="73152" marR="73152">
+                    <a:solidFill>
+                      <a:srgbClr val="FFFFFF"/>
+                    </a:solidFill>
+                  </a:tcPr>
+                </a:tc>
+                <a:tc>
+                  <a:txBody>
+                    <a:bodyPr/>
+                    <a:lstStyle/>
+                    <a:p>
+                      <a:r>
+                        <a:rPr sz="1100" b="0">
+                          <a:solidFill>
+                            <a:srgbClr val="1A1A1A"/>
+                          </a:solidFill>
+                          <a:latin typeface="Meiryo"/>
+                          <a:ea typeface="Meiryo"/>
+                        </a:rPr>
+                        <a:t>10</a:t>
+                      </a:r>
+                    </a:p>
+                  </a:txBody>
+                  <a:tcPr anchor="ctr" marL="73152" marR="73152">
+                    <a:solidFill>
+                      <a:srgbClr val="FFFFFF"/>
+                    </a:solidFill>
+                  </a:tcPr>
+                </a:tc>
+                <a:tc>
+                  <a:txBody>
+                    <a:bodyPr/>
+                    <a:lstStyle/>
+                    <a:p>
+                      <a:r>
+                        <a:rPr sz="1100" b="0">
+                          <a:solidFill>
+                            <a:srgbClr val="1A1A1A"/>
+                          </a:solidFill>
+                          <a:latin typeface="Meiryo"/>
+                          <a:ea typeface="Meiryo"/>
+                        </a:rPr>
+                        <a:t>8</a:t>
+                      </a:r>
+                    </a:p>
+                  </a:txBody>
+                  <a:tcPr anchor="ctr" marL="73152" marR="73152">
+                    <a:solidFill>
+                      <a:srgbClr val="FFFFFF"/>
+                    </a:solidFill>
+                  </a:tcPr>
+                </a:tc>
+                <a:tc>
+                  <a:txBody>
+                    <a:bodyPr/>
+                    <a:lstStyle/>
+                    <a:p>
+                      <a:r>
+                        <a:rPr sz="1100" b="0">
+                          <a:solidFill>
+                            <a:srgbClr val="1A1A1A"/>
+                          </a:solidFill>
+                          <a:latin typeface="Meiryo"/>
+                          <a:ea typeface="Meiryo"/>
+                        </a:rPr>
+                        <a:t>8</a:t>
+                      </a:r>
+                    </a:p>
+                  </a:txBody>
+                  <a:tcPr anchor="ctr" marL="73152" marR="73152">
+                    <a:solidFill>
+                      <a:srgbClr val="FFFFFF"/>
+                    </a:solidFill>
+                  </a:tcPr>
+                </a:tc>
+              </a:tr>
+              <a:tr h="457200">
+                <a:tc>
+                  <a:txBody>
+                    <a:bodyPr/>
+                    <a:lstStyle/>
+                    <a:p>
+                      <a:r>
+                        <a:rPr sz="1100" b="1">
+                          <a:solidFill>
+                            <a:srgbClr val="1A1A1A"/>
+                          </a:solidFill>
+                          <a:latin typeface="Meiryo"/>
+                          <a:ea typeface="Meiryo"/>
+                        </a:rPr>
+                        <a:t>基準ライン数</a:t>
+                      </a:r>
+                    </a:p>
+                  </a:txBody>
+                  <a:tcPr anchor="ctr" marL="73152" marR="73152">
+                    <a:solidFill>
+                      <a:srgbClr val="F2F4F6"/>
+                    </a:solidFill>
+                  </a:tcPr>
+                </a:tc>
+                <a:tc>
+                  <a:txBody>
+                    <a:bodyPr/>
+                    <a:lstStyle/>
+                    <a:p>
+                      <a:r>
+                        <a:rPr sz="1100" b="0">
+                          <a:solidFill>
+                            <a:srgbClr val="1A1A1A"/>
+                          </a:solidFill>
+                          <a:latin typeface="Meiryo"/>
+                          <a:ea typeface="Meiryo"/>
+                        </a:rPr>
+                        <a:t>15</a:t>
+                      </a:r>
+                    </a:p>
+                  </a:txBody>
+                  <a:tcPr anchor="ctr" marL="73152" marR="73152">
+                    <a:solidFill>
+                      <a:srgbClr val="F2F4F6"/>
+                    </a:solidFill>
+                  </a:tcPr>
+                </a:tc>
+                <a:tc>
+                  <a:txBody>
+                    <a:bodyPr/>
+                    <a:lstStyle/>
+                    <a:p>
+                      <a:r>
+                        <a:rPr sz="1100" b="0">
+                          <a:solidFill>
+                            <a:srgbClr val="1A1A1A"/>
+                          </a:solidFill>
+                          <a:latin typeface="Meiryo"/>
+                          <a:ea typeface="Meiryo"/>
+                        </a:rPr>
+                        <a:t>15</a:t>
+                      </a:r>
+                    </a:p>
+                  </a:txBody>
+                  <a:tcPr anchor="ctr" marL="73152" marR="73152">
+                    <a:solidFill>
+                      <a:srgbClr val="F2F4F6"/>
+                    </a:solidFill>
+                  </a:tcPr>
+                </a:tc>
+                <a:tc>
+                  <a:txBody>
+                    <a:bodyPr/>
+                    <a:lstStyle/>
+                    <a:p>
+                      <a:r>
+                        <a:rPr sz="1100" b="0">
+                          <a:solidFill>
+                            <a:srgbClr val="1A1A1A"/>
+                          </a:solidFill>
+                          <a:latin typeface="Meiryo"/>
+                          <a:ea typeface="Meiryo"/>
+                        </a:rPr>
+                        <a:t>15</a:t>
+                      </a:r>
+                    </a:p>
+                  </a:txBody>
+                  <a:tcPr anchor="ctr" marL="73152" marR="73152">
+                    <a:solidFill>
+                      <a:srgbClr val="F2F4F6"/>
+                    </a:solidFill>
+                  </a:tcPr>
+                </a:tc>
+                <a:tc>
+                  <a:txBody>
+                    <a:bodyPr/>
+                    <a:lstStyle/>
+                    <a:p>
+                      <a:r>
+                        <a:rPr sz="1100" b="0">
+                          <a:solidFill>
+                            <a:srgbClr val="1A1A1A"/>
+                          </a:solidFill>
+                          <a:latin typeface="Meiryo"/>
+                          <a:ea typeface="Meiryo"/>
+                        </a:rPr>
+                        <a:t>15</a:t>
+                      </a:r>
+                    </a:p>
+                  </a:txBody>
+                  <a:tcPr anchor="ctr" marL="73152" marR="73152">
+                    <a:solidFill>
+                      <a:srgbClr val="F2F4F6"/>
+                    </a:solidFill>
+                  </a:tcPr>
+                </a:tc>
+                <a:tc>
+                  <a:txBody>
+                    <a:bodyPr/>
+                    <a:lstStyle/>
+                    <a:p>
+                      <a:r>
+                        <a:rPr sz="1100" b="0">
+                          <a:solidFill>
+                            <a:srgbClr val="1A1A1A"/>
+                          </a:solidFill>
+                          <a:latin typeface="Meiryo"/>
+                          <a:ea typeface="Meiryo"/>
+                        </a:rPr>
+                        <a:t>15</a:t>
+                      </a:r>
+                    </a:p>
+                  </a:txBody>
+                  <a:tcPr anchor="ctr" marL="73152" marR="73152">
+                    <a:solidFill>
+                      <a:srgbClr val="F2F4F6"/>
+                    </a:solidFill>
+                  </a:tcPr>
+                </a:tc>
+                <a:tc>
+                  <a:txBody>
+                    <a:bodyPr/>
+                    <a:lstStyle/>
+                    <a:p>
+                      <a:r>
+                        <a:rPr sz="1100" b="0">
+                          <a:solidFill>
+                            <a:srgbClr val="1A1A1A"/>
+                          </a:solidFill>
+                          <a:latin typeface="Meiryo"/>
+                          <a:ea typeface="Meiryo"/>
+                        </a:rPr>
+                        <a:t>15</a:t>
+                      </a:r>
+                    </a:p>
+                  </a:txBody>
+                  <a:tcPr anchor="ctr" marL="73152" marR="73152">
+                    <a:solidFill>
+                      <a:srgbClr val="F2F4F6"/>
+                    </a:solidFill>
+                  </a:tcPr>
+                </a:tc>
+                <a:tc>
+                  <a:txBody>
+                    <a:bodyPr/>
+                    <a:lstStyle/>
+                    <a:p>
+                      <a:r>
+                        <a:rPr sz="1100" b="0">
+                          <a:solidFill>
+                            <a:srgbClr val="1A1A1A"/>
+                          </a:solidFill>
+                          <a:latin typeface="Meiryo"/>
+                          <a:ea typeface="Meiryo"/>
+                        </a:rPr>
+                        <a:t>15</a:t>
+                      </a:r>
+                    </a:p>
+                  </a:txBody>
+                  <a:tcPr anchor="ctr" marL="73152" marR="73152">
+                    <a:solidFill>
+                      <a:srgbClr val="F2F4F6"/>
+                    </a:solidFill>
+                  </a:tcPr>
+                </a:tc>
+                <a:tc>
+                  <a:txBody>
+                    <a:bodyPr/>
+                    <a:lstStyle/>
+                    <a:p>
+                      <a:r>
+                        <a:rPr sz="1100" b="0">
+                          <a:solidFill>
+                            <a:srgbClr val="1A1A1A"/>
+                          </a:solidFill>
+                          <a:latin typeface="Meiryo"/>
+                          <a:ea typeface="Meiryo"/>
+                        </a:rPr>
+                        <a:t>15</a:t>
+                      </a:r>
+                    </a:p>
+                  </a:txBody>
+                  <a:tcPr anchor="ctr" marL="73152" marR="73152">
+                    <a:solidFill>
+                      <a:srgbClr val="F2F4F6"/>
+                    </a:solidFill>
+                  </a:tcPr>
+                </a:tc>
+                <a:tc>
+                  <a:txBody>
+                    <a:bodyPr/>
+                    <a:lstStyle/>
+                    <a:p>
+                      <a:r>
+                        <a:rPr sz="1100" b="0">
+                          <a:solidFill>
+                            <a:srgbClr val="1A1A1A"/>
+                          </a:solidFill>
+                          <a:latin typeface="Meiryo"/>
+                          <a:ea typeface="Meiryo"/>
+                        </a:rPr>
+                        <a:t>15</a:t>
+                      </a:r>
+                    </a:p>
+                  </a:txBody>
+                  <a:tcPr anchor="ctr" marL="73152" marR="73152">
+                    <a:solidFill>
+                      <a:srgbClr val="F2F4F6"/>
+                    </a:solidFill>
+                  </a:tcPr>
+                </a:tc>
+                <a:tc>
+                  <a:txBody>
+                    <a:bodyPr/>
+                    <a:lstStyle/>
+                    <a:p>
+                      <a:r>
+                        <a:rPr sz="1100" b="0">
+                          <a:solidFill>
+                            <a:srgbClr val="1A1A1A"/>
+                          </a:solidFill>
+                          <a:latin typeface="Meiryo"/>
+                          <a:ea typeface="Meiryo"/>
+                        </a:rPr>
+                        <a:t>15</a:t>
+                      </a:r>
+                    </a:p>
+                  </a:txBody>
+                  <a:tcPr anchor="ctr" marL="73152" marR="73152">
+                    <a:solidFill>
+                      <a:srgbClr val="F2F4F6"/>
+                    </a:solidFill>
+                  </a:tcPr>
+                </a:tc>
+                <a:tc>
+                  <a:txBody>
+                    <a:bodyPr/>
+                    <a:lstStyle/>
+                    <a:p>
+                      <a:r>
+                        <a:rPr sz="1100" b="0">
+                          <a:solidFill>
+                            <a:srgbClr val="1A1A1A"/>
+                          </a:solidFill>
+                          <a:latin typeface="Meiryo"/>
+                          <a:ea typeface="Meiryo"/>
+                        </a:rPr>
+                        <a:t>15</a:t>
+                      </a:r>
+                    </a:p>
+                  </a:txBody>
+                  <a:tcPr anchor="ctr" marL="73152" marR="73152">
+                    <a:solidFill>
+                      <a:srgbClr val="F2F4F6"/>
+                    </a:solidFill>
+                  </a:tcPr>
+                </a:tc>
+                <a:tc>
+                  <a:txBody>
+                    <a:bodyPr/>
+                    <a:lstStyle/>
+                    <a:p>
+                      <a:r>
+                        <a:rPr sz="1100" b="0">
+                          <a:solidFill>
+                            <a:srgbClr val="1A1A1A"/>
+                          </a:solidFill>
+                          <a:latin typeface="Meiryo"/>
+                          <a:ea typeface="Meiryo"/>
+                        </a:rPr>
+                        <a:t>15</a:t>
+                      </a:r>
+                    </a:p>
+                  </a:txBody>
+                  <a:tcPr anchor="ctr" marL="73152" marR="73152">
+                    <a:solidFill>
+                      <a:srgbClr val="F2F4F6"/>
+                    </a:solidFill>
+                  </a:tcPr>
+                </a:tc>
+              </a:tr>
+              <a:tr h="457200">
+                <a:tc>
+                  <a:txBody>
+                    <a:bodyPr/>
+                    <a:lstStyle/>
+                    <a:p>
+                      <a:r>
+                        <a:rPr sz="1100" b="1">
+                          <a:solidFill>
+                            <a:srgbClr val="1A1A1A"/>
+                          </a:solidFill>
+                          <a:latin typeface="Meiryo"/>
+                          <a:ea typeface="Meiryo"/>
+                        </a:rPr>
+                        <a:t>最大ライン数</a:t>
+                      </a:r>
+                    </a:p>
+                  </a:txBody>
+                  <a:tcPr anchor="ctr" marL="73152" marR="73152">
+                    <a:solidFill>
+                      <a:srgbClr val="FFFFFF"/>
+                    </a:solidFill>
+                  </a:tcPr>
+                </a:tc>
+                <a:tc>
+                  <a:txBody>
+                    <a:bodyPr/>
+                    <a:lstStyle/>
+                    <a:p>
+                      <a:r>
+                        <a:rPr sz="1100" b="1">
+                          <a:solidFill>
+                            <a:srgbClr val="C00000"/>
+                          </a:solidFill>
+                          <a:latin typeface="Meiryo"/>
+                          <a:ea typeface="Meiryo"/>
+                        </a:rPr>
+                        <a:t>20</a:t>
+                      </a:r>
+                    </a:p>
+                  </a:txBody>
+                  <a:tcPr anchor="ctr" marL="73152" marR="73152">
+                    <a:solidFill>
+                      <a:srgbClr val="FFFFFF"/>
+                    </a:solidFill>
+                  </a:tcPr>
+                </a:tc>
+                <a:tc>
+                  <a:txBody>
+                    <a:bodyPr/>
+                    <a:lstStyle/>
+                    <a:p>
+                      <a:r>
+                        <a:rPr sz="1100" b="0">
+                          <a:solidFill>
+                            <a:srgbClr val="1A1A1A"/>
+                          </a:solidFill>
+                          <a:latin typeface="Meiryo"/>
+                          <a:ea typeface="Meiryo"/>
+                        </a:rPr>
+                        <a:t>15</a:t>
+                      </a:r>
+                    </a:p>
+                  </a:txBody>
+                  <a:tcPr anchor="ctr" marL="73152" marR="73152">
+                    <a:solidFill>
+                      <a:srgbClr val="FFFFFF"/>
+                    </a:solidFill>
+                  </a:tcPr>
+                </a:tc>
+                <a:tc>
+                  <a:txBody>
+                    <a:bodyPr/>
+                    <a:lstStyle/>
+                    <a:p>
+                      <a:r>
+                        <a:rPr sz="1100" b="0">
+                          <a:solidFill>
+                            <a:srgbClr val="1A1A1A"/>
+                          </a:solidFill>
+                          <a:latin typeface="Meiryo"/>
+                          <a:ea typeface="Meiryo"/>
+                        </a:rPr>
+                        <a:t>15</a:t>
+                      </a:r>
+                    </a:p>
+                  </a:txBody>
+                  <a:tcPr anchor="ctr" marL="73152" marR="73152">
+                    <a:solidFill>
+                      <a:srgbClr val="FFFFFF"/>
+                    </a:solidFill>
+                  </a:tcPr>
+                </a:tc>
+                <a:tc>
+                  <a:txBody>
+                    <a:bodyPr/>
+                    <a:lstStyle/>
+                    <a:p>
+                      <a:r>
+                        <a:rPr sz="1100" b="1">
+                          <a:solidFill>
+                            <a:srgbClr val="C00000"/>
+                          </a:solidFill>
+                          <a:latin typeface="Meiryo"/>
+                          <a:ea typeface="Meiryo"/>
+                        </a:rPr>
+                        <a:t>20</a:t>
+                      </a:r>
+                    </a:p>
+                  </a:txBody>
+                  <a:tcPr anchor="ctr" marL="73152" marR="73152">
+                    <a:solidFill>
+                      <a:srgbClr val="FFFFFF"/>
+                    </a:solidFill>
+                  </a:tcPr>
+                </a:tc>
+                <a:tc>
+                  <a:txBody>
+                    <a:bodyPr/>
+                    <a:lstStyle/>
+                    <a:p>
+                      <a:r>
+                        <a:rPr sz="1100" b="0">
+                          <a:solidFill>
+                            <a:srgbClr val="1A1A1A"/>
+                          </a:solidFill>
+                          <a:latin typeface="Meiryo"/>
+                          <a:ea typeface="Meiryo"/>
+                        </a:rPr>
+                        <a:t>15</a:t>
+                      </a:r>
+                    </a:p>
+                  </a:txBody>
+                  <a:tcPr anchor="ctr" marL="73152" marR="73152">
+                    <a:solidFill>
+                      <a:srgbClr val="FFFFFF"/>
+                    </a:solidFill>
+                  </a:tcPr>
+                </a:tc>
+                <a:tc>
+                  <a:txBody>
+                    <a:bodyPr/>
+                    <a:lstStyle/>
+                    <a:p>
+                      <a:r>
+                        <a:rPr sz="1100" b="1">
+                          <a:solidFill>
+                            <a:srgbClr val="C00000"/>
+                          </a:solidFill>
+                          <a:latin typeface="Meiryo"/>
+                          <a:ea typeface="Meiryo"/>
+                        </a:rPr>
+                        <a:t>20</a:t>
+                      </a:r>
+                    </a:p>
+                  </a:txBody>
+                  <a:tcPr anchor="ctr" marL="73152" marR="73152">
+                    <a:solidFill>
+                      <a:srgbClr val="FFFFFF"/>
+                    </a:solidFill>
+                  </a:tcPr>
+                </a:tc>
+                <a:tc>
+                  <a:txBody>
+                    <a:bodyPr/>
+                    <a:lstStyle/>
+                    <a:p>
+                      <a:r>
+                        <a:rPr sz="1100" b="0">
+                          <a:solidFill>
+                            <a:srgbClr val="1A1A1A"/>
+                          </a:solidFill>
+                          <a:latin typeface="Meiryo"/>
+                          <a:ea typeface="Meiryo"/>
+                        </a:rPr>
+                        <a:t>15</a:t>
+                      </a:r>
+                    </a:p>
+                  </a:txBody>
+                  <a:tcPr anchor="ctr" marL="73152" marR="73152">
+                    <a:solidFill>
+                      <a:srgbClr val="FFFFFF"/>
+                    </a:solidFill>
+                  </a:tcPr>
+                </a:tc>
+                <a:tc>
+                  <a:txBody>
+                    <a:bodyPr/>
+                    <a:lstStyle/>
+                    <a:p>
+                      <a:r>
+                        <a:rPr sz="1100" b="0">
+                          <a:solidFill>
+                            <a:srgbClr val="1A1A1A"/>
+                          </a:solidFill>
+                          <a:latin typeface="Meiryo"/>
+                          <a:ea typeface="Meiryo"/>
+                        </a:rPr>
+                        <a:t>15</a:t>
+                      </a:r>
+                    </a:p>
+                  </a:txBody>
+                  <a:tcPr anchor="ctr" marL="73152" marR="73152">
+                    <a:solidFill>
+                      <a:srgbClr val="FFFFFF"/>
+                    </a:solidFill>
+                  </a:tcPr>
+                </a:tc>
+                <a:tc>
+                  <a:txBody>
+                    <a:bodyPr/>
+                    <a:lstStyle/>
+                    <a:p>
+                      <a:r>
+                        <a:rPr sz="1100" b="0">
+                          <a:solidFill>
+                            <a:srgbClr val="1A1A1A"/>
+                          </a:solidFill>
+                          <a:latin typeface="Meiryo"/>
+                          <a:ea typeface="Meiryo"/>
+                        </a:rPr>
+                        <a:t>15</a:t>
+                      </a:r>
+                    </a:p>
+                  </a:txBody>
+                  <a:tcPr anchor="ctr" marL="73152" marR="73152">
+                    <a:solidFill>
+                      <a:srgbClr val="FFFFFF"/>
+                    </a:solidFill>
+                  </a:tcPr>
+                </a:tc>
+                <a:tc>
+                  <a:txBody>
+                    <a:bodyPr/>
+                    <a:lstStyle/>
+                    <a:p>
+                      <a:r>
+                        <a:rPr sz="1100" b="0">
+                          <a:solidFill>
+                            <a:srgbClr val="1A1A1A"/>
+                          </a:solidFill>
+                          <a:latin typeface="Meiryo"/>
+                          <a:ea typeface="Meiryo"/>
+                        </a:rPr>
+                        <a:t>15</a:t>
+                      </a:r>
+                    </a:p>
+                  </a:txBody>
+                  <a:tcPr anchor="ctr" marL="73152" marR="73152">
+                    <a:solidFill>
+                      <a:srgbClr val="FFFFFF"/>
+                    </a:solidFill>
+                  </a:tcPr>
+                </a:tc>
+                <a:tc>
+                  <a:txBody>
+                    <a:bodyPr/>
+                    <a:lstStyle/>
+                    <a:p>
+                      <a:r>
+                        <a:rPr sz="1100" b="1">
+                          <a:solidFill>
+                            <a:srgbClr val="C00000"/>
+                          </a:solidFill>
+                          <a:latin typeface="Meiryo"/>
+                          <a:ea typeface="Meiryo"/>
+                        </a:rPr>
+                        <a:t>20</a:t>
+                      </a:r>
+                    </a:p>
+                  </a:txBody>
+                  <a:tcPr anchor="ctr" marL="73152" marR="73152">
+                    <a:solidFill>
+                      <a:srgbClr val="FFFFFF"/>
+                    </a:solidFill>
+                  </a:tcPr>
+                </a:tc>
+                <a:tc>
+                  <a:txBody>
+                    <a:bodyPr/>
+                    <a:lstStyle/>
+                    <a:p>
+                      <a:r>
+                        <a:rPr sz="1100" b="1">
+                          <a:solidFill>
+                            <a:srgbClr val="C00000"/>
+                          </a:solidFill>
+                          <a:latin typeface="Meiryo"/>
+                          <a:ea typeface="Meiryo"/>
+                        </a:rPr>
+                        <a:t>20</a:t>
+                      </a:r>
+                    </a:p>
+                  </a:txBody>
+                  <a:tcPr anchor="ctr" marL="73152" marR="73152">
+                    <a:solidFill>
+                      <a:srgbClr val="FFFFFF"/>
+                    </a:solidFill>
+                  </a:tcPr>
+                </a:tc>
+              </a:tr>
+            </a:tbl>
+          </a:graphicData>
+        </a:graphic>
+      </p:graphicFrame>
       <p:sp>
         <p:nvSpPr>
           <p:cNvPr id="9" name="TextBox 8"/>
@@ -11516,8 +12575,8 @@
         </p:nvSpPr>
         <p:spPr>
           <a:xfrm>
-            <a:off x="868680" y="1591056"/>
-            <a:ext cx="4846320" cy="2029968"/>
+            <a:off x="640080" y="3429000"/>
+            <a:ext cx="10881360" cy="365760"/>
           </a:xfrm>
           <a:prstGeom prst="rect">
             <a:avLst/>
@@ -11532,20 +12591,353 @@
           <a:p>
             <a:pPr algn="l">
               <a:spcAft>
-                <a:spcPts val="400"/>
+                <a:spcPts val="500"/>
               </a:spcAft>
             </a:pPr>
             <a:r>
-              <a:rPr sz="1300" b="1">
+              <a:rPr sz="1050" b="0">
                 <a:solidFill>
-                  <a:srgbClr val="C00000"/>
+                  <a:srgbClr val="5A626B"/>
                 </a:solidFill>
                 <a:latin typeface="Meiryo"/>
                 <a:ea typeface="Meiryo"/>
               </a:rPr>
-              <a:t>① キャンペーン名称・キービジュアルの策定(11月中)</a:t>
-            </a:r>
-          </a:p>
+              <a:t>※ 2027年・2028年とも同パターン。2029年1〜3月は1月が最大20ライン、2〜3月は基準15ライン</a:t>
+            </a:r>
+          </a:p>
+        </p:txBody>
+      </p:sp>
+      <p:graphicFrame>
+        <p:nvGraphicFramePr>
+          <p:cNvPr id="10" name="Table 9"/>
+          <p:cNvGraphicFramePr>
+            <a:graphicFrameLocks noGrp="1"/>
+          </p:cNvGraphicFramePr>
+          <p:nvPr/>
+        </p:nvGraphicFramePr>
+        <p:xfrm>
+          <a:off x="640080" y="3931920"/>
+          <a:ext cx="10881360" cy="1508760"/>
+        </p:xfrm>
+        <a:graphic>
+          <a:graphicData uri="http://schemas.openxmlformats.org/drawingml/2006/table">
+            <a:tbl>
+              <a:tblPr firstRow="1" bandRow="1">
+                <a:tableStyleId>{5C22544A-7EE6-4342-B048-85BDC9FD1C3A}</a:tableStyleId>
+              </a:tblPr>
+              <a:tblGrid>
+                <a:gridCol w="3627120"/>
+                <a:gridCol w="1813560"/>
+                <a:gridCol w="2720340"/>
+                <a:gridCol w="2720340"/>
+              </a:tblGrid>
+              <a:tr h="502920">
+                <a:tc>
+                  <a:txBody>
+                    <a:bodyPr/>
+                    <a:lstStyle/>
+                    <a:p>
+                      <a:r>
+                        <a:rPr sz="1150" b="1">
+                          <a:solidFill>
+                            <a:srgbClr val="FFFFFF"/>
+                          </a:solidFill>
+                          <a:latin typeface="Meiryo"/>
+                          <a:ea typeface="Meiryo"/>
+                        </a:rPr>
+                        <a:t>27ヶ月合計</a:t>
+                      </a:r>
+                    </a:p>
+                  </a:txBody>
+                  <a:tcPr anchor="ctr" marL="73152" marR="73152">
+                    <a:solidFill>
+                      <a:srgbClr val="232278"/>
+                    </a:solidFill>
+                  </a:tcPr>
+                </a:tc>
+                <a:tc>
+                  <a:txBody>
+                    <a:bodyPr/>
+                    <a:lstStyle/>
+                    <a:p>
+                      <a:r>
+                        <a:rPr sz="1150" b="1">
+                          <a:solidFill>
+                            <a:srgbClr val="FFFFFF"/>
+                          </a:solidFill>
+                          <a:latin typeface="Meiryo"/>
+                          <a:ea typeface="Meiryo"/>
+                        </a:rPr>
+                        <a:t>開催日数</a:t>
+                      </a:r>
+                    </a:p>
+                  </a:txBody>
+                  <a:tcPr anchor="ctr" marL="73152" marR="73152">
+                    <a:solidFill>
+                      <a:srgbClr val="232278"/>
+                    </a:solidFill>
+                  </a:tcPr>
+                </a:tc>
+                <a:tc>
+                  <a:txBody>
+                    <a:bodyPr/>
+                    <a:lstStyle/>
+                    <a:p>
+                      <a:r>
+                        <a:rPr sz="1150" b="1">
+                          <a:solidFill>
+                            <a:srgbClr val="FFFFFF"/>
+                          </a:solidFill>
+                          <a:latin typeface="Meiryo"/>
+                          <a:ea typeface="Meiryo"/>
+                        </a:rPr>
+                        <a:t>開催数(ライン×日)</a:t>
+                      </a:r>
+                    </a:p>
+                  </a:txBody>
+                  <a:tcPr anchor="ctr" marL="73152" marR="73152">
+                    <a:solidFill>
+                      <a:srgbClr val="232278"/>
+                    </a:solidFill>
+                  </a:tcPr>
+                </a:tc>
+                <a:tc>
+                  <a:txBody>
+                    <a:bodyPr/>
+                    <a:lstStyle/>
+                    <a:p>
+                      <a:r>
+                        <a:rPr sz="1150" b="1">
+                          <a:solidFill>
+                            <a:srgbClr val="FFFFFF"/>
+                          </a:solidFill>
+                          <a:latin typeface="Meiryo"/>
+                          <a:ea typeface="Meiryo"/>
+                        </a:rPr>
+                        <a:t>稼働費(税別)</a:t>
+                      </a:r>
+                    </a:p>
+                  </a:txBody>
+                  <a:tcPr anchor="ctr" marL="73152" marR="73152">
+                    <a:solidFill>
+                      <a:srgbClr val="232278"/>
+                    </a:solidFill>
+                  </a:tcPr>
+                </a:tc>
+              </a:tr>
+              <a:tr h="502920">
+                <a:tc>
+                  <a:txBody>
+                    <a:bodyPr/>
+                    <a:lstStyle/>
+                    <a:p>
+                      <a:r>
+                        <a:rPr sz="1150" b="1">
+                          <a:solidFill>
+                            <a:srgbClr val="1A1A1A"/>
+                          </a:solidFill>
+                          <a:latin typeface="Meiryo"/>
+                          <a:ea typeface="Meiryo"/>
+                        </a:rPr>
+                        <a:t>基準(15ライン固定)</a:t>
+                      </a:r>
+                    </a:p>
+                  </a:txBody>
+                  <a:tcPr anchor="ctr" marL="73152" marR="73152">
+                    <a:solidFill>
+                      <a:srgbClr val="FFFFFF"/>
+                    </a:solidFill>
+                  </a:tcPr>
+                </a:tc>
+                <a:tc>
+                  <a:txBody>
+                    <a:bodyPr/>
+                    <a:lstStyle/>
+                    <a:p>
+                      <a:r>
+                        <a:rPr sz="1150" b="0">
+                          <a:solidFill>
+                            <a:srgbClr val="1A1A1A"/>
+                          </a:solidFill>
+                          <a:latin typeface="Meiryo"/>
+                          <a:ea typeface="Meiryo"/>
+                        </a:rPr>
+                        <a:t>234日</a:t>
+                      </a:r>
+                    </a:p>
+                  </a:txBody>
+                  <a:tcPr anchor="ctr" marL="73152" marR="73152">
+                    <a:solidFill>
+                      <a:srgbClr val="FFFFFF"/>
+                    </a:solidFill>
+                  </a:tcPr>
+                </a:tc>
+                <a:tc>
+                  <a:txBody>
+                    <a:bodyPr/>
+                    <a:lstStyle/>
+                    <a:p>
+                      <a:r>
+                        <a:rPr sz="1150" b="0">
+                          <a:solidFill>
+                            <a:srgbClr val="1A1A1A"/>
+                          </a:solidFill>
+                          <a:latin typeface="Meiryo"/>
+                          <a:ea typeface="Meiryo"/>
+                        </a:rPr>
+                        <a:t>3,510現場</a:t>
+                      </a:r>
+                    </a:p>
+                  </a:txBody>
+                  <a:tcPr anchor="ctr" marL="73152" marR="73152">
+                    <a:solidFill>
+                      <a:srgbClr val="FFFFFF"/>
+                    </a:solidFill>
+                  </a:tcPr>
+                </a:tc>
+                <a:tc>
+                  <a:txBody>
+                    <a:bodyPr/>
+                    <a:lstStyle/>
+                    <a:p>
+                      <a:r>
+                        <a:rPr sz="1150" b="1">
+                          <a:solidFill>
+                            <a:srgbClr val="1A1A1A"/>
+                          </a:solidFill>
+                          <a:latin typeface="Meiryo"/>
+                          <a:ea typeface="Meiryo"/>
+                        </a:rPr>
+                        <a:t>3億5,100万円</a:t>
+                      </a:r>
+                    </a:p>
+                  </a:txBody>
+                  <a:tcPr anchor="ctr" marL="73152" marR="73152">
+                    <a:solidFill>
+                      <a:srgbClr val="FFFFFF"/>
+                    </a:solidFill>
+                  </a:tcPr>
+                </a:tc>
+              </a:tr>
+              <a:tr h="502920">
+                <a:tc>
+                  <a:txBody>
+                    <a:bodyPr/>
+                    <a:lstStyle/>
+                    <a:p>
+                      <a:r>
+                        <a:rPr sz="1150" b="1">
+                          <a:solidFill>
+                            <a:srgbClr val="1A1A1A"/>
+                          </a:solidFill>
+                          <a:latin typeface="Meiryo"/>
+                          <a:ea typeface="Meiryo"/>
+                        </a:rPr>
+                        <a:t>最大(余裕月20ライン)</a:t>
+                      </a:r>
+                    </a:p>
+                  </a:txBody>
+                  <a:tcPr anchor="ctr" marL="73152" marR="73152">
+                    <a:solidFill>
+                      <a:srgbClr val="F2F4F6"/>
+                    </a:solidFill>
+                  </a:tcPr>
+                </a:tc>
+                <a:tc>
+                  <a:txBody>
+                    <a:bodyPr/>
+                    <a:lstStyle/>
+                    <a:p>
+                      <a:r>
+                        <a:rPr sz="1150" b="0">
+                          <a:solidFill>
+                            <a:srgbClr val="1A1A1A"/>
+                          </a:solidFill>
+                          <a:latin typeface="Meiryo"/>
+                          <a:ea typeface="Meiryo"/>
+                        </a:rPr>
+                        <a:t>234日</a:t>
+                      </a:r>
+                    </a:p>
+                  </a:txBody>
+                  <a:tcPr anchor="ctr" marL="73152" marR="73152">
+                    <a:solidFill>
+                      <a:srgbClr val="F2F4F6"/>
+                    </a:solidFill>
+                  </a:tcPr>
+                </a:tc>
+                <a:tc>
+                  <a:txBody>
+                    <a:bodyPr/>
+                    <a:lstStyle/>
+                    <a:p>
+                      <a:r>
+                        <a:rPr sz="1150" b="0">
+                          <a:solidFill>
+                            <a:srgbClr val="1A1A1A"/>
+                          </a:solidFill>
+                          <a:latin typeface="Meiryo"/>
+                          <a:ea typeface="Meiryo"/>
+                        </a:rPr>
+                        <a:t>3,980現場</a:t>
+                      </a:r>
+                    </a:p>
+                  </a:txBody>
+                  <a:tcPr anchor="ctr" marL="73152" marR="73152">
+                    <a:solidFill>
+                      <a:srgbClr val="F2F4F6"/>
+                    </a:solidFill>
+                  </a:tcPr>
+                </a:tc>
+                <a:tc>
+                  <a:txBody>
+                    <a:bodyPr/>
+                    <a:lstStyle/>
+                    <a:p>
+                      <a:r>
+                        <a:rPr sz="1150" b="1">
+                          <a:solidFill>
+                            <a:srgbClr val="C00000"/>
+                          </a:solidFill>
+                          <a:latin typeface="Meiryo"/>
+                          <a:ea typeface="Meiryo"/>
+                        </a:rPr>
+                        <a:t>3億9,800万円</a:t>
+                      </a:r>
+                    </a:p>
+                  </a:txBody>
+                  <a:tcPr anchor="ctr" marL="73152" marR="73152">
+                    <a:solidFill>
+                      <a:srgbClr val="F2F4F6"/>
+                    </a:solidFill>
+                  </a:tcPr>
+                </a:tc>
+              </a:tr>
+            </a:tbl>
+          </a:graphicData>
+        </a:graphic>
+      </p:graphicFrame>
+      <p:sp>
+        <p:nvSpPr>
+          <p:cNvPr id="11" name="TextBox 10"/>
+          <p:cNvSpPr txBox="1"/>
+          <p:nvPr/>
+        </p:nvSpPr>
+        <p:spPr>
+          <a:xfrm>
+            <a:off x="640080" y="5577840"/>
+            <a:ext cx="10881360" cy="731520"/>
+          </a:xfrm>
+          <a:prstGeom prst="rect">
+            <a:avLst/>
+          </a:prstGeom>
+          <a:noFill/>
+        </p:spPr>
+        <p:txBody>
+          <a:bodyPr wrap="square" anchor="t" lIns="0" rIns="0" tIns="0" bIns="0">
+            <a:spAutoFit/>
+          </a:bodyPr>
+          <a:lstStyle/>
           <a:p>
             <a:pPr algn="l">
               <a:spcAft>
@@ -11560,7 +12952,7 @@
                 <a:latin typeface="Meiryo"/>
                 <a:ea typeface="Meiryo"/>
               </a:rPr>
-              <a:t>・名称とKVを両社で確定(ノベルティ可否判定の基準になります)</a:t>
+              <a:t>・2月・3月・8月・9月は当社主催行事との調整月のため基準15ラインでの運用となります　・増枠分は前月1日の開催確定時に確定します</a:t>
             </a:r>
           </a:p>
           <a:p>
@@ -11577,486 +12969,7 @@
                 <a:latin typeface="Meiryo"/>
                 <a:ea typeface="Meiryo"/>
               </a:rPr>
-              <a:t>・素材:複数ヒーローの集合ビジュアル、色調の揃った個体素材、ブランドロゴ</a:t>
-            </a:r>
-          </a:p>
-          <a:p>
-            <a:pPr algn="l">
-              <a:spcAft>
-                <a:spcPts val="400"/>
-              </a:spcAft>
-            </a:pPr>
-            <a:r>
-              <a:rPr sz="1100" b="0">
-                <a:solidFill>
-                  <a:srgbClr val="1A1A1A"/>
-                </a:solidFill>
-                <a:latin typeface="Meiryo"/>
-                <a:ea typeface="Meiryo"/>
-              </a:rPr>
-              <a:t>・貴社デザイン部門向けに素材の使い方をレクチャー(監修回数の最小化)</a:t>
-            </a:r>
-          </a:p>
-          <a:p>
-            <a:pPr algn="l">
-              <a:spcAft>
-                <a:spcPts val="400"/>
-              </a:spcAft>
-            </a:pPr>
-            <a:r>
-              <a:rPr sz="1100" b="0">
-                <a:solidFill>
-                  <a:srgbClr val="1A1A1A"/>
-                </a:solidFill>
-                <a:latin typeface="Meiryo"/>
-                <a:ea typeface="Meiryo"/>
-              </a:rPr>
-              <a:t>・中国工場の春節前量産(1月末まで)から逆算し、11月中の確定が必要</a:t>
-            </a:r>
-          </a:p>
-        </p:txBody>
-      </p:sp>
-      <p:sp>
-        <p:nvSpPr>
-          <p:cNvPr id="10" name="Rounded Rectangle 9"/>
-          <p:cNvSpPr/>
-          <p:nvPr/>
-        </p:nvSpPr>
-        <p:spPr>
-          <a:xfrm>
-            <a:off x="6217920" y="1463040"/>
-            <a:ext cx="5303520" cy="2286000"/>
-          </a:xfrm>
-          <a:prstGeom prst="roundRect">
-            <a:avLst>
-              <a:gd name="adj" fmla="val 6000"/>
-            </a:avLst>
-          </a:prstGeom>
-          <a:solidFill>
-            <a:srgbClr val="F2F4F6"/>
-          </a:solidFill>
-          <a:ln>
-            <a:noFill/>
-          </a:ln>
-          <a:effectLst/>
-        </p:spPr>
-        <p:style>
-          <a:lnRef idx="1">
-            <a:schemeClr val="accent1"/>
-          </a:lnRef>
-          <a:fillRef idx="3">
-            <a:schemeClr val="accent1"/>
-          </a:fillRef>
-          <a:effectRef idx="2">
-            <a:schemeClr val="accent1"/>
-          </a:effectRef>
-          <a:fontRef idx="minor">
-            <a:schemeClr val="lt1"/>
-          </a:fontRef>
-        </p:style>
-        <p:txBody>
-          <a:bodyPr rtlCol="0" anchor="ctr"/>
-          <a:lstStyle/>
-          <a:p>
-            <a:pPr algn="ctr"/>
-          </a:p>
-        </p:txBody>
-      </p:sp>
-      <p:sp>
-        <p:nvSpPr>
-          <p:cNvPr id="11" name="TextBox 10"/>
-          <p:cNvSpPr txBox="1"/>
-          <p:nvPr/>
-        </p:nvSpPr>
-        <p:spPr>
-          <a:xfrm>
-            <a:off x="6446520" y="1591056"/>
-            <a:ext cx="4846320" cy="2029968"/>
-          </a:xfrm>
-          <a:prstGeom prst="rect">
-            <a:avLst/>
-          </a:prstGeom>
-          <a:noFill/>
-        </p:spPr>
-        <p:txBody>
-          <a:bodyPr wrap="square" anchor="t" lIns="0" rIns="0" tIns="0" bIns="0">
-            <a:spAutoFit/>
-          </a:bodyPr>
-          <a:lstStyle/>
-          <a:p>
-            <a:pPr algn="l">
-              <a:spcAft>
-                <a:spcPts val="400"/>
-              </a:spcAft>
-            </a:pPr>
-            <a:r>
-              <a:rPr sz="1300" b="1">
-                <a:solidFill>
-                  <a:srgbClr val="C00000"/>
-                </a:solidFill>
-                <a:latin typeface="Meiryo"/>
-                <a:ea typeface="Meiryo"/>
-              </a:rPr>
-              <a:t>② 仮申請フロー(別紙「仮申請のご案内」参照)</a:t>
-            </a:r>
-          </a:p>
-          <a:p>
-            <a:pPr algn="l">
-              <a:spcAft>
-                <a:spcPts val="400"/>
-              </a:spcAft>
-            </a:pPr>
-            <a:r>
-              <a:rPr sz="1100" b="0">
-                <a:solidFill>
-                  <a:srgbClr val="1A1A1A"/>
-                </a:solidFill>
-                <a:latin typeface="Meiryo"/>
-                <a:ea typeface="Meiryo"/>
-              </a:rPr>
-              <a:t>・貴社ご担当者1名を事前登録→品目ごとに仮申請→約1週間で可否回答</a:t>
-            </a:r>
-          </a:p>
-          <a:p>
-            <a:pPr algn="l">
-              <a:spcAft>
-                <a:spcPts val="400"/>
-              </a:spcAft>
-            </a:pPr>
-            <a:r>
-              <a:rPr sz="1100" b="0">
-                <a:solidFill>
-                  <a:srgbClr val="1A1A1A"/>
-                </a:solidFill>
-                <a:latin typeface="Meiryo"/>
-                <a:ea typeface="Meiryo"/>
-              </a:rPr>
-              <a:t>・入力項目:企画商品名(「ノベルティ ○○」表記)・キャラクター・商品カテゴリー</a:t>
-            </a:r>
-          </a:p>
-          <a:p>
-            <a:pPr algn="l">
-              <a:spcAft>
-                <a:spcPts val="400"/>
-              </a:spcAft>
-            </a:pPr>
-            <a:r>
-              <a:rPr sz="1100" b="0">
-                <a:solidFill>
-                  <a:srgbClr val="1A1A1A"/>
-                </a:solidFill>
-                <a:latin typeface="Meiryo"/>
-                <a:ea typeface="Meiryo"/>
-              </a:rPr>
-              <a:t>　(配布物=1〜16/会場装飾=店舗備品)・製造原価単価・予定数量・材質・サイズ等</a:t>
-            </a:r>
-          </a:p>
-          <a:p>
-            <a:pPr algn="l">
-              <a:spcAft>
-                <a:spcPts val="400"/>
-              </a:spcAft>
-            </a:pPr>
-            <a:r>
-              <a:rPr sz="1100" b="0">
-                <a:solidFill>
-                  <a:srgbClr val="1A1A1A"/>
-                </a:solidFill>
-                <a:latin typeface="Meiryo"/>
-                <a:ea typeface="Meiryo"/>
-              </a:rPr>
-              <a:t>・作成許諾ロイヤリティ:作成費用の20%(製造原価単価×数量が算定基礎)</a:t>
-            </a:r>
-          </a:p>
-        </p:txBody>
-      </p:sp>
-      <p:sp>
-        <p:nvSpPr>
-          <p:cNvPr id="12" name="Rounded Rectangle 11"/>
-          <p:cNvSpPr/>
-          <p:nvPr/>
-        </p:nvSpPr>
-        <p:spPr>
-          <a:xfrm>
-            <a:off x="640080" y="3931920"/>
-            <a:ext cx="5303520" cy="2103120"/>
-          </a:xfrm>
-          <a:prstGeom prst="roundRect">
-            <a:avLst>
-              <a:gd name="adj" fmla="val 6000"/>
-            </a:avLst>
-          </a:prstGeom>
-          <a:solidFill>
-            <a:srgbClr val="F2F4F6"/>
-          </a:solidFill>
-          <a:ln>
-            <a:noFill/>
-          </a:ln>
-          <a:effectLst/>
-        </p:spPr>
-        <p:style>
-          <a:lnRef idx="1">
-            <a:schemeClr val="accent1"/>
-          </a:lnRef>
-          <a:fillRef idx="3">
-            <a:schemeClr val="accent1"/>
-          </a:fillRef>
-          <a:effectRef idx="2">
-            <a:schemeClr val="accent1"/>
-          </a:effectRef>
-          <a:fontRef idx="minor">
-            <a:schemeClr val="lt1"/>
-          </a:fontRef>
-        </p:style>
-        <p:txBody>
-          <a:bodyPr rtlCol="0" anchor="ctr"/>
-          <a:lstStyle/>
-          <a:p>
-            <a:pPr algn="ctr"/>
-          </a:p>
-        </p:txBody>
-      </p:sp>
-      <p:sp>
-        <p:nvSpPr>
-          <p:cNvPr id="13" name="TextBox 12"/>
-          <p:cNvSpPr txBox="1"/>
-          <p:nvPr/>
-        </p:nvSpPr>
-        <p:spPr>
-          <a:xfrm>
-            <a:off x="868680" y="4059936"/>
-            <a:ext cx="4846320" cy="1847088"/>
-          </a:xfrm>
-          <a:prstGeom prst="rect">
-            <a:avLst/>
-          </a:prstGeom>
-          <a:noFill/>
-        </p:spPr>
-        <p:txBody>
-          <a:bodyPr wrap="square" anchor="t" lIns="0" rIns="0" tIns="0" bIns="0">
-            <a:spAutoFit/>
-          </a:bodyPr>
-          <a:lstStyle/>
-          <a:p>
-            <a:pPr algn="l">
-              <a:spcAft>
-                <a:spcPts val="400"/>
-              </a:spcAft>
-            </a:pPr>
-            <a:r>
-              <a:rPr sz="1300" b="1">
-                <a:solidFill>
-                  <a:srgbClr val="C00000"/>
-                </a:solidFill>
-                <a:latin typeface="Meiryo"/>
-                <a:ea typeface="Meiryo"/>
-              </a:rPr>
-              <a:t>③ ノベルティのカテゴリー</a:t>
-            </a:r>
-          </a:p>
-          <a:p>
-            <a:pPr algn="l">
-              <a:spcAft>
-                <a:spcPts val="400"/>
-              </a:spcAft>
-            </a:pPr>
-            <a:r>
-              <a:rPr sz="1100" b="0">
-                <a:solidFill>
-                  <a:srgbClr val="1A1A1A"/>
-                </a:solidFill>
-                <a:latin typeface="Meiryo"/>
-                <a:ea typeface="Meiryo"/>
-              </a:rPr>
-              <a:t>・制作可能:トートバッグ・タオル・BOXティッシュ等(キャンペーンデザイン使用)</a:t>
-            </a:r>
-          </a:p>
-          <a:p>
-            <a:pPr algn="l">
-              <a:spcAft>
-                <a:spcPts val="400"/>
-              </a:spcAft>
-            </a:pPr>
-            <a:r>
-              <a:rPr sz="1100" b="0">
-                <a:solidFill>
-                  <a:srgbClr val="1A1A1A"/>
-                </a:solidFill>
-                <a:latin typeface="Meiryo"/>
-                <a:ea typeface="Meiryo"/>
-              </a:rPr>
-              <a:t>・制作不可:お子様向け玩具(フィギュア・ソフビ等)・菓子類・ランチボックス等</a:t>
-            </a:r>
-          </a:p>
-          <a:p>
-            <a:pPr algn="l">
-              <a:spcAft>
-                <a:spcPts val="400"/>
-              </a:spcAft>
-            </a:pPr>
-            <a:r>
-              <a:rPr sz="1100" b="0">
-                <a:solidFill>
-                  <a:srgbClr val="1A1A1A"/>
-                </a:solidFill>
-                <a:latin typeface="Meiryo"/>
-                <a:ea typeface="Meiryo"/>
-              </a:rPr>
-              <a:t>・タオルは一般仕様(ループタオル・ミニタオルは避ける)</a:t>
-            </a:r>
-          </a:p>
-        </p:txBody>
-      </p:sp>
-      <p:sp>
-        <p:nvSpPr>
-          <p:cNvPr id="14" name="Rounded Rectangle 13"/>
-          <p:cNvSpPr/>
-          <p:nvPr/>
-        </p:nvSpPr>
-        <p:spPr>
-          <a:xfrm>
-            <a:off x="6217920" y="3931920"/>
-            <a:ext cx="5303520" cy="2103120"/>
-          </a:xfrm>
-          <a:prstGeom prst="roundRect">
-            <a:avLst>
-              <a:gd name="adj" fmla="val 6000"/>
-            </a:avLst>
-          </a:prstGeom>
-          <a:solidFill>
-            <a:srgbClr val="F2F4F6"/>
-          </a:solidFill>
-          <a:ln>
-            <a:noFill/>
-          </a:ln>
-          <a:effectLst/>
-        </p:spPr>
-        <p:style>
-          <a:lnRef idx="1">
-            <a:schemeClr val="accent1"/>
-          </a:lnRef>
-          <a:fillRef idx="3">
-            <a:schemeClr val="accent1"/>
-          </a:fillRef>
-          <a:effectRef idx="2">
-            <a:schemeClr val="accent1"/>
-          </a:effectRef>
-          <a:fontRef idx="minor">
-            <a:schemeClr val="lt1"/>
-          </a:fontRef>
-        </p:style>
-        <p:txBody>
-          <a:bodyPr rtlCol="0" anchor="ctr"/>
-          <a:lstStyle/>
-          <a:p>
-            <a:pPr algn="ctr"/>
-          </a:p>
-        </p:txBody>
-      </p:sp>
-      <p:sp>
-        <p:nvSpPr>
-          <p:cNvPr id="15" name="TextBox 14"/>
-          <p:cNvSpPr txBox="1"/>
-          <p:nvPr/>
-        </p:nvSpPr>
-        <p:spPr>
-          <a:xfrm>
-            <a:off x="6446520" y="4059936"/>
-            <a:ext cx="4846320" cy="1847088"/>
-          </a:xfrm>
-          <a:prstGeom prst="rect">
-            <a:avLst/>
-          </a:prstGeom>
-          <a:noFill/>
-        </p:spPr>
-        <p:txBody>
-          <a:bodyPr wrap="square" anchor="t" lIns="0" rIns="0" tIns="0" bIns="0">
-            <a:spAutoFit/>
-          </a:bodyPr>
-          <a:lstStyle/>
-          <a:p>
-            <a:pPr algn="l">
-              <a:spcAft>
-                <a:spcPts val="400"/>
-              </a:spcAft>
-            </a:pPr>
-            <a:r>
-              <a:rPr sz="1300" b="1">
-                <a:solidFill>
-                  <a:srgbClr val="C00000"/>
-                </a:solidFill>
-                <a:latin typeface="Meiryo"/>
-                <a:ea typeface="Meiryo"/>
-              </a:rPr>
-              <a:t>④ 修了証・配布物</a:t>
-            </a:r>
-          </a:p>
-          <a:p>
-            <a:pPr algn="l">
-              <a:spcAft>
-                <a:spcPts val="400"/>
-              </a:spcAft>
-            </a:pPr>
-            <a:r>
-              <a:rPr sz="1100" b="0">
-                <a:solidFill>
-                  <a:srgbClr val="1A1A1A"/>
-                </a:solidFill>
-                <a:latin typeface="Meiryo"/>
-                <a:ea typeface="Meiryo"/>
-              </a:rPr>
-              <a:t>・既存の修了証は当社既存イベント専用のため本件では使用しません</a:t>
-            </a:r>
-          </a:p>
-          <a:p>
-            <a:pPr algn="l">
-              <a:spcAft>
-                <a:spcPts val="400"/>
-              </a:spcAft>
-            </a:pPr>
-            <a:r>
-              <a:rPr sz="1100" b="0">
-                <a:solidFill>
-                  <a:srgbClr val="1A1A1A"/>
-                </a:solidFill>
-                <a:latin typeface="Meiryo"/>
-                <a:ea typeface="Meiryo"/>
-              </a:rPr>
-              <a:t>・案A:貴社のミッション(クイズ等)と連動したオリジナル修了証を貴社制作</a:t>
-            </a:r>
-          </a:p>
-          <a:p>
-            <a:pPr algn="l">
-              <a:spcAft>
-                <a:spcPts val="400"/>
-              </a:spcAft>
-            </a:pPr>
-            <a:r>
-              <a:rPr sz="1100" b="0">
-                <a:solidFill>
-                  <a:srgbClr val="1A1A1A"/>
-                </a:solidFill>
-                <a:latin typeface="Meiryo"/>
-                <a:ea typeface="Meiryo"/>
-              </a:rPr>
-              <a:t>・案B:キャンペーンビジュアルのステッカーを貴社制作・全員配布</a:t>
-            </a:r>
-          </a:p>
-          <a:p>
-            <a:pPr algn="l">
-              <a:spcAft>
-                <a:spcPts val="400"/>
-              </a:spcAft>
-            </a:pPr>
-            <a:r>
-              <a:rPr sz="1100" b="0">
-                <a:solidFill>
-                  <a:srgbClr val="1A1A1A"/>
-                </a:solidFill>
-                <a:latin typeface="Meiryo"/>
-                <a:ea typeface="Meiryo"/>
-              </a:rPr>
-              <a:t>・配布の目的(体験型か告知型か)に応じて選択</a:t>
+              <a:t>・上記は稼働費のみ。年間IP使用料・現場諸経費・実費は別途</a:t>
             </a:r>
           </a:p>
         </p:txBody>

--- a/docs/proposals/softbank-ultraman-caravan/SB様提示用_1022ミーティング資料.pptx
+++ b/docs/proposals/softbank-ultraman-caravan/SB様提示用_1022ミーティング資料.pptx
@@ -3736,7 +3736,7 @@
                 <a:latin typeface="Meiryo"/>
                 <a:ea typeface="Meiryo"/>
               </a:rPr>
-              <a:t>① キャンペーン名称・キービジュアルの策定(11月中)</a:t>
+              <a:t>① キャンペーン名称・KVの策定(11月中)と素材の使い分け</a:t>
             </a:r>
           </a:p>
           <a:p>
@@ -3753,7 +3753,7 @@
                 <a:latin typeface="Meiryo"/>
                 <a:ea typeface="Meiryo"/>
               </a:rPr>
-              <a:t>・名称とKVを両社で確定(ノベルティ可否判定の基準になります)</a:t>
+              <a:t>・KVは貴社にて制作(当社での制作受託も可能)。名称・KVを11月中に確定</a:t>
             </a:r>
           </a:p>
           <a:p>
@@ -3770,7 +3770,7 @@
                 <a:latin typeface="Meiryo"/>
                 <a:ea typeface="Meiryo"/>
               </a:rPr>
-              <a:t>・素材:複数ヒーローの集合ビジュアル、色調の揃った個体素材、ブランドロゴ</a:t>
+              <a:t>・撮影会の背景バナー:キャラクターなしの背景素材(青空/宇宙)を当社提供</a:t>
             </a:r>
           </a:p>
           <a:p>
@@ -3787,7 +3787,7 @@
                 <a:latin typeface="Meiryo"/>
                 <a:ea typeface="Meiryo"/>
               </a:rPr>
-              <a:t>・貴社デザイン部門向けに素材の使い方をレクチャー(監修回数の最小化)</a:t>
+              <a:t>・会場装飾・告知物:集合ビジュアル(修正版を提供予定)・個体素材・ブランドロゴ</a:t>
             </a:r>
           </a:p>
           <a:p>
@@ -3804,7 +3804,7 @@
                 <a:latin typeface="Meiryo"/>
                 <a:ea typeface="Meiryo"/>
               </a:rPr>
-              <a:t>・中国工場の春節前量産(1月末まで)から逆算し、11月中の確定が必要</a:t>
+              <a:t>・監修は当社「制作物」窓口へ。春節前量産(1月末)から逆算し11月中の確定が必要</a:t>
             </a:r>
           </a:p>
         </p:txBody>

--- a/docs/proposals/softbank-ultraman-caravan/SB様提示用_1022ミーティング資料.pptx
+++ b/docs/proposals/softbank-ultraman-caravan/SB様提示用_1022ミーティング資料.pptx
@@ -12602,7 +12602,7 @@
                 <a:latin typeface="Meiryo"/>
                 <a:ea typeface="Meiryo"/>
               </a:rPr>
-              <a:t>※ 2027年・2028年とも同パターン。2029年1〜3月は1月が最大20ライン、2〜3月は基準15ライン</a:t>
+              <a:t>※ 上表は2027年(104日)。2028年は106日(うるう年)、2029年1〜3月は25日で、ライン数の考え方は同じ(1月が最大20ライン、2〜3月は基準15)</a:t>
             </a:r>
           </a:p>
         </p:txBody>
@@ -12762,7 +12762,7 @@
                           <a:latin typeface="Meiryo"/>
                           <a:ea typeface="Meiryo"/>
                         </a:rPr>
-                        <a:t>234日</a:t>
+                        <a:t>235日</a:t>
                       </a:r>
                     </a:p>
                   </a:txBody>
@@ -12785,7 +12785,7 @@
                           <a:latin typeface="Meiryo"/>
                           <a:ea typeface="Meiryo"/>
                         </a:rPr>
-                        <a:t>3,510現場</a:t>
+                        <a:t>3,525現場</a:t>
                       </a:r>
                     </a:p>
                   </a:txBody>
@@ -12808,7 +12808,7 @@
                           <a:latin typeface="Meiryo"/>
                           <a:ea typeface="Meiryo"/>
                         </a:rPr>
-                        <a:t>3億5,100万円</a:t>
+                        <a:t>3億5,250万円</a:t>
                       </a:r>
                     </a:p>
                   </a:txBody>
@@ -12856,7 +12856,7 @@
                           <a:latin typeface="Meiryo"/>
                           <a:ea typeface="Meiryo"/>
                         </a:rPr>
-                        <a:t>234日</a:t>
+                        <a:t>235日</a:t>
                       </a:r>
                     </a:p>
                   </a:txBody>
@@ -12879,7 +12879,7 @@
                           <a:latin typeface="Meiryo"/>
                           <a:ea typeface="Meiryo"/>
                         </a:rPr>
-                        <a:t>3,980現場</a:t>
+                        <a:t>4,005現場</a:t>
                       </a:r>
                     </a:p>
                   </a:txBody>
@@ -12902,7 +12902,7 @@
                           <a:latin typeface="Meiryo"/>
                           <a:ea typeface="Meiryo"/>
                         </a:rPr>
-                        <a:t>3億9,800万円</a:t>
+                        <a:t>4億50万円</a:t>
                       </a:r>
                     </a:p>
                   </a:txBody>

--- a/docs/proposals/softbank-ultraman-caravan/SB様提示用_1022ミーティング資料.pptx
+++ b/docs/proposals/softbank-ultraman-caravan/SB様提示用_1022ミーティング資料.pptx
@@ -16,6 +16,7 @@
     <p:sldId id="264" r:id="rId15"/>
     <p:sldId id="265" r:id="rId16"/>
     <p:sldId id="266" r:id="rId17"/>
+    <p:sldId id="267" r:id="rId18"/>
   </p:sldIdLst>
   <p:sldSz cx="12191695" cy="6858000" type="screen4x3"/>
   <p:notesSz cx="6858000" cy="9144000"/>
@@ -3490,7 +3491,7 @@
                 <a:latin typeface="Meiryo"/>
                 <a:ea typeface="Meiryo"/>
               </a:rPr>
-              <a:t>4. 制作物・権利まわりの進め方</a:t>
+              <a:t>3. ライン供給計画(2027年1月〜2029年3月)</a:t>
             </a:r>
           </a:p>
         </p:txBody>
@@ -3530,7 +3531,7 @@
                 <a:latin typeface="Meiryo"/>
                 <a:ea typeface="Meiryo"/>
               </a:rPr>
-              <a:t>キャンペーンビジュアルの確定を起点に、仮申請フローで各制作物を確定していきます</a:t>
+              <a:t>基準15ラインを最低保証の対象とし、余裕のある月は最大20ラインまで増枠できます。詳細は別紙(月別供給計画)をご参照ください</a:t>
             </a:r>
           </a:p>
         </p:txBody>
@@ -3655,52 +3656,1247 @@
           </a:p>
         </p:txBody>
       </p:sp>
-      <p:sp>
-        <p:nvSpPr>
-          <p:cNvPr id="8" name="Rounded Rectangle 7"/>
-          <p:cNvSpPr/>
+      <p:graphicFrame>
+        <p:nvGraphicFramePr>
+          <p:cNvPr id="8" name="Table 7"/>
+          <p:cNvGraphicFramePr>
+            <a:graphicFrameLocks noGrp="1"/>
+          </p:cNvGraphicFramePr>
           <p:nvPr/>
-        </p:nvSpPr>
-        <p:spPr>
-          <a:xfrm>
-            <a:off x="640080" y="1463040"/>
-            <a:ext cx="5303520" cy="2286000"/>
-          </a:xfrm>
-          <a:prstGeom prst="roundRect">
-            <a:avLst>
-              <a:gd name="adj" fmla="val 6000"/>
-            </a:avLst>
-          </a:prstGeom>
-          <a:solidFill>
-            <a:srgbClr val="F2F4F6"/>
-          </a:solidFill>
-          <a:ln>
-            <a:noFill/>
-          </a:ln>
-          <a:effectLst/>
-        </p:spPr>
-        <p:style>
-          <a:lnRef idx="1">
-            <a:schemeClr val="accent1"/>
-          </a:lnRef>
-          <a:fillRef idx="3">
-            <a:schemeClr val="accent1"/>
-          </a:fillRef>
-          <a:effectRef idx="2">
-            <a:schemeClr val="accent1"/>
-          </a:effectRef>
-          <a:fontRef idx="minor">
-            <a:schemeClr val="lt1"/>
-          </a:fontRef>
-        </p:style>
-        <p:txBody>
-          <a:bodyPr rtlCol="0" anchor="ctr"/>
-          <a:lstStyle/>
-          <a:p>
-            <a:pPr algn="ctr"/>
-          </a:p>
-        </p:txBody>
-      </p:sp>
+        </p:nvGraphicFramePr>
+        <p:xfrm>
+          <a:off x="640080" y="1417320"/>
+          <a:ext cx="10881356" cy="1828800"/>
+        </p:xfrm>
+        <a:graphic>
+          <a:graphicData uri="http://schemas.openxmlformats.org/drawingml/2006/table">
+            <a:tbl>
+              <a:tblPr firstRow="1" bandRow="1">
+                <a:tableStyleId>{5C22544A-7EE6-4342-B048-85BDC9FD1C3A}</a:tableStyleId>
+              </a:tblPr>
+              <a:tblGrid>
+                <a:gridCol w="2123192"/>
+                <a:gridCol w="729847"/>
+                <a:gridCol w="729847"/>
+                <a:gridCol w="729847"/>
+                <a:gridCol w="729847"/>
+                <a:gridCol w="729847"/>
+                <a:gridCol w="729847"/>
+                <a:gridCol w="729847"/>
+                <a:gridCol w="729847"/>
+                <a:gridCol w="729847"/>
+                <a:gridCol w="729847"/>
+                <a:gridCol w="729847"/>
+                <a:gridCol w="729847"/>
+              </a:tblGrid>
+              <a:tr h="457200">
+                <a:tc>
+                  <a:txBody>
+                    <a:bodyPr/>
+                    <a:lstStyle/>
+                    <a:p>
+                      <a:r>
+                        <a:rPr sz="1100" b="1">
+                          <a:solidFill>
+                            <a:srgbClr val="FFFFFF"/>
+                          </a:solidFill>
+                          <a:latin typeface="Meiryo"/>
+                          <a:ea typeface="Meiryo"/>
+                        </a:rPr>
+                        <a:t/>
+                      </a:r>
+                    </a:p>
+                  </a:txBody>
+                  <a:tcPr anchor="ctr" marL="73152" marR="73152">
+                    <a:solidFill>
+                      <a:srgbClr val="232278"/>
+                    </a:solidFill>
+                  </a:tcPr>
+                </a:tc>
+                <a:tc>
+                  <a:txBody>
+                    <a:bodyPr/>
+                    <a:lstStyle/>
+                    <a:p>
+                      <a:r>
+                        <a:rPr sz="1100" b="1">
+                          <a:solidFill>
+                            <a:srgbClr val="FFFFFF"/>
+                          </a:solidFill>
+                          <a:latin typeface="Meiryo"/>
+                          <a:ea typeface="Meiryo"/>
+                        </a:rPr>
+                        <a:t>1月</a:t>
+                      </a:r>
+                    </a:p>
+                  </a:txBody>
+                  <a:tcPr anchor="ctr" marL="73152" marR="73152">
+                    <a:solidFill>
+                      <a:srgbClr val="232278"/>
+                    </a:solidFill>
+                  </a:tcPr>
+                </a:tc>
+                <a:tc>
+                  <a:txBody>
+                    <a:bodyPr/>
+                    <a:lstStyle/>
+                    <a:p>
+                      <a:r>
+                        <a:rPr sz="1100" b="1">
+                          <a:solidFill>
+                            <a:srgbClr val="FFFFFF"/>
+                          </a:solidFill>
+                          <a:latin typeface="Meiryo"/>
+                          <a:ea typeface="Meiryo"/>
+                        </a:rPr>
+                        <a:t>2月</a:t>
+                      </a:r>
+                    </a:p>
+                  </a:txBody>
+                  <a:tcPr anchor="ctr" marL="73152" marR="73152">
+                    <a:solidFill>
+                      <a:srgbClr val="232278"/>
+                    </a:solidFill>
+                  </a:tcPr>
+                </a:tc>
+                <a:tc>
+                  <a:txBody>
+                    <a:bodyPr/>
+                    <a:lstStyle/>
+                    <a:p>
+                      <a:r>
+                        <a:rPr sz="1100" b="1">
+                          <a:solidFill>
+                            <a:srgbClr val="FFFFFF"/>
+                          </a:solidFill>
+                          <a:latin typeface="Meiryo"/>
+                          <a:ea typeface="Meiryo"/>
+                        </a:rPr>
+                        <a:t>3月</a:t>
+                      </a:r>
+                    </a:p>
+                  </a:txBody>
+                  <a:tcPr anchor="ctr" marL="73152" marR="73152">
+                    <a:solidFill>
+                      <a:srgbClr val="232278"/>
+                    </a:solidFill>
+                  </a:tcPr>
+                </a:tc>
+                <a:tc>
+                  <a:txBody>
+                    <a:bodyPr/>
+                    <a:lstStyle/>
+                    <a:p>
+                      <a:r>
+                        <a:rPr sz="1100" b="1">
+                          <a:solidFill>
+                            <a:srgbClr val="FFFFFF"/>
+                          </a:solidFill>
+                          <a:latin typeface="Meiryo"/>
+                          <a:ea typeface="Meiryo"/>
+                        </a:rPr>
+                        <a:t>4月</a:t>
+                      </a:r>
+                    </a:p>
+                  </a:txBody>
+                  <a:tcPr anchor="ctr" marL="73152" marR="73152">
+                    <a:solidFill>
+                      <a:srgbClr val="232278"/>
+                    </a:solidFill>
+                  </a:tcPr>
+                </a:tc>
+                <a:tc>
+                  <a:txBody>
+                    <a:bodyPr/>
+                    <a:lstStyle/>
+                    <a:p>
+                      <a:r>
+                        <a:rPr sz="1100" b="1">
+                          <a:solidFill>
+                            <a:srgbClr val="FFFFFF"/>
+                          </a:solidFill>
+                          <a:latin typeface="Meiryo"/>
+                          <a:ea typeface="Meiryo"/>
+                        </a:rPr>
+                        <a:t>5月</a:t>
+                      </a:r>
+                    </a:p>
+                  </a:txBody>
+                  <a:tcPr anchor="ctr" marL="73152" marR="73152">
+                    <a:solidFill>
+                      <a:srgbClr val="232278"/>
+                    </a:solidFill>
+                  </a:tcPr>
+                </a:tc>
+                <a:tc>
+                  <a:txBody>
+                    <a:bodyPr/>
+                    <a:lstStyle/>
+                    <a:p>
+                      <a:r>
+                        <a:rPr sz="1100" b="1">
+                          <a:solidFill>
+                            <a:srgbClr val="FFFFFF"/>
+                          </a:solidFill>
+                          <a:latin typeface="Meiryo"/>
+                          <a:ea typeface="Meiryo"/>
+                        </a:rPr>
+                        <a:t>6月</a:t>
+                      </a:r>
+                    </a:p>
+                  </a:txBody>
+                  <a:tcPr anchor="ctr" marL="73152" marR="73152">
+                    <a:solidFill>
+                      <a:srgbClr val="232278"/>
+                    </a:solidFill>
+                  </a:tcPr>
+                </a:tc>
+                <a:tc>
+                  <a:txBody>
+                    <a:bodyPr/>
+                    <a:lstStyle/>
+                    <a:p>
+                      <a:r>
+                        <a:rPr sz="1100" b="1">
+                          <a:solidFill>
+                            <a:srgbClr val="FFFFFF"/>
+                          </a:solidFill>
+                          <a:latin typeface="Meiryo"/>
+                          <a:ea typeface="Meiryo"/>
+                        </a:rPr>
+                        <a:t>7月</a:t>
+                      </a:r>
+                    </a:p>
+                  </a:txBody>
+                  <a:tcPr anchor="ctr" marL="73152" marR="73152">
+                    <a:solidFill>
+                      <a:srgbClr val="232278"/>
+                    </a:solidFill>
+                  </a:tcPr>
+                </a:tc>
+                <a:tc>
+                  <a:txBody>
+                    <a:bodyPr/>
+                    <a:lstStyle/>
+                    <a:p>
+                      <a:r>
+                        <a:rPr sz="1100" b="1">
+                          <a:solidFill>
+                            <a:srgbClr val="FFFFFF"/>
+                          </a:solidFill>
+                          <a:latin typeface="Meiryo"/>
+                          <a:ea typeface="Meiryo"/>
+                        </a:rPr>
+                        <a:t>8月</a:t>
+                      </a:r>
+                    </a:p>
+                  </a:txBody>
+                  <a:tcPr anchor="ctr" marL="73152" marR="73152">
+                    <a:solidFill>
+                      <a:srgbClr val="232278"/>
+                    </a:solidFill>
+                  </a:tcPr>
+                </a:tc>
+                <a:tc>
+                  <a:txBody>
+                    <a:bodyPr/>
+                    <a:lstStyle/>
+                    <a:p>
+                      <a:r>
+                        <a:rPr sz="1100" b="1">
+                          <a:solidFill>
+                            <a:srgbClr val="FFFFFF"/>
+                          </a:solidFill>
+                          <a:latin typeface="Meiryo"/>
+                          <a:ea typeface="Meiryo"/>
+                        </a:rPr>
+                        <a:t>9月</a:t>
+                      </a:r>
+                    </a:p>
+                  </a:txBody>
+                  <a:tcPr anchor="ctr" marL="73152" marR="73152">
+                    <a:solidFill>
+                      <a:srgbClr val="232278"/>
+                    </a:solidFill>
+                  </a:tcPr>
+                </a:tc>
+                <a:tc>
+                  <a:txBody>
+                    <a:bodyPr/>
+                    <a:lstStyle/>
+                    <a:p>
+                      <a:r>
+                        <a:rPr sz="1100" b="1">
+                          <a:solidFill>
+                            <a:srgbClr val="FFFFFF"/>
+                          </a:solidFill>
+                          <a:latin typeface="Meiryo"/>
+                          <a:ea typeface="Meiryo"/>
+                        </a:rPr>
+                        <a:t>10月</a:t>
+                      </a:r>
+                    </a:p>
+                  </a:txBody>
+                  <a:tcPr anchor="ctr" marL="73152" marR="73152">
+                    <a:solidFill>
+                      <a:srgbClr val="232278"/>
+                    </a:solidFill>
+                  </a:tcPr>
+                </a:tc>
+                <a:tc>
+                  <a:txBody>
+                    <a:bodyPr/>
+                    <a:lstStyle/>
+                    <a:p>
+                      <a:r>
+                        <a:rPr sz="1100" b="1">
+                          <a:solidFill>
+                            <a:srgbClr val="FFFFFF"/>
+                          </a:solidFill>
+                          <a:latin typeface="Meiryo"/>
+                          <a:ea typeface="Meiryo"/>
+                        </a:rPr>
+                        <a:t>11月</a:t>
+                      </a:r>
+                    </a:p>
+                  </a:txBody>
+                  <a:tcPr anchor="ctr" marL="73152" marR="73152">
+                    <a:solidFill>
+                      <a:srgbClr val="232278"/>
+                    </a:solidFill>
+                  </a:tcPr>
+                </a:tc>
+                <a:tc>
+                  <a:txBody>
+                    <a:bodyPr/>
+                    <a:lstStyle/>
+                    <a:p>
+                      <a:r>
+                        <a:rPr sz="1100" b="1">
+                          <a:solidFill>
+                            <a:srgbClr val="FFFFFF"/>
+                          </a:solidFill>
+                          <a:latin typeface="Meiryo"/>
+                          <a:ea typeface="Meiryo"/>
+                        </a:rPr>
+                        <a:t>12月</a:t>
+                      </a:r>
+                    </a:p>
+                  </a:txBody>
+                  <a:tcPr anchor="ctr" marL="73152" marR="73152">
+                    <a:solidFill>
+                      <a:srgbClr val="232278"/>
+                    </a:solidFill>
+                  </a:tcPr>
+                </a:tc>
+              </a:tr>
+              <a:tr h="457200">
+                <a:tc>
+                  <a:txBody>
+                    <a:bodyPr/>
+                    <a:lstStyle/>
+                    <a:p>
+                      <a:r>
+                        <a:rPr sz="1100" b="1">
+                          <a:solidFill>
+                            <a:srgbClr val="1A1A1A"/>
+                          </a:solidFill>
+                          <a:latin typeface="Meiryo"/>
+                          <a:ea typeface="Meiryo"/>
+                        </a:rPr>
+                        <a:t>開催日数(土日)</a:t>
+                      </a:r>
+                    </a:p>
+                  </a:txBody>
+                  <a:tcPr anchor="ctr" marL="73152" marR="73152">
+                    <a:solidFill>
+                      <a:srgbClr val="FFFFFF"/>
+                    </a:solidFill>
+                  </a:tcPr>
+                </a:tc>
+                <a:tc>
+                  <a:txBody>
+                    <a:bodyPr/>
+                    <a:lstStyle/>
+                    <a:p>
+                      <a:r>
+                        <a:rPr sz="1100" b="0">
+                          <a:solidFill>
+                            <a:srgbClr val="1A1A1A"/>
+                          </a:solidFill>
+                          <a:latin typeface="Meiryo"/>
+                          <a:ea typeface="Meiryo"/>
+                        </a:rPr>
+                        <a:t>10</a:t>
+                      </a:r>
+                    </a:p>
+                  </a:txBody>
+                  <a:tcPr anchor="ctr" marL="73152" marR="73152">
+                    <a:solidFill>
+                      <a:srgbClr val="FFFFFF"/>
+                    </a:solidFill>
+                  </a:tcPr>
+                </a:tc>
+                <a:tc>
+                  <a:txBody>
+                    <a:bodyPr/>
+                    <a:lstStyle/>
+                    <a:p>
+                      <a:r>
+                        <a:rPr sz="1100" b="0">
+                          <a:solidFill>
+                            <a:srgbClr val="1A1A1A"/>
+                          </a:solidFill>
+                          <a:latin typeface="Meiryo"/>
+                          <a:ea typeface="Meiryo"/>
+                        </a:rPr>
+                        <a:t>8</a:t>
+                      </a:r>
+                    </a:p>
+                  </a:txBody>
+                  <a:tcPr anchor="ctr" marL="73152" marR="73152">
+                    <a:solidFill>
+                      <a:srgbClr val="FFFFFF"/>
+                    </a:solidFill>
+                  </a:tcPr>
+                </a:tc>
+                <a:tc>
+                  <a:txBody>
+                    <a:bodyPr/>
+                    <a:lstStyle/>
+                    <a:p>
+                      <a:r>
+                        <a:rPr sz="1100" b="0">
+                          <a:solidFill>
+                            <a:srgbClr val="1A1A1A"/>
+                          </a:solidFill>
+                          <a:latin typeface="Meiryo"/>
+                          <a:ea typeface="Meiryo"/>
+                        </a:rPr>
+                        <a:t>8</a:t>
+                      </a:r>
+                    </a:p>
+                  </a:txBody>
+                  <a:tcPr anchor="ctr" marL="73152" marR="73152">
+                    <a:solidFill>
+                      <a:srgbClr val="FFFFFF"/>
+                    </a:solidFill>
+                  </a:tcPr>
+                </a:tc>
+                <a:tc>
+                  <a:txBody>
+                    <a:bodyPr/>
+                    <a:lstStyle/>
+                    <a:p>
+                      <a:r>
+                        <a:rPr sz="1100" b="0">
+                          <a:solidFill>
+                            <a:srgbClr val="1A1A1A"/>
+                          </a:solidFill>
+                          <a:latin typeface="Meiryo"/>
+                          <a:ea typeface="Meiryo"/>
+                        </a:rPr>
+                        <a:t>8</a:t>
+                      </a:r>
+                    </a:p>
+                  </a:txBody>
+                  <a:tcPr anchor="ctr" marL="73152" marR="73152">
+                    <a:solidFill>
+                      <a:srgbClr val="FFFFFF"/>
+                    </a:solidFill>
+                  </a:tcPr>
+                </a:tc>
+                <a:tc>
+                  <a:txBody>
+                    <a:bodyPr/>
+                    <a:lstStyle/>
+                    <a:p>
+                      <a:r>
+                        <a:rPr sz="1100" b="0">
+                          <a:solidFill>
+                            <a:srgbClr val="1A1A1A"/>
+                          </a:solidFill>
+                          <a:latin typeface="Meiryo"/>
+                          <a:ea typeface="Meiryo"/>
+                        </a:rPr>
+                        <a:t>10</a:t>
+                      </a:r>
+                    </a:p>
+                  </a:txBody>
+                  <a:tcPr anchor="ctr" marL="73152" marR="73152">
+                    <a:solidFill>
+                      <a:srgbClr val="FFFFFF"/>
+                    </a:solidFill>
+                  </a:tcPr>
+                </a:tc>
+                <a:tc>
+                  <a:txBody>
+                    <a:bodyPr/>
+                    <a:lstStyle/>
+                    <a:p>
+                      <a:r>
+                        <a:rPr sz="1100" b="0">
+                          <a:solidFill>
+                            <a:srgbClr val="1A1A1A"/>
+                          </a:solidFill>
+                          <a:latin typeface="Meiryo"/>
+                          <a:ea typeface="Meiryo"/>
+                        </a:rPr>
+                        <a:t>8</a:t>
+                      </a:r>
+                    </a:p>
+                  </a:txBody>
+                  <a:tcPr anchor="ctr" marL="73152" marR="73152">
+                    <a:solidFill>
+                      <a:srgbClr val="FFFFFF"/>
+                    </a:solidFill>
+                  </a:tcPr>
+                </a:tc>
+                <a:tc>
+                  <a:txBody>
+                    <a:bodyPr/>
+                    <a:lstStyle/>
+                    <a:p>
+                      <a:r>
+                        <a:rPr sz="1100" b="0">
+                          <a:solidFill>
+                            <a:srgbClr val="1A1A1A"/>
+                          </a:solidFill>
+                          <a:latin typeface="Meiryo"/>
+                          <a:ea typeface="Meiryo"/>
+                        </a:rPr>
+                        <a:t>9</a:t>
+                      </a:r>
+                    </a:p>
+                  </a:txBody>
+                  <a:tcPr anchor="ctr" marL="73152" marR="73152">
+                    <a:solidFill>
+                      <a:srgbClr val="FFFFFF"/>
+                    </a:solidFill>
+                  </a:tcPr>
+                </a:tc>
+                <a:tc>
+                  <a:txBody>
+                    <a:bodyPr/>
+                    <a:lstStyle/>
+                    <a:p>
+                      <a:r>
+                        <a:rPr sz="1100" b="0">
+                          <a:solidFill>
+                            <a:srgbClr val="1A1A1A"/>
+                          </a:solidFill>
+                          <a:latin typeface="Meiryo"/>
+                          <a:ea typeface="Meiryo"/>
+                        </a:rPr>
+                        <a:t>9</a:t>
+                      </a:r>
+                    </a:p>
+                  </a:txBody>
+                  <a:tcPr anchor="ctr" marL="73152" marR="73152">
+                    <a:solidFill>
+                      <a:srgbClr val="FFFFFF"/>
+                    </a:solidFill>
+                  </a:tcPr>
+                </a:tc>
+                <a:tc>
+                  <a:txBody>
+                    <a:bodyPr/>
+                    <a:lstStyle/>
+                    <a:p>
+                      <a:r>
+                        <a:rPr sz="1100" b="0">
+                          <a:solidFill>
+                            <a:srgbClr val="1A1A1A"/>
+                          </a:solidFill>
+                          <a:latin typeface="Meiryo"/>
+                          <a:ea typeface="Meiryo"/>
+                        </a:rPr>
+                        <a:t>8</a:t>
+                      </a:r>
+                    </a:p>
+                  </a:txBody>
+                  <a:tcPr anchor="ctr" marL="73152" marR="73152">
+                    <a:solidFill>
+                      <a:srgbClr val="FFFFFF"/>
+                    </a:solidFill>
+                  </a:tcPr>
+                </a:tc>
+                <a:tc>
+                  <a:txBody>
+                    <a:bodyPr/>
+                    <a:lstStyle/>
+                    <a:p>
+                      <a:r>
+                        <a:rPr sz="1100" b="0">
+                          <a:solidFill>
+                            <a:srgbClr val="1A1A1A"/>
+                          </a:solidFill>
+                          <a:latin typeface="Meiryo"/>
+                          <a:ea typeface="Meiryo"/>
+                        </a:rPr>
+                        <a:t>10</a:t>
+                      </a:r>
+                    </a:p>
+                  </a:txBody>
+                  <a:tcPr anchor="ctr" marL="73152" marR="73152">
+                    <a:solidFill>
+                      <a:srgbClr val="FFFFFF"/>
+                    </a:solidFill>
+                  </a:tcPr>
+                </a:tc>
+                <a:tc>
+                  <a:txBody>
+                    <a:bodyPr/>
+                    <a:lstStyle/>
+                    <a:p>
+                      <a:r>
+                        <a:rPr sz="1100" b="0">
+                          <a:solidFill>
+                            <a:srgbClr val="1A1A1A"/>
+                          </a:solidFill>
+                          <a:latin typeface="Meiryo"/>
+                          <a:ea typeface="Meiryo"/>
+                        </a:rPr>
+                        <a:t>8</a:t>
+                      </a:r>
+                    </a:p>
+                  </a:txBody>
+                  <a:tcPr anchor="ctr" marL="73152" marR="73152">
+                    <a:solidFill>
+                      <a:srgbClr val="FFFFFF"/>
+                    </a:solidFill>
+                  </a:tcPr>
+                </a:tc>
+                <a:tc>
+                  <a:txBody>
+                    <a:bodyPr/>
+                    <a:lstStyle/>
+                    <a:p>
+                      <a:r>
+                        <a:rPr sz="1100" b="0">
+                          <a:solidFill>
+                            <a:srgbClr val="1A1A1A"/>
+                          </a:solidFill>
+                          <a:latin typeface="Meiryo"/>
+                          <a:ea typeface="Meiryo"/>
+                        </a:rPr>
+                        <a:t>8</a:t>
+                      </a:r>
+                    </a:p>
+                  </a:txBody>
+                  <a:tcPr anchor="ctr" marL="73152" marR="73152">
+                    <a:solidFill>
+                      <a:srgbClr val="FFFFFF"/>
+                    </a:solidFill>
+                  </a:tcPr>
+                </a:tc>
+              </a:tr>
+              <a:tr h="457200">
+                <a:tc>
+                  <a:txBody>
+                    <a:bodyPr/>
+                    <a:lstStyle/>
+                    <a:p>
+                      <a:r>
+                        <a:rPr sz="1100" b="1">
+                          <a:solidFill>
+                            <a:srgbClr val="1A1A1A"/>
+                          </a:solidFill>
+                          <a:latin typeface="Meiryo"/>
+                          <a:ea typeface="Meiryo"/>
+                        </a:rPr>
+                        <a:t>基準ライン数</a:t>
+                      </a:r>
+                    </a:p>
+                  </a:txBody>
+                  <a:tcPr anchor="ctr" marL="73152" marR="73152">
+                    <a:solidFill>
+                      <a:srgbClr val="F2F4F6"/>
+                    </a:solidFill>
+                  </a:tcPr>
+                </a:tc>
+                <a:tc>
+                  <a:txBody>
+                    <a:bodyPr/>
+                    <a:lstStyle/>
+                    <a:p>
+                      <a:r>
+                        <a:rPr sz="1100" b="0">
+                          <a:solidFill>
+                            <a:srgbClr val="1A1A1A"/>
+                          </a:solidFill>
+                          <a:latin typeface="Meiryo"/>
+                          <a:ea typeface="Meiryo"/>
+                        </a:rPr>
+                        <a:t>15</a:t>
+                      </a:r>
+                    </a:p>
+                  </a:txBody>
+                  <a:tcPr anchor="ctr" marL="73152" marR="73152">
+                    <a:solidFill>
+                      <a:srgbClr val="F2F4F6"/>
+                    </a:solidFill>
+                  </a:tcPr>
+                </a:tc>
+                <a:tc>
+                  <a:txBody>
+                    <a:bodyPr/>
+                    <a:lstStyle/>
+                    <a:p>
+                      <a:r>
+                        <a:rPr sz="1100" b="0">
+                          <a:solidFill>
+                            <a:srgbClr val="1A1A1A"/>
+                          </a:solidFill>
+                          <a:latin typeface="Meiryo"/>
+                          <a:ea typeface="Meiryo"/>
+                        </a:rPr>
+                        <a:t>15</a:t>
+                      </a:r>
+                    </a:p>
+                  </a:txBody>
+                  <a:tcPr anchor="ctr" marL="73152" marR="73152">
+                    <a:solidFill>
+                      <a:srgbClr val="F2F4F6"/>
+                    </a:solidFill>
+                  </a:tcPr>
+                </a:tc>
+                <a:tc>
+                  <a:txBody>
+                    <a:bodyPr/>
+                    <a:lstStyle/>
+                    <a:p>
+                      <a:r>
+                        <a:rPr sz="1100" b="0">
+                          <a:solidFill>
+                            <a:srgbClr val="1A1A1A"/>
+                          </a:solidFill>
+                          <a:latin typeface="Meiryo"/>
+                          <a:ea typeface="Meiryo"/>
+                        </a:rPr>
+                        <a:t>15</a:t>
+                      </a:r>
+                    </a:p>
+                  </a:txBody>
+                  <a:tcPr anchor="ctr" marL="73152" marR="73152">
+                    <a:solidFill>
+                      <a:srgbClr val="F2F4F6"/>
+                    </a:solidFill>
+                  </a:tcPr>
+                </a:tc>
+                <a:tc>
+                  <a:txBody>
+                    <a:bodyPr/>
+                    <a:lstStyle/>
+                    <a:p>
+                      <a:r>
+                        <a:rPr sz="1100" b="0">
+                          <a:solidFill>
+                            <a:srgbClr val="1A1A1A"/>
+                          </a:solidFill>
+                          <a:latin typeface="Meiryo"/>
+                          <a:ea typeface="Meiryo"/>
+                        </a:rPr>
+                        <a:t>15</a:t>
+                      </a:r>
+                    </a:p>
+                  </a:txBody>
+                  <a:tcPr anchor="ctr" marL="73152" marR="73152">
+                    <a:solidFill>
+                      <a:srgbClr val="F2F4F6"/>
+                    </a:solidFill>
+                  </a:tcPr>
+                </a:tc>
+                <a:tc>
+                  <a:txBody>
+                    <a:bodyPr/>
+                    <a:lstStyle/>
+                    <a:p>
+                      <a:r>
+                        <a:rPr sz="1100" b="0">
+                          <a:solidFill>
+                            <a:srgbClr val="1A1A1A"/>
+                          </a:solidFill>
+                          <a:latin typeface="Meiryo"/>
+                          <a:ea typeface="Meiryo"/>
+                        </a:rPr>
+                        <a:t>15</a:t>
+                      </a:r>
+                    </a:p>
+                  </a:txBody>
+                  <a:tcPr anchor="ctr" marL="73152" marR="73152">
+                    <a:solidFill>
+                      <a:srgbClr val="F2F4F6"/>
+                    </a:solidFill>
+                  </a:tcPr>
+                </a:tc>
+                <a:tc>
+                  <a:txBody>
+                    <a:bodyPr/>
+                    <a:lstStyle/>
+                    <a:p>
+                      <a:r>
+                        <a:rPr sz="1100" b="0">
+                          <a:solidFill>
+                            <a:srgbClr val="1A1A1A"/>
+                          </a:solidFill>
+                          <a:latin typeface="Meiryo"/>
+                          <a:ea typeface="Meiryo"/>
+                        </a:rPr>
+                        <a:t>15</a:t>
+                      </a:r>
+                    </a:p>
+                  </a:txBody>
+                  <a:tcPr anchor="ctr" marL="73152" marR="73152">
+                    <a:solidFill>
+                      <a:srgbClr val="F2F4F6"/>
+                    </a:solidFill>
+                  </a:tcPr>
+                </a:tc>
+                <a:tc>
+                  <a:txBody>
+                    <a:bodyPr/>
+                    <a:lstStyle/>
+                    <a:p>
+                      <a:r>
+                        <a:rPr sz="1100" b="0">
+                          <a:solidFill>
+                            <a:srgbClr val="1A1A1A"/>
+                          </a:solidFill>
+                          <a:latin typeface="Meiryo"/>
+                          <a:ea typeface="Meiryo"/>
+                        </a:rPr>
+                        <a:t>15</a:t>
+                      </a:r>
+                    </a:p>
+                  </a:txBody>
+                  <a:tcPr anchor="ctr" marL="73152" marR="73152">
+                    <a:solidFill>
+                      <a:srgbClr val="F2F4F6"/>
+                    </a:solidFill>
+                  </a:tcPr>
+                </a:tc>
+                <a:tc>
+                  <a:txBody>
+                    <a:bodyPr/>
+                    <a:lstStyle/>
+                    <a:p>
+                      <a:r>
+                        <a:rPr sz="1100" b="0">
+                          <a:solidFill>
+                            <a:srgbClr val="1A1A1A"/>
+                          </a:solidFill>
+                          <a:latin typeface="Meiryo"/>
+                          <a:ea typeface="Meiryo"/>
+                        </a:rPr>
+                        <a:t>15</a:t>
+                      </a:r>
+                    </a:p>
+                  </a:txBody>
+                  <a:tcPr anchor="ctr" marL="73152" marR="73152">
+                    <a:solidFill>
+                      <a:srgbClr val="F2F4F6"/>
+                    </a:solidFill>
+                  </a:tcPr>
+                </a:tc>
+                <a:tc>
+                  <a:txBody>
+                    <a:bodyPr/>
+                    <a:lstStyle/>
+                    <a:p>
+                      <a:r>
+                        <a:rPr sz="1100" b="0">
+                          <a:solidFill>
+                            <a:srgbClr val="1A1A1A"/>
+                          </a:solidFill>
+                          <a:latin typeface="Meiryo"/>
+                          <a:ea typeface="Meiryo"/>
+                        </a:rPr>
+                        <a:t>15</a:t>
+                      </a:r>
+                    </a:p>
+                  </a:txBody>
+                  <a:tcPr anchor="ctr" marL="73152" marR="73152">
+                    <a:solidFill>
+                      <a:srgbClr val="F2F4F6"/>
+                    </a:solidFill>
+                  </a:tcPr>
+                </a:tc>
+                <a:tc>
+                  <a:txBody>
+                    <a:bodyPr/>
+                    <a:lstStyle/>
+                    <a:p>
+                      <a:r>
+                        <a:rPr sz="1100" b="0">
+                          <a:solidFill>
+                            <a:srgbClr val="1A1A1A"/>
+                          </a:solidFill>
+                          <a:latin typeface="Meiryo"/>
+                          <a:ea typeface="Meiryo"/>
+                        </a:rPr>
+                        <a:t>15</a:t>
+                      </a:r>
+                    </a:p>
+                  </a:txBody>
+                  <a:tcPr anchor="ctr" marL="73152" marR="73152">
+                    <a:solidFill>
+                      <a:srgbClr val="F2F4F6"/>
+                    </a:solidFill>
+                  </a:tcPr>
+                </a:tc>
+                <a:tc>
+                  <a:txBody>
+                    <a:bodyPr/>
+                    <a:lstStyle/>
+                    <a:p>
+                      <a:r>
+                        <a:rPr sz="1100" b="0">
+                          <a:solidFill>
+                            <a:srgbClr val="1A1A1A"/>
+                          </a:solidFill>
+                          <a:latin typeface="Meiryo"/>
+                          <a:ea typeface="Meiryo"/>
+                        </a:rPr>
+                        <a:t>15</a:t>
+                      </a:r>
+                    </a:p>
+                  </a:txBody>
+                  <a:tcPr anchor="ctr" marL="73152" marR="73152">
+                    <a:solidFill>
+                      <a:srgbClr val="F2F4F6"/>
+                    </a:solidFill>
+                  </a:tcPr>
+                </a:tc>
+                <a:tc>
+                  <a:txBody>
+                    <a:bodyPr/>
+                    <a:lstStyle/>
+                    <a:p>
+                      <a:r>
+                        <a:rPr sz="1100" b="0">
+                          <a:solidFill>
+                            <a:srgbClr val="1A1A1A"/>
+                          </a:solidFill>
+                          <a:latin typeface="Meiryo"/>
+                          <a:ea typeface="Meiryo"/>
+                        </a:rPr>
+                        <a:t>15</a:t>
+                      </a:r>
+                    </a:p>
+                  </a:txBody>
+                  <a:tcPr anchor="ctr" marL="73152" marR="73152">
+                    <a:solidFill>
+                      <a:srgbClr val="F2F4F6"/>
+                    </a:solidFill>
+                  </a:tcPr>
+                </a:tc>
+              </a:tr>
+              <a:tr h="457200">
+                <a:tc>
+                  <a:txBody>
+                    <a:bodyPr/>
+                    <a:lstStyle/>
+                    <a:p>
+                      <a:r>
+                        <a:rPr sz="1100" b="1">
+                          <a:solidFill>
+                            <a:srgbClr val="1A1A1A"/>
+                          </a:solidFill>
+                          <a:latin typeface="Meiryo"/>
+                          <a:ea typeface="Meiryo"/>
+                        </a:rPr>
+                        <a:t>最大ライン数</a:t>
+                      </a:r>
+                    </a:p>
+                  </a:txBody>
+                  <a:tcPr anchor="ctr" marL="73152" marR="73152">
+                    <a:solidFill>
+                      <a:srgbClr val="FFFFFF"/>
+                    </a:solidFill>
+                  </a:tcPr>
+                </a:tc>
+                <a:tc>
+                  <a:txBody>
+                    <a:bodyPr/>
+                    <a:lstStyle/>
+                    <a:p>
+                      <a:r>
+                        <a:rPr sz="1100" b="1">
+                          <a:solidFill>
+                            <a:srgbClr val="C00000"/>
+                          </a:solidFill>
+                          <a:latin typeface="Meiryo"/>
+                          <a:ea typeface="Meiryo"/>
+                        </a:rPr>
+                        <a:t>20</a:t>
+                      </a:r>
+                    </a:p>
+                  </a:txBody>
+                  <a:tcPr anchor="ctr" marL="73152" marR="73152">
+                    <a:solidFill>
+                      <a:srgbClr val="FFFFFF"/>
+                    </a:solidFill>
+                  </a:tcPr>
+                </a:tc>
+                <a:tc>
+                  <a:txBody>
+                    <a:bodyPr/>
+                    <a:lstStyle/>
+                    <a:p>
+                      <a:r>
+                        <a:rPr sz="1100" b="0">
+                          <a:solidFill>
+                            <a:srgbClr val="1A1A1A"/>
+                          </a:solidFill>
+                          <a:latin typeface="Meiryo"/>
+                          <a:ea typeface="Meiryo"/>
+                        </a:rPr>
+                        <a:t>15</a:t>
+                      </a:r>
+                    </a:p>
+                  </a:txBody>
+                  <a:tcPr anchor="ctr" marL="73152" marR="73152">
+                    <a:solidFill>
+                      <a:srgbClr val="FFFFFF"/>
+                    </a:solidFill>
+                  </a:tcPr>
+                </a:tc>
+                <a:tc>
+                  <a:txBody>
+                    <a:bodyPr/>
+                    <a:lstStyle/>
+                    <a:p>
+                      <a:r>
+                        <a:rPr sz="1100" b="0">
+                          <a:solidFill>
+                            <a:srgbClr val="1A1A1A"/>
+                          </a:solidFill>
+                          <a:latin typeface="Meiryo"/>
+                          <a:ea typeface="Meiryo"/>
+                        </a:rPr>
+                        <a:t>15</a:t>
+                      </a:r>
+                    </a:p>
+                  </a:txBody>
+                  <a:tcPr anchor="ctr" marL="73152" marR="73152">
+                    <a:solidFill>
+                      <a:srgbClr val="FFFFFF"/>
+                    </a:solidFill>
+                  </a:tcPr>
+                </a:tc>
+                <a:tc>
+                  <a:txBody>
+                    <a:bodyPr/>
+                    <a:lstStyle/>
+                    <a:p>
+                      <a:r>
+                        <a:rPr sz="1100" b="1">
+                          <a:solidFill>
+                            <a:srgbClr val="C00000"/>
+                          </a:solidFill>
+                          <a:latin typeface="Meiryo"/>
+                          <a:ea typeface="Meiryo"/>
+                        </a:rPr>
+                        <a:t>20</a:t>
+                      </a:r>
+                    </a:p>
+                  </a:txBody>
+                  <a:tcPr anchor="ctr" marL="73152" marR="73152">
+                    <a:solidFill>
+                      <a:srgbClr val="FFFFFF"/>
+                    </a:solidFill>
+                  </a:tcPr>
+                </a:tc>
+                <a:tc>
+                  <a:txBody>
+                    <a:bodyPr/>
+                    <a:lstStyle/>
+                    <a:p>
+                      <a:r>
+                        <a:rPr sz="1100" b="0">
+                          <a:solidFill>
+                            <a:srgbClr val="1A1A1A"/>
+                          </a:solidFill>
+                          <a:latin typeface="Meiryo"/>
+                          <a:ea typeface="Meiryo"/>
+                        </a:rPr>
+                        <a:t>15</a:t>
+                      </a:r>
+                    </a:p>
+                  </a:txBody>
+                  <a:tcPr anchor="ctr" marL="73152" marR="73152">
+                    <a:solidFill>
+                      <a:srgbClr val="FFFFFF"/>
+                    </a:solidFill>
+                  </a:tcPr>
+                </a:tc>
+                <a:tc>
+                  <a:txBody>
+                    <a:bodyPr/>
+                    <a:lstStyle/>
+                    <a:p>
+                      <a:r>
+                        <a:rPr sz="1100" b="1">
+                          <a:solidFill>
+                            <a:srgbClr val="C00000"/>
+                          </a:solidFill>
+                          <a:latin typeface="Meiryo"/>
+                          <a:ea typeface="Meiryo"/>
+                        </a:rPr>
+                        <a:t>20</a:t>
+                      </a:r>
+                    </a:p>
+                  </a:txBody>
+                  <a:tcPr anchor="ctr" marL="73152" marR="73152">
+                    <a:solidFill>
+                      <a:srgbClr val="FFFFFF"/>
+                    </a:solidFill>
+                  </a:tcPr>
+                </a:tc>
+                <a:tc>
+                  <a:txBody>
+                    <a:bodyPr/>
+                    <a:lstStyle/>
+                    <a:p>
+                      <a:r>
+                        <a:rPr sz="1100" b="0">
+                          <a:solidFill>
+                            <a:srgbClr val="1A1A1A"/>
+                          </a:solidFill>
+                          <a:latin typeface="Meiryo"/>
+                          <a:ea typeface="Meiryo"/>
+                        </a:rPr>
+                        <a:t>15</a:t>
+                      </a:r>
+                    </a:p>
+                  </a:txBody>
+                  <a:tcPr anchor="ctr" marL="73152" marR="73152">
+                    <a:solidFill>
+                      <a:srgbClr val="FFFFFF"/>
+                    </a:solidFill>
+                  </a:tcPr>
+                </a:tc>
+                <a:tc>
+                  <a:txBody>
+                    <a:bodyPr/>
+                    <a:lstStyle/>
+                    <a:p>
+                      <a:r>
+                        <a:rPr sz="1100" b="0">
+                          <a:solidFill>
+                            <a:srgbClr val="1A1A1A"/>
+                          </a:solidFill>
+                          <a:latin typeface="Meiryo"/>
+                          <a:ea typeface="Meiryo"/>
+                        </a:rPr>
+                        <a:t>15</a:t>
+                      </a:r>
+                    </a:p>
+                  </a:txBody>
+                  <a:tcPr anchor="ctr" marL="73152" marR="73152">
+                    <a:solidFill>
+                      <a:srgbClr val="FFFFFF"/>
+                    </a:solidFill>
+                  </a:tcPr>
+                </a:tc>
+                <a:tc>
+                  <a:txBody>
+                    <a:bodyPr/>
+                    <a:lstStyle/>
+                    <a:p>
+                      <a:r>
+                        <a:rPr sz="1100" b="0">
+                          <a:solidFill>
+                            <a:srgbClr val="1A1A1A"/>
+                          </a:solidFill>
+                          <a:latin typeface="Meiryo"/>
+                          <a:ea typeface="Meiryo"/>
+                        </a:rPr>
+                        <a:t>15</a:t>
+                      </a:r>
+                    </a:p>
+                  </a:txBody>
+                  <a:tcPr anchor="ctr" marL="73152" marR="73152">
+                    <a:solidFill>
+                      <a:srgbClr val="FFFFFF"/>
+                    </a:solidFill>
+                  </a:tcPr>
+                </a:tc>
+                <a:tc>
+                  <a:txBody>
+                    <a:bodyPr/>
+                    <a:lstStyle/>
+                    <a:p>
+                      <a:r>
+                        <a:rPr sz="1100" b="0">
+                          <a:solidFill>
+                            <a:srgbClr val="1A1A1A"/>
+                          </a:solidFill>
+                          <a:latin typeface="Meiryo"/>
+                          <a:ea typeface="Meiryo"/>
+                        </a:rPr>
+                        <a:t>15</a:t>
+                      </a:r>
+                    </a:p>
+                  </a:txBody>
+                  <a:tcPr anchor="ctr" marL="73152" marR="73152">
+                    <a:solidFill>
+                      <a:srgbClr val="FFFFFF"/>
+                    </a:solidFill>
+                  </a:tcPr>
+                </a:tc>
+                <a:tc>
+                  <a:txBody>
+                    <a:bodyPr/>
+                    <a:lstStyle/>
+                    <a:p>
+                      <a:r>
+                        <a:rPr sz="1100" b="1">
+                          <a:solidFill>
+                            <a:srgbClr val="C00000"/>
+                          </a:solidFill>
+                          <a:latin typeface="Meiryo"/>
+                          <a:ea typeface="Meiryo"/>
+                        </a:rPr>
+                        <a:t>20</a:t>
+                      </a:r>
+                    </a:p>
+                  </a:txBody>
+                  <a:tcPr anchor="ctr" marL="73152" marR="73152">
+                    <a:solidFill>
+                      <a:srgbClr val="FFFFFF"/>
+                    </a:solidFill>
+                  </a:tcPr>
+                </a:tc>
+                <a:tc>
+                  <a:txBody>
+                    <a:bodyPr/>
+                    <a:lstStyle/>
+                    <a:p>
+                      <a:r>
+                        <a:rPr sz="1100" b="1">
+                          <a:solidFill>
+                            <a:srgbClr val="C00000"/>
+                          </a:solidFill>
+                          <a:latin typeface="Meiryo"/>
+                          <a:ea typeface="Meiryo"/>
+                        </a:rPr>
+                        <a:t>20</a:t>
+                      </a:r>
+                    </a:p>
+                  </a:txBody>
+                  <a:tcPr anchor="ctr" marL="73152" marR="73152">
+                    <a:solidFill>
+                      <a:srgbClr val="FFFFFF"/>
+                    </a:solidFill>
+                  </a:tcPr>
+                </a:tc>
+              </a:tr>
+            </a:tbl>
+          </a:graphicData>
+        </a:graphic>
+      </p:graphicFrame>
       <p:sp>
         <p:nvSpPr>
           <p:cNvPr id="9" name="TextBox 8"/>
@@ -3709,8 +4905,8 @@
         </p:nvSpPr>
         <p:spPr>
           <a:xfrm>
-            <a:off x="868680" y="1591056"/>
-            <a:ext cx="4846320" cy="2029968"/>
+            <a:off x="640080" y="3429000"/>
+            <a:ext cx="10881360" cy="365760"/>
           </a:xfrm>
           <a:prstGeom prst="rect">
             <a:avLst/>
@@ -3725,20 +4921,353 @@
           <a:p>
             <a:pPr algn="l">
               <a:spcAft>
-                <a:spcPts val="400"/>
+                <a:spcPts val="500"/>
               </a:spcAft>
             </a:pPr>
             <a:r>
-              <a:rPr sz="1300" b="1">
+              <a:rPr sz="1050" b="0">
                 <a:solidFill>
-                  <a:srgbClr val="C00000"/>
+                  <a:srgbClr val="5A626B"/>
                 </a:solidFill>
                 <a:latin typeface="Meiryo"/>
                 <a:ea typeface="Meiryo"/>
               </a:rPr>
-              <a:t>① キャンペーン名称・KVの策定(11月中)と素材の使い分け</a:t>
-            </a:r>
-          </a:p>
+              <a:t>※ 上表は2027年(104日)。2028年は106日(うるう年)、2029年1〜3月は25日で、ライン数の考え方は同じ(1月が最大20ライン、2〜3月は基準15)</a:t>
+            </a:r>
+          </a:p>
+        </p:txBody>
+      </p:sp>
+      <p:graphicFrame>
+        <p:nvGraphicFramePr>
+          <p:cNvPr id="10" name="Table 9"/>
+          <p:cNvGraphicFramePr>
+            <a:graphicFrameLocks noGrp="1"/>
+          </p:cNvGraphicFramePr>
+          <p:nvPr/>
+        </p:nvGraphicFramePr>
+        <p:xfrm>
+          <a:off x="640080" y="3931920"/>
+          <a:ext cx="10881360" cy="1508760"/>
+        </p:xfrm>
+        <a:graphic>
+          <a:graphicData uri="http://schemas.openxmlformats.org/drawingml/2006/table">
+            <a:tbl>
+              <a:tblPr firstRow="1" bandRow="1">
+                <a:tableStyleId>{5C22544A-7EE6-4342-B048-85BDC9FD1C3A}</a:tableStyleId>
+              </a:tblPr>
+              <a:tblGrid>
+                <a:gridCol w="3627120"/>
+                <a:gridCol w="1813560"/>
+                <a:gridCol w="2720340"/>
+                <a:gridCol w="2720340"/>
+              </a:tblGrid>
+              <a:tr h="502920">
+                <a:tc>
+                  <a:txBody>
+                    <a:bodyPr/>
+                    <a:lstStyle/>
+                    <a:p>
+                      <a:r>
+                        <a:rPr sz="1150" b="1">
+                          <a:solidFill>
+                            <a:srgbClr val="FFFFFF"/>
+                          </a:solidFill>
+                          <a:latin typeface="Meiryo"/>
+                          <a:ea typeface="Meiryo"/>
+                        </a:rPr>
+                        <a:t>27ヶ月合計</a:t>
+                      </a:r>
+                    </a:p>
+                  </a:txBody>
+                  <a:tcPr anchor="ctr" marL="73152" marR="73152">
+                    <a:solidFill>
+                      <a:srgbClr val="232278"/>
+                    </a:solidFill>
+                  </a:tcPr>
+                </a:tc>
+                <a:tc>
+                  <a:txBody>
+                    <a:bodyPr/>
+                    <a:lstStyle/>
+                    <a:p>
+                      <a:r>
+                        <a:rPr sz="1150" b="1">
+                          <a:solidFill>
+                            <a:srgbClr val="FFFFFF"/>
+                          </a:solidFill>
+                          <a:latin typeface="Meiryo"/>
+                          <a:ea typeface="Meiryo"/>
+                        </a:rPr>
+                        <a:t>開催日数</a:t>
+                      </a:r>
+                    </a:p>
+                  </a:txBody>
+                  <a:tcPr anchor="ctr" marL="73152" marR="73152">
+                    <a:solidFill>
+                      <a:srgbClr val="232278"/>
+                    </a:solidFill>
+                  </a:tcPr>
+                </a:tc>
+                <a:tc>
+                  <a:txBody>
+                    <a:bodyPr/>
+                    <a:lstStyle/>
+                    <a:p>
+                      <a:r>
+                        <a:rPr sz="1150" b="1">
+                          <a:solidFill>
+                            <a:srgbClr val="FFFFFF"/>
+                          </a:solidFill>
+                          <a:latin typeface="Meiryo"/>
+                          <a:ea typeface="Meiryo"/>
+                        </a:rPr>
+                        <a:t>開催数(ライン×日)</a:t>
+                      </a:r>
+                    </a:p>
+                  </a:txBody>
+                  <a:tcPr anchor="ctr" marL="73152" marR="73152">
+                    <a:solidFill>
+                      <a:srgbClr val="232278"/>
+                    </a:solidFill>
+                  </a:tcPr>
+                </a:tc>
+                <a:tc>
+                  <a:txBody>
+                    <a:bodyPr/>
+                    <a:lstStyle/>
+                    <a:p>
+                      <a:r>
+                        <a:rPr sz="1150" b="1">
+                          <a:solidFill>
+                            <a:srgbClr val="FFFFFF"/>
+                          </a:solidFill>
+                          <a:latin typeface="Meiryo"/>
+                          <a:ea typeface="Meiryo"/>
+                        </a:rPr>
+                        <a:t>稼働費(税別)</a:t>
+                      </a:r>
+                    </a:p>
+                  </a:txBody>
+                  <a:tcPr anchor="ctr" marL="73152" marR="73152">
+                    <a:solidFill>
+                      <a:srgbClr val="232278"/>
+                    </a:solidFill>
+                  </a:tcPr>
+                </a:tc>
+              </a:tr>
+              <a:tr h="502920">
+                <a:tc>
+                  <a:txBody>
+                    <a:bodyPr/>
+                    <a:lstStyle/>
+                    <a:p>
+                      <a:r>
+                        <a:rPr sz="1150" b="1">
+                          <a:solidFill>
+                            <a:srgbClr val="1A1A1A"/>
+                          </a:solidFill>
+                          <a:latin typeface="Meiryo"/>
+                          <a:ea typeface="Meiryo"/>
+                        </a:rPr>
+                        <a:t>基準(15ライン固定)</a:t>
+                      </a:r>
+                    </a:p>
+                  </a:txBody>
+                  <a:tcPr anchor="ctr" marL="73152" marR="73152">
+                    <a:solidFill>
+                      <a:srgbClr val="FFFFFF"/>
+                    </a:solidFill>
+                  </a:tcPr>
+                </a:tc>
+                <a:tc>
+                  <a:txBody>
+                    <a:bodyPr/>
+                    <a:lstStyle/>
+                    <a:p>
+                      <a:r>
+                        <a:rPr sz="1150" b="0">
+                          <a:solidFill>
+                            <a:srgbClr val="1A1A1A"/>
+                          </a:solidFill>
+                          <a:latin typeface="Meiryo"/>
+                          <a:ea typeface="Meiryo"/>
+                        </a:rPr>
+                        <a:t>235日</a:t>
+                      </a:r>
+                    </a:p>
+                  </a:txBody>
+                  <a:tcPr anchor="ctr" marL="73152" marR="73152">
+                    <a:solidFill>
+                      <a:srgbClr val="FFFFFF"/>
+                    </a:solidFill>
+                  </a:tcPr>
+                </a:tc>
+                <a:tc>
+                  <a:txBody>
+                    <a:bodyPr/>
+                    <a:lstStyle/>
+                    <a:p>
+                      <a:r>
+                        <a:rPr sz="1150" b="0">
+                          <a:solidFill>
+                            <a:srgbClr val="1A1A1A"/>
+                          </a:solidFill>
+                          <a:latin typeface="Meiryo"/>
+                          <a:ea typeface="Meiryo"/>
+                        </a:rPr>
+                        <a:t>3,525現場</a:t>
+                      </a:r>
+                    </a:p>
+                  </a:txBody>
+                  <a:tcPr anchor="ctr" marL="73152" marR="73152">
+                    <a:solidFill>
+                      <a:srgbClr val="FFFFFF"/>
+                    </a:solidFill>
+                  </a:tcPr>
+                </a:tc>
+                <a:tc>
+                  <a:txBody>
+                    <a:bodyPr/>
+                    <a:lstStyle/>
+                    <a:p>
+                      <a:r>
+                        <a:rPr sz="1150" b="1">
+                          <a:solidFill>
+                            <a:srgbClr val="1A1A1A"/>
+                          </a:solidFill>
+                          <a:latin typeface="Meiryo"/>
+                          <a:ea typeface="Meiryo"/>
+                        </a:rPr>
+                        <a:t>3億5,250万円</a:t>
+                      </a:r>
+                    </a:p>
+                  </a:txBody>
+                  <a:tcPr anchor="ctr" marL="73152" marR="73152">
+                    <a:solidFill>
+                      <a:srgbClr val="FFFFFF"/>
+                    </a:solidFill>
+                  </a:tcPr>
+                </a:tc>
+              </a:tr>
+              <a:tr h="502920">
+                <a:tc>
+                  <a:txBody>
+                    <a:bodyPr/>
+                    <a:lstStyle/>
+                    <a:p>
+                      <a:r>
+                        <a:rPr sz="1150" b="1">
+                          <a:solidFill>
+                            <a:srgbClr val="1A1A1A"/>
+                          </a:solidFill>
+                          <a:latin typeface="Meiryo"/>
+                          <a:ea typeface="Meiryo"/>
+                        </a:rPr>
+                        <a:t>最大(余裕月20ライン)</a:t>
+                      </a:r>
+                    </a:p>
+                  </a:txBody>
+                  <a:tcPr anchor="ctr" marL="73152" marR="73152">
+                    <a:solidFill>
+                      <a:srgbClr val="F2F4F6"/>
+                    </a:solidFill>
+                  </a:tcPr>
+                </a:tc>
+                <a:tc>
+                  <a:txBody>
+                    <a:bodyPr/>
+                    <a:lstStyle/>
+                    <a:p>
+                      <a:r>
+                        <a:rPr sz="1150" b="0">
+                          <a:solidFill>
+                            <a:srgbClr val="1A1A1A"/>
+                          </a:solidFill>
+                          <a:latin typeface="Meiryo"/>
+                          <a:ea typeface="Meiryo"/>
+                        </a:rPr>
+                        <a:t>235日</a:t>
+                      </a:r>
+                    </a:p>
+                  </a:txBody>
+                  <a:tcPr anchor="ctr" marL="73152" marR="73152">
+                    <a:solidFill>
+                      <a:srgbClr val="F2F4F6"/>
+                    </a:solidFill>
+                  </a:tcPr>
+                </a:tc>
+                <a:tc>
+                  <a:txBody>
+                    <a:bodyPr/>
+                    <a:lstStyle/>
+                    <a:p>
+                      <a:r>
+                        <a:rPr sz="1150" b="0">
+                          <a:solidFill>
+                            <a:srgbClr val="1A1A1A"/>
+                          </a:solidFill>
+                          <a:latin typeface="Meiryo"/>
+                          <a:ea typeface="Meiryo"/>
+                        </a:rPr>
+                        <a:t>4,005現場</a:t>
+                      </a:r>
+                    </a:p>
+                  </a:txBody>
+                  <a:tcPr anchor="ctr" marL="73152" marR="73152">
+                    <a:solidFill>
+                      <a:srgbClr val="F2F4F6"/>
+                    </a:solidFill>
+                  </a:tcPr>
+                </a:tc>
+                <a:tc>
+                  <a:txBody>
+                    <a:bodyPr/>
+                    <a:lstStyle/>
+                    <a:p>
+                      <a:r>
+                        <a:rPr sz="1150" b="1">
+                          <a:solidFill>
+                            <a:srgbClr val="C00000"/>
+                          </a:solidFill>
+                          <a:latin typeface="Meiryo"/>
+                          <a:ea typeface="Meiryo"/>
+                        </a:rPr>
+                        <a:t>4億50万円</a:t>
+                      </a:r>
+                    </a:p>
+                  </a:txBody>
+                  <a:tcPr anchor="ctr" marL="73152" marR="73152">
+                    <a:solidFill>
+                      <a:srgbClr val="F2F4F6"/>
+                    </a:solidFill>
+                  </a:tcPr>
+                </a:tc>
+              </a:tr>
+            </a:tbl>
+          </a:graphicData>
+        </a:graphic>
+      </p:graphicFrame>
+      <p:sp>
+        <p:nvSpPr>
+          <p:cNvPr id="11" name="TextBox 10"/>
+          <p:cNvSpPr txBox="1"/>
+          <p:nvPr/>
+        </p:nvSpPr>
+        <p:spPr>
+          <a:xfrm>
+            <a:off x="640080" y="5577840"/>
+            <a:ext cx="10881360" cy="731520"/>
+          </a:xfrm>
+          <a:prstGeom prst="rect">
+            <a:avLst/>
+          </a:prstGeom>
+          <a:noFill/>
+        </p:spPr>
+        <p:txBody>
+          <a:bodyPr wrap="square" anchor="t" lIns="0" rIns="0" tIns="0" bIns="0">
+            <a:spAutoFit/>
+          </a:bodyPr>
+          <a:lstStyle/>
           <a:p>
             <a:pPr algn="l">
               <a:spcAft>
@@ -3753,7 +5282,7 @@
                 <a:latin typeface="Meiryo"/>
                 <a:ea typeface="Meiryo"/>
               </a:rPr>
-              <a:t>・KVは貴社にて制作(当社での制作受託も可能)。名称・KVを11月中に確定</a:t>
+              <a:t>・2月・3月・8月・9月は当社主催行事との調整月のため基準15ラインでの運用となります　・増枠分は前月1日の開催確定時に確定します</a:t>
             </a:r>
           </a:p>
           <a:p>
@@ -3770,486 +5299,7 @@
                 <a:latin typeface="Meiryo"/>
                 <a:ea typeface="Meiryo"/>
               </a:rPr>
-              <a:t>・撮影会の背景バナー:キャラクターなしの背景素材(青空/宇宙)を当社提供</a:t>
-            </a:r>
-          </a:p>
-          <a:p>
-            <a:pPr algn="l">
-              <a:spcAft>
-                <a:spcPts val="400"/>
-              </a:spcAft>
-            </a:pPr>
-            <a:r>
-              <a:rPr sz="1100" b="0">
-                <a:solidFill>
-                  <a:srgbClr val="1A1A1A"/>
-                </a:solidFill>
-                <a:latin typeface="Meiryo"/>
-                <a:ea typeface="Meiryo"/>
-              </a:rPr>
-              <a:t>・会場装飾・告知物:集合ビジュアル(修正版を提供予定)・個体素材・ブランドロゴ</a:t>
-            </a:r>
-          </a:p>
-          <a:p>
-            <a:pPr algn="l">
-              <a:spcAft>
-                <a:spcPts val="400"/>
-              </a:spcAft>
-            </a:pPr>
-            <a:r>
-              <a:rPr sz="1100" b="0">
-                <a:solidFill>
-                  <a:srgbClr val="1A1A1A"/>
-                </a:solidFill>
-                <a:latin typeface="Meiryo"/>
-                <a:ea typeface="Meiryo"/>
-              </a:rPr>
-              <a:t>・監修は当社「制作物」窓口へ。春節前量産(1月末)から逆算し11月中の確定が必要</a:t>
-            </a:r>
-          </a:p>
-        </p:txBody>
-      </p:sp>
-      <p:sp>
-        <p:nvSpPr>
-          <p:cNvPr id="10" name="Rounded Rectangle 9"/>
-          <p:cNvSpPr/>
-          <p:nvPr/>
-        </p:nvSpPr>
-        <p:spPr>
-          <a:xfrm>
-            <a:off x="6217920" y="1463040"/>
-            <a:ext cx="5303520" cy="2286000"/>
-          </a:xfrm>
-          <a:prstGeom prst="roundRect">
-            <a:avLst>
-              <a:gd name="adj" fmla="val 6000"/>
-            </a:avLst>
-          </a:prstGeom>
-          <a:solidFill>
-            <a:srgbClr val="F2F4F6"/>
-          </a:solidFill>
-          <a:ln>
-            <a:noFill/>
-          </a:ln>
-          <a:effectLst/>
-        </p:spPr>
-        <p:style>
-          <a:lnRef idx="1">
-            <a:schemeClr val="accent1"/>
-          </a:lnRef>
-          <a:fillRef idx="3">
-            <a:schemeClr val="accent1"/>
-          </a:fillRef>
-          <a:effectRef idx="2">
-            <a:schemeClr val="accent1"/>
-          </a:effectRef>
-          <a:fontRef idx="minor">
-            <a:schemeClr val="lt1"/>
-          </a:fontRef>
-        </p:style>
-        <p:txBody>
-          <a:bodyPr rtlCol="0" anchor="ctr"/>
-          <a:lstStyle/>
-          <a:p>
-            <a:pPr algn="ctr"/>
-          </a:p>
-        </p:txBody>
-      </p:sp>
-      <p:sp>
-        <p:nvSpPr>
-          <p:cNvPr id="11" name="TextBox 10"/>
-          <p:cNvSpPr txBox="1"/>
-          <p:nvPr/>
-        </p:nvSpPr>
-        <p:spPr>
-          <a:xfrm>
-            <a:off x="6446520" y="1591056"/>
-            <a:ext cx="4846320" cy="2029968"/>
-          </a:xfrm>
-          <a:prstGeom prst="rect">
-            <a:avLst/>
-          </a:prstGeom>
-          <a:noFill/>
-        </p:spPr>
-        <p:txBody>
-          <a:bodyPr wrap="square" anchor="t" lIns="0" rIns="0" tIns="0" bIns="0">
-            <a:spAutoFit/>
-          </a:bodyPr>
-          <a:lstStyle/>
-          <a:p>
-            <a:pPr algn="l">
-              <a:spcAft>
-                <a:spcPts val="400"/>
-              </a:spcAft>
-            </a:pPr>
-            <a:r>
-              <a:rPr sz="1300" b="1">
-                <a:solidFill>
-                  <a:srgbClr val="C00000"/>
-                </a:solidFill>
-                <a:latin typeface="Meiryo"/>
-                <a:ea typeface="Meiryo"/>
-              </a:rPr>
-              <a:t>② 仮申請フロー(別紙「仮申請のご案内」参照)</a:t>
-            </a:r>
-          </a:p>
-          <a:p>
-            <a:pPr algn="l">
-              <a:spcAft>
-                <a:spcPts val="400"/>
-              </a:spcAft>
-            </a:pPr>
-            <a:r>
-              <a:rPr sz="1100" b="0">
-                <a:solidFill>
-                  <a:srgbClr val="1A1A1A"/>
-                </a:solidFill>
-                <a:latin typeface="Meiryo"/>
-                <a:ea typeface="Meiryo"/>
-              </a:rPr>
-              <a:t>・貴社ご担当者1名を事前登録→品目ごとに仮申請→約1週間で可否回答</a:t>
-            </a:r>
-          </a:p>
-          <a:p>
-            <a:pPr algn="l">
-              <a:spcAft>
-                <a:spcPts val="400"/>
-              </a:spcAft>
-            </a:pPr>
-            <a:r>
-              <a:rPr sz="1100" b="0">
-                <a:solidFill>
-                  <a:srgbClr val="1A1A1A"/>
-                </a:solidFill>
-                <a:latin typeface="Meiryo"/>
-                <a:ea typeface="Meiryo"/>
-              </a:rPr>
-              <a:t>・入力項目:企画商品名(「ノベルティ ○○」表記)・キャラクター・商品カテゴリー</a:t>
-            </a:r>
-          </a:p>
-          <a:p>
-            <a:pPr algn="l">
-              <a:spcAft>
-                <a:spcPts val="400"/>
-              </a:spcAft>
-            </a:pPr>
-            <a:r>
-              <a:rPr sz="1100" b="0">
-                <a:solidFill>
-                  <a:srgbClr val="1A1A1A"/>
-                </a:solidFill>
-                <a:latin typeface="Meiryo"/>
-                <a:ea typeface="Meiryo"/>
-              </a:rPr>
-              <a:t>　(配布物=1〜16/会場装飾=店舗備品)・製造原価単価・予定数量・材質・サイズ等</a:t>
-            </a:r>
-          </a:p>
-          <a:p>
-            <a:pPr algn="l">
-              <a:spcAft>
-                <a:spcPts val="400"/>
-              </a:spcAft>
-            </a:pPr>
-            <a:r>
-              <a:rPr sz="1100" b="0">
-                <a:solidFill>
-                  <a:srgbClr val="1A1A1A"/>
-                </a:solidFill>
-                <a:latin typeface="Meiryo"/>
-                <a:ea typeface="Meiryo"/>
-              </a:rPr>
-              <a:t>・作成許諾ロイヤリティ:作成費用の20%(製造原価単価×数量が算定基礎)</a:t>
-            </a:r>
-          </a:p>
-        </p:txBody>
-      </p:sp>
-      <p:sp>
-        <p:nvSpPr>
-          <p:cNvPr id="12" name="Rounded Rectangle 11"/>
-          <p:cNvSpPr/>
-          <p:nvPr/>
-        </p:nvSpPr>
-        <p:spPr>
-          <a:xfrm>
-            <a:off x="640080" y="3931920"/>
-            <a:ext cx="5303520" cy="2103120"/>
-          </a:xfrm>
-          <a:prstGeom prst="roundRect">
-            <a:avLst>
-              <a:gd name="adj" fmla="val 6000"/>
-            </a:avLst>
-          </a:prstGeom>
-          <a:solidFill>
-            <a:srgbClr val="F2F4F6"/>
-          </a:solidFill>
-          <a:ln>
-            <a:noFill/>
-          </a:ln>
-          <a:effectLst/>
-        </p:spPr>
-        <p:style>
-          <a:lnRef idx="1">
-            <a:schemeClr val="accent1"/>
-          </a:lnRef>
-          <a:fillRef idx="3">
-            <a:schemeClr val="accent1"/>
-          </a:fillRef>
-          <a:effectRef idx="2">
-            <a:schemeClr val="accent1"/>
-          </a:effectRef>
-          <a:fontRef idx="minor">
-            <a:schemeClr val="lt1"/>
-          </a:fontRef>
-        </p:style>
-        <p:txBody>
-          <a:bodyPr rtlCol="0" anchor="ctr"/>
-          <a:lstStyle/>
-          <a:p>
-            <a:pPr algn="ctr"/>
-          </a:p>
-        </p:txBody>
-      </p:sp>
-      <p:sp>
-        <p:nvSpPr>
-          <p:cNvPr id="13" name="TextBox 12"/>
-          <p:cNvSpPr txBox="1"/>
-          <p:nvPr/>
-        </p:nvSpPr>
-        <p:spPr>
-          <a:xfrm>
-            <a:off x="868680" y="4059936"/>
-            <a:ext cx="4846320" cy="1847088"/>
-          </a:xfrm>
-          <a:prstGeom prst="rect">
-            <a:avLst/>
-          </a:prstGeom>
-          <a:noFill/>
-        </p:spPr>
-        <p:txBody>
-          <a:bodyPr wrap="square" anchor="t" lIns="0" rIns="0" tIns="0" bIns="0">
-            <a:spAutoFit/>
-          </a:bodyPr>
-          <a:lstStyle/>
-          <a:p>
-            <a:pPr algn="l">
-              <a:spcAft>
-                <a:spcPts val="400"/>
-              </a:spcAft>
-            </a:pPr>
-            <a:r>
-              <a:rPr sz="1300" b="1">
-                <a:solidFill>
-                  <a:srgbClr val="C00000"/>
-                </a:solidFill>
-                <a:latin typeface="Meiryo"/>
-                <a:ea typeface="Meiryo"/>
-              </a:rPr>
-              <a:t>③ ノベルティのカテゴリー</a:t>
-            </a:r>
-          </a:p>
-          <a:p>
-            <a:pPr algn="l">
-              <a:spcAft>
-                <a:spcPts val="400"/>
-              </a:spcAft>
-            </a:pPr>
-            <a:r>
-              <a:rPr sz="1100" b="0">
-                <a:solidFill>
-                  <a:srgbClr val="1A1A1A"/>
-                </a:solidFill>
-                <a:latin typeface="Meiryo"/>
-                <a:ea typeface="Meiryo"/>
-              </a:rPr>
-              <a:t>・制作可能:トートバッグ・タオル・BOXティッシュ等(キャンペーンデザイン使用)</a:t>
-            </a:r>
-          </a:p>
-          <a:p>
-            <a:pPr algn="l">
-              <a:spcAft>
-                <a:spcPts val="400"/>
-              </a:spcAft>
-            </a:pPr>
-            <a:r>
-              <a:rPr sz="1100" b="0">
-                <a:solidFill>
-                  <a:srgbClr val="1A1A1A"/>
-                </a:solidFill>
-                <a:latin typeface="Meiryo"/>
-                <a:ea typeface="Meiryo"/>
-              </a:rPr>
-              <a:t>・制作不可:お子様向け玩具(フィギュア・ソフビ等)・菓子類・ランチボックス等</a:t>
-            </a:r>
-          </a:p>
-          <a:p>
-            <a:pPr algn="l">
-              <a:spcAft>
-                <a:spcPts val="400"/>
-              </a:spcAft>
-            </a:pPr>
-            <a:r>
-              <a:rPr sz="1100" b="0">
-                <a:solidFill>
-                  <a:srgbClr val="1A1A1A"/>
-                </a:solidFill>
-                <a:latin typeface="Meiryo"/>
-                <a:ea typeface="Meiryo"/>
-              </a:rPr>
-              <a:t>・タオルは一般仕様(ループタオル・ミニタオルは避ける)</a:t>
-            </a:r>
-          </a:p>
-        </p:txBody>
-      </p:sp>
-      <p:sp>
-        <p:nvSpPr>
-          <p:cNvPr id="14" name="Rounded Rectangle 13"/>
-          <p:cNvSpPr/>
-          <p:nvPr/>
-        </p:nvSpPr>
-        <p:spPr>
-          <a:xfrm>
-            <a:off x="6217920" y="3931920"/>
-            <a:ext cx="5303520" cy="2103120"/>
-          </a:xfrm>
-          <a:prstGeom prst="roundRect">
-            <a:avLst>
-              <a:gd name="adj" fmla="val 6000"/>
-            </a:avLst>
-          </a:prstGeom>
-          <a:solidFill>
-            <a:srgbClr val="F2F4F6"/>
-          </a:solidFill>
-          <a:ln>
-            <a:noFill/>
-          </a:ln>
-          <a:effectLst/>
-        </p:spPr>
-        <p:style>
-          <a:lnRef idx="1">
-            <a:schemeClr val="accent1"/>
-          </a:lnRef>
-          <a:fillRef idx="3">
-            <a:schemeClr val="accent1"/>
-          </a:fillRef>
-          <a:effectRef idx="2">
-            <a:schemeClr val="accent1"/>
-          </a:effectRef>
-          <a:fontRef idx="minor">
-            <a:schemeClr val="lt1"/>
-          </a:fontRef>
-        </p:style>
-        <p:txBody>
-          <a:bodyPr rtlCol="0" anchor="ctr"/>
-          <a:lstStyle/>
-          <a:p>
-            <a:pPr algn="ctr"/>
-          </a:p>
-        </p:txBody>
-      </p:sp>
-      <p:sp>
-        <p:nvSpPr>
-          <p:cNvPr id="15" name="TextBox 14"/>
-          <p:cNvSpPr txBox="1"/>
-          <p:nvPr/>
-        </p:nvSpPr>
-        <p:spPr>
-          <a:xfrm>
-            <a:off x="6446520" y="4059936"/>
-            <a:ext cx="4846320" cy="1847088"/>
-          </a:xfrm>
-          <a:prstGeom prst="rect">
-            <a:avLst/>
-          </a:prstGeom>
-          <a:noFill/>
-        </p:spPr>
-        <p:txBody>
-          <a:bodyPr wrap="square" anchor="t" lIns="0" rIns="0" tIns="0" bIns="0">
-            <a:spAutoFit/>
-          </a:bodyPr>
-          <a:lstStyle/>
-          <a:p>
-            <a:pPr algn="l">
-              <a:spcAft>
-                <a:spcPts val="400"/>
-              </a:spcAft>
-            </a:pPr>
-            <a:r>
-              <a:rPr sz="1300" b="1">
-                <a:solidFill>
-                  <a:srgbClr val="C00000"/>
-                </a:solidFill>
-                <a:latin typeface="Meiryo"/>
-                <a:ea typeface="Meiryo"/>
-              </a:rPr>
-              <a:t>④ 修了証・配布物</a:t>
-            </a:r>
-          </a:p>
-          <a:p>
-            <a:pPr algn="l">
-              <a:spcAft>
-                <a:spcPts val="400"/>
-              </a:spcAft>
-            </a:pPr>
-            <a:r>
-              <a:rPr sz="1100" b="0">
-                <a:solidFill>
-                  <a:srgbClr val="1A1A1A"/>
-                </a:solidFill>
-                <a:latin typeface="Meiryo"/>
-                <a:ea typeface="Meiryo"/>
-              </a:rPr>
-              <a:t>・既存の修了証は当社既存イベント専用のため本件では使用しません</a:t>
-            </a:r>
-          </a:p>
-          <a:p>
-            <a:pPr algn="l">
-              <a:spcAft>
-                <a:spcPts val="400"/>
-              </a:spcAft>
-            </a:pPr>
-            <a:r>
-              <a:rPr sz="1100" b="0">
-                <a:solidFill>
-                  <a:srgbClr val="1A1A1A"/>
-                </a:solidFill>
-                <a:latin typeface="Meiryo"/>
-                <a:ea typeface="Meiryo"/>
-              </a:rPr>
-              <a:t>・案A:貴社のミッション(クイズ等)と連動したオリジナル修了証を貴社制作</a:t>
-            </a:r>
-          </a:p>
-          <a:p>
-            <a:pPr algn="l">
-              <a:spcAft>
-                <a:spcPts val="400"/>
-              </a:spcAft>
-            </a:pPr>
-            <a:r>
-              <a:rPr sz="1100" b="0">
-                <a:solidFill>
-                  <a:srgbClr val="1A1A1A"/>
-                </a:solidFill>
-                <a:latin typeface="Meiryo"/>
-                <a:ea typeface="Meiryo"/>
-              </a:rPr>
-              <a:t>・案B:キャンペーンビジュアルのステッカーを貴社制作・全員配布</a:t>
-            </a:r>
-          </a:p>
-          <a:p>
-            <a:pPr algn="l">
-              <a:spcAft>
-                <a:spcPts val="400"/>
-              </a:spcAft>
-            </a:pPr>
-            <a:r>
-              <a:rPr sz="1100" b="0">
-                <a:solidFill>
-                  <a:srgbClr val="1A1A1A"/>
-                </a:solidFill>
-                <a:latin typeface="Meiryo"/>
-                <a:ea typeface="Meiryo"/>
-              </a:rPr>
-              <a:t>・配布の目的(体験型か告知型か)に応じて選択</a:t>
+              <a:t>・上記は稼働費のみ。年間IP使用料・現場諸経費・実費は別途</a:t>
             </a:r>
           </a:p>
         </p:txBody>
@@ -4331,7 +5381,7 @@
                 <a:latin typeface="Meiryo"/>
                 <a:ea typeface="Meiryo"/>
               </a:rPr>
-              <a:t>4. スケジュールと次のステップ</a:t>
+              <a:t>4. 制作物・権利まわりの進め方</a:t>
             </a:r>
           </a:p>
         </p:txBody>
@@ -4371,7 +5421,7 @@
                 <a:latin typeface="Meiryo"/>
                 <a:ea typeface="Meiryo"/>
               </a:rPr>
-              <a:t>2027年1月開始に向けた逆算スケジュールです</a:t>
+              <a:t>キャンペーンビジュアルの確定を起点に、仮申請フローで各制作物を確定していきます</a:t>
             </a:r>
           </a:p>
         </p:txBody>
@@ -4492,6 +5542,847 @@
                 <a:ea typeface="Meiryo"/>
               </a:rPr>
               <a:t>11</a:t>
+            </a:r>
+          </a:p>
+        </p:txBody>
+      </p:sp>
+      <p:sp>
+        <p:nvSpPr>
+          <p:cNvPr id="8" name="Rounded Rectangle 7"/>
+          <p:cNvSpPr/>
+          <p:nvPr/>
+        </p:nvSpPr>
+        <p:spPr>
+          <a:xfrm>
+            <a:off x="640080" y="1463040"/>
+            <a:ext cx="5303520" cy="2286000"/>
+          </a:xfrm>
+          <a:prstGeom prst="roundRect">
+            <a:avLst>
+              <a:gd name="adj" fmla="val 6000"/>
+            </a:avLst>
+          </a:prstGeom>
+          <a:solidFill>
+            <a:srgbClr val="F2F4F6"/>
+          </a:solidFill>
+          <a:ln>
+            <a:noFill/>
+          </a:ln>
+          <a:effectLst/>
+        </p:spPr>
+        <p:style>
+          <a:lnRef idx="1">
+            <a:schemeClr val="accent1"/>
+          </a:lnRef>
+          <a:fillRef idx="3">
+            <a:schemeClr val="accent1"/>
+          </a:fillRef>
+          <a:effectRef idx="2">
+            <a:schemeClr val="accent1"/>
+          </a:effectRef>
+          <a:fontRef idx="minor">
+            <a:schemeClr val="lt1"/>
+          </a:fontRef>
+        </p:style>
+        <p:txBody>
+          <a:bodyPr rtlCol="0" anchor="ctr"/>
+          <a:lstStyle/>
+          <a:p>
+            <a:pPr algn="ctr"/>
+          </a:p>
+        </p:txBody>
+      </p:sp>
+      <p:sp>
+        <p:nvSpPr>
+          <p:cNvPr id="9" name="TextBox 8"/>
+          <p:cNvSpPr txBox="1"/>
+          <p:nvPr/>
+        </p:nvSpPr>
+        <p:spPr>
+          <a:xfrm>
+            <a:off x="868680" y="1591056"/>
+            <a:ext cx="4846320" cy="2029968"/>
+          </a:xfrm>
+          <a:prstGeom prst="rect">
+            <a:avLst/>
+          </a:prstGeom>
+          <a:noFill/>
+        </p:spPr>
+        <p:txBody>
+          <a:bodyPr wrap="square" anchor="t" lIns="0" rIns="0" tIns="0" bIns="0">
+            <a:spAutoFit/>
+          </a:bodyPr>
+          <a:lstStyle/>
+          <a:p>
+            <a:pPr algn="l">
+              <a:spcAft>
+                <a:spcPts val="400"/>
+              </a:spcAft>
+            </a:pPr>
+            <a:r>
+              <a:rPr sz="1300" b="1">
+                <a:solidFill>
+                  <a:srgbClr val="C00000"/>
+                </a:solidFill>
+                <a:latin typeface="Meiryo"/>
+                <a:ea typeface="Meiryo"/>
+              </a:rPr>
+              <a:t>① キャンペーン名称・KVの策定(11月中)と素材の使い分け</a:t>
+            </a:r>
+          </a:p>
+          <a:p>
+            <a:pPr algn="l">
+              <a:spcAft>
+                <a:spcPts val="400"/>
+              </a:spcAft>
+            </a:pPr>
+            <a:r>
+              <a:rPr sz="1100" b="0">
+                <a:solidFill>
+                  <a:srgbClr val="1A1A1A"/>
+                </a:solidFill>
+                <a:latin typeface="Meiryo"/>
+                <a:ea typeface="Meiryo"/>
+              </a:rPr>
+              <a:t>・KVは貴社にて制作(当社での制作受託も可能)。名称・KVを11月中に確定</a:t>
+            </a:r>
+          </a:p>
+          <a:p>
+            <a:pPr algn="l">
+              <a:spcAft>
+                <a:spcPts val="400"/>
+              </a:spcAft>
+            </a:pPr>
+            <a:r>
+              <a:rPr sz="1100" b="0">
+                <a:solidFill>
+                  <a:srgbClr val="1A1A1A"/>
+                </a:solidFill>
+                <a:latin typeface="Meiryo"/>
+                <a:ea typeface="Meiryo"/>
+              </a:rPr>
+              <a:t>・撮影会の背景バナー:キャラクターなしの背景素材(青空/宇宙)を当社提供</a:t>
+            </a:r>
+          </a:p>
+          <a:p>
+            <a:pPr algn="l">
+              <a:spcAft>
+                <a:spcPts val="400"/>
+              </a:spcAft>
+            </a:pPr>
+            <a:r>
+              <a:rPr sz="1100" b="0">
+                <a:solidFill>
+                  <a:srgbClr val="1A1A1A"/>
+                </a:solidFill>
+                <a:latin typeface="Meiryo"/>
+                <a:ea typeface="Meiryo"/>
+              </a:rPr>
+              <a:t>・会場装飾・告知物:集合ビジュアル(修正版を提供予定)・個体素材・ブランドロゴ</a:t>
+            </a:r>
+          </a:p>
+          <a:p>
+            <a:pPr algn="l">
+              <a:spcAft>
+                <a:spcPts val="400"/>
+              </a:spcAft>
+            </a:pPr>
+            <a:r>
+              <a:rPr sz="1100" b="0">
+                <a:solidFill>
+                  <a:srgbClr val="1A1A1A"/>
+                </a:solidFill>
+                <a:latin typeface="Meiryo"/>
+                <a:ea typeface="Meiryo"/>
+              </a:rPr>
+              <a:t>・監修は当社「制作物」窓口へ。春節前量産(1月末)から逆算し11月中の確定が必要</a:t>
+            </a:r>
+          </a:p>
+        </p:txBody>
+      </p:sp>
+      <p:sp>
+        <p:nvSpPr>
+          <p:cNvPr id="10" name="Rounded Rectangle 9"/>
+          <p:cNvSpPr/>
+          <p:nvPr/>
+        </p:nvSpPr>
+        <p:spPr>
+          <a:xfrm>
+            <a:off x="6217920" y="1463040"/>
+            <a:ext cx="5303520" cy="2286000"/>
+          </a:xfrm>
+          <a:prstGeom prst="roundRect">
+            <a:avLst>
+              <a:gd name="adj" fmla="val 6000"/>
+            </a:avLst>
+          </a:prstGeom>
+          <a:solidFill>
+            <a:srgbClr val="F2F4F6"/>
+          </a:solidFill>
+          <a:ln>
+            <a:noFill/>
+          </a:ln>
+          <a:effectLst/>
+        </p:spPr>
+        <p:style>
+          <a:lnRef idx="1">
+            <a:schemeClr val="accent1"/>
+          </a:lnRef>
+          <a:fillRef idx="3">
+            <a:schemeClr val="accent1"/>
+          </a:fillRef>
+          <a:effectRef idx="2">
+            <a:schemeClr val="accent1"/>
+          </a:effectRef>
+          <a:fontRef idx="minor">
+            <a:schemeClr val="lt1"/>
+          </a:fontRef>
+        </p:style>
+        <p:txBody>
+          <a:bodyPr rtlCol="0" anchor="ctr"/>
+          <a:lstStyle/>
+          <a:p>
+            <a:pPr algn="ctr"/>
+          </a:p>
+        </p:txBody>
+      </p:sp>
+      <p:sp>
+        <p:nvSpPr>
+          <p:cNvPr id="11" name="TextBox 10"/>
+          <p:cNvSpPr txBox="1"/>
+          <p:nvPr/>
+        </p:nvSpPr>
+        <p:spPr>
+          <a:xfrm>
+            <a:off x="6446520" y="1591056"/>
+            <a:ext cx="4846320" cy="2029968"/>
+          </a:xfrm>
+          <a:prstGeom prst="rect">
+            <a:avLst/>
+          </a:prstGeom>
+          <a:noFill/>
+        </p:spPr>
+        <p:txBody>
+          <a:bodyPr wrap="square" anchor="t" lIns="0" rIns="0" tIns="0" bIns="0">
+            <a:spAutoFit/>
+          </a:bodyPr>
+          <a:lstStyle/>
+          <a:p>
+            <a:pPr algn="l">
+              <a:spcAft>
+                <a:spcPts val="400"/>
+              </a:spcAft>
+            </a:pPr>
+            <a:r>
+              <a:rPr sz="1300" b="1">
+                <a:solidFill>
+                  <a:srgbClr val="C00000"/>
+                </a:solidFill>
+                <a:latin typeface="Meiryo"/>
+                <a:ea typeface="Meiryo"/>
+              </a:rPr>
+              <a:t>② 仮申請フロー(別紙「仮申請のご案内」参照)</a:t>
+            </a:r>
+          </a:p>
+          <a:p>
+            <a:pPr algn="l">
+              <a:spcAft>
+                <a:spcPts val="400"/>
+              </a:spcAft>
+            </a:pPr>
+            <a:r>
+              <a:rPr sz="1100" b="0">
+                <a:solidFill>
+                  <a:srgbClr val="1A1A1A"/>
+                </a:solidFill>
+                <a:latin typeface="Meiryo"/>
+                <a:ea typeface="Meiryo"/>
+              </a:rPr>
+              <a:t>・貴社ご担当者1名を事前登録→品目ごとに仮申請→約1週間で可否回答</a:t>
+            </a:r>
+          </a:p>
+          <a:p>
+            <a:pPr algn="l">
+              <a:spcAft>
+                <a:spcPts val="400"/>
+              </a:spcAft>
+            </a:pPr>
+            <a:r>
+              <a:rPr sz="1100" b="0">
+                <a:solidFill>
+                  <a:srgbClr val="1A1A1A"/>
+                </a:solidFill>
+                <a:latin typeface="Meiryo"/>
+                <a:ea typeface="Meiryo"/>
+              </a:rPr>
+              <a:t>・入力項目:企画商品名(「ノベルティ ○○」表記)・キャラクター・商品カテゴリー</a:t>
+            </a:r>
+          </a:p>
+          <a:p>
+            <a:pPr algn="l">
+              <a:spcAft>
+                <a:spcPts val="400"/>
+              </a:spcAft>
+            </a:pPr>
+            <a:r>
+              <a:rPr sz="1100" b="0">
+                <a:solidFill>
+                  <a:srgbClr val="1A1A1A"/>
+                </a:solidFill>
+                <a:latin typeface="Meiryo"/>
+                <a:ea typeface="Meiryo"/>
+              </a:rPr>
+              <a:t>　(配布物=1〜16/会場装飾=店舗備品)・製造原価単価・予定数量・材質・サイズ等</a:t>
+            </a:r>
+          </a:p>
+          <a:p>
+            <a:pPr algn="l">
+              <a:spcAft>
+                <a:spcPts val="400"/>
+              </a:spcAft>
+            </a:pPr>
+            <a:r>
+              <a:rPr sz="1100" b="0">
+                <a:solidFill>
+                  <a:srgbClr val="1A1A1A"/>
+                </a:solidFill>
+                <a:latin typeface="Meiryo"/>
+                <a:ea typeface="Meiryo"/>
+              </a:rPr>
+              <a:t>・作成許諾ロイヤリティ:作成費用の20%(製造原価単価×数量が算定基礎)</a:t>
+            </a:r>
+          </a:p>
+        </p:txBody>
+      </p:sp>
+      <p:sp>
+        <p:nvSpPr>
+          <p:cNvPr id="12" name="Rounded Rectangle 11"/>
+          <p:cNvSpPr/>
+          <p:nvPr/>
+        </p:nvSpPr>
+        <p:spPr>
+          <a:xfrm>
+            <a:off x="640080" y="3931920"/>
+            <a:ext cx="5303520" cy="2103120"/>
+          </a:xfrm>
+          <a:prstGeom prst="roundRect">
+            <a:avLst>
+              <a:gd name="adj" fmla="val 6000"/>
+            </a:avLst>
+          </a:prstGeom>
+          <a:solidFill>
+            <a:srgbClr val="F2F4F6"/>
+          </a:solidFill>
+          <a:ln>
+            <a:noFill/>
+          </a:ln>
+          <a:effectLst/>
+        </p:spPr>
+        <p:style>
+          <a:lnRef idx="1">
+            <a:schemeClr val="accent1"/>
+          </a:lnRef>
+          <a:fillRef idx="3">
+            <a:schemeClr val="accent1"/>
+          </a:fillRef>
+          <a:effectRef idx="2">
+            <a:schemeClr val="accent1"/>
+          </a:effectRef>
+          <a:fontRef idx="minor">
+            <a:schemeClr val="lt1"/>
+          </a:fontRef>
+        </p:style>
+        <p:txBody>
+          <a:bodyPr rtlCol="0" anchor="ctr"/>
+          <a:lstStyle/>
+          <a:p>
+            <a:pPr algn="ctr"/>
+          </a:p>
+        </p:txBody>
+      </p:sp>
+      <p:sp>
+        <p:nvSpPr>
+          <p:cNvPr id="13" name="TextBox 12"/>
+          <p:cNvSpPr txBox="1"/>
+          <p:nvPr/>
+        </p:nvSpPr>
+        <p:spPr>
+          <a:xfrm>
+            <a:off x="868680" y="4059936"/>
+            <a:ext cx="4846320" cy="1847088"/>
+          </a:xfrm>
+          <a:prstGeom prst="rect">
+            <a:avLst/>
+          </a:prstGeom>
+          <a:noFill/>
+        </p:spPr>
+        <p:txBody>
+          <a:bodyPr wrap="square" anchor="t" lIns="0" rIns="0" tIns="0" bIns="0">
+            <a:spAutoFit/>
+          </a:bodyPr>
+          <a:lstStyle/>
+          <a:p>
+            <a:pPr algn="l">
+              <a:spcAft>
+                <a:spcPts val="400"/>
+              </a:spcAft>
+            </a:pPr>
+            <a:r>
+              <a:rPr sz="1300" b="1">
+                <a:solidFill>
+                  <a:srgbClr val="C00000"/>
+                </a:solidFill>
+                <a:latin typeface="Meiryo"/>
+                <a:ea typeface="Meiryo"/>
+              </a:rPr>
+              <a:t>③ ノベルティのカテゴリー</a:t>
+            </a:r>
+          </a:p>
+          <a:p>
+            <a:pPr algn="l">
+              <a:spcAft>
+                <a:spcPts val="400"/>
+              </a:spcAft>
+            </a:pPr>
+            <a:r>
+              <a:rPr sz="1100" b="0">
+                <a:solidFill>
+                  <a:srgbClr val="1A1A1A"/>
+                </a:solidFill>
+                <a:latin typeface="Meiryo"/>
+                <a:ea typeface="Meiryo"/>
+              </a:rPr>
+              <a:t>・制作可能:トートバッグ・タオル・BOXティッシュ等(キャンペーンデザイン使用)</a:t>
+            </a:r>
+          </a:p>
+          <a:p>
+            <a:pPr algn="l">
+              <a:spcAft>
+                <a:spcPts val="400"/>
+              </a:spcAft>
+            </a:pPr>
+            <a:r>
+              <a:rPr sz="1100" b="0">
+                <a:solidFill>
+                  <a:srgbClr val="1A1A1A"/>
+                </a:solidFill>
+                <a:latin typeface="Meiryo"/>
+                <a:ea typeface="Meiryo"/>
+              </a:rPr>
+              <a:t>・制作不可:お子様向け玩具(フィギュア・ソフビ等)・菓子類・ランチボックス等</a:t>
+            </a:r>
+          </a:p>
+          <a:p>
+            <a:pPr algn="l">
+              <a:spcAft>
+                <a:spcPts val="400"/>
+              </a:spcAft>
+            </a:pPr>
+            <a:r>
+              <a:rPr sz="1100" b="0">
+                <a:solidFill>
+                  <a:srgbClr val="1A1A1A"/>
+                </a:solidFill>
+                <a:latin typeface="Meiryo"/>
+                <a:ea typeface="Meiryo"/>
+              </a:rPr>
+              <a:t>・タオルは一般仕様(ループタオル・ミニタオルは避ける)</a:t>
+            </a:r>
+          </a:p>
+        </p:txBody>
+      </p:sp>
+      <p:sp>
+        <p:nvSpPr>
+          <p:cNvPr id="14" name="Rounded Rectangle 13"/>
+          <p:cNvSpPr/>
+          <p:nvPr/>
+        </p:nvSpPr>
+        <p:spPr>
+          <a:xfrm>
+            <a:off x="6217920" y="3931920"/>
+            <a:ext cx="5303520" cy="2103120"/>
+          </a:xfrm>
+          <a:prstGeom prst="roundRect">
+            <a:avLst>
+              <a:gd name="adj" fmla="val 6000"/>
+            </a:avLst>
+          </a:prstGeom>
+          <a:solidFill>
+            <a:srgbClr val="F2F4F6"/>
+          </a:solidFill>
+          <a:ln>
+            <a:noFill/>
+          </a:ln>
+          <a:effectLst/>
+        </p:spPr>
+        <p:style>
+          <a:lnRef idx="1">
+            <a:schemeClr val="accent1"/>
+          </a:lnRef>
+          <a:fillRef idx="3">
+            <a:schemeClr val="accent1"/>
+          </a:fillRef>
+          <a:effectRef idx="2">
+            <a:schemeClr val="accent1"/>
+          </a:effectRef>
+          <a:fontRef idx="minor">
+            <a:schemeClr val="lt1"/>
+          </a:fontRef>
+        </p:style>
+        <p:txBody>
+          <a:bodyPr rtlCol="0" anchor="ctr"/>
+          <a:lstStyle/>
+          <a:p>
+            <a:pPr algn="ctr"/>
+          </a:p>
+        </p:txBody>
+      </p:sp>
+      <p:sp>
+        <p:nvSpPr>
+          <p:cNvPr id="15" name="TextBox 14"/>
+          <p:cNvSpPr txBox="1"/>
+          <p:nvPr/>
+        </p:nvSpPr>
+        <p:spPr>
+          <a:xfrm>
+            <a:off x="6446520" y="4059936"/>
+            <a:ext cx="4846320" cy="1847088"/>
+          </a:xfrm>
+          <a:prstGeom prst="rect">
+            <a:avLst/>
+          </a:prstGeom>
+          <a:noFill/>
+        </p:spPr>
+        <p:txBody>
+          <a:bodyPr wrap="square" anchor="t" lIns="0" rIns="0" tIns="0" bIns="0">
+            <a:spAutoFit/>
+          </a:bodyPr>
+          <a:lstStyle/>
+          <a:p>
+            <a:pPr algn="l">
+              <a:spcAft>
+                <a:spcPts val="400"/>
+              </a:spcAft>
+            </a:pPr>
+            <a:r>
+              <a:rPr sz="1300" b="1">
+                <a:solidFill>
+                  <a:srgbClr val="C00000"/>
+                </a:solidFill>
+                <a:latin typeface="Meiryo"/>
+                <a:ea typeface="Meiryo"/>
+              </a:rPr>
+              <a:t>④ 修了証・配布物</a:t>
+            </a:r>
+          </a:p>
+          <a:p>
+            <a:pPr algn="l">
+              <a:spcAft>
+                <a:spcPts val="400"/>
+              </a:spcAft>
+            </a:pPr>
+            <a:r>
+              <a:rPr sz="1100" b="0">
+                <a:solidFill>
+                  <a:srgbClr val="1A1A1A"/>
+                </a:solidFill>
+                <a:latin typeface="Meiryo"/>
+                <a:ea typeface="Meiryo"/>
+              </a:rPr>
+              <a:t>・既存の修了証は当社既存イベント専用のため本件では使用しません</a:t>
+            </a:r>
+          </a:p>
+          <a:p>
+            <a:pPr algn="l">
+              <a:spcAft>
+                <a:spcPts val="400"/>
+              </a:spcAft>
+            </a:pPr>
+            <a:r>
+              <a:rPr sz="1100" b="0">
+                <a:solidFill>
+                  <a:srgbClr val="1A1A1A"/>
+                </a:solidFill>
+                <a:latin typeface="Meiryo"/>
+                <a:ea typeface="Meiryo"/>
+              </a:rPr>
+              <a:t>・案A:貴社のミッション(クイズ等)と連動したオリジナル修了証を貴社制作</a:t>
+            </a:r>
+          </a:p>
+          <a:p>
+            <a:pPr algn="l">
+              <a:spcAft>
+                <a:spcPts val="400"/>
+              </a:spcAft>
+            </a:pPr>
+            <a:r>
+              <a:rPr sz="1100" b="0">
+                <a:solidFill>
+                  <a:srgbClr val="1A1A1A"/>
+                </a:solidFill>
+                <a:latin typeface="Meiryo"/>
+                <a:ea typeface="Meiryo"/>
+              </a:rPr>
+              <a:t>・案B:キャンペーンビジュアルのステッカーを貴社制作・全員配布</a:t>
+            </a:r>
+          </a:p>
+          <a:p>
+            <a:pPr algn="l">
+              <a:spcAft>
+                <a:spcPts val="400"/>
+              </a:spcAft>
+            </a:pPr>
+            <a:r>
+              <a:rPr sz="1100" b="0">
+                <a:solidFill>
+                  <a:srgbClr val="1A1A1A"/>
+                </a:solidFill>
+                <a:latin typeface="Meiryo"/>
+                <a:ea typeface="Meiryo"/>
+              </a:rPr>
+              <a:t>・配布の目的(体験型か告知型か)に応じて選択</a:t>
+            </a:r>
+          </a:p>
+        </p:txBody>
+      </p:sp>
+    </p:spTree>
+  </p:cSld>
+  <p:clrMapOvr>
+    <a:masterClrMapping/>
+  </p:clrMapOvr>
+</p:sld>
+</file>
+
+<file path=ppt/slides/slide12.xml><?xml version="1.0" encoding="utf-8"?>
+<p:sld xmlns:a="http://schemas.openxmlformats.org/drawingml/2006/main" xmlns:p="http://schemas.openxmlformats.org/presentationml/2006/main" xmlns:r="http://schemas.openxmlformats.org/officeDocument/2006/relationships">
+  <p:cSld>
+    <p:spTree>
+      <p:nvGrpSpPr>
+        <p:cNvPr id="1" name=""/>
+        <p:cNvGrpSpPr/>
+        <p:nvPr/>
+      </p:nvGrpSpPr>
+      <p:grpSpPr/>
+      <p:pic>
+        <p:nvPicPr>
+          <p:cNvPr id="2" name="Picture 1" descr="band_header.png"/>
+          <p:cNvPicPr>
+            <a:picLocks noChangeAspect="1"/>
+          </p:cNvPicPr>
+          <p:nvPr/>
+        </p:nvPicPr>
+        <p:blipFill>
+          <a:blip r:embed="rId2"/>
+          <a:stretch>
+            <a:fillRect/>
+          </a:stretch>
+        </p:blipFill>
+        <p:spPr>
+          <a:xfrm>
+            <a:off x="0" y="0"/>
+            <a:ext cx="12191695" cy="786384"/>
+          </a:xfrm>
+          <a:prstGeom prst="rect">
+            <a:avLst/>
+          </a:prstGeom>
+        </p:spPr>
+      </p:pic>
+      <p:sp>
+        <p:nvSpPr>
+          <p:cNvPr id="3" name="TextBox 2"/>
+          <p:cNvSpPr txBox="1"/>
+          <p:nvPr/>
+        </p:nvSpPr>
+        <p:spPr>
+          <a:xfrm>
+            <a:off x="457200" y="73152"/>
+            <a:ext cx="10241280" cy="640080"/>
+          </a:xfrm>
+          <a:prstGeom prst="rect">
+            <a:avLst/>
+          </a:prstGeom>
+          <a:noFill/>
+        </p:spPr>
+        <p:txBody>
+          <a:bodyPr wrap="square" anchor="ctr" lIns="0" rIns="0" tIns="0" bIns="0">
+            <a:spAutoFit/>
+          </a:bodyPr>
+          <a:lstStyle/>
+          <a:p>
+            <a:pPr algn="l">
+              <a:spcAft>
+                <a:spcPts val="500"/>
+              </a:spcAft>
+            </a:pPr>
+            <a:r>
+              <a:rPr sz="2100" b="1">
+                <a:solidFill>
+                  <a:srgbClr val="FFFFFF"/>
+                </a:solidFill>
+                <a:latin typeface="Meiryo"/>
+                <a:ea typeface="Meiryo"/>
+              </a:rPr>
+              <a:t>4. スケジュールと次のステップ</a:t>
+            </a:r>
+          </a:p>
+        </p:txBody>
+      </p:sp>
+      <p:sp>
+        <p:nvSpPr>
+          <p:cNvPr id="4" name="TextBox 3"/>
+          <p:cNvSpPr txBox="1"/>
+          <p:nvPr/>
+        </p:nvSpPr>
+        <p:spPr>
+          <a:xfrm>
+            <a:off x="502920" y="896112"/>
+            <a:ext cx="11155680" cy="365760"/>
+          </a:xfrm>
+          <a:prstGeom prst="rect">
+            <a:avLst/>
+          </a:prstGeom>
+          <a:noFill/>
+        </p:spPr>
+        <p:txBody>
+          <a:bodyPr wrap="square" anchor="t" lIns="0" rIns="0" tIns="0" bIns="0">
+            <a:spAutoFit/>
+          </a:bodyPr>
+          <a:lstStyle/>
+          <a:p>
+            <a:pPr algn="l">
+              <a:spcAft>
+                <a:spcPts val="500"/>
+              </a:spcAft>
+            </a:pPr>
+            <a:r>
+              <a:rPr sz="1250" b="0">
+                <a:solidFill>
+                  <a:srgbClr val="5A626B"/>
+                </a:solidFill>
+                <a:latin typeface="Meiryo"/>
+                <a:ea typeface="Meiryo"/>
+              </a:rPr>
+              <a:t>2027年1月開始に向けた逆算スケジュールです</a:t>
+            </a:r>
+          </a:p>
+        </p:txBody>
+      </p:sp>
+      <p:sp>
+        <p:nvSpPr>
+          <p:cNvPr id="5" name="TextBox 4"/>
+          <p:cNvSpPr txBox="1"/>
+          <p:nvPr/>
+        </p:nvSpPr>
+        <p:spPr>
+          <a:xfrm>
+            <a:off x="4727448" y="6547104"/>
+            <a:ext cx="2743200" cy="256032"/>
+          </a:xfrm>
+          <a:prstGeom prst="rect">
+            <a:avLst/>
+          </a:prstGeom>
+          <a:noFill/>
+        </p:spPr>
+        <p:txBody>
+          <a:bodyPr wrap="square" anchor="t" lIns="0" rIns="0" tIns="0" bIns="0">
+            <a:spAutoFit/>
+          </a:bodyPr>
+          <a:lstStyle/>
+          <a:p>
+            <a:pPr algn="ctr">
+              <a:spcAft>
+                <a:spcPts val="500"/>
+              </a:spcAft>
+            </a:pPr>
+            <a:r>
+              <a:rPr sz="800" b="0">
+                <a:solidFill>
+                  <a:srgbClr val="8E949B"/>
+                </a:solidFill>
+                <a:latin typeface="Meiryo"/>
+                <a:ea typeface="Meiryo"/>
+              </a:rPr>
+              <a:t>© TSUBURAYA PRODUCTIONS</a:t>
+            </a:r>
+          </a:p>
+        </p:txBody>
+      </p:sp>
+      <p:sp>
+        <p:nvSpPr>
+          <p:cNvPr id="6" name="TextBox 5"/>
+          <p:cNvSpPr txBox="1"/>
+          <p:nvPr/>
+        </p:nvSpPr>
+        <p:spPr>
+          <a:xfrm>
+            <a:off x="9372600" y="6492240"/>
+            <a:ext cx="2011680" cy="274320"/>
+          </a:xfrm>
+          <a:prstGeom prst="rect">
+            <a:avLst/>
+          </a:prstGeom>
+          <a:noFill/>
+        </p:spPr>
+        <p:txBody>
+          <a:bodyPr wrap="square" anchor="t" lIns="0" rIns="0" tIns="0" bIns="0">
+            <a:spAutoFit/>
+          </a:bodyPr>
+          <a:lstStyle/>
+          <a:p>
+            <a:pPr algn="r">
+              <a:spcAft>
+                <a:spcPts val="500"/>
+              </a:spcAft>
+            </a:pPr>
+            <a:r>
+              <a:rPr sz="1000" b="1">
+                <a:solidFill>
+                  <a:srgbClr val="C00000"/>
+                </a:solidFill>
+                <a:latin typeface="Meiryo"/>
+                <a:ea typeface="Meiryo"/>
+              </a:rPr>
+              <a:t>Strictly Confidential</a:t>
+            </a:r>
+          </a:p>
+        </p:txBody>
+      </p:sp>
+      <p:sp>
+        <p:nvSpPr>
+          <p:cNvPr id="7" name="TextBox 6"/>
+          <p:cNvSpPr txBox="1"/>
+          <p:nvPr/>
+        </p:nvSpPr>
+        <p:spPr>
+          <a:xfrm>
+            <a:off x="11521440" y="6492240"/>
+            <a:ext cx="457200" cy="274320"/>
+          </a:xfrm>
+          <a:prstGeom prst="rect">
+            <a:avLst/>
+          </a:prstGeom>
+          <a:noFill/>
+        </p:spPr>
+        <p:txBody>
+          <a:bodyPr wrap="square" anchor="t" lIns="0" rIns="0" tIns="0" bIns="0">
+            <a:spAutoFit/>
+          </a:bodyPr>
+          <a:lstStyle/>
+          <a:p>
+            <a:pPr algn="r">
+              <a:spcAft>
+                <a:spcPts val="500"/>
+              </a:spcAft>
+            </a:pPr>
+            <a:r>
+              <a:rPr sz="1000" b="0">
+                <a:solidFill>
+                  <a:srgbClr val="8E949B"/>
+                </a:solidFill>
+                <a:latin typeface="Meiryo"/>
+                <a:ea typeface="Meiryo"/>
+              </a:rPr>
+              <a:t>12</a:t>
             </a:r>
           </a:p>
         </p:txBody>
@@ -6173,7 +8064,7 @@
                 <a:latin typeface="Meiryo"/>
                 <a:ea typeface="Meiryo"/>
               </a:rPr>
-              <a:t>良かった点</a:t>
+              <a:t>実績と良かった点</a:t>
             </a:r>
           </a:p>
           <a:p>
@@ -6190,7 +8081,7 @@
                 <a:latin typeface="Meiryo"/>
                 <a:ea typeface="Meiryo"/>
               </a:rPr>
-              <a:t>・全7会場を予定どおり実施、各会場で安定した集客を確認</a:t>
+              <a:t>・全7会場・14日間を完走。ステージショー型は1回150〜227名を動員(ヤマダ横浜で単日最多227名、古淵は開店前50名の行列・整理券200枚完売)</a:t>
             </a:r>
           </a:p>
           <a:p>
@@ -6207,7 +8098,7 @@
                 <a:latin typeface="Meiryo"/>
                 <a:ea typeface="Meiryo"/>
               </a:rPr>
-              <a:t>・貴社側での会場設営・音響・整理券・告知素材の対応は本格実施でも活用可能</a:t>
+              <a:t>・撮影会型は1回の上限を30〜35組に調整する運用が奏功(港南台は終始スムーズな優良事例)</a:t>
             </a:r>
           </a:p>
           <a:p>
@@ -6224,7 +8115,7 @@
                 <a:latin typeface="Meiryo"/>
                 <a:ea typeface="Meiryo"/>
               </a:rPr>
-              <a:t>・写真撮影会型(1回30分)の運用は、来場者の満足度・回転とも良好</a:t>
+              <a:t>・ヨドバシ横浜はノベルティ受取場所を店舗内に設定し、見積取得が増加</a:t>
             </a:r>
           </a:p>
         </p:txBody>
@@ -6327,7 +8218,7 @@
                 <a:latin typeface="Meiryo"/>
                 <a:ea typeface="Meiryo"/>
               </a:rPr>
-              <a:t>・各会場スタッフ様へのキャンペーン内容の事前共有(当日の問い合わせ対応のため)</a:t>
+              <a:t>・MC不在の会場でルール共有が不足し、盛り上がりが低下(ヨドバシ横浜等)</a:t>
             </a:r>
           </a:p>
           <a:p>
@@ -6344,7 +8235,7 @@
                 <a:latin typeface="Meiryo"/>
                 <a:ea typeface="Meiryo"/>
               </a:rPr>
-              <a:t>・当日ご担当者様の集合時間の厳守(搬入・設営の遅れ防止)</a:t>
+              <a:t>・スタッフの識別(Tシャツ未着用)・集合時間・接客品質にばらつき</a:t>
             </a:r>
           </a:p>
           <a:p>
@@ -6361,7 +8252,7 @@
                 <a:latin typeface="Meiryo"/>
                 <a:ea typeface="Meiryo"/>
               </a:rPr>
-              <a:t>・キャラクターグッズの扱い(販促物を展示装飾に転用しない等、使用ルールの徹底)</a:t>
+              <a:t>・撮影後の商談・アンケート誘導が事前告知なく、不快感の声あり</a:t>
             </a:r>
           </a:p>
           <a:p>
@@ -6378,7 +8269,24 @@
                 <a:latin typeface="Meiryo"/>
                 <a:ea typeface="Meiryo"/>
               </a:rPr>
-              <a:t>・告知名称・ビジュアルの統一(会場ごとの表記ゆれの解消)</a:t>
+              <a:t>・未監修POP・非公式グッズ・AI生成画像の使用が発生</a:t>
+            </a:r>
+          </a:p>
+          <a:p>
+            <a:pPr algn="l">
+              <a:spcAft>
+                <a:spcPts val="400"/>
+              </a:spcAft>
+            </a:pPr>
+            <a:r>
+              <a:rPr sz="1100" b="0">
+                <a:solidFill>
+                  <a:srgbClr val="1A1A1A"/>
+                </a:solidFill>
+                <a:latin typeface="Meiryo"/>
+                <a:ea typeface="Meiryo"/>
+              </a:rPr>
+              <a:t>・会場ごとの個別配送による物流負荷と、EDI検収タイミングのずれ</a:t>
             </a:r>
           </a:p>
         </p:txBody>
@@ -6464,7 +8372,7 @@
                 <a:latin typeface="Meiryo"/>
                 <a:ea typeface="Meiryo"/>
               </a:rPr>
-              <a:t>本格実施に向けた整理</a:t>
+              <a:t>本格実施に向けた標準化(ご提案)</a:t>
             </a:r>
           </a:p>
           <a:p>
@@ -6474,14 +8382,14 @@
               </a:spcAft>
             </a:pPr>
             <a:r>
-              <a:rPr sz="1150" b="0">
+              <a:rPr sz="1100" b="0">
                 <a:solidFill>
                   <a:srgbClr val="1A1A1A"/>
                 </a:solidFill>
                 <a:latin typeface="Meiryo"/>
                 <a:ea typeface="Meiryo"/>
               </a:rPr>
-              <a:t>・撮影会は1回30分×1日3〜4回(各50組)を基本とし、貴社店頭の来店動態に合わせて2案から選択</a:t>
+              <a:t>・公演は1日4回を推奨(1回30分×4回・各50組目安、休憩・メンテ1.5時間確保)。MC役(ルール案内・進行アナウンス)を全会場に配置</a:t>
             </a:r>
           </a:p>
           <a:p>
@@ -6491,14 +8399,14 @@
               </a:spcAft>
             </a:pPr>
             <a:r>
-              <a:rPr sz="1150" b="0">
+              <a:rPr sz="1100" b="0">
                 <a:solidFill>
                   <a:srgbClr val="1A1A1A"/>
                 </a:solidFill>
                 <a:latin typeface="Meiryo"/>
                 <a:ea typeface="Meiryo"/>
               </a:rPr>
-              <a:t>・上記の改善点は、貴社内の取りまとめ窓口からの全会場一括展開(全店共通フォーマット)で解消可能と考えています</a:t>
+              <a:t>・専用スタッフTシャツの着用・集合時間の厳守・接客マナーの事前共有を全店ルール化。「商談・アンケート目的」を告知物と受付で明記</a:t>
             </a:r>
           </a:p>
           <a:p>
@@ -6508,14 +8416,31 @@
               </a:spcAft>
             </a:pPr>
             <a:r>
-              <a:rPr sz="1150" b="0">
+              <a:rPr sz="1100" b="0">
                 <a:solidFill>
                   <a:srgbClr val="1A1A1A"/>
                 </a:solidFill>
                 <a:latin typeface="Meiryo"/>
                 <a:ea typeface="Meiryo"/>
               </a:rPr>
-              <a:t>・当社から運営マニュアル・初回レクチャーを提供し、全国どの会場でも同じ品質で実施できる体制を整えます</a:t>
+              <a:t>・制作物は監修済みの規定デザインのみ使用(他キャラクターの混在禁止)/ノベルティは指定倉庫への一括納品・5営業日前の数量確定</a:t>
+            </a:r>
+          </a:p>
+          <a:p>
+            <a:pPr algn="l">
+              <a:spcAft>
+                <a:spcPts val="400"/>
+              </a:spcAft>
+            </a:pPr>
+            <a:r>
+              <a:rPr sz="1100" b="0">
+                <a:solidFill>
+                  <a:srgbClr val="1A1A1A"/>
+                </a:solidFill>
+                <a:latin typeface="Meiryo"/>
+                <a:ea typeface="Meiryo"/>
+              </a:rPr>
+              <a:t>・全会場の情報を網羅した告知LPを開設し、当社公式サイトから誘導。EDI検収と書類発行のタイミングを本契約で整理</a:t>
             </a:r>
           </a:p>
         </p:txBody>
@@ -6597,7 +8522,7 @@
                 <a:latin typeface="Meiryo"/>
                 <a:ea typeface="Meiryo"/>
               </a:rPr>
-              <a:t>2. 本格実施の役割分担</a:t>
+              <a:t>1. テストイベント 会場別実績</a:t>
             </a:r>
           </a:p>
         </p:txBody>
@@ -6637,7 +8562,7 @@
                 <a:latin typeface="Meiryo"/>
                 <a:ea typeface="Meiryo"/>
               </a:rPr>
-              <a:t>当社はキャラクター稼働パート(2名)、貴社は会場運営パート(運営ディレクター1名+運営スタッフ4名)をご担当いただきます</a:t>
+              <a:t>2026年9月12日〜10月18日・神奈川県内7会場(ショップ4・量販3)</a:t>
             </a:r>
           </a:p>
         </p:txBody>
@@ -6772,7 +8697,7 @@
         </p:nvGraphicFramePr>
         <p:xfrm>
           <a:off x="640080" y="1417320"/>
-          <a:ext cx="10881359" cy="3803904"/>
+          <a:ext cx="10881358" cy="4389120"/>
         </p:xfrm>
         <a:graphic>
           <a:graphicData uri="http://schemas.openxmlformats.org/drawingml/2006/table">
@@ -6781,25 +8706,27 @@
                 <a:tableStyleId>{5C22544A-7EE6-4342-B048-85BDC9FD1C3A}</a:tableStyleId>
               </a:tblPr>
               <a:tblGrid>
-                <a:gridCol w="2675744"/>
-                <a:gridCol w="4637956"/>
-                <a:gridCol w="3567659"/>
+                <a:gridCol w="1978429"/>
+                <a:gridCol w="1483821"/>
+                <a:gridCol w="1854777"/>
+                <a:gridCol w="1978429"/>
+                <a:gridCol w="3585902"/>
               </a:tblGrid>
-              <a:tr h="475488">
-                <a:tc>
-                  <a:txBody>
-                    <a:bodyPr/>
-                    <a:lstStyle/>
-                    <a:p>
-                      <a:r>
-                        <a:rPr sz="1100" b="1">
+              <a:tr h="548640">
+                <a:tc>
+                  <a:txBody>
+                    <a:bodyPr/>
+                    <a:lstStyle/>
+                    <a:p>
+                      <a:r>
+                        <a:rPr sz="1050" b="1">
                           <a:solidFill>
                             <a:srgbClr val="FFFFFF"/>
                           </a:solidFill>
                           <a:latin typeface="Meiryo"/>
                           <a:ea typeface="Meiryo"/>
                         </a:rPr>
-                        <a:t>役割</a:t>
+                        <a:t>会場</a:t>
                       </a:r>
                     </a:p>
                   </a:txBody>
@@ -6815,14 +8742,14 @@
                     <a:lstStyle/>
                     <a:p>
                       <a:r>
-                        <a:rPr sz="1100" b="1">
+                        <a:rPr sz="1050" b="1">
                           <a:solidFill>
                             <a:srgbClr val="FFFFFF"/>
                           </a:solidFill>
                           <a:latin typeface="Meiryo"/>
                           <a:ea typeface="Meiryo"/>
                         </a:rPr>
-                        <a:t>撮影会中</a:t>
+                        <a:t>日程・形式</a:t>
                       </a:r>
                     </a:p>
                   </a:txBody>
@@ -6838,14 +8765,14 @@
                     <a:lstStyle/>
                     <a:p>
                       <a:r>
-                        <a:rPr sz="1100" b="1">
+                        <a:rPr sz="1050" b="1">
                           <a:solidFill>
                             <a:srgbClr val="FFFFFF"/>
                           </a:solidFill>
                           <a:latin typeface="Meiryo"/>
                           <a:ea typeface="Meiryo"/>
                         </a:rPr>
-                        <a:t>撮影会の合間・開始前</a:t>
+                        <a:t>出演</a:t>
                       </a:r>
                     </a:p>
                   </a:txBody>
@@ -6855,22 +8782,68 @@
                     </a:solidFill>
                   </a:tcPr>
                 </a:tc>
+                <a:tc>
+                  <a:txBody>
+                    <a:bodyPr/>
+                    <a:lstStyle/>
+                    <a:p>
+                      <a:r>
+                        <a:rPr sz="1050" b="1">
+                          <a:solidFill>
+                            <a:srgbClr val="FFFFFF"/>
+                          </a:solidFill>
+                          <a:latin typeface="Meiryo"/>
+                          <a:ea typeface="Meiryo"/>
+                        </a:rPr>
+                        <a:t>動員実績</a:t>
+                      </a:r>
+                    </a:p>
+                  </a:txBody>
+                  <a:tcPr anchor="ctr" marL="73152" marR="73152">
+                    <a:solidFill>
+                      <a:srgbClr val="232278"/>
+                    </a:solidFill>
+                  </a:tcPr>
+                </a:tc>
+                <a:tc>
+                  <a:txBody>
+                    <a:bodyPr/>
+                    <a:lstStyle/>
+                    <a:p>
+                      <a:r>
+                        <a:rPr sz="1050" b="1">
+                          <a:solidFill>
+                            <a:srgbClr val="FFFFFF"/>
+                          </a:solidFill>
+                          <a:latin typeface="Meiryo"/>
+                          <a:ea typeface="Meiryo"/>
+                        </a:rPr>
+                        <a:t>特記事項</a:t>
+                      </a:r>
+                    </a:p>
+                  </a:txBody>
+                  <a:tcPr anchor="ctr" marL="73152" marR="73152">
+                    <a:solidFill>
+                      <a:srgbClr val="232278"/>
+                    </a:solidFill>
+                  </a:tcPr>
+                </a:tc>
               </a:tr>
-              <a:tr h="475488">
-                <a:tc>
-                  <a:txBody>
-                    <a:bodyPr/>
-                    <a:lstStyle/>
-                    <a:p>
-                      <a:r>
-                        <a:rPr sz="1100" b="1">
-                          <a:solidFill>
-                            <a:srgbClr val="232278"/>
-                          </a:solidFill>
-                          <a:latin typeface="Meiryo"/>
-                          <a:ea typeface="Meiryo"/>
-                        </a:rPr>
-                        <a:t>当社:担当(チーフスタッフ)</a:t>
+              <a:tr h="548640">
+                <a:tc>
+                  <a:txBody>
+                    <a:bodyPr/>
+                    <a:lstStyle/>
+                    <a:p>
+                      <a:r>
+                        <a:rPr sz="1050" b="0">
+                          <a:solidFill>
+                            <a:srgbClr val="1A1A1A"/>
+                          </a:solidFill>
+                          <a:latin typeface="Meiryo"/>
+                          <a:ea typeface="Meiryo"/>
+                        </a:rPr>
+                        <a:t>イトーヨーカドー古淵</a:t>
                       </a:r>
                     </a:p>
                   </a:txBody>
@@ -6886,14 +8859,14 @@
                     <a:lstStyle/>
                     <a:p>
                       <a:r>
-                        <a:rPr sz="1100" b="0">
-                          <a:solidFill>
-                            <a:srgbClr val="1A1A1A"/>
-                          </a:solidFill>
-                          <a:latin typeface="Meiryo"/>
-                          <a:ea typeface="Meiryo"/>
-                        </a:rPr>
-                        <a:t>キャラクター稼働の統括、着脱補助・スーツメンテナンス、ヒーロー前のお客様対応</a:t>
+                        <a:rPr sz="1050" b="0">
+                          <a:solidFill>
+                            <a:srgbClr val="1A1A1A"/>
+                          </a:solidFill>
+                          <a:latin typeface="Meiryo"/>
+                          <a:ea typeface="Meiryo"/>
+                        </a:rPr>
+                        <a:t>9/12-13 ショー型</a:t>
                       </a:r>
                     </a:p>
                   </a:txBody>
@@ -6909,14 +8882,14 @@
                     <a:lstStyle/>
                     <a:p>
                       <a:r>
-                        <a:rPr sz="1100" b="0">
-                          <a:solidFill>
-                            <a:srgbClr val="1A1A1A"/>
-                          </a:solidFill>
-                          <a:latin typeface="Meiryo"/>
-                          <a:ea typeface="Meiryo"/>
-                        </a:rPr>
-                        <a:t>スーツメンテナンス、貴社ディレクターとの進行確認</a:t>
+                        <a:rPr sz="1050" b="0">
+                          <a:solidFill>
+                            <a:srgbClr val="1A1A1A"/>
+                          </a:solidFill>
+                          <a:latin typeface="Meiryo"/>
+                          <a:ea typeface="Meiryo"/>
+                        </a:rPr>
+                        <a:t>テオ&amp;オメガ/ゼット&amp;ジード</a:t>
                       </a:r>
                     </a:p>
                   </a:txBody>
@@ -6926,22 +8899,68 @@
                     </a:solidFill>
                   </a:tcPr>
                 </a:tc>
+                <a:tc>
+                  <a:txBody>
+                    <a:bodyPr/>
+                    <a:lstStyle/>
+                    <a:p>
+                      <a:r>
+                        <a:rPr sz="1050" b="0">
+                          <a:solidFill>
+                            <a:srgbClr val="1A1A1A"/>
+                          </a:solidFill>
+                          <a:latin typeface="Meiryo"/>
+                          <a:ea typeface="Meiryo"/>
+                        </a:rPr>
+                        <a:t>計664名(2日・各日2回)</a:t>
+                      </a:r>
+                    </a:p>
+                  </a:txBody>
+                  <a:tcPr anchor="ctr" marL="73152" marR="73152">
+                    <a:solidFill>
+                      <a:srgbClr val="FFFFFF"/>
+                    </a:solidFill>
+                  </a:tcPr>
+                </a:tc>
+                <a:tc>
+                  <a:txBody>
+                    <a:bodyPr/>
+                    <a:lstStyle/>
+                    <a:p>
+                      <a:r>
+                        <a:rPr sz="1050" b="0">
+                          <a:solidFill>
+                            <a:srgbClr val="1A1A1A"/>
+                          </a:solidFill>
+                          <a:latin typeface="Meiryo"/>
+                          <a:ea typeface="Meiryo"/>
+                        </a:rPr>
+                        <a:t>開店前50名行列・整理券200枚完売。抽選会フローの整理が課題</a:t>
+                      </a:r>
+                    </a:p>
+                  </a:txBody>
+                  <a:tcPr anchor="ctr" marL="73152" marR="73152">
+                    <a:solidFill>
+                      <a:srgbClr val="FFFFFF"/>
+                    </a:solidFill>
+                  </a:tcPr>
+                </a:tc>
               </a:tr>
-              <a:tr h="475488">
-                <a:tc>
-                  <a:txBody>
-                    <a:bodyPr/>
-                    <a:lstStyle/>
-                    <a:p>
-                      <a:r>
-                        <a:rPr sz="1100" b="1">
-                          <a:solidFill>
-                            <a:srgbClr val="232278"/>
-                          </a:solidFill>
-                          <a:latin typeface="Meiryo"/>
-                          <a:ea typeface="Meiryo"/>
-                        </a:rPr>
-                        <a:t>当社:スーツアクター</a:t>
+              <a:tr h="548640">
+                <a:tc>
+                  <a:txBody>
+                    <a:bodyPr/>
+                    <a:lstStyle/>
+                    <a:p>
+                      <a:r>
+                        <a:rPr sz="1050" b="0">
+                          <a:solidFill>
+                            <a:srgbClr val="1A1A1A"/>
+                          </a:solidFill>
+                          <a:latin typeface="Meiryo"/>
+                          <a:ea typeface="Meiryo"/>
+                        </a:rPr>
+                        <a:t>イトーヨーカドー川崎</a:t>
                       </a:r>
                     </a:p>
                   </a:txBody>
@@ -6957,14 +8976,14 @@
                     <a:lstStyle/>
                     <a:p>
                       <a:r>
-                        <a:rPr sz="1100" b="0">
-                          <a:solidFill>
-                            <a:srgbClr val="1A1A1A"/>
-                          </a:solidFill>
-                          <a:latin typeface="Meiryo"/>
-                          <a:ea typeface="Meiryo"/>
-                        </a:rPr>
-                        <a:t>キャラクター出演・ポージング(1回30分×最大5回)</a:t>
+                        <a:rPr sz="1050" b="0">
+                          <a:solidFill>
+                            <a:srgbClr val="1A1A1A"/>
+                          </a:solidFill>
+                          <a:latin typeface="Meiryo"/>
+                          <a:ea typeface="Meiryo"/>
+                        </a:rPr>
+                        <a:t>9/19-20 撮影会型</a:t>
                       </a:r>
                     </a:p>
                   </a:txBody>
@@ -6980,14 +8999,14 @@
                     <a:lstStyle/>
                     <a:p>
                       <a:r>
-                        <a:rPr sz="1100" b="0">
-                          <a:solidFill>
-                            <a:srgbClr val="1A1A1A"/>
-                          </a:solidFill>
-                          <a:latin typeface="Meiryo"/>
-                          <a:ea typeface="Meiryo"/>
-                        </a:rPr>
-                        <a:t>メンテナンス休憩</a:t>
+                        <a:rPr sz="1050" b="0">
+                          <a:solidFill>
+                            <a:srgbClr val="1A1A1A"/>
+                          </a:solidFill>
+                          <a:latin typeface="Meiryo"/>
+                          <a:ea typeface="Meiryo"/>
+                        </a:rPr>
+                        <a:t>ウルトラマン/オメガ</a:t>
                       </a:r>
                     </a:p>
                   </a:txBody>
@@ -6997,22 +9016,68 @@
                     </a:solidFill>
                   </a:tcPr>
                 </a:tc>
+                <a:tc>
+                  <a:txBody>
+                    <a:bodyPr/>
+                    <a:lstStyle/>
+                    <a:p>
+                      <a:r>
+                        <a:rPr sz="1050" b="0">
+                          <a:solidFill>
+                            <a:srgbClr val="1A1A1A"/>
+                          </a:solidFill>
+                          <a:latin typeface="Meiryo"/>
+                          <a:ea typeface="Meiryo"/>
+                        </a:rPr>
+                        <a:t>計216組(2日・各日5回)</a:t>
+                      </a:r>
+                    </a:p>
+                  </a:txBody>
+                  <a:tcPr anchor="ctr" marL="73152" marR="73152">
+                    <a:solidFill>
+                      <a:srgbClr val="F2F4F6"/>
+                    </a:solidFill>
+                  </a:tcPr>
+                </a:tc>
+                <a:tc>
+                  <a:txBody>
+                    <a:bodyPr/>
+                    <a:lstStyle/>
+                    <a:p>
+                      <a:r>
+                        <a:rPr sz="1050" b="0">
+                          <a:solidFill>
+                            <a:srgbClr val="1A1A1A"/>
+                          </a:solidFill>
+                          <a:latin typeface="Meiryo"/>
+                          <a:ea typeface="Meiryo"/>
+                        </a:rPr>
+                        <a:t>未監修POP・非公式品の装飾使用、担当者不在が発生</a:t>
+                      </a:r>
+                    </a:p>
+                  </a:txBody>
+                  <a:tcPr anchor="ctr" marL="73152" marR="73152">
+                    <a:solidFill>
+                      <a:srgbClr val="F2F4F6"/>
+                    </a:solidFill>
+                  </a:tcPr>
+                </a:tc>
               </a:tr>
-              <a:tr h="475488">
-                <a:tc>
-                  <a:txBody>
-                    <a:bodyPr/>
-                    <a:lstStyle/>
-                    <a:p>
-                      <a:r>
-                        <a:rPr sz="1100" b="1">
-                          <a:solidFill>
-                            <a:srgbClr val="1A1A1A"/>
-                          </a:solidFill>
-                          <a:latin typeface="Meiryo"/>
-                          <a:ea typeface="Meiryo"/>
-                        </a:rPr>
-                        <a:t>貴社:運営ディレクター</a:t>
+              <a:tr h="548640">
+                <a:tc>
+                  <a:txBody>
+                    <a:bodyPr/>
+                    <a:lstStyle/>
+                    <a:p>
+                      <a:r>
+                        <a:rPr sz="1050" b="0">
+                          <a:solidFill>
+                            <a:srgbClr val="1A1A1A"/>
+                          </a:solidFill>
+                          <a:latin typeface="Meiryo"/>
+                          <a:ea typeface="Meiryo"/>
+                        </a:rPr>
+                        <a:t>ビックカメラ ラゾーナ川崎</a:t>
                       </a:r>
                     </a:p>
                   </a:txBody>
@@ -7028,14 +9093,14 @@
                     <a:lstStyle/>
                     <a:p>
                       <a:r>
-                        <a:rPr sz="1100" b="0">
-                          <a:solidFill>
-                            <a:srgbClr val="1A1A1A"/>
-                          </a:solidFill>
-                          <a:latin typeface="Meiryo"/>
-                          <a:ea typeface="Meiryo"/>
-                        </a:rPr>
-                        <a:t>全体管理、音響機材のセット・音出し、館管理者との対応、会場周辺のお客様誘導</a:t>
+                        <a:rPr sz="1050" b="0">
+                          <a:solidFill>
+                            <a:srgbClr val="1A1A1A"/>
+                          </a:solidFill>
+                          <a:latin typeface="Meiryo"/>
+                          <a:ea typeface="Meiryo"/>
+                        </a:rPr>
+                        <a:t>9/19-20 撮影会型</a:t>
                       </a:r>
                     </a:p>
                   </a:txBody>
@@ -7051,14 +9116,14 @@
                     <a:lstStyle/>
                     <a:p>
                       <a:r>
-                        <a:rPr sz="1100" b="0">
-                          <a:solidFill>
-                            <a:srgbClr val="1A1A1A"/>
-                          </a:solidFill>
-                          <a:latin typeface="Meiryo"/>
-                          <a:ea typeface="Meiryo"/>
-                        </a:rPr>
-                        <a:t>会場づくり、お客様対応</a:t>
+                        <a:rPr sz="1050" b="0">
+                          <a:solidFill>
+                            <a:srgbClr val="1A1A1A"/>
+                          </a:solidFill>
+                          <a:latin typeface="Meiryo"/>
+                          <a:ea typeface="Meiryo"/>
+                        </a:rPr>
+                        <a:t>ゼロ/ティガ</a:t>
                       </a:r>
                     </a:p>
                   </a:txBody>
@@ -7068,22 +9133,68 @@
                     </a:solidFill>
                   </a:tcPr>
                 </a:tc>
+                <a:tc>
+                  <a:txBody>
+                    <a:bodyPr/>
+                    <a:lstStyle/>
+                    <a:p>
+                      <a:r>
+                        <a:rPr sz="1050" b="0">
+                          <a:solidFill>
+                            <a:srgbClr val="1A1A1A"/>
+                          </a:solidFill>
+                          <a:latin typeface="Meiryo"/>
+                          <a:ea typeface="Meiryo"/>
+                        </a:rPr>
+                        <a:t>計225組(2日・各日3回)</a:t>
+                      </a:r>
+                    </a:p>
+                  </a:txBody>
+                  <a:tcPr anchor="ctr" marL="73152" marR="73152">
+                    <a:solidFill>
+                      <a:srgbClr val="FFFFFF"/>
+                    </a:solidFill>
+                  </a:tcPr>
+                </a:tc>
+                <a:tc>
+                  <a:txBody>
+                    <a:bodyPr/>
+                    <a:lstStyle/>
+                    <a:p>
+                      <a:r>
+                        <a:rPr sz="1050" b="0">
+                          <a:solidFill>
+                            <a:srgbClr val="1A1A1A"/>
+                          </a:solidFill>
+                          <a:latin typeface="Meiryo"/>
+                          <a:ea typeface="Meiryo"/>
+                        </a:rPr>
+                        <a:t>整理券45〜50枚/回ほぼ完売。景品に他IP品が混在</a:t>
+                      </a:r>
+                    </a:p>
+                  </a:txBody>
+                  <a:tcPr anchor="ctr" marL="73152" marR="73152">
+                    <a:solidFill>
+                      <a:srgbClr val="FFFFFF"/>
+                    </a:solidFill>
+                  </a:tcPr>
+                </a:tc>
               </a:tr>
-              <a:tr h="475488">
-                <a:tc>
-                  <a:txBody>
-                    <a:bodyPr/>
-                    <a:lstStyle/>
-                    <a:p>
-                      <a:r>
-                        <a:rPr sz="1100" b="1">
-                          <a:solidFill>
-                            <a:srgbClr val="1A1A1A"/>
-                          </a:solidFill>
-                          <a:latin typeface="Meiryo"/>
-                          <a:ea typeface="Meiryo"/>
-                        </a:rPr>
-                        <a:t>貴社:スタッフ1</a:t>
+              <a:tr h="548640">
+                <a:tc>
+                  <a:txBody>
+                    <a:bodyPr/>
+                    <a:lstStyle/>
+                    <a:p>
+                      <a:r>
+                        <a:rPr sz="1050" b="0">
+                          <a:solidFill>
+                            <a:srgbClr val="1A1A1A"/>
+                          </a:solidFill>
+                          <a:latin typeface="Meiryo"/>
+                          <a:ea typeface="Meiryo"/>
+                        </a:rPr>
+                        <a:t>ヤマダデンキ横浜本店</a:t>
                       </a:r>
                     </a:p>
                   </a:txBody>
@@ -7099,14 +9210,14 @@
                     <a:lstStyle/>
                     <a:p>
                       <a:r>
-                        <a:rPr sz="1100" b="0">
-                          <a:solidFill>
-                            <a:srgbClr val="1A1A1A"/>
-                          </a:solidFill>
-                          <a:latin typeface="Meiryo"/>
-                          <a:ea typeface="Meiryo"/>
-                        </a:rPr>
-                        <a:t>待機列の先頭</a:t>
+                        <a:rPr sz="1050" b="0">
+                          <a:solidFill>
+                            <a:srgbClr val="1A1A1A"/>
+                          </a:solidFill>
+                          <a:latin typeface="Meiryo"/>
+                          <a:ea typeface="Meiryo"/>
+                        </a:rPr>
+                        <a:t>9/26-27 ショー型</a:t>
                       </a:r>
                     </a:p>
                   </a:txBody>
@@ -7122,14 +9233,14 @@
                     <a:lstStyle/>
                     <a:p>
                       <a:r>
-                        <a:rPr sz="1100" b="0">
-                          <a:solidFill>
-                            <a:srgbClr val="1A1A1A"/>
-                          </a:solidFill>
-                          <a:latin typeface="Meiryo"/>
-                          <a:ea typeface="Meiryo"/>
-                        </a:rPr>
-                        <a:t>会場づくり、整理券配布</a:t>
+                        <a:rPr sz="1050" b="0">
+                          <a:solidFill>
+                            <a:srgbClr val="1A1A1A"/>
+                          </a:solidFill>
+                          <a:latin typeface="Meiryo"/>
+                          <a:ea typeface="Meiryo"/>
+                        </a:rPr>
+                        <a:t>テオ&amp;オメガ/ゼット&amp;ジード</a:t>
                       </a:r>
                     </a:p>
                   </a:txBody>
@@ -7139,22 +9250,68 @@
                     </a:solidFill>
                   </a:tcPr>
                 </a:tc>
+                <a:tc>
+                  <a:txBody>
+                    <a:bodyPr/>
+                    <a:lstStyle/>
+                    <a:p>
+                      <a:r>
+                        <a:rPr sz="1050" b="0">
+                          <a:solidFill>
+                            <a:srgbClr val="1A1A1A"/>
+                          </a:solidFill>
+                          <a:latin typeface="Meiryo"/>
+                          <a:ea typeface="Meiryo"/>
+                        </a:rPr>
+                        <a:t>計622名(27日は単日最多227名)</a:t>
+                      </a:r>
+                    </a:p>
+                  </a:txBody>
+                  <a:tcPr anchor="ctr" marL="73152" marR="73152">
+                    <a:solidFill>
+                      <a:srgbClr val="F2F4F6"/>
+                    </a:solidFill>
+                  </a:tcPr>
+                </a:tc>
+                <a:tc>
+                  <a:txBody>
+                    <a:bodyPr/>
+                    <a:lstStyle/>
+                    <a:p>
+                      <a:r>
+                        <a:rPr sz="1050" b="0">
+                          <a:solidFill>
+                            <a:srgbClr val="1A1A1A"/>
+                          </a:solidFill>
+                          <a:latin typeface="Meiryo"/>
+                          <a:ea typeface="Meiryo"/>
+                        </a:rPr>
+                        <a:t>当日朝にレイアウト変更・ステージ屋外化。事前の会場確認が必要</a:t>
+                      </a:r>
+                    </a:p>
+                  </a:txBody>
+                  <a:tcPr anchor="ctr" marL="73152" marR="73152">
+                    <a:solidFill>
+                      <a:srgbClr val="F2F4F6"/>
+                    </a:solidFill>
+                  </a:tcPr>
+                </a:tc>
               </a:tr>
-              <a:tr h="475488">
-                <a:tc>
-                  <a:txBody>
-                    <a:bodyPr/>
-                    <a:lstStyle/>
-                    <a:p>
-                      <a:r>
-                        <a:rPr sz="1100" b="1">
-                          <a:solidFill>
-                            <a:srgbClr val="1A1A1A"/>
-                          </a:solidFill>
-                          <a:latin typeface="Meiryo"/>
-                          <a:ea typeface="Meiryo"/>
-                        </a:rPr>
-                        <a:t>貴社:スタッフ2</a:t>
+              <a:tr h="548640">
+                <a:tc>
+                  <a:txBody>
+                    <a:bodyPr/>
+                    <a:lstStyle/>
+                    <a:p>
+                      <a:r>
+                        <a:rPr sz="1050" b="0">
+                          <a:solidFill>
+                            <a:srgbClr val="1A1A1A"/>
+                          </a:solidFill>
+                          <a:latin typeface="Meiryo"/>
+                          <a:ea typeface="Meiryo"/>
+                        </a:rPr>
+                        <a:t>イトーヨーカドー上永谷</a:t>
                       </a:r>
                     </a:p>
                   </a:txBody>
@@ -7170,14 +9327,14 @@
                     <a:lstStyle/>
                     <a:p>
                       <a:r>
-                        <a:rPr sz="1100" b="0">
-                          <a:solidFill>
-                            <a:srgbClr val="1A1A1A"/>
-                          </a:solidFill>
-                          <a:latin typeface="Meiryo"/>
-                          <a:ea typeface="Meiryo"/>
-                        </a:rPr>
-                        <a:t>出口での送り出し</a:t>
+                        <a:rPr sz="1050" b="0">
+                          <a:solidFill>
+                            <a:srgbClr val="1A1A1A"/>
+                          </a:solidFill>
+                          <a:latin typeface="Meiryo"/>
+                          <a:ea typeface="Meiryo"/>
+                        </a:rPr>
+                        <a:t>9/26-27 撮影会型</a:t>
                       </a:r>
                     </a:p>
                   </a:txBody>
@@ -7193,14 +9350,14 @@
                     <a:lstStyle/>
                     <a:p>
                       <a:r>
-                        <a:rPr sz="1100" b="0">
-                          <a:solidFill>
-                            <a:srgbClr val="1A1A1A"/>
-                          </a:solidFill>
-                          <a:latin typeface="Meiryo"/>
-                          <a:ea typeface="Meiryo"/>
-                        </a:rPr>
-                        <a:t>会場づくり、整理券配布</a:t>
+                        <a:rPr sz="1050" b="0">
+                          <a:solidFill>
+                            <a:srgbClr val="1A1A1A"/>
+                          </a:solidFill>
+                          <a:latin typeface="Meiryo"/>
+                          <a:ea typeface="Meiryo"/>
+                        </a:rPr>
+                        <a:t>ゼロ/ティガ</a:t>
                       </a:r>
                     </a:p>
                   </a:txBody>
@@ -7210,22 +9367,68 @@
                     </a:solidFill>
                   </a:tcPr>
                 </a:tc>
+                <a:tc>
+                  <a:txBody>
+                    <a:bodyPr/>
+                    <a:lstStyle/>
+                    <a:p>
+                      <a:r>
+                        <a:rPr sz="1050" b="0">
+                          <a:solidFill>
+                            <a:srgbClr val="1A1A1A"/>
+                          </a:solidFill>
+                          <a:latin typeface="Meiryo"/>
+                          <a:ea typeface="Meiryo"/>
+                        </a:rPr>
+                        <a:t>計234組(2日・各日5回)</a:t>
+                      </a:r>
+                    </a:p>
+                  </a:txBody>
+                  <a:tcPr anchor="ctr" marL="73152" marR="73152">
+                    <a:solidFill>
+                      <a:srgbClr val="FFFFFF"/>
+                    </a:solidFill>
+                  </a:tcPr>
+                </a:tc>
+                <a:tc>
+                  <a:txBody>
+                    <a:bodyPr/>
+                    <a:lstStyle/>
+                    <a:p>
+                      <a:r>
+                        <a:rPr sz="1050" b="0">
+                          <a:solidFill>
+                            <a:srgbClr val="1A1A1A"/>
+                          </a:solidFill>
+                          <a:latin typeface="Meiryo"/>
+                          <a:ea typeface="Meiryo"/>
+                        </a:rPr>
+                        <a:t>初回上限30組の運用を導入し分散に成功</a:t>
+                      </a:r>
+                    </a:p>
+                  </a:txBody>
+                  <a:tcPr anchor="ctr" marL="73152" marR="73152">
+                    <a:solidFill>
+                      <a:srgbClr val="FFFFFF"/>
+                    </a:solidFill>
+                  </a:tcPr>
+                </a:tc>
               </a:tr>
-              <a:tr h="475488">
-                <a:tc>
-                  <a:txBody>
-                    <a:bodyPr/>
-                    <a:lstStyle/>
-                    <a:p>
-                      <a:r>
-                        <a:rPr sz="1100" b="1">
-                          <a:solidFill>
-                            <a:srgbClr val="1A1A1A"/>
-                          </a:solidFill>
-                          <a:latin typeface="Meiryo"/>
-                          <a:ea typeface="Meiryo"/>
-                        </a:rPr>
-                        <a:t>貴社:スタッフ3</a:t>
+              <a:tr h="548640">
+                <a:tc>
+                  <a:txBody>
+                    <a:bodyPr/>
+                    <a:lstStyle/>
+                    <a:p>
+                      <a:r>
+                        <a:rPr sz="1050" b="0">
+                          <a:solidFill>
+                            <a:srgbClr val="1A1A1A"/>
+                          </a:solidFill>
+                          <a:latin typeface="Meiryo"/>
+                          <a:ea typeface="Meiryo"/>
+                        </a:rPr>
+                        <a:t>港南台バーズ</a:t>
                       </a:r>
                     </a:p>
                   </a:txBody>
@@ -7241,14 +9444,14 @@
                     <a:lstStyle/>
                     <a:p>
                       <a:r>
-                        <a:rPr sz="1100" b="0">
-                          <a:solidFill>
-                            <a:srgbClr val="1A1A1A"/>
-                          </a:solidFill>
-                          <a:latin typeface="Meiryo"/>
-                          <a:ea typeface="Meiryo"/>
-                        </a:rPr>
-                        <a:t>撮影補助(荷物運搬など)</a:t>
+                        <a:rPr sz="1050" b="0">
+                          <a:solidFill>
+                            <a:srgbClr val="1A1A1A"/>
+                          </a:solidFill>
+                          <a:latin typeface="Meiryo"/>
+                          <a:ea typeface="Meiryo"/>
+                        </a:rPr>
+                        <a:t>10/17-18 撮影会型</a:t>
                       </a:r>
                     </a:p>
                   </a:txBody>
@@ -7264,14 +9467,14 @@
                     <a:lstStyle/>
                     <a:p>
                       <a:r>
-                        <a:rPr sz="1100" b="0">
-                          <a:solidFill>
-                            <a:srgbClr val="1A1A1A"/>
-                          </a:solidFill>
-                          <a:latin typeface="Meiryo"/>
-                          <a:ea typeface="Meiryo"/>
-                        </a:rPr>
-                        <a:t>会場づくり、事前の列づくり</a:t>
+                        <a:rPr sz="1050" b="0">
+                          <a:solidFill>
+                            <a:srgbClr val="1A1A1A"/>
+                          </a:solidFill>
+                          <a:latin typeface="Meiryo"/>
+                          <a:ea typeface="Meiryo"/>
+                        </a:rPr>
+                        <a:t>ゼロ/ティガ</a:t>
                       </a:r>
                     </a:p>
                   </a:txBody>
@@ -7281,22 +9484,68 @@
                     </a:solidFill>
                   </a:tcPr>
                 </a:tc>
+                <a:tc>
+                  <a:txBody>
+                    <a:bodyPr/>
+                    <a:lstStyle/>
+                    <a:p>
+                      <a:r>
+                        <a:rPr sz="1050" b="0">
+                          <a:solidFill>
+                            <a:srgbClr val="1A1A1A"/>
+                          </a:solidFill>
+                          <a:latin typeface="Meiryo"/>
+                          <a:ea typeface="Meiryo"/>
+                        </a:rPr>
+                        <a:t>計313名(2日・各日5回)</a:t>
+                      </a:r>
+                    </a:p>
+                  </a:txBody>
+                  <a:tcPr anchor="ctr" marL="73152" marR="73152">
+                    <a:solidFill>
+                      <a:srgbClr val="F2F4F6"/>
+                    </a:solidFill>
+                  </a:tcPr>
+                </a:tc>
+                <a:tc>
+                  <a:txBody>
+                    <a:bodyPr/>
+                    <a:lstStyle/>
+                    <a:p>
+                      <a:r>
+                        <a:rPr sz="1050" b="0">
+                          <a:solidFill>
+                            <a:srgbClr val="1A1A1A"/>
+                          </a:solidFill>
+                          <a:latin typeface="Meiryo"/>
+                          <a:ea typeface="Meiryo"/>
+                        </a:rPr>
+                        <a:t>上限35名/回で終始スムーズ。優良事例</a:t>
+                      </a:r>
+                    </a:p>
+                  </a:txBody>
+                  <a:tcPr anchor="ctr" marL="73152" marR="73152">
+                    <a:solidFill>
+                      <a:srgbClr val="F2F4F6"/>
+                    </a:solidFill>
+                  </a:tcPr>
+                </a:tc>
               </a:tr>
-              <a:tr h="475488">
-                <a:tc>
-                  <a:txBody>
-                    <a:bodyPr/>
-                    <a:lstStyle/>
-                    <a:p>
-                      <a:r>
-                        <a:rPr sz="1100" b="1">
-                          <a:solidFill>
-                            <a:srgbClr val="1A1A1A"/>
-                          </a:solidFill>
-                          <a:latin typeface="Meiryo"/>
-                          <a:ea typeface="Meiryo"/>
-                        </a:rPr>
-                        <a:t>貴社:スタッフ4</a:t>
+              <a:tr h="548640">
+                <a:tc>
+                  <a:txBody>
+                    <a:bodyPr/>
+                    <a:lstStyle/>
+                    <a:p>
+                      <a:r>
+                        <a:rPr sz="1050" b="0">
+                          <a:solidFill>
+                            <a:srgbClr val="1A1A1A"/>
+                          </a:solidFill>
+                          <a:latin typeface="Meiryo"/>
+                          <a:ea typeface="Meiryo"/>
+                        </a:rPr>
+                        <a:t>ヨドバシカメラ横浜</a:t>
                       </a:r>
                     </a:p>
                   </a:txBody>
@@ -7312,14 +9561,14 @@
                     <a:lstStyle/>
                     <a:p>
                       <a:r>
-                        <a:rPr sz="1100" b="0">
-                          <a:solidFill>
-                            <a:srgbClr val="1A1A1A"/>
-                          </a:solidFill>
-                          <a:latin typeface="Meiryo"/>
-                          <a:ea typeface="Meiryo"/>
-                        </a:rPr>
-                        <a:t>待機列の最後尾(参加者管理)</a:t>
+                        <a:rPr sz="1050" b="0">
+                          <a:solidFill>
+                            <a:srgbClr val="1A1A1A"/>
+                          </a:solidFill>
+                          <a:latin typeface="Meiryo"/>
+                          <a:ea typeface="Meiryo"/>
+                        </a:rPr>
+                        <a:t>10/17-18 撮影会型</a:t>
                       </a:r>
                     </a:p>
                   </a:txBody>
@@ -7335,14 +9584,60 @@
                     <a:lstStyle/>
                     <a:p>
                       <a:r>
-                        <a:rPr sz="1100" b="0">
-                          <a:solidFill>
-                            <a:srgbClr val="1A1A1A"/>
-                          </a:solidFill>
-                          <a:latin typeface="Meiryo"/>
-                          <a:ea typeface="Meiryo"/>
-                        </a:rPr>
-                        <a:t>会場づくり、事前の列づくり</a:t>
+                        <a:rPr sz="1050" b="0">
+                          <a:solidFill>
+                            <a:srgbClr val="1A1A1A"/>
+                          </a:solidFill>
+                          <a:latin typeface="Meiryo"/>
+                          <a:ea typeface="Meiryo"/>
+                        </a:rPr>
+                        <a:t>ゼロ/ティガ</a:t>
+                      </a:r>
+                    </a:p>
+                  </a:txBody>
+                  <a:tcPr anchor="ctr" marL="73152" marR="73152">
+                    <a:solidFill>
+                      <a:srgbClr val="FFFFFF"/>
+                    </a:solidFill>
+                  </a:tcPr>
+                </a:tc>
+                <a:tc>
+                  <a:txBody>
+                    <a:bodyPr/>
+                    <a:lstStyle/>
+                    <a:p>
+                      <a:r>
+                        <a:rPr sz="1050" b="0">
+                          <a:solidFill>
+                            <a:srgbClr val="1A1A1A"/>
+                          </a:solidFill>
+                          <a:latin typeface="Meiryo"/>
+                          <a:ea typeface="Meiryo"/>
+                        </a:rPr>
+                        <a:t>計344名(2日・各日5回)</a:t>
+                      </a:r>
+                    </a:p>
+                  </a:txBody>
+                  <a:tcPr anchor="ctr" marL="73152" marR="73152">
+                    <a:solidFill>
+                      <a:srgbClr val="FFFFFF"/>
+                    </a:solidFill>
+                  </a:tcPr>
+                </a:tc>
+                <a:tc>
+                  <a:txBody>
+                    <a:bodyPr/>
+                    <a:lstStyle/>
+                    <a:p>
+                      <a:r>
+                        <a:rPr sz="1050" b="0">
+                          <a:solidFill>
+                            <a:srgbClr val="1A1A1A"/>
+                          </a:solidFill>
+                          <a:latin typeface="Meiryo"/>
+                          <a:ea typeface="Meiryo"/>
+                        </a:rPr>
+                        <a:t>MC不在でルール共有不足。受取場所を店舗内に変更し見積取得増</a:t>
                       </a:r>
                     </a:p>
                   </a:txBody>
@@ -7365,8 +9660,8 @@
         </p:nvSpPr>
         <p:spPr>
           <a:xfrm>
-            <a:off x="640080" y="5349240"/>
-            <a:ext cx="10881360" cy="1005840"/>
+            <a:off x="640080" y="5897880"/>
+            <a:ext cx="10881360" cy="457200"/>
           </a:xfrm>
           <a:prstGeom prst="rect">
             <a:avLst/>
@@ -7381,52 +9676,18 @@
           <a:p>
             <a:pPr algn="l">
               <a:spcAft>
-                <a:spcPts val="400"/>
+                <a:spcPts val="500"/>
               </a:spcAft>
             </a:pPr>
             <a:r>
-              <a:rPr sz="1100" b="0">
+              <a:rPr sz="1100" b="1">
                 <a:solidFill>
-                  <a:srgbClr val="1A1A1A"/>
+                  <a:srgbClr val="232278"/>
                 </a:solidFill>
                 <a:latin typeface="Meiryo"/>
                 <a:ea typeface="Meiryo"/>
               </a:rPr>
-              <a:t>・費用を抑えた体制で品質を担保するための最低人数です。撮影会中と合間で持ち場が切り替わるため、運営スタッフは4名が必要となります</a:t>
-            </a:r>
-          </a:p>
-          <a:p>
-            <a:pPr algn="l">
-              <a:spcAft>
-                <a:spcPts val="400"/>
-              </a:spcAft>
-            </a:pPr>
-            <a:r>
-              <a:rPr sz="1100" b="0">
-                <a:solidFill>
-                  <a:srgbClr val="1A1A1A"/>
-                </a:solidFill>
-                <a:latin typeface="Meiryo"/>
-                <a:ea typeface="Meiryo"/>
-              </a:rPr>
-              <a:t>・運営スタッフはスタッフと分かる服装(スタッフTシャツ・ベスト等)の着用をお願いします　・初回開催時は当社がレクチャーを実施し、運営マニュアルをご提供します</a:t>
-            </a:r>
-          </a:p>
-          <a:p>
-            <a:pPr algn="l">
-              <a:spcAft>
-                <a:spcPts val="400"/>
-              </a:spcAft>
-            </a:pPr>
-            <a:r>
-              <a:rPr sz="1100" b="0">
-                <a:solidFill>
-                  <a:srgbClr val="1A1A1A"/>
-                </a:solidFill>
-                <a:latin typeface="Meiryo"/>
-                <a:ea typeface="Meiryo"/>
-              </a:rPr>
-              <a:t>・貴社での運営が難しい会場向けに、当社が運営一式を手配するフル運営オプション(+22万円/日)を会場単位でご用意します</a:t>
+              <a:t>総括:店舗・スペースに応じた枠数調整(30〜35名/回)と事前の会場ブリーフィングが成功の鍵。MC配置と「商談・アンケート目的」の事前告知を全店ルール化することが急務</a:t>
             </a:r>
           </a:p>
         </p:txBody>
@@ -7508,7 +9769,7 @@
                 <a:latin typeface="Meiryo"/>
                 <a:ea typeface="Meiryo"/>
               </a:rPr>
-              <a:t>2. 貴社にお願いしたい体制・分担</a:t>
+              <a:t>2. 本格実施の役割分担</a:t>
             </a:r>
           </a:p>
         </p:txBody>
@@ -7548,7 +9809,7 @@
                 <a:latin typeface="Meiryo"/>
                 <a:ea typeface="Meiryo"/>
               </a:rPr>
-              <a:t>全国展開を円滑に進めるため、以下の体制・分担をお願いいたします</a:t>
+              <a:t>当社はキャラクター稼働パート(2名)、貴社は会場運営パート(運営ディレクター1名+運営スタッフ4名)をご担当いただきます</a:t>
             </a:r>
           </a:p>
         </p:txBody>
@@ -7683,7 +9944,7 @@
         </p:nvGraphicFramePr>
         <p:xfrm>
           <a:off x="640080" y="1417320"/>
-          <a:ext cx="10881359" cy="4389120"/>
+          <a:ext cx="10881359" cy="3803904"/>
         </p:xfrm>
         <a:graphic>
           <a:graphicData uri="http://schemas.openxmlformats.org/drawingml/2006/table">
@@ -7692,11 +9953,11 @@
                 <a:tableStyleId>{5C22544A-7EE6-4342-B048-85BDC9FD1C3A}</a:tableStyleId>
               </a:tblPr>
               <a:tblGrid>
-                <a:gridCol w="2538983"/>
-                <a:gridCol w="6528816"/>
-                <a:gridCol w="1813560"/>
+                <a:gridCol w="2675744"/>
+                <a:gridCol w="4637956"/>
+                <a:gridCol w="3567659"/>
               </a:tblGrid>
-              <a:tr h="548640">
+              <a:tr h="475488">
                 <a:tc>
                   <a:txBody>
                     <a:bodyPr/>
@@ -7710,7 +9971,7 @@
                           <a:latin typeface="Meiryo"/>
                           <a:ea typeface="Meiryo"/>
                         </a:rPr>
-                        <a:t>区分</a:t>
+                        <a:t>役割</a:t>
                       </a:r>
                     </a:p>
                   </a:txBody>
@@ -7733,7 +9994,7 @@
                           <a:latin typeface="Meiryo"/>
                           <a:ea typeface="Meiryo"/>
                         </a:rPr>
-                        <a:t>お願いしたい内容</a:t>
+                        <a:t>撮影会中</a:t>
                       </a:r>
                     </a:p>
                   </a:txBody>
@@ -7756,7 +10017,7 @@
                           <a:latin typeface="Meiryo"/>
                           <a:ea typeface="Meiryo"/>
                         </a:rPr>
-                        <a:t>テストでの実績</a:t>
+                        <a:t>撮影会の合間・開始前</a:t>
                       </a:r>
                     </a:p>
                   </a:txBody>
@@ -7767,7 +10028,7 @@
                   </a:tcPr>
                 </a:tc>
               </a:tr>
-              <a:tr h="548640">
+              <a:tr h="475488">
                 <a:tc>
                   <a:txBody>
                     <a:bodyPr/>
@@ -7776,12 +10037,12 @@
                       <a:r>
                         <a:rPr sz="1100" b="1">
                           <a:solidFill>
-                            <a:srgbClr val="1A1A1A"/>
-                          </a:solidFill>
-                          <a:latin typeface="Meiryo"/>
-                          <a:ea typeface="Meiryo"/>
-                        </a:rPr>
-                        <a:t>取りまとめ窓口</a:t>
+                            <a:srgbClr val="232278"/>
+                          </a:solidFill>
+                          <a:latin typeface="Meiryo"/>
+                          <a:ea typeface="Meiryo"/>
+                        </a:rPr>
+                        <a:t>当社:担当(チーフスタッフ)</a:t>
                       </a:r>
                     </a:p>
                   </a:txBody>
@@ -7804,7 +10065,7 @@
                           <a:latin typeface="Meiryo"/>
                           <a:ea typeface="Meiryo"/>
                         </a:rPr>
-                        <a:t>貴社内に全国の実施を取りまとめるご担当窓口(1部署)を設置。各会場への展開・情報共有・当社との一本化した連絡</a:t>
+                        <a:t>キャラクター稼働の統括、着脱補助・スーツメンテナンス、ヒーロー前のお客様対応</a:t>
                       </a:r>
                     </a:p>
                   </a:txBody>
@@ -7827,7 +10088,7 @@
                           <a:latin typeface="Meiryo"/>
                           <a:ea typeface="Meiryo"/>
                         </a:rPr>
-                        <a:t>新規</a:t>
+                        <a:t>スーツメンテナンス、貴社ディレクターとの進行確認</a:t>
                       </a:r>
                     </a:p>
                   </a:txBody>
@@ -7838,7 +10099,7 @@
                   </a:tcPr>
                 </a:tc>
               </a:tr>
-              <a:tr h="548640">
+              <a:tr h="475488">
                 <a:tc>
                   <a:txBody>
                     <a:bodyPr/>
@@ -7847,12 +10108,12 @@
                       <a:r>
                         <a:rPr sz="1100" b="1">
                           <a:solidFill>
-                            <a:srgbClr val="1A1A1A"/>
-                          </a:solidFill>
-                          <a:latin typeface="Meiryo"/>
-                          <a:ea typeface="Meiryo"/>
-                        </a:rPr>
-                        <a:t>開催申請</a:t>
+                            <a:srgbClr val="232278"/>
+                          </a:solidFill>
+                          <a:latin typeface="Meiryo"/>
+                          <a:ea typeface="Meiryo"/>
+                        </a:rPr>
+                        <a:t>当社:スーツアクター</a:t>
                       </a:r>
                     </a:p>
                   </a:txBody>
@@ -7875,7 +10136,7 @@
                           <a:latin typeface="Meiryo"/>
                           <a:ea typeface="Meiryo"/>
                         </a:rPr>
-                        <a:t>専用フォームで申請→前月1日に可否確定→確認書の取り交わし(会場は1ヶ月前までに確定)</a:t>
+                        <a:t>キャラクター出演・ポージング(1回30分×最大5回)</a:t>
                       </a:r>
                     </a:p>
                   </a:txBody>
@@ -7898,7 +10159,7 @@
                           <a:latin typeface="Meiryo"/>
                           <a:ea typeface="Meiryo"/>
                         </a:rPr>
-                        <a:t>新規</a:t>
+                        <a:t>メンテナンス休憩</a:t>
                       </a:r>
                     </a:p>
                   </a:txBody>
@@ -7909,7 +10170,7 @@
                   </a:tcPr>
                 </a:tc>
               </a:tr>
-              <a:tr h="548640">
+              <a:tr h="475488">
                 <a:tc>
                   <a:txBody>
                     <a:bodyPr/>
@@ -7923,7 +10184,7 @@
                           <a:latin typeface="Meiryo"/>
                           <a:ea typeface="Meiryo"/>
                         </a:rPr>
-                        <a:t>運営計画・実施確認書</a:t>
+                        <a:t>貴社:運営ディレクター</a:t>
                       </a:r>
                     </a:p>
                   </a:txBody>
@@ -7946,7 +10207,7 @@
                           <a:latin typeface="Meiryo"/>
                           <a:ea typeface="Meiryo"/>
                         </a:rPr>
-                        <a:t>会場ごとの運営計画・実施確認書を貴社にて作成(当社テンプレートをご提供)</a:t>
+                        <a:t>全体管理、音響機材のセット・音出し、館管理者との対応、会場周辺のお客様誘導</a:t>
                       </a:r>
                     </a:p>
                   </a:txBody>
@@ -7969,7 +10230,7 @@
                           <a:latin typeface="Meiryo"/>
                           <a:ea typeface="Meiryo"/>
                         </a:rPr>
-                        <a:t>新規(テストは当社作成)</a:t>
+                        <a:t>会場づくり、お客様対応</a:t>
                       </a:r>
                     </a:p>
                   </a:txBody>
@@ -7980,7 +10241,7 @@
                   </a:tcPr>
                 </a:tc>
               </a:tr>
-              <a:tr h="548640">
+              <a:tr h="475488">
                 <a:tc>
                   <a:txBody>
                     <a:bodyPr/>
@@ -7994,7 +10255,7 @@
                           <a:latin typeface="Meiryo"/>
                           <a:ea typeface="Meiryo"/>
                         </a:rPr>
-                        <a:t>制作物の仮申請</a:t>
+                        <a:t>貴社:スタッフ1</a:t>
                       </a:r>
                     </a:p>
                   </a:txBody>
@@ -8017,7 +10278,7 @@
                           <a:latin typeface="Meiryo"/>
                           <a:ea typeface="Meiryo"/>
                         </a:rPr>
-                        <a:t>イベントキット・ノベルティ等は品目ごとに仮申請(備品/配布用の区分を明記)。申請窓口はご担当1名に集約</a:t>
+                        <a:t>待機列の先頭</a:t>
                       </a:r>
                     </a:p>
                   </a:txBody>
@@ -8040,7 +10301,7 @@
                           <a:latin typeface="Meiryo"/>
                           <a:ea typeface="Meiryo"/>
                         </a:rPr>
-                        <a:t>新規</a:t>
+                        <a:t>会場づくり、整理券配布</a:t>
                       </a:r>
                     </a:p>
                   </a:txBody>
@@ -8051,7 +10312,7 @@
                   </a:tcPr>
                 </a:tc>
               </a:tr>
-              <a:tr h="548640">
+              <a:tr h="475488">
                 <a:tc>
                   <a:txBody>
                     <a:bodyPr/>
@@ -8065,7 +10326,7 @@
                           <a:latin typeface="Meiryo"/>
                           <a:ea typeface="Meiryo"/>
                         </a:rPr>
-                        <a:t>運営サイン・音響・設営</a:t>
+                        <a:t>貴社:スタッフ2</a:t>
                       </a:r>
                     </a:p>
                   </a:txBody>
@@ -8088,7 +10349,7 @@
                           <a:latin typeface="Meiryo"/>
                           <a:ea typeface="Meiryo"/>
                         </a:rPr>
-                        <a:t>会場内サイン、音響機材の手配とオペレーション、イベントキット設営・会場復帰</a:t>
+                        <a:t>出口での送り出し</a:t>
                       </a:r>
                     </a:p>
                   </a:txBody>
@@ -8111,7 +10372,7 @@
                           <a:latin typeface="Meiryo"/>
                           <a:ea typeface="Meiryo"/>
                         </a:rPr>
-                        <a:t>✓ 対応済み</a:t>
+                        <a:t>会場づくり、整理券配布</a:t>
                       </a:r>
                     </a:p>
                   </a:txBody>
@@ -8122,7 +10383,7 @@
                   </a:tcPr>
                 </a:tc>
               </a:tr>
-              <a:tr h="548640">
+              <a:tr h="475488">
                 <a:tc>
                   <a:txBody>
                     <a:bodyPr/>
@@ -8136,7 +10397,7 @@
                           <a:latin typeface="Meiryo"/>
                           <a:ea typeface="Meiryo"/>
                         </a:rPr>
-                        <a:t>整理券・告知素材・実施報告</a:t>
+                        <a:t>貴社:スタッフ3</a:t>
                       </a:r>
                     </a:p>
                   </a:txBody>
@@ -8159,7 +10420,7 @@
                           <a:latin typeface="Meiryo"/>
                           <a:ea typeface="Meiryo"/>
                         </a:rPr>
-                        <a:t>整理券・列形成備品、HP掲載用テキスト・画像(当社監修)、参加人数等の実施報告</a:t>
+                        <a:t>撮影補助(荷物運搬など)</a:t>
                       </a:r>
                     </a:p>
                   </a:txBody>
@@ -8182,7 +10443,7 @@
                           <a:latin typeface="Meiryo"/>
                           <a:ea typeface="Meiryo"/>
                         </a:rPr>
-                        <a:t>✓ 対応済み</a:t>
+                        <a:t>会場づくり、事前の列づくり</a:t>
                       </a:r>
                     </a:p>
                   </a:txBody>
@@ -8193,7 +10454,7 @@
                   </a:tcPr>
                 </a:tc>
               </a:tr>
-              <a:tr h="548640">
+              <a:tr h="475488">
                 <a:tc>
                   <a:txBody>
                     <a:bodyPr/>
@@ -8207,7 +10468,7 @@
                           <a:latin typeface="Meiryo"/>
                           <a:ea typeface="Meiryo"/>
                         </a:rPr>
-                        <a:t>会場要件・その他</a:t>
+                        <a:t>貴社:スタッフ4</a:t>
                       </a:r>
                     </a:p>
                   </a:txBody>
@@ -8230,7 +10491,7 @@
                           <a:latin typeface="Meiryo"/>
                           <a:ea typeface="Meiryo"/>
                         </a:rPr>
-                        <a:t>施錠可能な非公開控室・関係車両用駐車場/JASRAC申請・イベント保険(主催者様にて)</a:t>
+                        <a:t>待機列の最後尾(参加者管理)</a:t>
                       </a:r>
                     </a:p>
                   </a:txBody>
@@ -8253,7 +10514,7 @@
                           <a:latin typeface="Meiryo"/>
                           <a:ea typeface="Meiryo"/>
                         </a:rPr>
-                        <a:t>✓ 対応済み</a:t>
+                        <a:t>会場づくり、事前の列づくり</a:t>
                       </a:r>
                     </a:p>
                   </a:txBody>
@@ -8268,6 +10529,80 @@
           </a:graphicData>
         </a:graphic>
       </p:graphicFrame>
+      <p:sp>
+        <p:nvSpPr>
+          <p:cNvPr id="9" name="TextBox 8"/>
+          <p:cNvSpPr txBox="1"/>
+          <p:nvPr/>
+        </p:nvSpPr>
+        <p:spPr>
+          <a:xfrm>
+            <a:off x="640080" y="5349240"/>
+            <a:ext cx="10881360" cy="1005840"/>
+          </a:xfrm>
+          <a:prstGeom prst="rect">
+            <a:avLst/>
+          </a:prstGeom>
+          <a:noFill/>
+        </p:spPr>
+        <p:txBody>
+          <a:bodyPr wrap="square" anchor="t" lIns="0" rIns="0" tIns="0" bIns="0">
+            <a:spAutoFit/>
+          </a:bodyPr>
+          <a:lstStyle/>
+          <a:p>
+            <a:pPr algn="l">
+              <a:spcAft>
+                <a:spcPts val="400"/>
+              </a:spcAft>
+            </a:pPr>
+            <a:r>
+              <a:rPr sz="1100" b="0">
+                <a:solidFill>
+                  <a:srgbClr val="1A1A1A"/>
+                </a:solidFill>
+                <a:latin typeface="Meiryo"/>
+                <a:ea typeface="Meiryo"/>
+              </a:rPr>
+              <a:t>・費用を抑えた体制で品質を担保するための最低人数です。撮影会中と合間で持ち場が切り替わるため、運営スタッフは4名が必要となります</a:t>
+            </a:r>
+          </a:p>
+          <a:p>
+            <a:pPr algn="l">
+              <a:spcAft>
+                <a:spcPts val="400"/>
+              </a:spcAft>
+            </a:pPr>
+            <a:r>
+              <a:rPr sz="1100" b="0">
+                <a:solidFill>
+                  <a:srgbClr val="1A1A1A"/>
+                </a:solidFill>
+                <a:latin typeface="Meiryo"/>
+                <a:ea typeface="Meiryo"/>
+              </a:rPr>
+              <a:t>・運営スタッフはスタッフと分かる服装(スタッフTシャツ・ベスト等)の着用をお願いします　・初回開催時は当社がレクチャーを実施し、運営マニュアルをご提供します</a:t>
+            </a:r>
+          </a:p>
+          <a:p>
+            <a:pPr algn="l">
+              <a:spcAft>
+                <a:spcPts val="400"/>
+              </a:spcAft>
+            </a:pPr>
+            <a:r>
+              <a:rPr sz="1100" b="0">
+                <a:solidFill>
+                  <a:srgbClr val="1A1A1A"/>
+                </a:solidFill>
+                <a:latin typeface="Meiryo"/>
+                <a:ea typeface="Meiryo"/>
+              </a:rPr>
+              <a:t>・MC役(ルール案内・進行アナウンス)は貴社運営ディレクターが兼務、または当社MCオプション(+3万円/日)をご利用ください。運営一式を当社が手配するフル運営オプション(+22万円/日)も会場単位でご用意します</a:t>
+            </a:r>
+          </a:p>
+        </p:txBody>
+      </p:sp>
     </p:spTree>
   </p:cSld>
   <p:clrMapOvr>
@@ -8345,7 +10680,7 @@
                 <a:latin typeface="Meiryo"/>
                 <a:ea typeface="Meiryo"/>
               </a:rPr>
-              <a:t>2. 連絡体制と回答リードタイム</a:t>
+              <a:t>2. 貴社にお願いしたい体制・分担</a:t>
             </a:r>
           </a:p>
         </p:txBody>
@@ -8385,7 +10720,7 @@
                 <a:latin typeface="Meiryo"/>
                 <a:ea typeface="Meiryo"/>
               </a:rPr>
-              <a:t>貴社の取りまとめ窓口と当社の総合窓口を1対1でつなぎ、当社内で用件別に振り分けます</a:t>
+              <a:t>全国展開を円滑に進めるため、以下の体制・分担をお願いいたします</a:t>
             </a:r>
           </a:p>
         </p:txBody>
@@ -8510,265 +10845,17 @@
           </a:p>
         </p:txBody>
       </p:sp>
-      <p:sp>
-        <p:nvSpPr>
-          <p:cNvPr id="8" name="Rounded Rectangle 7"/>
-          <p:cNvSpPr/>
-          <p:nvPr/>
-        </p:nvSpPr>
-        <p:spPr>
-          <a:xfrm>
-            <a:off x="4023360" y="1463040"/>
-            <a:ext cx="4114800" cy="640080"/>
-          </a:xfrm>
-          <a:prstGeom prst="roundRect">
-            <a:avLst/>
-          </a:prstGeom>
-          <a:solidFill>
-            <a:srgbClr val="232278"/>
-          </a:solidFill>
-          <a:ln>
-            <a:noFill/>
-          </a:ln>
-          <a:effectLst/>
-        </p:spPr>
-        <p:style>
-          <a:lnRef idx="1">
-            <a:schemeClr val="accent1"/>
-          </a:lnRef>
-          <a:fillRef idx="3">
-            <a:schemeClr val="accent1"/>
-          </a:fillRef>
-          <a:effectRef idx="2">
-            <a:schemeClr val="accent1"/>
-          </a:effectRef>
-          <a:fontRef idx="minor">
-            <a:schemeClr val="lt1"/>
-          </a:fontRef>
-        </p:style>
-        <p:txBody>
-          <a:bodyPr rtlCol="0" anchor="ctr"/>
-          <a:lstStyle/>
-          <a:p>
-            <a:pPr algn="ctr"/>
-          </a:p>
-        </p:txBody>
-      </p:sp>
-      <p:sp>
-        <p:nvSpPr>
-          <p:cNvPr id="9" name="TextBox 8"/>
-          <p:cNvSpPr txBox="1"/>
-          <p:nvPr/>
-        </p:nvSpPr>
-        <p:spPr>
-          <a:xfrm>
-            <a:off x="4023360" y="1463040"/>
-            <a:ext cx="4114800" cy="640080"/>
-          </a:xfrm>
-          <a:prstGeom prst="rect">
-            <a:avLst/>
-          </a:prstGeom>
-          <a:noFill/>
-        </p:spPr>
-        <p:txBody>
-          <a:bodyPr wrap="square" anchor="ctr" lIns="0" rIns="0" tIns="0" bIns="0">
-            <a:spAutoFit/>
-          </a:bodyPr>
-          <a:lstStyle/>
-          <a:p>
-            <a:pPr algn="ctr">
-              <a:spcAft>
-                <a:spcPts val="500"/>
-              </a:spcAft>
-            </a:pPr>
-            <a:r>
-              <a:rPr sz="1300" b="1">
-                <a:solidFill>
-                  <a:srgbClr val="FFFFFF"/>
-                </a:solidFill>
-                <a:latin typeface="Meiryo"/>
-                <a:ea typeface="Meiryo"/>
-              </a:rPr>
-              <a:t>ソフトバンク様 取りまとめ窓口(1部署)</a:t>
-            </a:r>
-          </a:p>
-        </p:txBody>
-      </p:sp>
-      <p:sp>
-        <p:nvSpPr>
-          <p:cNvPr id="10" name="TextBox 9"/>
-          <p:cNvSpPr txBox="1"/>
-          <p:nvPr/>
-        </p:nvSpPr>
-        <p:spPr>
-          <a:xfrm>
-            <a:off x="4023360" y="2148840"/>
-            <a:ext cx="4114800" cy="320040"/>
-          </a:xfrm>
-          <a:prstGeom prst="rect">
-            <a:avLst/>
-          </a:prstGeom>
-          <a:noFill/>
-        </p:spPr>
-        <p:txBody>
-          <a:bodyPr wrap="square" anchor="t" lIns="0" rIns="0" tIns="0" bIns="0">
-            <a:spAutoFit/>
-          </a:bodyPr>
-          <a:lstStyle/>
-          <a:p>
-            <a:pPr algn="ctr">
-              <a:spcAft>
-                <a:spcPts val="500"/>
-              </a:spcAft>
-            </a:pPr>
-            <a:r>
-              <a:rPr sz="1200" b="1">
-                <a:solidFill>
-                  <a:srgbClr val="5A626B"/>
-                </a:solidFill>
-                <a:latin typeface="Meiryo"/>
-                <a:ea typeface="Meiryo"/>
-              </a:rPr>
-              <a:t>↓ 連絡　↑ 回答</a:t>
-            </a:r>
-          </a:p>
-        </p:txBody>
-      </p:sp>
-      <p:sp>
-        <p:nvSpPr>
-          <p:cNvPr id="11" name="Rounded Rectangle 10"/>
-          <p:cNvSpPr/>
-          <p:nvPr/>
-        </p:nvSpPr>
-        <p:spPr>
-          <a:xfrm>
-            <a:off x="4023360" y="2468880"/>
-            <a:ext cx="4114800" cy="640080"/>
-          </a:xfrm>
-          <a:prstGeom prst="roundRect">
-            <a:avLst/>
-          </a:prstGeom>
-          <a:solidFill>
-            <a:srgbClr val="1F338C"/>
-          </a:solidFill>
-          <a:ln>
-            <a:noFill/>
-          </a:ln>
-          <a:effectLst/>
-        </p:spPr>
-        <p:style>
-          <a:lnRef idx="1">
-            <a:schemeClr val="accent1"/>
-          </a:lnRef>
-          <a:fillRef idx="3">
-            <a:schemeClr val="accent1"/>
-          </a:fillRef>
-          <a:effectRef idx="2">
-            <a:schemeClr val="accent1"/>
-          </a:effectRef>
-          <a:fontRef idx="minor">
-            <a:schemeClr val="lt1"/>
-          </a:fontRef>
-        </p:style>
-        <p:txBody>
-          <a:bodyPr rtlCol="0" anchor="ctr"/>
-          <a:lstStyle/>
-          <a:p>
-            <a:pPr algn="ctr"/>
-          </a:p>
-        </p:txBody>
-      </p:sp>
-      <p:sp>
-        <p:nvSpPr>
-          <p:cNvPr id="12" name="TextBox 11"/>
-          <p:cNvSpPr txBox="1"/>
-          <p:nvPr/>
-        </p:nvSpPr>
-        <p:spPr>
-          <a:xfrm>
-            <a:off x="4023360" y="2468880"/>
-            <a:ext cx="4114800" cy="640080"/>
-          </a:xfrm>
-          <a:prstGeom prst="rect">
-            <a:avLst/>
-          </a:prstGeom>
-          <a:noFill/>
-        </p:spPr>
-        <p:txBody>
-          <a:bodyPr wrap="square" anchor="ctr" lIns="0" rIns="0" tIns="0" bIns="0">
-            <a:spAutoFit/>
-          </a:bodyPr>
-          <a:lstStyle/>
-          <a:p>
-            <a:pPr algn="ctr">
-              <a:spcAft>
-                <a:spcPts val="500"/>
-              </a:spcAft>
-            </a:pPr>
-            <a:r>
-              <a:rPr sz="1300" b="1">
-                <a:solidFill>
-                  <a:srgbClr val="FFFFFF"/>
-                </a:solidFill>
-                <a:latin typeface="Meiryo"/>
-                <a:ea typeface="Meiryo"/>
-              </a:rPr>
-              <a:t>円谷プロ 総合窓口(専用メーリングリスト)</a:t>
-            </a:r>
-          </a:p>
-        </p:txBody>
-      </p:sp>
-      <p:sp>
-        <p:nvSpPr>
-          <p:cNvPr id="13" name="TextBox 12"/>
-          <p:cNvSpPr txBox="1"/>
-          <p:nvPr/>
-        </p:nvSpPr>
-        <p:spPr>
-          <a:xfrm>
-            <a:off x="640080" y="3154680"/>
-            <a:ext cx="10881360" cy="320040"/>
-          </a:xfrm>
-          <a:prstGeom prst="rect">
-            <a:avLst/>
-          </a:prstGeom>
-          <a:noFill/>
-        </p:spPr>
-        <p:txBody>
-          <a:bodyPr wrap="square" anchor="t" lIns="0" rIns="0" tIns="0" bIns="0">
-            <a:spAutoFit/>
-          </a:bodyPr>
-          <a:lstStyle/>
-          <a:p>
-            <a:pPr algn="ctr">
-              <a:spcAft>
-                <a:spcPts val="500"/>
-              </a:spcAft>
-            </a:pPr>
-            <a:r>
-              <a:rPr sz="1100" b="0">
-                <a:solidFill>
-                  <a:srgbClr val="5A626B"/>
-                </a:solidFill>
-                <a:latin typeface="Meiryo"/>
-                <a:ea typeface="Meiryo"/>
-              </a:rPr>
-              <a:t>当社内で用件別に振り分け</a:t>
-            </a:r>
-          </a:p>
-        </p:txBody>
-      </p:sp>
       <p:graphicFrame>
         <p:nvGraphicFramePr>
-          <p:cNvPr id="14" name="Table 13"/>
+          <p:cNvPr id="8" name="Table 7"/>
           <p:cNvGraphicFramePr>
             <a:graphicFrameLocks noGrp="1"/>
           </p:cNvGraphicFramePr>
           <p:nvPr/>
         </p:nvGraphicFramePr>
         <p:xfrm>
-          <a:off x="640080" y="3520440"/>
-          <a:ext cx="10881360" cy="2514600"/>
+          <a:off x="640080" y="1417320"/>
+          <a:ext cx="10881359" cy="4389120"/>
         </p:xfrm>
         <a:graphic>
           <a:graphicData uri="http://schemas.openxmlformats.org/drawingml/2006/table">
@@ -8777,11 +10864,11 @@
                 <a:tableStyleId>{5C22544A-7EE6-4342-B048-85BDC9FD1C3A}</a:tableStyleId>
               </a:tblPr>
               <a:tblGrid>
-                <a:gridCol w="2020824"/>
-                <a:gridCol w="5440680"/>
-                <a:gridCol w="3419856"/>
+                <a:gridCol w="2538983"/>
+                <a:gridCol w="6528816"/>
+                <a:gridCol w="1813560"/>
               </a:tblGrid>
-              <a:tr h="502920">
+              <a:tr h="548640">
                 <a:tc>
                   <a:txBody>
                     <a:bodyPr/>
@@ -8795,7 +10882,7 @@
                           <a:latin typeface="Meiryo"/>
                           <a:ea typeface="Meiryo"/>
                         </a:rPr>
-                        <a:t>窓口</a:t>
+                        <a:t>区分</a:t>
                       </a:r>
                     </a:p>
                   </a:txBody>
@@ -8818,7 +10905,7 @@
                           <a:latin typeface="Meiryo"/>
                           <a:ea typeface="Meiryo"/>
                         </a:rPr>
-                        <a:t>用件</a:t>
+                        <a:t>お願いしたい内容</a:t>
                       </a:r>
                     </a:p>
                   </a:txBody>
@@ -8841,7 +10928,7 @@
                           <a:latin typeface="Meiryo"/>
                           <a:ea typeface="Meiryo"/>
                         </a:rPr>
-                        <a:t>回答の目安</a:t>
+                        <a:t>テストでの実績</a:t>
                       </a:r>
                     </a:p>
                   </a:txBody>
@@ -8852,7 +10939,7 @@
                   </a:tcPr>
                 </a:tc>
               </a:tr>
-              <a:tr h="502920">
+              <a:tr h="548640">
                 <a:tc>
                   <a:txBody>
                     <a:bodyPr/>
@@ -8866,7 +10953,7 @@
                           <a:latin typeface="Meiryo"/>
                           <a:ea typeface="Meiryo"/>
                         </a:rPr>
-                        <a:t>① イベント実施</a:t>
+                        <a:t>取りまとめ窓口</a:t>
                       </a:r>
                     </a:p>
                   </a:txBody>
@@ -8889,7 +10976,7 @@
                           <a:latin typeface="Meiryo"/>
                           <a:ea typeface="Meiryo"/>
                         </a:rPr>
-                        <a:t>開催申請(エリア・会場・日程)のバッティング確認/実施確認書の確認</a:t>
+                        <a:t>貴社内に全国の実施を取りまとめるご担当窓口(1部署)を設置。各会場への展開・情報共有・当社との一本化した連絡</a:t>
                       </a:r>
                     </a:p>
                   </a:txBody>
@@ -8912,7 +10999,7 @@
                           <a:latin typeface="Meiryo"/>
                           <a:ea typeface="Meiryo"/>
                         </a:rPr>
-                        <a:t>5営業日(前月1日までに確定)</a:t>
+                        <a:t>新規</a:t>
                       </a:r>
                     </a:p>
                   </a:txBody>
@@ -8923,7 +11010,7 @@
                   </a:tcPr>
                 </a:tc>
               </a:tr>
-              <a:tr h="502920">
+              <a:tr h="548640">
                 <a:tc>
                   <a:txBody>
                     <a:bodyPr/>
@@ -8937,7 +11024,7 @@
                           <a:latin typeface="Meiryo"/>
                           <a:ea typeface="Meiryo"/>
                         </a:rPr>
-                        <a:t>② 告知物</a:t>
+                        <a:t>開催申請</a:t>
                       </a:r>
                     </a:p>
                   </a:txBody>
@@ -8960,7 +11047,7 @@
                           <a:latin typeface="Meiryo"/>
                           <a:ea typeface="Meiryo"/>
                         </a:rPr>
-                        <a:t>告知物(KV・Web・チラシ等)の監修</a:t>
+                        <a:t>専用フォームで申請→前月1日に可否確定→確認書の取り交わし(会場は1ヶ月前までに確定)</a:t>
                       </a:r>
                     </a:p>
                   </a:txBody>
@@ -8983,7 +11070,7 @@
                           <a:latin typeface="Meiryo"/>
                           <a:ea typeface="Meiryo"/>
                         </a:rPr>
-                        <a:t>KV 3営業日/Web流用 1〜2営業日/チラシ+色校 1〜2営業日</a:t>
+                        <a:t>新規</a:t>
                       </a:r>
                     </a:p>
                   </a:txBody>
@@ -8994,7 +11081,7 @@
                   </a:tcPr>
                 </a:tc>
               </a:tr>
-              <a:tr h="502920">
+              <a:tr h="548640">
                 <a:tc>
                   <a:txBody>
                     <a:bodyPr/>
@@ -9008,7 +11095,7 @@
                           <a:latin typeface="Meiryo"/>
                           <a:ea typeface="Meiryo"/>
                         </a:rPr>
-                        <a:t>③ 制作物</a:t>
+                        <a:t>運営計画・実施確認書</a:t>
                       </a:r>
                     </a:p>
                   </a:txBody>
@@ -9031,7 +11118,7 @@
                           <a:latin typeface="Meiryo"/>
                           <a:ea typeface="Meiryo"/>
                         </a:rPr>
-                        <a:t>仮申請(制作可否)/ノベルティ・キット・その他制作物のデザイン監修</a:t>
+                        <a:t>会場ごとの運営計画・実施確認書を貴社にて作成(当社テンプレートをご提供)</a:t>
                       </a:r>
                     </a:p>
                   </a:txBody>
@@ -9054,7 +11141,7 @@
                           <a:latin typeface="Meiryo"/>
                           <a:ea typeface="Meiryo"/>
                         </a:rPr>
-                        <a:t>仮申請 約5営業日/デザイン監修 5営業日</a:t>
+                        <a:t>新規(テストは当社作成)</a:t>
                       </a:r>
                     </a:p>
                   </a:txBody>
@@ -9065,7 +11152,7 @@
                   </a:tcPr>
                 </a:tc>
               </a:tr>
-              <a:tr h="502920">
+              <a:tr h="548640">
                 <a:tc>
                   <a:txBody>
                     <a:bodyPr/>
@@ -9079,7 +11166,7 @@
                           <a:latin typeface="Meiryo"/>
                           <a:ea typeface="Meiryo"/>
                         </a:rPr>
-                        <a:t>④ 契約・精算</a:t>
+                        <a:t>制作物の仮申請</a:t>
                       </a:r>
                     </a:p>
                   </a:txBody>
@@ -9102,7 +11189,7 @@
                           <a:latin typeface="Meiryo"/>
                           <a:ea typeface="Meiryo"/>
                         </a:rPr>
-                        <a:t>発注・請求・最低保証の精算・実績報告</a:t>
+                        <a:t>イベントキット・ノベルティ等は品目ごとに仮申請(備品/配布用の区分を明記)。申請窓口はご担当1名に集約</a:t>
                       </a:r>
                     </a:p>
                   </a:txBody>
@@ -9125,13 +11212,226 @@
                           <a:latin typeface="Meiryo"/>
                           <a:ea typeface="Meiryo"/>
                         </a:rPr>
-                        <a:t>随時</a:t>
+                        <a:t>新規</a:t>
                       </a:r>
                     </a:p>
                   </a:txBody>
                   <a:tcPr anchor="ctr" marL="73152" marR="73152">
                     <a:solidFill>
                       <a:srgbClr val="F2F4F6"/>
+                    </a:solidFill>
+                  </a:tcPr>
+                </a:tc>
+              </a:tr>
+              <a:tr h="548640">
+                <a:tc>
+                  <a:txBody>
+                    <a:bodyPr/>
+                    <a:lstStyle/>
+                    <a:p>
+                      <a:r>
+                        <a:rPr sz="1100" b="1">
+                          <a:solidFill>
+                            <a:srgbClr val="1A1A1A"/>
+                          </a:solidFill>
+                          <a:latin typeface="Meiryo"/>
+                          <a:ea typeface="Meiryo"/>
+                        </a:rPr>
+                        <a:t>運営サイン・音響・設営</a:t>
+                      </a:r>
+                    </a:p>
+                  </a:txBody>
+                  <a:tcPr anchor="ctr" marL="73152" marR="73152">
+                    <a:solidFill>
+                      <a:srgbClr val="FFFFFF"/>
+                    </a:solidFill>
+                  </a:tcPr>
+                </a:tc>
+                <a:tc>
+                  <a:txBody>
+                    <a:bodyPr/>
+                    <a:lstStyle/>
+                    <a:p>
+                      <a:r>
+                        <a:rPr sz="1100" b="0">
+                          <a:solidFill>
+                            <a:srgbClr val="1A1A1A"/>
+                          </a:solidFill>
+                          <a:latin typeface="Meiryo"/>
+                          <a:ea typeface="Meiryo"/>
+                        </a:rPr>
+                        <a:t>会場内サイン、音響機材の手配とオペレーション、イベントキット設営・会場復帰</a:t>
+                      </a:r>
+                    </a:p>
+                  </a:txBody>
+                  <a:tcPr anchor="ctr" marL="73152" marR="73152">
+                    <a:solidFill>
+                      <a:srgbClr val="FFFFFF"/>
+                    </a:solidFill>
+                  </a:tcPr>
+                </a:tc>
+                <a:tc>
+                  <a:txBody>
+                    <a:bodyPr/>
+                    <a:lstStyle/>
+                    <a:p>
+                      <a:r>
+                        <a:rPr sz="1100" b="0">
+                          <a:solidFill>
+                            <a:srgbClr val="1A1A1A"/>
+                          </a:solidFill>
+                          <a:latin typeface="Meiryo"/>
+                          <a:ea typeface="Meiryo"/>
+                        </a:rPr>
+                        <a:t>✓ 対応済み</a:t>
+                      </a:r>
+                    </a:p>
+                  </a:txBody>
+                  <a:tcPr anchor="ctr" marL="73152" marR="73152">
+                    <a:solidFill>
+                      <a:srgbClr val="FFFFFF"/>
+                    </a:solidFill>
+                  </a:tcPr>
+                </a:tc>
+              </a:tr>
+              <a:tr h="548640">
+                <a:tc>
+                  <a:txBody>
+                    <a:bodyPr/>
+                    <a:lstStyle/>
+                    <a:p>
+                      <a:r>
+                        <a:rPr sz="1100" b="1">
+                          <a:solidFill>
+                            <a:srgbClr val="1A1A1A"/>
+                          </a:solidFill>
+                          <a:latin typeface="Meiryo"/>
+                          <a:ea typeface="Meiryo"/>
+                        </a:rPr>
+                        <a:t>整理券・告知素材・実施報告</a:t>
+                      </a:r>
+                    </a:p>
+                  </a:txBody>
+                  <a:tcPr anchor="ctr" marL="73152" marR="73152">
+                    <a:solidFill>
+                      <a:srgbClr val="F2F4F6"/>
+                    </a:solidFill>
+                  </a:tcPr>
+                </a:tc>
+                <a:tc>
+                  <a:txBody>
+                    <a:bodyPr/>
+                    <a:lstStyle/>
+                    <a:p>
+                      <a:r>
+                        <a:rPr sz="1100" b="0">
+                          <a:solidFill>
+                            <a:srgbClr val="1A1A1A"/>
+                          </a:solidFill>
+                          <a:latin typeface="Meiryo"/>
+                          <a:ea typeface="Meiryo"/>
+                        </a:rPr>
+                        <a:t>整理券・列形成備品、HP掲載用テキスト・画像(当社監修)、参加人数等の実施報告</a:t>
+                      </a:r>
+                    </a:p>
+                  </a:txBody>
+                  <a:tcPr anchor="ctr" marL="73152" marR="73152">
+                    <a:solidFill>
+                      <a:srgbClr val="F2F4F6"/>
+                    </a:solidFill>
+                  </a:tcPr>
+                </a:tc>
+                <a:tc>
+                  <a:txBody>
+                    <a:bodyPr/>
+                    <a:lstStyle/>
+                    <a:p>
+                      <a:r>
+                        <a:rPr sz="1100" b="0">
+                          <a:solidFill>
+                            <a:srgbClr val="1A1A1A"/>
+                          </a:solidFill>
+                          <a:latin typeface="Meiryo"/>
+                          <a:ea typeface="Meiryo"/>
+                        </a:rPr>
+                        <a:t>✓ 対応済み</a:t>
+                      </a:r>
+                    </a:p>
+                  </a:txBody>
+                  <a:tcPr anchor="ctr" marL="73152" marR="73152">
+                    <a:solidFill>
+                      <a:srgbClr val="F2F4F6"/>
+                    </a:solidFill>
+                  </a:tcPr>
+                </a:tc>
+              </a:tr>
+              <a:tr h="548640">
+                <a:tc>
+                  <a:txBody>
+                    <a:bodyPr/>
+                    <a:lstStyle/>
+                    <a:p>
+                      <a:r>
+                        <a:rPr sz="1100" b="1">
+                          <a:solidFill>
+                            <a:srgbClr val="1A1A1A"/>
+                          </a:solidFill>
+                          <a:latin typeface="Meiryo"/>
+                          <a:ea typeface="Meiryo"/>
+                        </a:rPr>
+                        <a:t>会場要件・その他</a:t>
+                      </a:r>
+                    </a:p>
+                  </a:txBody>
+                  <a:tcPr anchor="ctr" marL="73152" marR="73152">
+                    <a:solidFill>
+                      <a:srgbClr val="FFFFFF"/>
+                    </a:solidFill>
+                  </a:tcPr>
+                </a:tc>
+                <a:tc>
+                  <a:txBody>
+                    <a:bodyPr/>
+                    <a:lstStyle/>
+                    <a:p>
+                      <a:r>
+                        <a:rPr sz="1100" b="0">
+                          <a:solidFill>
+                            <a:srgbClr val="1A1A1A"/>
+                          </a:solidFill>
+                          <a:latin typeface="Meiryo"/>
+                          <a:ea typeface="Meiryo"/>
+                        </a:rPr>
+                        <a:t>施錠可能な非公開控室・関係車両用駐車場/JASRAC申請・イベント保険(主催者様にて)</a:t>
+                      </a:r>
+                    </a:p>
+                  </a:txBody>
+                  <a:tcPr anchor="ctr" marL="73152" marR="73152">
+                    <a:solidFill>
+                      <a:srgbClr val="FFFFFF"/>
+                    </a:solidFill>
+                  </a:tcPr>
+                </a:tc>
+                <a:tc>
+                  <a:txBody>
+                    <a:bodyPr/>
+                    <a:lstStyle/>
+                    <a:p>
+                      <a:r>
+                        <a:rPr sz="1100" b="0">
+                          <a:solidFill>
+                            <a:srgbClr val="1A1A1A"/>
+                          </a:solidFill>
+                          <a:latin typeface="Meiryo"/>
+                          <a:ea typeface="Meiryo"/>
+                        </a:rPr>
+                        <a:t>✓ 対応済み</a:t>
+                      </a:r>
+                    </a:p>
+                  </a:txBody>
+                  <a:tcPr anchor="ctr" marL="73152" marR="73152">
+                    <a:solidFill>
+                      <a:srgbClr val="FFFFFF"/>
                     </a:solidFill>
                   </a:tcPr>
                 </a:tc>
@@ -9140,46 +11440,6 @@
           </a:graphicData>
         </a:graphic>
       </p:graphicFrame>
-      <p:sp>
-        <p:nvSpPr>
-          <p:cNvPr id="15" name="TextBox 14"/>
-          <p:cNvSpPr txBox="1"/>
-          <p:nvPr/>
-        </p:nvSpPr>
-        <p:spPr>
-          <a:xfrm>
-            <a:off x="640080" y="6126480"/>
-            <a:ext cx="10881360" cy="365760"/>
-          </a:xfrm>
-          <a:prstGeom prst="rect">
-            <a:avLst/>
-          </a:prstGeom>
-          <a:noFill/>
-        </p:spPr>
-        <p:txBody>
-          <a:bodyPr wrap="square" anchor="t" lIns="0" rIns="0" tIns="0" bIns="0">
-            <a:spAutoFit/>
-          </a:bodyPr>
-          <a:lstStyle/>
-          <a:p>
-            <a:pPr algn="l">
-              <a:spcAft>
-                <a:spcPts val="500"/>
-              </a:spcAft>
-            </a:pPr>
-            <a:r>
-              <a:rPr sz="1050" b="0">
-                <a:solidFill>
-                  <a:srgbClr val="5A626B"/>
-                </a:solidFill>
-                <a:latin typeface="Meiryo"/>
-                <a:ea typeface="Meiryo"/>
-              </a:rPr>
-              <a:t>※ 当社側メーリングリストは契約締結後にご案内します。開催当日の緊急連絡は会場ごとの当社担当(チーフスタッフ)と貴社運営ディレクター間で直接行います。</a:t>
-            </a:r>
-          </a:p>
-        </p:txBody>
-      </p:sp>
     </p:spTree>
   </p:cSld>
   <p:clrMapOvr>
@@ -9257,7 +11517,7 @@
                 <a:latin typeface="Meiryo"/>
                 <a:ea typeface="Meiryo"/>
               </a:rPr>
-              <a:t>3. ご提供価格(ソフトバンク様特別プラン)</a:t>
+              <a:t>2. 連絡体制と回答リードタイム</a:t>
             </a:r>
           </a:p>
         </p:txBody>
@@ -9297,7 +11557,7 @@
                 <a:latin typeface="Meiryo"/>
                 <a:ea typeface="Meiryo"/>
               </a:rPr>
-              <a:t>通常販売価格から大幅な特別価格でご提供します。本特別価格は年間契約+最低開催数保証のご締結を前提とした本件限りの条件です</a:t>
+              <a:t>貴社の取りまとめ窓口と当社の総合窓口を1対1でつなぎ、当社内で用件別に振り分けます</a:t>
             </a:r>
           </a:p>
         </p:txBody>
@@ -9422,706 +11682,22 @@
           </a:p>
         </p:txBody>
       </p:sp>
-      <p:graphicFrame>
-        <p:nvGraphicFramePr>
-          <p:cNvPr id="8" name="Table 7"/>
-          <p:cNvGraphicFramePr>
-            <a:graphicFrameLocks noGrp="1"/>
-          </p:cNvGraphicFramePr>
-          <p:nvPr/>
-        </p:nvGraphicFramePr>
-        <p:xfrm>
-          <a:off x="640080" y="1417320"/>
-          <a:ext cx="6309358" cy="2194560"/>
-        </p:xfrm>
-        <a:graphic>
-          <a:graphicData uri="http://schemas.openxmlformats.org/drawingml/2006/table">
-            <a:tbl>
-              <a:tblPr firstRow="1" bandRow="1">
-                <a:tableStyleId>{5C22544A-7EE6-4342-B048-85BDC9FD1C3A}</a:tableStyleId>
-              </a:tblPr>
-              <a:tblGrid>
-                <a:gridCol w="2575248"/>
-                <a:gridCol w="1673911"/>
-                <a:gridCol w="2060199"/>
-              </a:tblGrid>
-              <a:tr h="548640">
-                <a:tc>
-                  <a:txBody>
-                    <a:bodyPr/>
-                    <a:lstStyle/>
-                    <a:p>
-                      <a:r>
-                        <a:rPr sz="1150" b="1">
-                          <a:solidFill>
-                            <a:srgbClr val="FFFFFF"/>
-                          </a:solidFill>
-                          <a:latin typeface="Meiryo"/>
-                          <a:ea typeface="Meiryo"/>
-                        </a:rPr>
-                        <a:t>キャラクターイベント稼働費</a:t>
-                      </a:r>
-                    </a:p>
-                  </a:txBody>
-                  <a:tcPr anchor="ctr" marL="73152" marR="73152">
-                    <a:solidFill>
-                      <a:srgbClr val="232278"/>
-                    </a:solidFill>
-                  </a:tcPr>
-                </a:tc>
-                <a:tc>
-                  <a:txBody>
-                    <a:bodyPr/>
-                    <a:lstStyle/>
-                    <a:p>
-                      <a:r>
-                        <a:rPr sz="1150" b="1">
-                          <a:solidFill>
-                            <a:srgbClr val="FFFFFF"/>
-                          </a:solidFill>
-                          <a:latin typeface="Meiryo"/>
-                          <a:ea typeface="Meiryo"/>
-                        </a:rPr>
-                        <a:t>通常販売価格</a:t>
-                      </a:r>
-                    </a:p>
-                  </a:txBody>
-                  <a:tcPr anchor="ctr" marL="73152" marR="73152">
-                    <a:solidFill>
-                      <a:srgbClr val="232278"/>
-                    </a:solidFill>
-                  </a:tcPr>
-                </a:tc>
-                <a:tc>
-                  <a:txBody>
-                    <a:bodyPr/>
-                    <a:lstStyle/>
-                    <a:p>
-                      <a:r>
-                        <a:rPr sz="1150" b="1">
-                          <a:solidFill>
-                            <a:srgbClr val="FFFFFF"/>
-                          </a:solidFill>
-                          <a:latin typeface="Meiryo"/>
-                          <a:ea typeface="Meiryo"/>
-                        </a:rPr>
-                        <a:t>SB様特別価格</a:t>
-                      </a:r>
-                    </a:p>
-                  </a:txBody>
-                  <a:tcPr anchor="ctr" marL="73152" marR="73152">
-                    <a:solidFill>
-                      <a:srgbClr val="232278"/>
-                    </a:solidFill>
-                  </a:tcPr>
-                </a:tc>
-              </a:tr>
-              <a:tr h="548640">
-                <a:tc>
-                  <a:txBody>
-                    <a:bodyPr/>
-                    <a:lstStyle/>
-                    <a:p>
-                      <a:r>
-                        <a:rPr sz="1150" b="1">
-                          <a:solidFill>
-                            <a:srgbClr val="1A1A1A"/>
-                          </a:solidFill>
-                          <a:latin typeface="Meiryo"/>
-                          <a:ea typeface="Meiryo"/>
-                        </a:rPr>
-                        <a:t>1日稼働(1日最大5回公演)</a:t>
-                      </a:r>
-                    </a:p>
-                  </a:txBody>
-                  <a:tcPr anchor="ctr" marL="73152" marR="73152">
-                    <a:solidFill>
-                      <a:srgbClr val="FFFFFF"/>
-                    </a:solidFill>
-                  </a:tcPr>
-                </a:tc>
-                <a:tc>
-                  <a:txBody>
-                    <a:bodyPr/>
-                    <a:lstStyle/>
-                    <a:p>
-                      <a:r>
-                        <a:rPr sz="1150" b="0">
-                          <a:solidFill>
-                            <a:srgbClr val="1A1A1A"/>
-                          </a:solidFill>
-                          <a:latin typeface="Meiryo"/>
-                          <a:ea typeface="Meiryo"/>
-                        </a:rPr>
-                        <a:t>225,000円/日</a:t>
-                      </a:r>
-                    </a:p>
-                  </a:txBody>
-                  <a:tcPr anchor="ctr" marL="73152" marR="73152">
-                    <a:solidFill>
-                      <a:srgbClr val="FFFFFF"/>
-                    </a:solidFill>
-                  </a:tcPr>
-                </a:tc>
-                <a:tc>
-                  <a:txBody>
-                    <a:bodyPr/>
-                    <a:lstStyle/>
-                    <a:p>
-                      <a:r>
-                        <a:rPr sz="1150" b="1">
-                          <a:solidFill>
-                            <a:srgbClr val="C00000"/>
-                          </a:solidFill>
-                          <a:latin typeface="Meiryo"/>
-                          <a:ea typeface="Meiryo"/>
-                        </a:rPr>
-                        <a:t>100,000円/日(▲55.6%)</a:t>
-                      </a:r>
-                    </a:p>
-                  </a:txBody>
-                  <a:tcPr anchor="ctr" marL="73152" marR="73152">
-                    <a:solidFill>
-                      <a:srgbClr val="FFFFFF"/>
-                    </a:solidFill>
-                  </a:tcPr>
-                </a:tc>
-              </a:tr>
-              <a:tr h="548640">
-                <a:tc>
-                  <a:txBody>
-                    <a:bodyPr/>
-                    <a:lstStyle/>
-                    <a:p>
-                      <a:r>
-                        <a:rPr sz="1150" b="1">
-                          <a:solidFill>
-                            <a:srgbClr val="1A1A1A"/>
-                          </a:solidFill>
-                          <a:latin typeface="Meiryo"/>
-                          <a:ea typeface="Meiryo"/>
-                        </a:rPr>
-                        <a:t>土日2日間(1開催)</a:t>
-                      </a:r>
-                    </a:p>
-                  </a:txBody>
-                  <a:tcPr anchor="ctr" marL="73152" marR="73152">
-                    <a:solidFill>
-                      <a:srgbClr val="F2F4F6"/>
-                    </a:solidFill>
-                  </a:tcPr>
-                </a:tc>
-                <a:tc>
-                  <a:txBody>
-                    <a:bodyPr/>
-                    <a:lstStyle/>
-                    <a:p>
-                      <a:r>
-                        <a:rPr sz="1150" b="0">
-                          <a:solidFill>
-                            <a:srgbClr val="1A1A1A"/>
-                          </a:solidFill>
-                          <a:latin typeface="Meiryo"/>
-                          <a:ea typeface="Meiryo"/>
-                        </a:rPr>
-                        <a:t>450,000円</a:t>
-                      </a:r>
-                    </a:p>
-                  </a:txBody>
-                  <a:tcPr anchor="ctr" marL="73152" marR="73152">
-                    <a:solidFill>
-                      <a:srgbClr val="F2F4F6"/>
-                    </a:solidFill>
-                  </a:tcPr>
-                </a:tc>
-                <a:tc>
-                  <a:txBody>
-                    <a:bodyPr/>
-                    <a:lstStyle/>
-                    <a:p>
-                      <a:r>
-                        <a:rPr sz="1150" b="1">
-                          <a:solidFill>
-                            <a:srgbClr val="C00000"/>
-                          </a:solidFill>
-                          <a:latin typeface="Meiryo"/>
-                          <a:ea typeface="Meiryo"/>
-                        </a:rPr>
-                        <a:t>200,000円</a:t>
-                      </a:r>
-                    </a:p>
-                  </a:txBody>
-                  <a:tcPr anchor="ctr" marL="73152" marR="73152">
-                    <a:solidFill>
-                      <a:srgbClr val="F2F4F6"/>
-                    </a:solidFill>
-                  </a:tcPr>
-                </a:tc>
-              </a:tr>
-              <a:tr h="548640">
-                <a:tc>
-                  <a:txBody>
-                    <a:bodyPr/>
-                    <a:lstStyle/>
-                    <a:p>
-                      <a:r>
-                        <a:rPr sz="1150" b="1">
-                          <a:solidFill>
-                            <a:srgbClr val="1A1A1A"/>
-                          </a:solidFill>
-                          <a:latin typeface="Meiryo"/>
-                          <a:ea typeface="Meiryo"/>
-                        </a:rPr>
-                        <a:t>3連休通し(3日間)</a:t>
-                      </a:r>
-                    </a:p>
-                  </a:txBody>
-                  <a:tcPr anchor="ctr" marL="73152" marR="73152">
-                    <a:solidFill>
-                      <a:srgbClr val="FFFFFF"/>
-                    </a:solidFill>
-                  </a:tcPr>
-                </a:tc>
-                <a:tc>
-                  <a:txBody>
-                    <a:bodyPr/>
-                    <a:lstStyle/>
-                    <a:p>
-                      <a:r>
-                        <a:rPr sz="1150" b="0">
-                          <a:solidFill>
-                            <a:srgbClr val="1A1A1A"/>
-                          </a:solidFill>
-                          <a:latin typeface="Meiryo"/>
-                          <a:ea typeface="Meiryo"/>
-                        </a:rPr>
-                        <a:t>675,000円</a:t>
-                      </a:r>
-                    </a:p>
-                  </a:txBody>
-                  <a:tcPr anchor="ctr" marL="73152" marR="73152">
-                    <a:solidFill>
-                      <a:srgbClr val="FFFFFF"/>
-                    </a:solidFill>
-                  </a:tcPr>
-                </a:tc>
-                <a:tc>
-                  <a:txBody>
-                    <a:bodyPr/>
-                    <a:lstStyle/>
-                    <a:p>
-                      <a:r>
-                        <a:rPr sz="1150" b="1">
-                          <a:solidFill>
-                            <a:srgbClr val="C00000"/>
-                          </a:solidFill>
-                          <a:latin typeface="Meiryo"/>
-                          <a:ea typeface="Meiryo"/>
-                        </a:rPr>
-                        <a:t>300,000円</a:t>
-                      </a:r>
-                    </a:p>
-                  </a:txBody>
-                  <a:tcPr anchor="ctr" marL="73152" marR="73152">
-                    <a:solidFill>
-                      <a:srgbClr val="FFFFFF"/>
-                    </a:solidFill>
-                  </a:tcPr>
-                </a:tc>
-              </a:tr>
-            </a:tbl>
-          </a:graphicData>
-        </a:graphic>
-      </p:graphicFrame>
-      <p:sp>
-        <p:nvSpPr>
-          <p:cNvPr id="9" name="TextBox 8"/>
-          <p:cNvSpPr txBox="1"/>
+      <p:sp>
+        <p:nvSpPr>
+          <p:cNvPr id="8" name="Rounded Rectangle 7"/>
+          <p:cNvSpPr/>
           <p:nvPr/>
         </p:nvSpPr>
         <p:spPr>
           <a:xfrm>
-            <a:off x="640080" y="3703320"/>
-            <a:ext cx="6309360" cy="1097280"/>
+            <a:off x="4023360" y="1463040"/>
+            <a:ext cx="4114800" cy="640080"/>
           </a:xfrm>
-          <a:prstGeom prst="rect">
+          <a:prstGeom prst="roundRect">
             <a:avLst/>
           </a:prstGeom>
-          <a:noFill/>
-        </p:spPr>
-        <p:txBody>
-          <a:bodyPr wrap="square" anchor="t" lIns="0" rIns="0" tIns="0" bIns="0">
-            <a:spAutoFit/>
-          </a:bodyPr>
-          <a:lstStyle/>
-          <a:p>
-            <a:pPr algn="l">
-              <a:spcAft>
-                <a:spcPts val="300"/>
-              </a:spcAft>
-            </a:pPr>
-            <a:r>
-              <a:rPr sz="1050" b="0">
-                <a:solidFill>
-                  <a:srgbClr val="5A626B"/>
-                </a:solidFill>
-                <a:latin typeface="Meiryo"/>
-                <a:ea typeface="Meiryo"/>
-              </a:rPr>
-              <a:t>特別価格の内訳(1日):キャラクター使用料 40,000円/担当 35,000円/スーツアクター 25,000円</a:t>
-            </a:r>
-          </a:p>
-          <a:p>
-            <a:pPr algn="l">
-              <a:spcAft>
-                <a:spcPts val="300"/>
-              </a:spcAft>
-            </a:pPr>
-            <a:r>
-              <a:rPr sz="1050" b="0">
-                <a:solidFill>
-                  <a:srgbClr val="5A626B"/>
-                </a:solidFill>
-                <a:latin typeface="Meiryo"/>
-                <a:ea typeface="Meiryo"/>
-              </a:rPr>
-              <a:t>通常販売価格は同一スコープ(キャラクター使用料+担当+アクター・5回公演対応)での当社標準価格です</a:t>
-            </a:r>
-          </a:p>
-        </p:txBody>
-      </p:sp>
-      <p:graphicFrame>
-        <p:nvGraphicFramePr>
-          <p:cNvPr id="10" name="Table 9"/>
-          <p:cNvGraphicFramePr>
-            <a:graphicFrameLocks noGrp="1"/>
-          </p:cNvGraphicFramePr>
-          <p:nvPr/>
-        </p:nvGraphicFramePr>
-        <p:xfrm>
-          <a:off x="7223760" y="1417320"/>
-          <a:ext cx="4297679" cy="3291839"/>
-        </p:xfrm>
-        <a:graphic>
-          <a:graphicData uri="http://schemas.openxmlformats.org/drawingml/2006/table">
-            <a:tbl>
-              <a:tblPr firstRow="1" bandRow="1">
-                <a:tableStyleId>{5C22544A-7EE6-4342-B048-85BDC9FD1C3A}</a:tableStyleId>
-              </a:tblPr>
-              <a:tblGrid>
-                <a:gridCol w="2079522"/>
-                <a:gridCol w="2218157"/>
-              </a:tblGrid>
-              <a:tr h="548639">
-                <a:tc>
-                  <a:txBody>
-                    <a:bodyPr/>
-                    <a:lstStyle/>
-                    <a:p>
-                      <a:r>
-                        <a:rPr sz="1100" b="1">
-                          <a:solidFill>
-                            <a:srgbClr val="FFFFFF"/>
-                          </a:solidFill>
-                          <a:latin typeface="Meiryo"/>
-                          <a:ea typeface="Meiryo"/>
-                        </a:rPr>
-                        <a:t>その他の費目</a:t>
-                      </a:r>
-                    </a:p>
-                  </a:txBody>
-                  <a:tcPr anchor="ctr" marL="73152" marR="73152">
-                    <a:solidFill>
-                      <a:srgbClr val="232278"/>
-                    </a:solidFill>
-                  </a:tcPr>
-                </a:tc>
-                <a:tc>
-                  <a:txBody>
-                    <a:bodyPr/>
-                    <a:lstStyle/>
-                    <a:p>
-                      <a:r>
-                        <a:rPr sz="1100" b="1">
-                          <a:solidFill>
-                            <a:srgbClr val="FFFFFF"/>
-                          </a:solidFill>
-                          <a:latin typeface="Meiryo"/>
-                          <a:ea typeface="Meiryo"/>
-                        </a:rPr>
-                        <a:t>金額</a:t>
-                      </a:r>
-                    </a:p>
-                  </a:txBody>
-                  <a:tcPr anchor="ctr" marL="73152" marR="73152">
-                    <a:solidFill>
-                      <a:srgbClr val="232278"/>
-                    </a:solidFill>
-                  </a:tcPr>
-                </a:tc>
-              </a:tr>
-              <a:tr h="548639">
-                <a:tc>
-                  <a:txBody>
-                    <a:bodyPr/>
-                    <a:lstStyle/>
-                    <a:p>
-                      <a:r>
-                        <a:rPr sz="1100" b="1">
-                          <a:solidFill>
-                            <a:srgbClr val="1A1A1A"/>
-                          </a:solidFill>
-                          <a:latin typeface="Meiryo"/>
-                          <a:ea typeface="Meiryo"/>
-                        </a:rPr>
-                        <a:t>年間IP使用料</a:t>
-                      </a:r>
-                    </a:p>
-                  </a:txBody>
-                  <a:tcPr anchor="ctr" marL="73152" marR="73152">
-                    <a:solidFill>
-                      <a:srgbClr val="FFFFFF"/>
-                    </a:solidFill>
-                  </a:tcPr>
-                </a:tc>
-                <a:tc>
-                  <a:txBody>
-                    <a:bodyPr/>
-                    <a:lstStyle/>
-                    <a:p>
-                      <a:r>
-                        <a:rPr sz="1100" b="0">
-                          <a:solidFill>
-                            <a:srgbClr val="1A1A1A"/>
-                          </a:solidFill>
-                          <a:latin typeface="Meiryo"/>
-                          <a:ea typeface="Meiryo"/>
-                        </a:rPr>
-                        <a:t>2,000万円/年</a:t>
-                      </a:r>
-                    </a:p>
-                  </a:txBody>
-                  <a:tcPr anchor="ctr" marL="73152" marR="73152">
-                    <a:solidFill>
-                      <a:srgbClr val="FFFFFF"/>
-                    </a:solidFill>
-                  </a:tcPr>
-                </a:tc>
-              </a:tr>
-              <a:tr h="548639">
-                <a:tc>
-                  <a:txBody>
-                    <a:bodyPr/>
-                    <a:lstStyle/>
-                    <a:p>
-                      <a:r>
-                        <a:rPr sz="1100" b="1">
-                          <a:solidFill>
-                            <a:srgbClr val="1A1A1A"/>
-                          </a:solidFill>
-                          <a:latin typeface="Meiryo"/>
-                          <a:ea typeface="Meiryo"/>
-                        </a:rPr>
-                        <a:t>作成許諾ロイヤリティ</a:t>
-                      </a:r>
-                    </a:p>
-                  </a:txBody>
-                  <a:tcPr anchor="ctr" marL="73152" marR="73152">
-                    <a:solidFill>
-                      <a:srgbClr val="F2F4F6"/>
-                    </a:solidFill>
-                  </a:tcPr>
-                </a:tc>
-                <a:tc>
-                  <a:txBody>
-                    <a:bodyPr/>
-                    <a:lstStyle/>
-                    <a:p>
-                      <a:r>
-                        <a:rPr sz="1100" b="0">
-                          <a:solidFill>
-                            <a:srgbClr val="1A1A1A"/>
-                          </a:solidFill>
-                          <a:latin typeface="Meiryo"/>
-                          <a:ea typeface="Meiryo"/>
-                        </a:rPr>
-                        <a:t>作成費用の20%</a:t>
-                      </a:r>
-                    </a:p>
-                  </a:txBody>
-                  <a:tcPr anchor="ctr" marL="73152" marR="73152">
-                    <a:solidFill>
-                      <a:srgbClr val="F2F4F6"/>
-                    </a:solidFill>
-                  </a:tcPr>
-                </a:tc>
-              </a:tr>
-              <a:tr h="548639">
-                <a:tc>
-                  <a:txBody>
-                    <a:bodyPr/>
-                    <a:lstStyle/>
-                    <a:p>
-                      <a:r>
-                        <a:rPr sz="1100" b="1">
-                          <a:solidFill>
-                            <a:srgbClr val="1A1A1A"/>
-                          </a:solidFill>
-                          <a:latin typeface="Meiryo"/>
-                          <a:ea typeface="Meiryo"/>
-                        </a:rPr>
-                        <a:t>フル運営オプション</a:t>
-                      </a:r>
-                    </a:p>
-                  </a:txBody>
-                  <a:tcPr anchor="ctr" marL="73152" marR="73152">
-                    <a:solidFill>
-                      <a:srgbClr val="FFFFFF"/>
-                    </a:solidFill>
-                  </a:tcPr>
-                </a:tc>
-                <a:tc>
-                  <a:txBody>
-                    <a:bodyPr/>
-                    <a:lstStyle/>
-                    <a:p>
-                      <a:r>
-                        <a:rPr sz="1100" b="0">
-                          <a:solidFill>
-                            <a:srgbClr val="1A1A1A"/>
-                          </a:solidFill>
-                          <a:latin typeface="Meiryo"/>
-                          <a:ea typeface="Meiryo"/>
-                        </a:rPr>
-                        <a:t>+220,000円/日</a:t>
-                      </a:r>
-                    </a:p>
-                  </a:txBody>
-                  <a:tcPr anchor="ctr" marL="73152" marR="73152">
-                    <a:solidFill>
-                      <a:srgbClr val="FFFFFF"/>
-                    </a:solidFill>
-                  </a:tcPr>
-                </a:tc>
-              </a:tr>
-              <a:tr h="548639">
-                <a:tc>
-                  <a:txBody>
-                    <a:bodyPr/>
-                    <a:lstStyle/>
-                    <a:p>
-                      <a:r>
-                        <a:rPr sz="1100" b="1">
-                          <a:solidFill>
-                            <a:srgbClr val="1A1A1A"/>
-                          </a:solidFill>
-                          <a:latin typeface="Meiryo"/>
-                          <a:ea typeface="Meiryo"/>
-                        </a:rPr>
-                        <a:t>現場諸経費</a:t>
-                      </a:r>
-                    </a:p>
-                  </a:txBody>
-                  <a:tcPr anchor="ctr" marL="73152" marR="73152">
-                    <a:solidFill>
-                      <a:srgbClr val="F2F4F6"/>
-                    </a:solidFill>
-                  </a:tcPr>
-                </a:tc>
-                <a:tc>
-                  <a:txBody>
-                    <a:bodyPr/>
-                    <a:lstStyle/>
-                    <a:p>
-                      <a:r>
-                        <a:rPr sz="1100" b="0">
-                          <a:solidFill>
-                            <a:srgbClr val="1A1A1A"/>
-                          </a:solidFill>
-                          <a:latin typeface="Meiryo"/>
-                          <a:ea typeface="Meiryo"/>
-                        </a:rPr>
-                        <a:t>20,000円/日</a:t>
-                      </a:r>
-                    </a:p>
-                  </a:txBody>
-                  <a:tcPr anchor="ctr" marL="73152" marR="73152">
-                    <a:solidFill>
-                      <a:srgbClr val="F2F4F6"/>
-                    </a:solidFill>
-                  </a:tcPr>
-                </a:tc>
-              </a:tr>
-              <a:tr h="548644">
-                <a:tc>
-                  <a:txBody>
-                    <a:bodyPr/>
-                    <a:lstStyle/>
-                    <a:p>
-                      <a:r>
-                        <a:rPr sz="1100" b="1">
-                          <a:solidFill>
-                            <a:srgbClr val="1A1A1A"/>
-                          </a:solidFill>
-                          <a:latin typeface="Meiryo"/>
-                          <a:ea typeface="Meiryo"/>
-                        </a:rPr>
-                        <a:t>実費</a:t>
-                      </a:r>
-                    </a:p>
-                  </a:txBody>
-                  <a:tcPr anchor="ctr" marL="73152" marR="73152">
-                    <a:solidFill>
-                      <a:srgbClr val="FFFFFF"/>
-                    </a:solidFill>
-                  </a:tcPr>
-                </a:tc>
-                <a:tc>
-                  <a:txBody>
-                    <a:bodyPr/>
-                    <a:lstStyle/>
-                    <a:p>
-                      <a:r>
-                        <a:rPr sz="1100" b="0">
-                          <a:solidFill>
-                            <a:srgbClr val="1A1A1A"/>
-                          </a:solidFill>
-                          <a:latin typeface="Meiryo"/>
-                          <a:ea typeface="Meiryo"/>
-                        </a:rPr>
-                        <a:t>交通運搬・宿泊・スーツ送料(基準料金表)</a:t>
-                      </a:r>
-                    </a:p>
-                  </a:txBody>
-                  <a:tcPr anchor="ctr" marL="73152" marR="73152">
-                    <a:solidFill>
-                      <a:srgbClr val="FFFFFF"/>
-                    </a:solidFill>
-                  </a:tcPr>
-                </a:tc>
-              </a:tr>
-            </a:tbl>
-          </a:graphicData>
-        </a:graphic>
-      </p:graphicFrame>
-      <p:sp>
-        <p:nvSpPr>
-          <p:cNvPr id="11" name="Rounded Rectangle 10"/>
-          <p:cNvSpPr/>
-          <p:nvPr/>
-        </p:nvSpPr>
-        <p:spPr>
-          <a:xfrm>
-            <a:off x="640080" y="4892040"/>
-            <a:ext cx="10881360" cy="1188720"/>
-          </a:xfrm>
-          <a:prstGeom prst="roundRect">
-            <a:avLst>
-              <a:gd name="adj" fmla="val 7000"/>
-            </a:avLst>
-          </a:prstGeom>
           <a:solidFill>
-            <a:srgbClr val="F2F4F6"/>
+            <a:srgbClr val="232278"/>
           </a:solidFill>
           <a:ln>
             <a:noFill/>
@@ -10152,14 +11728,14 @@
       </p:sp>
       <p:sp>
         <p:nvSpPr>
-          <p:cNvPr id="12" name="TextBox 11"/>
+          <p:cNvPr id="9" name="TextBox 8"/>
           <p:cNvSpPr txBox="1"/>
           <p:nvPr/>
         </p:nvSpPr>
         <p:spPr>
           <a:xfrm>
-            <a:off x="914400" y="5029200"/>
-            <a:ext cx="10332720" cy="1005840"/>
+            <a:off x="4023360" y="1463040"/>
+            <a:ext cx="4114800" cy="640080"/>
           </a:xfrm>
           <a:prstGeom prst="rect">
             <a:avLst/>
@@ -10167,42 +11743,611 @@
           <a:noFill/>
         </p:spPr>
         <p:txBody>
+          <a:bodyPr wrap="square" anchor="ctr" lIns="0" rIns="0" tIns="0" bIns="0">
+            <a:spAutoFit/>
+          </a:bodyPr>
+          <a:lstStyle/>
+          <a:p>
+            <a:pPr algn="ctr">
+              <a:spcAft>
+                <a:spcPts val="500"/>
+              </a:spcAft>
+            </a:pPr>
+            <a:r>
+              <a:rPr sz="1300" b="1">
+                <a:solidFill>
+                  <a:srgbClr val="FFFFFF"/>
+                </a:solidFill>
+                <a:latin typeface="Meiryo"/>
+                <a:ea typeface="Meiryo"/>
+              </a:rPr>
+              <a:t>ソフトバンク様 取りまとめ窓口(1部署)</a:t>
+            </a:r>
+          </a:p>
+        </p:txBody>
+      </p:sp>
+      <p:sp>
+        <p:nvSpPr>
+          <p:cNvPr id="10" name="TextBox 9"/>
+          <p:cNvSpPr txBox="1"/>
+          <p:nvPr/>
+        </p:nvSpPr>
+        <p:spPr>
+          <a:xfrm>
+            <a:off x="4023360" y="2148840"/>
+            <a:ext cx="4114800" cy="320040"/>
+          </a:xfrm>
+          <a:prstGeom prst="rect">
+            <a:avLst/>
+          </a:prstGeom>
+          <a:noFill/>
+        </p:spPr>
+        <p:txBody>
           <a:bodyPr wrap="square" anchor="t" lIns="0" rIns="0" tIns="0" bIns="0">
             <a:spAutoFit/>
           </a:bodyPr>
           <a:lstStyle/>
           <a:p>
-            <a:pPr algn="l">
+            <a:pPr algn="ctr">
               <a:spcAft>
-                <a:spcPts val="400"/>
+                <a:spcPts val="500"/>
               </a:spcAft>
             </a:pPr>
             <a:r>
-              <a:rPr sz="1250" b="1">
+              <a:rPr sz="1200" b="1">
                 <a:solidFill>
-                  <a:srgbClr val="C00000"/>
+                  <a:srgbClr val="5A626B"/>
                 </a:solidFill>
                 <a:latin typeface="Meiryo"/>
                 <a:ea typeface="Meiryo"/>
               </a:rPr>
-              <a:t>年間IP使用料に含まれるもの</a:t>
-            </a:r>
-          </a:p>
-          <a:p>
-            <a:pPr algn="l">
+              <a:t>↓ 連絡　↑ 回答</a:t>
+            </a:r>
+          </a:p>
+        </p:txBody>
+      </p:sp>
+      <p:sp>
+        <p:nvSpPr>
+          <p:cNvPr id="11" name="Rounded Rectangle 10"/>
+          <p:cNvSpPr/>
+          <p:nvPr/>
+        </p:nvSpPr>
+        <p:spPr>
+          <a:xfrm>
+            <a:off x="4023360" y="2468880"/>
+            <a:ext cx="4114800" cy="640080"/>
+          </a:xfrm>
+          <a:prstGeom prst="roundRect">
+            <a:avLst/>
+          </a:prstGeom>
+          <a:solidFill>
+            <a:srgbClr val="1F338C"/>
+          </a:solidFill>
+          <a:ln>
+            <a:noFill/>
+          </a:ln>
+          <a:effectLst/>
+        </p:spPr>
+        <p:style>
+          <a:lnRef idx="1">
+            <a:schemeClr val="accent1"/>
+          </a:lnRef>
+          <a:fillRef idx="3">
+            <a:schemeClr val="accent1"/>
+          </a:fillRef>
+          <a:effectRef idx="2">
+            <a:schemeClr val="accent1"/>
+          </a:effectRef>
+          <a:fontRef idx="minor">
+            <a:schemeClr val="lt1"/>
+          </a:fontRef>
+        </p:style>
+        <p:txBody>
+          <a:bodyPr rtlCol="0" anchor="ctr"/>
+          <a:lstStyle/>
+          <a:p>
+            <a:pPr algn="ctr"/>
+          </a:p>
+        </p:txBody>
+      </p:sp>
+      <p:sp>
+        <p:nvSpPr>
+          <p:cNvPr id="12" name="TextBox 11"/>
+          <p:cNvSpPr txBox="1"/>
+          <p:nvPr/>
+        </p:nvSpPr>
+        <p:spPr>
+          <a:xfrm>
+            <a:off x="4023360" y="2468880"/>
+            <a:ext cx="4114800" cy="640080"/>
+          </a:xfrm>
+          <a:prstGeom prst="rect">
+            <a:avLst/>
+          </a:prstGeom>
+          <a:noFill/>
+        </p:spPr>
+        <p:txBody>
+          <a:bodyPr wrap="square" anchor="ctr" lIns="0" rIns="0" tIns="0" bIns="0">
+            <a:spAutoFit/>
+          </a:bodyPr>
+          <a:lstStyle/>
+          <a:p>
+            <a:pPr algn="ctr">
               <a:spcAft>
-                <a:spcPts val="400"/>
+                <a:spcPts val="500"/>
               </a:spcAft>
             </a:pPr>
             <a:r>
-              <a:rPr sz="1150" b="0">
+              <a:rPr sz="1300" b="1">
                 <a:solidFill>
-                  <a:srgbClr val="1A1A1A"/>
+                  <a:srgbClr val="FFFFFF"/>
                 </a:solidFill>
                 <a:latin typeface="Meiryo"/>
                 <a:ea typeface="Meiryo"/>
               </a:rPr>
-              <a:t>店頭イベント・イベントキット・店頭訴求ツール・LP/Web・SNSでのIP利用、作成物の監修対応、8ヒーローの選択・切替、キャラクター素材・運営マニュアルの提供</a:t>
+              <a:t>円谷プロ 総合窓口(専用メーリングリスト)</a:t>
+            </a:r>
+          </a:p>
+        </p:txBody>
+      </p:sp>
+      <p:sp>
+        <p:nvSpPr>
+          <p:cNvPr id="13" name="TextBox 12"/>
+          <p:cNvSpPr txBox="1"/>
+          <p:nvPr/>
+        </p:nvSpPr>
+        <p:spPr>
+          <a:xfrm>
+            <a:off x="640080" y="3154680"/>
+            <a:ext cx="10881360" cy="320040"/>
+          </a:xfrm>
+          <a:prstGeom prst="rect">
+            <a:avLst/>
+          </a:prstGeom>
+          <a:noFill/>
+        </p:spPr>
+        <p:txBody>
+          <a:bodyPr wrap="square" anchor="t" lIns="0" rIns="0" tIns="0" bIns="0">
+            <a:spAutoFit/>
+          </a:bodyPr>
+          <a:lstStyle/>
+          <a:p>
+            <a:pPr algn="ctr">
+              <a:spcAft>
+                <a:spcPts val="500"/>
+              </a:spcAft>
+            </a:pPr>
+            <a:r>
+              <a:rPr sz="1100" b="0">
+                <a:solidFill>
+                  <a:srgbClr val="5A626B"/>
+                </a:solidFill>
+                <a:latin typeface="Meiryo"/>
+                <a:ea typeface="Meiryo"/>
+              </a:rPr>
+              <a:t>当社内で用件別に振り分け</a:t>
+            </a:r>
+          </a:p>
+        </p:txBody>
+      </p:sp>
+      <p:graphicFrame>
+        <p:nvGraphicFramePr>
+          <p:cNvPr id="14" name="Table 13"/>
+          <p:cNvGraphicFramePr>
+            <a:graphicFrameLocks noGrp="1"/>
+          </p:cNvGraphicFramePr>
+          <p:nvPr/>
+        </p:nvGraphicFramePr>
+        <p:xfrm>
+          <a:off x="640080" y="3520440"/>
+          <a:ext cx="10881360" cy="2514600"/>
+        </p:xfrm>
+        <a:graphic>
+          <a:graphicData uri="http://schemas.openxmlformats.org/drawingml/2006/table">
+            <a:tbl>
+              <a:tblPr firstRow="1" bandRow="1">
+                <a:tableStyleId>{5C22544A-7EE6-4342-B048-85BDC9FD1C3A}</a:tableStyleId>
+              </a:tblPr>
+              <a:tblGrid>
+                <a:gridCol w="2020824"/>
+                <a:gridCol w="5440680"/>
+                <a:gridCol w="3419856"/>
+              </a:tblGrid>
+              <a:tr h="502920">
+                <a:tc>
+                  <a:txBody>
+                    <a:bodyPr/>
+                    <a:lstStyle/>
+                    <a:p>
+                      <a:r>
+                        <a:rPr sz="1100" b="1">
+                          <a:solidFill>
+                            <a:srgbClr val="FFFFFF"/>
+                          </a:solidFill>
+                          <a:latin typeface="Meiryo"/>
+                          <a:ea typeface="Meiryo"/>
+                        </a:rPr>
+                        <a:t>窓口</a:t>
+                      </a:r>
+                    </a:p>
+                  </a:txBody>
+                  <a:tcPr anchor="ctr" marL="73152" marR="73152">
+                    <a:solidFill>
+                      <a:srgbClr val="232278"/>
+                    </a:solidFill>
+                  </a:tcPr>
+                </a:tc>
+                <a:tc>
+                  <a:txBody>
+                    <a:bodyPr/>
+                    <a:lstStyle/>
+                    <a:p>
+                      <a:r>
+                        <a:rPr sz="1100" b="1">
+                          <a:solidFill>
+                            <a:srgbClr val="FFFFFF"/>
+                          </a:solidFill>
+                          <a:latin typeface="Meiryo"/>
+                          <a:ea typeface="Meiryo"/>
+                        </a:rPr>
+                        <a:t>用件</a:t>
+                      </a:r>
+                    </a:p>
+                  </a:txBody>
+                  <a:tcPr anchor="ctr" marL="73152" marR="73152">
+                    <a:solidFill>
+                      <a:srgbClr val="232278"/>
+                    </a:solidFill>
+                  </a:tcPr>
+                </a:tc>
+                <a:tc>
+                  <a:txBody>
+                    <a:bodyPr/>
+                    <a:lstStyle/>
+                    <a:p>
+                      <a:r>
+                        <a:rPr sz="1100" b="1">
+                          <a:solidFill>
+                            <a:srgbClr val="FFFFFF"/>
+                          </a:solidFill>
+                          <a:latin typeface="Meiryo"/>
+                          <a:ea typeface="Meiryo"/>
+                        </a:rPr>
+                        <a:t>回答の目安</a:t>
+                      </a:r>
+                    </a:p>
+                  </a:txBody>
+                  <a:tcPr anchor="ctr" marL="73152" marR="73152">
+                    <a:solidFill>
+                      <a:srgbClr val="232278"/>
+                    </a:solidFill>
+                  </a:tcPr>
+                </a:tc>
+              </a:tr>
+              <a:tr h="502920">
+                <a:tc>
+                  <a:txBody>
+                    <a:bodyPr/>
+                    <a:lstStyle/>
+                    <a:p>
+                      <a:r>
+                        <a:rPr sz="1100" b="1">
+                          <a:solidFill>
+                            <a:srgbClr val="1A1A1A"/>
+                          </a:solidFill>
+                          <a:latin typeface="Meiryo"/>
+                          <a:ea typeface="Meiryo"/>
+                        </a:rPr>
+                        <a:t>① イベント実施</a:t>
+                      </a:r>
+                    </a:p>
+                  </a:txBody>
+                  <a:tcPr anchor="ctr" marL="73152" marR="73152">
+                    <a:solidFill>
+                      <a:srgbClr val="FFFFFF"/>
+                    </a:solidFill>
+                  </a:tcPr>
+                </a:tc>
+                <a:tc>
+                  <a:txBody>
+                    <a:bodyPr/>
+                    <a:lstStyle/>
+                    <a:p>
+                      <a:r>
+                        <a:rPr sz="1100" b="0">
+                          <a:solidFill>
+                            <a:srgbClr val="1A1A1A"/>
+                          </a:solidFill>
+                          <a:latin typeface="Meiryo"/>
+                          <a:ea typeface="Meiryo"/>
+                        </a:rPr>
+                        <a:t>開催申請(エリア・会場・日程)のバッティング確認/実施確認書の確認</a:t>
+                      </a:r>
+                    </a:p>
+                  </a:txBody>
+                  <a:tcPr anchor="ctr" marL="73152" marR="73152">
+                    <a:solidFill>
+                      <a:srgbClr val="FFFFFF"/>
+                    </a:solidFill>
+                  </a:tcPr>
+                </a:tc>
+                <a:tc>
+                  <a:txBody>
+                    <a:bodyPr/>
+                    <a:lstStyle/>
+                    <a:p>
+                      <a:r>
+                        <a:rPr sz="1100" b="0">
+                          <a:solidFill>
+                            <a:srgbClr val="1A1A1A"/>
+                          </a:solidFill>
+                          <a:latin typeface="Meiryo"/>
+                          <a:ea typeface="Meiryo"/>
+                        </a:rPr>
+                        <a:t>5営業日(前月1日までに確定)</a:t>
+                      </a:r>
+                    </a:p>
+                  </a:txBody>
+                  <a:tcPr anchor="ctr" marL="73152" marR="73152">
+                    <a:solidFill>
+                      <a:srgbClr val="FFFFFF"/>
+                    </a:solidFill>
+                  </a:tcPr>
+                </a:tc>
+              </a:tr>
+              <a:tr h="502920">
+                <a:tc>
+                  <a:txBody>
+                    <a:bodyPr/>
+                    <a:lstStyle/>
+                    <a:p>
+                      <a:r>
+                        <a:rPr sz="1100" b="1">
+                          <a:solidFill>
+                            <a:srgbClr val="1A1A1A"/>
+                          </a:solidFill>
+                          <a:latin typeface="Meiryo"/>
+                          <a:ea typeface="Meiryo"/>
+                        </a:rPr>
+                        <a:t>② 告知物</a:t>
+                      </a:r>
+                    </a:p>
+                  </a:txBody>
+                  <a:tcPr anchor="ctr" marL="73152" marR="73152">
+                    <a:solidFill>
+                      <a:srgbClr val="F2F4F6"/>
+                    </a:solidFill>
+                  </a:tcPr>
+                </a:tc>
+                <a:tc>
+                  <a:txBody>
+                    <a:bodyPr/>
+                    <a:lstStyle/>
+                    <a:p>
+                      <a:r>
+                        <a:rPr sz="1100" b="0">
+                          <a:solidFill>
+                            <a:srgbClr val="1A1A1A"/>
+                          </a:solidFill>
+                          <a:latin typeface="Meiryo"/>
+                          <a:ea typeface="Meiryo"/>
+                        </a:rPr>
+                        <a:t>告知物(KV・Web・チラシ等)の監修</a:t>
+                      </a:r>
+                    </a:p>
+                  </a:txBody>
+                  <a:tcPr anchor="ctr" marL="73152" marR="73152">
+                    <a:solidFill>
+                      <a:srgbClr val="F2F4F6"/>
+                    </a:solidFill>
+                  </a:tcPr>
+                </a:tc>
+                <a:tc>
+                  <a:txBody>
+                    <a:bodyPr/>
+                    <a:lstStyle/>
+                    <a:p>
+                      <a:r>
+                        <a:rPr sz="1100" b="0">
+                          <a:solidFill>
+                            <a:srgbClr val="1A1A1A"/>
+                          </a:solidFill>
+                          <a:latin typeface="Meiryo"/>
+                          <a:ea typeface="Meiryo"/>
+                        </a:rPr>
+                        <a:t>KV 3営業日/Web流用 1〜2営業日/チラシ+色校 1〜2営業日</a:t>
+                      </a:r>
+                    </a:p>
+                  </a:txBody>
+                  <a:tcPr anchor="ctr" marL="73152" marR="73152">
+                    <a:solidFill>
+                      <a:srgbClr val="F2F4F6"/>
+                    </a:solidFill>
+                  </a:tcPr>
+                </a:tc>
+              </a:tr>
+              <a:tr h="502920">
+                <a:tc>
+                  <a:txBody>
+                    <a:bodyPr/>
+                    <a:lstStyle/>
+                    <a:p>
+                      <a:r>
+                        <a:rPr sz="1100" b="1">
+                          <a:solidFill>
+                            <a:srgbClr val="1A1A1A"/>
+                          </a:solidFill>
+                          <a:latin typeface="Meiryo"/>
+                          <a:ea typeface="Meiryo"/>
+                        </a:rPr>
+                        <a:t>③ 制作物</a:t>
+                      </a:r>
+                    </a:p>
+                  </a:txBody>
+                  <a:tcPr anchor="ctr" marL="73152" marR="73152">
+                    <a:solidFill>
+                      <a:srgbClr val="FFFFFF"/>
+                    </a:solidFill>
+                  </a:tcPr>
+                </a:tc>
+                <a:tc>
+                  <a:txBody>
+                    <a:bodyPr/>
+                    <a:lstStyle/>
+                    <a:p>
+                      <a:r>
+                        <a:rPr sz="1100" b="0">
+                          <a:solidFill>
+                            <a:srgbClr val="1A1A1A"/>
+                          </a:solidFill>
+                          <a:latin typeface="Meiryo"/>
+                          <a:ea typeface="Meiryo"/>
+                        </a:rPr>
+                        <a:t>仮申請(制作可否)/ノベルティ・キット・その他制作物のデザイン監修</a:t>
+                      </a:r>
+                    </a:p>
+                  </a:txBody>
+                  <a:tcPr anchor="ctr" marL="73152" marR="73152">
+                    <a:solidFill>
+                      <a:srgbClr val="FFFFFF"/>
+                    </a:solidFill>
+                  </a:tcPr>
+                </a:tc>
+                <a:tc>
+                  <a:txBody>
+                    <a:bodyPr/>
+                    <a:lstStyle/>
+                    <a:p>
+                      <a:r>
+                        <a:rPr sz="1100" b="0">
+                          <a:solidFill>
+                            <a:srgbClr val="1A1A1A"/>
+                          </a:solidFill>
+                          <a:latin typeface="Meiryo"/>
+                          <a:ea typeface="Meiryo"/>
+                        </a:rPr>
+                        <a:t>仮申請 約5営業日/デザイン監修 5営業日</a:t>
+                      </a:r>
+                    </a:p>
+                  </a:txBody>
+                  <a:tcPr anchor="ctr" marL="73152" marR="73152">
+                    <a:solidFill>
+                      <a:srgbClr val="FFFFFF"/>
+                    </a:solidFill>
+                  </a:tcPr>
+                </a:tc>
+              </a:tr>
+              <a:tr h="502920">
+                <a:tc>
+                  <a:txBody>
+                    <a:bodyPr/>
+                    <a:lstStyle/>
+                    <a:p>
+                      <a:r>
+                        <a:rPr sz="1100" b="1">
+                          <a:solidFill>
+                            <a:srgbClr val="1A1A1A"/>
+                          </a:solidFill>
+                          <a:latin typeface="Meiryo"/>
+                          <a:ea typeface="Meiryo"/>
+                        </a:rPr>
+                        <a:t>④ 契約・精算</a:t>
+                      </a:r>
+                    </a:p>
+                  </a:txBody>
+                  <a:tcPr anchor="ctr" marL="73152" marR="73152">
+                    <a:solidFill>
+                      <a:srgbClr val="F2F4F6"/>
+                    </a:solidFill>
+                  </a:tcPr>
+                </a:tc>
+                <a:tc>
+                  <a:txBody>
+                    <a:bodyPr/>
+                    <a:lstStyle/>
+                    <a:p>
+                      <a:r>
+                        <a:rPr sz="1100" b="0">
+                          <a:solidFill>
+                            <a:srgbClr val="1A1A1A"/>
+                          </a:solidFill>
+                          <a:latin typeface="Meiryo"/>
+                          <a:ea typeface="Meiryo"/>
+                        </a:rPr>
+                        <a:t>発注・請求・最低保証の精算・実績報告</a:t>
+                      </a:r>
+                    </a:p>
+                  </a:txBody>
+                  <a:tcPr anchor="ctr" marL="73152" marR="73152">
+                    <a:solidFill>
+                      <a:srgbClr val="F2F4F6"/>
+                    </a:solidFill>
+                  </a:tcPr>
+                </a:tc>
+                <a:tc>
+                  <a:txBody>
+                    <a:bodyPr/>
+                    <a:lstStyle/>
+                    <a:p>
+                      <a:r>
+                        <a:rPr sz="1100" b="0">
+                          <a:solidFill>
+                            <a:srgbClr val="1A1A1A"/>
+                          </a:solidFill>
+                          <a:latin typeface="Meiryo"/>
+                          <a:ea typeface="Meiryo"/>
+                        </a:rPr>
+                        <a:t>随時</a:t>
+                      </a:r>
+                    </a:p>
+                  </a:txBody>
+                  <a:tcPr anchor="ctr" marL="73152" marR="73152">
+                    <a:solidFill>
+                      <a:srgbClr val="F2F4F6"/>
+                    </a:solidFill>
+                  </a:tcPr>
+                </a:tc>
+              </a:tr>
+            </a:tbl>
+          </a:graphicData>
+        </a:graphic>
+      </p:graphicFrame>
+      <p:sp>
+        <p:nvSpPr>
+          <p:cNvPr id="15" name="TextBox 14"/>
+          <p:cNvSpPr txBox="1"/>
+          <p:nvPr/>
+        </p:nvSpPr>
+        <p:spPr>
+          <a:xfrm>
+            <a:off x="640080" y="6126480"/>
+            <a:ext cx="10881360" cy="365760"/>
+          </a:xfrm>
+          <a:prstGeom prst="rect">
+            <a:avLst/>
+          </a:prstGeom>
+          <a:noFill/>
+        </p:spPr>
+        <p:txBody>
+          <a:bodyPr wrap="square" anchor="t" lIns="0" rIns="0" tIns="0" bIns="0">
+            <a:spAutoFit/>
+          </a:bodyPr>
+          <a:lstStyle/>
+          <a:p>
+            <a:pPr algn="l">
+              <a:spcAft>
+                <a:spcPts val="500"/>
+              </a:spcAft>
+            </a:pPr>
+            <a:r>
+              <a:rPr sz="1050" b="0">
+                <a:solidFill>
+                  <a:srgbClr val="5A626B"/>
+                </a:solidFill>
+                <a:latin typeface="Meiryo"/>
+                <a:ea typeface="Meiryo"/>
+              </a:rPr>
+              <a:t>※ 当社側メーリングリストは契約締結後にご案内します。開催当日の緊急連絡は会場ごとの当社担当(チーフスタッフ)と貴社運営ディレクター間で直接行います。</a:t>
             </a:r>
           </a:p>
         </p:txBody>
@@ -10284,7 +12429,7 @@
                 <a:latin typeface="Meiryo"/>
                 <a:ea typeface="Meiryo"/>
               </a:rPr>
-              <a:t>3. 実施の成立条件</a:t>
+              <a:t>3. ご提供価格(ソフトバンク様特別プラン)</a:t>
             </a:r>
           </a:p>
         </p:txBody>
@@ -10324,7 +12469,7 @@
                 <a:latin typeface="Meiryo"/>
                 <a:ea typeface="Meiryo"/>
               </a:rPr>
-              <a:t>特別価格の前提となる条件です。契約協議にて詳細を調整させてください</a:t>
+              <a:t>通常販売価格から大幅な特別価格でご提供します。本特別価格は年間契約+最低開催数保証のご締結を前提とした本件限りの条件です</a:t>
             </a:r>
           </a:p>
         </p:txBody>
@@ -10459,7 +12604,7 @@
         </p:nvGraphicFramePr>
         <p:xfrm>
           <a:off x="640080" y="1417320"/>
-          <a:ext cx="10881360" cy="4535424"/>
+          <a:ext cx="6309358" cy="2194560"/>
         </p:xfrm>
         <a:graphic>
           <a:graphicData uri="http://schemas.openxmlformats.org/drawingml/2006/table">
@@ -10468,25 +12613,25 @@
                 <a:tableStyleId>{5C22544A-7EE6-4342-B048-85BDC9FD1C3A}</a:tableStyleId>
               </a:tblPr>
               <a:tblGrid>
-                <a:gridCol w="544068"/>
-                <a:gridCol w="2720340"/>
-                <a:gridCol w="7616952"/>
+                <a:gridCol w="2575248"/>
+                <a:gridCol w="1673911"/>
+                <a:gridCol w="2060199"/>
               </a:tblGrid>
-              <a:tr h="566928">
-                <a:tc>
-                  <a:txBody>
-                    <a:bodyPr/>
-                    <a:lstStyle/>
-                    <a:p>
-                      <a:r>
-                        <a:rPr sz="1100" b="1">
+              <a:tr h="548640">
+                <a:tc>
+                  <a:txBody>
+                    <a:bodyPr/>
+                    <a:lstStyle/>
+                    <a:p>
+                      <a:r>
+                        <a:rPr sz="1150" b="1">
                           <a:solidFill>
                             <a:srgbClr val="FFFFFF"/>
                           </a:solidFill>
                           <a:latin typeface="Meiryo"/>
                           <a:ea typeface="Meiryo"/>
                         </a:rPr>
-                        <a:t>#</a:t>
+                        <a:t>キャラクターイベント稼働費</a:t>
                       </a:r>
                     </a:p>
                   </a:txBody>
@@ -10502,14 +12647,14 @@
                     <a:lstStyle/>
                     <a:p>
                       <a:r>
-                        <a:rPr sz="1100" b="1">
+                        <a:rPr sz="1150" b="1">
                           <a:solidFill>
                             <a:srgbClr val="FFFFFF"/>
                           </a:solidFill>
                           <a:latin typeface="Meiryo"/>
                           <a:ea typeface="Meiryo"/>
                         </a:rPr>
-                        <a:t>条件</a:t>
+                        <a:t>通常販売価格</a:t>
                       </a:r>
                     </a:p>
                   </a:txBody>
@@ -10525,14 +12670,14 @@
                     <a:lstStyle/>
                     <a:p>
                       <a:r>
-                        <a:rPr sz="1100" b="1">
+                        <a:rPr sz="1150" b="1">
                           <a:solidFill>
                             <a:srgbClr val="FFFFFF"/>
                           </a:solidFill>
                           <a:latin typeface="Meiryo"/>
                           <a:ea typeface="Meiryo"/>
                         </a:rPr>
-                        <a:t>内容</a:t>
+                        <a:t>SB様特別価格</a:t>
                       </a:r>
                     </a:p>
                   </a:txBody>
@@ -10543,21 +12688,21 @@
                   </a:tcPr>
                 </a:tc>
               </a:tr>
-              <a:tr h="566928">
-                <a:tc>
-                  <a:txBody>
-                    <a:bodyPr/>
-                    <a:lstStyle/>
-                    <a:p>
-                      <a:r>
-                        <a:rPr sz="1100" b="0">
-                          <a:solidFill>
-                            <a:srgbClr val="1A1A1A"/>
-                          </a:solidFill>
-                          <a:latin typeface="Meiryo"/>
-                          <a:ea typeface="Meiryo"/>
-                        </a:rPr>
-                        <a:t>1</a:t>
+              <a:tr h="548640">
+                <a:tc>
+                  <a:txBody>
+                    <a:bodyPr/>
+                    <a:lstStyle/>
+                    <a:p>
+                      <a:r>
+                        <a:rPr sz="1150" b="1">
+                          <a:solidFill>
+                            <a:srgbClr val="1A1A1A"/>
+                          </a:solidFill>
+                          <a:latin typeface="Meiryo"/>
+                          <a:ea typeface="Meiryo"/>
+                        </a:rPr>
+                        <a:t>1日稼働(1日最大5回公演)</a:t>
                       </a:r>
                     </a:p>
                   </a:txBody>
@@ -10573,14 +12718,14 @@
                     <a:lstStyle/>
                     <a:p>
                       <a:r>
-                        <a:rPr sz="1100" b="1">
-                          <a:solidFill>
-                            <a:srgbClr val="1A1A1A"/>
-                          </a:solidFill>
-                          <a:latin typeface="Meiryo"/>
-                          <a:ea typeface="Meiryo"/>
-                        </a:rPr>
-                        <a:t>契約期間・締結期限</a:t>
+                        <a:rPr sz="1150" b="0">
+                          <a:solidFill>
+                            <a:srgbClr val="1A1A1A"/>
+                          </a:solidFill>
+                          <a:latin typeface="Meiryo"/>
+                          <a:ea typeface="Meiryo"/>
+                        </a:rPr>
+                        <a:t>225,000円/日</a:t>
                       </a:r>
                     </a:p>
                   </a:txBody>
@@ -10596,14 +12741,14 @@
                     <a:lstStyle/>
                     <a:p>
                       <a:r>
-                        <a:rPr sz="1100" b="0">
-                          <a:solidFill>
-                            <a:srgbClr val="1A1A1A"/>
-                          </a:solidFill>
-                          <a:latin typeface="Meiryo"/>
-                          <a:ea typeface="Meiryo"/>
-                        </a:rPr>
-                        <a:t>2027年1月〜2029年3月(2年3ヶ月)。2026年11月末までのご締結(1月開始に必要な体制準備のため)</a:t>
+                        <a:rPr sz="1150" b="1">
+                          <a:solidFill>
+                            <a:srgbClr val="C00000"/>
+                          </a:solidFill>
+                          <a:latin typeface="Meiryo"/>
+                          <a:ea typeface="Meiryo"/>
+                        </a:rPr>
+                        <a:t>100,000円/日(▲55.6%)</a:t>
                       </a:r>
                     </a:p>
                   </a:txBody>
@@ -10614,21 +12759,21 @@
                   </a:tcPr>
                 </a:tc>
               </a:tr>
-              <a:tr h="566928">
-                <a:tc>
-                  <a:txBody>
-                    <a:bodyPr/>
-                    <a:lstStyle/>
-                    <a:p>
-                      <a:r>
-                        <a:rPr sz="1100" b="0">
-                          <a:solidFill>
-                            <a:srgbClr val="1A1A1A"/>
-                          </a:solidFill>
-                          <a:latin typeface="Meiryo"/>
-                          <a:ea typeface="Meiryo"/>
-                        </a:rPr>
-                        <a:t>2</a:t>
+              <a:tr h="548640">
+                <a:tc>
+                  <a:txBody>
+                    <a:bodyPr/>
+                    <a:lstStyle/>
+                    <a:p>
+                      <a:r>
+                        <a:rPr sz="1150" b="1">
+                          <a:solidFill>
+                            <a:srgbClr val="1A1A1A"/>
+                          </a:solidFill>
+                          <a:latin typeface="Meiryo"/>
+                          <a:ea typeface="Meiryo"/>
+                        </a:rPr>
+                        <a:t>土日2日間(1開催)</a:t>
                       </a:r>
                     </a:p>
                   </a:txBody>
@@ -10644,14 +12789,14 @@
                     <a:lstStyle/>
                     <a:p>
                       <a:r>
-                        <a:rPr sz="1100" b="1">
-                          <a:solidFill>
-                            <a:srgbClr val="1A1A1A"/>
-                          </a:solidFill>
-                          <a:latin typeface="Meiryo"/>
-                          <a:ea typeface="Meiryo"/>
-                        </a:rPr>
-                        <a:t>最低開催数保証</a:t>
+                        <a:rPr sz="1150" b="0">
+                          <a:solidFill>
+                            <a:srgbClr val="1A1A1A"/>
+                          </a:solidFill>
+                          <a:latin typeface="Meiryo"/>
+                          <a:ea typeface="Meiryo"/>
+                        </a:rPr>
+                        <a:t>450,000円</a:t>
                       </a:r>
                     </a:p>
                   </a:txBody>
@@ -10667,14 +12812,14 @@
                     <a:lstStyle/>
                     <a:p>
                       <a:r>
-                        <a:rPr sz="1100" b="0">
-                          <a:solidFill>
-                            <a:srgbClr val="1A1A1A"/>
-                          </a:solidFill>
-                          <a:latin typeface="Meiryo"/>
-                          <a:ea typeface="Meiryo"/>
-                        </a:rPr>
-                        <a:t>基準15ライン分の開催数を最低保証。未実施の場合も当該数量分を申し受け、各年度末に精算</a:t>
+                        <a:rPr sz="1150" b="1">
+                          <a:solidFill>
+                            <a:srgbClr val="C00000"/>
+                          </a:solidFill>
+                          <a:latin typeface="Meiryo"/>
+                          <a:ea typeface="Meiryo"/>
+                        </a:rPr>
+                        <a:t>200,000円</a:t>
                       </a:r>
                     </a:p>
                   </a:txBody>
@@ -10685,21 +12830,21 @@
                   </a:tcPr>
                 </a:tc>
               </a:tr>
-              <a:tr h="566928">
-                <a:tc>
-                  <a:txBody>
-                    <a:bodyPr/>
-                    <a:lstStyle/>
-                    <a:p>
-                      <a:r>
-                        <a:rPr sz="1100" b="0">
-                          <a:solidFill>
-                            <a:srgbClr val="1A1A1A"/>
-                          </a:solidFill>
-                          <a:latin typeface="Meiryo"/>
-                          <a:ea typeface="Meiryo"/>
-                        </a:rPr>
-                        <a:t>3</a:t>
+              <a:tr h="548640">
+                <a:tc>
+                  <a:txBody>
+                    <a:bodyPr/>
+                    <a:lstStyle/>
+                    <a:p>
+                      <a:r>
+                        <a:rPr sz="1150" b="1">
+                          <a:solidFill>
+                            <a:srgbClr val="1A1A1A"/>
+                          </a:solidFill>
+                          <a:latin typeface="Meiryo"/>
+                          <a:ea typeface="Meiryo"/>
+                        </a:rPr>
+                        <a:t>3連休通し(3日間)</a:t>
                       </a:r>
                     </a:p>
                   </a:txBody>
@@ -10715,14 +12860,14 @@
                     <a:lstStyle/>
                     <a:p>
                       <a:r>
-                        <a:rPr sz="1100" b="1">
-                          <a:solidFill>
-                            <a:srgbClr val="1A1A1A"/>
-                          </a:solidFill>
-                          <a:latin typeface="Meiryo"/>
-                          <a:ea typeface="Meiryo"/>
-                        </a:rPr>
-                        <a:t>開催確定とキャンセル</a:t>
+                        <a:rPr sz="1150" b="0">
+                          <a:solidFill>
+                            <a:srgbClr val="1A1A1A"/>
+                          </a:solidFill>
+                          <a:latin typeface="Meiryo"/>
+                          <a:ea typeface="Meiryo"/>
+                        </a:rPr>
+                        <a:t>675,000円</a:t>
                       </a:r>
                     </a:p>
                   </a:txBody>
@@ -10738,298 +12883,14 @@
                     <a:lstStyle/>
                     <a:p>
                       <a:r>
-                        <a:rPr sz="1100" b="0">
-                          <a:solidFill>
-                            <a:srgbClr val="1A1A1A"/>
-                          </a:solidFill>
-                          <a:latin typeface="Meiryo"/>
-                          <a:ea typeface="Meiryo"/>
-                        </a:rPr>
-                        <a:t>会場・日程は開催1ヶ月前までに確定。確定後のキャンセル料:1ヶ月前〜14日前30%/13日前〜7日前50%/6日前〜当日100%</a:t>
-                      </a:r>
-                    </a:p>
-                  </a:txBody>
-                  <a:tcPr anchor="ctr" marL="73152" marR="73152">
-                    <a:solidFill>
-                      <a:srgbClr val="FFFFFF"/>
-                    </a:solidFill>
-                  </a:tcPr>
-                </a:tc>
-              </a:tr>
-              <a:tr h="566928">
-                <a:tc>
-                  <a:txBody>
-                    <a:bodyPr/>
-                    <a:lstStyle/>
-                    <a:p>
-                      <a:r>
-                        <a:rPr sz="1100" b="0">
-                          <a:solidFill>
-                            <a:srgbClr val="1A1A1A"/>
-                          </a:solidFill>
-                          <a:latin typeface="Meiryo"/>
-                          <a:ea typeface="Meiryo"/>
-                        </a:rPr>
-                        <a:t>4</a:t>
-                      </a:r>
-                    </a:p>
-                  </a:txBody>
-                  <a:tcPr anchor="ctr" marL="73152" marR="73152">
-                    <a:solidFill>
-                      <a:srgbClr val="F2F4F6"/>
-                    </a:solidFill>
-                  </a:tcPr>
-                </a:tc>
-                <a:tc>
-                  <a:txBody>
-                    <a:bodyPr/>
-                    <a:lstStyle/>
-                    <a:p>
-                      <a:r>
-                        <a:rPr sz="1100" b="1">
-                          <a:solidFill>
-                            <a:srgbClr val="1A1A1A"/>
-                          </a:solidFill>
-                          <a:latin typeface="Meiryo"/>
-                          <a:ea typeface="Meiryo"/>
-                        </a:rPr>
-                        <a:t>ライン供給</a:t>
-                      </a:r>
-                    </a:p>
-                  </a:txBody>
-                  <a:tcPr anchor="ctr" marL="73152" marR="73152">
-                    <a:solidFill>
-                      <a:srgbClr val="F2F4F6"/>
-                    </a:solidFill>
-                  </a:tcPr>
-                </a:tc>
-                <a:tc>
-                  <a:txBody>
-                    <a:bodyPr/>
-                    <a:lstStyle/>
-                    <a:p>
-                      <a:r>
-                        <a:rPr sz="1100" b="0">
-                          <a:solidFill>
-                            <a:srgbClr val="1A1A1A"/>
-                          </a:solidFill>
-                          <a:latin typeface="Meiryo"/>
-                          <a:ea typeface="Meiryo"/>
-                        </a:rPr>
-                        <a:t>基準15ライン。余裕月(1・4・6・11・12月)は最大20ラインまで増枠可(次頁)</a:t>
-                      </a:r>
-                    </a:p>
-                  </a:txBody>
-                  <a:tcPr anchor="ctr" marL="73152" marR="73152">
-                    <a:solidFill>
-                      <a:srgbClr val="F2F4F6"/>
-                    </a:solidFill>
-                  </a:tcPr>
-                </a:tc>
-              </a:tr>
-              <a:tr h="566928">
-                <a:tc>
-                  <a:txBody>
-                    <a:bodyPr/>
-                    <a:lstStyle/>
-                    <a:p>
-                      <a:r>
-                        <a:rPr sz="1100" b="0">
-                          <a:solidFill>
-                            <a:srgbClr val="1A1A1A"/>
-                          </a:solidFill>
-                          <a:latin typeface="Meiryo"/>
-                          <a:ea typeface="Meiryo"/>
-                        </a:rPr>
-                        <a:t>5</a:t>
-                      </a:r>
-                    </a:p>
-                  </a:txBody>
-                  <a:tcPr anchor="ctr" marL="73152" marR="73152">
-                    <a:solidFill>
-                      <a:srgbClr val="FFFFFF"/>
-                    </a:solidFill>
-                  </a:tcPr>
-                </a:tc>
-                <a:tc>
-                  <a:txBody>
-                    <a:bodyPr/>
-                    <a:lstStyle/>
-                    <a:p>
-                      <a:r>
-                        <a:rPr sz="1100" b="1">
-                          <a:solidFill>
-                            <a:srgbClr val="1A1A1A"/>
-                          </a:solidFill>
-                          <a:latin typeface="Meiryo"/>
-                          <a:ea typeface="Meiryo"/>
-                        </a:rPr>
-                        <a:t>お支払い</a:t>
-                      </a:r>
-                    </a:p>
-                  </a:txBody>
-                  <a:tcPr anchor="ctr" marL="73152" marR="73152">
-                    <a:solidFill>
-                      <a:srgbClr val="FFFFFF"/>
-                    </a:solidFill>
-                  </a:tcPr>
-                </a:tc>
-                <a:tc>
-                  <a:txBody>
-                    <a:bodyPr/>
-                    <a:lstStyle/>
-                    <a:p>
-                      <a:r>
-                        <a:rPr sz="1100" b="0">
-                          <a:solidFill>
-                            <a:srgbClr val="1A1A1A"/>
-                          </a:solidFill>
-                          <a:latin typeface="Meiryo"/>
-                          <a:ea typeface="Meiryo"/>
-                        </a:rPr>
-                        <a:t>貴社EDI発注。IP使用料は年度前払い、保証分は四半期前払い(ご相談)。最低保証契約のため期間一括の発注形態をご相談</a:t>
-                      </a:r>
-                    </a:p>
-                  </a:txBody>
-                  <a:tcPr anchor="ctr" marL="73152" marR="73152">
-                    <a:solidFill>
-                      <a:srgbClr val="FFFFFF"/>
-                    </a:solidFill>
-                  </a:tcPr>
-                </a:tc>
-              </a:tr>
-              <a:tr h="566928">
-                <a:tc>
-                  <a:txBody>
-                    <a:bodyPr/>
-                    <a:lstStyle/>
-                    <a:p>
-                      <a:r>
-                        <a:rPr sz="1100" b="0">
-                          <a:solidFill>
-                            <a:srgbClr val="1A1A1A"/>
-                          </a:solidFill>
-                          <a:latin typeface="Meiryo"/>
-                          <a:ea typeface="Meiryo"/>
-                        </a:rPr>
-                        <a:t>6</a:t>
-                      </a:r>
-                    </a:p>
-                  </a:txBody>
-                  <a:tcPr anchor="ctr" marL="73152" marR="73152">
-                    <a:solidFill>
-                      <a:srgbClr val="F2F4F6"/>
-                    </a:solidFill>
-                  </a:tcPr>
-                </a:tc>
-                <a:tc>
-                  <a:txBody>
-                    <a:bodyPr/>
-                    <a:lstStyle/>
-                    <a:p>
-                      <a:r>
-                        <a:rPr sz="1100" b="1">
-                          <a:solidFill>
-                            <a:srgbClr val="1A1A1A"/>
-                          </a:solidFill>
-                          <a:latin typeface="Meiryo"/>
-                          <a:ea typeface="Meiryo"/>
-                        </a:rPr>
-                        <a:t>エリア・キャラクター</a:t>
-                      </a:r>
-                    </a:p>
-                  </a:txBody>
-                  <a:tcPr anchor="ctr" marL="73152" marR="73152">
-                    <a:solidFill>
-                      <a:srgbClr val="F2F4F6"/>
-                    </a:solidFill>
-                  </a:tcPr>
-                </a:tc>
-                <a:tc>
-                  <a:txBody>
-                    <a:bodyPr/>
-                    <a:lstStyle/>
-                    <a:p>
-                      <a:r>
-                        <a:rPr sz="1100" b="0">
-                          <a:solidFill>
-                            <a:srgbClr val="1A1A1A"/>
-                          </a:solidFill>
-                          <a:latin typeface="Meiryo"/>
-                          <a:ea typeface="Meiryo"/>
-                        </a:rPr>
-                        <a:t>北関東エリアは2027年1〜3月は実施不可(4月以降可)。ウルトラセブンは対象外。出演は8ヒーロー</a:t>
-                      </a:r>
-                    </a:p>
-                  </a:txBody>
-                  <a:tcPr anchor="ctr" marL="73152" marR="73152">
-                    <a:solidFill>
-                      <a:srgbClr val="F2F4F6"/>
-                    </a:solidFill>
-                  </a:tcPr>
-                </a:tc>
-              </a:tr>
-              <a:tr h="566928">
-                <a:tc>
-                  <a:txBody>
-                    <a:bodyPr/>
-                    <a:lstStyle/>
-                    <a:p>
-                      <a:r>
-                        <a:rPr sz="1100" b="0">
-                          <a:solidFill>
-                            <a:srgbClr val="1A1A1A"/>
-                          </a:solidFill>
-                          <a:latin typeface="Meiryo"/>
-                          <a:ea typeface="Meiryo"/>
-                        </a:rPr>
-                        <a:t>7</a:t>
-                      </a:r>
-                    </a:p>
-                  </a:txBody>
-                  <a:tcPr anchor="ctr" marL="73152" marR="73152">
-                    <a:solidFill>
-                      <a:srgbClr val="FFFFFF"/>
-                    </a:solidFill>
-                  </a:tcPr>
-                </a:tc>
-                <a:tc>
-                  <a:txBody>
-                    <a:bodyPr/>
-                    <a:lstStyle/>
-                    <a:p>
-                      <a:r>
-                        <a:rPr sz="1100" b="1">
-                          <a:solidFill>
-                            <a:srgbClr val="1A1A1A"/>
-                          </a:solidFill>
-                          <a:latin typeface="Meiryo"/>
-                          <a:ea typeface="Meiryo"/>
-                        </a:rPr>
-                        <a:t>排他条件</a:t>
-                      </a:r>
-                    </a:p>
-                  </a:txBody>
-                  <a:tcPr anchor="ctr" marL="73152" marR="73152">
-                    <a:solidFill>
-                      <a:srgbClr val="FFFFFF"/>
-                    </a:solidFill>
-                  </a:tcPr>
-                </a:tc>
-                <a:tc>
-                  <a:txBody>
-                    <a:bodyPr/>
-                    <a:lstStyle/>
-                    <a:p>
-                      <a:r>
-                        <a:rPr sz="1100" b="0">
-                          <a:solidFill>
-                            <a:srgbClr val="1A1A1A"/>
-                          </a:solidFill>
-                          <a:latin typeface="Meiryo"/>
-                          <a:ea typeface="Meiryo"/>
-                        </a:rPr>
-                        <a:t>契約期間中、当社は国内の他の携帯キャリア(3社)との店頭イベント契約を行いません</a:t>
+                        <a:rPr sz="1150" b="1">
+                          <a:solidFill>
+                            <a:srgbClr val="C00000"/>
+                          </a:solidFill>
+                          <a:latin typeface="Meiryo"/>
+                          <a:ea typeface="Meiryo"/>
+                        </a:rPr>
+                        <a:t>300,000円</a:t>
                       </a:r>
                     </a:p>
                   </a:txBody>
@@ -11052,8 +12913,8 @@
         </p:nvSpPr>
         <p:spPr>
           <a:xfrm>
-            <a:off x="640080" y="5943600"/>
-            <a:ext cx="10881360" cy="457200"/>
+            <a:off x="640080" y="3703320"/>
+            <a:ext cx="6309360" cy="1097280"/>
           </a:xfrm>
           <a:prstGeom prst="rect">
             <a:avLst/>
@@ -11068,7 +12929,7 @@
           <a:p>
             <a:pPr algn="l">
               <a:spcAft>
-                <a:spcPts val="500"/>
+                <a:spcPts val="300"/>
               </a:spcAft>
             </a:pPr>
             <a:r>
@@ -11079,7 +12940,441 @@
                 <a:latin typeface="Meiryo"/>
                 <a:ea typeface="Meiryo"/>
               </a:rPr>
-              <a:t>※ キャンセル料は7月ご提案時のスポット向け規定から、本契約(最低保証・1ヶ月前確定フロー)向けの規定に更新しています</a:t>
+              <a:t>特別価格の内訳(1日):キャラクター使用料 40,000円/担当 35,000円/スーツアクター 25,000円</a:t>
+            </a:r>
+          </a:p>
+          <a:p>
+            <a:pPr algn="l">
+              <a:spcAft>
+                <a:spcPts val="300"/>
+              </a:spcAft>
+            </a:pPr>
+            <a:r>
+              <a:rPr sz="1050" b="0">
+                <a:solidFill>
+                  <a:srgbClr val="5A626B"/>
+                </a:solidFill>
+                <a:latin typeface="Meiryo"/>
+                <a:ea typeface="Meiryo"/>
+              </a:rPr>
+              <a:t>通常販売価格は同一スコープ(キャラクター使用料+担当+アクター・5回公演対応)での当社標準価格です</a:t>
+            </a:r>
+          </a:p>
+        </p:txBody>
+      </p:sp>
+      <p:graphicFrame>
+        <p:nvGraphicFramePr>
+          <p:cNvPr id="10" name="Table 9"/>
+          <p:cNvGraphicFramePr>
+            <a:graphicFrameLocks noGrp="1"/>
+          </p:cNvGraphicFramePr>
+          <p:nvPr/>
+        </p:nvGraphicFramePr>
+        <p:xfrm>
+          <a:off x="7223760" y="1417320"/>
+          <a:ext cx="4297679" cy="3291839"/>
+        </p:xfrm>
+        <a:graphic>
+          <a:graphicData uri="http://schemas.openxmlformats.org/drawingml/2006/table">
+            <a:tbl>
+              <a:tblPr firstRow="1" bandRow="1">
+                <a:tableStyleId>{5C22544A-7EE6-4342-B048-85BDC9FD1C3A}</a:tableStyleId>
+              </a:tblPr>
+              <a:tblGrid>
+                <a:gridCol w="2079522"/>
+                <a:gridCol w="2218157"/>
+              </a:tblGrid>
+              <a:tr h="548639">
+                <a:tc>
+                  <a:txBody>
+                    <a:bodyPr/>
+                    <a:lstStyle/>
+                    <a:p>
+                      <a:r>
+                        <a:rPr sz="1100" b="1">
+                          <a:solidFill>
+                            <a:srgbClr val="FFFFFF"/>
+                          </a:solidFill>
+                          <a:latin typeface="Meiryo"/>
+                          <a:ea typeface="Meiryo"/>
+                        </a:rPr>
+                        <a:t>その他の費目</a:t>
+                      </a:r>
+                    </a:p>
+                  </a:txBody>
+                  <a:tcPr anchor="ctr" marL="73152" marR="73152">
+                    <a:solidFill>
+                      <a:srgbClr val="232278"/>
+                    </a:solidFill>
+                  </a:tcPr>
+                </a:tc>
+                <a:tc>
+                  <a:txBody>
+                    <a:bodyPr/>
+                    <a:lstStyle/>
+                    <a:p>
+                      <a:r>
+                        <a:rPr sz="1100" b="1">
+                          <a:solidFill>
+                            <a:srgbClr val="FFFFFF"/>
+                          </a:solidFill>
+                          <a:latin typeface="Meiryo"/>
+                          <a:ea typeface="Meiryo"/>
+                        </a:rPr>
+                        <a:t>金額</a:t>
+                      </a:r>
+                    </a:p>
+                  </a:txBody>
+                  <a:tcPr anchor="ctr" marL="73152" marR="73152">
+                    <a:solidFill>
+                      <a:srgbClr val="232278"/>
+                    </a:solidFill>
+                  </a:tcPr>
+                </a:tc>
+              </a:tr>
+              <a:tr h="548639">
+                <a:tc>
+                  <a:txBody>
+                    <a:bodyPr/>
+                    <a:lstStyle/>
+                    <a:p>
+                      <a:r>
+                        <a:rPr sz="1100" b="1">
+                          <a:solidFill>
+                            <a:srgbClr val="1A1A1A"/>
+                          </a:solidFill>
+                          <a:latin typeface="Meiryo"/>
+                          <a:ea typeface="Meiryo"/>
+                        </a:rPr>
+                        <a:t>年間IP使用料</a:t>
+                      </a:r>
+                    </a:p>
+                  </a:txBody>
+                  <a:tcPr anchor="ctr" marL="73152" marR="73152">
+                    <a:solidFill>
+                      <a:srgbClr val="FFFFFF"/>
+                    </a:solidFill>
+                  </a:tcPr>
+                </a:tc>
+                <a:tc>
+                  <a:txBody>
+                    <a:bodyPr/>
+                    <a:lstStyle/>
+                    <a:p>
+                      <a:r>
+                        <a:rPr sz="1100" b="0">
+                          <a:solidFill>
+                            <a:srgbClr val="1A1A1A"/>
+                          </a:solidFill>
+                          <a:latin typeface="Meiryo"/>
+                          <a:ea typeface="Meiryo"/>
+                        </a:rPr>
+                        <a:t>2,000万円/年</a:t>
+                      </a:r>
+                    </a:p>
+                  </a:txBody>
+                  <a:tcPr anchor="ctr" marL="73152" marR="73152">
+                    <a:solidFill>
+                      <a:srgbClr val="FFFFFF"/>
+                    </a:solidFill>
+                  </a:tcPr>
+                </a:tc>
+              </a:tr>
+              <a:tr h="548639">
+                <a:tc>
+                  <a:txBody>
+                    <a:bodyPr/>
+                    <a:lstStyle/>
+                    <a:p>
+                      <a:r>
+                        <a:rPr sz="1100" b="1">
+                          <a:solidFill>
+                            <a:srgbClr val="1A1A1A"/>
+                          </a:solidFill>
+                          <a:latin typeface="Meiryo"/>
+                          <a:ea typeface="Meiryo"/>
+                        </a:rPr>
+                        <a:t>作成許諾ロイヤリティ</a:t>
+                      </a:r>
+                    </a:p>
+                  </a:txBody>
+                  <a:tcPr anchor="ctr" marL="73152" marR="73152">
+                    <a:solidFill>
+                      <a:srgbClr val="F2F4F6"/>
+                    </a:solidFill>
+                  </a:tcPr>
+                </a:tc>
+                <a:tc>
+                  <a:txBody>
+                    <a:bodyPr/>
+                    <a:lstStyle/>
+                    <a:p>
+                      <a:r>
+                        <a:rPr sz="1100" b="0">
+                          <a:solidFill>
+                            <a:srgbClr val="1A1A1A"/>
+                          </a:solidFill>
+                          <a:latin typeface="Meiryo"/>
+                          <a:ea typeface="Meiryo"/>
+                        </a:rPr>
+                        <a:t>作成費用の20%</a:t>
+                      </a:r>
+                    </a:p>
+                  </a:txBody>
+                  <a:tcPr anchor="ctr" marL="73152" marR="73152">
+                    <a:solidFill>
+                      <a:srgbClr val="F2F4F6"/>
+                    </a:solidFill>
+                  </a:tcPr>
+                </a:tc>
+              </a:tr>
+              <a:tr h="548639">
+                <a:tc>
+                  <a:txBody>
+                    <a:bodyPr/>
+                    <a:lstStyle/>
+                    <a:p>
+                      <a:r>
+                        <a:rPr sz="1100" b="1">
+                          <a:solidFill>
+                            <a:srgbClr val="1A1A1A"/>
+                          </a:solidFill>
+                          <a:latin typeface="Meiryo"/>
+                          <a:ea typeface="Meiryo"/>
+                        </a:rPr>
+                        <a:t>フル運営オプション</a:t>
+                      </a:r>
+                    </a:p>
+                  </a:txBody>
+                  <a:tcPr anchor="ctr" marL="73152" marR="73152">
+                    <a:solidFill>
+                      <a:srgbClr val="FFFFFF"/>
+                    </a:solidFill>
+                  </a:tcPr>
+                </a:tc>
+                <a:tc>
+                  <a:txBody>
+                    <a:bodyPr/>
+                    <a:lstStyle/>
+                    <a:p>
+                      <a:r>
+                        <a:rPr sz="1100" b="0">
+                          <a:solidFill>
+                            <a:srgbClr val="1A1A1A"/>
+                          </a:solidFill>
+                          <a:latin typeface="Meiryo"/>
+                          <a:ea typeface="Meiryo"/>
+                        </a:rPr>
+                        <a:t>+220,000円/日</a:t>
+                      </a:r>
+                    </a:p>
+                  </a:txBody>
+                  <a:tcPr anchor="ctr" marL="73152" marR="73152">
+                    <a:solidFill>
+                      <a:srgbClr val="FFFFFF"/>
+                    </a:solidFill>
+                  </a:tcPr>
+                </a:tc>
+              </a:tr>
+              <a:tr h="548639">
+                <a:tc>
+                  <a:txBody>
+                    <a:bodyPr/>
+                    <a:lstStyle/>
+                    <a:p>
+                      <a:r>
+                        <a:rPr sz="1100" b="1">
+                          <a:solidFill>
+                            <a:srgbClr val="1A1A1A"/>
+                          </a:solidFill>
+                          <a:latin typeface="Meiryo"/>
+                          <a:ea typeface="Meiryo"/>
+                        </a:rPr>
+                        <a:t>現場諸経費</a:t>
+                      </a:r>
+                    </a:p>
+                  </a:txBody>
+                  <a:tcPr anchor="ctr" marL="73152" marR="73152">
+                    <a:solidFill>
+                      <a:srgbClr val="F2F4F6"/>
+                    </a:solidFill>
+                  </a:tcPr>
+                </a:tc>
+                <a:tc>
+                  <a:txBody>
+                    <a:bodyPr/>
+                    <a:lstStyle/>
+                    <a:p>
+                      <a:r>
+                        <a:rPr sz="1100" b="0">
+                          <a:solidFill>
+                            <a:srgbClr val="1A1A1A"/>
+                          </a:solidFill>
+                          <a:latin typeface="Meiryo"/>
+                          <a:ea typeface="Meiryo"/>
+                        </a:rPr>
+                        <a:t>20,000円/日</a:t>
+                      </a:r>
+                    </a:p>
+                  </a:txBody>
+                  <a:tcPr anchor="ctr" marL="73152" marR="73152">
+                    <a:solidFill>
+                      <a:srgbClr val="F2F4F6"/>
+                    </a:solidFill>
+                  </a:tcPr>
+                </a:tc>
+              </a:tr>
+              <a:tr h="548644">
+                <a:tc>
+                  <a:txBody>
+                    <a:bodyPr/>
+                    <a:lstStyle/>
+                    <a:p>
+                      <a:r>
+                        <a:rPr sz="1100" b="1">
+                          <a:solidFill>
+                            <a:srgbClr val="1A1A1A"/>
+                          </a:solidFill>
+                          <a:latin typeface="Meiryo"/>
+                          <a:ea typeface="Meiryo"/>
+                        </a:rPr>
+                        <a:t>実費</a:t>
+                      </a:r>
+                    </a:p>
+                  </a:txBody>
+                  <a:tcPr anchor="ctr" marL="73152" marR="73152">
+                    <a:solidFill>
+                      <a:srgbClr val="FFFFFF"/>
+                    </a:solidFill>
+                  </a:tcPr>
+                </a:tc>
+                <a:tc>
+                  <a:txBody>
+                    <a:bodyPr/>
+                    <a:lstStyle/>
+                    <a:p>
+                      <a:r>
+                        <a:rPr sz="1100" b="0">
+                          <a:solidFill>
+                            <a:srgbClr val="1A1A1A"/>
+                          </a:solidFill>
+                          <a:latin typeface="Meiryo"/>
+                          <a:ea typeface="Meiryo"/>
+                        </a:rPr>
+                        <a:t>交通運搬・宿泊・スーツ送料(基準料金表)</a:t>
+                      </a:r>
+                    </a:p>
+                  </a:txBody>
+                  <a:tcPr anchor="ctr" marL="73152" marR="73152">
+                    <a:solidFill>
+                      <a:srgbClr val="FFFFFF"/>
+                    </a:solidFill>
+                  </a:tcPr>
+                </a:tc>
+              </a:tr>
+            </a:tbl>
+          </a:graphicData>
+        </a:graphic>
+      </p:graphicFrame>
+      <p:sp>
+        <p:nvSpPr>
+          <p:cNvPr id="11" name="Rounded Rectangle 10"/>
+          <p:cNvSpPr/>
+          <p:nvPr/>
+        </p:nvSpPr>
+        <p:spPr>
+          <a:xfrm>
+            <a:off x="640080" y="4892040"/>
+            <a:ext cx="10881360" cy="1188720"/>
+          </a:xfrm>
+          <a:prstGeom prst="roundRect">
+            <a:avLst>
+              <a:gd name="adj" fmla="val 7000"/>
+            </a:avLst>
+          </a:prstGeom>
+          <a:solidFill>
+            <a:srgbClr val="F2F4F6"/>
+          </a:solidFill>
+          <a:ln>
+            <a:noFill/>
+          </a:ln>
+          <a:effectLst/>
+        </p:spPr>
+        <p:style>
+          <a:lnRef idx="1">
+            <a:schemeClr val="accent1"/>
+          </a:lnRef>
+          <a:fillRef idx="3">
+            <a:schemeClr val="accent1"/>
+          </a:fillRef>
+          <a:effectRef idx="2">
+            <a:schemeClr val="accent1"/>
+          </a:effectRef>
+          <a:fontRef idx="minor">
+            <a:schemeClr val="lt1"/>
+          </a:fontRef>
+        </p:style>
+        <p:txBody>
+          <a:bodyPr rtlCol="0" anchor="ctr"/>
+          <a:lstStyle/>
+          <a:p>
+            <a:pPr algn="ctr"/>
+          </a:p>
+        </p:txBody>
+      </p:sp>
+      <p:sp>
+        <p:nvSpPr>
+          <p:cNvPr id="12" name="TextBox 11"/>
+          <p:cNvSpPr txBox="1"/>
+          <p:nvPr/>
+        </p:nvSpPr>
+        <p:spPr>
+          <a:xfrm>
+            <a:off x="914400" y="5029200"/>
+            <a:ext cx="10332720" cy="1005840"/>
+          </a:xfrm>
+          <a:prstGeom prst="rect">
+            <a:avLst/>
+          </a:prstGeom>
+          <a:noFill/>
+        </p:spPr>
+        <p:txBody>
+          <a:bodyPr wrap="square" anchor="t" lIns="0" rIns="0" tIns="0" bIns="0">
+            <a:spAutoFit/>
+          </a:bodyPr>
+          <a:lstStyle/>
+          <a:p>
+            <a:pPr algn="l">
+              <a:spcAft>
+                <a:spcPts val="400"/>
+              </a:spcAft>
+            </a:pPr>
+            <a:r>
+              <a:rPr sz="1250" b="1">
+                <a:solidFill>
+                  <a:srgbClr val="C00000"/>
+                </a:solidFill>
+                <a:latin typeface="Meiryo"/>
+                <a:ea typeface="Meiryo"/>
+              </a:rPr>
+              <a:t>年間IP使用料に含まれるもの</a:t>
+            </a:r>
+          </a:p>
+          <a:p>
+            <a:pPr algn="l">
+              <a:spcAft>
+                <a:spcPts val="400"/>
+              </a:spcAft>
+            </a:pPr>
+            <a:r>
+              <a:rPr sz="1150" b="0">
+                <a:solidFill>
+                  <a:srgbClr val="1A1A1A"/>
+                </a:solidFill>
+                <a:latin typeface="Meiryo"/>
+                <a:ea typeface="Meiryo"/>
+              </a:rPr>
+              <a:t>店頭イベント・イベントキット・店頭訴求ツール・LP/Web・SNSでのIP利用、作成物の監修対応、8ヒーローの選択・切替、キャラクター素材・運営マニュアルの提供</a:t>
             </a:r>
           </a:p>
         </p:txBody>
@@ -11161,7 +13456,7 @@
                 <a:latin typeface="Meiryo"/>
                 <a:ea typeface="Meiryo"/>
               </a:rPr>
-              <a:t>3. ライン供給計画(2027年1月〜2029年3月)</a:t>
+              <a:t>3. 実施の成立条件</a:t>
             </a:r>
           </a:p>
         </p:txBody>
@@ -11201,7 +13496,7 @@
                 <a:latin typeface="Meiryo"/>
                 <a:ea typeface="Meiryo"/>
               </a:rPr>
-              <a:t>基準15ラインを最低保証の対象とし、余裕のある月は最大20ラインまで増枠できます。詳細は別紙(月別供給計画)をご参照ください</a:t>
+              <a:t>特別価格の前提となる条件です。契約協議にて詳細を調整させてください</a:t>
             </a:r>
           </a:p>
         </p:txBody>
@@ -11336,7 +13631,7 @@
         </p:nvGraphicFramePr>
         <p:xfrm>
           <a:off x="640080" y="1417320"/>
-          <a:ext cx="10881356" cy="1828800"/>
+          <a:ext cx="10881360" cy="4535424"/>
         </p:xfrm>
         <a:graphic>
           <a:graphicData uri="http://schemas.openxmlformats.org/drawingml/2006/table">
@@ -11345,21 +13640,11 @@
                 <a:tableStyleId>{5C22544A-7EE6-4342-B048-85BDC9FD1C3A}</a:tableStyleId>
               </a:tblPr>
               <a:tblGrid>
-                <a:gridCol w="2123192"/>
-                <a:gridCol w="729847"/>
-                <a:gridCol w="729847"/>
-                <a:gridCol w="729847"/>
-                <a:gridCol w="729847"/>
-                <a:gridCol w="729847"/>
-                <a:gridCol w="729847"/>
-                <a:gridCol w="729847"/>
-                <a:gridCol w="729847"/>
-                <a:gridCol w="729847"/>
-                <a:gridCol w="729847"/>
-                <a:gridCol w="729847"/>
-                <a:gridCol w="729847"/>
+                <a:gridCol w="544068"/>
+                <a:gridCol w="2720340"/>
+                <a:gridCol w="7616952"/>
               </a:tblGrid>
-              <a:tr h="457200">
+              <a:tr h="566928">
                 <a:tc>
                   <a:txBody>
                     <a:bodyPr/>
@@ -11373,7 +13658,7 @@
                           <a:latin typeface="Meiryo"/>
                           <a:ea typeface="Meiryo"/>
                         </a:rPr>
-                        <a:t/>
+                        <a:t>#</a:t>
                       </a:r>
                     </a:p>
                   </a:txBody>
@@ -11396,7 +13681,7 @@
                           <a:latin typeface="Meiryo"/>
                           <a:ea typeface="Meiryo"/>
                         </a:rPr>
-                        <a:t>1月</a:t>
+                        <a:t>条件</a:t>
                       </a:r>
                     </a:p>
                   </a:txBody>
@@ -11419,7 +13704,7 @@
                           <a:latin typeface="Meiryo"/>
                           <a:ea typeface="Meiryo"/>
                         </a:rPr>
-                        <a:t>2月</a:t>
+                        <a:t>内容</a:t>
                       </a:r>
                     </a:p>
                   </a:txBody>
@@ -11429,6 +13714,31 @@
                     </a:solidFill>
                   </a:tcPr>
                 </a:tc>
+              </a:tr>
+              <a:tr h="566928">
+                <a:tc>
+                  <a:txBody>
+                    <a:bodyPr/>
+                    <a:lstStyle/>
+                    <a:p>
+                      <a:r>
+                        <a:rPr sz="1100" b="0">
+                          <a:solidFill>
+                            <a:srgbClr val="1A1A1A"/>
+                          </a:solidFill>
+                          <a:latin typeface="Meiryo"/>
+                          <a:ea typeface="Meiryo"/>
+                        </a:rPr>
+                        <a:t>1</a:t>
+                      </a:r>
+                    </a:p>
+                  </a:txBody>
+                  <a:tcPr anchor="ctr" marL="73152" marR="73152">
+                    <a:solidFill>
+                      <a:srgbClr val="FFFFFF"/>
+                    </a:solidFill>
+                  </a:tcPr>
+                </a:tc>
                 <a:tc>
                   <a:txBody>
                     <a:bodyPr/>
@@ -11437,18 +13747,66 @@
                       <a:r>
                         <a:rPr sz="1100" b="1">
                           <a:solidFill>
-                            <a:srgbClr val="FFFFFF"/>
-                          </a:solidFill>
-                          <a:latin typeface="Meiryo"/>
-                          <a:ea typeface="Meiryo"/>
-                        </a:rPr>
-                        <a:t>3月</a:t>
-                      </a:r>
-                    </a:p>
-                  </a:txBody>
-                  <a:tcPr anchor="ctr" marL="73152" marR="73152">
-                    <a:solidFill>
-                      <a:srgbClr val="232278"/>
+                            <a:srgbClr val="1A1A1A"/>
+                          </a:solidFill>
+                          <a:latin typeface="Meiryo"/>
+                          <a:ea typeface="Meiryo"/>
+                        </a:rPr>
+                        <a:t>契約期間・締結期限</a:t>
+                      </a:r>
+                    </a:p>
+                  </a:txBody>
+                  <a:tcPr anchor="ctr" marL="73152" marR="73152">
+                    <a:solidFill>
+                      <a:srgbClr val="FFFFFF"/>
+                    </a:solidFill>
+                  </a:tcPr>
+                </a:tc>
+                <a:tc>
+                  <a:txBody>
+                    <a:bodyPr/>
+                    <a:lstStyle/>
+                    <a:p>
+                      <a:r>
+                        <a:rPr sz="1100" b="0">
+                          <a:solidFill>
+                            <a:srgbClr val="1A1A1A"/>
+                          </a:solidFill>
+                          <a:latin typeface="Meiryo"/>
+                          <a:ea typeface="Meiryo"/>
+                        </a:rPr>
+                        <a:t>2027年1月〜2029年3月(2年3ヶ月)。2026年11月末までのご締結(1月開始に必要な体制準備のため)</a:t>
+                      </a:r>
+                    </a:p>
+                  </a:txBody>
+                  <a:tcPr anchor="ctr" marL="73152" marR="73152">
+                    <a:solidFill>
+                      <a:srgbClr val="FFFFFF"/>
+                    </a:solidFill>
+                  </a:tcPr>
+                </a:tc>
+              </a:tr>
+              <a:tr h="566928">
+                <a:tc>
+                  <a:txBody>
+                    <a:bodyPr/>
+                    <a:lstStyle/>
+                    <a:p>
+                      <a:r>
+                        <a:rPr sz="1100" b="0">
+                          <a:solidFill>
+                            <a:srgbClr val="1A1A1A"/>
+                          </a:solidFill>
+                          <a:latin typeface="Meiryo"/>
+                          <a:ea typeface="Meiryo"/>
+                        </a:rPr>
+                        <a:t>2</a:t>
+                      </a:r>
+                    </a:p>
+                  </a:txBody>
+                  <a:tcPr anchor="ctr" marL="73152" marR="73152">
+                    <a:solidFill>
+                      <a:srgbClr val="F2F4F6"/>
                     </a:solidFill>
                   </a:tcPr>
                 </a:tc>
@@ -11460,18 +13818,66 @@
                       <a:r>
                         <a:rPr sz="1100" b="1">
                           <a:solidFill>
-                            <a:srgbClr val="FFFFFF"/>
-                          </a:solidFill>
-                          <a:latin typeface="Meiryo"/>
-                          <a:ea typeface="Meiryo"/>
-                        </a:rPr>
-                        <a:t>4月</a:t>
-                      </a:r>
-                    </a:p>
-                  </a:txBody>
-                  <a:tcPr anchor="ctr" marL="73152" marR="73152">
-                    <a:solidFill>
-                      <a:srgbClr val="232278"/>
+                            <a:srgbClr val="1A1A1A"/>
+                          </a:solidFill>
+                          <a:latin typeface="Meiryo"/>
+                          <a:ea typeface="Meiryo"/>
+                        </a:rPr>
+                        <a:t>最低開催数保証</a:t>
+                      </a:r>
+                    </a:p>
+                  </a:txBody>
+                  <a:tcPr anchor="ctr" marL="73152" marR="73152">
+                    <a:solidFill>
+                      <a:srgbClr val="F2F4F6"/>
+                    </a:solidFill>
+                  </a:tcPr>
+                </a:tc>
+                <a:tc>
+                  <a:txBody>
+                    <a:bodyPr/>
+                    <a:lstStyle/>
+                    <a:p>
+                      <a:r>
+                        <a:rPr sz="1100" b="0">
+                          <a:solidFill>
+                            <a:srgbClr val="1A1A1A"/>
+                          </a:solidFill>
+                          <a:latin typeface="Meiryo"/>
+                          <a:ea typeface="Meiryo"/>
+                        </a:rPr>
+                        <a:t>基準15ライン分の開催数を最低保証。未実施の場合も当該数量分を申し受け、各年度末に精算</a:t>
+                      </a:r>
+                    </a:p>
+                  </a:txBody>
+                  <a:tcPr anchor="ctr" marL="73152" marR="73152">
+                    <a:solidFill>
+                      <a:srgbClr val="F2F4F6"/>
+                    </a:solidFill>
+                  </a:tcPr>
+                </a:tc>
+              </a:tr>
+              <a:tr h="566928">
+                <a:tc>
+                  <a:txBody>
+                    <a:bodyPr/>
+                    <a:lstStyle/>
+                    <a:p>
+                      <a:r>
+                        <a:rPr sz="1100" b="0">
+                          <a:solidFill>
+                            <a:srgbClr val="1A1A1A"/>
+                          </a:solidFill>
+                          <a:latin typeface="Meiryo"/>
+                          <a:ea typeface="Meiryo"/>
+                        </a:rPr>
+                        <a:t>3</a:t>
+                      </a:r>
+                    </a:p>
+                  </a:txBody>
+                  <a:tcPr anchor="ctr" marL="73152" marR="73152">
+                    <a:solidFill>
+                      <a:srgbClr val="FFFFFF"/>
                     </a:solidFill>
                   </a:tcPr>
                 </a:tc>
@@ -11483,18 +13889,66 @@
                       <a:r>
                         <a:rPr sz="1100" b="1">
                           <a:solidFill>
-                            <a:srgbClr val="FFFFFF"/>
-                          </a:solidFill>
-                          <a:latin typeface="Meiryo"/>
-                          <a:ea typeface="Meiryo"/>
-                        </a:rPr>
-                        <a:t>5月</a:t>
-                      </a:r>
-                    </a:p>
-                  </a:txBody>
-                  <a:tcPr anchor="ctr" marL="73152" marR="73152">
-                    <a:solidFill>
-                      <a:srgbClr val="232278"/>
+                            <a:srgbClr val="1A1A1A"/>
+                          </a:solidFill>
+                          <a:latin typeface="Meiryo"/>
+                          <a:ea typeface="Meiryo"/>
+                        </a:rPr>
+                        <a:t>開催確定とキャンセル</a:t>
+                      </a:r>
+                    </a:p>
+                  </a:txBody>
+                  <a:tcPr anchor="ctr" marL="73152" marR="73152">
+                    <a:solidFill>
+                      <a:srgbClr val="FFFFFF"/>
+                    </a:solidFill>
+                  </a:tcPr>
+                </a:tc>
+                <a:tc>
+                  <a:txBody>
+                    <a:bodyPr/>
+                    <a:lstStyle/>
+                    <a:p>
+                      <a:r>
+                        <a:rPr sz="1100" b="0">
+                          <a:solidFill>
+                            <a:srgbClr val="1A1A1A"/>
+                          </a:solidFill>
+                          <a:latin typeface="Meiryo"/>
+                          <a:ea typeface="Meiryo"/>
+                        </a:rPr>
+                        <a:t>会場・日程は開催1ヶ月前までに確定。確定後のキャンセル料:1ヶ月前〜14日前30%/13日前〜7日前50%/6日前〜当日100%</a:t>
+                      </a:r>
+                    </a:p>
+                  </a:txBody>
+                  <a:tcPr anchor="ctr" marL="73152" marR="73152">
+                    <a:solidFill>
+                      <a:srgbClr val="FFFFFF"/>
+                    </a:solidFill>
+                  </a:tcPr>
+                </a:tc>
+              </a:tr>
+              <a:tr h="566928">
+                <a:tc>
+                  <a:txBody>
+                    <a:bodyPr/>
+                    <a:lstStyle/>
+                    <a:p>
+                      <a:r>
+                        <a:rPr sz="1100" b="0">
+                          <a:solidFill>
+                            <a:srgbClr val="1A1A1A"/>
+                          </a:solidFill>
+                          <a:latin typeface="Meiryo"/>
+                          <a:ea typeface="Meiryo"/>
+                        </a:rPr>
+                        <a:t>4</a:t>
+                      </a:r>
+                    </a:p>
+                  </a:txBody>
+                  <a:tcPr anchor="ctr" marL="73152" marR="73152">
+                    <a:solidFill>
+                      <a:srgbClr val="F2F4F6"/>
                     </a:solidFill>
                   </a:tcPr>
                 </a:tc>
@@ -11506,18 +13960,66 @@
                       <a:r>
                         <a:rPr sz="1100" b="1">
                           <a:solidFill>
-                            <a:srgbClr val="FFFFFF"/>
-                          </a:solidFill>
-                          <a:latin typeface="Meiryo"/>
-                          <a:ea typeface="Meiryo"/>
-                        </a:rPr>
-                        <a:t>6月</a:t>
-                      </a:r>
-                    </a:p>
-                  </a:txBody>
-                  <a:tcPr anchor="ctr" marL="73152" marR="73152">
-                    <a:solidFill>
-                      <a:srgbClr val="232278"/>
+                            <a:srgbClr val="1A1A1A"/>
+                          </a:solidFill>
+                          <a:latin typeface="Meiryo"/>
+                          <a:ea typeface="Meiryo"/>
+                        </a:rPr>
+                        <a:t>ライン供給</a:t>
+                      </a:r>
+                    </a:p>
+                  </a:txBody>
+                  <a:tcPr anchor="ctr" marL="73152" marR="73152">
+                    <a:solidFill>
+                      <a:srgbClr val="F2F4F6"/>
+                    </a:solidFill>
+                  </a:tcPr>
+                </a:tc>
+                <a:tc>
+                  <a:txBody>
+                    <a:bodyPr/>
+                    <a:lstStyle/>
+                    <a:p>
+                      <a:r>
+                        <a:rPr sz="1100" b="0">
+                          <a:solidFill>
+                            <a:srgbClr val="1A1A1A"/>
+                          </a:solidFill>
+                          <a:latin typeface="Meiryo"/>
+                          <a:ea typeface="Meiryo"/>
+                        </a:rPr>
+                        <a:t>基準15ライン。余裕月(1・4・6・11・12月)は最大20ラインまで増枠可(次頁)</a:t>
+                      </a:r>
+                    </a:p>
+                  </a:txBody>
+                  <a:tcPr anchor="ctr" marL="73152" marR="73152">
+                    <a:solidFill>
+                      <a:srgbClr val="F2F4F6"/>
+                    </a:solidFill>
+                  </a:tcPr>
+                </a:tc>
+              </a:tr>
+              <a:tr h="566928">
+                <a:tc>
+                  <a:txBody>
+                    <a:bodyPr/>
+                    <a:lstStyle/>
+                    <a:p>
+                      <a:r>
+                        <a:rPr sz="1100" b="0">
+                          <a:solidFill>
+                            <a:srgbClr val="1A1A1A"/>
+                          </a:solidFill>
+                          <a:latin typeface="Meiryo"/>
+                          <a:ea typeface="Meiryo"/>
+                        </a:rPr>
+                        <a:t>5</a:t>
+                      </a:r>
+                    </a:p>
+                  </a:txBody>
+                  <a:tcPr anchor="ctr" marL="73152" marR="73152">
+                    <a:solidFill>
+                      <a:srgbClr val="FFFFFF"/>
                     </a:solidFill>
                   </a:tcPr>
                 </a:tc>
@@ -11529,18 +14031,66 @@
                       <a:r>
                         <a:rPr sz="1100" b="1">
                           <a:solidFill>
-                            <a:srgbClr val="FFFFFF"/>
-                          </a:solidFill>
-                          <a:latin typeface="Meiryo"/>
-                          <a:ea typeface="Meiryo"/>
-                        </a:rPr>
-                        <a:t>7月</a:t>
-                      </a:r>
-                    </a:p>
-                  </a:txBody>
-                  <a:tcPr anchor="ctr" marL="73152" marR="73152">
-                    <a:solidFill>
-                      <a:srgbClr val="232278"/>
+                            <a:srgbClr val="1A1A1A"/>
+                          </a:solidFill>
+                          <a:latin typeface="Meiryo"/>
+                          <a:ea typeface="Meiryo"/>
+                        </a:rPr>
+                        <a:t>お支払い</a:t>
+                      </a:r>
+                    </a:p>
+                  </a:txBody>
+                  <a:tcPr anchor="ctr" marL="73152" marR="73152">
+                    <a:solidFill>
+                      <a:srgbClr val="FFFFFF"/>
+                    </a:solidFill>
+                  </a:tcPr>
+                </a:tc>
+                <a:tc>
+                  <a:txBody>
+                    <a:bodyPr/>
+                    <a:lstStyle/>
+                    <a:p>
+                      <a:r>
+                        <a:rPr sz="1100" b="0">
+                          <a:solidFill>
+                            <a:srgbClr val="1A1A1A"/>
+                          </a:solidFill>
+                          <a:latin typeface="Meiryo"/>
+                          <a:ea typeface="Meiryo"/>
+                        </a:rPr>
+                        <a:t>貴社EDI発注。IP使用料は年度前払い、保証分は四半期前払い(ご相談)。最低保証契約のため期間一括の発注形態をご相談</a:t>
+                      </a:r>
+                    </a:p>
+                  </a:txBody>
+                  <a:tcPr anchor="ctr" marL="73152" marR="73152">
+                    <a:solidFill>
+                      <a:srgbClr val="FFFFFF"/>
+                    </a:solidFill>
+                  </a:tcPr>
+                </a:tc>
+              </a:tr>
+              <a:tr h="566928">
+                <a:tc>
+                  <a:txBody>
+                    <a:bodyPr/>
+                    <a:lstStyle/>
+                    <a:p>
+                      <a:r>
+                        <a:rPr sz="1100" b="0">
+                          <a:solidFill>
+                            <a:srgbClr val="1A1A1A"/>
+                          </a:solidFill>
+                          <a:latin typeface="Meiryo"/>
+                          <a:ea typeface="Meiryo"/>
+                        </a:rPr>
+                        <a:t>6</a:t>
+                      </a:r>
+                    </a:p>
+                  </a:txBody>
+                  <a:tcPr anchor="ctr" marL="73152" marR="73152">
+                    <a:solidFill>
+                      <a:srgbClr val="F2F4F6"/>
                     </a:solidFill>
                   </a:tcPr>
                 </a:tc>
@@ -11552,18 +14102,66 @@
                       <a:r>
                         <a:rPr sz="1100" b="1">
                           <a:solidFill>
-                            <a:srgbClr val="FFFFFF"/>
-                          </a:solidFill>
-                          <a:latin typeface="Meiryo"/>
-                          <a:ea typeface="Meiryo"/>
-                        </a:rPr>
-                        <a:t>8月</a:t>
-                      </a:r>
-                    </a:p>
-                  </a:txBody>
-                  <a:tcPr anchor="ctr" marL="73152" marR="73152">
-                    <a:solidFill>
-                      <a:srgbClr val="232278"/>
+                            <a:srgbClr val="1A1A1A"/>
+                          </a:solidFill>
+                          <a:latin typeface="Meiryo"/>
+                          <a:ea typeface="Meiryo"/>
+                        </a:rPr>
+                        <a:t>エリア・キャラクター</a:t>
+                      </a:r>
+                    </a:p>
+                  </a:txBody>
+                  <a:tcPr anchor="ctr" marL="73152" marR="73152">
+                    <a:solidFill>
+                      <a:srgbClr val="F2F4F6"/>
+                    </a:solidFill>
+                  </a:tcPr>
+                </a:tc>
+                <a:tc>
+                  <a:txBody>
+                    <a:bodyPr/>
+                    <a:lstStyle/>
+                    <a:p>
+                      <a:r>
+                        <a:rPr sz="1100" b="0">
+                          <a:solidFill>
+                            <a:srgbClr val="1A1A1A"/>
+                          </a:solidFill>
+                          <a:latin typeface="Meiryo"/>
+                          <a:ea typeface="Meiryo"/>
+                        </a:rPr>
+                        <a:t>北関東エリアは2027年1〜3月は実施不可(4月以降可)。ウルトラセブンは対象外。出演は8ヒーロー</a:t>
+                      </a:r>
+                    </a:p>
+                  </a:txBody>
+                  <a:tcPr anchor="ctr" marL="73152" marR="73152">
+                    <a:solidFill>
+                      <a:srgbClr val="F2F4F6"/>
+                    </a:solidFill>
+                  </a:tcPr>
+                </a:tc>
+              </a:tr>
+              <a:tr h="566928">
+                <a:tc>
+                  <a:txBody>
+                    <a:bodyPr/>
+                    <a:lstStyle/>
+                    <a:p>
+                      <a:r>
+                        <a:rPr sz="1100" b="0">
+                          <a:solidFill>
+                            <a:srgbClr val="1A1A1A"/>
+                          </a:solidFill>
+                          <a:latin typeface="Meiryo"/>
+                          <a:ea typeface="Meiryo"/>
+                        </a:rPr>
+                        <a:t>7</a:t>
+                      </a:r>
+                    </a:p>
+                  </a:txBody>
+                  <a:tcPr anchor="ctr" marL="73152" marR="73152">
+                    <a:solidFill>
+                      <a:srgbClr val="FFFFFF"/>
                     </a:solidFill>
                   </a:tcPr>
                 </a:tc>
@@ -11575,106 +14173,12 @@
                       <a:r>
                         <a:rPr sz="1100" b="1">
                           <a:solidFill>
-                            <a:srgbClr val="FFFFFF"/>
-                          </a:solidFill>
-                          <a:latin typeface="Meiryo"/>
-                          <a:ea typeface="Meiryo"/>
-                        </a:rPr>
-                        <a:t>9月</a:t>
-                      </a:r>
-                    </a:p>
-                  </a:txBody>
-                  <a:tcPr anchor="ctr" marL="73152" marR="73152">
-                    <a:solidFill>
-                      <a:srgbClr val="232278"/>
-                    </a:solidFill>
-                  </a:tcPr>
-                </a:tc>
-                <a:tc>
-                  <a:txBody>
-                    <a:bodyPr/>
-                    <a:lstStyle/>
-                    <a:p>
-                      <a:r>
-                        <a:rPr sz="1100" b="1">
-                          <a:solidFill>
-                            <a:srgbClr val="FFFFFF"/>
-                          </a:solidFill>
-                          <a:latin typeface="Meiryo"/>
-                          <a:ea typeface="Meiryo"/>
-                        </a:rPr>
-                        <a:t>10月</a:t>
-                      </a:r>
-                    </a:p>
-                  </a:txBody>
-                  <a:tcPr anchor="ctr" marL="73152" marR="73152">
-                    <a:solidFill>
-                      <a:srgbClr val="232278"/>
-                    </a:solidFill>
-                  </a:tcPr>
-                </a:tc>
-                <a:tc>
-                  <a:txBody>
-                    <a:bodyPr/>
-                    <a:lstStyle/>
-                    <a:p>
-                      <a:r>
-                        <a:rPr sz="1100" b="1">
-                          <a:solidFill>
-                            <a:srgbClr val="FFFFFF"/>
-                          </a:solidFill>
-                          <a:latin typeface="Meiryo"/>
-                          <a:ea typeface="Meiryo"/>
-                        </a:rPr>
-                        <a:t>11月</a:t>
-                      </a:r>
-                    </a:p>
-                  </a:txBody>
-                  <a:tcPr anchor="ctr" marL="73152" marR="73152">
-                    <a:solidFill>
-                      <a:srgbClr val="232278"/>
-                    </a:solidFill>
-                  </a:tcPr>
-                </a:tc>
-                <a:tc>
-                  <a:txBody>
-                    <a:bodyPr/>
-                    <a:lstStyle/>
-                    <a:p>
-                      <a:r>
-                        <a:rPr sz="1100" b="1">
-                          <a:solidFill>
-                            <a:srgbClr val="FFFFFF"/>
-                          </a:solidFill>
-                          <a:latin typeface="Meiryo"/>
-                          <a:ea typeface="Meiryo"/>
-                        </a:rPr>
-                        <a:t>12月</a:t>
-                      </a:r>
-                    </a:p>
-                  </a:txBody>
-                  <a:tcPr anchor="ctr" marL="73152" marR="73152">
-                    <a:solidFill>
-                      <a:srgbClr val="232278"/>
-                    </a:solidFill>
-                  </a:tcPr>
-                </a:tc>
-              </a:tr>
-              <a:tr h="457200">
-                <a:tc>
-                  <a:txBody>
-                    <a:bodyPr/>
-                    <a:lstStyle/>
-                    <a:p>
-                      <a:r>
-                        <a:rPr sz="1100" b="1">
-                          <a:solidFill>
-                            <a:srgbClr val="1A1A1A"/>
-                          </a:solidFill>
-                          <a:latin typeface="Meiryo"/>
-                          <a:ea typeface="Meiryo"/>
-                        </a:rPr>
-                        <a:t>開催日数(土日)</a:t>
+                            <a:srgbClr val="1A1A1A"/>
+                          </a:solidFill>
+                          <a:latin typeface="Meiryo"/>
+                          <a:ea typeface="Meiryo"/>
+                        </a:rPr>
+                        <a:t>排他条件</a:t>
                       </a:r>
                     </a:p>
                   </a:txBody>
@@ -11697,862 +14201,7 @@
                           <a:latin typeface="Meiryo"/>
                           <a:ea typeface="Meiryo"/>
                         </a:rPr>
-                        <a:t>10</a:t>
-                      </a:r>
-                    </a:p>
-                  </a:txBody>
-                  <a:tcPr anchor="ctr" marL="73152" marR="73152">
-                    <a:solidFill>
-                      <a:srgbClr val="FFFFFF"/>
-                    </a:solidFill>
-                  </a:tcPr>
-                </a:tc>
-                <a:tc>
-                  <a:txBody>
-                    <a:bodyPr/>
-                    <a:lstStyle/>
-                    <a:p>
-                      <a:r>
-                        <a:rPr sz="1100" b="0">
-                          <a:solidFill>
-                            <a:srgbClr val="1A1A1A"/>
-                          </a:solidFill>
-                          <a:latin typeface="Meiryo"/>
-                          <a:ea typeface="Meiryo"/>
-                        </a:rPr>
-                        <a:t>8</a:t>
-                      </a:r>
-                    </a:p>
-                  </a:txBody>
-                  <a:tcPr anchor="ctr" marL="73152" marR="73152">
-                    <a:solidFill>
-                      <a:srgbClr val="FFFFFF"/>
-                    </a:solidFill>
-                  </a:tcPr>
-                </a:tc>
-                <a:tc>
-                  <a:txBody>
-                    <a:bodyPr/>
-                    <a:lstStyle/>
-                    <a:p>
-                      <a:r>
-                        <a:rPr sz="1100" b="0">
-                          <a:solidFill>
-                            <a:srgbClr val="1A1A1A"/>
-                          </a:solidFill>
-                          <a:latin typeface="Meiryo"/>
-                          <a:ea typeface="Meiryo"/>
-                        </a:rPr>
-                        <a:t>8</a:t>
-                      </a:r>
-                    </a:p>
-                  </a:txBody>
-                  <a:tcPr anchor="ctr" marL="73152" marR="73152">
-                    <a:solidFill>
-                      <a:srgbClr val="FFFFFF"/>
-                    </a:solidFill>
-                  </a:tcPr>
-                </a:tc>
-                <a:tc>
-                  <a:txBody>
-                    <a:bodyPr/>
-                    <a:lstStyle/>
-                    <a:p>
-                      <a:r>
-                        <a:rPr sz="1100" b="0">
-                          <a:solidFill>
-                            <a:srgbClr val="1A1A1A"/>
-                          </a:solidFill>
-                          <a:latin typeface="Meiryo"/>
-                          <a:ea typeface="Meiryo"/>
-                        </a:rPr>
-                        <a:t>8</a:t>
-                      </a:r>
-                    </a:p>
-                  </a:txBody>
-                  <a:tcPr anchor="ctr" marL="73152" marR="73152">
-                    <a:solidFill>
-                      <a:srgbClr val="FFFFFF"/>
-                    </a:solidFill>
-                  </a:tcPr>
-                </a:tc>
-                <a:tc>
-                  <a:txBody>
-                    <a:bodyPr/>
-                    <a:lstStyle/>
-                    <a:p>
-                      <a:r>
-                        <a:rPr sz="1100" b="0">
-                          <a:solidFill>
-                            <a:srgbClr val="1A1A1A"/>
-                          </a:solidFill>
-                          <a:latin typeface="Meiryo"/>
-                          <a:ea typeface="Meiryo"/>
-                        </a:rPr>
-                        <a:t>10</a:t>
-                      </a:r>
-                    </a:p>
-                  </a:txBody>
-                  <a:tcPr anchor="ctr" marL="73152" marR="73152">
-                    <a:solidFill>
-                      <a:srgbClr val="FFFFFF"/>
-                    </a:solidFill>
-                  </a:tcPr>
-                </a:tc>
-                <a:tc>
-                  <a:txBody>
-                    <a:bodyPr/>
-                    <a:lstStyle/>
-                    <a:p>
-                      <a:r>
-                        <a:rPr sz="1100" b="0">
-                          <a:solidFill>
-                            <a:srgbClr val="1A1A1A"/>
-                          </a:solidFill>
-                          <a:latin typeface="Meiryo"/>
-                          <a:ea typeface="Meiryo"/>
-                        </a:rPr>
-                        <a:t>8</a:t>
-                      </a:r>
-                    </a:p>
-                  </a:txBody>
-                  <a:tcPr anchor="ctr" marL="73152" marR="73152">
-                    <a:solidFill>
-                      <a:srgbClr val="FFFFFF"/>
-                    </a:solidFill>
-                  </a:tcPr>
-                </a:tc>
-                <a:tc>
-                  <a:txBody>
-                    <a:bodyPr/>
-                    <a:lstStyle/>
-                    <a:p>
-                      <a:r>
-                        <a:rPr sz="1100" b="0">
-                          <a:solidFill>
-                            <a:srgbClr val="1A1A1A"/>
-                          </a:solidFill>
-                          <a:latin typeface="Meiryo"/>
-                          <a:ea typeface="Meiryo"/>
-                        </a:rPr>
-                        <a:t>9</a:t>
-                      </a:r>
-                    </a:p>
-                  </a:txBody>
-                  <a:tcPr anchor="ctr" marL="73152" marR="73152">
-                    <a:solidFill>
-                      <a:srgbClr val="FFFFFF"/>
-                    </a:solidFill>
-                  </a:tcPr>
-                </a:tc>
-                <a:tc>
-                  <a:txBody>
-                    <a:bodyPr/>
-                    <a:lstStyle/>
-                    <a:p>
-                      <a:r>
-                        <a:rPr sz="1100" b="0">
-                          <a:solidFill>
-                            <a:srgbClr val="1A1A1A"/>
-                          </a:solidFill>
-                          <a:latin typeface="Meiryo"/>
-                          <a:ea typeface="Meiryo"/>
-                        </a:rPr>
-                        <a:t>9</a:t>
-                      </a:r>
-                    </a:p>
-                  </a:txBody>
-                  <a:tcPr anchor="ctr" marL="73152" marR="73152">
-                    <a:solidFill>
-                      <a:srgbClr val="FFFFFF"/>
-                    </a:solidFill>
-                  </a:tcPr>
-                </a:tc>
-                <a:tc>
-                  <a:txBody>
-                    <a:bodyPr/>
-                    <a:lstStyle/>
-                    <a:p>
-                      <a:r>
-                        <a:rPr sz="1100" b="0">
-                          <a:solidFill>
-                            <a:srgbClr val="1A1A1A"/>
-                          </a:solidFill>
-                          <a:latin typeface="Meiryo"/>
-                          <a:ea typeface="Meiryo"/>
-                        </a:rPr>
-                        <a:t>8</a:t>
-                      </a:r>
-                    </a:p>
-                  </a:txBody>
-                  <a:tcPr anchor="ctr" marL="73152" marR="73152">
-                    <a:solidFill>
-                      <a:srgbClr val="FFFFFF"/>
-                    </a:solidFill>
-                  </a:tcPr>
-                </a:tc>
-                <a:tc>
-                  <a:txBody>
-                    <a:bodyPr/>
-                    <a:lstStyle/>
-                    <a:p>
-                      <a:r>
-                        <a:rPr sz="1100" b="0">
-                          <a:solidFill>
-                            <a:srgbClr val="1A1A1A"/>
-                          </a:solidFill>
-                          <a:latin typeface="Meiryo"/>
-                          <a:ea typeface="Meiryo"/>
-                        </a:rPr>
-                        <a:t>10</a:t>
-                      </a:r>
-                    </a:p>
-                  </a:txBody>
-                  <a:tcPr anchor="ctr" marL="73152" marR="73152">
-                    <a:solidFill>
-                      <a:srgbClr val="FFFFFF"/>
-                    </a:solidFill>
-                  </a:tcPr>
-                </a:tc>
-                <a:tc>
-                  <a:txBody>
-                    <a:bodyPr/>
-                    <a:lstStyle/>
-                    <a:p>
-                      <a:r>
-                        <a:rPr sz="1100" b="0">
-                          <a:solidFill>
-                            <a:srgbClr val="1A1A1A"/>
-                          </a:solidFill>
-                          <a:latin typeface="Meiryo"/>
-                          <a:ea typeface="Meiryo"/>
-                        </a:rPr>
-                        <a:t>8</a:t>
-                      </a:r>
-                    </a:p>
-                  </a:txBody>
-                  <a:tcPr anchor="ctr" marL="73152" marR="73152">
-                    <a:solidFill>
-                      <a:srgbClr val="FFFFFF"/>
-                    </a:solidFill>
-                  </a:tcPr>
-                </a:tc>
-                <a:tc>
-                  <a:txBody>
-                    <a:bodyPr/>
-                    <a:lstStyle/>
-                    <a:p>
-                      <a:r>
-                        <a:rPr sz="1100" b="0">
-                          <a:solidFill>
-                            <a:srgbClr val="1A1A1A"/>
-                          </a:solidFill>
-                          <a:latin typeface="Meiryo"/>
-                          <a:ea typeface="Meiryo"/>
-                        </a:rPr>
-                        <a:t>8</a:t>
-                      </a:r>
-                    </a:p>
-                  </a:txBody>
-                  <a:tcPr anchor="ctr" marL="73152" marR="73152">
-                    <a:solidFill>
-                      <a:srgbClr val="FFFFFF"/>
-                    </a:solidFill>
-                  </a:tcPr>
-                </a:tc>
-              </a:tr>
-              <a:tr h="457200">
-                <a:tc>
-                  <a:txBody>
-                    <a:bodyPr/>
-                    <a:lstStyle/>
-                    <a:p>
-                      <a:r>
-                        <a:rPr sz="1100" b="1">
-                          <a:solidFill>
-                            <a:srgbClr val="1A1A1A"/>
-                          </a:solidFill>
-                          <a:latin typeface="Meiryo"/>
-                          <a:ea typeface="Meiryo"/>
-                        </a:rPr>
-                        <a:t>基準ライン数</a:t>
-                      </a:r>
-                    </a:p>
-                  </a:txBody>
-                  <a:tcPr anchor="ctr" marL="73152" marR="73152">
-                    <a:solidFill>
-                      <a:srgbClr val="F2F4F6"/>
-                    </a:solidFill>
-                  </a:tcPr>
-                </a:tc>
-                <a:tc>
-                  <a:txBody>
-                    <a:bodyPr/>
-                    <a:lstStyle/>
-                    <a:p>
-                      <a:r>
-                        <a:rPr sz="1100" b="0">
-                          <a:solidFill>
-                            <a:srgbClr val="1A1A1A"/>
-                          </a:solidFill>
-                          <a:latin typeface="Meiryo"/>
-                          <a:ea typeface="Meiryo"/>
-                        </a:rPr>
-                        <a:t>15</a:t>
-                      </a:r>
-                    </a:p>
-                  </a:txBody>
-                  <a:tcPr anchor="ctr" marL="73152" marR="73152">
-                    <a:solidFill>
-                      <a:srgbClr val="F2F4F6"/>
-                    </a:solidFill>
-                  </a:tcPr>
-                </a:tc>
-                <a:tc>
-                  <a:txBody>
-                    <a:bodyPr/>
-                    <a:lstStyle/>
-                    <a:p>
-                      <a:r>
-                        <a:rPr sz="1100" b="0">
-                          <a:solidFill>
-                            <a:srgbClr val="1A1A1A"/>
-                          </a:solidFill>
-                          <a:latin typeface="Meiryo"/>
-                          <a:ea typeface="Meiryo"/>
-                        </a:rPr>
-                        <a:t>15</a:t>
-                      </a:r>
-                    </a:p>
-                  </a:txBody>
-                  <a:tcPr anchor="ctr" marL="73152" marR="73152">
-                    <a:solidFill>
-                      <a:srgbClr val="F2F4F6"/>
-                    </a:solidFill>
-                  </a:tcPr>
-                </a:tc>
-                <a:tc>
-                  <a:txBody>
-                    <a:bodyPr/>
-                    <a:lstStyle/>
-                    <a:p>
-                      <a:r>
-                        <a:rPr sz="1100" b="0">
-                          <a:solidFill>
-                            <a:srgbClr val="1A1A1A"/>
-                          </a:solidFill>
-                          <a:latin typeface="Meiryo"/>
-                          <a:ea typeface="Meiryo"/>
-                        </a:rPr>
-                        <a:t>15</a:t>
-                      </a:r>
-                    </a:p>
-                  </a:txBody>
-                  <a:tcPr anchor="ctr" marL="73152" marR="73152">
-                    <a:solidFill>
-                      <a:srgbClr val="F2F4F6"/>
-                    </a:solidFill>
-                  </a:tcPr>
-                </a:tc>
-                <a:tc>
-                  <a:txBody>
-                    <a:bodyPr/>
-                    <a:lstStyle/>
-                    <a:p>
-                      <a:r>
-                        <a:rPr sz="1100" b="0">
-                          <a:solidFill>
-                            <a:srgbClr val="1A1A1A"/>
-                          </a:solidFill>
-                          <a:latin typeface="Meiryo"/>
-                          <a:ea typeface="Meiryo"/>
-                        </a:rPr>
-                        <a:t>15</a:t>
-                      </a:r>
-                    </a:p>
-                  </a:txBody>
-                  <a:tcPr anchor="ctr" marL="73152" marR="73152">
-                    <a:solidFill>
-                      <a:srgbClr val="F2F4F6"/>
-                    </a:solidFill>
-                  </a:tcPr>
-                </a:tc>
-                <a:tc>
-                  <a:txBody>
-                    <a:bodyPr/>
-                    <a:lstStyle/>
-                    <a:p>
-                      <a:r>
-                        <a:rPr sz="1100" b="0">
-                          <a:solidFill>
-                            <a:srgbClr val="1A1A1A"/>
-                          </a:solidFill>
-                          <a:latin typeface="Meiryo"/>
-                          <a:ea typeface="Meiryo"/>
-                        </a:rPr>
-                        <a:t>15</a:t>
-                      </a:r>
-                    </a:p>
-                  </a:txBody>
-                  <a:tcPr anchor="ctr" marL="73152" marR="73152">
-                    <a:solidFill>
-                      <a:srgbClr val="F2F4F6"/>
-                    </a:solidFill>
-                  </a:tcPr>
-                </a:tc>
-                <a:tc>
-                  <a:txBody>
-                    <a:bodyPr/>
-                    <a:lstStyle/>
-                    <a:p>
-                      <a:r>
-                        <a:rPr sz="1100" b="0">
-                          <a:solidFill>
-                            <a:srgbClr val="1A1A1A"/>
-                          </a:solidFill>
-                          <a:latin typeface="Meiryo"/>
-                          <a:ea typeface="Meiryo"/>
-                        </a:rPr>
-                        <a:t>15</a:t>
-                      </a:r>
-                    </a:p>
-                  </a:txBody>
-                  <a:tcPr anchor="ctr" marL="73152" marR="73152">
-                    <a:solidFill>
-                      <a:srgbClr val="F2F4F6"/>
-                    </a:solidFill>
-                  </a:tcPr>
-                </a:tc>
-                <a:tc>
-                  <a:txBody>
-                    <a:bodyPr/>
-                    <a:lstStyle/>
-                    <a:p>
-                      <a:r>
-                        <a:rPr sz="1100" b="0">
-                          <a:solidFill>
-                            <a:srgbClr val="1A1A1A"/>
-                          </a:solidFill>
-                          <a:latin typeface="Meiryo"/>
-                          <a:ea typeface="Meiryo"/>
-                        </a:rPr>
-                        <a:t>15</a:t>
-                      </a:r>
-                    </a:p>
-                  </a:txBody>
-                  <a:tcPr anchor="ctr" marL="73152" marR="73152">
-                    <a:solidFill>
-                      <a:srgbClr val="F2F4F6"/>
-                    </a:solidFill>
-                  </a:tcPr>
-                </a:tc>
-                <a:tc>
-                  <a:txBody>
-                    <a:bodyPr/>
-                    <a:lstStyle/>
-                    <a:p>
-                      <a:r>
-                        <a:rPr sz="1100" b="0">
-                          <a:solidFill>
-                            <a:srgbClr val="1A1A1A"/>
-                          </a:solidFill>
-                          <a:latin typeface="Meiryo"/>
-                          <a:ea typeface="Meiryo"/>
-                        </a:rPr>
-                        <a:t>15</a:t>
-                      </a:r>
-                    </a:p>
-                  </a:txBody>
-                  <a:tcPr anchor="ctr" marL="73152" marR="73152">
-                    <a:solidFill>
-                      <a:srgbClr val="F2F4F6"/>
-                    </a:solidFill>
-                  </a:tcPr>
-                </a:tc>
-                <a:tc>
-                  <a:txBody>
-                    <a:bodyPr/>
-                    <a:lstStyle/>
-                    <a:p>
-                      <a:r>
-                        <a:rPr sz="1100" b="0">
-                          <a:solidFill>
-                            <a:srgbClr val="1A1A1A"/>
-                          </a:solidFill>
-                          <a:latin typeface="Meiryo"/>
-                          <a:ea typeface="Meiryo"/>
-                        </a:rPr>
-                        <a:t>15</a:t>
-                      </a:r>
-                    </a:p>
-                  </a:txBody>
-                  <a:tcPr anchor="ctr" marL="73152" marR="73152">
-                    <a:solidFill>
-                      <a:srgbClr val="F2F4F6"/>
-                    </a:solidFill>
-                  </a:tcPr>
-                </a:tc>
-                <a:tc>
-                  <a:txBody>
-                    <a:bodyPr/>
-                    <a:lstStyle/>
-                    <a:p>
-                      <a:r>
-                        <a:rPr sz="1100" b="0">
-                          <a:solidFill>
-                            <a:srgbClr val="1A1A1A"/>
-                          </a:solidFill>
-                          <a:latin typeface="Meiryo"/>
-                          <a:ea typeface="Meiryo"/>
-                        </a:rPr>
-                        <a:t>15</a:t>
-                      </a:r>
-                    </a:p>
-                  </a:txBody>
-                  <a:tcPr anchor="ctr" marL="73152" marR="73152">
-                    <a:solidFill>
-                      <a:srgbClr val="F2F4F6"/>
-                    </a:solidFill>
-                  </a:tcPr>
-                </a:tc>
-                <a:tc>
-                  <a:txBody>
-                    <a:bodyPr/>
-                    <a:lstStyle/>
-                    <a:p>
-                      <a:r>
-                        <a:rPr sz="1100" b="0">
-                          <a:solidFill>
-                            <a:srgbClr val="1A1A1A"/>
-                          </a:solidFill>
-                          <a:latin typeface="Meiryo"/>
-                          <a:ea typeface="Meiryo"/>
-                        </a:rPr>
-                        <a:t>15</a:t>
-                      </a:r>
-                    </a:p>
-                  </a:txBody>
-                  <a:tcPr anchor="ctr" marL="73152" marR="73152">
-                    <a:solidFill>
-                      <a:srgbClr val="F2F4F6"/>
-                    </a:solidFill>
-                  </a:tcPr>
-                </a:tc>
-                <a:tc>
-                  <a:txBody>
-                    <a:bodyPr/>
-                    <a:lstStyle/>
-                    <a:p>
-                      <a:r>
-                        <a:rPr sz="1100" b="0">
-                          <a:solidFill>
-                            <a:srgbClr val="1A1A1A"/>
-                          </a:solidFill>
-                          <a:latin typeface="Meiryo"/>
-                          <a:ea typeface="Meiryo"/>
-                        </a:rPr>
-                        <a:t>15</a:t>
-                      </a:r>
-                    </a:p>
-                  </a:txBody>
-                  <a:tcPr anchor="ctr" marL="73152" marR="73152">
-                    <a:solidFill>
-                      <a:srgbClr val="F2F4F6"/>
-                    </a:solidFill>
-                  </a:tcPr>
-                </a:tc>
-              </a:tr>
-              <a:tr h="457200">
-                <a:tc>
-                  <a:txBody>
-                    <a:bodyPr/>
-                    <a:lstStyle/>
-                    <a:p>
-                      <a:r>
-                        <a:rPr sz="1100" b="1">
-                          <a:solidFill>
-                            <a:srgbClr val="1A1A1A"/>
-                          </a:solidFill>
-                          <a:latin typeface="Meiryo"/>
-                          <a:ea typeface="Meiryo"/>
-                        </a:rPr>
-                        <a:t>最大ライン数</a:t>
-                      </a:r>
-                    </a:p>
-                  </a:txBody>
-                  <a:tcPr anchor="ctr" marL="73152" marR="73152">
-                    <a:solidFill>
-                      <a:srgbClr val="FFFFFF"/>
-                    </a:solidFill>
-                  </a:tcPr>
-                </a:tc>
-                <a:tc>
-                  <a:txBody>
-                    <a:bodyPr/>
-                    <a:lstStyle/>
-                    <a:p>
-                      <a:r>
-                        <a:rPr sz="1100" b="1">
-                          <a:solidFill>
-                            <a:srgbClr val="C00000"/>
-                          </a:solidFill>
-                          <a:latin typeface="Meiryo"/>
-                          <a:ea typeface="Meiryo"/>
-                        </a:rPr>
-                        <a:t>20</a:t>
-                      </a:r>
-                    </a:p>
-                  </a:txBody>
-                  <a:tcPr anchor="ctr" marL="73152" marR="73152">
-                    <a:solidFill>
-                      <a:srgbClr val="FFFFFF"/>
-                    </a:solidFill>
-                  </a:tcPr>
-                </a:tc>
-                <a:tc>
-                  <a:txBody>
-                    <a:bodyPr/>
-                    <a:lstStyle/>
-                    <a:p>
-                      <a:r>
-                        <a:rPr sz="1100" b="0">
-                          <a:solidFill>
-                            <a:srgbClr val="1A1A1A"/>
-                          </a:solidFill>
-                          <a:latin typeface="Meiryo"/>
-                          <a:ea typeface="Meiryo"/>
-                        </a:rPr>
-                        <a:t>15</a:t>
-                      </a:r>
-                    </a:p>
-                  </a:txBody>
-                  <a:tcPr anchor="ctr" marL="73152" marR="73152">
-                    <a:solidFill>
-                      <a:srgbClr val="FFFFFF"/>
-                    </a:solidFill>
-                  </a:tcPr>
-                </a:tc>
-                <a:tc>
-                  <a:txBody>
-                    <a:bodyPr/>
-                    <a:lstStyle/>
-                    <a:p>
-                      <a:r>
-                        <a:rPr sz="1100" b="0">
-                          <a:solidFill>
-                            <a:srgbClr val="1A1A1A"/>
-                          </a:solidFill>
-                          <a:latin typeface="Meiryo"/>
-                          <a:ea typeface="Meiryo"/>
-                        </a:rPr>
-                        <a:t>15</a:t>
-                      </a:r>
-                    </a:p>
-                  </a:txBody>
-                  <a:tcPr anchor="ctr" marL="73152" marR="73152">
-                    <a:solidFill>
-                      <a:srgbClr val="FFFFFF"/>
-                    </a:solidFill>
-                  </a:tcPr>
-                </a:tc>
-                <a:tc>
-                  <a:txBody>
-                    <a:bodyPr/>
-                    <a:lstStyle/>
-                    <a:p>
-                      <a:r>
-                        <a:rPr sz="1100" b="1">
-                          <a:solidFill>
-                            <a:srgbClr val="C00000"/>
-                          </a:solidFill>
-                          <a:latin typeface="Meiryo"/>
-                          <a:ea typeface="Meiryo"/>
-                        </a:rPr>
-                        <a:t>20</a:t>
-                      </a:r>
-                    </a:p>
-                  </a:txBody>
-                  <a:tcPr anchor="ctr" marL="73152" marR="73152">
-                    <a:solidFill>
-                      <a:srgbClr val="FFFFFF"/>
-                    </a:solidFill>
-                  </a:tcPr>
-                </a:tc>
-                <a:tc>
-                  <a:txBody>
-                    <a:bodyPr/>
-                    <a:lstStyle/>
-                    <a:p>
-                      <a:r>
-                        <a:rPr sz="1100" b="0">
-                          <a:solidFill>
-                            <a:srgbClr val="1A1A1A"/>
-                          </a:solidFill>
-                          <a:latin typeface="Meiryo"/>
-                          <a:ea typeface="Meiryo"/>
-                        </a:rPr>
-                        <a:t>15</a:t>
-                      </a:r>
-                    </a:p>
-                  </a:txBody>
-                  <a:tcPr anchor="ctr" marL="73152" marR="73152">
-                    <a:solidFill>
-                      <a:srgbClr val="FFFFFF"/>
-                    </a:solidFill>
-                  </a:tcPr>
-                </a:tc>
-                <a:tc>
-                  <a:txBody>
-                    <a:bodyPr/>
-                    <a:lstStyle/>
-                    <a:p>
-                      <a:r>
-                        <a:rPr sz="1100" b="1">
-                          <a:solidFill>
-                            <a:srgbClr val="C00000"/>
-                          </a:solidFill>
-                          <a:latin typeface="Meiryo"/>
-                          <a:ea typeface="Meiryo"/>
-                        </a:rPr>
-                        <a:t>20</a:t>
-                      </a:r>
-                    </a:p>
-                  </a:txBody>
-                  <a:tcPr anchor="ctr" marL="73152" marR="73152">
-                    <a:solidFill>
-                      <a:srgbClr val="FFFFFF"/>
-                    </a:solidFill>
-                  </a:tcPr>
-                </a:tc>
-                <a:tc>
-                  <a:txBody>
-                    <a:bodyPr/>
-                    <a:lstStyle/>
-                    <a:p>
-                      <a:r>
-                        <a:rPr sz="1100" b="0">
-                          <a:solidFill>
-                            <a:srgbClr val="1A1A1A"/>
-                          </a:solidFill>
-                          <a:latin typeface="Meiryo"/>
-                          <a:ea typeface="Meiryo"/>
-                        </a:rPr>
-                        <a:t>15</a:t>
-                      </a:r>
-                    </a:p>
-                  </a:txBody>
-                  <a:tcPr anchor="ctr" marL="73152" marR="73152">
-                    <a:solidFill>
-                      <a:srgbClr val="FFFFFF"/>
-                    </a:solidFill>
-                  </a:tcPr>
-                </a:tc>
-                <a:tc>
-                  <a:txBody>
-                    <a:bodyPr/>
-                    <a:lstStyle/>
-                    <a:p>
-                      <a:r>
-                        <a:rPr sz="1100" b="0">
-                          <a:solidFill>
-                            <a:srgbClr val="1A1A1A"/>
-                          </a:solidFill>
-                          <a:latin typeface="Meiryo"/>
-                          <a:ea typeface="Meiryo"/>
-                        </a:rPr>
-                        <a:t>15</a:t>
-                      </a:r>
-                    </a:p>
-                  </a:txBody>
-                  <a:tcPr anchor="ctr" marL="73152" marR="73152">
-                    <a:solidFill>
-                      <a:srgbClr val="FFFFFF"/>
-                    </a:solidFill>
-                  </a:tcPr>
-                </a:tc>
-                <a:tc>
-                  <a:txBody>
-                    <a:bodyPr/>
-                    <a:lstStyle/>
-                    <a:p>
-                      <a:r>
-                        <a:rPr sz="1100" b="0">
-                          <a:solidFill>
-                            <a:srgbClr val="1A1A1A"/>
-                          </a:solidFill>
-                          <a:latin typeface="Meiryo"/>
-                          <a:ea typeface="Meiryo"/>
-                        </a:rPr>
-                        <a:t>15</a:t>
-                      </a:r>
-                    </a:p>
-                  </a:txBody>
-                  <a:tcPr anchor="ctr" marL="73152" marR="73152">
-                    <a:solidFill>
-                      <a:srgbClr val="FFFFFF"/>
-                    </a:solidFill>
-                  </a:tcPr>
-                </a:tc>
-                <a:tc>
-                  <a:txBody>
-                    <a:bodyPr/>
-                    <a:lstStyle/>
-                    <a:p>
-                      <a:r>
-                        <a:rPr sz="1100" b="0">
-                          <a:solidFill>
-                            <a:srgbClr val="1A1A1A"/>
-                          </a:solidFill>
-                          <a:latin typeface="Meiryo"/>
-                          <a:ea typeface="Meiryo"/>
-                        </a:rPr>
-                        <a:t>15</a:t>
-                      </a:r>
-                    </a:p>
-                  </a:txBody>
-                  <a:tcPr anchor="ctr" marL="73152" marR="73152">
-                    <a:solidFill>
-                      <a:srgbClr val="FFFFFF"/>
-                    </a:solidFill>
-                  </a:tcPr>
-                </a:tc>
-                <a:tc>
-                  <a:txBody>
-                    <a:bodyPr/>
-                    <a:lstStyle/>
-                    <a:p>
-                      <a:r>
-                        <a:rPr sz="1100" b="1">
-                          <a:solidFill>
-                            <a:srgbClr val="C00000"/>
-                          </a:solidFill>
-                          <a:latin typeface="Meiryo"/>
-                          <a:ea typeface="Meiryo"/>
-                        </a:rPr>
-                        <a:t>20</a:t>
-                      </a:r>
-                    </a:p>
-                  </a:txBody>
-                  <a:tcPr anchor="ctr" marL="73152" marR="73152">
-                    <a:solidFill>
-                      <a:srgbClr val="FFFFFF"/>
-                    </a:solidFill>
-                  </a:tcPr>
-                </a:tc>
-                <a:tc>
-                  <a:txBody>
-                    <a:bodyPr/>
-                    <a:lstStyle/>
-                    <a:p>
-                      <a:r>
-                        <a:rPr sz="1100" b="1">
-                          <a:solidFill>
-                            <a:srgbClr val="C00000"/>
-                          </a:solidFill>
-                          <a:latin typeface="Meiryo"/>
-                          <a:ea typeface="Meiryo"/>
-                        </a:rPr>
-                        <a:t>20</a:t>
+                        <a:t>契約期間中、当社は国内の他の携帯キャリア(3社)との店頭イベント契約を行いません</a:t>
                       </a:r>
                     </a:p>
                   </a:txBody>
@@ -12575,8 +14224,8 @@
         </p:nvSpPr>
         <p:spPr>
           <a:xfrm>
-            <a:off x="640080" y="3429000"/>
-            <a:ext cx="10881360" cy="365760"/>
+            <a:off x="640080" y="5943600"/>
+            <a:ext cx="10881360" cy="457200"/>
           </a:xfrm>
           <a:prstGeom prst="rect">
             <a:avLst/>
@@ -12602,374 +14251,7 @@
                 <a:latin typeface="Meiryo"/>
                 <a:ea typeface="Meiryo"/>
               </a:rPr>
-              <a:t>※ 上表は2027年(104日)。2028年は106日(うるう年)、2029年1〜3月は25日で、ライン数の考え方は同じ(1月が最大20ライン、2〜3月は基準15)</a:t>
-            </a:r>
-          </a:p>
-        </p:txBody>
-      </p:sp>
-      <p:graphicFrame>
-        <p:nvGraphicFramePr>
-          <p:cNvPr id="10" name="Table 9"/>
-          <p:cNvGraphicFramePr>
-            <a:graphicFrameLocks noGrp="1"/>
-          </p:cNvGraphicFramePr>
-          <p:nvPr/>
-        </p:nvGraphicFramePr>
-        <p:xfrm>
-          <a:off x="640080" y="3931920"/>
-          <a:ext cx="10881360" cy="1508760"/>
-        </p:xfrm>
-        <a:graphic>
-          <a:graphicData uri="http://schemas.openxmlformats.org/drawingml/2006/table">
-            <a:tbl>
-              <a:tblPr firstRow="1" bandRow="1">
-                <a:tableStyleId>{5C22544A-7EE6-4342-B048-85BDC9FD1C3A}</a:tableStyleId>
-              </a:tblPr>
-              <a:tblGrid>
-                <a:gridCol w="3627120"/>
-                <a:gridCol w="1813560"/>
-                <a:gridCol w="2720340"/>
-                <a:gridCol w="2720340"/>
-              </a:tblGrid>
-              <a:tr h="502920">
-                <a:tc>
-                  <a:txBody>
-                    <a:bodyPr/>
-                    <a:lstStyle/>
-                    <a:p>
-                      <a:r>
-                        <a:rPr sz="1150" b="1">
-                          <a:solidFill>
-                            <a:srgbClr val="FFFFFF"/>
-                          </a:solidFill>
-                          <a:latin typeface="Meiryo"/>
-                          <a:ea typeface="Meiryo"/>
-                        </a:rPr>
-                        <a:t>27ヶ月合計</a:t>
-                      </a:r>
-                    </a:p>
-                  </a:txBody>
-                  <a:tcPr anchor="ctr" marL="73152" marR="73152">
-                    <a:solidFill>
-                      <a:srgbClr val="232278"/>
-                    </a:solidFill>
-                  </a:tcPr>
-                </a:tc>
-                <a:tc>
-                  <a:txBody>
-                    <a:bodyPr/>
-                    <a:lstStyle/>
-                    <a:p>
-                      <a:r>
-                        <a:rPr sz="1150" b="1">
-                          <a:solidFill>
-                            <a:srgbClr val="FFFFFF"/>
-                          </a:solidFill>
-                          <a:latin typeface="Meiryo"/>
-                          <a:ea typeface="Meiryo"/>
-                        </a:rPr>
-                        <a:t>開催日数</a:t>
-                      </a:r>
-                    </a:p>
-                  </a:txBody>
-                  <a:tcPr anchor="ctr" marL="73152" marR="73152">
-                    <a:solidFill>
-                      <a:srgbClr val="232278"/>
-                    </a:solidFill>
-                  </a:tcPr>
-                </a:tc>
-                <a:tc>
-                  <a:txBody>
-                    <a:bodyPr/>
-                    <a:lstStyle/>
-                    <a:p>
-                      <a:r>
-                        <a:rPr sz="1150" b="1">
-                          <a:solidFill>
-                            <a:srgbClr val="FFFFFF"/>
-                          </a:solidFill>
-                          <a:latin typeface="Meiryo"/>
-                          <a:ea typeface="Meiryo"/>
-                        </a:rPr>
-                        <a:t>開催数(ライン×日)</a:t>
-                      </a:r>
-                    </a:p>
-                  </a:txBody>
-                  <a:tcPr anchor="ctr" marL="73152" marR="73152">
-                    <a:solidFill>
-                      <a:srgbClr val="232278"/>
-                    </a:solidFill>
-                  </a:tcPr>
-                </a:tc>
-                <a:tc>
-                  <a:txBody>
-                    <a:bodyPr/>
-                    <a:lstStyle/>
-                    <a:p>
-                      <a:r>
-                        <a:rPr sz="1150" b="1">
-                          <a:solidFill>
-                            <a:srgbClr val="FFFFFF"/>
-                          </a:solidFill>
-                          <a:latin typeface="Meiryo"/>
-                          <a:ea typeface="Meiryo"/>
-                        </a:rPr>
-                        <a:t>稼働費(税別)</a:t>
-                      </a:r>
-                    </a:p>
-                  </a:txBody>
-                  <a:tcPr anchor="ctr" marL="73152" marR="73152">
-                    <a:solidFill>
-                      <a:srgbClr val="232278"/>
-                    </a:solidFill>
-                  </a:tcPr>
-                </a:tc>
-              </a:tr>
-              <a:tr h="502920">
-                <a:tc>
-                  <a:txBody>
-                    <a:bodyPr/>
-                    <a:lstStyle/>
-                    <a:p>
-                      <a:r>
-                        <a:rPr sz="1150" b="1">
-                          <a:solidFill>
-                            <a:srgbClr val="1A1A1A"/>
-                          </a:solidFill>
-                          <a:latin typeface="Meiryo"/>
-                          <a:ea typeface="Meiryo"/>
-                        </a:rPr>
-                        <a:t>基準(15ライン固定)</a:t>
-                      </a:r>
-                    </a:p>
-                  </a:txBody>
-                  <a:tcPr anchor="ctr" marL="73152" marR="73152">
-                    <a:solidFill>
-                      <a:srgbClr val="FFFFFF"/>
-                    </a:solidFill>
-                  </a:tcPr>
-                </a:tc>
-                <a:tc>
-                  <a:txBody>
-                    <a:bodyPr/>
-                    <a:lstStyle/>
-                    <a:p>
-                      <a:r>
-                        <a:rPr sz="1150" b="0">
-                          <a:solidFill>
-                            <a:srgbClr val="1A1A1A"/>
-                          </a:solidFill>
-                          <a:latin typeface="Meiryo"/>
-                          <a:ea typeface="Meiryo"/>
-                        </a:rPr>
-                        <a:t>235日</a:t>
-                      </a:r>
-                    </a:p>
-                  </a:txBody>
-                  <a:tcPr anchor="ctr" marL="73152" marR="73152">
-                    <a:solidFill>
-                      <a:srgbClr val="FFFFFF"/>
-                    </a:solidFill>
-                  </a:tcPr>
-                </a:tc>
-                <a:tc>
-                  <a:txBody>
-                    <a:bodyPr/>
-                    <a:lstStyle/>
-                    <a:p>
-                      <a:r>
-                        <a:rPr sz="1150" b="0">
-                          <a:solidFill>
-                            <a:srgbClr val="1A1A1A"/>
-                          </a:solidFill>
-                          <a:latin typeface="Meiryo"/>
-                          <a:ea typeface="Meiryo"/>
-                        </a:rPr>
-                        <a:t>3,525現場</a:t>
-                      </a:r>
-                    </a:p>
-                  </a:txBody>
-                  <a:tcPr anchor="ctr" marL="73152" marR="73152">
-                    <a:solidFill>
-                      <a:srgbClr val="FFFFFF"/>
-                    </a:solidFill>
-                  </a:tcPr>
-                </a:tc>
-                <a:tc>
-                  <a:txBody>
-                    <a:bodyPr/>
-                    <a:lstStyle/>
-                    <a:p>
-                      <a:r>
-                        <a:rPr sz="1150" b="1">
-                          <a:solidFill>
-                            <a:srgbClr val="1A1A1A"/>
-                          </a:solidFill>
-                          <a:latin typeface="Meiryo"/>
-                          <a:ea typeface="Meiryo"/>
-                        </a:rPr>
-                        <a:t>3億5,250万円</a:t>
-                      </a:r>
-                    </a:p>
-                  </a:txBody>
-                  <a:tcPr anchor="ctr" marL="73152" marR="73152">
-                    <a:solidFill>
-                      <a:srgbClr val="FFFFFF"/>
-                    </a:solidFill>
-                  </a:tcPr>
-                </a:tc>
-              </a:tr>
-              <a:tr h="502920">
-                <a:tc>
-                  <a:txBody>
-                    <a:bodyPr/>
-                    <a:lstStyle/>
-                    <a:p>
-                      <a:r>
-                        <a:rPr sz="1150" b="1">
-                          <a:solidFill>
-                            <a:srgbClr val="1A1A1A"/>
-                          </a:solidFill>
-                          <a:latin typeface="Meiryo"/>
-                          <a:ea typeface="Meiryo"/>
-                        </a:rPr>
-                        <a:t>最大(余裕月20ライン)</a:t>
-                      </a:r>
-                    </a:p>
-                  </a:txBody>
-                  <a:tcPr anchor="ctr" marL="73152" marR="73152">
-                    <a:solidFill>
-                      <a:srgbClr val="F2F4F6"/>
-                    </a:solidFill>
-                  </a:tcPr>
-                </a:tc>
-                <a:tc>
-                  <a:txBody>
-                    <a:bodyPr/>
-                    <a:lstStyle/>
-                    <a:p>
-                      <a:r>
-                        <a:rPr sz="1150" b="0">
-                          <a:solidFill>
-                            <a:srgbClr val="1A1A1A"/>
-                          </a:solidFill>
-                          <a:latin typeface="Meiryo"/>
-                          <a:ea typeface="Meiryo"/>
-                        </a:rPr>
-                        <a:t>235日</a:t>
-                      </a:r>
-                    </a:p>
-                  </a:txBody>
-                  <a:tcPr anchor="ctr" marL="73152" marR="73152">
-                    <a:solidFill>
-                      <a:srgbClr val="F2F4F6"/>
-                    </a:solidFill>
-                  </a:tcPr>
-                </a:tc>
-                <a:tc>
-                  <a:txBody>
-                    <a:bodyPr/>
-                    <a:lstStyle/>
-                    <a:p>
-                      <a:r>
-                        <a:rPr sz="1150" b="0">
-                          <a:solidFill>
-                            <a:srgbClr val="1A1A1A"/>
-                          </a:solidFill>
-                          <a:latin typeface="Meiryo"/>
-                          <a:ea typeface="Meiryo"/>
-                        </a:rPr>
-                        <a:t>4,005現場</a:t>
-                      </a:r>
-                    </a:p>
-                  </a:txBody>
-                  <a:tcPr anchor="ctr" marL="73152" marR="73152">
-                    <a:solidFill>
-                      <a:srgbClr val="F2F4F6"/>
-                    </a:solidFill>
-                  </a:tcPr>
-                </a:tc>
-                <a:tc>
-                  <a:txBody>
-                    <a:bodyPr/>
-                    <a:lstStyle/>
-                    <a:p>
-                      <a:r>
-                        <a:rPr sz="1150" b="1">
-                          <a:solidFill>
-                            <a:srgbClr val="C00000"/>
-                          </a:solidFill>
-                          <a:latin typeface="Meiryo"/>
-                          <a:ea typeface="Meiryo"/>
-                        </a:rPr>
-                        <a:t>4億50万円</a:t>
-                      </a:r>
-                    </a:p>
-                  </a:txBody>
-                  <a:tcPr anchor="ctr" marL="73152" marR="73152">
-                    <a:solidFill>
-                      <a:srgbClr val="F2F4F6"/>
-                    </a:solidFill>
-                  </a:tcPr>
-                </a:tc>
-              </a:tr>
-            </a:tbl>
-          </a:graphicData>
-        </a:graphic>
-      </p:graphicFrame>
-      <p:sp>
-        <p:nvSpPr>
-          <p:cNvPr id="11" name="TextBox 10"/>
-          <p:cNvSpPr txBox="1"/>
-          <p:nvPr/>
-        </p:nvSpPr>
-        <p:spPr>
-          <a:xfrm>
-            <a:off x="640080" y="5577840"/>
-            <a:ext cx="10881360" cy="731520"/>
-          </a:xfrm>
-          <a:prstGeom prst="rect">
-            <a:avLst/>
-          </a:prstGeom>
-          <a:noFill/>
-        </p:spPr>
-        <p:txBody>
-          <a:bodyPr wrap="square" anchor="t" lIns="0" rIns="0" tIns="0" bIns="0">
-            <a:spAutoFit/>
-          </a:bodyPr>
-          <a:lstStyle/>
-          <a:p>
-            <a:pPr algn="l">
-              <a:spcAft>
-                <a:spcPts val="400"/>
-              </a:spcAft>
-            </a:pPr>
-            <a:r>
-              <a:rPr sz="1100" b="0">
-                <a:solidFill>
-                  <a:srgbClr val="1A1A1A"/>
-                </a:solidFill>
-                <a:latin typeface="Meiryo"/>
-                <a:ea typeface="Meiryo"/>
-              </a:rPr>
-              <a:t>・2月・3月・8月・9月は当社主催行事との調整月のため基準15ラインでの運用となります　・増枠分は前月1日の開催確定時に確定します</a:t>
-            </a:r>
-          </a:p>
-          <a:p>
-            <a:pPr algn="l">
-              <a:spcAft>
-                <a:spcPts val="400"/>
-              </a:spcAft>
-            </a:pPr>
-            <a:r>
-              <a:rPr sz="1100" b="0">
-                <a:solidFill>
-                  <a:srgbClr val="1A1A1A"/>
-                </a:solidFill>
-                <a:latin typeface="Meiryo"/>
-                <a:ea typeface="Meiryo"/>
-              </a:rPr>
-              <a:t>・上記は稼働費のみ。年間IP使用料・現場諸経費・実費は別途</a:t>
+              <a:t>※ キャンセル料は7月ご提案時のスポット向け規定から、本契約(最低保証・1ヶ月前確定フロー)向けの規定に更新しています</a:t>
             </a:r>
           </a:p>
         </p:txBody>

--- a/docs/proposals/softbank-ultraman-caravan/SB様提示用_1022ミーティング資料.pptx
+++ b/docs/proposals/softbank-ultraman-caravan/SB様提示用_1022ミーティング資料.pptx
@@ -3215,7 +3215,7 @@
                 <a:latin typeface="Meiryo"/>
                 <a:ea typeface="Meiryo"/>
               </a:rPr>
-              <a:t>本格実施に向けたご確認事項</a:t>
+              <a:t>本格実施に向けたお打ち合わせ資料</a:t>
             </a:r>
           </a:p>
         </p:txBody>
@@ -3255,7 +3255,7 @@
                 <a:latin typeface="Meiryo"/>
                 <a:ea typeface="Meiryo"/>
               </a:rPr>
-              <a:t>テストイベントの振り返り/役割分担/ご提供条件/今後の進め方</a:t>
+              <a:t>テストイベントの振り返りと、本格実施の運営・条件のご確認</a:t>
             </a:r>
           </a:p>
         </p:txBody>
@@ -3312,7 +3312,7 @@
                 <a:latin typeface="Meiryo"/>
                 <a:ea typeface="Meiryo"/>
               </a:rPr>
-              <a:t>(株)円谷プロダクション</a:t>
+              <a:t>株式会社円谷プロダクション</a:t>
             </a:r>
           </a:p>
           <a:p>
@@ -3531,7 +3531,7 @@
                 <a:latin typeface="Meiryo"/>
                 <a:ea typeface="Meiryo"/>
               </a:rPr>
-              <a:t>基準15ラインを最低保証の対象とし、余裕のある月は最大20ラインまで増枠できます。詳細は別紙(月別供給計画)をご参照ください</a:t>
+              <a:t>基準15ラインを最低保証の対象とし、余裕のある月は最大20ラインまで。月別の詳細は別紙</a:t>
             </a:r>
           </a:p>
         </p:txBody>
@@ -4932,7 +4932,7 @@
                 <a:latin typeface="Meiryo"/>
                 <a:ea typeface="Meiryo"/>
               </a:rPr>
-              <a:t>※ 上表は2027年(104日)。2028年は106日(うるう年)、2029年1〜3月は25日で、ライン数の考え方は同じ(1月が最大20ライン、2〜3月は基準15)</a:t>
+              <a:t>上表は2027年(104日)。2028年は106日、2029年1〜3月は25日。ライン数の考え方は同じ</a:t>
             </a:r>
           </a:p>
         </p:txBody>
@@ -5044,7 +5044,7 @@
                           <a:latin typeface="Meiryo"/>
                           <a:ea typeface="Meiryo"/>
                         </a:rPr>
-                        <a:t>稼働費(税別)</a:t>
+                        <a:t>稼働費</a:t>
                       </a:r>
                     </a:p>
                   </a:txBody>
@@ -5069,7 +5069,7 @@
                           <a:latin typeface="Meiryo"/>
                           <a:ea typeface="Meiryo"/>
                         </a:rPr>
-                        <a:t>基準(15ライン固定)</a:t>
+                        <a:t>基準(15ライン)</a:t>
                       </a:r>
                     </a:p>
                   </a:txBody>
@@ -5163,7 +5163,7 @@
                           <a:latin typeface="Meiryo"/>
                           <a:ea typeface="Meiryo"/>
                         </a:rPr>
-                        <a:t>最大(余裕月20ライン)</a:t>
+                        <a:t>最大(余裕月は20ライン)</a:t>
                       </a:r>
                     </a:p>
                   </a:txBody>
@@ -5282,7 +5282,7 @@
                 <a:latin typeface="Meiryo"/>
                 <a:ea typeface="Meiryo"/>
               </a:rPr>
-              <a:t>・2月・3月・8月・9月は当社主催行事との調整月のため基準15ラインでの運用となります　・増枠分は前月1日の開催確定時に確定します</a:t>
+              <a:t>・2月・3月・8月・9月は当社の主催行事と重なるため基準15ラインでの運用。増枠分は前月1日の開催確定時に確定</a:t>
             </a:r>
           </a:p>
           <a:p>
@@ -5299,7 +5299,7 @@
                 <a:latin typeface="Meiryo"/>
                 <a:ea typeface="Meiryo"/>
               </a:rPr>
-              <a:t>・上記は稼働費のみ。年間IP使用料・現場諸経費・実費は別途</a:t>
+              <a:t>・上記は稼働費のみ。年間IP使用料、現場諸経費、実費は別途</a:t>
             </a:r>
           </a:p>
         </p:txBody>
@@ -5381,7 +5381,7 @@
                 <a:latin typeface="Meiryo"/>
                 <a:ea typeface="Meiryo"/>
               </a:rPr>
-              <a:t>4. 制作物・権利まわりの進め方</a:t>
+              <a:t>4. 制作物と権利の進め方</a:t>
             </a:r>
           </a:p>
         </p:txBody>
@@ -5421,7 +5421,7 @@
                 <a:latin typeface="Meiryo"/>
                 <a:ea typeface="Meiryo"/>
               </a:rPr>
-              <a:t>キャンペーンビジュアルの確定を起点に、仮申請フローで各制作物を確定していきます</a:t>
+              <a:t>キャンペーンビジュアルを決めてから、品目ごとに仮申請で制作物を確定していきます</a:t>
             </a:r>
           </a:p>
         </p:txBody>
@@ -5627,7 +5627,7 @@
                 <a:latin typeface="Meiryo"/>
                 <a:ea typeface="Meiryo"/>
               </a:rPr>
-              <a:t>① キャンペーン名称・KVの策定(11月中)と素材の使い分け</a:t>
+              <a:t>キャンペーン名称・KVの策定(11月中)</a:t>
             </a:r>
           </a:p>
           <a:p>
@@ -5644,7 +5644,7 @@
                 <a:latin typeface="Meiryo"/>
                 <a:ea typeface="Meiryo"/>
               </a:rPr>
-              <a:t>・KVは貴社にて制作(当社での制作受託も可能)。名称・KVを11月中に確定</a:t>
+              <a:t>・KVは貴社で制作(当社で受託することも可能)</a:t>
             </a:r>
           </a:p>
           <a:p>
@@ -5661,7 +5661,7 @@
                 <a:latin typeface="Meiryo"/>
                 <a:ea typeface="Meiryo"/>
               </a:rPr>
-              <a:t>・撮影会の背景バナー:キャラクターなしの背景素材(青空/宇宙)を当社提供</a:t>
+              <a:t>・撮影会の背景バナーは、キャラクターなしの背景素材(青空・宇宙)を当社から提供</a:t>
             </a:r>
           </a:p>
           <a:p>
@@ -5678,7 +5678,7 @@
                 <a:latin typeface="Meiryo"/>
                 <a:ea typeface="Meiryo"/>
               </a:rPr>
-              <a:t>・会場装飾・告知物:集合ビジュアル(修正版を提供予定)・個体素材・ブランドロゴ</a:t>
+              <a:t>・会場装飾と告知物には集合ビジュアル(調整版)、個体素材、ブランドロゴ</a:t>
             </a:r>
           </a:p>
           <a:p>
@@ -5695,7 +5695,7 @@
                 <a:latin typeface="Meiryo"/>
                 <a:ea typeface="Meiryo"/>
               </a:rPr>
-              <a:t>・監修は当社「制作物」窓口へ。春節前量産(1月末)から逆算し11月中の確定が必要</a:t>
+              <a:t>・監修は当社の制作物窓口へ。春節前の量産(1月末)から逆算し、11月中に確定</a:t>
             </a:r>
           </a:p>
         </p:txBody>
@@ -5781,7 +5781,7 @@
                 <a:latin typeface="Meiryo"/>
                 <a:ea typeface="Meiryo"/>
               </a:rPr>
-              <a:t>② 仮申請フロー(別紙「仮申請のご案内」参照)</a:t>
+              <a:t>仮申請の流れ(別紙「仮申請のご案内」)</a:t>
             </a:r>
           </a:p>
           <a:p>
@@ -5798,7 +5798,7 @@
                 <a:latin typeface="Meiryo"/>
                 <a:ea typeface="Meiryo"/>
               </a:rPr>
-              <a:t>・貴社ご担当者1名を事前登録→品目ごとに仮申請→約1週間で可否回答</a:t>
+              <a:t>・貴社担当者1名を事前登録し、品目ごとに申請。約1週間で可否を回答</a:t>
             </a:r>
           </a:p>
           <a:p>
@@ -5815,7 +5815,7 @@
                 <a:latin typeface="Meiryo"/>
                 <a:ea typeface="Meiryo"/>
               </a:rPr>
-              <a:t>・入力項目:企画商品名(「ノベルティ ○○」表記)・キャラクター・商品カテゴリー</a:t>
+              <a:t>・入力項目は企画商品名(「ノベルティ ○○」の表記)、キャラクター、商品カテゴリー、製造原価単価、予定数量、材質・サイズなど</a:t>
             </a:r>
           </a:p>
           <a:p>
@@ -5832,7 +5832,7 @@
                 <a:latin typeface="Meiryo"/>
                 <a:ea typeface="Meiryo"/>
               </a:rPr>
-              <a:t>　(配布物=1〜16/会場装飾=店舗備品)・製造原価単価・予定数量・材質・サイズ等</a:t>
+              <a:t>・配布物は商品カテゴリー1〜16、会場装飾は店舗備品として申請</a:t>
             </a:r>
           </a:p>
           <a:p>
@@ -5849,7 +5849,7 @@
                 <a:latin typeface="Meiryo"/>
                 <a:ea typeface="Meiryo"/>
               </a:rPr>
-              <a:t>・作成許諾ロイヤリティ:作成費用の20%(製造原価単価×数量が算定基礎)</a:t>
+              <a:t>・作成許諾ロイヤリティは作成費用の20%(製造原価単価×数量)</a:t>
             </a:r>
           </a:p>
         </p:txBody>
@@ -5935,7 +5935,7 @@
                 <a:latin typeface="Meiryo"/>
                 <a:ea typeface="Meiryo"/>
               </a:rPr>
-              <a:t>③ ノベルティのカテゴリー</a:t>
+              <a:t>ノベルティのカテゴリー</a:t>
             </a:r>
           </a:p>
           <a:p>
@@ -5952,7 +5952,7 @@
                 <a:latin typeface="Meiryo"/>
                 <a:ea typeface="Meiryo"/>
               </a:rPr>
-              <a:t>・制作可能:トートバッグ・タオル・BOXティッシュ等(キャンペーンデザイン使用)</a:t>
+              <a:t>・制作できるもの:トートバッグ、タオル、BOXティッシュなど(キャンペーンデザイン使用)</a:t>
             </a:r>
           </a:p>
           <a:p>
@@ -5969,7 +5969,7 @@
                 <a:latin typeface="Meiryo"/>
                 <a:ea typeface="Meiryo"/>
               </a:rPr>
-              <a:t>・制作不可:お子様向け玩具(フィギュア・ソフビ等)・菓子類・ランチボックス等</a:t>
+              <a:t>・制作できないもの:お子様向け玩具(フィギュア・ソフビ等)、菓子類、ランチボックスなど</a:t>
             </a:r>
           </a:p>
           <a:p>
@@ -5986,7 +5986,7 @@
                 <a:latin typeface="Meiryo"/>
                 <a:ea typeface="Meiryo"/>
               </a:rPr>
-              <a:t>・タオルは一般仕様(ループタオル・ミニタオルは避ける)</a:t>
+              <a:t>・タオルは一般的な仕様で(ループタオル・ミニタオルは避ける)</a:t>
             </a:r>
           </a:p>
         </p:txBody>
@@ -6072,7 +6072,7 @@
                 <a:latin typeface="Meiryo"/>
                 <a:ea typeface="Meiryo"/>
               </a:rPr>
-              <a:t>④ 修了証・配布物</a:t>
+              <a:t>修了証・配布物</a:t>
             </a:r>
           </a:p>
           <a:p>
@@ -6089,7 +6089,7 @@
                 <a:latin typeface="Meiryo"/>
                 <a:ea typeface="Meiryo"/>
               </a:rPr>
-              <a:t>・既存の修了証は当社既存イベント専用のため本件では使用しません</a:t>
+              <a:t>・既存の修了証は当社の別イベント用のため、本件では使わない</a:t>
             </a:r>
           </a:p>
           <a:p>
@@ -6106,7 +6106,7 @@
                 <a:latin typeface="Meiryo"/>
                 <a:ea typeface="Meiryo"/>
               </a:rPr>
-              <a:t>・案A:貴社のミッション(クイズ等)と連動したオリジナル修了証を貴社制作</a:t>
+              <a:t>・案A:貴社のミッション(クイズ等)と連動したオリジナル修了証を貴社で制作</a:t>
             </a:r>
           </a:p>
           <a:p>
@@ -6123,7 +6123,7 @@
                 <a:latin typeface="Meiryo"/>
                 <a:ea typeface="Meiryo"/>
               </a:rPr>
-              <a:t>・案B:キャンペーンビジュアルのステッカーを貴社制作・全員配布</a:t>
+              <a:t>・案B:キャンペーンビジュアルのステッカーを貴社で制作し、来場者全員に配布</a:t>
             </a:r>
           </a:p>
           <a:p>
@@ -6140,7 +6140,7 @@
                 <a:latin typeface="Meiryo"/>
                 <a:ea typeface="Meiryo"/>
               </a:rPr>
-              <a:t>・配布の目的(体験型か告知型か)に応じて選択</a:t>
+              <a:t>・体験型か告知型か、配布の目的に合わせて選択</a:t>
             </a:r>
           </a:p>
         </p:txBody>
@@ -6222,7 +6222,7 @@
                 <a:latin typeface="Meiryo"/>
                 <a:ea typeface="Meiryo"/>
               </a:rPr>
-              <a:t>4. スケジュールと次のステップ</a:t>
+              <a:t>4. スケジュール</a:t>
             </a:r>
           </a:p>
         </p:txBody>
@@ -6262,7 +6262,7 @@
                 <a:latin typeface="Meiryo"/>
                 <a:ea typeface="Meiryo"/>
               </a:rPr>
-              <a:t>2027年1月開始に向けた逆算スケジュールです</a:t>
+              <a:t>2027年1月開始からの逆算</a:t>
             </a:r>
           </a:p>
         </p:txBody>
@@ -6447,7 +6447,7 @@
                           <a:latin typeface="Meiryo"/>
                           <a:ea typeface="Meiryo"/>
                         </a:rPr>
-                        <a:t>マイルストーン</a:t>
+                        <a:t>内容</a:t>
                       </a:r>
                     </a:p>
                   </a:txBody>
@@ -6518,7 +6518,7 @@
                           <a:latin typeface="Meiryo"/>
                           <a:ea typeface="Meiryo"/>
                         </a:rPr>
-                        <a:t>本格実施のご判断/役割分担の確定</a:t>
+                        <a:t>本格実施の可否、役割分担の確定</a:t>
                       </a:r>
                     </a:p>
                   </a:txBody>
@@ -6589,7 +6589,7 @@
                           <a:latin typeface="Meiryo"/>
                           <a:ea typeface="Meiryo"/>
                         </a:rPr>
-                        <a:t>キャンペーン名称・KV策定打ち合わせ/契約書ドラフトのご提示</a:t>
+                        <a:t>キャンペーン名称・KVの策定打ち合わせ。契約書ドラフトの提示</a:t>
                       </a:r>
                     </a:p>
                   </a:txBody>
@@ -6612,7 +6612,7 @@
                           <a:latin typeface="Meiryo"/>
                           <a:ea typeface="Meiryo"/>
                         </a:rPr>
-                        <a:t>両社/当社</a:t>
+                        <a:t>両社／当社</a:t>
                       </a:r>
                     </a:p>
                   </a:txBody>
@@ -6660,7 +6660,7 @@
                           <a:latin typeface="Meiryo"/>
                           <a:ea typeface="Meiryo"/>
                         </a:rPr>
-                        <a:t>KV確定/ノベルティ品目の仮申請/取りまとめ窓口の設置</a:t>
+                        <a:t>KV確定、ノベルティ品目の仮申請、取りまとめ窓口の設置</a:t>
                       </a:r>
                     </a:p>
                   </a:txBody>
@@ -6802,7 +6802,7 @@
                           <a:latin typeface="Meiryo"/>
                           <a:ea typeface="Meiryo"/>
                         </a:rPr>
-                        <a:t>デザイン監修完了・量産開始/1月開催分の会場確定(12月1日)/運営レクチャー</a:t>
+                        <a:t>デザイン監修完了、量産開始(春節前)。1月開催分の会場確定(12月1日)。運営レクチャー</a:t>
                       </a:r>
                     </a:p>
                   </a:txBody>
@@ -6873,7 +6873,7 @@
                           <a:latin typeface="Meiryo"/>
                           <a:ea typeface="Meiryo"/>
                         </a:rPr>
-                        <a:t>開始(基準15ライン・1月は最大20ライン)</a:t>
+                        <a:t>開始(基準15ライン。1月は最大20ライン)</a:t>
                       </a:r>
                     </a:p>
                   </a:txBody>
@@ -7009,7 +7009,7 @@
                 <a:latin typeface="Meiryo"/>
                 <a:ea typeface="Meiryo"/>
               </a:rPr>
-              <a:t>① 本格実施のご意思　② 役割分担(運営体制・取りまとめ窓口)　③ 11月末締結のスケジュール　④ KV策定打ち合わせの日程</a:t>
+              <a:t>本格実施の可否／役割分担(運営体制・取りまとめ窓口)／11月末締結までの進め方／KV策定打ち合わせの日程</a:t>
             </a:r>
           </a:p>
         </p:txBody>
@@ -7091,7 +7091,7 @@
                 <a:latin typeface="Meiryo"/>
                 <a:ea typeface="Meiryo"/>
               </a:rPr>
-              <a:t>本日のアジェンダ</a:t>
+              <a:t>本日の進め方</a:t>
             </a:r>
           </a:p>
         </p:txBody>
@@ -7099,46 +7099,6 @@
       <p:sp>
         <p:nvSpPr>
           <p:cNvPr id="4" name="TextBox 3"/>
-          <p:cNvSpPr txBox="1"/>
-          <p:nvPr/>
-        </p:nvSpPr>
-        <p:spPr>
-          <a:xfrm>
-            <a:off x="502920" y="896112"/>
-            <a:ext cx="11155680" cy="365760"/>
-          </a:xfrm>
-          <a:prstGeom prst="rect">
-            <a:avLst/>
-          </a:prstGeom>
-          <a:noFill/>
-        </p:spPr>
-        <p:txBody>
-          <a:bodyPr wrap="square" anchor="t" lIns="0" rIns="0" tIns="0" bIns="0">
-            <a:spAutoFit/>
-          </a:bodyPr>
-          <a:lstStyle/>
-          <a:p>
-            <a:pPr algn="l">
-              <a:spcAft>
-                <a:spcPts val="500"/>
-              </a:spcAft>
-            </a:pPr>
-            <a:r>
-              <a:rPr sz="1250" b="0">
-                <a:solidFill>
-                  <a:srgbClr val="5A626B"/>
-                </a:solidFill>
-                <a:latin typeface="Meiryo"/>
-                <a:ea typeface="Meiryo"/>
-              </a:rPr>
-              <a:t>本格実施のご判断に向けて、以下の4点を確認・確定させていただきたく存じます</a:t>
-            </a:r>
-          </a:p>
-        </p:txBody>
-      </p:sp>
-      <p:sp>
-        <p:nvSpPr>
-          <p:cNvPr id="5" name="TextBox 4"/>
           <p:cNvSpPr txBox="1"/>
           <p:nvPr/>
         </p:nvSpPr>
@@ -7178,7 +7138,7 @@
       </p:sp>
       <p:sp>
         <p:nvSpPr>
-          <p:cNvPr id="6" name="TextBox 5"/>
+          <p:cNvPr id="5" name="TextBox 4"/>
           <p:cNvSpPr txBox="1"/>
           <p:nvPr/>
         </p:nvSpPr>
@@ -7218,7 +7178,7 @@
       </p:sp>
       <p:sp>
         <p:nvSpPr>
-          <p:cNvPr id="7" name="TextBox 6"/>
+          <p:cNvPr id="6" name="TextBox 5"/>
           <p:cNvSpPr txBox="1"/>
           <p:nvPr/>
         </p:nvSpPr>
@@ -7258,14 +7218,14 @@
       </p:sp>
       <p:graphicFrame>
         <p:nvGraphicFramePr>
-          <p:cNvPr id="8" name="Table 7"/>
+          <p:cNvPr id="7" name="Table 6"/>
           <p:cNvGraphicFramePr>
             <a:graphicFrameLocks noGrp="1"/>
           </p:cNvGraphicFramePr>
           <p:nvPr/>
         </p:nvGraphicFramePr>
         <p:xfrm>
-          <a:off x="640080" y="1463040"/>
+          <a:off x="640080" y="1280160"/>
           <a:ext cx="10881360" cy="3291839"/>
         </p:xfrm>
         <a:graphic>
@@ -7387,7 +7347,7 @@
                           <a:latin typeface="Meiryo"/>
                           <a:ea typeface="Meiryo"/>
                         </a:rPr>
-                        <a:t>7会場の実施結果と、本格実施に向けた改善ポイントの共有</a:t>
+                        <a:t>7会場の実施結果と、本格実施に向けて改善したい点</a:t>
                       </a:r>
                     </a:p>
                   </a:txBody>
@@ -7458,7 +7418,7 @@
                           <a:latin typeface="Meiryo"/>
                           <a:ea typeface="Meiryo"/>
                         </a:rPr>
-                        <a:t>当日運営の分担(当社2名派遣/貴社運営体制)と、申請・確認書のフローの確定</a:t>
+                        <a:t>当日運営の分担、連絡体制、申請と確認書の流れ</a:t>
                       </a:r>
                     </a:p>
                   </a:txBody>
@@ -7529,7 +7489,7 @@
                           <a:latin typeface="Meiryo"/>
                           <a:ea typeface="Meiryo"/>
                         </a:rPr>
-                        <a:t>ソフトバンク様特別プランの価格、最低開催数保証、ライン供給計画、実施条件</a:t>
+                        <a:t>価格、最低開催数保証、ライン供給計画、実施条件</a:t>
                       </a:r>
                     </a:p>
                   </a:txBody>
@@ -7640,14 +7600,14 @@
       </p:graphicFrame>
       <p:sp>
         <p:nvSpPr>
-          <p:cNvPr id="9" name="Rounded Rectangle 8"/>
+          <p:cNvPr id="8" name="Rounded Rectangle 7"/>
           <p:cNvSpPr/>
           <p:nvPr/>
         </p:nvSpPr>
         <p:spPr>
           <a:xfrm>
-            <a:off x="640080" y="4846320"/>
-            <a:ext cx="10881360" cy="1097280"/>
+            <a:off x="640080" y="4663440"/>
+            <a:ext cx="10881360" cy="1188720"/>
           </a:xfrm>
           <a:prstGeom prst="roundRect">
             <a:avLst>
@@ -7686,14 +7646,14 @@
       </p:sp>
       <p:sp>
         <p:nvSpPr>
-          <p:cNvPr id="10" name="TextBox 9"/>
+          <p:cNvPr id="9" name="TextBox 8"/>
           <p:cNvSpPr txBox="1"/>
           <p:nvPr/>
         </p:nvSpPr>
         <p:spPr>
           <a:xfrm>
-            <a:off x="914400" y="4983480"/>
-            <a:ext cx="10332720" cy="914400"/>
+            <a:off x="914400" y="4800600"/>
+            <a:ext cx="10332720" cy="1005840"/>
           </a:xfrm>
           <a:prstGeom prst="rect">
             <a:avLst/>
@@ -7719,7 +7679,7 @@
                 <a:latin typeface="Meiryo"/>
                 <a:ea typeface="Meiryo"/>
               </a:rPr>
-              <a:t>本日のゴール</a:t>
+              <a:t>本日決めていただきたいこと</a:t>
             </a:r>
           </a:p>
           <a:p>
@@ -7736,7 +7696,7 @@
                 <a:latin typeface="Meiryo"/>
                 <a:ea typeface="Meiryo"/>
               </a:rPr>
-              <a:t>・本格実施のご意思確認　・役割分担の確定　・11月末までのご契約スケジュールの合意　・キャンペーン名称・ビジュアル策定打ち合わせの日程確定</a:t>
+              <a:t>本格実施の可否／役割分担／11月末締結までの進め方／キャンペーン名称・ビジュアル策定打ち合わせの日程</a:t>
             </a:r>
           </a:p>
         </p:txBody>
@@ -7858,7 +7818,7 @@
                 <a:latin typeface="Meiryo"/>
                 <a:ea typeface="Meiryo"/>
               </a:rPr>
-              <a:t>2026年9〜10月・神奈川県内7会場(写真撮影会型5・ステージショー型2)の実施を踏まえて</a:t>
+              <a:t>2026年9〜10月、神奈川県内7会場(写真撮影会5・ステージショー2)</a:t>
             </a:r>
           </a:p>
         </p:txBody>
@@ -8064,7 +8024,7 @@
                 <a:latin typeface="Meiryo"/>
                 <a:ea typeface="Meiryo"/>
               </a:rPr>
-              <a:t>実績と良かった点</a:t>
+              <a:t>実績</a:t>
             </a:r>
           </a:p>
           <a:p>
@@ -8081,7 +8041,7 @@
                 <a:latin typeface="Meiryo"/>
                 <a:ea typeface="Meiryo"/>
               </a:rPr>
-              <a:t>・全7会場・14日間を完走。ステージショー型は1回150〜227名を動員(ヤマダ横浜で単日最多227名、古淵は開店前50名の行列・整理券200枚完売)</a:t>
+              <a:t>・7会場14日間を予定どおり実施</a:t>
             </a:r>
           </a:p>
           <a:p>
@@ -8098,7 +8058,7 @@
                 <a:latin typeface="Meiryo"/>
                 <a:ea typeface="Meiryo"/>
               </a:rPr>
-              <a:t>・撮影会型は1回の上限を30〜35組に調整する運用が奏功(港南台は終始スムーズな優良事例)</a:t>
+              <a:t>・ステージショーは1回150〜227名。ヤマダ横浜で単日227名、古淵は開店前から50名の行列、整理券200枚が完売</a:t>
             </a:r>
           </a:p>
           <a:p>
@@ -8115,7 +8075,24 @@
                 <a:latin typeface="Meiryo"/>
                 <a:ea typeface="Meiryo"/>
               </a:rPr>
-              <a:t>・ヨドバシ横浜はノベルティ受取場所を店舗内に設定し、見積取得が増加</a:t>
+              <a:t>・撮影会は1回の上限を30〜35組にすると安定。港南台は2日間とも滞りなく進行</a:t>
+            </a:r>
+          </a:p>
+          <a:p>
+            <a:pPr algn="l">
+              <a:spcAft>
+                <a:spcPts val="400"/>
+              </a:spcAft>
+            </a:pPr>
+            <a:r>
+              <a:rPr sz="1100" b="0">
+                <a:solidFill>
+                  <a:srgbClr val="1A1A1A"/>
+                </a:solidFill>
+                <a:latin typeface="Meiryo"/>
+                <a:ea typeface="Meiryo"/>
+              </a:rPr>
+              <a:t>・ヨドバシ横浜はノベルティの受け取りを店舗内にしたところ、見積の取得が増加</a:t>
             </a:r>
           </a:p>
         </p:txBody>
@@ -8201,7 +8178,7 @@
                 <a:latin typeface="Meiryo"/>
                 <a:ea typeface="Meiryo"/>
               </a:rPr>
-              <a:t>改善をお願いしたい点</a:t>
+              <a:t>改善したい点</a:t>
             </a:r>
           </a:p>
           <a:p>
@@ -8218,7 +8195,7 @@
                 <a:latin typeface="Meiryo"/>
                 <a:ea typeface="Meiryo"/>
               </a:rPr>
-              <a:t>・MC不在の会場でルール共有が不足し、盛り上がりが低下(ヨドバシ横浜等)</a:t>
+              <a:t>・MCがいない会場で撮影ルールが伝わらず、場の盛り上がりが弱い</a:t>
             </a:r>
           </a:p>
           <a:p>
@@ -8235,7 +8212,7 @@
                 <a:latin typeface="Meiryo"/>
                 <a:ea typeface="Meiryo"/>
               </a:rPr>
-              <a:t>・スタッフの識別(Tシャツ未着用)・集合時間・接客品質にばらつき</a:t>
+              <a:t>・スタッフの服装がまちまちでお客様から見分けがつかない。集合時間・接客にもばらつき</a:t>
             </a:r>
           </a:p>
           <a:p>
@@ -8252,7 +8229,7 @@
                 <a:latin typeface="Meiryo"/>
                 <a:ea typeface="Meiryo"/>
               </a:rPr>
-              <a:t>・撮影後の商談・アンケート誘導が事前告知なく、不快感の声あり</a:t>
+              <a:t>・撮影後の商談・アンケート案内が事前に伝わっておらず、不満の声</a:t>
             </a:r>
           </a:p>
           <a:p>
@@ -8269,7 +8246,7 @@
                 <a:latin typeface="Meiryo"/>
                 <a:ea typeface="Meiryo"/>
               </a:rPr>
-              <a:t>・未監修POP・非公式グッズ・AI生成画像の使用が発生</a:t>
+              <a:t>・監修前のPOP、非公式グッズ、AI生成画像の使用</a:t>
             </a:r>
           </a:p>
           <a:p>
@@ -8286,7 +8263,7 @@
                 <a:latin typeface="Meiryo"/>
                 <a:ea typeface="Meiryo"/>
               </a:rPr>
-              <a:t>・会場ごとの個別配送による物流負荷と、EDI検収タイミングのずれ</a:t>
+              <a:t>・会場ごとの個別配送で物流が煩雑。EDIの検収時期と書類発行のずれ</a:t>
             </a:r>
           </a:p>
         </p:txBody>
@@ -8372,7 +8349,7 @@
                 <a:latin typeface="Meiryo"/>
                 <a:ea typeface="Meiryo"/>
               </a:rPr>
-              <a:t>本格実施に向けた標準化(ご提案)</a:t>
+              <a:t>本格実施での運用ルール(案)</a:t>
             </a:r>
           </a:p>
           <a:p>
@@ -8389,7 +8366,7 @@
                 <a:latin typeface="Meiryo"/>
                 <a:ea typeface="Meiryo"/>
               </a:rPr>
-              <a:t>・公演は1日4回を推奨(1回30分×4回・各50組目安、休憩・メンテ1.5時間確保)。MC役(ルール案内・進行アナウンス)を全会場に配置</a:t>
+              <a:t>・公演は1日4回(1回30分、各50組まで)。間に休憩とスーツメンテの時間を1時間半</a:t>
             </a:r>
           </a:p>
           <a:p>
@@ -8406,7 +8383,7 @@
                 <a:latin typeface="Meiryo"/>
                 <a:ea typeface="Meiryo"/>
               </a:rPr>
-              <a:t>・専用スタッフTシャツの着用・集合時間の厳守・接客マナーの事前共有を全店ルール化。「商談・アンケート目的」を告知物と受付で明記</a:t>
+              <a:t>・MC役を全会場に置く(ルール案内と進行アナウンス)。スタッフTシャツ着用、集合時間厳守、接客マナーの事前共有</a:t>
             </a:r>
           </a:p>
           <a:p>
@@ -8423,7 +8400,7 @@
                 <a:latin typeface="Meiryo"/>
                 <a:ea typeface="Meiryo"/>
               </a:rPr>
-              <a:t>・制作物は監修済みの規定デザインのみ使用(他キャラクターの混在禁止)/ノベルティは指定倉庫への一括納品・5営業日前の数量確定</a:t>
+              <a:t>・「商談・アンケートのご案内がある」ことを告知物と受付で明記</a:t>
             </a:r>
           </a:p>
           <a:p>
@@ -8440,7 +8417,24 @@
                 <a:latin typeface="Meiryo"/>
                 <a:ea typeface="Meiryo"/>
               </a:rPr>
-              <a:t>・全会場の情報を網羅した告知LPを開設し、当社公式サイトから誘導。EDI検収と書類発行のタイミングを本契約で整理</a:t>
+              <a:t>・制作物は監修済みの規定デザインのみ。他キャラクターとの混在不可。ノベルティは指定倉庫に一括納品、5営業日前に数量確定</a:t>
+            </a:r>
+          </a:p>
+          <a:p>
+            <a:pPr algn="l">
+              <a:spcAft>
+                <a:spcPts val="400"/>
+              </a:spcAft>
+            </a:pPr>
+            <a:r>
+              <a:rPr sz="1100" b="0">
+                <a:solidFill>
+                  <a:srgbClr val="1A1A1A"/>
+                </a:solidFill>
+                <a:latin typeface="Meiryo"/>
+                <a:ea typeface="Meiryo"/>
+              </a:rPr>
+              <a:t>・全会場の情報をまとめた告知ページを開設し、当社公式サイトから誘導。EDIの検収と書類発行の時期を契約で整理</a:t>
             </a:r>
           </a:p>
         </p:txBody>
@@ -8522,7 +8516,7 @@
                 <a:latin typeface="Meiryo"/>
                 <a:ea typeface="Meiryo"/>
               </a:rPr>
-              <a:t>1. テストイベント 会場別実績</a:t>
+              <a:t>1. 会場別の実績</a:t>
             </a:r>
           </a:p>
         </p:txBody>
@@ -8562,7 +8556,7 @@
                 <a:latin typeface="Meiryo"/>
                 <a:ea typeface="Meiryo"/>
               </a:rPr>
-              <a:t>2026年9月12日〜10月18日・神奈川県内7会場(ショップ4・量販3)</a:t>
+              <a:t>2026年9月12日〜10月18日</a:t>
             </a:r>
           </a:p>
         </p:txBody>
@@ -8696,7 +8690,7 @@
           <p:nvPr/>
         </p:nvGraphicFramePr>
         <p:xfrm>
-          <a:off x="640080" y="1417320"/>
+          <a:off x="640080" y="1325880"/>
           <a:ext cx="10881358" cy="4389120"/>
         </p:xfrm>
         <a:graphic>
@@ -8708,9 +8702,9 @@
               <a:tblGrid>
                 <a:gridCol w="1978429"/>
                 <a:gridCol w="1483821"/>
-                <a:gridCol w="1854777"/>
                 <a:gridCol w="1978429"/>
-                <a:gridCol w="3585902"/>
+                <a:gridCol w="1607473"/>
+                <a:gridCol w="3833206"/>
               </a:tblGrid>
               <a:tr h="548640">
                 <a:tc>
@@ -8795,7 +8789,7 @@
                           <a:latin typeface="Meiryo"/>
                           <a:ea typeface="Meiryo"/>
                         </a:rPr>
-                        <a:t>動員実績</a:t>
+                        <a:t>動員</a:t>
                       </a:r>
                     </a:p>
                   </a:txBody>
@@ -8818,7 +8812,7 @@
                           <a:latin typeface="Meiryo"/>
                           <a:ea typeface="Meiryo"/>
                         </a:rPr>
-                        <a:t>特記事項</a:t>
+                        <a:t>備考</a:t>
                       </a:r>
                     </a:p>
                   </a:txBody>
@@ -8866,7 +8860,7 @@
                           <a:latin typeface="Meiryo"/>
                           <a:ea typeface="Meiryo"/>
                         </a:rPr>
-                        <a:t>9/12-13 ショー型</a:t>
+                        <a:t>9/12-13 ショー</a:t>
                       </a:r>
                     </a:p>
                   </a:txBody>
@@ -8889,7 +8883,7 @@
                           <a:latin typeface="Meiryo"/>
                           <a:ea typeface="Meiryo"/>
                         </a:rPr>
-                        <a:t>テオ&amp;オメガ/ゼット&amp;ジード</a:t>
+                        <a:t>テオ&amp;オメガ／ゼット&amp;ジード</a:t>
                       </a:r>
                     </a:p>
                   </a:txBody>
@@ -8912,7 +8906,7 @@
                           <a:latin typeface="Meiryo"/>
                           <a:ea typeface="Meiryo"/>
                         </a:rPr>
-                        <a:t>計664名(2日・各日2回)</a:t>
+                        <a:t>664名(各日2回)</a:t>
                       </a:r>
                     </a:p>
                   </a:txBody>
@@ -8935,7 +8929,7 @@
                           <a:latin typeface="Meiryo"/>
                           <a:ea typeface="Meiryo"/>
                         </a:rPr>
-                        <a:t>開店前50名行列・整理券200枚完売。抽選会フローの整理が課題</a:t>
+                        <a:t>開店前50名の行列、整理券200枚完売。抽選会の流れに混乱</a:t>
                       </a:r>
                     </a:p>
                   </a:txBody>
@@ -8983,7 +8977,7 @@
                           <a:latin typeface="Meiryo"/>
                           <a:ea typeface="Meiryo"/>
                         </a:rPr>
-                        <a:t>9/19-20 撮影会型</a:t>
+                        <a:t>9/19-20 撮影会</a:t>
                       </a:r>
                     </a:p>
                   </a:txBody>
@@ -9006,7 +9000,7 @@
                           <a:latin typeface="Meiryo"/>
                           <a:ea typeface="Meiryo"/>
                         </a:rPr>
-                        <a:t>ウルトラマン/オメガ</a:t>
+                        <a:t>ウルトラマン／オメガ</a:t>
                       </a:r>
                     </a:p>
                   </a:txBody>
@@ -9029,7 +9023,7 @@
                           <a:latin typeface="Meiryo"/>
                           <a:ea typeface="Meiryo"/>
                         </a:rPr>
-                        <a:t>計216組(2日・各日5回)</a:t>
+                        <a:t>216組(各日5回)</a:t>
                       </a:r>
                     </a:p>
                   </a:txBody>
@@ -9052,7 +9046,7 @@
                           <a:latin typeface="Meiryo"/>
                           <a:ea typeface="Meiryo"/>
                         </a:rPr>
-                        <a:t>未監修POP・非公式品の装飾使用、担当者不在が発生</a:t>
+                        <a:t>監修前POPと非公式品の装飾使用。店舗担当者が不在</a:t>
                       </a:r>
                     </a:p>
                   </a:txBody>
@@ -9100,7 +9094,7 @@
                           <a:latin typeface="Meiryo"/>
                           <a:ea typeface="Meiryo"/>
                         </a:rPr>
-                        <a:t>9/19-20 撮影会型</a:t>
+                        <a:t>9/19-20 撮影会</a:t>
                       </a:r>
                     </a:p>
                   </a:txBody>
@@ -9123,7 +9117,7 @@
                           <a:latin typeface="Meiryo"/>
                           <a:ea typeface="Meiryo"/>
                         </a:rPr>
-                        <a:t>ゼロ/ティガ</a:t>
+                        <a:t>ゼロ／ティガ</a:t>
                       </a:r>
                     </a:p>
                   </a:txBody>
@@ -9146,7 +9140,7 @@
                           <a:latin typeface="Meiryo"/>
                           <a:ea typeface="Meiryo"/>
                         </a:rPr>
-                        <a:t>計225組(2日・各日3回)</a:t>
+                        <a:t>225組(各日3回)</a:t>
                       </a:r>
                     </a:p>
                   </a:txBody>
@@ -9169,7 +9163,7 @@
                           <a:latin typeface="Meiryo"/>
                           <a:ea typeface="Meiryo"/>
                         </a:rPr>
-                        <a:t>整理券45〜50枚/回ほぼ完売。景品に他IP品が混在</a:t>
+                        <a:t>整理券45〜50枚/回がほぼ完売。景品に他IP品が混在</a:t>
                       </a:r>
                     </a:p>
                   </a:txBody>
@@ -9217,7 +9211,7 @@
                           <a:latin typeface="Meiryo"/>
                           <a:ea typeface="Meiryo"/>
                         </a:rPr>
-                        <a:t>9/26-27 ショー型</a:t>
+                        <a:t>9/26-27 ショー</a:t>
                       </a:r>
                     </a:p>
                   </a:txBody>
@@ -9240,7 +9234,7 @@
                           <a:latin typeface="Meiryo"/>
                           <a:ea typeface="Meiryo"/>
                         </a:rPr>
-                        <a:t>テオ&amp;オメガ/ゼット&amp;ジード</a:t>
+                        <a:t>テオ&amp;オメガ／ゼット&amp;ジード</a:t>
                       </a:r>
                     </a:p>
                   </a:txBody>
@@ -9263,7 +9257,7 @@
                           <a:latin typeface="Meiryo"/>
                           <a:ea typeface="Meiryo"/>
                         </a:rPr>
-                        <a:t>計622名(27日は単日最多227名)</a:t>
+                        <a:t>622名(27日は227名)</a:t>
                       </a:r>
                     </a:p>
                   </a:txBody>
@@ -9286,7 +9280,7 @@
                           <a:latin typeface="Meiryo"/>
                           <a:ea typeface="Meiryo"/>
                         </a:rPr>
-                        <a:t>当日朝にレイアウト変更・ステージ屋外化。事前の会場確認が必要</a:t>
+                        <a:t>当日朝にレイアウト変更、ステージが屋外に</a:t>
                       </a:r>
                     </a:p>
                   </a:txBody>
@@ -9334,7 +9328,7 @@
                           <a:latin typeface="Meiryo"/>
                           <a:ea typeface="Meiryo"/>
                         </a:rPr>
-                        <a:t>9/26-27 撮影会型</a:t>
+                        <a:t>9/26-27 撮影会</a:t>
                       </a:r>
                     </a:p>
                   </a:txBody>
@@ -9357,7 +9351,7 @@
                           <a:latin typeface="Meiryo"/>
                           <a:ea typeface="Meiryo"/>
                         </a:rPr>
-                        <a:t>ゼロ/ティガ</a:t>
+                        <a:t>ゼロ／ティガ</a:t>
                       </a:r>
                     </a:p>
                   </a:txBody>
@@ -9380,7 +9374,7 @@
                           <a:latin typeface="Meiryo"/>
                           <a:ea typeface="Meiryo"/>
                         </a:rPr>
-                        <a:t>計234組(2日・各日5回)</a:t>
+                        <a:t>234組(各日5回)</a:t>
                       </a:r>
                     </a:p>
                   </a:txBody>
@@ -9403,7 +9397,7 @@
                           <a:latin typeface="Meiryo"/>
                           <a:ea typeface="Meiryo"/>
                         </a:rPr>
-                        <a:t>初回上限30組の運用を導入し分散に成功</a:t>
+                        <a:t>初回の上限を30組にして人の偏りを解消</a:t>
                       </a:r>
                     </a:p>
                   </a:txBody>
@@ -9451,7 +9445,7 @@
                           <a:latin typeface="Meiryo"/>
                           <a:ea typeface="Meiryo"/>
                         </a:rPr>
-                        <a:t>10/17-18 撮影会型</a:t>
+                        <a:t>10/17-18 撮影会</a:t>
                       </a:r>
                     </a:p>
                   </a:txBody>
@@ -9474,7 +9468,7 @@
                           <a:latin typeface="Meiryo"/>
                           <a:ea typeface="Meiryo"/>
                         </a:rPr>
-                        <a:t>ゼロ/ティガ</a:t>
+                        <a:t>ゼロ／ティガ</a:t>
                       </a:r>
                     </a:p>
                   </a:txBody>
@@ -9497,7 +9491,7 @@
                           <a:latin typeface="Meiryo"/>
                           <a:ea typeface="Meiryo"/>
                         </a:rPr>
-                        <a:t>計313名(2日・各日5回)</a:t>
+                        <a:t>313名(各日5回)</a:t>
                       </a:r>
                     </a:p>
                   </a:txBody>
@@ -9520,7 +9514,7 @@
                           <a:latin typeface="Meiryo"/>
                           <a:ea typeface="Meiryo"/>
                         </a:rPr>
-                        <a:t>上限35名/回で終始スムーズ。優良事例</a:t>
+                        <a:t>上限35名/回。2日間とも滞りなく進行</a:t>
                       </a:r>
                     </a:p>
                   </a:txBody>
@@ -9568,7 +9562,7 @@
                           <a:latin typeface="Meiryo"/>
                           <a:ea typeface="Meiryo"/>
                         </a:rPr>
-                        <a:t>10/17-18 撮影会型</a:t>
+                        <a:t>10/17-18 撮影会</a:t>
                       </a:r>
                     </a:p>
                   </a:txBody>
@@ -9591,7 +9585,7 @@
                           <a:latin typeface="Meiryo"/>
                           <a:ea typeface="Meiryo"/>
                         </a:rPr>
-                        <a:t>ゼロ/ティガ</a:t>
+                        <a:t>ゼロ／ティガ</a:t>
                       </a:r>
                     </a:p>
                   </a:txBody>
@@ -9614,7 +9608,7 @@
                           <a:latin typeface="Meiryo"/>
                           <a:ea typeface="Meiryo"/>
                         </a:rPr>
-                        <a:t>計344名(2日・各日5回)</a:t>
+                        <a:t>344名(各日5回)</a:t>
                       </a:r>
                     </a:p>
                   </a:txBody>
@@ -9637,7 +9631,7 @@
                           <a:latin typeface="Meiryo"/>
                           <a:ea typeface="Meiryo"/>
                         </a:rPr>
-                        <a:t>MC不在でルール共有不足。受取場所を店舗内に変更し見積取得増</a:t>
+                        <a:t>MCなしでルールが伝わらず。受け取りを店舗内に変更し見積取得増</a:t>
                       </a:r>
                     </a:p>
                   </a:txBody>
@@ -9660,7 +9654,7 @@
         </p:nvSpPr>
         <p:spPr>
           <a:xfrm>
-            <a:off x="640080" y="5897880"/>
+            <a:off x="640080" y="5806440"/>
             <a:ext cx="10881360" cy="457200"/>
           </a:xfrm>
           <a:prstGeom prst="rect">
@@ -9687,7 +9681,7 @@
                 <a:latin typeface="Meiryo"/>
                 <a:ea typeface="Meiryo"/>
               </a:rPr>
-              <a:t>総括:店舗・スペースに応じた枠数調整(30〜35名/回)と事前の会場ブリーフィングが成功の鍵。MC配置と「商談・アンケート目的」の事前告知を全店ルール化することが急務</a:t>
+              <a:t>会場に合わせた枠数(30〜35名/回)と事前の会場ブリーフィングで運営が安定する。MCの配置と商談・アンケート案内の事前告知は全店共通にしたい</a:t>
             </a:r>
           </a:p>
         </p:txBody>
@@ -9809,7 +9803,7 @@
                 <a:latin typeface="Meiryo"/>
                 <a:ea typeface="Meiryo"/>
               </a:rPr>
-              <a:t>当社はキャラクター稼働パート(2名)、貴社は会場運営パート(運営ディレクター1名+運営スタッフ4名)をご担当いただきます</a:t>
+              <a:t>当社はキャラクター稼働(2名)、貴社は会場運営(運営ディレクター1名+運営スタッフ4名)</a:t>
             </a:r>
           </a:p>
         </p:txBody>
@@ -10017,7 +10011,7 @@
                           <a:latin typeface="Meiryo"/>
                           <a:ea typeface="Meiryo"/>
                         </a:rPr>
-                        <a:t>撮影会の合間・開始前</a:t>
+                        <a:t>合間・開始前</a:t>
                       </a:r>
                     </a:p>
                   </a:txBody>
@@ -10065,7 +10059,7 @@
                           <a:latin typeface="Meiryo"/>
                           <a:ea typeface="Meiryo"/>
                         </a:rPr>
-                        <a:t>キャラクター稼働の統括、着脱補助・スーツメンテナンス、ヒーロー前のお客様対応</a:t>
+                        <a:t>キャラクター稼働の統括。着脱補助、スーツメンテ、ヒーロー前のお客様対応</a:t>
                       </a:r>
                     </a:p>
                   </a:txBody>
@@ -10088,7 +10082,7 @@
                           <a:latin typeface="Meiryo"/>
                           <a:ea typeface="Meiryo"/>
                         </a:rPr>
-                        <a:t>スーツメンテナンス、貴社ディレクターとの進行確認</a:t>
+                        <a:t>スーツメンテ。貴社ディレクターと進行確認</a:t>
                       </a:r>
                     </a:p>
                   </a:txBody>
@@ -10136,7 +10130,7 @@
                           <a:latin typeface="Meiryo"/>
                           <a:ea typeface="Meiryo"/>
                         </a:rPr>
-                        <a:t>キャラクター出演・ポージング(1回30分×最大5回)</a:t>
+                        <a:t>キャラクター出演(1回30分、1日最大5回)</a:t>
                       </a:r>
                     </a:p>
                   </a:txBody>
@@ -10159,7 +10153,7 @@
                           <a:latin typeface="Meiryo"/>
                           <a:ea typeface="Meiryo"/>
                         </a:rPr>
-                        <a:t>メンテナンス休憩</a:t>
+                        <a:t>メンテ休憩</a:t>
                       </a:r>
                     </a:p>
                   </a:txBody>
@@ -10207,7 +10201,7 @@
                           <a:latin typeface="Meiryo"/>
                           <a:ea typeface="Meiryo"/>
                         </a:rPr>
-                        <a:t>全体管理、音響機材のセット・音出し、館管理者との対応、会場周辺のお客様誘導</a:t>
+                        <a:t>全体管理。音響の設置と音出し、館管理者との対応、周辺のお客様誘導</a:t>
                       </a:r>
                     </a:p>
                   </a:txBody>
@@ -10349,7 +10343,7 @@
                           <a:latin typeface="Meiryo"/>
                           <a:ea typeface="Meiryo"/>
                         </a:rPr>
-                        <a:t>出口での送り出し</a:t>
+                        <a:t>出口の送り出し</a:t>
                       </a:r>
                     </a:p>
                   </a:txBody>
@@ -10443,7 +10437,7 @@
                           <a:latin typeface="Meiryo"/>
                           <a:ea typeface="Meiryo"/>
                         </a:rPr>
-                        <a:t>会場づくり、事前の列づくり</a:t>
+                        <a:t>会場づくり、列づくり</a:t>
                       </a:r>
                     </a:p>
                   </a:txBody>
@@ -10514,7 +10508,7 @@
                           <a:latin typeface="Meiryo"/>
                           <a:ea typeface="Meiryo"/>
                         </a:rPr>
-                        <a:t>会場づくり、事前の列づくり</a:t>
+                        <a:t>会場づくり、列づくり</a:t>
                       </a:r>
                     </a:p>
                   </a:txBody>
@@ -10564,7 +10558,7 @@
                 <a:latin typeface="Meiryo"/>
                 <a:ea typeface="Meiryo"/>
               </a:rPr>
-              <a:t>・費用を抑えた体制で品質を担保するための最低人数です。撮影会中と合間で持ち場が切り替わるため、運営スタッフは4名が必要となります</a:t>
+              <a:t>・運営スタッフ4名は、撮影会中と合間で持ち場が入れ替わるために必要な人数です</a:t>
             </a:r>
           </a:p>
           <a:p>
@@ -10581,7 +10575,7 @@
                 <a:latin typeface="Meiryo"/>
                 <a:ea typeface="Meiryo"/>
               </a:rPr>
-              <a:t>・運営スタッフはスタッフと分かる服装(スタッフTシャツ・ベスト等)の着用をお願いします　・初回開催時は当社がレクチャーを実施し、運営マニュアルをご提供します</a:t>
+              <a:t>・スタッフと分かる服装(Tシャツ・ベスト等)でお願いします。初回はレクチャーを当社が行い、運営マニュアルをお渡しします</a:t>
             </a:r>
           </a:p>
           <a:p>
@@ -10598,7 +10592,7 @@
                 <a:latin typeface="Meiryo"/>
                 <a:ea typeface="Meiryo"/>
               </a:rPr>
-              <a:t>・MC役(ルール案内・進行アナウンス)は貴社運営ディレクターが兼務、または当社MCオプション(+3万円/日)をご利用ください。運営一式を当社が手配するフル運営オプション(+22万円/日)も会場単位でご用意します</a:t>
+              <a:t>・MC役は運営ディレクターの兼務、または当社のMCオプション(+3万円/日)。運営一式を当社で行うフル運営オプション(+22万円/日)も会場単位で選べます</a:t>
             </a:r>
           </a:p>
         </p:txBody>
@@ -10680,7 +10674,7 @@
                 <a:latin typeface="Meiryo"/>
                 <a:ea typeface="Meiryo"/>
               </a:rPr>
-              <a:t>2. 貴社にお願いしたい体制・分担</a:t>
+              <a:t>2. 連絡体制と回答日数</a:t>
             </a:r>
           </a:p>
         </p:txBody>
@@ -10720,7 +10714,7 @@
                 <a:latin typeface="Meiryo"/>
                 <a:ea typeface="Meiryo"/>
               </a:rPr>
-              <a:t>全国展開を円滑に進めるため、以下の体制・分担をお願いいたします</a:t>
+              <a:t>貴社の取りまとめ窓口と当社の総合窓口を1対1でつなぎ、当社内で用件ごとに振り分けます</a:t>
             </a:r>
           </a:p>
         </p:txBody>
@@ -10845,17 +10839,225 @@
           </a:p>
         </p:txBody>
       </p:sp>
+      <p:sp>
+        <p:nvSpPr>
+          <p:cNvPr id="8" name="Rounded Rectangle 7"/>
+          <p:cNvSpPr/>
+          <p:nvPr/>
+        </p:nvSpPr>
+        <p:spPr>
+          <a:xfrm>
+            <a:off x="4023360" y="1463040"/>
+            <a:ext cx="4114800" cy="640080"/>
+          </a:xfrm>
+          <a:prstGeom prst="roundRect">
+            <a:avLst/>
+          </a:prstGeom>
+          <a:solidFill>
+            <a:srgbClr val="232278"/>
+          </a:solidFill>
+          <a:ln>
+            <a:noFill/>
+          </a:ln>
+          <a:effectLst/>
+        </p:spPr>
+        <p:style>
+          <a:lnRef idx="1">
+            <a:schemeClr val="accent1"/>
+          </a:lnRef>
+          <a:fillRef idx="3">
+            <a:schemeClr val="accent1"/>
+          </a:fillRef>
+          <a:effectRef idx="2">
+            <a:schemeClr val="accent1"/>
+          </a:effectRef>
+          <a:fontRef idx="minor">
+            <a:schemeClr val="lt1"/>
+          </a:fontRef>
+        </p:style>
+        <p:txBody>
+          <a:bodyPr rtlCol="0" anchor="ctr"/>
+          <a:lstStyle/>
+          <a:p>
+            <a:pPr algn="ctr"/>
+          </a:p>
+        </p:txBody>
+      </p:sp>
+      <p:sp>
+        <p:nvSpPr>
+          <p:cNvPr id="9" name="TextBox 8"/>
+          <p:cNvSpPr txBox="1"/>
+          <p:nvPr/>
+        </p:nvSpPr>
+        <p:spPr>
+          <a:xfrm>
+            <a:off x="4023360" y="1463040"/>
+            <a:ext cx="4114800" cy="640080"/>
+          </a:xfrm>
+          <a:prstGeom prst="rect">
+            <a:avLst/>
+          </a:prstGeom>
+          <a:noFill/>
+        </p:spPr>
+        <p:txBody>
+          <a:bodyPr wrap="square" anchor="ctr" lIns="0" rIns="0" tIns="0" bIns="0">
+            <a:spAutoFit/>
+          </a:bodyPr>
+          <a:lstStyle/>
+          <a:p>
+            <a:pPr algn="ctr">
+              <a:spcAft>
+                <a:spcPts val="500"/>
+              </a:spcAft>
+            </a:pPr>
+            <a:r>
+              <a:rPr sz="1300" b="1">
+                <a:solidFill>
+                  <a:srgbClr val="FFFFFF"/>
+                </a:solidFill>
+                <a:latin typeface="Meiryo"/>
+                <a:ea typeface="Meiryo"/>
+              </a:rPr>
+              <a:t>貴社 取りまとめ窓口(1部署)</a:t>
+            </a:r>
+          </a:p>
+        </p:txBody>
+      </p:sp>
+      <p:sp>
+        <p:nvSpPr>
+          <p:cNvPr id="10" name="TextBox 9"/>
+          <p:cNvSpPr txBox="1"/>
+          <p:nvPr/>
+        </p:nvSpPr>
+        <p:spPr>
+          <a:xfrm>
+            <a:off x="4023360" y="2148840"/>
+            <a:ext cx="4114800" cy="320040"/>
+          </a:xfrm>
+          <a:prstGeom prst="rect">
+            <a:avLst/>
+          </a:prstGeom>
+          <a:noFill/>
+        </p:spPr>
+        <p:txBody>
+          <a:bodyPr wrap="square" anchor="t" lIns="0" rIns="0" tIns="0" bIns="0">
+            <a:spAutoFit/>
+          </a:bodyPr>
+          <a:lstStyle/>
+          <a:p>
+            <a:pPr algn="ctr">
+              <a:spcAft>
+                <a:spcPts val="500"/>
+              </a:spcAft>
+            </a:pPr>
+            <a:r>
+              <a:rPr sz="1200" b="1">
+                <a:solidFill>
+                  <a:srgbClr val="5A626B"/>
+                </a:solidFill>
+                <a:latin typeface="Meiryo"/>
+                <a:ea typeface="Meiryo"/>
+              </a:rPr>
+              <a:t>連絡 ↓　↑ 回答</a:t>
+            </a:r>
+          </a:p>
+        </p:txBody>
+      </p:sp>
+      <p:sp>
+        <p:nvSpPr>
+          <p:cNvPr id="11" name="Rounded Rectangle 10"/>
+          <p:cNvSpPr/>
+          <p:nvPr/>
+        </p:nvSpPr>
+        <p:spPr>
+          <a:xfrm>
+            <a:off x="4023360" y="2468880"/>
+            <a:ext cx="4114800" cy="640080"/>
+          </a:xfrm>
+          <a:prstGeom prst="roundRect">
+            <a:avLst/>
+          </a:prstGeom>
+          <a:solidFill>
+            <a:srgbClr val="1F338C"/>
+          </a:solidFill>
+          <a:ln>
+            <a:noFill/>
+          </a:ln>
+          <a:effectLst/>
+        </p:spPr>
+        <p:style>
+          <a:lnRef idx="1">
+            <a:schemeClr val="accent1"/>
+          </a:lnRef>
+          <a:fillRef idx="3">
+            <a:schemeClr val="accent1"/>
+          </a:fillRef>
+          <a:effectRef idx="2">
+            <a:schemeClr val="accent1"/>
+          </a:effectRef>
+          <a:fontRef idx="minor">
+            <a:schemeClr val="lt1"/>
+          </a:fontRef>
+        </p:style>
+        <p:txBody>
+          <a:bodyPr rtlCol="0" anchor="ctr"/>
+          <a:lstStyle/>
+          <a:p>
+            <a:pPr algn="ctr"/>
+          </a:p>
+        </p:txBody>
+      </p:sp>
+      <p:sp>
+        <p:nvSpPr>
+          <p:cNvPr id="12" name="TextBox 11"/>
+          <p:cNvSpPr txBox="1"/>
+          <p:nvPr/>
+        </p:nvSpPr>
+        <p:spPr>
+          <a:xfrm>
+            <a:off x="4023360" y="2468880"/>
+            <a:ext cx="4114800" cy="640080"/>
+          </a:xfrm>
+          <a:prstGeom prst="rect">
+            <a:avLst/>
+          </a:prstGeom>
+          <a:noFill/>
+        </p:spPr>
+        <p:txBody>
+          <a:bodyPr wrap="square" anchor="ctr" lIns="0" rIns="0" tIns="0" bIns="0">
+            <a:spAutoFit/>
+          </a:bodyPr>
+          <a:lstStyle/>
+          <a:p>
+            <a:pPr algn="ctr">
+              <a:spcAft>
+                <a:spcPts val="500"/>
+              </a:spcAft>
+            </a:pPr>
+            <a:r>
+              <a:rPr sz="1300" b="1">
+                <a:solidFill>
+                  <a:srgbClr val="FFFFFF"/>
+                </a:solidFill>
+                <a:latin typeface="Meiryo"/>
+                <a:ea typeface="Meiryo"/>
+              </a:rPr>
+              <a:t>当社 総合窓口(専用メーリングリスト)</a:t>
+            </a:r>
+          </a:p>
+        </p:txBody>
+      </p:sp>
       <p:graphicFrame>
         <p:nvGraphicFramePr>
-          <p:cNvPr id="8" name="Table 7"/>
+          <p:cNvPr id="13" name="Table 12"/>
           <p:cNvGraphicFramePr>
             <a:graphicFrameLocks noGrp="1"/>
           </p:cNvGraphicFramePr>
           <p:nvPr/>
         </p:nvGraphicFramePr>
         <p:xfrm>
-          <a:off x="640080" y="1417320"/>
-          <a:ext cx="10881359" cy="4389120"/>
+          <a:off x="640080" y="3429000"/>
+          <a:ext cx="10881360" cy="2514600"/>
         </p:xfrm>
         <a:graphic>
           <a:graphicData uri="http://schemas.openxmlformats.org/drawingml/2006/table">
@@ -10864,11 +11066,11 @@
                 <a:tableStyleId>{5C22544A-7EE6-4342-B048-85BDC9FD1C3A}</a:tableStyleId>
               </a:tblPr>
               <a:tblGrid>
-                <a:gridCol w="2538983"/>
-                <a:gridCol w="6528816"/>
-                <a:gridCol w="1813560"/>
+                <a:gridCol w="2020824"/>
+                <a:gridCol w="5440680"/>
+                <a:gridCol w="3419856"/>
               </a:tblGrid>
-              <a:tr h="548640">
+              <a:tr h="502920">
                 <a:tc>
                   <a:txBody>
                     <a:bodyPr/>
@@ -10882,7 +11084,7 @@
                           <a:latin typeface="Meiryo"/>
                           <a:ea typeface="Meiryo"/>
                         </a:rPr>
-                        <a:t>区分</a:t>
+                        <a:t>窓口</a:t>
                       </a:r>
                     </a:p>
                   </a:txBody>
@@ -10905,7 +11107,7 @@
                           <a:latin typeface="Meiryo"/>
                           <a:ea typeface="Meiryo"/>
                         </a:rPr>
-                        <a:t>お願いしたい内容</a:t>
+                        <a:t>用件</a:t>
                       </a:r>
                     </a:p>
                   </a:txBody>
@@ -10928,7 +11130,7 @@
                           <a:latin typeface="Meiryo"/>
                           <a:ea typeface="Meiryo"/>
                         </a:rPr>
-                        <a:t>テストでの実績</a:t>
+                        <a:t>回答日数</a:t>
                       </a:r>
                     </a:p>
                   </a:txBody>
@@ -10939,7 +11141,7 @@
                   </a:tcPr>
                 </a:tc>
               </a:tr>
-              <a:tr h="548640">
+              <a:tr h="502920">
                 <a:tc>
                   <a:txBody>
                     <a:bodyPr/>
@@ -10953,7 +11155,7 @@
                           <a:latin typeface="Meiryo"/>
                           <a:ea typeface="Meiryo"/>
                         </a:rPr>
-                        <a:t>取りまとめ窓口</a:t>
+                        <a:t>① イベント実施</a:t>
                       </a:r>
                     </a:p>
                   </a:txBody>
@@ -10976,7 +11178,7 @@
                           <a:latin typeface="Meiryo"/>
                           <a:ea typeface="Meiryo"/>
                         </a:rPr>
-                        <a:t>貴社内に全国の実施を取りまとめるご担当窓口(1部署)を設置。各会場への展開・情報共有・当社との一本化した連絡</a:t>
+                        <a:t>開催申請(エリア・会場・日程)のバッティング確認、実施確認書の確認</a:t>
                       </a:r>
                     </a:p>
                   </a:txBody>
@@ -10999,7 +11201,7 @@
                           <a:latin typeface="Meiryo"/>
                           <a:ea typeface="Meiryo"/>
                         </a:rPr>
-                        <a:t>新規</a:t>
+                        <a:t>5営業日。前月1日までに確定</a:t>
                       </a:r>
                     </a:p>
                   </a:txBody>
@@ -11010,7 +11212,7 @@
                   </a:tcPr>
                 </a:tc>
               </a:tr>
-              <a:tr h="548640">
+              <a:tr h="502920">
                 <a:tc>
                   <a:txBody>
                     <a:bodyPr/>
@@ -11024,7 +11226,7 @@
                           <a:latin typeface="Meiryo"/>
                           <a:ea typeface="Meiryo"/>
                         </a:rPr>
-                        <a:t>開催申請</a:t>
+                        <a:t>② 告知物</a:t>
                       </a:r>
                     </a:p>
                   </a:txBody>
@@ -11047,7 +11249,7 @@
                           <a:latin typeface="Meiryo"/>
                           <a:ea typeface="Meiryo"/>
                         </a:rPr>
-                        <a:t>専用フォームで申請→前月1日に可否確定→確認書の取り交わし(会場は1ヶ月前までに確定)</a:t>
+                        <a:t>KV・Web・チラシ等の監修</a:t>
                       </a:r>
                     </a:p>
                   </a:txBody>
@@ -11070,7 +11272,7 @@
                           <a:latin typeface="Meiryo"/>
                           <a:ea typeface="Meiryo"/>
                         </a:rPr>
-                        <a:t>新規</a:t>
+                        <a:t>KV 3営業日、Web流用 1〜2営業日、チラシ+色校 1〜2営業日</a:t>
                       </a:r>
                     </a:p>
                   </a:txBody>
@@ -11081,7 +11283,7 @@
                   </a:tcPr>
                 </a:tc>
               </a:tr>
-              <a:tr h="548640">
+              <a:tr h="502920">
                 <a:tc>
                   <a:txBody>
                     <a:bodyPr/>
@@ -11095,7 +11297,7 @@
                           <a:latin typeface="Meiryo"/>
                           <a:ea typeface="Meiryo"/>
                         </a:rPr>
-                        <a:t>運営計画・実施確認書</a:t>
+                        <a:t>③ 制作物</a:t>
                       </a:r>
                     </a:p>
                   </a:txBody>
@@ -11118,7 +11320,7 @@
                           <a:latin typeface="Meiryo"/>
                           <a:ea typeface="Meiryo"/>
                         </a:rPr>
-                        <a:t>会場ごとの運営計画・実施確認書を貴社にて作成(当社テンプレートをご提供)</a:t>
+                        <a:t>仮申請(制作可否)、ノベルティ・キット等のデザイン監修</a:t>
                       </a:r>
                     </a:p>
                   </a:txBody>
@@ -11141,7 +11343,7 @@
                           <a:latin typeface="Meiryo"/>
                           <a:ea typeface="Meiryo"/>
                         </a:rPr>
-                        <a:t>新規(テストは当社作成)</a:t>
+                        <a:t>仮申請 約5営業日、デザイン監修 5営業日</a:t>
                       </a:r>
                     </a:p>
                   </a:txBody>
@@ -11152,7 +11354,7 @@
                   </a:tcPr>
                 </a:tc>
               </a:tr>
-              <a:tr h="548640">
+              <a:tr h="502920">
                 <a:tc>
                   <a:txBody>
                     <a:bodyPr/>
@@ -11166,7 +11368,7 @@
                           <a:latin typeface="Meiryo"/>
                           <a:ea typeface="Meiryo"/>
                         </a:rPr>
-                        <a:t>制作物の仮申請</a:t>
+                        <a:t>④ 契約・精算</a:t>
                       </a:r>
                     </a:p>
                   </a:txBody>
@@ -11189,7 +11391,7 @@
                           <a:latin typeface="Meiryo"/>
                           <a:ea typeface="Meiryo"/>
                         </a:rPr>
-                        <a:t>イベントキット・ノベルティ等は品目ごとに仮申請(備品/配布用の区分を明記)。申請窓口はご担当1名に集約</a:t>
+                        <a:t>発注、請求、最低保証の精算、実績報告</a:t>
                       </a:r>
                     </a:p>
                   </a:txBody>
@@ -11212,226 +11414,13 @@
                           <a:latin typeface="Meiryo"/>
                           <a:ea typeface="Meiryo"/>
                         </a:rPr>
-                        <a:t>新規</a:t>
+                        <a:t>随時</a:t>
                       </a:r>
                     </a:p>
                   </a:txBody>
                   <a:tcPr anchor="ctr" marL="73152" marR="73152">
                     <a:solidFill>
                       <a:srgbClr val="F2F4F6"/>
-                    </a:solidFill>
-                  </a:tcPr>
-                </a:tc>
-              </a:tr>
-              <a:tr h="548640">
-                <a:tc>
-                  <a:txBody>
-                    <a:bodyPr/>
-                    <a:lstStyle/>
-                    <a:p>
-                      <a:r>
-                        <a:rPr sz="1100" b="1">
-                          <a:solidFill>
-                            <a:srgbClr val="1A1A1A"/>
-                          </a:solidFill>
-                          <a:latin typeface="Meiryo"/>
-                          <a:ea typeface="Meiryo"/>
-                        </a:rPr>
-                        <a:t>運営サイン・音響・設営</a:t>
-                      </a:r>
-                    </a:p>
-                  </a:txBody>
-                  <a:tcPr anchor="ctr" marL="73152" marR="73152">
-                    <a:solidFill>
-                      <a:srgbClr val="FFFFFF"/>
-                    </a:solidFill>
-                  </a:tcPr>
-                </a:tc>
-                <a:tc>
-                  <a:txBody>
-                    <a:bodyPr/>
-                    <a:lstStyle/>
-                    <a:p>
-                      <a:r>
-                        <a:rPr sz="1100" b="0">
-                          <a:solidFill>
-                            <a:srgbClr val="1A1A1A"/>
-                          </a:solidFill>
-                          <a:latin typeface="Meiryo"/>
-                          <a:ea typeface="Meiryo"/>
-                        </a:rPr>
-                        <a:t>会場内サイン、音響機材の手配とオペレーション、イベントキット設営・会場復帰</a:t>
-                      </a:r>
-                    </a:p>
-                  </a:txBody>
-                  <a:tcPr anchor="ctr" marL="73152" marR="73152">
-                    <a:solidFill>
-                      <a:srgbClr val="FFFFFF"/>
-                    </a:solidFill>
-                  </a:tcPr>
-                </a:tc>
-                <a:tc>
-                  <a:txBody>
-                    <a:bodyPr/>
-                    <a:lstStyle/>
-                    <a:p>
-                      <a:r>
-                        <a:rPr sz="1100" b="0">
-                          <a:solidFill>
-                            <a:srgbClr val="1A1A1A"/>
-                          </a:solidFill>
-                          <a:latin typeface="Meiryo"/>
-                          <a:ea typeface="Meiryo"/>
-                        </a:rPr>
-                        <a:t>✓ 対応済み</a:t>
-                      </a:r>
-                    </a:p>
-                  </a:txBody>
-                  <a:tcPr anchor="ctr" marL="73152" marR="73152">
-                    <a:solidFill>
-                      <a:srgbClr val="FFFFFF"/>
-                    </a:solidFill>
-                  </a:tcPr>
-                </a:tc>
-              </a:tr>
-              <a:tr h="548640">
-                <a:tc>
-                  <a:txBody>
-                    <a:bodyPr/>
-                    <a:lstStyle/>
-                    <a:p>
-                      <a:r>
-                        <a:rPr sz="1100" b="1">
-                          <a:solidFill>
-                            <a:srgbClr val="1A1A1A"/>
-                          </a:solidFill>
-                          <a:latin typeface="Meiryo"/>
-                          <a:ea typeface="Meiryo"/>
-                        </a:rPr>
-                        <a:t>整理券・告知素材・実施報告</a:t>
-                      </a:r>
-                    </a:p>
-                  </a:txBody>
-                  <a:tcPr anchor="ctr" marL="73152" marR="73152">
-                    <a:solidFill>
-                      <a:srgbClr val="F2F4F6"/>
-                    </a:solidFill>
-                  </a:tcPr>
-                </a:tc>
-                <a:tc>
-                  <a:txBody>
-                    <a:bodyPr/>
-                    <a:lstStyle/>
-                    <a:p>
-                      <a:r>
-                        <a:rPr sz="1100" b="0">
-                          <a:solidFill>
-                            <a:srgbClr val="1A1A1A"/>
-                          </a:solidFill>
-                          <a:latin typeface="Meiryo"/>
-                          <a:ea typeface="Meiryo"/>
-                        </a:rPr>
-                        <a:t>整理券・列形成備品、HP掲載用テキスト・画像(当社監修)、参加人数等の実施報告</a:t>
-                      </a:r>
-                    </a:p>
-                  </a:txBody>
-                  <a:tcPr anchor="ctr" marL="73152" marR="73152">
-                    <a:solidFill>
-                      <a:srgbClr val="F2F4F6"/>
-                    </a:solidFill>
-                  </a:tcPr>
-                </a:tc>
-                <a:tc>
-                  <a:txBody>
-                    <a:bodyPr/>
-                    <a:lstStyle/>
-                    <a:p>
-                      <a:r>
-                        <a:rPr sz="1100" b="0">
-                          <a:solidFill>
-                            <a:srgbClr val="1A1A1A"/>
-                          </a:solidFill>
-                          <a:latin typeface="Meiryo"/>
-                          <a:ea typeface="Meiryo"/>
-                        </a:rPr>
-                        <a:t>✓ 対応済み</a:t>
-                      </a:r>
-                    </a:p>
-                  </a:txBody>
-                  <a:tcPr anchor="ctr" marL="73152" marR="73152">
-                    <a:solidFill>
-                      <a:srgbClr val="F2F4F6"/>
-                    </a:solidFill>
-                  </a:tcPr>
-                </a:tc>
-              </a:tr>
-              <a:tr h="548640">
-                <a:tc>
-                  <a:txBody>
-                    <a:bodyPr/>
-                    <a:lstStyle/>
-                    <a:p>
-                      <a:r>
-                        <a:rPr sz="1100" b="1">
-                          <a:solidFill>
-                            <a:srgbClr val="1A1A1A"/>
-                          </a:solidFill>
-                          <a:latin typeface="Meiryo"/>
-                          <a:ea typeface="Meiryo"/>
-                        </a:rPr>
-                        <a:t>会場要件・その他</a:t>
-                      </a:r>
-                    </a:p>
-                  </a:txBody>
-                  <a:tcPr anchor="ctr" marL="73152" marR="73152">
-                    <a:solidFill>
-                      <a:srgbClr val="FFFFFF"/>
-                    </a:solidFill>
-                  </a:tcPr>
-                </a:tc>
-                <a:tc>
-                  <a:txBody>
-                    <a:bodyPr/>
-                    <a:lstStyle/>
-                    <a:p>
-                      <a:r>
-                        <a:rPr sz="1100" b="0">
-                          <a:solidFill>
-                            <a:srgbClr val="1A1A1A"/>
-                          </a:solidFill>
-                          <a:latin typeface="Meiryo"/>
-                          <a:ea typeface="Meiryo"/>
-                        </a:rPr>
-                        <a:t>施錠可能な非公開控室・関係車両用駐車場/JASRAC申請・イベント保険(主催者様にて)</a:t>
-                      </a:r>
-                    </a:p>
-                  </a:txBody>
-                  <a:tcPr anchor="ctr" marL="73152" marR="73152">
-                    <a:solidFill>
-                      <a:srgbClr val="FFFFFF"/>
-                    </a:solidFill>
-                  </a:tcPr>
-                </a:tc>
-                <a:tc>
-                  <a:txBody>
-                    <a:bodyPr/>
-                    <a:lstStyle/>
-                    <a:p>
-                      <a:r>
-                        <a:rPr sz="1100" b="0">
-                          <a:solidFill>
-                            <a:srgbClr val="1A1A1A"/>
-                          </a:solidFill>
-                          <a:latin typeface="Meiryo"/>
-                          <a:ea typeface="Meiryo"/>
-                        </a:rPr>
-                        <a:t>✓ 対応済み</a:t>
-                      </a:r>
-                    </a:p>
-                  </a:txBody>
-                  <a:tcPr anchor="ctr" marL="73152" marR="73152">
-                    <a:solidFill>
-                      <a:srgbClr val="FFFFFF"/>
                     </a:solidFill>
                   </a:tcPr>
                 </a:tc>
@@ -11440,6 +11429,46 @@
           </a:graphicData>
         </a:graphic>
       </p:graphicFrame>
+      <p:sp>
+        <p:nvSpPr>
+          <p:cNvPr id="14" name="TextBox 13"/>
+          <p:cNvSpPr txBox="1"/>
+          <p:nvPr/>
+        </p:nvSpPr>
+        <p:spPr>
+          <a:xfrm>
+            <a:off x="640080" y="6035040"/>
+            <a:ext cx="10881360" cy="365760"/>
+          </a:xfrm>
+          <a:prstGeom prst="rect">
+            <a:avLst/>
+          </a:prstGeom>
+          <a:noFill/>
+        </p:spPr>
+        <p:txBody>
+          <a:bodyPr wrap="square" anchor="t" lIns="0" rIns="0" tIns="0" bIns="0">
+            <a:spAutoFit/>
+          </a:bodyPr>
+          <a:lstStyle/>
+          <a:p>
+            <a:pPr algn="l">
+              <a:spcAft>
+                <a:spcPts val="500"/>
+              </a:spcAft>
+            </a:pPr>
+            <a:r>
+              <a:rPr sz="1050" b="0">
+                <a:solidFill>
+                  <a:srgbClr val="5A626B"/>
+                </a:solidFill>
+                <a:latin typeface="Meiryo"/>
+                <a:ea typeface="Meiryo"/>
+              </a:rPr>
+              <a:t>当社側のメーリングリストは契約後にご案内します。開催当日の連絡は、会場の当社担当と貴社運営ディレクターの間で直接行います</a:t>
+            </a:r>
+          </a:p>
+        </p:txBody>
+      </p:sp>
     </p:spTree>
   </p:cSld>
   <p:clrMapOvr>
@@ -11517,7 +11546,7 @@
                 <a:latin typeface="Meiryo"/>
                 <a:ea typeface="Meiryo"/>
               </a:rPr>
-              <a:t>2. 連絡体制と回答リードタイム</a:t>
+              <a:t>2. 貴社にお願いしたいこと</a:t>
             </a:r>
           </a:p>
         </p:txBody>
@@ -11525,46 +11554,6 @@
       <p:sp>
         <p:nvSpPr>
           <p:cNvPr id="4" name="TextBox 3"/>
-          <p:cNvSpPr txBox="1"/>
-          <p:nvPr/>
-        </p:nvSpPr>
-        <p:spPr>
-          <a:xfrm>
-            <a:off x="502920" y="896112"/>
-            <a:ext cx="11155680" cy="365760"/>
-          </a:xfrm>
-          <a:prstGeom prst="rect">
-            <a:avLst/>
-          </a:prstGeom>
-          <a:noFill/>
-        </p:spPr>
-        <p:txBody>
-          <a:bodyPr wrap="square" anchor="t" lIns="0" rIns="0" tIns="0" bIns="0">
-            <a:spAutoFit/>
-          </a:bodyPr>
-          <a:lstStyle/>
-          <a:p>
-            <a:pPr algn="l">
-              <a:spcAft>
-                <a:spcPts val="500"/>
-              </a:spcAft>
-            </a:pPr>
-            <a:r>
-              <a:rPr sz="1250" b="0">
-                <a:solidFill>
-                  <a:srgbClr val="5A626B"/>
-                </a:solidFill>
-                <a:latin typeface="Meiryo"/>
-                <a:ea typeface="Meiryo"/>
-              </a:rPr>
-              <a:t>貴社の取りまとめ窓口と当社の総合窓口を1対1でつなぎ、当社内で用件別に振り分けます</a:t>
-            </a:r>
-          </a:p>
-        </p:txBody>
-      </p:sp>
-      <p:sp>
-        <p:nvSpPr>
-          <p:cNvPr id="5" name="TextBox 4"/>
           <p:cNvSpPr txBox="1"/>
           <p:nvPr/>
         </p:nvSpPr>
@@ -11604,7 +11593,7 @@
       </p:sp>
       <p:sp>
         <p:nvSpPr>
-          <p:cNvPr id="6" name="TextBox 5"/>
+          <p:cNvPr id="5" name="TextBox 4"/>
           <p:cNvSpPr txBox="1"/>
           <p:nvPr/>
         </p:nvSpPr>
@@ -11644,7 +11633,7 @@
       </p:sp>
       <p:sp>
         <p:nvSpPr>
-          <p:cNvPr id="7" name="TextBox 6"/>
+          <p:cNvPr id="6" name="TextBox 5"/>
           <p:cNvSpPr txBox="1"/>
           <p:nvPr/>
         </p:nvSpPr>
@@ -11682,265 +11671,17 @@
           </a:p>
         </p:txBody>
       </p:sp>
-      <p:sp>
-        <p:nvSpPr>
-          <p:cNvPr id="8" name="Rounded Rectangle 7"/>
-          <p:cNvSpPr/>
-          <p:nvPr/>
-        </p:nvSpPr>
-        <p:spPr>
-          <a:xfrm>
-            <a:off x="4023360" y="1463040"/>
-            <a:ext cx="4114800" cy="640080"/>
-          </a:xfrm>
-          <a:prstGeom prst="roundRect">
-            <a:avLst/>
-          </a:prstGeom>
-          <a:solidFill>
-            <a:srgbClr val="232278"/>
-          </a:solidFill>
-          <a:ln>
-            <a:noFill/>
-          </a:ln>
-          <a:effectLst/>
-        </p:spPr>
-        <p:style>
-          <a:lnRef idx="1">
-            <a:schemeClr val="accent1"/>
-          </a:lnRef>
-          <a:fillRef idx="3">
-            <a:schemeClr val="accent1"/>
-          </a:fillRef>
-          <a:effectRef idx="2">
-            <a:schemeClr val="accent1"/>
-          </a:effectRef>
-          <a:fontRef idx="minor">
-            <a:schemeClr val="lt1"/>
-          </a:fontRef>
-        </p:style>
-        <p:txBody>
-          <a:bodyPr rtlCol="0" anchor="ctr"/>
-          <a:lstStyle/>
-          <a:p>
-            <a:pPr algn="ctr"/>
-          </a:p>
-        </p:txBody>
-      </p:sp>
-      <p:sp>
-        <p:nvSpPr>
-          <p:cNvPr id="9" name="TextBox 8"/>
-          <p:cNvSpPr txBox="1"/>
-          <p:nvPr/>
-        </p:nvSpPr>
-        <p:spPr>
-          <a:xfrm>
-            <a:off x="4023360" y="1463040"/>
-            <a:ext cx="4114800" cy="640080"/>
-          </a:xfrm>
-          <a:prstGeom prst="rect">
-            <a:avLst/>
-          </a:prstGeom>
-          <a:noFill/>
-        </p:spPr>
-        <p:txBody>
-          <a:bodyPr wrap="square" anchor="ctr" lIns="0" rIns="0" tIns="0" bIns="0">
-            <a:spAutoFit/>
-          </a:bodyPr>
-          <a:lstStyle/>
-          <a:p>
-            <a:pPr algn="ctr">
-              <a:spcAft>
-                <a:spcPts val="500"/>
-              </a:spcAft>
-            </a:pPr>
-            <a:r>
-              <a:rPr sz="1300" b="1">
-                <a:solidFill>
-                  <a:srgbClr val="FFFFFF"/>
-                </a:solidFill>
-                <a:latin typeface="Meiryo"/>
-                <a:ea typeface="Meiryo"/>
-              </a:rPr>
-              <a:t>ソフトバンク様 取りまとめ窓口(1部署)</a:t>
-            </a:r>
-          </a:p>
-        </p:txBody>
-      </p:sp>
-      <p:sp>
-        <p:nvSpPr>
-          <p:cNvPr id="10" name="TextBox 9"/>
-          <p:cNvSpPr txBox="1"/>
-          <p:nvPr/>
-        </p:nvSpPr>
-        <p:spPr>
-          <a:xfrm>
-            <a:off x="4023360" y="2148840"/>
-            <a:ext cx="4114800" cy="320040"/>
-          </a:xfrm>
-          <a:prstGeom prst="rect">
-            <a:avLst/>
-          </a:prstGeom>
-          <a:noFill/>
-        </p:spPr>
-        <p:txBody>
-          <a:bodyPr wrap="square" anchor="t" lIns="0" rIns="0" tIns="0" bIns="0">
-            <a:spAutoFit/>
-          </a:bodyPr>
-          <a:lstStyle/>
-          <a:p>
-            <a:pPr algn="ctr">
-              <a:spcAft>
-                <a:spcPts val="500"/>
-              </a:spcAft>
-            </a:pPr>
-            <a:r>
-              <a:rPr sz="1200" b="1">
-                <a:solidFill>
-                  <a:srgbClr val="5A626B"/>
-                </a:solidFill>
-                <a:latin typeface="Meiryo"/>
-                <a:ea typeface="Meiryo"/>
-              </a:rPr>
-              <a:t>↓ 連絡　↑ 回答</a:t>
-            </a:r>
-          </a:p>
-        </p:txBody>
-      </p:sp>
-      <p:sp>
-        <p:nvSpPr>
-          <p:cNvPr id="11" name="Rounded Rectangle 10"/>
-          <p:cNvSpPr/>
-          <p:nvPr/>
-        </p:nvSpPr>
-        <p:spPr>
-          <a:xfrm>
-            <a:off x="4023360" y="2468880"/>
-            <a:ext cx="4114800" cy="640080"/>
-          </a:xfrm>
-          <a:prstGeom prst="roundRect">
-            <a:avLst/>
-          </a:prstGeom>
-          <a:solidFill>
-            <a:srgbClr val="1F338C"/>
-          </a:solidFill>
-          <a:ln>
-            <a:noFill/>
-          </a:ln>
-          <a:effectLst/>
-        </p:spPr>
-        <p:style>
-          <a:lnRef idx="1">
-            <a:schemeClr val="accent1"/>
-          </a:lnRef>
-          <a:fillRef idx="3">
-            <a:schemeClr val="accent1"/>
-          </a:fillRef>
-          <a:effectRef idx="2">
-            <a:schemeClr val="accent1"/>
-          </a:effectRef>
-          <a:fontRef idx="minor">
-            <a:schemeClr val="lt1"/>
-          </a:fontRef>
-        </p:style>
-        <p:txBody>
-          <a:bodyPr rtlCol="0" anchor="ctr"/>
-          <a:lstStyle/>
-          <a:p>
-            <a:pPr algn="ctr"/>
-          </a:p>
-        </p:txBody>
-      </p:sp>
-      <p:sp>
-        <p:nvSpPr>
-          <p:cNvPr id="12" name="TextBox 11"/>
-          <p:cNvSpPr txBox="1"/>
-          <p:nvPr/>
-        </p:nvSpPr>
-        <p:spPr>
-          <a:xfrm>
-            <a:off x="4023360" y="2468880"/>
-            <a:ext cx="4114800" cy="640080"/>
-          </a:xfrm>
-          <a:prstGeom prst="rect">
-            <a:avLst/>
-          </a:prstGeom>
-          <a:noFill/>
-        </p:spPr>
-        <p:txBody>
-          <a:bodyPr wrap="square" anchor="ctr" lIns="0" rIns="0" tIns="0" bIns="0">
-            <a:spAutoFit/>
-          </a:bodyPr>
-          <a:lstStyle/>
-          <a:p>
-            <a:pPr algn="ctr">
-              <a:spcAft>
-                <a:spcPts val="500"/>
-              </a:spcAft>
-            </a:pPr>
-            <a:r>
-              <a:rPr sz="1300" b="1">
-                <a:solidFill>
-                  <a:srgbClr val="FFFFFF"/>
-                </a:solidFill>
-                <a:latin typeface="Meiryo"/>
-                <a:ea typeface="Meiryo"/>
-              </a:rPr>
-              <a:t>円谷プロ 総合窓口(専用メーリングリスト)</a:t>
-            </a:r>
-          </a:p>
-        </p:txBody>
-      </p:sp>
-      <p:sp>
-        <p:nvSpPr>
-          <p:cNvPr id="13" name="TextBox 12"/>
-          <p:cNvSpPr txBox="1"/>
-          <p:nvPr/>
-        </p:nvSpPr>
-        <p:spPr>
-          <a:xfrm>
-            <a:off x="640080" y="3154680"/>
-            <a:ext cx="10881360" cy="320040"/>
-          </a:xfrm>
-          <a:prstGeom prst="rect">
-            <a:avLst/>
-          </a:prstGeom>
-          <a:noFill/>
-        </p:spPr>
-        <p:txBody>
-          <a:bodyPr wrap="square" anchor="t" lIns="0" rIns="0" tIns="0" bIns="0">
-            <a:spAutoFit/>
-          </a:bodyPr>
-          <a:lstStyle/>
-          <a:p>
-            <a:pPr algn="ctr">
-              <a:spcAft>
-                <a:spcPts val="500"/>
-              </a:spcAft>
-            </a:pPr>
-            <a:r>
-              <a:rPr sz="1100" b="0">
-                <a:solidFill>
-                  <a:srgbClr val="5A626B"/>
-                </a:solidFill>
-                <a:latin typeface="Meiryo"/>
-                <a:ea typeface="Meiryo"/>
-              </a:rPr>
-              <a:t>当社内で用件別に振り分け</a:t>
-            </a:r>
-          </a:p>
-        </p:txBody>
-      </p:sp>
       <p:graphicFrame>
         <p:nvGraphicFramePr>
-          <p:cNvPr id="14" name="Table 13"/>
+          <p:cNvPr id="7" name="Table 6"/>
           <p:cNvGraphicFramePr>
             <a:graphicFrameLocks noGrp="1"/>
           </p:cNvGraphicFramePr>
           <p:nvPr/>
         </p:nvGraphicFramePr>
         <p:xfrm>
-          <a:off x="640080" y="3520440"/>
-          <a:ext cx="10881360" cy="2514600"/>
+          <a:off x="640080" y="1280160"/>
+          <a:ext cx="10881359" cy="4389120"/>
         </p:xfrm>
         <a:graphic>
           <a:graphicData uri="http://schemas.openxmlformats.org/drawingml/2006/table">
@@ -11949,11 +11690,11 @@
                 <a:tableStyleId>{5C22544A-7EE6-4342-B048-85BDC9FD1C3A}</a:tableStyleId>
               </a:tblPr>
               <a:tblGrid>
-                <a:gridCol w="2020824"/>
-                <a:gridCol w="5440680"/>
-                <a:gridCol w="3419856"/>
+                <a:gridCol w="2538983"/>
+                <a:gridCol w="6528816"/>
+                <a:gridCol w="1813560"/>
               </a:tblGrid>
-              <a:tr h="502920">
+              <a:tr h="548640">
                 <a:tc>
                   <a:txBody>
                     <a:bodyPr/>
@@ -11967,7 +11708,7 @@
                           <a:latin typeface="Meiryo"/>
                           <a:ea typeface="Meiryo"/>
                         </a:rPr>
-                        <a:t>窓口</a:t>
+                        <a:t>区分</a:t>
                       </a:r>
                     </a:p>
                   </a:txBody>
@@ -11990,7 +11731,7 @@
                           <a:latin typeface="Meiryo"/>
                           <a:ea typeface="Meiryo"/>
                         </a:rPr>
-                        <a:t>用件</a:t>
+                        <a:t>内容</a:t>
                       </a:r>
                     </a:p>
                   </a:txBody>
@@ -12013,7 +11754,7 @@
                           <a:latin typeface="Meiryo"/>
                           <a:ea typeface="Meiryo"/>
                         </a:rPr>
-                        <a:t>回答の目安</a:t>
+                        <a:t>テストでの対応</a:t>
                       </a:r>
                     </a:p>
                   </a:txBody>
@@ -12024,7 +11765,7 @@
                   </a:tcPr>
                 </a:tc>
               </a:tr>
-              <a:tr h="502920">
+              <a:tr h="548640">
                 <a:tc>
                   <a:txBody>
                     <a:bodyPr/>
@@ -12038,7 +11779,7 @@
                           <a:latin typeface="Meiryo"/>
                           <a:ea typeface="Meiryo"/>
                         </a:rPr>
-                        <a:t>① イベント実施</a:t>
+                        <a:t>取りまとめ窓口</a:t>
                       </a:r>
                     </a:p>
                   </a:txBody>
@@ -12061,7 +11802,7 @@
                           <a:latin typeface="Meiryo"/>
                           <a:ea typeface="Meiryo"/>
                         </a:rPr>
-                        <a:t>開催申請(エリア・会場・日程)のバッティング確認/実施確認書の確認</a:t>
+                        <a:t>全国の実施を取りまとめる部署を1つ決め、各会場への展開と当社との連絡を一本化</a:t>
                       </a:r>
                     </a:p>
                   </a:txBody>
@@ -12084,7 +11825,7 @@
                           <a:latin typeface="Meiryo"/>
                           <a:ea typeface="Meiryo"/>
                         </a:rPr>
-                        <a:t>5営業日(前月1日までに確定)</a:t>
+                        <a:t>新規</a:t>
                       </a:r>
                     </a:p>
                   </a:txBody>
@@ -12095,7 +11836,7 @@
                   </a:tcPr>
                 </a:tc>
               </a:tr>
-              <a:tr h="502920">
+              <a:tr h="548640">
                 <a:tc>
                   <a:txBody>
                     <a:bodyPr/>
@@ -12109,7 +11850,7 @@
                           <a:latin typeface="Meiryo"/>
                           <a:ea typeface="Meiryo"/>
                         </a:rPr>
-                        <a:t>② 告知物</a:t>
+                        <a:t>開催申請</a:t>
                       </a:r>
                     </a:p>
                   </a:txBody>
@@ -12132,7 +11873,7 @@
                           <a:latin typeface="Meiryo"/>
                           <a:ea typeface="Meiryo"/>
                         </a:rPr>
-                        <a:t>告知物(KV・Web・チラシ等)の監修</a:t>
+                        <a:t>専用フォームで申請、前月1日に可否確定、確認書を取り交わし。会場は1ヶ月前までに確定</a:t>
                       </a:r>
                     </a:p>
                   </a:txBody>
@@ -12155,7 +11896,7 @@
                           <a:latin typeface="Meiryo"/>
                           <a:ea typeface="Meiryo"/>
                         </a:rPr>
-                        <a:t>KV 3営業日/Web流用 1〜2営業日/チラシ+色校 1〜2営業日</a:t>
+                        <a:t>新規</a:t>
                       </a:r>
                     </a:p>
                   </a:txBody>
@@ -12166,7 +11907,7 @@
                   </a:tcPr>
                 </a:tc>
               </a:tr>
-              <a:tr h="502920">
+              <a:tr h="548640">
                 <a:tc>
                   <a:txBody>
                     <a:bodyPr/>
@@ -12180,7 +11921,7 @@
                           <a:latin typeface="Meiryo"/>
                           <a:ea typeface="Meiryo"/>
                         </a:rPr>
-                        <a:t>③ 制作物</a:t>
+                        <a:t>運営計画・実施確認書</a:t>
                       </a:r>
                     </a:p>
                   </a:txBody>
@@ -12203,7 +11944,7 @@
                           <a:latin typeface="Meiryo"/>
                           <a:ea typeface="Meiryo"/>
                         </a:rPr>
-                        <a:t>仮申請(制作可否)/ノベルティ・キット・その他制作物のデザイン監修</a:t>
+                        <a:t>会場ごとに貴社で作成。様式は当社のものをお渡しします</a:t>
                       </a:r>
                     </a:p>
                   </a:txBody>
@@ -12226,7 +11967,7 @@
                           <a:latin typeface="Meiryo"/>
                           <a:ea typeface="Meiryo"/>
                         </a:rPr>
-                        <a:t>仮申請 約5営業日/デザイン監修 5営業日</a:t>
+                        <a:t>新規(テストは当社作成)</a:t>
                       </a:r>
                     </a:p>
                   </a:txBody>
@@ -12237,7 +11978,7 @@
                   </a:tcPr>
                 </a:tc>
               </a:tr>
-              <a:tr h="502920">
+              <a:tr h="548640">
                 <a:tc>
                   <a:txBody>
                     <a:bodyPr/>
@@ -12251,7 +11992,7 @@
                           <a:latin typeface="Meiryo"/>
                           <a:ea typeface="Meiryo"/>
                         </a:rPr>
-                        <a:t>④ 契約・精算</a:t>
+                        <a:t>制作物の仮申請</a:t>
                       </a:r>
                     </a:p>
                   </a:txBody>
@@ -12274,7 +12015,7 @@
                           <a:latin typeface="Meiryo"/>
                           <a:ea typeface="Meiryo"/>
                         </a:rPr>
-                        <a:t>発注・請求・最低保証の精算・実績報告</a:t>
+                        <a:t>イベントキット・ノベルティ等を品目ごとに申請。備品か配布用かを明記。申請窓口は担当者1名</a:t>
                       </a:r>
                     </a:p>
                   </a:txBody>
@@ -12297,13 +12038,226 @@
                           <a:latin typeface="Meiryo"/>
                           <a:ea typeface="Meiryo"/>
                         </a:rPr>
-                        <a:t>随時</a:t>
+                        <a:t>新規</a:t>
                       </a:r>
                     </a:p>
                   </a:txBody>
                   <a:tcPr anchor="ctr" marL="73152" marR="73152">
                     <a:solidFill>
                       <a:srgbClr val="F2F4F6"/>
+                    </a:solidFill>
+                  </a:tcPr>
+                </a:tc>
+              </a:tr>
+              <a:tr h="548640">
+                <a:tc>
+                  <a:txBody>
+                    <a:bodyPr/>
+                    <a:lstStyle/>
+                    <a:p>
+                      <a:r>
+                        <a:rPr sz="1100" b="1">
+                          <a:solidFill>
+                            <a:srgbClr val="1A1A1A"/>
+                          </a:solidFill>
+                          <a:latin typeface="Meiryo"/>
+                          <a:ea typeface="Meiryo"/>
+                        </a:rPr>
+                        <a:t>運営サイン・音響・設営</a:t>
+                      </a:r>
+                    </a:p>
+                  </a:txBody>
+                  <a:tcPr anchor="ctr" marL="73152" marR="73152">
+                    <a:solidFill>
+                      <a:srgbClr val="FFFFFF"/>
+                    </a:solidFill>
+                  </a:tcPr>
+                </a:tc>
+                <a:tc>
+                  <a:txBody>
+                    <a:bodyPr/>
+                    <a:lstStyle/>
+                    <a:p>
+                      <a:r>
+                        <a:rPr sz="1100" b="0">
+                          <a:solidFill>
+                            <a:srgbClr val="1A1A1A"/>
+                          </a:solidFill>
+                          <a:latin typeface="Meiryo"/>
+                          <a:ea typeface="Meiryo"/>
+                        </a:rPr>
+                        <a:t>会場内サイン、音響の手配と操作、イベントキットの設営と撤去</a:t>
+                      </a:r>
+                    </a:p>
+                  </a:txBody>
+                  <a:tcPr anchor="ctr" marL="73152" marR="73152">
+                    <a:solidFill>
+                      <a:srgbClr val="FFFFFF"/>
+                    </a:solidFill>
+                  </a:tcPr>
+                </a:tc>
+                <a:tc>
+                  <a:txBody>
+                    <a:bodyPr/>
+                    <a:lstStyle/>
+                    <a:p>
+                      <a:r>
+                        <a:rPr sz="1100" b="0">
+                          <a:solidFill>
+                            <a:srgbClr val="1A1A1A"/>
+                          </a:solidFill>
+                          <a:latin typeface="Meiryo"/>
+                          <a:ea typeface="Meiryo"/>
+                        </a:rPr>
+                        <a:t>対応済</a:t>
+                      </a:r>
+                    </a:p>
+                  </a:txBody>
+                  <a:tcPr anchor="ctr" marL="73152" marR="73152">
+                    <a:solidFill>
+                      <a:srgbClr val="FFFFFF"/>
+                    </a:solidFill>
+                  </a:tcPr>
+                </a:tc>
+              </a:tr>
+              <a:tr h="548640">
+                <a:tc>
+                  <a:txBody>
+                    <a:bodyPr/>
+                    <a:lstStyle/>
+                    <a:p>
+                      <a:r>
+                        <a:rPr sz="1100" b="1">
+                          <a:solidFill>
+                            <a:srgbClr val="1A1A1A"/>
+                          </a:solidFill>
+                          <a:latin typeface="Meiryo"/>
+                          <a:ea typeface="Meiryo"/>
+                        </a:rPr>
+                        <a:t>整理券・告知素材・実施報告</a:t>
+                      </a:r>
+                    </a:p>
+                  </a:txBody>
+                  <a:tcPr anchor="ctr" marL="73152" marR="73152">
+                    <a:solidFill>
+                      <a:srgbClr val="F2F4F6"/>
+                    </a:solidFill>
+                  </a:tcPr>
+                </a:tc>
+                <a:tc>
+                  <a:txBody>
+                    <a:bodyPr/>
+                    <a:lstStyle/>
+                    <a:p>
+                      <a:r>
+                        <a:rPr sz="1100" b="0">
+                          <a:solidFill>
+                            <a:srgbClr val="1A1A1A"/>
+                          </a:solidFill>
+                          <a:latin typeface="Meiryo"/>
+                          <a:ea typeface="Meiryo"/>
+                        </a:rPr>
+                        <a:t>整理券と列づくりの備品、HP掲載用の文章と画像(当社監修)、参加人数の報告</a:t>
+                      </a:r>
+                    </a:p>
+                  </a:txBody>
+                  <a:tcPr anchor="ctr" marL="73152" marR="73152">
+                    <a:solidFill>
+                      <a:srgbClr val="F2F4F6"/>
+                    </a:solidFill>
+                  </a:tcPr>
+                </a:tc>
+                <a:tc>
+                  <a:txBody>
+                    <a:bodyPr/>
+                    <a:lstStyle/>
+                    <a:p>
+                      <a:r>
+                        <a:rPr sz="1100" b="0">
+                          <a:solidFill>
+                            <a:srgbClr val="1A1A1A"/>
+                          </a:solidFill>
+                          <a:latin typeface="Meiryo"/>
+                          <a:ea typeface="Meiryo"/>
+                        </a:rPr>
+                        <a:t>対応済</a:t>
+                      </a:r>
+                    </a:p>
+                  </a:txBody>
+                  <a:tcPr anchor="ctr" marL="73152" marR="73152">
+                    <a:solidFill>
+                      <a:srgbClr val="F2F4F6"/>
+                    </a:solidFill>
+                  </a:tcPr>
+                </a:tc>
+              </a:tr>
+              <a:tr h="548640">
+                <a:tc>
+                  <a:txBody>
+                    <a:bodyPr/>
+                    <a:lstStyle/>
+                    <a:p>
+                      <a:r>
+                        <a:rPr sz="1100" b="1">
+                          <a:solidFill>
+                            <a:srgbClr val="1A1A1A"/>
+                          </a:solidFill>
+                          <a:latin typeface="Meiryo"/>
+                          <a:ea typeface="Meiryo"/>
+                        </a:rPr>
+                        <a:t>会場要件ほか</a:t>
+                      </a:r>
+                    </a:p>
+                  </a:txBody>
+                  <a:tcPr anchor="ctr" marL="73152" marR="73152">
+                    <a:solidFill>
+                      <a:srgbClr val="FFFFFF"/>
+                    </a:solidFill>
+                  </a:tcPr>
+                </a:tc>
+                <a:tc>
+                  <a:txBody>
+                    <a:bodyPr/>
+                    <a:lstStyle/>
+                    <a:p>
+                      <a:r>
+                        <a:rPr sz="1100" b="0">
+                          <a:solidFill>
+                            <a:srgbClr val="1A1A1A"/>
+                          </a:solidFill>
+                          <a:latin typeface="Meiryo"/>
+                          <a:ea typeface="Meiryo"/>
+                        </a:rPr>
+                        <a:t>施錠できる非公開の控室、関係車両の駐車場。JASRAC申請とイベント保険は主催者様で</a:t>
+                      </a:r>
+                    </a:p>
+                  </a:txBody>
+                  <a:tcPr anchor="ctr" marL="73152" marR="73152">
+                    <a:solidFill>
+                      <a:srgbClr val="FFFFFF"/>
+                    </a:solidFill>
+                  </a:tcPr>
+                </a:tc>
+                <a:tc>
+                  <a:txBody>
+                    <a:bodyPr/>
+                    <a:lstStyle/>
+                    <a:p>
+                      <a:r>
+                        <a:rPr sz="1100" b="0">
+                          <a:solidFill>
+                            <a:srgbClr val="1A1A1A"/>
+                          </a:solidFill>
+                          <a:latin typeface="Meiryo"/>
+                          <a:ea typeface="Meiryo"/>
+                        </a:rPr>
+                        <a:t>対応済</a:t>
+                      </a:r>
+                    </a:p>
+                  </a:txBody>
+                  <a:tcPr anchor="ctr" marL="73152" marR="73152">
+                    <a:solidFill>
+                      <a:srgbClr val="FFFFFF"/>
                     </a:solidFill>
                   </a:tcPr>
                 </a:tc>
@@ -12312,46 +12266,6 @@
           </a:graphicData>
         </a:graphic>
       </p:graphicFrame>
-      <p:sp>
-        <p:nvSpPr>
-          <p:cNvPr id="15" name="TextBox 14"/>
-          <p:cNvSpPr txBox="1"/>
-          <p:nvPr/>
-        </p:nvSpPr>
-        <p:spPr>
-          <a:xfrm>
-            <a:off x="640080" y="6126480"/>
-            <a:ext cx="10881360" cy="365760"/>
-          </a:xfrm>
-          <a:prstGeom prst="rect">
-            <a:avLst/>
-          </a:prstGeom>
-          <a:noFill/>
-        </p:spPr>
-        <p:txBody>
-          <a:bodyPr wrap="square" anchor="t" lIns="0" rIns="0" tIns="0" bIns="0">
-            <a:spAutoFit/>
-          </a:bodyPr>
-          <a:lstStyle/>
-          <a:p>
-            <a:pPr algn="l">
-              <a:spcAft>
-                <a:spcPts val="500"/>
-              </a:spcAft>
-            </a:pPr>
-            <a:r>
-              <a:rPr sz="1050" b="0">
-                <a:solidFill>
-                  <a:srgbClr val="5A626B"/>
-                </a:solidFill>
-                <a:latin typeface="Meiryo"/>
-                <a:ea typeface="Meiryo"/>
-              </a:rPr>
-              <a:t>※ 当社側メーリングリストは契約締結後にご案内します。開催当日の緊急連絡は会場ごとの当社担当(チーフスタッフ)と貴社運営ディレクター間で直接行います。</a:t>
-            </a:r>
-          </a:p>
-        </p:txBody>
-      </p:sp>
     </p:spTree>
   </p:cSld>
   <p:clrMapOvr>
@@ -12429,7 +12343,7 @@
                 <a:latin typeface="Meiryo"/>
                 <a:ea typeface="Meiryo"/>
               </a:rPr>
-              <a:t>3. ご提供価格(ソフトバンク様特別プラン)</a:t>
+              <a:t>3. ご提供価格(ソフトバンク様特別価格)</a:t>
             </a:r>
           </a:p>
         </p:txBody>
@@ -12469,7 +12383,7 @@
                 <a:latin typeface="Meiryo"/>
                 <a:ea typeface="Meiryo"/>
               </a:rPr>
-              <a:t>通常販売価格から大幅な特別価格でご提供します。本特別価格は年間契約+最低開催数保証のご締結を前提とした本件限りの条件です</a:t>
+              <a:t>年間契約と最低開催数保証を前提とした、本件限りの価格です</a:t>
             </a:r>
           </a:p>
         </p:txBody>
@@ -12677,7 +12591,7 @@
                           <a:latin typeface="Meiryo"/>
                           <a:ea typeface="Meiryo"/>
                         </a:rPr>
-                        <a:t>SB様特別価格</a:t>
+                        <a:t>特別価格</a:t>
                       </a:r>
                     </a:p>
                   </a:txBody>
@@ -12702,7 +12616,7 @@
                           <a:latin typeface="Meiryo"/>
                           <a:ea typeface="Meiryo"/>
                         </a:rPr>
-                        <a:t>1日稼働(1日最大5回公演)</a:t>
+                        <a:t>1日(1日最大5回公演)</a:t>
                       </a:r>
                     </a:p>
                   </a:txBody>
@@ -12725,7 +12639,7 @@
                           <a:latin typeface="Meiryo"/>
                           <a:ea typeface="Meiryo"/>
                         </a:rPr>
-                        <a:t>225,000円/日</a:t>
+                        <a:t>225,000円</a:t>
                       </a:r>
                     </a:p>
                   </a:txBody>
@@ -12748,7 +12662,7 @@
                           <a:latin typeface="Meiryo"/>
                           <a:ea typeface="Meiryo"/>
                         </a:rPr>
-                        <a:t>100,000円/日(▲55.6%)</a:t>
+                        <a:t>100,000円(▲55.6%)</a:t>
                       </a:r>
                     </a:p>
                   </a:txBody>
@@ -12773,7 +12687,7 @@
                           <a:latin typeface="Meiryo"/>
                           <a:ea typeface="Meiryo"/>
                         </a:rPr>
-                        <a:t>土日2日間(1開催)</a:t>
+                        <a:t>土日2日間</a:t>
                       </a:r>
                     </a:p>
                   </a:txBody>
@@ -12844,7 +12758,7 @@
                           <a:latin typeface="Meiryo"/>
                           <a:ea typeface="Meiryo"/>
                         </a:rPr>
-                        <a:t>3連休通し(3日間)</a:t>
+                        <a:t>3連休</a:t>
                       </a:r>
                     </a:p>
                   </a:txBody>
@@ -12940,7 +12854,7 @@
                 <a:latin typeface="Meiryo"/>
                 <a:ea typeface="Meiryo"/>
               </a:rPr>
-              <a:t>特別価格の内訳(1日):キャラクター使用料 40,000円/担当 35,000円/スーツアクター 25,000円</a:t>
+              <a:t>特別価格の内訳(1日):キャラクター使用料 40,000円、担当 35,000円、スーツアクター 25,000円</a:t>
             </a:r>
           </a:p>
           <a:p>
@@ -12957,7 +12871,7 @@
                 <a:latin typeface="Meiryo"/>
                 <a:ea typeface="Meiryo"/>
               </a:rPr>
-              <a:t>通常販売価格は同一スコープ(キャラクター使用料+担当+アクター・5回公演対応)での当社標準価格です</a:t>
+              <a:t>通常販売価格は同じ内容(キャラクター使用料+担当+アクター、5回公演対応)での当社標準価格</a:t>
             </a:r>
           </a:p>
         </p:txBody>
@@ -12972,7 +12886,7 @@
         </p:nvGraphicFramePr>
         <p:xfrm>
           <a:off x="7223760" y="1417320"/>
-          <a:ext cx="4297679" cy="3291839"/>
+          <a:ext cx="4297679" cy="3520440"/>
         </p:xfrm>
         <a:graphic>
           <a:graphicData uri="http://schemas.openxmlformats.org/drawingml/2006/table">
@@ -12984,7 +12898,7 @@
                 <a:gridCol w="2079522"/>
                 <a:gridCol w="2218157"/>
               </a:tblGrid>
-              <a:tr h="548639">
+              <a:tr h="502920">
                 <a:tc>
                   <a:txBody>
                     <a:bodyPr/>
@@ -12998,7 +12912,7 @@
                           <a:latin typeface="Meiryo"/>
                           <a:ea typeface="Meiryo"/>
                         </a:rPr>
-                        <a:t>その他の費目</a:t>
+                        <a:t>その他</a:t>
                       </a:r>
                     </a:p>
                   </a:txBody>
@@ -13032,7 +12946,7 @@
                   </a:tcPr>
                 </a:tc>
               </a:tr>
-              <a:tr h="548639">
+              <a:tr h="502920">
                 <a:tc>
                   <a:txBody>
                     <a:bodyPr/>
@@ -13080,7 +12994,7 @@
                   </a:tcPr>
                 </a:tc>
               </a:tr>
-              <a:tr h="548639">
+              <a:tr h="502920">
                 <a:tc>
                   <a:txBody>
                     <a:bodyPr/>
@@ -13128,7 +13042,7 @@
                   </a:tcPr>
                 </a:tc>
               </a:tr>
-              <a:tr h="548639">
+              <a:tr h="502920">
                 <a:tc>
                   <a:txBody>
                     <a:bodyPr/>
@@ -13142,12 +13056,108 @@
                           <a:latin typeface="Meiryo"/>
                           <a:ea typeface="Meiryo"/>
                         </a:rPr>
+                        <a:t>MCオプション</a:t>
+                      </a:r>
+                    </a:p>
+                  </a:txBody>
+                  <a:tcPr anchor="ctr" marL="73152" marR="73152">
+                    <a:solidFill>
+                      <a:srgbClr val="FFFFFF"/>
+                    </a:solidFill>
+                  </a:tcPr>
+                </a:tc>
+                <a:tc>
+                  <a:txBody>
+                    <a:bodyPr/>
+                    <a:lstStyle/>
+                    <a:p>
+                      <a:r>
+                        <a:rPr sz="1100" b="0">
+                          <a:solidFill>
+                            <a:srgbClr val="1A1A1A"/>
+                          </a:solidFill>
+                          <a:latin typeface="Meiryo"/>
+                          <a:ea typeface="Meiryo"/>
+                        </a:rPr>
+                        <a:t>+30,000円/日</a:t>
+                      </a:r>
+                    </a:p>
+                  </a:txBody>
+                  <a:tcPr anchor="ctr" marL="73152" marR="73152">
+                    <a:solidFill>
+                      <a:srgbClr val="FFFFFF"/>
+                    </a:solidFill>
+                  </a:tcPr>
+                </a:tc>
+              </a:tr>
+              <a:tr h="502920">
+                <a:tc>
+                  <a:txBody>
+                    <a:bodyPr/>
+                    <a:lstStyle/>
+                    <a:p>
+                      <a:r>
+                        <a:rPr sz="1100" b="1">
+                          <a:solidFill>
+                            <a:srgbClr val="1A1A1A"/>
+                          </a:solidFill>
+                          <a:latin typeface="Meiryo"/>
+                          <a:ea typeface="Meiryo"/>
+                        </a:rPr>
                         <a:t>フル運営オプション</a:t>
                       </a:r>
                     </a:p>
                   </a:txBody>
                   <a:tcPr anchor="ctr" marL="73152" marR="73152">
                     <a:solidFill>
+                      <a:srgbClr val="F2F4F6"/>
+                    </a:solidFill>
+                  </a:tcPr>
+                </a:tc>
+                <a:tc>
+                  <a:txBody>
+                    <a:bodyPr/>
+                    <a:lstStyle/>
+                    <a:p>
+                      <a:r>
+                        <a:rPr sz="1100" b="0">
+                          <a:solidFill>
+                            <a:srgbClr val="1A1A1A"/>
+                          </a:solidFill>
+                          <a:latin typeface="Meiryo"/>
+                          <a:ea typeface="Meiryo"/>
+                        </a:rPr>
+                        <a:t>+220,000円/日</a:t>
+                      </a:r>
+                    </a:p>
+                  </a:txBody>
+                  <a:tcPr anchor="ctr" marL="73152" marR="73152">
+                    <a:solidFill>
+                      <a:srgbClr val="F2F4F6"/>
+                    </a:solidFill>
+                  </a:tcPr>
+                </a:tc>
+              </a:tr>
+              <a:tr h="502920">
+                <a:tc>
+                  <a:txBody>
+                    <a:bodyPr/>
+                    <a:lstStyle/>
+                    <a:p>
+                      <a:r>
+                        <a:rPr sz="1100" b="1">
+                          <a:solidFill>
+                            <a:srgbClr val="1A1A1A"/>
+                          </a:solidFill>
+                          <a:latin typeface="Meiryo"/>
+                          <a:ea typeface="Meiryo"/>
+                        </a:rPr>
+                        <a:t>現場諸経費</a:t>
+                      </a:r>
+                    </a:p>
+                  </a:txBody>
+                  <a:tcPr anchor="ctr" marL="73152" marR="73152">
+                    <a:solidFill>
                       <a:srgbClr val="FFFFFF"/>
                     </a:solidFill>
                   </a:tcPr>
@@ -13165,7 +13175,7 @@
                           <a:latin typeface="Meiryo"/>
                           <a:ea typeface="Meiryo"/>
                         </a:rPr>
-                        <a:t>+220,000円/日</a:t>
+                        <a:t>20,000円/日</a:t>
                       </a:r>
                     </a:p>
                   </a:txBody>
@@ -13176,7 +13186,7 @@
                   </a:tcPr>
                 </a:tc>
               </a:tr>
-              <a:tr h="548639">
+              <a:tr h="502920">
                 <a:tc>
                   <a:txBody>
                     <a:bodyPr/>
@@ -13190,7 +13200,7 @@
                           <a:latin typeface="Meiryo"/>
                           <a:ea typeface="Meiryo"/>
                         </a:rPr>
-                        <a:t>現場諸経費</a:t>
+                        <a:t>実費</a:t>
                       </a:r>
                     </a:p>
                   </a:txBody>
@@ -13213,61 +13223,13 @@
                           <a:latin typeface="Meiryo"/>
                           <a:ea typeface="Meiryo"/>
                         </a:rPr>
-                        <a:t>20,000円/日</a:t>
+                        <a:t>交通運搬・宿泊・スーツ送料(基準料金表)</a:t>
                       </a:r>
                     </a:p>
                   </a:txBody>
                   <a:tcPr anchor="ctr" marL="73152" marR="73152">
                     <a:solidFill>
                       <a:srgbClr val="F2F4F6"/>
-                    </a:solidFill>
-                  </a:tcPr>
-                </a:tc>
-              </a:tr>
-              <a:tr h="548644">
-                <a:tc>
-                  <a:txBody>
-                    <a:bodyPr/>
-                    <a:lstStyle/>
-                    <a:p>
-                      <a:r>
-                        <a:rPr sz="1100" b="1">
-                          <a:solidFill>
-                            <a:srgbClr val="1A1A1A"/>
-                          </a:solidFill>
-                          <a:latin typeface="Meiryo"/>
-                          <a:ea typeface="Meiryo"/>
-                        </a:rPr>
-                        <a:t>実費</a:t>
-                      </a:r>
-                    </a:p>
-                  </a:txBody>
-                  <a:tcPr anchor="ctr" marL="73152" marR="73152">
-                    <a:solidFill>
-                      <a:srgbClr val="FFFFFF"/>
-                    </a:solidFill>
-                  </a:tcPr>
-                </a:tc>
-                <a:tc>
-                  <a:txBody>
-                    <a:bodyPr/>
-                    <a:lstStyle/>
-                    <a:p>
-                      <a:r>
-                        <a:rPr sz="1100" b="0">
-                          <a:solidFill>
-                            <a:srgbClr val="1A1A1A"/>
-                          </a:solidFill>
-                          <a:latin typeface="Meiryo"/>
-                          <a:ea typeface="Meiryo"/>
-                        </a:rPr>
-                        <a:t>交通運搬・宿泊・スーツ送料(基準料金表)</a:t>
-                      </a:r>
-                    </a:p>
-                  </a:txBody>
-                  <a:tcPr anchor="ctr" marL="73152" marR="73152">
-                    <a:solidFill>
-                      <a:srgbClr val="FFFFFF"/>
                     </a:solidFill>
                   </a:tcPr>
                 </a:tc>
@@ -13374,7 +13336,7 @@
                 <a:latin typeface="Meiryo"/>
                 <a:ea typeface="Meiryo"/>
               </a:rPr>
-              <a:t>店頭イベント・イベントキット・店頭訴求ツール・LP/Web・SNSでのIP利用、作成物の監修対応、8ヒーローの選択・切替、キャラクター素材・運営マニュアルの提供</a:t>
+              <a:t>店頭イベント・イベントキット・店頭訴求ツール・LP/Web・SNSでのIP利用、作成物の監修、8ヒーローの選択と切替、キャラクター素材と運営マニュアルの提供</a:t>
             </a:r>
           </a:p>
         </p:txBody>
@@ -13456,7 +13418,7 @@
                 <a:latin typeface="Meiryo"/>
                 <a:ea typeface="Meiryo"/>
               </a:rPr>
-              <a:t>3. 実施の成立条件</a:t>
+              <a:t>3. 実施の条件</a:t>
             </a:r>
           </a:p>
         </p:txBody>
@@ -13496,7 +13458,7 @@
                 <a:latin typeface="Meiryo"/>
                 <a:ea typeface="Meiryo"/>
               </a:rPr>
-              <a:t>特別価格の前提となる条件です。契約協議にて詳細を調整させてください</a:t>
+              <a:t>特別価格の前提となる条件です。詳細は契約協議で調整します</a:t>
             </a:r>
           </a:p>
         </p:txBody>
@@ -13752,7 +13714,7 @@
                           <a:latin typeface="Meiryo"/>
                           <a:ea typeface="Meiryo"/>
                         </a:rPr>
-                        <a:t>契約期間・締結期限</a:t>
+                        <a:t>契約期間・締結</a:t>
                       </a:r>
                     </a:p>
                   </a:txBody>
@@ -13775,7 +13737,7 @@
                           <a:latin typeface="Meiryo"/>
                           <a:ea typeface="Meiryo"/>
                         </a:rPr>
-                        <a:t>2027年1月〜2029年3月(2年3ヶ月)。2026年11月末までのご締結(1月開始に必要な体制準備のため)</a:t>
+                        <a:t>2027年1月〜2029年3月(2年3ヶ月)。2026年11月末までに締結(1月開始に必要な体制準備のため)</a:t>
                       </a:r>
                     </a:p>
                   </a:txBody>
@@ -13846,7 +13808,7 @@
                           <a:latin typeface="Meiryo"/>
                           <a:ea typeface="Meiryo"/>
                         </a:rPr>
-                        <a:t>基準15ライン分の開催数を最低保証。未実施の場合も当該数量分を申し受け、各年度末に精算</a:t>
+                        <a:t>基準15ライン分の開催数を保証。未実施の場合も当該数量分を申し受け、各年度末に精算</a:t>
                       </a:r>
                     </a:p>
                   </a:txBody>
@@ -13917,7 +13879,7 @@
                           <a:latin typeface="Meiryo"/>
                           <a:ea typeface="Meiryo"/>
                         </a:rPr>
-                        <a:t>会場・日程は開催1ヶ月前までに確定。確定後のキャンセル料:1ヶ月前〜14日前30%/13日前〜7日前50%/6日前〜当日100%</a:t>
+                        <a:t>会場・日程は開催1ヶ月前までに確定。確定後のキャンセル料は1ヶ月前〜14日前30%、13日前〜7日前50%、6日前〜当日100%</a:t>
                       </a:r>
                     </a:p>
                   </a:txBody>
@@ -13988,7 +13950,7 @@
                           <a:latin typeface="Meiryo"/>
                           <a:ea typeface="Meiryo"/>
                         </a:rPr>
-                        <a:t>基準15ライン。余裕月(1・4・6・11・12月)は最大20ラインまで増枠可(次頁)</a:t>
+                        <a:t>基準15ライン。余裕のある月(1・4・6・11・12月)は最大20ラインまで(次頁)</a:t>
                       </a:r>
                     </a:p>
                   </a:txBody>
@@ -14059,7 +14021,7 @@
                           <a:latin typeface="Meiryo"/>
                           <a:ea typeface="Meiryo"/>
                         </a:rPr>
-                        <a:t>貴社EDI発注。IP使用料は年度前払い、保証分は四半期前払い(ご相談)。最低保証契約のため期間一括の発注形態をご相談</a:t>
+                        <a:t>貴社EDIで発注。IP使用料は年度前払い、保証分は四半期前払い(ご相談)。最低保証契約のため、期間一括の発注形態をご相談したい</a:t>
                       </a:r>
                     </a:p>
                   </a:txBody>
@@ -14130,7 +14092,7 @@
                           <a:latin typeface="Meiryo"/>
                           <a:ea typeface="Meiryo"/>
                         </a:rPr>
-                        <a:t>北関東エリアは2027年1〜3月は実施不可(4月以降可)。ウルトラセブンは対象外。出演は8ヒーロー</a:t>
+                        <a:t>北関東エリアは2027年1〜3月は実施不可(4月以降は可)。ウルトラセブンは対象外。出演は8ヒーロー</a:t>
                       </a:r>
                     </a:p>
                   </a:txBody>
@@ -14201,7 +14163,7 @@
                           <a:latin typeface="Meiryo"/>
                           <a:ea typeface="Meiryo"/>
                         </a:rPr>
-                        <a:t>契約期間中、当社は国内の他の携帯キャリア(3社)との店頭イベント契約を行いません</a:t>
+                        <a:t>契約期間中、当社は国内の他の携帯キャリア(3社)と店頭イベントの契約を行わない</a:t>
                       </a:r>
                     </a:p>
                   </a:txBody>
@@ -14251,7 +14213,7 @@
                 <a:latin typeface="Meiryo"/>
                 <a:ea typeface="Meiryo"/>
               </a:rPr>
-              <a:t>※ キャンセル料は7月ご提案時のスポット向け規定から、本契約(最低保証・1ヶ月前確定フロー)向けの規定に更新しています</a:t>
+              <a:t>キャンセル料は7月ご提案時のスポット向け規定から、本契約向けの規定に変更しています</a:t>
             </a:r>
           </a:p>
         </p:txBody>

--- a/docs/proposals/softbank-ultraman-caravan/SB様提示用_1022ミーティング資料.pptx
+++ b/docs/proposals/softbank-ultraman-caravan/SB様提示用_1022ミーティング資料.pptx
@@ -17,6 +17,7 @@
     <p:sldId id="265" r:id="rId16"/>
     <p:sldId id="266" r:id="rId17"/>
     <p:sldId id="267" r:id="rId18"/>
+    <p:sldId id="268" r:id="rId19"/>
   </p:sldIdLst>
   <p:sldSz cx="12191695" cy="6858000" type="screen4x3"/>
   <p:notesSz cx="6858000" cy="9144000"/>
@@ -5381,7 +5382,7 @@
                 <a:latin typeface="Meiryo"/>
                 <a:ea typeface="Meiryo"/>
               </a:rPr>
-              <a:t>4. 制作物と権利の進め方</a:t>
+              <a:t>3. エリア別のライン配分</a:t>
             </a:r>
           </a:p>
         </p:txBody>
@@ -5421,7 +5422,7 @@
                 <a:latin typeface="Meiryo"/>
                 <a:ea typeface="Meiryo"/>
               </a:rPr>
-              <a:t>キャンペーンビジュアルを決めてから、品目ごとに仮申請で制作物を確定していきます</a:t>
+              <a:t>基準15ラインのエリア配分と、余裕のある月の最大ライン数。月別の詳細は別紙</a:t>
             </a:r>
           </a:p>
         </p:txBody>
@@ -5546,52 +5547,1296 @@
           </a:p>
         </p:txBody>
       </p:sp>
-      <p:sp>
-        <p:nvSpPr>
-          <p:cNvPr id="8" name="Rounded Rectangle 7"/>
-          <p:cNvSpPr/>
+      <p:graphicFrame>
+        <p:nvGraphicFramePr>
+          <p:cNvPr id="8" name="Table 7"/>
+          <p:cNvGraphicFramePr>
+            <a:graphicFrameLocks noGrp="1"/>
+          </p:cNvGraphicFramePr>
           <p:nvPr/>
-        </p:nvSpPr>
-        <p:spPr>
-          <a:xfrm>
-            <a:off x="640080" y="1463040"/>
-            <a:ext cx="5303520" cy="2286000"/>
-          </a:xfrm>
-          <a:prstGeom prst="roundRect">
-            <a:avLst>
-              <a:gd name="adj" fmla="val 6000"/>
-            </a:avLst>
-          </a:prstGeom>
-          <a:solidFill>
-            <a:srgbClr val="F2F4F6"/>
-          </a:solidFill>
-          <a:ln>
-            <a:noFill/>
-          </a:ln>
-          <a:effectLst/>
-        </p:spPr>
-        <p:style>
-          <a:lnRef idx="1">
-            <a:schemeClr val="accent1"/>
-          </a:lnRef>
-          <a:fillRef idx="3">
-            <a:schemeClr val="accent1"/>
-          </a:fillRef>
-          <a:effectRef idx="2">
-            <a:schemeClr val="accent1"/>
-          </a:effectRef>
-          <a:fontRef idx="minor">
-            <a:schemeClr val="lt1"/>
-          </a:fontRef>
-        </p:style>
-        <p:txBody>
-          <a:bodyPr rtlCol="0" anchor="ctr"/>
-          <a:lstStyle/>
-          <a:p>
-            <a:pPr algn="ctr"/>
-          </a:p>
-        </p:txBody>
-      </p:sp>
+        </p:nvGraphicFramePr>
+        <p:xfrm>
+          <a:off x="640080" y="1371600"/>
+          <a:ext cx="10881357" cy="4279392"/>
+        </p:xfrm>
+        <a:graphic>
+          <a:graphicData uri="http://schemas.openxmlformats.org/drawingml/2006/table">
+            <a:tbl>
+              <a:tblPr firstRow="1" bandRow="1">
+                <a:tableStyleId>{5C22544A-7EE6-4342-B048-85BDC9FD1C3A}</a:tableStyleId>
+              </a:tblPr>
+              <a:tblGrid>
+                <a:gridCol w="1414576"/>
+                <a:gridCol w="652881"/>
+                <a:gridCol w="979322"/>
+                <a:gridCol w="1741017"/>
+                <a:gridCol w="2829153"/>
+                <a:gridCol w="3264408"/>
+              </a:tblGrid>
+              <a:tr h="475488">
+                <a:tc>
+                  <a:txBody>
+                    <a:bodyPr/>
+                    <a:lstStyle/>
+                    <a:p>
+                      <a:r>
+                        <a:rPr sz="1050" b="1">
+                          <a:solidFill>
+                            <a:srgbClr val="FFFFFF"/>
+                          </a:solidFill>
+                          <a:latin typeface="Meiryo"/>
+                          <a:ea typeface="Meiryo"/>
+                        </a:rPr>
+                        <a:t>エリア</a:t>
+                      </a:r>
+                    </a:p>
+                  </a:txBody>
+                  <a:tcPr anchor="ctr" marL="73152" marR="73152">
+                    <a:solidFill>
+                      <a:srgbClr val="232278"/>
+                    </a:solidFill>
+                  </a:tcPr>
+                </a:tc>
+                <a:tc>
+                  <a:txBody>
+                    <a:bodyPr/>
+                    <a:lstStyle/>
+                    <a:p>
+                      <a:r>
+                        <a:rPr sz="1050" b="1">
+                          <a:solidFill>
+                            <a:srgbClr val="FFFFFF"/>
+                          </a:solidFill>
+                          <a:latin typeface="Meiryo"/>
+                          <a:ea typeface="Meiryo"/>
+                        </a:rPr>
+                        <a:t>基準</a:t>
+                      </a:r>
+                    </a:p>
+                  </a:txBody>
+                  <a:tcPr anchor="ctr" marL="73152" marR="73152">
+                    <a:solidFill>
+                      <a:srgbClr val="232278"/>
+                    </a:solidFill>
+                  </a:tcPr>
+                </a:tc>
+                <a:tc>
+                  <a:txBody>
+                    <a:bodyPr/>
+                    <a:lstStyle/>
+                    <a:p>
+                      <a:r>
+                        <a:rPr sz="1050" b="1">
+                          <a:solidFill>
+                            <a:srgbClr val="FFFFFF"/>
+                          </a:solidFill>
+                          <a:latin typeface="Meiryo"/>
+                          <a:ea typeface="Meiryo"/>
+                        </a:rPr>
+                        <a:t>余裕月の最大</a:t>
+                      </a:r>
+                    </a:p>
+                  </a:txBody>
+                  <a:tcPr anchor="ctr" marL="73152" marR="73152">
+                    <a:solidFill>
+                      <a:srgbClr val="232278"/>
+                    </a:solidFill>
+                  </a:tcPr>
+                </a:tc>
+                <a:tc>
+                  <a:txBody>
+                    <a:bodyPr/>
+                    <a:lstStyle/>
+                    <a:p>
+                      <a:r>
+                        <a:rPr sz="1050" b="1">
+                          <a:solidFill>
+                            <a:srgbClr val="FFFFFF"/>
+                          </a:solidFill>
+                          <a:latin typeface="Meiryo"/>
+                          <a:ea typeface="Meiryo"/>
+                        </a:rPr>
+                        <a:t>27ヶ月の現場数(基準〜最大)</a:t>
+                      </a:r>
+                    </a:p>
+                  </a:txBody>
+                  <a:tcPr anchor="ctr" marL="73152" marR="73152">
+                    <a:solidFill>
+                      <a:srgbClr val="232278"/>
+                    </a:solidFill>
+                  </a:tcPr>
+                </a:tc>
+                <a:tc>
+                  <a:txBody>
+                    <a:bodyPr/>
+                    <a:lstStyle/>
+                    <a:p>
+                      <a:r>
+                        <a:rPr sz="1050" b="1">
+                          <a:solidFill>
+                            <a:srgbClr val="FFFFFF"/>
+                          </a:solidFill>
+                          <a:latin typeface="Meiryo"/>
+                          <a:ea typeface="Meiryo"/>
+                        </a:rPr>
+                        <a:t>展開の考え方</a:t>
+                      </a:r>
+                    </a:p>
+                  </a:txBody>
+                  <a:tcPr anchor="ctr" marL="73152" marR="73152">
+                    <a:solidFill>
+                      <a:srgbClr val="232278"/>
+                    </a:solidFill>
+                  </a:tcPr>
+                </a:tc>
+                <a:tc>
+                  <a:txBody>
+                    <a:bodyPr/>
+                    <a:lstStyle/>
+                    <a:p>
+                      <a:r>
+                        <a:rPr sz="1050" b="1">
+                          <a:solidFill>
+                            <a:srgbClr val="FFFFFF"/>
+                          </a:solidFill>
+                          <a:latin typeface="Meiryo"/>
+                          <a:ea typeface="Meiryo"/>
+                        </a:rPr>
+                        <a:t>主な出演候補</a:t>
+                      </a:r>
+                    </a:p>
+                  </a:txBody>
+                  <a:tcPr anchor="ctr" marL="73152" marR="73152">
+                    <a:solidFill>
+                      <a:srgbClr val="232278"/>
+                    </a:solidFill>
+                  </a:tcPr>
+                </a:tc>
+              </a:tr>
+              <a:tr h="475488">
+                <a:tc>
+                  <a:txBody>
+                    <a:bodyPr/>
+                    <a:lstStyle/>
+                    <a:p>
+                      <a:r>
+                        <a:rPr sz="1050" b="1">
+                          <a:solidFill>
+                            <a:srgbClr val="1A1A1A"/>
+                          </a:solidFill>
+                          <a:latin typeface="Meiryo"/>
+                          <a:ea typeface="Meiryo"/>
+                        </a:rPr>
+                        <a:t>関東</a:t>
+                      </a:r>
+                    </a:p>
+                  </a:txBody>
+                  <a:tcPr anchor="ctr" marL="73152" marR="73152">
+                    <a:solidFill>
+                      <a:srgbClr val="FFFFFF"/>
+                    </a:solidFill>
+                  </a:tcPr>
+                </a:tc>
+                <a:tc>
+                  <a:txBody>
+                    <a:bodyPr/>
+                    <a:lstStyle/>
+                    <a:p>
+                      <a:r>
+                        <a:rPr sz="1050" b="0">
+                          <a:solidFill>
+                            <a:srgbClr val="1A1A1A"/>
+                          </a:solidFill>
+                          <a:latin typeface="Meiryo"/>
+                          <a:ea typeface="Meiryo"/>
+                        </a:rPr>
+                        <a:t>6</a:t>
+                      </a:r>
+                    </a:p>
+                  </a:txBody>
+                  <a:tcPr anchor="ctr" marL="73152" marR="73152">
+                    <a:solidFill>
+                      <a:srgbClr val="FFFFFF"/>
+                    </a:solidFill>
+                  </a:tcPr>
+                </a:tc>
+                <a:tc>
+                  <a:txBody>
+                    <a:bodyPr/>
+                    <a:lstStyle/>
+                    <a:p>
+                      <a:r>
+                        <a:rPr sz="1050" b="1">
+                          <a:solidFill>
+                            <a:srgbClr val="C00000"/>
+                          </a:solidFill>
+                          <a:latin typeface="Meiryo"/>
+                          <a:ea typeface="Meiryo"/>
+                        </a:rPr>
+                        <a:t>8</a:t>
+                      </a:r>
+                    </a:p>
+                  </a:txBody>
+                  <a:tcPr anchor="ctr" marL="73152" marR="73152">
+                    <a:solidFill>
+                      <a:srgbClr val="FFFFFF"/>
+                    </a:solidFill>
+                  </a:tcPr>
+                </a:tc>
+                <a:tc>
+                  <a:txBody>
+                    <a:bodyPr/>
+                    <a:lstStyle/>
+                    <a:p>
+                      <a:r>
+                        <a:rPr sz="1050" b="0">
+                          <a:solidFill>
+                            <a:srgbClr val="1A1A1A"/>
+                          </a:solidFill>
+                          <a:latin typeface="Meiryo"/>
+                          <a:ea typeface="Meiryo"/>
+                        </a:rPr>
+                        <a:t>1,410〜1,602</a:t>
+                      </a:r>
+                    </a:p>
+                  </a:txBody>
+                  <a:tcPr anchor="ctr" marL="73152" marR="73152">
+                    <a:solidFill>
+                      <a:srgbClr val="FFFFFF"/>
+                    </a:solidFill>
+                  </a:tcPr>
+                </a:tc>
+                <a:tc>
+                  <a:txBody>
+                    <a:bodyPr/>
+                    <a:lstStyle/>
+                    <a:p>
+                      <a:r>
+                        <a:rPr sz="1050" b="0">
+                          <a:solidFill>
+                            <a:srgbClr val="1A1A1A"/>
+                          </a:solidFill>
+                          <a:latin typeface="Meiryo"/>
+                          <a:ea typeface="Meiryo"/>
+                        </a:rPr>
+                        <a:t>東京・神奈川・千葉を中心に通年固定</a:t>
+                      </a:r>
+                    </a:p>
+                  </a:txBody>
+                  <a:tcPr anchor="ctr" marL="73152" marR="73152">
+                    <a:solidFill>
+                      <a:srgbClr val="FFFFFF"/>
+                    </a:solidFill>
+                  </a:tcPr>
+                </a:tc>
+                <a:tc>
+                  <a:txBody>
+                    <a:bodyPr/>
+                    <a:lstStyle/>
+                    <a:p>
+                      <a:r>
+                        <a:rPr sz="1050" b="0">
+                          <a:solidFill>
+                            <a:srgbClr val="1A1A1A"/>
+                          </a:solidFill>
+                          <a:latin typeface="Meiryo"/>
+                          <a:ea typeface="Meiryo"/>
+                        </a:rPr>
+                        <a:t>初代ウルトラマン、ティガ、ゼロ、テオ、オメガ、ゼット、ジード</a:t>
+                      </a:r>
+                    </a:p>
+                  </a:txBody>
+                  <a:tcPr anchor="ctr" marL="73152" marR="73152">
+                    <a:solidFill>
+                      <a:srgbClr val="FFFFFF"/>
+                    </a:solidFill>
+                  </a:tcPr>
+                </a:tc>
+              </a:tr>
+              <a:tr h="475488">
+                <a:tc>
+                  <a:txBody>
+                    <a:bodyPr/>
+                    <a:lstStyle/>
+                    <a:p>
+                      <a:r>
+                        <a:rPr sz="1050" b="1">
+                          <a:solidFill>
+                            <a:srgbClr val="1A1A1A"/>
+                          </a:solidFill>
+                          <a:latin typeface="Meiryo"/>
+                          <a:ea typeface="Meiryo"/>
+                        </a:rPr>
+                        <a:t>関西</a:t>
+                      </a:r>
+                    </a:p>
+                  </a:txBody>
+                  <a:tcPr anchor="ctr" marL="73152" marR="73152">
+                    <a:solidFill>
+                      <a:srgbClr val="F2F4F6"/>
+                    </a:solidFill>
+                  </a:tcPr>
+                </a:tc>
+                <a:tc>
+                  <a:txBody>
+                    <a:bodyPr/>
+                    <a:lstStyle/>
+                    <a:p>
+                      <a:r>
+                        <a:rPr sz="1050" b="0">
+                          <a:solidFill>
+                            <a:srgbClr val="1A1A1A"/>
+                          </a:solidFill>
+                          <a:latin typeface="Meiryo"/>
+                          <a:ea typeface="Meiryo"/>
+                        </a:rPr>
+                        <a:t>2</a:t>
+                      </a:r>
+                    </a:p>
+                  </a:txBody>
+                  <a:tcPr anchor="ctr" marL="73152" marR="73152">
+                    <a:solidFill>
+                      <a:srgbClr val="F2F4F6"/>
+                    </a:solidFill>
+                  </a:tcPr>
+                </a:tc>
+                <a:tc>
+                  <a:txBody>
+                    <a:bodyPr/>
+                    <a:lstStyle/>
+                    <a:p>
+                      <a:r>
+                        <a:rPr sz="1050" b="1">
+                          <a:solidFill>
+                            <a:srgbClr val="C00000"/>
+                          </a:solidFill>
+                          <a:latin typeface="Meiryo"/>
+                          <a:ea typeface="Meiryo"/>
+                        </a:rPr>
+                        <a:t>3</a:t>
+                      </a:r>
+                    </a:p>
+                  </a:txBody>
+                  <a:tcPr anchor="ctr" marL="73152" marR="73152">
+                    <a:solidFill>
+                      <a:srgbClr val="F2F4F6"/>
+                    </a:solidFill>
+                  </a:tcPr>
+                </a:tc>
+                <a:tc>
+                  <a:txBody>
+                    <a:bodyPr/>
+                    <a:lstStyle/>
+                    <a:p>
+                      <a:r>
+                        <a:rPr sz="1050" b="0">
+                          <a:solidFill>
+                            <a:srgbClr val="1A1A1A"/>
+                          </a:solidFill>
+                          <a:latin typeface="Meiryo"/>
+                          <a:ea typeface="Meiryo"/>
+                        </a:rPr>
+                        <a:t>470〜566</a:t>
+                      </a:r>
+                    </a:p>
+                  </a:txBody>
+                  <a:tcPr anchor="ctr" marL="73152" marR="73152">
+                    <a:solidFill>
+                      <a:srgbClr val="F2F4F6"/>
+                    </a:solidFill>
+                  </a:tcPr>
+                </a:tc>
+                <a:tc>
+                  <a:txBody>
+                    <a:bodyPr/>
+                    <a:lstStyle/>
+                    <a:p>
+                      <a:r>
+                        <a:rPr sz="1050" b="0">
+                          <a:solidFill>
+                            <a:srgbClr val="1A1A1A"/>
+                          </a:solidFill>
+                          <a:latin typeface="Meiryo"/>
+                          <a:ea typeface="Meiryo"/>
+                        </a:rPr>
+                        <a:t>大阪・兵庫・京都を中心に展開</a:t>
+                      </a:r>
+                    </a:p>
+                  </a:txBody>
+                  <a:tcPr anchor="ctr" marL="73152" marR="73152">
+                    <a:solidFill>
+                      <a:srgbClr val="F2F4F6"/>
+                    </a:solidFill>
+                  </a:tcPr>
+                </a:tc>
+                <a:tc>
+                  <a:txBody>
+                    <a:bodyPr/>
+                    <a:lstStyle/>
+                    <a:p>
+                      <a:r>
+                        <a:rPr sz="1050" b="0">
+                          <a:solidFill>
+                            <a:srgbClr val="1A1A1A"/>
+                          </a:solidFill>
+                          <a:latin typeface="Meiryo"/>
+                          <a:ea typeface="Meiryo"/>
+                        </a:rPr>
+                        <a:t>ゼロ、ゼット、テオ、ジード、オメガ</a:t>
+                      </a:r>
+                    </a:p>
+                  </a:txBody>
+                  <a:tcPr anchor="ctr" marL="73152" marR="73152">
+                    <a:solidFill>
+                      <a:srgbClr val="F2F4F6"/>
+                    </a:solidFill>
+                  </a:tcPr>
+                </a:tc>
+              </a:tr>
+              <a:tr h="475488">
+                <a:tc>
+                  <a:txBody>
+                    <a:bodyPr/>
+                    <a:lstStyle/>
+                    <a:p>
+                      <a:r>
+                        <a:rPr sz="1050" b="1">
+                          <a:solidFill>
+                            <a:srgbClr val="1A1A1A"/>
+                          </a:solidFill>
+                          <a:latin typeface="Meiryo"/>
+                          <a:ea typeface="Meiryo"/>
+                        </a:rPr>
+                        <a:t>東海</a:t>
+                      </a:r>
+                    </a:p>
+                  </a:txBody>
+                  <a:tcPr anchor="ctr" marL="73152" marR="73152">
+                    <a:solidFill>
+                      <a:srgbClr val="FFFFFF"/>
+                    </a:solidFill>
+                  </a:tcPr>
+                </a:tc>
+                <a:tc>
+                  <a:txBody>
+                    <a:bodyPr/>
+                    <a:lstStyle/>
+                    <a:p>
+                      <a:r>
+                        <a:rPr sz="1050" b="0">
+                          <a:solidFill>
+                            <a:srgbClr val="1A1A1A"/>
+                          </a:solidFill>
+                          <a:latin typeface="Meiryo"/>
+                          <a:ea typeface="Meiryo"/>
+                        </a:rPr>
+                        <a:t>2</a:t>
+                      </a:r>
+                    </a:p>
+                  </a:txBody>
+                  <a:tcPr anchor="ctr" marL="73152" marR="73152">
+                    <a:solidFill>
+                      <a:srgbClr val="FFFFFF"/>
+                    </a:solidFill>
+                  </a:tcPr>
+                </a:tc>
+                <a:tc>
+                  <a:txBody>
+                    <a:bodyPr/>
+                    <a:lstStyle/>
+                    <a:p>
+                      <a:r>
+                        <a:rPr sz="1050" b="1">
+                          <a:solidFill>
+                            <a:srgbClr val="C00000"/>
+                          </a:solidFill>
+                          <a:latin typeface="Meiryo"/>
+                          <a:ea typeface="Meiryo"/>
+                        </a:rPr>
+                        <a:t>3</a:t>
+                      </a:r>
+                    </a:p>
+                  </a:txBody>
+                  <a:tcPr anchor="ctr" marL="73152" marR="73152">
+                    <a:solidFill>
+                      <a:srgbClr val="FFFFFF"/>
+                    </a:solidFill>
+                  </a:tcPr>
+                </a:tc>
+                <a:tc>
+                  <a:txBody>
+                    <a:bodyPr/>
+                    <a:lstStyle/>
+                    <a:p>
+                      <a:r>
+                        <a:rPr sz="1050" b="0">
+                          <a:solidFill>
+                            <a:srgbClr val="1A1A1A"/>
+                          </a:solidFill>
+                          <a:latin typeface="Meiryo"/>
+                          <a:ea typeface="Meiryo"/>
+                        </a:rPr>
+                        <a:t>470〜566</a:t>
+                      </a:r>
+                    </a:p>
+                  </a:txBody>
+                  <a:tcPr anchor="ctr" marL="73152" marR="73152">
+                    <a:solidFill>
+                      <a:srgbClr val="FFFFFF"/>
+                    </a:solidFill>
+                  </a:tcPr>
+                </a:tc>
+                <a:tc>
+                  <a:txBody>
+                    <a:bodyPr/>
+                    <a:lstStyle/>
+                    <a:p>
+                      <a:r>
+                        <a:rPr sz="1050" b="0">
+                          <a:solidFill>
+                            <a:srgbClr val="1A1A1A"/>
+                          </a:solidFill>
+                          <a:latin typeface="Meiryo"/>
+                          <a:ea typeface="Meiryo"/>
+                        </a:rPr>
+                        <a:t>愛知を中心に岐阜・三重・静岡</a:t>
+                      </a:r>
+                    </a:p>
+                  </a:txBody>
+                  <a:tcPr anchor="ctr" marL="73152" marR="73152">
+                    <a:solidFill>
+                      <a:srgbClr val="FFFFFF"/>
+                    </a:solidFill>
+                  </a:tcPr>
+                </a:tc>
+                <a:tc>
+                  <a:txBody>
+                    <a:bodyPr/>
+                    <a:lstStyle/>
+                    <a:p>
+                      <a:r>
+                        <a:rPr sz="1050" b="0">
+                          <a:solidFill>
+                            <a:srgbClr val="1A1A1A"/>
+                          </a:solidFill>
+                          <a:latin typeface="Meiryo"/>
+                          <a:ea typeface="Meiryo"/>
+                        </a:rPr>
+                        <a:t>アーク、テオ、オメガ、ゼット、ジード</a:t>
+                      </a:r>
+                    </a:p>
+                  </a:txBody>
+                  <a:tcPr anchor="ctr" marL="73152" marR="73152">
+                    <a:solidFill>
+                      <a:srgbClr val="FFFFFF"/>
+                    </a:solidFill>
+                  </a:tcPr>
+                </a:tc>
+              </a:tr>
+              <a:tr h="475488">
+                <a:tc>
+                  <a:txBody>
+                    <a:bodyPr/>
+                    <a:lstStyle/>
+                    <a:p>
+                      <a:r>
+                        <a:rPr sz="1050" b="1">
+                          <a:solidFill>
+                            <a:srgbClr val="1A1A1A"/>
+                          </a:solidFill>
+                          <a:latin typeface="Meiryo"/>
+                          <a:ea typeface="Meiryo"/>
+                        </a:rPr>
+                        <a:t>九州</a:t>
+                      </a:r>
+                    </a:p>
+                  </a:txBody>
+                  <a:tcPr anchor="ctr" marL="73152" marR="73152">
+                    <a:solidFill>
+                      <a:srgbClr val="F2F4F6"/>
+                    </a:solidFill>
+                  </a:tcPr>
+                </a:tc>
+                <a:tc>
+                  <a:txBody>
+                    <a:bodyPr/>
+                    <a:lstStyle/>
+                    <a:p>
+                      <a:r>
+                        <a:rPr sz="1050" b="0">
+                          <a:solidFill>
+                            <a:srgbClr val="1A1A1A"/>
+                          </a:solidFill>
+                          <a:latin typeface="Meiryo"/>
+                          <a:ea typeface="Meiryo"/>
+                        </a:rPr>
+                        <a:t>2</a:t>
+                      </a:r>
+                    </a:p>
+                  </a:txBody>
+                  <a:tcPr anchor="ctr" marL="73152" marR="73152">
+                    <a:solidFill>
+                      <a:srgbClr val="F2F4F6"/>
+                    </a:solidFill>
+                  </a:tcPr>
+                </a:tc>
+                <a:tc>
+                  <a:txBody>
+                    <a:bodyPr/>
+                    <a:lstStyle/>
+                    <a:p>
+                      <a:r>
+                        <a:rPr sz="1050" b="1">
+                          <a:solidFill>
+                            <a:srgbClr val="C00000"/>
+                          </a:solidFill>
+                          <a:latin typeface="Meiryo"/>
+                          <a:ea typeface="Meiryo"/>
+                        </a:rPr>
+                        <a:t>3</a:t>
+                      </a:r>
+                    </a:p>
+                  </a:txBody>
+                  <a:tcPr anchor="ctr" marL="73152" marR="73152">
+                    <a:solidFill>
+                      <a:srgbClr val="F2F4F6"/>
+                    </a:solidFill>
+                  </a:tcPr>
+                </a:tc>
+                <a:tc>
+                  <a:txBody>
+                    <a:bodyPr/>
+                    <a:lstStyle/>
+                    <a:p>
+                      <a:r>
+                        <a:rPr sz="1050" b="0">
+                          <a:solidFill>
+                            <a:srgbClr val="1A1A1A"/>
+                          </a:solidFill>
+                          <a:latin typeface="Meiryo"/>
+                          <a:ea typeface="Meiryo"/>
+                        </a:rPr>
+                        <a:t>470〜566</a:t>
+                      </a:r>
+                    </a:p>
+                  </a:txBody>
+                  <a:tcPr anchor="ctr" marL="73152" marR="73152">
+                    <a:solidFill>
+                      <a:srgbClr val="F2F4F6"/>
+                    </a:solidFill>
+                  </a:tcPr>
+                </a:tc>
+                <a:tc>
+                  <a:txBody>
+                    <a:bodyPr/>
+                    <a:lstStyle/>
+                    <a:p>
+                      <a:r>
+                        <a:rPr sz="1050" b="0">
+                          <a:solidFill>
+                            <a:srgbClr val="1A1A1A"/>
+                          </a:solidFill>
+                          <a:latin typeface="Meiryo"/>
+                          <a:ea typeface="Meiryo"/>
+                        </a:rPr>
+                        <a:t>福岡を拠点に各県</a:t>
+                      </a:r>
+                    </a:p>
+                  </a:txBody>
+                  <a:tcPr anchor="ctr" marL="73152" marR="73152">
+                    <a:solidFill>
+                      <a:srgbClr val="F2F4F6"/>
+                    </a:solidFill>
+                  </a:tcPr>
+                </a:tc>
+                <a:tc>
+                  <a:txBody>
+                    <a:bodyPr/>
+                    <a:lstStyle/>
+                    <a:p>
+                      <a:r>
+                        <a:rPr sz="1050" b="0">
+                          <a:solidFill>
+                            <a:srgbClr val="1A1A1A"/>
+                          </a:solidFill>
+                          <a:latin typeface="Meiryo"/>
+                          <a:ea typeface="Meiryo"/>
+                        </a:rPr>
+                        <a:t>ゼロ、ゼット、テオ、オメガ、ジード、ティガ</a:t>
+                      </a:r>
+                    </a:p>
+                  </a:txBody>
+                  <a:tcPr anchor="ctr" marL="73152" marR="73152">
+                    <a:solidFill>
+                      <a:srgbClr val="F2F4F6"/>
+                    </a:solidFill>
+                  </a:tcPr>
+                </a:tc>
+              </a:tr>
+              <a:tr h="475488">
+                <a:tc>
+                  <a:txBody>
+                    <a:bodyPr/>
+                    <a:lstStyle/>
+                    <a:p>
+                      <a:r>
+                        <a:rPr sz="1050" b="1">
+                          <a:solidFill>
+                            <a:srgbClr val="1A1A1A"/>
+                          </a:solidFill>
+                          <a:latin typeface="Meiryo"/>
+                          <a:ea typeface="Meiryo"/>
+                        </a:rPr>
+                        <a:t>北海道</a:t>
+                      </a:r>
+                    </a:p>
+                  </a:txBody>
+                  <a:tcPr anchor="ctr" marL="73152" marR="73152">
+                    <a:solidFill>
+                      <a:srgbClr val="FFFFFF"/>
+                    </a:solidFill>
+                  </a:tcPr>
+                </a:tc>
+                <a:tc>
+                  <a:txBody>
+                    <a:bodyPr/>
+                    <a:lstStyle/>
+                    <a:p>
+                      <a:r>
+                        <a:rPr sz="1050" b="0">
+                          <a:solidFill>
+                            <a:srgbClr val="1A1A1A"/>
+                          </a:solidFill>
+                          <a:latin typeface="Meiryo"/>
+                          <a:ea typeface="Meiryo"/>
+                        </a:rPr>
+                        <a:t>1</a:t>
+                      </a:r>
+                    </a:p>
+                  </a:txBody>
+                  <a:tcPr anchor="ctr" marL="73152" marR="73152">
+                    <a:solidFill>
+                      <a:srgbClr val="FFFFFF"/>
+                    </a:solidFill>
+                  </a:tcPr>
+                </a:tc>
+                <a:tc>
+                  <a:txBody>
+                    <a:bodyPr/>
+                    <a:lstStyle/>
+                    <a:p>
+                      <a:r>
+                        <a:rPr sz="1050" b="0">
+                          <a:solidFill>
+                            <a:srgbClr val="1A1A1A"/>
+                          </a:solidFill>
+                          <a:latin typeface="Meiryo"/>
+                          <a:ea typeface="Meiryo"/>
+                        </a:rPr>
+                        <a:t>1</a:t>
+                      </a:r>
+                    </a:p>
+                  </a:txBody>
+                  <a:tcPr anchor="ctr" marL="73152" marR="73152">
+                    <a:solidFill>
+                      <a:srgbClr val="FFFFFF"/>
+                    </a:solidFill>
+                  </a:tcPr>
+                </a:tc>
+                <a:tc>
+                  <a:txBody>
+                    <a:bodyPr/>
+                    <a:lstStyle/>
+                    <a:p>
+                      <a:r>
+                        <a:rPr sz="1050" b="0">
+                          <a:solidFill>
+                            <a:srgbClr val="1A1A1A"/>
+                          </a:solidFill>
+                          <a:latin typeface="Meiryo"/>
+                          <a:ea typeface="Meiryo"/>
+                        </a:rPr>
+                        <a:t>235</a:t>
+                      </a:r>
+                    </a:p>
+                  </a:txBody>
+                  <a:tcPr anchor="ctr" marL="73152" marR="73152">
+                    <a:solidFill>
+                      <a:srgbClr val="FFFFFF"/>
+                    </a:solidFill>
+                  </a:tcPr>
+                </a:tc>
+                <a:tc>
+                  <a:txBody>
+                    <a:bodyPr/>
+                    <a:lstStyle/>
+                    <a:p>
+                      <a:r>
+                        <a:rPr sz="1050" b="0">
+                          <a:solidFill>
+                            <a:srgbClr val="1A1A1A"/>
+                          </a:solidFill>
+                          <a:latin typeface="Meiryo"/>
+                          <a:ea typeface="Meiryo"/>
+                        </a:rPr>
+                        <a:t>札幌近郊は日帰り、函館・釧路は宿泊</a:t>
+                      </a:r>
+                    </a:p>
+                  </a:txBody>
+                  <a:tcPr anchor="ctr" marL="73152" marR="73152">
+                    <a:solidFill>
+                      <a:srgbClr val="FFFFFF"/>
+                    </a:solidFill>
+                  </a:tcPr>
+                </a:tc>
+                <a:tc>
+                  <a:txBody>
+                    <a:bodyPr/>
+                    <a:lstStyle/>
+                    <a:p>
+                      <a:r>
+                        <a:rPr sz="1050" b="0">
+                          <a:solidFill>
+                            <a:srgbClr val="1A1A1A"/>
+                          </a:solidFill>
+                          <a:latin typeface="Meiryo"/>
+                          <a:ea typeface="Meiryo"/>
+                        </a:rPr>
+                        <a:t>アーク、テオ、オメガ</a:t>
+                      </a:r>
+                    </a:p>
+                  </a:txBody>
+                  <a:tcPr anchor="ctr" marL="73152" marR="73152">
+                    <a:solidFill>
+                      <a:srgbClr val="FFFFFF"/>
+                    </a:solidFill>
+                  </a:tcPr>
+                </a:tc>
+              </a:tr>
+              <a:tr h="475488">
+                <a:tc>
+                  <a:txBody>
+                    <a:bodyPr/>
+                    <a:lstStyle/>
+                    <a:p>
+                      <a:r>
+                        <a:rPr sz="1050" b="1">
+                          <a:solidFill>
+                            <a:srgbClr val="1A1A1A"/>
+                          </a:solidFill>
+                          <a:latin typeface="Meiryo"/>
+                          <a:ea typeface="Meiryo"/>
+                        </a:rPr>
+                        <a:t>東北・信越</a:t>
+                      </a:r>
+                    </a:p>
+                  </a:txBody>
+                  <a:tcPr anchor="ctr" marL="73152" marR="73152">
+                    <a:solidFill>
+                      <a:srgbClr val="F2F4F6"/>
+                    </a:solidFill>
+                  </a:tcPr>
+                </a:tc>
+                <a:tc>
+                  <a:txBody>
+                    <a:bodyPr/>
+                    <a:lstStyle/>
+                    <a:p>
+                      <a:r>
+                        <a:rPr sz="1050" b="0">
+                          <a:solidFill>
+                            <a:srgbClr val="1A1A1A"/>
+                          </a:solidFill>
+                          <a:latin typeface="Meiryo"/>
+                          <a:ea typeface="Meiryo"/>
+                        </a:rPr>
+                        <a:t>1</a:t>
+                      </a:r>
+                    </a:p>
+                  </a:txBody>
+                  <a:tcPr anchor="ctr" marL="73152" marR="73152">
+                    <a:solidFill>
+                      <a:srgbClr val="F2F4F6"/>
+                    </a:solidFill>
+                  </a:tcPr>
+                </a:tc>
+                <a:tc>
+                  <a:txBody>
+                    <a:bodyPr/>
+                    <a:lstStyle/>
+                    <a:p>
+                      <a:r>
+                        <a:rPr sz="1050" b="0">
+                          <a:solidFill>
+                            <a:srgbClr val="1A1A1A"/>
+                          </a:solidFill>
+                          <a:latin typeface="Meiryo"/>
+                          <a:ea typeface="Meiryo"/>
+                        </a:rPr>
+                        <a:t>1</a:t>
+                      </a:r>
+                    </a:p>
+                  </a:txBody>
+                  <a:tcPr anchor="ctr" marL="73152" marR="73152">
+                    <a:solidFill>
+                      <a:srgbClr val="F2F4F6"/>
+                    </a:solidFill>
+                  </a:tcPr>
+                </a:tc>
+                <a:tc>
+                  <a:txBody>
+                    <a:bodyPr/>
+                    <a:lstStyle/>
+                    <a:p>
+                      <a:r>
+                        <a:rPr sz="1050" b="0">
+                          <a:solidFill>
+                            <a:srgbClr val="1A1A1A"/>
+                          </a:solidFill>
+                          <a:latin typeface="Meiryo"/>
+                          <a:ea typeface="Meiryo"/>
+                        </a:rPr>
+                        <a:t>235</a:t>
+                      </a:r>
+                    </a:p>
+                  </a:txBody>
+                  <a:tcPr anchor="ctr" marL="73152" marR="73152">
+                    <a:solidFill>
+                      <a:srgbClr val="F2F4F6"/>
+                    </a:solidFill>
+                  </a:tcPr>
+                </a:tc>
+                <a:tc>
+                  <a:txBody>
+                    <a:bodyPr/>
+                    <a:lstStyle/>
+                    <a:p>
+                      <a:r>
+                        <a:rPr sz="1050" b="0">
+                          <a:solidFill>
+                            <a:srgbClr val="1A1A1A"/>
+                          </a:solidFill>
+                          <a:latin typeface="Meiryo"/>
+                          <a:ea typeface="Meiryo"/>
+                        </a:rPr>
+                        <a:t>仙台・新潟を拠点に交互に配分</a:t>
+                      </a:r>
+                    </a:p>
+                  </a:txBody>
+                  <a:tcPr anchor="ctr" marL="73152" marR="73152">
+                    <a:solidFill>
+                      <a:srgbClr val="F2F4F6"/>
+                    </a:solidFill>
+                  </a:tcPr>
+                </a:tc>
+                <a:tc>
+                  <a:txBody>
+                    <a:bodyPr/>
+                    <a:lstStyle/>
+                    <a:p>
+                      <a:r>
+                        <a:rPr sz="1050" b="0">
+                          <a:solidFill>
+                            <a:srgbClr val="1A1A1A"/>
+                          </a:solidFill>
+                          <a:latin typeface="Meiryo"/>
+                          <a:ea typeface="Meiryo"/>
+                        </a:rPr>
+                        <a:t>初代ウルトラマン、テオ、オメガ、ジード</a:t>
+                      </a:r>
+                    </a:p>
+                  </a:txBody>
+                  <a:tcPr anchor="ctr" marL="73152" marR="73152">
+                    <a:solidFill>
+                      <a:srgbClr val="F2F4F6"/>
+                    </a:solidFill>
+                  </a:tcPr>
+                </a:tc>
+              </a:tr>
+              <a:tr h="475488">
+                <a:tc>
+                  <a:txBody>
+                    <a:bodyPr/>
+                    <a:lstStyle/>
+                    <a:p>
+                      <a:r>
+                        <a:rPr sz="1050" b="1">
+                          <a:solidFill>
+                            <a:srgbClr val="1A1A1A"/>
+                          </a:solidFill>
+                          <a:latin typeface="Meiryo"/>
+                          <a:ea typeface="Meiryo"/>
+                        </a:rPr>
+                        <a:t>中国・四国・沖縄</a:t>
+                      </a:r>
+                    </a:p>
+                  </a:txBody>
+                  <a:tcPr anchor="ctr" marL="73152" marR="73152">
+                    <a:solidFill>
+                      <a:srgbClr val="FFFFFF"/>
+                    </a:solidFill>
+                  </a:tcPr>
+                </a:tc>
+                <a:tc>
+                  <a:txBody>
+                    <a:bodyPr/>
+                    <a:lstStyle/>
+                    <a:p>
+                      <a:r>
+                        <a:rPr sz="1050" b="0">
+                          <a:solidFill>
+                            <a:srgbClr val="1A1A1A"/>
+                          </a:solidFill>
+                          <a:latin typeface="Meiryo"/>
+                          <a:ea typeface="Meiryo"/>
+                        </a:rPr>
+                        <a:t>1</a:t>
+                      </a:r>
+                    </a:p>
+                  </a:txBody>
+                  <a:tcPr anchor="ctr" marL="73152" marR="73152">
+                    <a:solidFill>
+                      <a:srgbClr val="FFFFFF"/>
+                    </a:solidFill>
+                  </a:tcPr>
+                </a:tc>
+                <a:tc>
+                  <a:txBody>
+                    <a:bodyPr/>
+                    <a:lstStyle/>
+                    <a:p>
+                      <a:r>
+                        <a:rPr sz="1050" b="0">
+                          <a:solidFill>
+                            <a:srgbClr val="1A1A1A"/>
+                          </a:solidFill>
+                          <a:latin typeface="Meiryo"/>
+                          <a:ea typeface="Meiryo"/>
+                        </a:rPr>
+                        <a:t>1</a:t>
+                      </a:r>
+                    </a:p>
+                  </a:txBody>
+                  <a:tcPr anchor="ctr" marL="73152" marR="73152">
+                    <a:solidFill>
+                      <a:srgbClr val="FFFFFF"/>
+                    </a:solidFill>
+                  </a:tcPr>
+                </a:tc>
+                <a:tc>
+                  <a:txBody>
+                    <a:bodyPr/>
+                    <a:lstStyle/>
+                    <a:p>
+                      <a:r>
+                        <a:rPr sz="1050" b="0">
+                          <a:solidFill>
+                            <a:srgbClr val="1A1A1A"/>
+                          </a:solidFill>
+                          <a:latin typeface="Meiryo"/>
+                          <a:ea typeface="Meiryo"/>
+                        </a:rPr>
+                        <a:t>235</a:t>
+                      </a:r>
+                    </a:p>
+                  </a:txBody>
+                  <a:tcPr anchor="ctr" marL="73152" marR="73152">
+                    <a:solidFill>
+                      <a:srgbClr val="FFFFFF"/>
+                    </a:solidFill>
+                  </a:tcPr>
+                </a:tc>
+                <a:tc>
+                  <a:txBody>
+                    <a:bodyPr/>
+                    <a:lstStyle/>
+                    <a:p>
+                      <a:r>
+                        <a:rPr sz="1050" b="0">
+                          <a:solidFill>
+                            <a:srgbClr val="1A1A1A"/>
+                          </a:solidFill>
+                          <a:latin typeface="Meiryo"/>
+                          <a:ea typeface="Meiryo"/>
+                        </a:rPr>
+                        <a:t>広島・岡山を拠点に各県、沖縄は本島中心</a:t>
+                      </a:r>
+                    </a:p>
+                  </a:txBody>
+                  <a:tcPr anchor="ctr" marL="73152" marR="73152">
+                    <a:solidFill>
+                      <a:srgbClr val="FFFFFF"/>
+                    </a:solidFill>
+                  </a:tcPr>
+                </a:tc>
+                <a:tc>
+                  <a:txBody>
+                    <a:bodyPr/>
+                    <a:lstStyle/>
+                    <a:p>
+                      <a:r>
+                        <a:rPr sz="1050" b="0">
+                          <a:solidFill>
+                            <a:srgbClr val="1A1A1A"/>
+                          </a:solidFill>
+                          <a:latin typeface="Meiryo"/>
+                          <a:ea typeface="Meiryo"/>
+                        </a:rPr>
+                        <a:t>アーク、テオ、オメガ、ジード、ゼロ、ゼット</a:t>
+                      </a:r>
+                    </a:p>
+                  </a:txBody>
+                  <a:tcPr anchor="ctr" marL="73152" marR="73152">
+                    <a:solidFill>
+                      <a:srgbClr val="FFFFFF"/>
+                    </a:solidFill>
+                  </a:tcPr>
+                </a:tc>
+              </a:tr>
+              <a:tr h="475488">
+                <a:tc>
+                  <a:txBody>
+                    <a:bodyPr/>
+                    <a:lstStyle/>
+                    <a:p>
+                      <a:r>
+                        <a:rPr sz="1050" b="1">
+                          <a:solidFill>
+                            <a:srgbClr val="1A1A1A"/>
+                          </a:solidFill>
+                          <a:latin typeface="Meiryo"/>
+                          <a:ea typeface="Meiryo"/>
+                        </a:rPr>
+                        <a:t>合計</a:t>
+                      </a:r>
+                    </a:p>
+                  </a:txBody>
+                  <a:tcPr anchor="ctr" marL="73152" marR="73152">
+                    <a:solidFill>
+                      <a:srgbClr val="F2F4F6"/>
+                    </a:solidFill>
+                  </a:tcPr>
+                </a:tc>
+                <a:tc>
+                  <a:txBody>
+                    <a:bodyPr/>
+                    <a:lstStyle/>
+                    <a:p>
+                      <a:r>
+                        <a:rPr sz="1050" b="1">
+                          <a:solidFill>
+                            <a:srgbClr val="1A1A1A"/>
+                          </a:solidFill>
+                          <a:latin typeface="Meiryo"/>
+                          <a:ea typeface="Meiryo"/>
+                        </a:rPr>
+                        <a:t>15</a:t>
+                      </a:r>
+                    </a:p>
+                  </a:txBody>
+                  <a:tcPr anchor="ctr" marL="73152" marR="73152">
+                    <a:solidFill>
+                      <a:srgbClr val="F2F4F6"/>
+                    </a:solidFill>
+                  </a:tcPr>
+                </a:tc>
+                <a:tc>
+                  <a:txBody>
+                    <a:bodyPr/>
+                    <a:lstStyle/>
+                    <a:p>
+                      <a:r>
+                        <a:rPr sz="1050" b="1">
+                          <a:solidFill>
+                            <a:srgbClr val="C00000"/>
+                          </a:solidFill>
+                          <a:latin typeface="Meiryo"/>
+                          <a:ea typeface="Meiryo"/>
+                        </a:rPr>
+                        <a:t>20</a:t>
+                      </a:r>
+                    </a:p>
+                  </a:txBody>
+                  <a:tcPr anchor="ctr" marL="73152" marR="73152">
+                    <a:solidFill>
+                      <a:srgbClr val="F2F4F6"/>
+                    </a:solidFill>
+                  </a:tcPr>
+                </a:tc>
+                <a:tc>
+                  <a:txBody>
+                    <a:bodyPr/>
+                    <a:lstStyle/>
+                    <a:p>
+                      <a:r>
+                        <a:rPr sz="1050" b="1">
+                          <a:solidFill>
+                            <a:srgbClr val="1A1A1A"/>
+                          </a:solidFill>
+                          <a:latin typeface="Meiryo"/>
+                          <a:ea typeface="Meiryo"/>
+                        </a:rPr>
+                        <a:t>3,525〜4,005</a:t>
+                      </a:r>
+                    </a:p>
+                  </a:txBody>
+                  <a:tcPr anchor="ctr" marL="73152" marR="73152">
+                    <a:solidFill>
+                      <a:srgbClr val="F2F4F6"/>
+                    </a:solidFill>
+                  </a:tcPr>
+                </a:tc>
+                <a:tc>
+                  <a:txBody>
+                    <a:bodyPr/>
+                    <a:lstStyle/>
+                    <a:p>
+                      <a:r>
+                        <a:rPr sz="1050" b="0">
+                          <a:solidFill>
+                            <a:srgbClr val="1A1A1A"/>
+                          </a:solidFill>
+                          <a:latin typeface="Meiryo"/>
+                          <a:ea typeface="Meiryo"/>
+                        </a:rPr>
+                        <a:t/>
+                      </a:r>
+                    </a:p>
+                  </a:txBody>
+                  <a:tcPr anchor="ctr" marL="73152" marR="73152">
+                    <a:solidFill>
+                      <a:srgbClr val="F2F4F6"/>
+                    </a:solidFill>
+                  </a:tcPr>
+                </a:tc>
+                <a:tc>
+                  <a:txBody>
+                    <a:bodyPr/>
+                    <a:lstStyle/>
+                    <a:p>
+                      <a:r>
+                        <a:rPr sz="1050" b="0">
+                          <a:solidFill>
+                            <a:srgbClr val="1A1A1A"/>
+                          </a:solidFill>
+                          <a:latin typeface="Meiryo"/>
+                          <a:ea typeface="Meiryo"/>
+                        </a:rPr>
+                        <a:t/>
+                      </a:r>
+                    </a:p>
+                  </a:txBody>
+                  <a:tcPr anchor="ctr" marL="73152" marR="73152">
+                    <a:solidFill>
+                      <a:srgbClr val="F2F4F6"/>
+                    </a:solidFill>
+                  </a:tcPr>
+                </a:tc>
+              </a:tr>
+            </a:tbl>
+          </a:graphicData>
+        </a:graphic>
+      </p:graphicFrame>
       <p:sp>
         <p:nvSpPr>
           <p:cNvPr id="9" name="TextBox 8"/>
@@ -5600,8 +6845,8 @@
         </p:nvSpPr>
         <p:spPr>
           <a:xfrm>
-            <a:off x="868680" y="1591056"/>
-            <a:ext cx="4846320" cy="2029968"/>
+            <a:off x="640080" y="5760720"/>
+            <a:ext cx="10881360" cy="640080"/>
           </a:xfrm>
           <a:prstGeom prst="rect">
             <a:avLst/>
@@ -5616,531 +6861,35 @@
           <a:p>
             <a:pPr algn="l">
               <a:spcAft>
-                <a:spcPts val="400"/>
+                <a:spcPts val="300"/>
               </a:spcAft>
             </a:pPr>
             <a:r>
-              <a:rPr sz="1300" b="1">
-                <a:solidFill>
-                  <a:srgbClr val="C00000"/>
-                </a:solidFill>
-                <a:latin typeface="Meiryo"/>
-                <a:ea typeface="Meiryo"/>
-              </a:rPr>
-              <a:t>キャンペーン名称・KVの策定(11月中)</a:t>
-            </a:r>
-          </a:p>
-          <a:p>
-            <a:pPr algn="l">
-              <a:spcAft>
-                <a:spcPts val="400"/>
-              </a:spcAft>
-            </a:pPr>
-            <a:r>
-              <a:rPr sz="1100" b="0">
+              <a:rPr sz="1050" b="0">
                 <a:solidFill>
                   <a:srgbClr val="1A1A1A"/>
                 </a:solidFill>
                 <a:latin typeface="Meiryo"/>
                 <a:ea typeface="Meiryo"/>
               </a:rPr>
-              <a:t>・KVは貴社で制作(当社で受託することも可能)</a:t>
+              <a:t>・エリア配分は目安。会場リストをいただいた段階で、バッティング基準(半径8km・前後8日/5日)に照らして調整</a:t>
             </a:r>
           </a:p>
           <a:p>
             <a:pPr algn="l">
               <a:spcAft>
-                <a:spcPts val="400"/>
+                <a:spcPts val="300"/>
               </a:spcAft>
             </a:pPr>
             <a:r>
-              <a:rPr sz="1100" b="0">
+              <a:rPr sz="1050" b="0">
                 <a:solidFill>
                   <a:srgbClr val="1A1A1A"/>
                 </a:solidFill>
                 <a:latin typeface="Meiryo"/>
                 <a:ea typeface="Meiryo"/>
               </a:rPr>
-              <a:t>・撮影会の背景バナーは、キャラクターなしの背景素材(青空・宇宙)を当社から提供</a:t>
-            </a:r>
-          </a:p>
-          <a:p>
-            <a:pPr algn="l">
-              <a:spcAft>
-                <a:spcPts val="400"/>
-              </a:spcAft>
-            </a:pPr>
-            <a:r>
-              <a:rPr sz="1100" b="0">
-                <a:solidFill>
-                  <a:srgbClr val="1A1A1A"/>
-                </a:solidFill>
-                <a:latin typeface="Meiryo"/>
-                <a:ea typeface="Meiryo"/>
-              </a:rPr>
-              <a:t>・会場装飾と告知物には集合ビジュアル(調整版)、個体素材、ブランドロゴ</a:t>
-            </a:r>
-          </a:p>
-          <a:p>
-            <a:pPr algn="l">
-              <a:spcAft>
-                <a:spcPts val="400"/>
-              </a:spcAft>
-            </a:pPr>
-            <a:r>
-              <a:rPr sz="1100" b="0">
-                <a:solidFill>
-                  <a:srgbClr val="1A1A1A"/>
-                </a:solidFill>
-                <a:latin typeface="Meiryo"/>
-                <a:ea typeface="Meiryo"/>
-              </a:rPr>
-              <a:t>・監修は当社の制作物窓口へ。春節前の量産(1月末)から逆算し、11月中に確定</a:t>
-            </a:r>
-          </a:p>
-        </p:txBody>
-      </p:sp>
-      <p:sp>
-        <p:nvSpPr>
-          <p:cNvPr id="10" name="Rounded Rectangle 9"/>
-          <p:cNvSpPr/>
-          <p:nvPr/>
-        </p:nvSpPr>
-        <p:spPr>
-          <a:xfrm>
-            <a:off x="6217920" y="1463040"/>
-            <a:ext cx="5303520" cy="2286000"/>
-          </a:xfrm>
-          <a:prstGeom prst="roundRect">
-            <a:avLst>
-              <a:gd name="adj" fmla="val 6000"/>
-            </a:avLst>
-          </a:prstGeom>
-          <a:solidFill>
-            <a:srgbClr val="F2F4F6"/>
-          </a:solidFill>
-          <a:ln>
-            <a:noFill/>
-          </a:ln>
-          <a:effectLst/>
-        </p:spPr>
-        <p:style>
-          <a:lnRef idx="1">
-            <a:schemeClr val="accent1"/>
-          </a:lnRef>
-          <a:fillRef idx="3">
-            <a:schemeClr val="accent1"/>
-          </a:fillRef>
-          <a:effectRef idx="2">
-            <a:schemeClr val="accent1"/>
-          </a:effectRef>
-          <a:fontRef idx="minor">
-            <a:schemeClr val="lt1"/>
-          </a:fontRef>
-        </p:style>
-        <p:txBody>
-          <a:bodyPr rtlCol="0" anchor="ctr"/>
-          <a:lstStyle/>
-          <a:p>
-            <a:pPr algn="ctr"/>
-          </a:p>
-        </p:txBody>
-      </p:sp>
-      <p:sp>
-        <p:nvSpPr>
-          <p:cNvPr id="11" name="TextBox 10"/>
-          <p:cNvSpPr txBox="1"/>
-          <p:nvPr/>
-        </p:nvSpPr>
-        <p:spPr>
-          <a:xfrm>
-            <a:off x="6446520" y="1591056"/>
-            <a:ext cx="4846320" cy="2029968"/>
-          </a:xfrm>
-          <a:prstGeom prst="rect">
-            <a:avLst/>
-          </a:prstGeom>
-          <a:noFill/>
-        </p:spPr>
-        <p:txBody>
-          <a:bodyPr wrap="square" anchor="t" lIns="0" rIns="0" tIns="0" bIns="0">
-            <a:spAutoFit/>
-          </a:bodyPr>
-          <a:lstStyle/>
-          <a:p>
-            <a:pPr algn="l">
-              <a:spcAft>
-                <a:spcPts val="400"/>
-              </a:spcAft>
-            </a:pPr>
-            <a:r>
-              <a:rPr sz="1300" b="1">
-                <a:solidFill>
-                  <a:srgbClr val="C00000"/>
-                </a:solidFill>
-                <a:latin typeface="Meiryo"/>
-                <a:ea typeface="Meiryo"/>
-              </a:rPr>
-              <a:t>仮申請の流れ(別紙「仮申請のご案内」)</a:t>
-            </a:r>
-          </a:p>
-          <a:p>
-            <a:pPr algn="l">
-              <a:spcAft>
-                <a:spcPts val="400"/>
-              </a:spcAft>
-            </a:pPr>
-            <a:r>
-              <a:rPr sz="1100" b="0">
-                <a:solidFill>
-                  <a:srgbClr val="1A1A1A"/>
-                </a:solidFill>
-                <a:latin typeface="Meiryo"/>
-                <a:ea typeface="Meiryo"/>
-              </a:rPr>
-              <a:t>・貴社担当者1名を事前登録し、品目ごとに申請。約1週間で可否を回答</a:t>
-            </a:r>
-          </a:p>
-          <a:p>
-            <a:pPr algn="l">
-              <a:spcAft>
-                <a:spcPts val="400"/>
-              </a:spcAft>
-            </a:pPr>
-            <a:r>
-              <a:rPr sz="1100" b="0">
-                <a:solidFill>
-                  <a:srgbClr val="1A1A1A"/>
-                </a:solidFill>
-                <a:latin typeface="Meiryo"/>
-                <a:ea typeface="Meiryo"/>
-              </a:rPr>
-              <a:t>・入力項目は企画商品名(「ノベルティ ○○」の表記)、キャラクター、商品カテゴリー、製造原価単価、予定数量、材質・サイズなど</a:t>
-            </a:r>
-          </a:p>
-          <a:p>
-            <a:pPr algn="l">
-              <a:spcAft>
-                <a:spcPts val="400"/>
-              </a:spcAft>
-            </a:pPr>
-            <a:r>
-              <a:rPr sz="1100" b="0">
-                <a:solidFill>
-                  <a:srgbClr val="1A1A1A"/>
-                </a:solidFill>
-                <a:latin typeface="Meiryo"/>
-                <a:ea typeface="Meiryo"/>
-              </a:rPr>
-              <a:t>・配布物は商品カテゴリー1〜16、会場装飾は店舗備品として申請</a:t>
-            </a:r>
-          </a:p>
-          <a:p>
-            <a:pPr algn="l">
-              <a:spcAft>
-                <a:spcPts val="400"/>
-              </a:spcAft>
-            </a:pPr>
-            <a:r>
-              <a:rPr sz="1100" b="0">
-                <a:solidFill>
-                  <a:srgbClr val="1A1A1A"/>
-                </a:solidFill>
-                <a:latin typeface="Meiryo"/>
-                <a:ea typeface="Meiryo"/>
-              </a:rPr>
-              <a:t>・作成許諾ロイヤリティは作成費用の20%(製造原価単価×数量)</a:t>
-            </a:r>
-          </a:p>
-        </p:txBody>
-      </p:sp>
-      <p:sp>
-        <p:nvSpPr>
-          <p:cNvPr id="12" name="Rounded Rectangle 11"/>
-          <p:cNvSpPr/>
-          <p:nvPr/>
-        </p:nvSpPr>
-        <p:spPr>
-          <a:xfrm>
-            <a:off x="640080" y="3931920"/>
-            <a:ext cx="5303520" cy="2103120"/>
-          </a:xfrm>
-          <a:prstGeom prst="roundRect">
-            <a:avLst>
-              <a:gd name="adj" fmla="val 6000"/>
-            </a:avLst>
-          </a:prstGeom>
-          <a:solidFill>
-            <a:srgbClr val="F2F4F6"/>
-          </a:solidFill>
-          <a:ln>
-            <a:noFill/>
-          </a:ln>
-          <a:effectLst/>
-        </p:spPr>
-        <p:style>
-          <a:lnRef idx="1">
-            <a:schemeClr val="accent1"/>
-          </a:lnRef>
-          <a:fillRef idx="3">
-            <a:schemeClr val="accent1"/>
-          </a:fillRef>
-          <a:effectRef idx="2">
-            <a:schemeClr val="accent1"/>
-          </a:effectRef>
-          <a:fontRef idx="minor">
-            <a:schemeClr val="lt1"/>
-          </a:fontRef>
-        </p:style>
-        <p:txBody>
-          <a:bodyPr rtlCol="0" anchor="ctr"/>
-          <a:lstStyle/>
-          <a:p>
-            <a:pPr algn="ctr"/>
-          </a:p>
-        </p:txBody>
-      </p:sp>
-      <p:sp>
-        <p:nvSpPr>
-          <p:cNvPr id="13" name="TextBox 12"/>
-          <p:cNvSpPr txBox="1"/>
-          <p:nvPr/>
-        </p:nvSpPr>
-        <p:spPr>
-          <a:xfrm>
-            <a:off x="868680" y="4059936"/>
-            <a:ext cx="4846320" cy="1847088"/>
-          </a:xfrm>
-          <a:prstGeom prst="rect">
-            <a:avLst/>
-          </a:prstGeom>
-          <a:noFill/>
-        </p:spPr>
-        <p:txBody>
-          <a:bodyPr wrap="square" anchor="t" lIns="0" rIns="0" tIns="0" bIns="0">
-            <a:spAutoFit/>
-          </a:bodyPr>
-          <a:lstStyle/>
-          <a:p>
-            <a:pPr algn="l">
-              <a:spcAft>
-                <a:spcPts val="400"/>
-              </a:spcAft>
-            </a:pPr>
-            <a:r>
-              <a:rPr sz="1300" b="1">
-                <a:solidFill>
-                  <a:srgbClr val="C00000"/>
-                </a:solidFill>
-                <a:latin typeface="Meiryo"/>
-                <a:ea typeface="Meiryo"/>
-              </a:rPr>
-              <a:t>ノベルティのカテゴリー</a:t>
-            </a:r>
-          </a:p>
-          <a:p>
-            <a:pPr algn="l">
-              <a:spcAft>
-                <a:spcPts val="400"/>
-              </a:spcAft>
-            </a:pPr>
-            <a:r>
-              <a:rPr sz="1100" b="0">
-                <a:solidFill>
-                  <a:srgbClr val="1A1A1A"/>
-                </a:solidFill>
-                <a:latin typeface="Meiryo"/>
-                <a:ea typeface="Meiryo"/>
-              </a:rPr>
-              <a:t>・制作できるもの:トートバッグ、タオル、BOXティッシュなど(キャンペーンデザイン使用)</a:t>
-            </a:r>
-          </a:p>
-          <a:p>
-            <a:pPr algn="l">
-              <a:spcAft>
-                <a:spcPts val="400"/>
-              </a:spcAft>
-            </a:pPr>
-            <a:r>
-              <a:rPr sz="1100" b="0">
-                <a:solidFill>
-                  <a:srgbClr val="1A1A1A"/>
-                </a:solidFill>
-                <a:latin typeface="Meiryo"/>
-                <a:ea typeface="Meiryo"/>
-              </a:rPr>
-              <a:t>・制作できないもの:お子様向け玩具(フィギュア・ソフビ等)、菓子類、ランチボックスなど</a:t>
-            </a:r>
-          </a:p>
-          <a:p>
-            <a:pPr algn="l">
-              <a:spcAft>
-                <a:spcPts val="400"/>
-              </a:spcAft>
-            </a:pPr>
-            <a:r>
-              <a:rPr sz="1100" b="0">
-                <a:solidFill>
-                  <a:srgbClr val="1A1A1A"/>
-                </a:solidFill>
-                <a:latin typeface="Meiryo"/>
-                <a:ea typeface="Meiryo"/>
-              </a:rPr>
-              <a:t>・タオルは一般的な仕様で(ループタオル・ミニタオルは避ける)</a:t>
-            </a:r>
-          </a:p>
-        </p:txBody>
-      </p:sp>
-      <p:sp>
-        <p:nvSpPr>
-          <p:cNvPr id="14" name="Rounded Rectangle 13"/>
-          <p:cNvSpPr/>
-          <p:nvPr/>
-        </p:nvSpPr>
-        <p:spPr>
-          <a:xfrm>
-            <a:off x="6217920" y="3931920"/>
-            <a:ext cx="5303520" cy="2103120"/>
-          </a:xfrm>
-          <a:prstGeom prst="roundRect">
-            <a:avLst>
-              <a:gd name="adj" fmla="val 6000"/>
-            </a:avLst>
-          </a:prstGeom>
-          <a:solidFill>
-            <a:srgbClr val="F2F4F6"/>
-          </a:solidFill>
-          <a:ln>
-            <a:noFill/>
-          </a:ln>
-          <a:effectLst/>
-        </p:spPr>
-        <p:style>
-          <a:lnRef idx="1">
-            <a:schemeClr val="accent1"/>
-          </a:lnRef>
-          <a:fillRef idx="3">
-            <a:schemeClr val="accent1"/>
-          </a:fillRef>
-          <a:effectRef idx="2">
-            <a:schemeClr val="accent1"/>
-          </a:effectRef>
-          <a:fontRef idx="minor">
-            <a:schemeClr val="lt1"/>
-          </a:fontRef>
-        </p:style>
-        <p:txBody>
-          <a:bodyPr rtlCol="0" anchor="ctr"/>
-          <a:lstStyle/>
-          <a:p>
-            <a:pPr algn="ctr"/>
-          </a:p>
-        </p:txBody>
-      </p:sp>
-      <p:sp>
-        <p:nvSpPr>
-          <p:cNvPr id="15" name="TextBox 14"/>
-          <p:cNvSpPr txBox="1"/>
-          <p:nvPr/>
-        </p:nvSpPr>
-        <p:spPr>
-          <a:xfrm>
-            <a:off x="6446520" y="4059936"/>
-            <a:ext cx="4846320" cy="1847088"/>
-          </a:xfrm>
-          <a:prstGeom prst="rect">
-            <a:avLst/>
-          </a:prstGeom>
-          <a:noFill/>
-        </p:spPr>
-        <p:txBody>
-          <a:bodyPr wrap="square" anchor="t" lIns="0" rIns="0" tIns="0" bIns="0">
-            <a:spAutoFit/>
-          </a:bodyPr>
-          <a:lstStyle/>
-          <a:p>
-            <a:pPr algn="l">
-              <a:spcAft>
-                <a:spcPts val="400"/>
-              </a:spcAft>
-            </a:pPr>
-            <a:r>
-              <a:rPr sz="1300" b="1">
-                <a:solidFill>
-                  <a:srgbClr val="C00000"/>
-                </a:solidFill>
-                <a:latin typeface="Meiryo"/>
-                <a:ea typeface="Meiryo"/>
-              </a:rPr>
-              <a:t>修了証・配布物</a:t>
-            </a:r>
-          </a:p>
-          <a:p>
-            <a:pPr algn="l">
-              <a:spcAft>
-                <a:spcPts val="400"/>
-              </a:spcAft>
-            </a:pPr>
-            <a:r>
-              <a:rPr sz="1100" b="0">
-                <a:solidFill>
-                  <a:srgbClr val="1A1A1A"/>
-                </a:solidFill>
-                <a:latin typeface="Meiryo"/>
-                <a:ea typeface="Meiryo"/>
-              </a:rPr>
-              <a:t>・既存の修了証は当社の別イベント用のため、本件では使わない</a:t>
-            </a:r>
-          </a:p>
-          <a:p>
-            <a:pPr algn="l">
-              <a:spcAft>
-                <a:spcPts val="400"/>
-              </a:spcAft>
-            </a:pPr>
-            <a:r>
-              <a:rPr sz="1100" b="0">
-                <a:solidFill>
-                  <a:srgbClr val="1A1A1A"/>
-                </a:solidFill>
-                <a:latin typeface="Meiryo"/>
-                <a:ea typeface="Meiryo"/>
-              </a:rPr>
-              <a:t>・案A:貴社のミッション(クイズ等)と連動したオリジナル修了証を貴社で制作</a:t>
-            </a:r>
-          </a:p>
-          <a:p>
-            <a:pPr algn="l">
-              <a:spcAft>
-                <a:spcPts val="400"/>
-              </a:spcAft>
-            </a:pPr>
-            <a:r>
-              <a:rPr sz="1100" b="0">
-                <a:solidFill>
-                  <a:srgbClr val="1A1A1A"/>
-                </a:solidFill>
-                <a:latin typeface="Meiryo"/>
-                <a:ea typeface="Meiryo"/>
-              </a:rPr>
-              <a:t>・案B:キャンペーンビジュアルのステッカーを貴社で制作し、来場者全員に配布</a:t>
-            </a:r>
-          </a:p>
-          <a:p>
-            <a:pPr algn="l">
-              <a:spcAft>
-                <a:spcPts val="400"/>
-              </a:spcAft>
-            </a:pPr>
-            <a:r>
-              <a:rPr sz="1100" b="0">
-                <a:solidFill>
-                  <a:srgbClr val="1A1A1A"/>
-                </a:solidFill>
-                <a:latin typeface="Meiryo"/>
-                <a:ea typeface="Meiryo"/>
-              </a:rPr>
-              <a:t>・体験型か告知型か、配布の目的に合わせて選択</a:t>
+              <a:t>・出演キャラクターは月別シフト表でご案内。北関東は2027年1〜3月は実施不可(4月以降は可)</a:t>
             </a:r>
           </a:p>
         </p:txBody>
@@ -6222,7 +6971,7 @@
                 <a:latin typeface="Meiryo"/>
                 <a:ea typeface="Meiryo"/>
               </a:rPr>
-              <a:t>4. スケジュール</a:t>
+              <a:t>4. 制作物と権利の進め方</a:t>
             </a:r>
           </a:p>
         </p:txBody>
@@ -6262,7 +7011,7 @@
                 <a:latin typeface="Meiryo"/>
                 <a:ea typeface="Meiryo"/>
               </a:rPr>
-              <a:t>2027年1月開始からの逆算</a:t>
+              <a:t>キャンペーンビジュアルを決めてから、品目ごとに仮申請で制作物を確定していきます</a:t>
             </a:r>
           </a:p>
         </p:txBody>
@@ -6383,6 +7132,847 @@
                 <a:ea typeface="Meiryo"/>
               </a:rPr>
               <a:t>12</a:t>
+            </a:r>
+          </a:p>
+        </p:txBody>
+      </p:sp>
+      <p:sp>
+        <p:nvSpPr>
+          <p:cNvPr id="8" name="Rounded Rectangle 7"/>
+          <p:cNvSpPr/>
+          <p:nvPr/>
+        </p:nvSpPr>
+        <p:spPr>
+          <a:xfrm>
+            <a:off x="640080" y="1463040"/>
+            <a:ext cx="5303520" cy="2286000"/>
+          </a:xfrm>
+          <a:prstGeom prst="roundRect">
+            <a:avLst>
+              <a:gd name="adj" fmla="val 6000"/>
+            </a:avLst>
+          </a:prstGeom>
+          <a:solidFill>
+            <a:srgbClr val="F2F4F6"/>
+          </a:solidFill>
+          <a:ln>
+            <a:noFill/>
+          </a:ln>
+          <a:effectLst/>
+        </p:spPr>
+        <p:style>
+          <a:lnRef idx="1">
+            <a:schemeClr val="accent1"/>
+          </a:lnRef>
+          <a:fillRef idx="3">
+            <a:schemeClr val="accent1"/>
+          </a:fillRef>
+          <a:effectRef idx="2">
+            <a:schemeClr val="accent1"/>
+          </a:effectRef>
+          <a:fontRef idx="minor">
+            <a:schemeClr val="lt1"/>
+          </a:fontRef>
+        </p:style>
+        <p:txBody>
+          <a:bodyPr rtlCol="0" anchor="ctr"/>
+          <a:lstStyle/>
+          <a:p>
+            <a:pPr algn="ctr"/>
+          </a:p>
+        </p:txBody>
+      </p:sp>
+      <p:sp>
+        <p:nvSpPr>
+          <p:cNvPr id="9" name="TextBox 8"/>
+          <p:cNvSpPr txBox="1"/>
+          <p:nvPr/>
+        </p:nvSpPr>
+        <p:spPr>
+          <a:xfrm>
+            <a:off x="868680" y="1591056"/>
+            <a:ext cx="4846320" cy="2029968"/>
+          </a:xfrm>
+          <a:prstGeom prst="rect">
+            <a:avLst/>
+          </a:prstGeom>
+          <a:noFill/>
+        </p:spPr>
+        <p:txBody>
+          <a:bodyPr wrap="square" anchor="t" lIns="0" rIns="0" tIns="0" bIns="0">
+            <a:spAutoFit/>
+          </a:bodyPr>
+          <a:lstStyle/>
+          <a:p>
+            <a:pPr algn="l">
+              <a:spcAft>
+                <a:spcPts val="400"/>
+              </a:spcAft>
+            </a:pPr>
+            <a:r>
+              <a:rPr sz="1300" b="1">
+                <a:solidFill>
+                  <a:srgbClr val="C00000"/>
+                </a:solidFill>
+                <a:latin typeface="Meiryo"/>
+                <a:ea typeface="Meiryo"/>
+              </a:rPr>
+              <a:t>キャンペーン名称・KVの策定(11月中)</a:t>
+            </a:r>
+          </a:p>
+          <a:p>
+            <a:pPr algn="l">
+              <a:spcAft>
+                <a:spcPts val="400"/>
+              </a:spcAft>
+            </a:pPr>
+            <a:r>
+              <a:rPr sz="1100" b="0">
+                <a:solidFill>
+                  <a:srgbClr val="1A1A1A"/>
+                </a:solidFill>
+                <a:latin typeface="Meiryo"/>
+                <a:ea typeface="Meiryo"/>
+              </a:rPr>
+              <a:t>・KVは貴社で制作(当社で受託することも可能)</a:t>
+            </a:r>
+          </a:p>
+          <a:p>
+            <a:pPr algn="l">
+              <a:spcAft>
+                <a:spcPts val="400"/>
+              </a:spcAft>
+            </a:pPr>
+            <a:r>
+              <a:rPr sz="1100" b="0">
+                <a:solidFill>
+                  <a:srgbClr val="1A1A1A"/>
+                </a:solidFill>
+                <a:latin typeface="Meiryo"/>
+                <a:ea typeface="Meiryo"/>
+              </a:rPr>
+              <a:t>・撮影会の背景バナーは、キャラクターなしの背景素材(青空・宇宙)を当社から提供</a:t>
+            </a:r>
+          </a:p>
+          <a:p>
+            <a:pPr algn="l">
+              <a:spcAft>
+                <a:spcPts val="400"/>
+              </a:spcAft>
+            </a:pPr>
+            <a:r>
+              <a:rPr sz="1100" b="0">
+                <a:solidFill>
+                  <a:srgbClr val="1A1A1A"/>
+                </a:solidFill>
+                <a:latin typeface="Meiryo"/>
+                <a:ea typeface="Meiryo"/>
+              </a:rPr>
+              <a:t>・会場装飾と告知物には集合ビジュアル(調整版)、個体素材、ブランドロゴ</a:t>
+            </a:r>
+          </a:p>
+          <a:p>
+            <a:pPr algn="l">
+              <a:spcAft>
+                <a:spcPts val="400"/>
+              </a:spcAft>
+            </a:pPr>
+            <a:r>
+              <a:rPr sz="1100" b="0">
+                <a:solidFill>
+                  <a:srgbClr val="1A1A1A"/>
+                </a:solidFill>
+                <a:latin typeface="Meiryo"/>
+                <a:ea typeface="Meiryo"/>
+              </a:rPr>
+              <a:t>・監修は当社の制作物窓口へ。春節前の量産(1月末)から逆算し、11月中に確定</a:t>
+            </a:r>
+          </a:p>
+        </p:txBody>
+      </p:sp>
+      <p:sp>
+        <p:nvSpPr>
+          <p:cNvPr id="10" name="Rounded Rectangle 9"/>
+          <p:cNvSpPr/>
+          <p:nvPr/>
+        </p:nvSpPr>
+        <p:spPr>
+          <a:xfrm>
+            <a:off x="6217920" y="1463040"/>
+            <a:ext cx="5303520" cy="2286000"/>
+          </a:xfrm>
+          <a:prstGeom prst="roundRect">
+            <a:avLst>
+              <a:gd name="adj" fmla="val 6000"/>
+            </a:avLst>
+          </a:prstGeom>
+          <a:solidFill>
+            <a:srgbClr val="F2F4F6"/>
+          </a:solidFill>
+          <a:ln>
+            <a:noFill/>
+          </a:ln>
+          <a:effectLst/>
+        </p:spPr>
+        <p:style>
+          <a:lnRef idx="1">
+            <a:schemeClr val="accent1"/>
+          </a:lnRef>
+          <a:fillRef idx="3">
+            <a:schemeClr val="accent1"/>
+          </a:fillRef>
+          <a:effectRef idx="2">
+            <a:schemeClr val="accent1"/>
+          </a:effectRef>
+          <a:fontRef idx="minor">
+            <a:schemeClr val="lt1"/>
+          </a:fontRef>
+        </p:style>
+        <p:txBody>
+          <a:bodyPr rtlCol="0" anchor="ctr"/>
+          <a:lstStyle/>
+          <a:p>
+            <a:pPr algn="ctr"/>
+          </a:p>
+        </p:txBody>
+      </p:sp>
+      <p:sp>
+        <p:nvSpPr>
+          <p:cNvPr id="11" name="TextBox 10"/>
+          <p:cNvSpPr txBox="1"/>
+          <p:nvPr/>
+        </p:nvSpPr>
+        <p:spPr>
+          <a:xfrm>
+            <a:off x="6446520" y="1591056"/>
+            <a:ext cx="4846320" cy="2029968"/>
+          </a:xfrm>
+          <a:prstGeom prst="rect">
+            <a:avLst/>
+          </a:prstGeom>
+          <a:noFill/>
+        </p:spPr>
+        <p:txBody>
+          <a:bodyPr wrap="square" anchor="t" lIns="0" rIns="0" tIns="0" bIns="0">
+            <a:spAutoFit/>
+          </a:bodyPr>
+          <a:lstStyle/>
+          <a:p>
+            <a:pPr algn="l">
+              <a:spcAft>
+                <a:spcPts val="400"/>
+              </a:spcAft>
+            </a:pPr>
+            <a:r>
+              <a:rPr sz="1300" b="1">
+                <a:solidFill>
+                  <a:srgbClr val="C00000"/>
+                </a:solidFill>
+                <a:latin typeface="Meiryo"/>
+                <a:ea typeface="Meiryo"/>
+              </a:rPr>
+              <a:t>仮申請の流れ(別紙「仮申請のご案内」)</a:t>
+            </a:r>
+          </a:p>
+          <a:p>
+            <a:pPr algn="l">
+              <a:spcAft>
+                <a:spcPts val="400"/>
+              </a:spcAft>
+            </a:pPr>
+            <a:r>
+              <a:rPr sz="1100" b="0">
+                <a:solidFill>
+                  <a:srgbClr val="1A1A1A"/>
+                </a:solidFill>
+                <a:latin typeface="Meiryo"/>
+                <a:ea typeface="Meiryo"/>
+              </a:rPr>
+              <a:t>・貴社担当者1名を事前登録し、品目ごとに申請。約1週間で可否を回答</a:t>
+            </a:r>
+          </a:p>
+          <a:p>
+            <a:pPr algn="l">
+              <a:spcAft>
+                <a:spcPts val="400"/>
+              </a:spcAft>
+            </a:pPr>
+            <a:r>
+              <a:rPr sz="1100" b="0">
+                <a:solidFill>
+                  <a:srgbClr val="1A1A1A"/>
+                </a:solidFill>
+                <a:latin typeface="Meiryo"/>
+                <a:ea typeface="Meiryo"/>
+              </a:rPr>
+              <a:t>・入力項目は企画商品名(「ノベルティ ○○」の表記)、キャラクター、商品カテゴリー、製造原価単価、予定数量、材質・サイズなど</a:t>
+            </a:r>
+          </a:p>
+          <a:p>
+            <a:pPr algn="l">
+              <a:spcAft>
+                <a:spcPts val="400"/>
+              </a:spcAft>
+            </a:pPr>
+            <a:r>
+              <a:rPr sz="1100" b="0">
+                <a:solidFill>
+                  <a:srgbClr val="1A1A1A"/>
+                </a:solidFill>
+                <a:latin typeface="Meiryo"/>
+                <a:ea typeface="Meiryo"/>
+              </a:rPr>
+              <a:t>・配布物は商品カテゴリー1〜16、会場装飾は店舗備品として申請</a:t>
+            </a:r>
+          </a:p>
+          <a:p>
+            <a:pPr algn="l">
+              <a:spcAft>
+                <a:spcPts val="400"/>
+              </a:spcAft>
+            </a:pPr>
+            <a:r>
+              <a:rPr sz="1100" b="0">
+                <a:solidFill>
+                  <a:srgbClr val="1A1A1A"/>
+                </a:solidFill>
+                <a:latin typeface="Meiryo"/>
+                <a:ea typeface="Meiryo"/>
+              </a:rPr>
+              <a:t>・作成許諾ロイヤリティは作成費用の20%(製造原価単価×数量)</a:t>
+            </a:r>
+          </a:p>
+        </p:txBody>
+      </p:sp>
+      <p:sp>
+        <p:nvSpPr>
+          <p:cNvPr id="12" name="Rounded Rectangle 11"/>
+          <p:cNvSpPr/>
+          <p:nvPr/>
+        </p:nvSpPr>
+        <p:spPr>
+          <a:xfrm>
+            <a:off x="640080" y="3931920"/>
+            <a:ext cx="5303520" cy="2103120"/>
+          </a:xfrm>
+          <a:prstGeom prst="roundRect">
+            <a:avLst>
+              <a:gd name="adj" fmla="val 6000"/>
+            </a:avLst>
+          </a:prstGeom>
+          <a:solidFill>
+            <a:srgbClr val="F2F4F6"/>
+          </a:solidFill>
+          <a:ln>
+            <a:noFill/>
+          </a:ln>
+          <a:effectLst/>
+        </p:spPr>
+        <p:style>
+          <a:lnRef idx="1">
+            <a:schemeClr val="accent1"/>
+          </a:lnRef>
+          <a:fillRef idx="3">
+            <a:schemeClr val="accent1"/>
+          </a:fillRef>
+          <a:effectRef idx="2">
+            <a:schemeClr val="accent1"/>
+          </a:effectRef>
+          <a:fontRef idx="minor">
+            <a:schemeClr val="lt1"/>
+          </a:fontRef>
+        </p:style>
+        <p:txBody>
+          <a:bodyPr rtlCol="0" anchor="ctr"/>
+          <a:lstStyle/>
+          <a:p>
+            <a:pPr algn="ctr"/>
+          </a:p>
+        </p:txBody>
+      </p:sp>
+      <p:sp>
+        <p:nvSpPr>
+          <p:cNvPr id="13" name="TextBox 12"/>
+          <p:cNvSpPr txBox="1"/>
+          <p:nvPr/>
+        </p:nvSpPr>
+        <p:spPr>
+          <a:xfrm>
+            <a:off x="868680" y="4059936"/>
+            <a:ext cx="4846320" cy="1847088"/>
+          </a:xfrm>
+          <a:prstGeom prst="rect">
+            <a:avLst/>
+          </a:prstGeom>
+          <a:noFill/>
+        </p:spPr>
+        <p:txBody>
+          <a:bodyPr wrap="square" anchor="t" lIns="0" rIns="0" tIns="0" bIns="0">
+            <a:spAutoFit/>
+          </a:bodyPr>
+          <a:lstStyle/>
+          <a:p>
+            <a:pPr algn="l">
+              <a:spcAft>
+                <a:spcPts val="400"/>
+              </a:spcAft>
+            </a:pPr>
+            <a:r>
+              <a:rPr sz="1300" b="1">
+                <a:solidFill>
+                  <a:srgbClr val="C00000"/>
+                </a:solidFill>
+                <a:latin typeface="Meiryo"/>
+                <a:ea typeface="Meiryo"/>
+              </a:rPr>
+              <a:t>ノベルティのカテゴリー</a:t>
+            </a:r>
+          </a:p>
+          <a:p>
+            <a:pPr algn="l">
+              <a:spcAft>
+                <a:spcPts val="400"/>
+              </a:spcAft>
+            </a:pPr>
+            <a:r>
+              <a:rPr sz="1100" b="0">
+                <a:solidFill>
+                  <a:srgbClr val="1A1A1A"/>
+                </a:solidFill>
+                <a:latin typeface="Meiryo"/>
+                <a:ea typeface="Meiryo"/>
+              </a:rPr>
+              <a:t>・制作できるもの:トートバッグ、タオル、BOXティッシュなど(キャンペーンデザイン使用)</a:t>
+            </a:r>
+          </a:p>
+          <a:p>
+            <a:pPr algn="l">
+              <a:spcAft>
+                <a:spcPts val="400"/>
+              </a:spcAft>
+            </a:pPr>
+            <a:r>
+              <a:rPr sz="1100" b="0">
+                <a:solidFill>
+                  <a:srgbClr val="1A1A1A"/>
+                </a:solidFill>
+                <a:latin typeface="Meiryo"/>
+                <a:ea typeface="Meiryo"/>
+              </a:rPr>
+              <a:t>・制作できないもの:お子様向け玩具(フィギュア・ソフビ等)、菓子類、ランチボックスなど</a:t>
+            </a:r>
+          </a:p>
+          <a:p>
+            <a:pPr algn="l">
+              <a:spcAft>
+                <a:spcPts val="400"/>
+              </a:spcAft>
+            </a:pPr>
+            <a:r>
+              <a:rPr sz="1100" b="0">
+                <a:solidFill>
+                  <a:srgbClr val="1A1A1A"/>
+                </a:solidFill>
+                <a:latin typeface="Meiryo"/>
+                <a:ea typeface="Meiryo"/>
+              </a:rPr>
+              <a:t>・タオルは一般的な仕様で(ループタオル・ミニタオルは避ける)</a:t>
+            </a:r>
+          </a:p>
+        </p:txBody>
+      </p:sp>
+      <p:sp>
+        <p:nvSpPr>
+          <p:cNvPr id="14" name="Rounded Rectangle 13"/>
+          <p:cNvSpPr/>
+          <p:nvPr/>
+        </p:nvSpPr>
+        <p:spPr>
+          <a:xfrm>
+            <a:off x="6217920" y="3931920"/>
+            <a:ext cx="5303520" cy="2103120"/>
+          </a:xfrm>
+          <a:prstGeom prst="roundRect">
+            <a:avLst>
+              <a:gd name="adj" fmla="val 6000"/>
+            </a:avLst>
+          </a:prstGeom>
+          <a:solidFill>
+            <a:srgbClr val="F2F4F6"/>
+          </a:solidFill>
+          <a:ln>
+            <a:noFill/>
+          </a:ln>
+          <a:effectLst/>
+        </p:spPr>
+        <p:style>
+          <a:lnRef idx="1">
+            <a:schemeClr val="accent1"/>
+          </a:lnRef>
+          <a:fillRef idx="3">
+            <a:schemeClr val="accent1"/>
+          </a:fillRef>
+          <a:effectRef idx="2">
+            <a:schemeClr val="accent1"/>
+          </a:effectRef>
+          <a:fontRef idx="minor">
+            <a:schemeClr val="lt1"/>
+          </a:fontRef>
+        </p:style>
+        <p:txBody>
+          <a:bodyPr rtlCol="0" anchor="ctr"/>
+          <a:lstStyle/>
+          <a:p>
+            <a:pPr algn="ctr"/>
+          </a:p>
+        </p:txBody>
+      </p:sp>
+      <p:sp>
+        <p:nvSpPr>
+          <p:cNvPr id="15" name="TextBox 14"/>
+          <p:cNvSpPr txBox="1"/>
+          <p:nvPr/>
+        </p:nvSpPr>
+        <p:spPr>
+          <a:xfrm>
+            <a:off x="6446520" y="4059936"/>
+            <a:ext cx="4846320" cy="1847088"/>
+          </a:xfrm>
+          <a:prstGeom prst="rect">
+            <a:avLst/>
+          </a:prstGeom>
+          <a:noFill/>
+        </p:spPr>
+        <p:txBody>
+          <a:bodyPr wrap="square" anchor="t" lIns="0" rIns="0" tIns="0" bIns="0">
+            <a:spAutoFit/>
+          </a:bodyPr>
+          <a:lstStyle/>
+          <a:p>
+            <a:pPr algn="l">
+              <a:spcAft>
+                <a:spcPts val="400"/>
+              </a:spcAft>
+            </a:pPr>
+            <a:r>
+              <a:rPr sz="1300" b="1">
+                <a:solidFill>
+                  <a:srgbClr val="C00000"/>
+                </a:solidFill>
+                <a:latin typeface="Meiryo"/>
+                <a:ea typeface="Meiryo"/>
+              </a:rPr>
+              <a:t>修了証・配布物</a:t>
+            </a:r>
+          </a:p>
+          <a:p>
+            <a:pPr algn="l">
+              <a:spcAft>
+                <a:spcPts val="400"/>
+              </a:spcAft>
+            </a:pPr>
+            <a:r>
+              <a:rPr sz="1100" b="0">
+                <a:solidFill>
+                  <a:srgbClr val="1A1A1A"/>
+                </a:solidFill>
+                <a:latin typeface="Meiryo"/>
+                <a:ea typeface="Meiryo"/>
+              </a:rPr>
+              <a:t>・既存の修了証は当社の別イベント用のため、本件では使わない</a:t>
+            </a:r>
+          </a:p>
+          <a:p>
+            <a:pPr algn="l">
+              <a:spcAft>
+                <a:spcPts val="400"/>
+              </a:spcAft>
+            </a:pPr>
+            <a:r>
+              <a:rPr sz="1100" b="0">
+                <a:solidFill>
+                  <a:srgbClr val="1A1A1A"/>
+                </a:solidFill>
+                <a:latin typeface="Meiryo"/>
+                <a:ea typeface="Meiryo"/>
+              </a:rPr>
+              <a:t>・案A:貴社のミッション(クイズ等)と連動したオリジナル修了証を貴社で制作</a:t>
+            </a:r>
+          </a:p>
+          <a:p>
+            <a:pPr algn="l">
+              <a:spcAft>
+                <a:spcPts val="400"/>
+              </a:spcAft>
+            </a:pPr>
+            <a:r>
+              <a:rPr sz="1100" b="0">
+                <a:solidFill>
+                  <a:srgbClr val="1A1A1A"/>
+                </a:solidFill>
+                <a:latin typeface="Meiryo"/>
+                <a:ea typeface="Meiryo"/>
+              </a:rPr>
+              <a:t>・案B:キャンペーンビジュアルのステッカーを貴社で制作し、来場者全員に配布</a:t>
+            </a:r>
+          </a:p>
+          <a:p>
+            <a:pPr algn="l">
+              <a:spcAft>
+                <a:spcPts val="400"/>
+              </a:spcAft>
+            </a:pPr>
+            <a:r>
+              <a:rPr sz="1100" b="0">
+                <a:solidFill>
+                  <a:srgbClr val="1A1A1A"/>
+                </a:solidFill>
+                <a:latin typeface="Meiryo"/>
+                <a:ea typeface="Meiryo"/>
+              </a:rPr>
+              <a:t>・体験型か告知型か、配布の目的に合わせて選択</a:t>
+            </a:r>
+          </a:p>
+        </p:txBody>
+      </p:sp>
+    </p:spTree>
+  </p:cSld>
+  <p:clrMapOvr>
+    <a:masterClrMapping/>
+  </p:clrMapOvr>
+</p:sld>
+</file>
+
+<file path=ppt/slides/slide13.xml><?xml version="1.0" encoding="utf-8"?>
+<p:sld xmlns:a="http://schemas.openxmlformats.org/drawingml/2006/main" xmlns:p="http://schemas.openxmlformats.org/presentationml/2006/main" xmlns:r="http://schemas.openxmlformats.org/officeDocument/2006/relationships">
+  <p:cSld>
+    <p:spTree>
+      <p:nvGrpSpPr>
+        <p:cNvPr id="1" name=""/>
+        <p:cNvGrpSpPr/>
+        <p:nvPr/>
+      </p:nvGrpSpPr>
+      <p:grpSpPr/>
+      <p:pic>
+        <p:nvPicPr>
+          <p:cNvPr id="2" name="Picture 1" descr="band_header.png"/>
+          <p:cNvPicPr>
+            <a:picLocks noChangeAspect="1"/>
+          </p:cNvPicPr>
+          <p:nvPr/>
+        </p:nvPicPr>
+        <p:blipFill>
+          <a:blip r:embed="rId2"/>
+          <a:stretch>
+            <a:fillRect/>
+          </a:stretch>
+        </p:blipFill>
+        <p:spPr>
+          <a:xfrm>
+            <a:off x="0" y="0"/>
+            <a:ext cx="12191695" cy="786384"/>
+          </a:xfrm>
+          <a:prstGeom prst="rect">
+            <a:avLst/>
+          </a:prstGeom>
+        </p:spPr>
+      </p:pic>
+      <p:sp>
+        <p:nvSpPr>
+          <p:cNvPr id="3" name="TextBox 2"/>
+          <p:cNvSpPr txBox="1"/>
+          <p:nvPr/>
+        </p:nvSpPr>
+        <p:spPr>
+          <a:xfrm>
+            <a:off x="457200" y="73152"/>
+            <a:ext cx="10241280" cy="640080"/>
+          </a:xfrm>
+          <a:prstGeom prst="rect">
+            <a:avLst/>
+          </a:prstGeom>
+          <a:noFill/>
+        </p:spPr>
+        <p:txBody>
+          <a:bodyPr wrap="square" anchor="ctr" lIns="0" rIns="0" tIns="0" bIns="0">
+            <a:spAutoFit/>
+          </a:bodyPr>
+          <a:lstStyle/>
+          <a:p>
+            <a:pPr algn="l">
+              <a:spcAft>
+                <a:spcPts val="500"/>
+              </a:spcAft>
+            </a:pPr>
+            <a:r>
+              <a:rPr sz="2100" b="1">
+                <a:solidFill>
+                  <a:srgbClr val="FFFFFF"/>
+                </a:solidFill>
+                <a:latin typeface="Meiryo"/>
+                <a:ea typeface="Meiryo"/>
+              </a:rPr>
+              <a:t>4. スケジュール</a:t>
+            </a:r>
+          </a:p>
+        </p:txBody>
+      </p:sp>
+      <p:sp>
+        <p:nvSpPr>
+          <p:cNvPr id="4" name="TextBox 3"/>
+          <p:cNvSpPr txBox="1"/>
+          <p:nvPr/>
+        </p:nvSpPr>
+        <p:spPr>
+          <a:xfrm>
+            <a:off x="502920" y="896112"/>
+            <a:ext cx="11155680" cy="365760"/>
+          </a:xfrm>
+          <a:prstGeom prst="rect">
+            <a:avLst/>
+          </a:prstGeom>
+          <a:noFill/>
+        </p:spPr>
+        <p:txBody>
+          <a:bodyPr wrap="square" anchor="t" lIns="0" rIns="0" tIns="0" bIns="0">
+            <a:spAutoFit/>
+          </a:bodyPr>
+          <a:lstStyle/>
+          <a:p>
+            <a:pPr algn="l">
+              <a:spcAft>
+                <a:spcPts val="500"/>
+              </a:spcAft>
+            </a:pPr>
+            <a:r>
+              <a:rPr sz="1250" b="0">
+                <a:solidFill>
+                  <a:srgbClr val="5A626B"/>
+                </a:solidFill>
+                <a:latin typeface="Meiryo"/>
+                <a:ea typeface="Meiryo"/>
+              </a:rPr>
+              <a:t>2027年1月開始からの逆算</a:t>
+            </a:r>
+          </a:p>
+        </p:txBody>
+      </p:sp>
+      <p:sp>
+        <p:nvSpPr>
+          <p:cNvPr id="5" name="TextBox 4"/>
+          <p:cNvSpPr txBox="1"/>
+          <p:nvPr/>
+        </p:nvSpPr>
+        <p:spPr>
+          <a:xfrm>
+            <a:off x="4727448" y="6547104"/>
+            <a:ext cx="2743200" cy="256032"/>
+          </a:xfrm>
+          <a:prstGeom prst="rect">
+            <a:avLst/>
+          </a:prstGeom>
+          <a:noFill/>
+        </p:spPr>
+        <p:txBody>
+          <a:bodyPr wrap="square" anchor="t" lIns="0" rIns="0" tIns="0" bIns="0">
+            <a:spAutoFit/>
+          </a:bodyPr>
+          <a:lstStyle/>
+          <a:p>
+            <a:pPr algn="ctr">
+              <a:spcAft>
+                <a:spcPts val="500"/>
+              </a:spcAft>
+            </a:pPr>
+            <a:r>
+              <a:rPr sz="800" b="0">
+                <a:solidFill>
+                  <a:srgbClr val="8E949B"/>
+                </a:solidFill>
+                <a:latin typeface="Meiryo"/>
+                <a:ea typeface="Meiryo"/>
+              </a:rPr>
+              <a:t>© TSUBURAYA PRODUCTIONS</a:t>
+            </a:r>
+          </a:p>
+        </p:txBody>
+      </p:sp>
+      <p:sp>
+        <p:nvSpPr>
+          <p:cNvPr id="6" name="TextBox 5"/>
+          <p:cNvSpPr txBox="1"/>
+          <p:nvPr/>
+        </p:nvSpPr>
+        <p:spPr>
+          <a:xfrm>
+            <a:off x="9372600" y="6492240"/>
+            <a:ext cx="2011680" cy="274320"/>
+          </a:xfrm>
+          <a:prstGeom prst="rect">
+            <a:avLst/>
+          </a:prstGeom>
+          <a:noFill/>
+        </p:spPr>
+        <p:txBody>
+          <a:bodyPr wrap="square" anchor="t" lIns="0" rIns="0" tIns="0" bIns="0">
+            <a:spAutoFit/>
+          </a:bodyPr>
+          <a:lstStyle/>
+          <a:p>
+            <a:pPr algn="r">
+              <a:spcAft>
+                <a:spcPts val="500"/>
+              </a:spcAft>
+            </a:pPr>
+            <a:r>
+              <a:rPr sz="1000" b="1">
+                <a:solidFill>
+                  <a:srgbClr val="C00000"/>
+                </a:solidFill>
+                <a:latin typeface="Meiryo"/>
+                <a:ea typeface="Meiryo"/>
+              </a:rPr>
+              <a:t>Strictly Confidential</a:t>
+            </a:r>
+          </a:p>
+        </p:txBody>
+      </p:sp>
+      <p:sp>
+        <p:nvSpPr>
+          <p:cNvPr id="7" name="TextBox 6"/>
+          <p:cNvSpPr txBox="1"/>
+          <p:nvPr/>
+        </p:nvSpPr>
+        <p:spPr>
+          <a:xfrm>
+            <a:off x="11521440" y="6492240"/>
+            <a:ext cx="457200" cy="274320"/>
+          </a:xfrm>
+          <a:prstGeom prst="rect">
+            <a:avLst/>
+          </a:prstGeom>
+          <a:noFill/>
+        </p:spPr>
+        <p:txBody>
+          <a:bodyPr wrap="square" anchor="t" lIns="0" rIns="0" tIns="0" bIns="0">
+            <a:spAutoFit/>
+          </a:bodyPr>
+          <a:lstStyle/>
+          <a:p>
+            <a:pPr algn="r">
+              <a:spcAft>
+                <a:spcPts val="500"/>
+              </a:spcAft>
+            </a:pPr>
+            <a:r>
+              <a:rPr sz="1000" b="0">
+                <a:solidFill>
+                  <a:srgbClr val="8E949B"/>
+                </a:solidFill>
+                <a:latin typeface="Meiryo"/>
+                <a:ea typeface="Meiryo"/>
+              </a:rPr>
+              <a:t>13</a:t>
             </a:r>
           </a:p>
         </p:txBody>

--- a/docs/proposals/softbank-ultraman-caravan/SB様提示用_1022ミーティング資料.pptx
+++ b/docs/proposals/softbank-ultraman-caravan/SB様提示用_1022ミーティング資料.pptx
@@ -6659,7 +6659,7 @@
                           <a:latin typeface="Meiryo"/>
                           <a:ea typeface="Meiryo"/>
                         </a:rPr>
-                        <a:t>広島・岡山を拠点に各県、沖縄は本島中心</a:t>
+                        <a:t>広島を拠点に各県、沖縄は本島中心</a:t>
                       </a:r>
                     </a:p>
                   </a:txBody>
@@ -6889,7 +6889,7 @@
                 <a:latin typeface="Meiryo"/>
                 <a:ea typeface="Meiryo"/>
               </a:rPr>
-              <a:t>・出演キャラクターは月別シフト表でご案内。北関東は2027年1〜3月は実施不可(4月以降は可)</a:t>
+              <a:t>・出演キャラクターは月別シフト表でご案内。関信越エリアは2027年1〜3月は実施不可(4月以降は可)</a:t>
             </a:r>
           </a:p>
         </p:txBody>
@@ -10636,7 +10636,7 @@
                           <a:latin typeface="Meiryo"/>
                           <a:ea typeface="Meiryo"/>
                         </a:rPr>
-                        <a:t>監修前POPと非公式品の装飾使用。店舗担当者が不在</a:t>
+                        <a:t>監修前POPと非公式品の装飾使用。入り時間に店舗担当者が不在</a:t>
                       </a:r>
                     </a:p>
                   </a:txBody>
@@ -10870,7 +10870,7 @@
                           <a:latin typeface="Meiryo"/>
                           <a:ea typeface="Meiryo"/>
                         </a:rPr>
-                        <a:t>当日朝にレイアウト変更、ステージが屋外に</a:t>
+                        <a:t>当日朝にレイアウト変更</a:t>
                       </a:r>
                     </a:p>
                   </a:txBody>
@@ -11221,7 +11221,7 @@
                           <a:latin typeface="Meiryo"/>
                           <a:ea typeface="Meiryo"/>
                         </a:rPr>
-                        <a:t>MCなしでルールが伝わらず。受け取りを店舗内に変更し見積取得増</a:t>
+                        <a:t>MCなしでルールが伝わらず。特典受け取りを店舗内に変更し見積取得増</a:t>
                       </a:r>
                     </a:p>
                   </a:txBody>
@@ -11743,7 +11743,7 @@
                           <a:latin typeface="Meiryo"/>
                           <a:ea typeface="Meiryo"/>
                         </a:rPr>
-                        <a:t>メンテ休憩</a:t>
+                        <a:t>スーツの準備・休憩</a:t>
                       </a:r>
                     </a:p>
                   </a:txBody>
@@ -12182,7 +12182,7 @@
                 <a:latin typeface="Meiryo"/>
                 <a:ea typeface="Meiryo"/>
               </a:rPr>
-              <a:t>・MC役は運営ディレクターの兼務、または当社のMCオプション(+3万円/日)。運営一式を当社で行うフル運営オプション(+22万円/日)も会場単位で選べます</a:t>
+              <a:t>・MC役は運営スタッフの兼務、または当社のMCオプション(+3万円/日)。運営一式を当社で行うフル運営オプション(+22万円/日)も会場単位で選べます</a:t>
             </a:r>
           </a:p>
         </p:txBody>
@@ -13054,7 +13054,7 @@
                 <a:latin typeface="Meiryo"/>
                 <a:ea typeface="Meiryo"/>
               </a:rPr>
-              <a:t>当社側のメーリングリストは契約後にご案内します。開催当日の連絡は、会場の当社担当と貴社運営ディレクターの間で直接行います</a:t>
+              <a:t>当社側のメーリングリストは契約後にご案内します。開催当日の連絡は、当社現場担当と貴社運営ディレクターの間で直接行います</a:t>
             </a:r>
           </a:p>
         </p:txBody>
@@ -13699,7 +13699,7 @@
                           <a:latin typeface="Meiryo"/>
                           <a:ea typeface="Meiryo"/>
                         </a:rPr>
-                        <a:t>対応済</a:t>
+                        <a:t>新規(テストは当社対応)</a:t>
                       </a:r>
                     </a:p>
                   </a:txBody>
@@ -13770,7 +13770,7 @@
                           <a:latin typeface="Meiryo"/>
                           <a:ea typeface="Meiryo"/>
                         </a:rPr>
-                        <a:t>対応済</a:t>
+                        <a:t>対応済(一部新規)</a:t>
                       </a:r>
                     </a:p>
                   </a:txBody>
@@ -15682,7 +15682,7 @@
                           <a:latin typeface="Meiryo"/>
                           <a:ea typeface="Meiryo"/>
                         </a:rPr>
-                        <a:t>北関東エリアは2027年1〜3月は実施不可(4月以降は可)。ウルトラセブンは対象外。出演は8ヒーロー</a:t>
+                        <a:t>関信越エリア(埼玉・茨城・群馬・栃木・山梨・長野・新潟)は2027年1〜3月は実施不可(4月以降は可)。ウルトラセブンは対象外。出演は8ヒーロー</a:t>
                       </a:r>
                     </a:p>
                   </a:txBody>

--- a/docs/proposals/softbank-ultraman-caravan/SB様提示用_1022ミーティング資料.pptx
+++ b/docs/proposals/softbank-ultraman-caravan/SB様提示用_1022ミーティング資料.pptx
@@ -15611,7 +15611,7 @@
                           <a:latin typeface="Meiryo"/>
                           <a:ea typeface="Meiryo"/>
                         </a:rPr>
-                        <a:t>貴社EDIで発注。IP使用料は年度前払い、保証分は四半期前払い(ご相談)。最低保証契約のため、期間一括の発注形態をご相談したい</a:t>
+                        <a:t>貴社EDIで発注。IP使用料は契約時に27ヶ月分(4,500万円)を一括前払い、保証分は四半期前払い(ご相談)。最低保証契約のため、期間一括の発注形態をご相談したい</a:t>
                       </a:r>
                     </a:p>
                   </a:txBody>

--- a/docs/proposals/softbank-ultraman-caravan/SB様提示用_1022ミーティング資料.pptx
+++ b/docs/proposals/softbank-ultraman-caravan/SB様提示用_1022ミーティング資料.pptx
@@ -18,6 +18,7 @@
     <p:sldId id="266" r:id="rId17"/>
     <p:sldId id="267" r:id="rId18"/>
     <p:sldId id="268" r:id="rId19"/>
+    <p:sldId id="269" r:id="rId20"/>
   </p:sldIdLst>
   <p:sldSz cx="12191695" cy="6858000" type="screen4x3"/>
   <p:notesSz cx="6858000" cy="9144000"/>
@@ -7812,7 +7813,7 @@
                 <a:latin typeface="Meiryo"/>
                 <a:ea typeface="Meiryo"/>
               </a:rPr>
-              <a:t>4. スケジュール</a:t>
+              <a:t>4. 素材提供の進め方</a:t>
             </a:r>
           </a:p>
         </p:txBody>
@@ -7852,7 +7853,7 @@
                 <a:latin typeface="Meiryo"/>
                 <a:ea typeface="Meiryo"/>
               </a:rPr>
-              <a:t>2027年1月開始からの逆算</a:t>
+              <a:t>キャンペーンビジュアルの方向性を決めてから、使用する素材を選定してお渡しします</a:t>
             </a:r>
           </a:p>
         </p:txBody>
@@ -7973,6 +7974,838 @@
                 <a:ea typeface="Meiryo"/>
               </a:rPr>
               <a:t>13</a:t>
+            </a:r>
+          </a:p>
+        </p:txBody>
+      </p:sp>
+      <p:graphicFrame>
+        <p:nvGraphicFramePr>
+          <p:cNvPr id="8" name="Table 7"/>
+          <p:cNvGraphicFramePr>
+            <a:graphicFrameLocks noGrp="1"/>
+          </p:cNvGraphicFramePr>
+          <p:nvPr/>
+        </p:nvGraphicFramePr>
+        <p:xfrm>
+          <a:off x="640080" y="1417320"/>
+          <a:ext cx="10881358" cy="3291839"/>
+        </p:xfrm>
+        <a:graphic>
+          <a:graphicData uri="http://schemas.openxmlformats.org/drawingml/2006/table">
+            <a:tbl>
+              <a:tblPr firstRow="1" bandRow="1">
+                <a:tableStyleId>{5C22544A-7EE6-4342-B048-85BDC9FD1C3A}</a:tableStyleId>
+              </a:tblPr>
+              <a:tblGrid>
+                <a:gridCol w="2400299"/>
+                <a:gridCol w="6720839"/>
+                <a:gridCol w="1760220"/>
+              </a:tblGrid>
+              <a:tr h="548639">
+                <a:tc>
+                  <a:txBody>
+                    <a:bodyPr/>
+                    <a:lstStyle/>
+                    <a:p>
+                      <a:r>
+                        <a:rPr sz="1150" b="1">
+                          <a:solidFill>
+                            <a:srgbClr val="FFFFFF"/>
+                          </a:solidFill>
+                          <a:latin typeface="Meiryo"/>
+                          <a:ea typeface="Meiryo"/>
+                        </a:rPr>
+                        <a:t>手順</a:t>
+                      </a:r>
+                    </a:p>
+                  </a:txBody>
+                  <a:tcPr anchor="ctr" marL="73152" marR="73152">
+                    <a:solidFill>
+                      <a:srgbClr val="232278"/>
+                    </a:solidFill>
+                  </a:tcPr>
+                </a:tc>
+                <a:tc>
+                  <a:txBody>
+                    <a:bodyPr/>
+                    <a:lstStyle/>
+                    <a:p>
+                      <a:r>
+                        <a:rPr sz="1150" b="1">
+                          <a:solidFill>
+                            <a:srgbClr val="FFFFFF"/>
+                          </a:solidFill>
+                          <a:latin typeface="Meiryo"/>
+                          <a:ea typeface="Meiryo"/>
+                        </a:rPr>
+                        <a:t>内容</a:t>
+                      </a:r>
+                    </a:p>
+                  </a:txBody>
+                  <a:tcPr anchor="ctr" marL="73152" marR="73152">
+                    <a:solidFill>
+                      <a:srgbClr val="232278"/>
+                    </a:solidFill>
+                  </a:tcPr>
+                </a:tc>
+                <a:tc>
+                  <a:txBody>
+                    <a:bodyPr/>
+                    <a:lstStyle/>
+                    <a:p>
+                      <a:r>
+                        <a:rPr sz="1150" b="1">
+                          <a:solidFill>
+                            <a:srgbClr val="FFFFFF"/>
+                          </a:solidFill>
+                          <a:latin typeface="Meiryo"/>
+                          <a:ea typeface="Meiryo"/>
+                        </a:rPr>
+                        <a:t>時期</a:t>
+                      </a:r>
+                    </a:p>
+                  </a:txBody>
+                  <a:tcPr anchor="ctr" marL="73152" marR="73152">
+                    <a:solidFill>
+                      <a:srgbClr val="232278"/>
+                    </a:solidFill>
+                  </a:tcPr>
+                </a:tc>
+              </a:tr>
+              <a:tr h="548639">
+                <a:tc>
+                  <a:txBody>
+                    <a:bodyPr/>
+                    <a:lstStyle/>
+                    <a:p>
+                      <a:r>
+                        <a:rPr sz="1150" b="1">
+                          <a:solidFill>
+                            <a:srgbClr val="1A1A1A"/>
+                          </a:solidFill>
+                          <a:latin typeface="Meiryo"/>
+                          <a:ea typeface="Meiryo"/>
+                        </a:rPr>
+                        <a:t>1. 事前ヒアリング</a:t>
+                      </a:r>
+                    </a:p>
+                  </a:txBody>
+                  <a:tcPr anchor="ctr" marL="73152" marR="73152">
+                    <a:solidFill>
+                      <a:srgbClr val="FFFFFF"/>
+                    </a:solidFill>
+                  </a:tcPr>
+                </a:tc>
+                <a:tc>
+                  <a:txBody>
+                    <a:bodyPr/>
+                    <a:lstStyle/>
+                    <a:p>
+                      <a:r>
+                        <a:rPr sz="1150" b="0">
+                          <a:solidFill>
+                            <a:srgbClr val="1A1A1A"/>
+                          </a:solidFill>
+                          <a:latin typeface="Meiryo"/>
+                          <a:ea typeface="Meiryo"/>
+                        </a:rPr>
+                        <a:t>用途(KV・会場装飾・ノベルティ・告知物)、媒体サイズ、トーン、使いたいヒーロー、必要点数を簡単なシートでお伺い</a:t>
+                      </a:r>
+                    </a:p>
+                  </a:txBody>
+                  <a:tcPr anchor="ctr" marL="73152" marR="73152">
+                    <a:solidFill>
+                      <a:srgbClr val="FFFFFF"/>
+                    </a:solidFill>
+                  </a:tcPr>
+                </a:tc>
+                <a:tc>
+                  <a:txBody>
+                    <a:bodyPr/>
+                    <a:lstStyle/>
+                    <a:p>
+                      <a:r>
+                        <a:rPr sz="1150" b="0">
+                          <a:solidFill>
+                            <a:srgbClr val="1A1A1A"/>
+                          </a:solidFill>
+                          <a:latin typeface="Meiryo"/>
+                          <a:ea typeface="Meiryo"/>
+                        </a:rPr>
+                        <a:t>打ち合わせ前</a:t>
+                      </a:r>
+                    </a:p>
+                  </a:txBody>
+                  <a:tcPr anchor="ctr" marL="73152" marR="73152">
+                    <a:solidFill>
+                      <a:srgbClr val="FFFFFF"/>
+                    </a:solidFill>
+                  </a:tcPr>
+                </a:tc>
+              </a:tr>
+              <a:tr h="548639">
+                <a:tc>
+                  <a:txBody>
+                    <a:bodyPr/>
+                    <a:lstStyle/>
+                    <a:p>
+                      <a:r>
+                        <a:rPr sz="1150" b="1">
+                          <a:solidFill>
+                            <a:srgbClr val="1A1A1A"/>
+                          </a:solidFill>
+                          <a:latin typeface="Meiryo"/>
+                          <a:ea typeface="Meiryo"/>
+                        </a:rPr>
+                        <a:t>2. 候補の絞り込み</a:t>
+                      </a:r>
+                    </a:p>
+                  </a:txBody>
+                  <a:tcPr anchor="ctr" marL="73152" marR="73152">
+                    <a:solidFill>
+                      <a:srgbClr val="F2F4F6"/>
+                    </a:solidFill>
+                  </a:tcPr>
+                </a:tc>
+                <a:tc>
+                  <a:txBody>
+                    <a:bodyPr/>
+                    <a:lstStyle/>
+                    <a:p>
+                      <a:r>
+                        <a:rPr sz="1150" b="0">
+                          <a:solidFill>
+                            <a:srgbClr val="1A1A1A"/>
+                          </a:solidFill>
+                          <a:latin typeface="Meiryo"/>
+                          <a:ea typeface="Meiryo"/>
+                        </a:rPr>
+                        <a:t>ヒアリング内容をもとに当社で候補を選定</a:t>
+                      </a:r>
+                    </a:p>
+                  </a:txBody>
+                  <a:tcPr anchor="ctr" marL="73152" marR="73152">
+                    <a:solidFill>
+                      <a:srgbClr val="F2F4F6"/>
+                    </a:solidFill>
+                  </a:tcPr>
+                </a:tc>
+                <a:tc>
+                  <a:txBody>
+                    <a:bodyPr/>
+                    <a:lstStyle/>
+                    <a:p>
+                      <a:r>
+                        <a:rPr sz="1150" b="0">
+                          <a:solidFill>
+                            <a:srgbClr val="1A1A1A"/>
+                          </a:solidFill>
+                          <a:latin typeface="Meiryo"/>
+                          <a:ea typeface="Meiryo"/>
+                        </a:rPr>
+                        <a:t>打ち合わせ前</a:t>
+                      </a:r>
+                    </a:p>
+                  </a:txBody>
+                  <a:tcPr anchor="ctr" marL="73152" marR="73152">
+                    <a:solidFill>
+                      <a:srgbClr val="F2F4F6"/>
+                    </a:solidFill>
+                  </a:tcPr>
+                </a:tc>
+              </a:tr>
+              <a:tr h="548639">
+                <a:tc>
+                  <a:txBody>
+                    <a:bodyPr/>
+                    <a:lstStyle/>
+                    <a:p>
+                      <a:r>
+                        <a:rPr sz="1150" b="1">
+                          <a:solidFill>
+                            <a:srgbClr val="1A1A1A"/>
+                          </a:solidFill>
+                          <a:latin typeface="Meiryo"/>
+                          <a:ea typeface="Meiryo"/>
+                        </a:rPr>
+                        <a:t>3. 方向性の決定</a:t>
+                      </a:r>
+                    </a:p>
+                  </a:txBody>
+                  <a:tcPr anchor="ctr" marL="73152" marR="73152">
+                    <a:solidFill>
+                      <a:srgbClr val="FFFFFF"/>
+                    </a:solidFill>
+                  </a:tcPr>
+                </a:tc>
+                <a:tc>
+                  <a:txBody>
+                    <a:bodyPr/>
+                    <a:lstStyle/>
+                    <a:p>
+                      <a:r>
+                        <a:rPr sz="1150" b="0">
+                          <a:solidFill>
+                            <a:srgbClr val="1A1A1A"/>
+                          </a:solidFill>
+                          <a:latin typeface="Meiryo"/>
+                          <a:ea typeface="Meiryo"/>
+                        </a:rPr>
+                        <a:t>キャンペーン名称・KVの策定打ち合わせで、候補を見ながら使用素材を決定</a:t>
+                      </a:r>
+                    </a:p>
+                  </a:txBody>
+                  <a:tcPr anchor="ctr" marL="73152" marR="73152">
+                    <a:solidFill>
+                      <a:srgbClr val="FFFFFF"/>
+                    </a:solidFill>
+                  </a:tcPr>
+                </a:tc>
+                <a:tc>
+                  <a:txBody>
+                    <a:bodyPr/>
+                    <a:lstStyle/>
+                    <a:p>
+                      <a:r>
+                        <a:rPr sz="1150" b="0">
+                          <a:solidFill>
+                            <a:srgbClr val="1A1A1A"/>
+                          </a:solidFill>
+                          <a:latin typeface="Meiryo"/>
+                          <a:ea typeface="Meiryo"/>
+                        </a:rPr>
+                        <a:t>11月上旬</a:t>
+                      </a:r>
+                    </a:p>
+                  </a:txBody>
+                  <a:tcPr anchor="ctr" marL="73152" marR="73152">
+                    <a:solidFill>
+                      <a:srgbClr val="FFFFFF"/>
+                    </a:solidFill>
+                  </a:tcPr>
+                </a:tc>
+              </a:tr>
+              <a:tr h="548639">
+                <a:tc>
+                  <a:txBody>
+                    <a:bodyPr/>
+                    <a:lstStyle/>
+                    <a:p>
+                      <a:r>
+                        <a:rPr sz="1150" b="1">
+                          <a:solidFill>
+                            <a:srgbClr val="1A1A1A"/>
+                          </a:solidFill>
+                          <a:latin typeface="Meiryo"/>
+                          <a:ea typeface="Meiryo"/>
+                        </a:rPr>
+                        <a:t>4. 素材のお渡し</a:t>
+                      </a:r>
+                    </a:p>
+                  </a:txBody>
+                  <a:tcPr anchor="ctr" marL="73152" marR="73152">
+                    <a:solidFill>
+                      <a:srgbClr val="F2F4F6"/>
+                    </a:solidFill>
+                  </a:tcPr>
+                </a:tc>
+                <a:tc>
+                  <a:txBody>
+                    <a:bodyPr/>
+                    <a:lstStyle/>
+                    <a:p>
+                      <a:r>
+                        <a:rPr sz="1150" b="0">
+                          <a:solidFill>
+                            <a:srgbClr val="1A1A1A"/>
+                          </a:solidFill>
+                          <a:latin typeface="Meiryo"/>
+                          <a:ea typeface="Meiryo"/>
+                        </a:rPr>
+                        <a:t>決定した素材のみをGoogleドライブで共有(データ量が大きい場合はHDDでのお渡し)</a:t>
+                      </a:r>
+                    </a:p>
+                  </a:txBody>
+                  <a:tcPr anchor="ctr" marL="73152" marR="73152">
+                    <a:solidFill>
+                      <a:srgbClr val="F2F4F6"/>
+                    </a:solidFill>
+                  </a:tcPr>
+                </a:tc>
+                <a:tc>
+                  <a:txBody>
+                    <a:bodyPr/>
+                    <a:lstStyle/>
+                    <a:p>
+                      <a:r>
+                        <a:rPr sz="1150" b="0">
+                          <a:solidFill>
+                            <a:srgbClr val="1A1A1A"/>
+                          </a:solidFill>
+                          <a:latin typeface="Meiryo"/>
+                          <a:ea typeface="Meiryo"/>
+                        </a:rPr>
+                        <a:t>決定後</a:t>
+                      </a:r>
+                    </a:p>
+                  </a:txBody>
+                  <a:tcPr anchor="ctr" marL="73152" marR="73152">
+                    <a:solidFill>
+                      <a:srgbClr val="F2F4F6"/>
+                    </a:solidFill>
+                  </a:tcPr>
+                </a:tc>
+              </a:tr>
+              <a:tr h="548644">
+                <a:tc>
+                  <a:txBody>
+                    <a:bodyPr/>
+                    <a:lstStyle/>
+                    <a:p>
+                      <a:r>
+                        <a:rPr sz="1150" b="1">
+                          <a:solidFill>
+                            <a:srgbClr val="1A1A1A"/>
+                          </a:solidFill>
+                          <a:latin typeface="Meiryo"/>
+                          <a:ea typeface="Meiryo"/>
+                        </a:rPr>
+                        <a:t>5. 制作・監修</a:t>
+                      </a:r>
+                    </a:p>
+                  </a:txBody>
+                  <a:tcPr anchor="ctr" marL="73152" marR="73152">
+                    <a:solidFill>
+                      <a:srgbClr val="FFFFFF"/>
+                    </a:solidFill>
+                  </a:tcPr>
+                </a:tc>
+                <a:tc>
+                  <a:txBody>
+                    <a:bodyPr/>
+                    <a:lstStyle/>
+                    <a:p>
+                      <a:r>
+                        <a:rPr sz="1150" b="0">
+                          <a:solidFill>
+                            <a:srgbClr val="1A1A1A"/>
+                          </a:solidFill>
+                          <a:latin typeface="Meiryo"/>
+                          <a:ea typeface="Meiryo"/>
+                        </a:rPr>
+                        <a:t>貴社でデザイン制作、当社監修(5営業日)、仮申請・製造へ</a:t>
+                      </a:r>
+                    </a:p>
+                  </a:txBody>
+                  <a:tcPr anchor="ctr" marL="73152" marR="73152">
+                    <a:solidFill>
+                      <a:srgbClr val="FFFFFF"/>
+                    </a:solidFill>
+                  </a:tcPr>
+                </a:tc>
+                <a:tc>
+                  <a:txBody>
+                    <a:bodyPr/>
+                    <a:lstStyle/>
+                    <a:p>
+                      <a:r>
+                        <a:rPr sz="1150" b="0">
+                          <a:solidFill>
+                            <a:srgbClr val="1A1A1A"/>
+                          </a:solidFill>
+                          <a:latin typeface="Meiryo"/>
+                          <a:ea typeface="Meiryo"/>
+                        </a:rPr>
+                        <a:t>11月中〜12月</a:t>
+                      </a:r>
+                    </a:p>
+                  </a:txBody>
+                  <a:tcPr anchor="ctr" marL="73152" marR="73152">
+                    <a:solidFill>
+                      <a:srgbClr val="FFFFFF"/>
+                    </a:solidFill>
+                  </a:tcPr>
+                </a:tc>
+              </a:tr>
+            </a:tbl>
+          </a:graphicData>
+        </a:graphic>
+      </p:graphicFrame>
+      <p:sp>
+        <p:nvSpPr>
+          <p:cNvPr id="9" name="Rounded Rectangle 8"/>
+          <p:cNvSpPr/>
+          <p:nvPr/>
+        </p:nvSpPr>
+        <p:spPr>
+          <a:xfrm>
+            <a:off x="640080" y="4846320"/>
+            <a:ext cx="10881360" cy="1280160"/>
+          </a:xfrm>
+          <a:prstGeom prst="roundRect">
+            <a:avLst>
+              <a:gd name="adj" fmla="val 6000"/>
+            </a:avLst>
+          </a:prstGeom>
+          <a:solidFill>
+            <a:srgbClr val="F2F4F6"/>
+          </a:solidFill>
+          <a:ln>
+            <a:noFill/>
+          </a:ln>
+          <a:effectLst/>
+        </p:spPr>
+        <p:style>
+          <a:lnRef idx="1">
+            <a:schemeClr val="accent1"/>
+          </a:lnRef>
+          <a:fillRef idx="3">
+            <a:schemeClr val="accent1"/>
+          </a:fillRef>
+          <a:effectRef idx="2">
+            <a:schemeClr val="accent1"/>
+          </a:effectRef>
+          <a:fontRef idx="minor">
+            <a:schemeClr val="lt1"/>
+          </a:fontRef>
+        </p:style>
+        <p:txBody>
+          <a:bodyPr rtlCol="0" anchor="ctr"/>
+          <a:lstStyle/>
+          <a:p>
+            <a:pPr algn="ctr"/>
+          </a:p>
+        </p:txBody>
+      </p:sp>
+      <p:sp>
+        <p:nvSpPr>
+          <p:cNvPr id="10" name="TextBox 9"/>
+          <p:cNvSpPr txBox="1"/>
+          <p:nvPr/>
+        </p:nvSpPr>
+        <p:spPr>
+          <a:xfrm>
+            <a:off x="914400" y="4983480"/>
+            <a:ext cx="10332720" cy="1097280"/>
+          </a:xfrm>
+          <a:prstGeom prst="rect">
+            <a:avLst/>
+          </a:prstGeom>
+          <a:noFill/>
+        </p:spPr>
+        <p:txBody>
+          <a:bodyPr wrap="square" anchor="t" lIns="0" rIns="0" tIns="0" bIns="0">
+            <a:spAutoFit/>
+          </a:bodyPr>
+          <a:lstStyle/>
+          <a:p>
+            <a:pPr algn="l">
+              <a:spcAft>
+                <a:spcPts val="400"/>
+              </a:spcAft>
+            </a:pPr>
+            <a:r>
+              <a:rPr sz="1250" b="1">
+                <a:solidFill>
+                  <a:srgbClr val="C00000"/>
+                </a:solidFill>
+                <a:latin typeface="Meiryo"/>
+                <a:ea typeface="Meiryo"/>
+              </a:rPr>
+              <a:t>ご提供の考え方</a:t>
+            </a:r>
+          </a:p>
+          <a:p>
+            <a:pPr algn="l">
+              <a:spcAft>
+                <a:spcPts val="400"/>
+              </a:spcAft>
+            </a:pPr>
+            <a:r>
+              <a:rPr sz="1150" b="0">
+                <a:solidFill>
+                  <a:srgbClr val="1A1A1A"/>
+                </a:solidFill>
+                <a:latin typeface="Meiryo"/>
+                <a:ea typeface="Meiryo"/>
+              </a:rPr>
+              <a:t>・テストではイベント告知用の素材のみお渡ししました。本契約向けのKV・ノベルティ用素材はこれからのご提供です</a:t>
+            </a:r>
+          </a:p>
+          <a:p>
+            <a:pPr algn="l">
+              <a:spcAft>
+                <a:spcPts val="400"/>
+              </a:spcAft>
+            </a:pPr>
+            <a:r>
+              <a:rPr sz="1150" b="0">
+                <a:solidFill>
+                  <a:srgbClr val="1A1A1A"/>
+                </a:solidFill>
+                <a:latin typeface="Meiryo"/>
+                <a:ea typeface="Meiryo"/>
+              </a:rPr>
+              <a:t>・素材は使用する分のみお渡しします(用途ごとに選定することで、監修の手戻りを減らします)</a:t>
+            </a:r>
+          </a:p>
+          <a:p>
+            <a:pPr algn="l">
+              <a:spcAft>
+                <a:spcPts val="400"/>
+              </a:spcAft>
+            </a:pPr>
+            <a:r>
+              <a:rPr sz="1150" b="0">
+                <a:solidFill>
+                  <a:srgbClr val="1A1A1A"/>
+                </a:solidFill>
+                <a:latin typeface="Meiryo"/>
+                <a:ea typeface="Meiryo"/>
+              </a:rPr>
+              <a:t>・撮影会の背景バナーはキャラクターなしの背景素材、会場装飾・告知物は集合ビジュアル・個体素材・ロゴ。クレジットは「©円谷プロ」左下</a:t>
+            </a:r>
+          </a:p>
+        </p:txBody>
+      </p:sp>
+    </p:spTree>
+  </p:cSld>
+  <p:clrMapOvr>
+    <a:masterClrMapping/>
+  </p:clrMapOvr>
+</p:sld>
+</file>
+
+<file path=ppt/slides/slide14.xml><?xml version="1.0" encoding="utf-8"?>
+<p:sld xmlns:a="http://schemas.openxmlformats.org/drawingml/2006/main" xmlns:p="http://schemas.openxmlformats.org/presentationml/2006/main" xmlns:r="http://schemas.openxmlformats.org/officeDocument/2006/relationships">
+  <p:cSld>
+    <p:spTree>
+      <p:nvGrpSpPr>
+        <p:cNvPr id="1" name=""/>
+        <p:cNvGrpSpPr/>
+        <p:nvPr/>
+      </p:nvGrpSpPr>
+      <p:grpSpPr/>
+      <p:pic>
+        <p:nvPicPr>
+          <p:cNvPr id="2" name="Picture 1" descr="band_header.png"/>
+          <p:cNvPicPr>
+            <a:picLocks noChangeAspect="1"/>
+          </p:cNvPicPr>
+          <p:nvPr/>
+        </p:nvPicPr>
+        <p:blipFill>
+          <a:blip r:embed="rId2"/>
+          <a:stretch>
+            <a:fillRect/>
+          </a:stretch>
+        </p:blipFill>
+        <p:spPr>
+          <a:xfrm>
+            <a:off x="0" y="0"/>
+            <a:ext cx="12191695" cy="786384"/>
+          </a:xfrm>
+          <a:prstGeom prst="rect">
+            <a:avLst/>
+          </a:prstGeom>
+        </p:spPr>
+      </p:pic>
+      <p:sp>
+        <p:nvSpPr>
+          <p:cNvPr id="3" name="TextBox 2"/>
+          <p:cNvSpPr txBox="1"/>
+          <p:nvPr/>
+        </p:nvSpPr>
+        <p:spPr>
+          <a:xfrm>
+            <a:off x="457200" y="73152"/>
+            <a:ext cx="10241280" cy="640080"/>
+          </a:xfrm>
+          <a:prstGeom prst="rect">
+            <a:avLst/>
+          </a:prstGeom>
+          <a:noFill/>
+        </p:spPr>
+        <p:txBody>
+          <a:bodyPr wrap="square" anchor="ctr" lIns="0" rIns="0" tIns="0" bIns="0">
+            <a:spAutoFit/>
+          </a:bodyPr>
+          <a:lstStyle/>
+          <a:p>
+            <a:pPr algn="l">
+              <a:spcAft>
+                <a:spcPts val="500"/>
+              </a:spcAft>
+            </a:pPr>
+            <a:r>
+              <a:rPr sz="2100" b="1">
+                <a:solidFill>
+                  <a:srgbClr val="FFFFFF"/>
+                </a:solidFill>
+                <a:latin typeface="Meiryo"/>
+                <a:ea typeface="Meiryo"/>
+              </a:rPr>
+              <a:t>4. スケジュール</a:t>
+            </a:r>
+          </a:p>
+        </p:txBody>
+      </p:sp>
+      <p:sp>
+        <p:nvSpPr>
+          <p:cNvPr id="4" name="TextBox 3"/>
+          <p:cNvSpPr txBox="1"/>
+          <p:nvPr/>
+        </p:nvSpPr>
+        <p:spPr>
+          <a:xfrm>
+            <a:off x="502920" y="896112"/>
+            <a:ext cx="11155680" cy="365760"/>
+          </a:xfrm>
+          <a:prstGeom prst="rect">
+            <a:avLst/>
+          </a:prstGeom>
+          <a:noFill/>
+        </p:spPr>
+        <p:txBody>
+          <a:bodyPr wrap="square" anchor="t" lIns="0" rIns="0" tIns="0" bIns="0">
+            <a:spAutoFit/>
+          </a:bodyPr>
+          <a:lstStyle/>
+          <a:p>
+            <a:pPr algn="l">
+              <a:spcAft>
+                <a:spcPts val="500"/>
+              </a:spcAft>
+            </a:pPr>
+            <a:r>
+              <a:rPr sz="1250" b="0">
+                <a:solidFill>
+                  <a:srgbClr val="5A626B"/>
+                </a:solidFill>
+                <a:latin typeface="Meiryo"/>
+                <a:ea typeface="Meiryo"/>
+              </a:rPr>
+              <a:t>2027年1月開始からの逆算</a:t>
+            </a:r>
+          </a:p>
+        </p:txBody>
+      </p:sp>
+      <p:sp>
+        <p:nvSpPr>
+          <p:cNvPr id="5" name="TextBox 4"/>
+          <p:cNvSpPr txBox="1"/>
+          <p:nvPr/>
+        </p:nvSpPr>
+        <p:spPr>
+          <a:xfrm>
+            <a:off x="4727448" y="6547104"/>
+            <a:ext cx="2743200" cy="256032"/>
+          </a:xfrm>
+          <a:prstGeom prst="rect">
+            <a:avLst/>
+          </a:prstGeom>
+          <a:noFill/>
+        </p:spPr>
+        <p:txBody>
+          <a:bodyPr wrap="square" anchor="t" lIns="0" rIns="0" tIns="0" bIns="0">
+            <a:spAutoFit/>
+          </a:bodyPr>
+          <a:lstStyle/>
+          <a:p>
+            <a:pPr algn="ctr">
+              <a:spcAft>
+                <a:spcPts val="500"/>
+              </a:spcAft>
+            </a:pPr>
+            <a:r>
+              <a:rPr sz="800" b="0">
+                <a:solidFill>
+                  <a:srgbClr val="8E949B"/>
+                </a:solidFill>
+                <a:latin typeface="Meiryo"/>
+                <a:ea typeface="Meiryo"/>
+              </a:rPr>
+              <a:t>© TSUBURAYA PRODUCTIONS</a:t>
+            </a:r>
+          </a:p>
+        </p:txBody>
+      </p:sp>
+      <p:sp>
+        <p:nvSpPr>
+          <p:cNvPr id="6" name="TextBox 5"/>
+          <p:cNvSpPr txBox="1"/>
+          <p:nvPr/>
+        </p:nvSpPr>
+        <p:spPr>
+          <a:xfrm>
+            <a:off x="9372600" y="6492240"/>
+            <a:ext cx="2011680" cy="274320"/>
+          </a:xfrm>
+          <a:prstGeom prst="rect">
+            <a:avLst/>
+          </a:prstGeom>
+          <a:noFill/>
+        </p:spPr>
+        <p:txBody>
+          <a:bodyPr wrap="square" anchor="t" lIns="0" rIns="0" tIns="0" bIns="0">
+            <a:spAutoFit/>
+          </a:bodyPr>
+          <a:lstStyle/>
+          <a:p>
+            <a:pPr algn="r">
+              <a:spcAft>
+                <a:spcPts val="500"/>
+              </a:spcAft>
+            </a:pPr>
+            <a:r>
+              <a:rPr sz="1000" b="1">
+                <a:solidFill>
+                  <a:srgbClr val="C00000"/>
+                </a:solidFill>
+                <a:latin typeface="Meiryo"/>
+                <a:ea typeface="Meiryo"/>
+              </a:rPr>
+              <a:t>Strictly Confidential</a:t>
+            </a:r>
+          </a:p>
+        </p:txBody>
+      </p:sp>
+      <p:sp>
+        <p:nvSpPr>
+          <p:cNvPr id="7" name="TextBox 6"/>
+          <p:cNvSpPr txBox="1"/>
+          <p:nvPr/>
+        </p:nvSpPr>
+        <p:spPr>
+          <a:xfrm>
+            <a:off x="11521440" y="6492240"/>
+            <a:ext cx="457200" cy="274320"/>
+          </a:xfrm>
+          <a:prstGeom prst="rect">
+            <a:avLst/>
+          </a:prstGeom>
+          <a:noFill/>
+        </p:spPr>
+        <p:txBody>
+          <a:bodyPr wrap="square" anchor="t" lIns="0" rIns="0" tIns="0" bIns="0">
+            <a:spAutoFit/>
+          </a:bodyPr>
+          <a:lstStyle/>
+          <a:p>
+            <a:pPr algn="r">
+              <a:spcAft>
+                <a:spcPts val="500"/>
+              </a:spcAft>
+            </a:pPr>
+            <a:r>
+              <a:rPr sz="1000" b="0">
+                <a:solidFill>
+                  <a:srgbClr val="8E949B"/>
+                </a:solidFill>
+                <a:latin typeface="Meiryo"/>
+                <a:ea typeface="Meiryo"/>
+              </a:rPr>
+              <a:t>14</a:t>
             </a:r>
           </a:p>
         </p:txBody>

--- a/docs/proposals/softbank-ultraman-caravan/SB様提示用_1022ミーティング資料.pptx
+++ b/docs/proposals/softbank-ultraman-caravan/SB様提示用_1022ミーティング資料.pptx
@@ -7269,7 +7269,7 @@
                 <a:latin typeface="Meiryo"/>
                 <a:ea typeface="Meiryo"/>
               </a:rPr>
-              <a:t>・会場装飾と告知物には集合ビジュアル(調整版)、個体素材、ブランドロゴ</a:t>
+              <a:t>・会場装飾には集合ビジュアル(調整版)、告知素材にはヒーローの個体素材を当社から提供。ブランドロゴも提供</a:t>
             </a:r>
           </a:p>
           <a:p>
@@ -7389,7 +7389,7 @@
                 <a:latin typeface="Meiryo"/>
                 <a:ea typeface="Meiryo"/>
               </a:rPr>
-              <a:t>・貴社担当者1名を事前登録し、品目ごとに申請。約1週間で可否を回答</a:t>
+              <a:t>・貴社担当者1名を事前登録し、品目ごとに申請。約15営業日で可否を回答</a:t>
             </a:r>
           </a:p>
           <a:p>
@@ -9012,7 +9012,7 @@
                           <a:latin typeface="Meiryo"/>
                           <a:ea typeface="Meiryo"/>
                         </a:rPr>
-                        <a:t>キャンペーン名称・KVの策定打ち合わせ。契約書ドラフトの提示</a:t>
+                        <a:t>キャンペーン名称・KVの策定打ち合わせ。契約書ドラフトの提示。ノベルティ品目の仮申請(回答に約15営業日)</a:t>
                       </a:r>
                     </a:p>
                   </a:txBody>
@@ -9035,7 +9035,7 @@
                           <a:latin typeface="Meiryo"/>
                           <a:ea typeface="Meiryo"/>
                         </a:rPr>
-                        <a:t>両社／当社</a:t>
+                        <a:t>両社</a:t>
                       </a:r>
                     </a:p>
                   </a:txBody>
@@ -9083,7 +9083,7 @@
                           <a:latin typeface="Meiryo"/>
                           <a:ea typeface="Meiryo"/>
                         </a:rPr>
-                        <a:t>KV確定、ノベルティ品目の仮申請、取りまとめ窓口の設置</a:t>
+                        <a:t>KV確定、取りまとめ窓口の設置</a:t>
                       </a:r>
                     </a:p>
                   </a:txBody>
@@ -10782,7 +10782,7 @@
               </a:spcAft>
             </a:pPr>
             <a:r>
-              <a:rPr sz="1100" b="0">
+              <a:rPr sz="1050" b="0">
                 <a:solidFill>
                   <a:srgbClr val="1A1A1A"/>
                 </a:solidFill>
@@ -10799,7 +10799,7 @@
               </a:spcAft>
             </a:pPr>
             <a:r>
-              <a:rPr sz="1100" b="0">
+              <a:rPr sz="1050" b="0">
                 <a:solidFill>
                   <a:srgbClr val="1A1A1A"/>
                 </a:solidFill>
@@ -10816,7 +10816,7 @@
               </a:spcAft>
             </a:pPr>
             <a:r>
-              <a:rPr sz="1100" b="0">
+              <a:rPr sz="1050" b="0">
                 <a:solidFill>
                   <a:srgbClr val="1A1A1A"/>
                 </a:solidFill>
@@ -10833,14 +10833,14 @@
               </a:spcAft>
             </a:pPr>
             <a:r>
-              <a:rPr sz="1100" b="0">
+              <a:rPr sz="1050" b="0">
                 <a:solidFill>
                   <a:srgbClr val="1A1A1A"/>
                 </a:solidFill>
                 <a:latin typeface="Meiryo"/>
                 <a:ea typeface="Meiryo"/>
               </a:rPr>
-              <a:t>・制作物は監修済みの規定デザインのみ。他キャラクターとの混在不可。ノベルティは指定倉庫に一括納品、5営業日前に数量確定</a:t>
+              <a:t>・制作物は監修済みの規定デザインのみ。他キャラクターとの混在は不可(貴社キャラクター〔おとうさん犬など〕は可。同一盤面でのデザイン混在は応相談)</a:t>
             </a:r>
           </a:p>
           <a:p>
@@ -10850,7 +10850,24 @@
               </a:spcAft>
             </a:pPr>
             <a:r>
-              <a:rPr sz="1100" b="0">
+              <a:rPr sz="1050" b="0">
+                <a:solidFill>
+                  <a:srgbClr val="1A1A1A"/>
+                </a:solidFill>
+                <a:latin typeface="Meiryo"/>
+                <a:ea typeface="Meiryo"/>
+              </a:rPr>
+              <a:t>・ノベルティは貴社製造となるため当社からの納品は原則なし。発生する場合は指定倉庫に一括納品、5営業日前に数量確定</a:t>
+            </a:r>
+          </a:p>
+          <a:p>
+            <a:pPr algn="l">
+              <a:spcAft>
+                <a:spcPts val="400"/>
+              </a:spcAft>
+            </a:pPr>
+            <a:r>
+              <a:rPr sz="1050" b="0">
                 <a:solidFill>
                   <a:srgbClr val="1A1A1A"/>
                 </a:solidFill>
@@ -13766,7 +13783,7 @@
                           <a:latin typeface="Meiryo"/>
                           <a:ea typeface="Meiryo"/>
                         </a:rPr>
-                        <a:t>仮申請 約5営業日、デザイン監修 5営業日</a:t>
+                        <a:t>仮申請 約15営業日、デザイン監修 5営業日</a:t>
                       </a:r>
                     </a:p>
                   </a:txBody>

--- a/docs/proposals/softbank-ultraman-caravan/SB様提示用_1022ミーティング資料.pptx
+++ b/docs/proposals/softbank-ultraman-caravan/SB様提示用_1022ミーティング資料.pptx
@@ -8820,7 +8820,7 @@
         </p:nvGraphicFramePr>
         <p:xfrm>
           <a:off x="640080" y="1417320"/>
-          <a:ext cx="10881360" cy="3712463"/>
+          <a:ext cx="10881360" cy="4242816"/>
         </p:xfrm>
         <a:graphic>
           <a:graphicData uri="http://schemas.openxmlformats.org/drawingml/2006/table">
@@ -8833,7 +8833,7 @@
                 <a:gridCol w="6891528"/>
                 <a:gridCol w="1450848"/>
               </a:tblGrid>
-              <a:tr h="530351">
+              <a:tr h="530352">
                 <a:tc>
                   <a:txBody>
                     <a:bodyPr/>
@@ -8904,7 +8904,7 @@
                   </a:tcPr>
                 </a:tc>
               </a:tr>
-              <a:tr h="530351">
+              <a:tr h="530352">
                 <a:tc>
                   <a:txBody>
                     <a:bodyPr/>
@@ -8975,7 +8975,7 @@
                   </a:tcPr>
                 </a:tc>
               </a:tr>
-              <a:tr h="530351">
+              <a:tr h="530352">
                 <a:tc>
                   <a:txBody>
                     <a:bodyPr/>
@@ -8989,7 +8989,7 @@
                           <a:latin typeface="Meiryo"/>
                           <a:ea typeface="Meiryo"/>
                         </a:rPr>
-                        <a:t>10月下旬〜11月上旬</a:t>
+                        <a:t>10月下旬</a:t>
                       </a:r>
                     </a:p>
                   </a:txBody>
@@ -9012,7 +9012,7 @@
                           <a:latin typeface="Meiryo"/>
                           <a:ea typeface="Meiryo"/>
                         </a:rPr>
-                        <a:t>キャンペーン名称・KVの策定打ち合わせ。契約書ドラフトの提示。ノベルティ品目の仮申請(回答に約15営業日)</a:t>
+                        <a:t>契約書ドラフトの提示、契約手続き、取りまとめ窓口の設置</a:t>
                       </a:r>
                     </a:p>
                   </a:txBody>
@@ -9046,7 +9046,7 @@
                   </a:tcPr>
                 </a:tc>
               </a:tr>
-              <a:tr h="530351">
+              <a:tr h="530352">
                 <a:tc>
                   <a:txBody>
                     <a:bodyPr/>
@@ -9060,6 +9060,148 @@
                           <a:latin typeface="Meiryo"/>
                           <a:ea typeface="Meiryo"/>
                         </a:rPr>
+                        <a:t>10月末</a:t>
+                      </a:r>
+                    </a:p>
+                  </a:txBody>
+                  <a:tcPr anchor="ctr" marL="73152" marR="73152">
+                    <a:solidFill>
+                      <a:srgbClr val="FFFFFF"/>
+                    </a:solidFill>
+                  </a:tcPr>
+                </a:tc>
+                <a:tc>
+                  <a:txBody>
+                    <a:bodyPr/>
+                    <a:lstStyle/>
+                    <a:p>
+                      <a:r>
+                        <a:rPr sz="1150" b="0">
+                          <a:solidFill>
+                            <a:srgbClr val="1A1A1A"/>
+                          </a:solidFill>
+                          <a:latin typeface="Meiryo"/>
+                          <a:ea typeface="Meiryo"/>
+                        </a:rPr>
+                        <a:t>契約締結</a:t>
+                      </a:r>
+                    </a:p>
+                  </a:txBody>
+                  <a:tcPr anchor="ctr" marL="73152" marR="73152">
+                    <a:solidFill>
+                      <a:srgbClr val="FFFFFF"/>
+                    </a:solidFill>
+                  </a:tcPr>
+                </a:tc>
+                <a:tc>
+                  <a:txBody>
+                    <a:bodyPr/>
+                    <a:lstStyle/>
+                    <a:p>
+                      <a:r>
+                        <a:rPr sz="1150" b="0">
+                          <a:solidFill>
+                            <a:srgbClr val="1A1A1A"/>
+                          </a:solidFill>
+                          <a:latin typeface="Meiryo"/>
+                          <a:ea typeface="Meiryo"/>
+                        </a:rPr>
+                        <a:t>両社</a:t>
+                      </a:r>
+                    </a:p>
+                  </a:txBody>
+                  <a:tcPr anchor="ctr" marL="73152" marR="73152">
+                    <a:solidFill>
+                      <a:srgbClr val="FFFFFF"/>
+                    </a:solidFill>
+                  </a:tcPr>
+                </a:tc>
+              </a:tr>
+              <a:tr h="530352">
+                <a:tc>
+                  <a:txBody>
+                    <a:bodyPr/>
+                    <a:lstStyle/>
+                    <a:p>
+                      <a:r>
+                        <a:rPr sz="1150" b="1">
+                          <a:solidFill>
+                            <a:srgbClr val="1A1A1A"/>
+                          </a:solidFill>
+                          <a:latin typeface="Meiryo"/>
+                          <a:ea typeface="Meiryo"/>
+                        </a:rPr>
+                        <a:t>11月上旬</a:t>
+                      </a:r>
+                    </a:p>
+                  </a:txBody>
+                  <a:tcPr anchor="ctr" marL="73152" marR="73152">
+                    <a:solidFill>
+                      <a:srgbClr val="F2F4F6"/>
+                    </a:solidFill>
+                  </a:tcPr>
+                </a:tc>
+                <a:tc>
+                  <a:txBody>
+                    <a:bodyPr/>
+                    <a:lstStyle/>
+                    <a:p>
+                      <a:r>
+                        <a:rPr sz="1150" b="0">
+                          <a:solidFill>
+                            <a:srgbClr val="1A1A1A"/>
+                          </a:solidFill>
+                          <a:latin typeface="Meiryo"/>
+                          <a:ea typeface="Meiryo"/>
+                        </a:rPr>
+                        <a:t>キャンペーン名称・KVの策定打ち合わせ、ノベルティ品目の仮申請(回答に約15営業日)</a:t>
+                      </a:r>
+                    </a:p>
+                  </a:txBody>
+                  <a:tcPr anchor="ctr" marL="73152" marR="73152">
+                    <a:solidFill>
+                      <a:srgbClr val="F2F4F6"/>
+                    </a:solidFill>
+                  </a:tcPr>
+                </a:tc>
+                <a:tc>
+                  <a:txBody>
+                    <a:bodyPr/>
+                    <a:lstStyle/>
+                    <a:p>
+                      <a:r>
+                        <a:rPr sz="1150" b="0">
+                          <a:solidFill>
+                            <a:srgbClr val="1A1A1A"/>
+                          </a:solidFill>
+                          <a:latin typeface="Meiryo"/>
+                          <a:ea typeface="Meiryo"/>
+                        </a:rPr>
+                        <a:t>両社</a:t>
+                      </a:r>
+                    </a:p>
+                  </a:txBody>
+                  <a:tcPr anchor="ctr" marL="73152" marR="73152">
+                    <a:solidFill>
+                      <a:srgbClr val="F2F4F6"/>
+                    </a:solidFill>
+                  </a:tcPr>
+                </a:tc>
+              </a:tr>
+              <a:tr h="530352">
+                <a:tc>
+                  <a:txBody>
+                    <a:bodyPr/>
+                    <a:lstStyle/>
+                    <a:p>
+                      <a:r>
+                        <a:rPr sz="1150" b="1">
+                          <a:solidFill>
+                            <a:srgbClr val="1A1A1A"/>
+                          </a:solidFill>
+                          <a:latin typeface="Meiryo"/>
+                          <a:ea typeface="Meiryo"/>
+                        </a:rPr>
                         <a:t>11月中</a:t>
                       </a:r>
                     </a:p>
@@ -9083,7 +9225,7 @@
                           <a:latin typeface="Meiryo"/>
                           <a:ea typeface="Meiryo"/>
                         </a:rPr>
-                        <a:t>KV確定、取りまとめ窓口の設置</a:t>
+                        <a:t>KV確定</a:t>
                       </a:r>
                     </a:p>
                   </a:txBody>
@@ -9106,7 +9248,7 @@
                           <a:latin typeface="Meiryo"/>
                           <a:ea typeface="Meiryo"/>
                         </a:rPr>
-                        <a:t>貴社</a:t>
+                        <a:t>両社</a:t>
                       </a:r>
                     </a:p>
                   </a:txBody>
@@ -9117,7 +9259,7 @@
                   </a:tcPr>
                 </a:tc>
               </a:tr>
-              <a:tr h="530351">
+              <a:tr h="530352">
                 <a:tc>
                   <a:txBody>
                     <a:bodyPr/>
@@ -9131,7 +9273,7 @@
                           <a:latin typeface="Meiryo"/>
                           <a:ea typeface="Meiryo"/>
                         </a:rPr>
-                        <a:t>11月末</a:t>
+                        <a:t>12月</a:t>
                       </a:r>
                     </a:p>
                   </a:txBody>
@@ -9154,7 +9296,7 @@
                           <a:latin typeface="Meiryo"/>
                           <a:ea typeface="Meiryo"/>
                         </a:rPr>
-                        <a:t>契約締結</a:t>
+                        <a:t>デザイン監修完了、量産開始(春節前)。1月開催分の会場確定(12月1日)。運営レクチャー</a:t>
                       </a:r>
                     </a:p>
                   </a:txBody>
@@ -9188,7 +9330,7 @@
                   </a:tcPr>
                 </a:tc>
               </a:tr>
-              <a:tr h="530351">
+              <a:tr h="530352">
                 <a:tc>
                   <a:txBody>
                     <a:bodyPr/>
@@ -9202,7 +9344,7 @@
                           <a:latin typeface="Meiryo"/>
                           <a:ea typeface="Meiryo"/>
                         </a:rPr>
-                        <a:t>12月</a:t>
+                        <a:t>2027年1月</a:t>
                       </a:r>
                     </a:p>
                   </a:txBody>
@@ -9225,7 +9367,7 @@
                           <a:latin typeface="Meiryo"/>
                           <a:ea typeface="Meiryo"/>
                         </a:rPr>
-                        <a:t>デザイン監修完了、量産開始(春節前)。1月開催分の会場確定(12月1日)。運営レクチャー</a:t>
+                        <a:t>開始(基準15ライン。1月は最大20ライン)</a:t>
                       </a:r>
                     </a:p>
                   </a:txBody>
@@ -9255,77 +9397,6 @@
                   <a:tcPr anchor="ctr" marL="73152" marR="73152">
                     <a:solidFill>
                       <a:srgbClr val="FFFFFF"/>
-                    </a:solidFill>
-                  </a:tcPr>
-                </a:tc>
-              </a:tr>
-              <a:tr h="530357">
-                <a:tc>
-                  <a:txBody>
-                    <a:bodyPr/>
-                    <a:lstStyle/>
-                    <a:p>
-                      <a:r>
-                        <a:rPr sz="1150" b="1">
-                          <a:solidFill>
-                            <a:srgbClr val="1A1A1A"/>
-                          </a:solidFill>
-                          <a:latin typeface="Meiryo"/>
-                          <a:ea typeface="Meiryo"/>
-                        </a:rPr>
-                        <a:t>2027年1月</a:t>
-                      </a:r>
-                    </a:p>
-                  </a:txBody>
-                  <a:tcPr anchor="ctr" marL="73152" marR="73152">
-                    <a:solidFill>
-                      <a:srgbClr val="F2F4F6"/>
-                    </a:solidFill>
-                  </a:tcPr>
-                </a:tc>
-                <a:tc>
-                  <a:txBody>
-                    <a:bodyPr/>
-                    <a:lstStyle/>
-                    <a:p>
-                      <a:r>
-                        <a:rPr sz="1150" b="0">
-                          <a:solidFill>
-                            <a:srgbClr val="1A1A1A"/>
-                          </a:solidFill>
-                          <a:latin typeface="Meiryo"/>
-                          <a:ea typeface="Meiryo"/>
-                        </a:rPr>
-                        <a:t>開始(基準15ライン。1月は最大20ライン)</a:t>
-                      </a:r>
-                    </a:p>
-                  </a:txBody>
-                  <a:tcPr anchor="ctr" marL="73152" marR="73152">
-                    <a:solidFill>
-                      <a:srgbClr val="F2F4F6"/>
-                    </a:solidFill>
-                  </a:tcPr>
-                </a:tc>
-                <a:tc>
-                  <a:txBody>
-                    <a:bodyPr/>
-                    <a:lstStyle/>
-                    <a:p>
-                      <a:r>
-                        <a:rPr sz="1150" b="0">
-                          <a:solidFill>
-                            <a:srgbClr val="1A1A1A"/>
-                          </a:solidFill>
-                          <a:latin typeface="Meiryo"/>
-                          <a:ea typeface="Meiryo"/>
-                        </a:rPr>
-                        <a:t>両社</a:t>
-                      </a:r>
-                    </a:p>
-                  </a:txBody>
-                  <a:tcPr anchor="ctr" marL="73152" marR="73152">
-                    <a:solidFill>
-                      <a:srgbClr val="F2F4F6"/>
                     </a:solidFill>
                   </a:tcPr>
                 </a:tc>
@@ -9432,7 +9503,7 @@
                 <a:latin typeface="Meiryo"/>
                 <a:ea typeface="Meiryo"/>
               </a:rPr>
-              <a:t>本格実施の可否／役割分担(運営体制・取りまとめ窓口)／11月末締結までの進め方／KV策定打ち合わせの日程</a:t>
+              <a:t>本格実施の可否／役割分担(運営体制・取りまとめ窓口)／10月末締結までの進め方／KV策定打ち合わせの日程</a:t>
             </a:r>
           </a:p>
         </p:txBody>
@@ -10119,7 +10190,7 @@
                 <a:latin typeface="Meiryo"/>
                 <a:ea typeface="Meiryo"/>
               </a:rPr>
-              <a:t>本格実施の可否／役割分担／11月末締結までの進め方／キャンペーン名称・ビジュアル策定打ち合わせの日程</a:t>
+              <a:t>本格実施の可否／役割分担／10月末締結までの進め方／キャンペーン名称・ビジュアル策定打ち合わせの日程</a:t>
             </a:r>
           </a:p>
         </p:txBody>
@@ -16177,7 +16248,7 @@
                           <a:latin typeface="Meiryo"/>
                           <a:ea typeface="Meiryo"/>
                         </a:rPr>
-                        <a:t>2027年1月〜2029年3月(2年3ヶ月)。2026年11月末までに締結(1月開始に必要な体制準備のため)</a:t>
+                        <a:t>2027年1月〜2029年3月(2年3ヶ月)。2026年10月末までに締結(1月開始に必要な体制準備と、11月からの制作・申請手続きのため)</a:t>
                       </a:r>
                     </a:p>
                   </a:txBody>

--- a/docs/proposals/softbank-ultraman-caravan/SB様提示用_1022ミーティング資料.pptx
+++ b/docs/proposals/softbank-ultraman-caravan/SB様提示用_1022ミーティング資料.pptx
@@ -8820,7 +8820,7 @@
         </p:nvGraphicFramePr>
         <p:xfrm>
           <a:off x="640080" y="1417320"/>
-          <a:ext cx="10881360" cy="4242816"/>
+          <a:ext cx="10881360" cy="3657600"/>
         </p:xfrm>
         <a:graphic>
           <a:graphicData uri="http://schemas.openxmlformats.org/drawingml/2006/table">
@@ -8833,14 +8833,14 @@
                 <a:gridCol w="6891528"/>
                 <a:gridCol w="1450848"/>
               </a:tblGrid>
-              <a:tr h="530352">
-                <a:tc>
-                  <a:txBody>
-                    <a:bodyPr/>
-                    <a:lstStyle/>
-                    <a:p>
-                      <a:r>
-                        <a:rPr sz="1150" b="1">
+              <a:tr h="457200">
+                <a:tc>
+                  <a:txBody>
+                    <a:bodyPr/>
+                    <a:lstStyle/>
+                    <a:p>
+                      <a:r>
+                        <a:rPr sz="1100" b="1">
                           <a:solidFill>
                             <a:srgbClr val="FFFFFF"/>
                           </a:solidFill>
@@ -8863,7 +8863,7 @@
                     <a:lstStyle/>
                     <a:p>
                       <a:r>
-                        <a:rPr sz="1150" b="1">
+                        <a:rPr sz="1100" b="1">
                           <a:solidFill>
                             <a:srgbClr val="FFFFFF"/>
                           </a:solidFill>
@@ -8886,7 +8886,7 @@
                     <a:lstStyle/>
                     <a:p>
                       <a:r>
-                        <a:rPr sz="1150" b="1">
+                        <a:rPr sz="1100" b="1">
                           <a:solidFill>
                             <a:srgbClr val="FFFFFF"/>
                           </a:solidFill>
@@ -8904,14 +8904,14 @@
                   </a:tcPr>
                 </a:tc>
               </a:tr>
-              <a:tr h="530352">
-                <a:tc>
-                  <a:txBody>
-                    <a:bodyPr/>
-                    <a:lstStyle/>
-                    <a:p>
-                      <a:r>
-                        <a:rPr sz="1150" b="1">
+              <a:tr h="457200">
+                <a:tc>
+                  <a:txBody>
+                    <a:bodyPr/>
+                    <a:lstStyle/>
+                    <a:p>
+                      <a:r>
+                        <a:rPr sz="1100" b="1">
                           <a:solidFill>
                             <a:srgbClr val="1A1A1A"/>
                           </a:solidFill>
@@ -8934,7 +8934,7 @@
                     <a:lstStyle/>
                     <a:p>
                       <a:r>
-                        <a:rPr sz="1150" b="0">
+                        <a:rPr sz="1100" b="0">
                           <a:solidFill>
                             <a:srgbClr val="1A1A1A"/>
                           </a:solidFill>
@@ -8957,7 +8957,7 @@
                     <a:lstStyle/>
                     <a:p>
                       <a:r>
-                        <a:rPr sz="1150" b="0">
+                        <a:rPr sz="1100" b="0">
                           <a:solidFill>
                             <a:srgbClr val="1A1A1A"/>
                           </a:solidFill>
@@ -8975,14 +8975,14 @@
                   </a:tcPr>
                 </a:tc>
               </a:tr>
-              <a:tr h="530352">
-                <a:tc>
-                  <a:txBody>
-                    <a:bodyPr/>
-                    <a:lstStyle/>
-                    <a:p>
-                      <a:r>
-                        <a:rPr sz="1150" b="1">
+              <a:tr h="457200">
+                <a:tc>
+                  <a:txBody>
+                    <a:bodyPr/>
+                    <a:lstStyle/>
+                    <a:p>
+                      <a:r>
+                        <a:rPr sz="1100" b="1">
                           <a:solidFill>
                             <a:srgbClr val="1A1A1A"/>
                           </a:solidFill>
@@ -9005,7 +9005,7 @@
                     <a:lstStyle/>
                     <a:p>
                       <a:r>
-                        <a:rPr sz="1150" b="0">
+                        <a:rPr sz="1100" b="0">
                           <a:solidFill>
                             <a:srgbClr val="1A1A1A"/>
                           </a:solidFill>
@@ -9028,7 +9028,7 @@
                     <a:lstStyle/>
                     <a:p>
                       <a:r>
-                        <a:rPr sz="1150" b="0">
+                        <a:rPr sz="1100" b="0">
                           <a:solidFill>
                             <a:srgbClr val="1A1A1A"/>
                           </a:solidFill>
@@ -9046,14 +9046,14 @@
                   </a:tcPr>
                 </a:tc>
               </a:tr>
-              <a:tr h="530352">
-                <a:tc>
-                  <a:txBody>
-                    <a:bodyPr/>
-                    <a:lstStyle/>
-                    <a:p>
-                      <a:r>
-                        <a:rPr sz="1150" b="1">
+              <a:tr h="457200">
+                <a:tc>
+                  <a:txBody>
+                    <a:bodyPr/>
+                    <a:lstStyle/>
+                    <a:p>
+                      <a:r>
+                        <a:rPr sz="1100" b="1">
                           <a:solidFill>
                             <a:srgbClr val="1A1A1A"/>
                           </a:solidFill>
@@ -9076,7 +9076,7 @@
                     <a:lstStyle/>
                     <a:p>
                       <a:r>
-                        <a:rPr sz="1150" b="0">
+                        <a:rPr sz="1100" b="0">
                           <a:solidFill>
                             <a:srgbClr val="1A1A1A"/>
                           </a:solidFill>
@@ -9099,7 +9099,7 @@
                     <a:lstStyle/>
                     <a:p>
                       <a:r>
-                        <a:rPr sz="1150" b="0">
+                        <a:rPr sz="1100" b="0">
                           <a:solidFill>
                             <a:srgbClr val="1A1A1A"/>
                           </a:solidFill>
@@ -9117,14 +9117,14 @@
                   </a:tcPr>
                 </a:tc>
               </a:tr>
-              <a:tr h="530352">
-                <a:tc>
-                  <a:txBody>
-                    <a:bodyPr/>
-                    <a:lstStyle/>
-                    <a:p>
-                      <a:r>
-                        <a:rPr sz="1150" b="1">
+              <a:tr h="457200">
+                <a:tc>
+                  <a:txBody>
+                    <a:bodyPr/>
+                    <a:lstStyle/>
+                    <a:p>
+                      <a:r>
+                        <a:rPr sz="1100" b="1">
                           <a:solidFill>
                             <a:srgbClr val="1A1A1A"/>
                           </a:solidFill>
@@ -9147,7 +9147,7 @@
                     <a:lstStyle/>
                     <a:p>
                       <a:r>
-                        <a:rPr sz="1150" b="0">
+                        <a:rPr sz="1100" b="0">
                           <a:solidFill>
                             <a:srgbClr val="1A1A1A"/>
                           </a:solidFill>
@@ -9170,7 +9170,7 @@
                     <a:lstStyle/>
                     <a:p>
                       <a:r>
-                        <a:rPr sz="1150" b="0">
+                        <a:rPr sz="1100" b="0">
                           <a:solidFill>
                             <a:srgbClr val="1A1A1A"/>
                           </a:solidFill>
@@ -9188,14 +9188,14 @@
                   </a:tcPr>
                 </a:tc>
               </a:tr>
-              <a:tr h="530352">
-                <a:tc>
-                  <a:txBody>
-                    <a:bodyPr/>
-                    <a:lstStyle/>
-                    <a:p>
-                      <a:r>
-                        <a:rPr sz="1150" b="1">
+              <a:tr h="457200">
+                <a:tc>
+                  <a:txBody>
+                    <a:bodyPr/>
+                    <a:lstStyle/>
+                    <a:p>
+                      <a:r>
+                        <a:rPr sz="1100" b="1">
                           <a:solidFill>
                             <a:srgbClr val="1A1A1A"/>
                           </a:solidFill>
@@ -9218,7 +9218,7 @@
                     <a:lstStyle/>
                     <a:p>
                       <a:r>
-                        <a:rPr sz="1150" b="0">
+                        <a:rPr sz="1100" b="0">
                           <a:solidFill>
                             <a:srgbClr val="1A1A1A"/>
                           </a:solidFill>
@@ -9241,7 +9241,7 @@
                     <a:lstStyle/>
                     <a:p>
                       <a:r>
-                        <a:rPr sz="1150" b="0">
+                        <a:rPr sz="1100" b="0">
                           <a:solidFill>
                             <a:srgbClr val="1A1A1A"/>
                           </a:solidFill>
@@ -9259,14 +9259,14 @@
                   </a:tcPr>
                 </a:tc>
               </a:tr>
-              <a:tr h="530352">
-                <a:tc>
-                  <a:txBody>
-                    <a:bodyPr/>
-                    <a:lstStyle/>
-                    <a:p>
-                      <a:r>
-                        <a:rPr sz="1150" b="1">
+              <a:tr h="457200">
+                <a:tc>
+                  <a:txBody>
+                    <a:bodyPr/>
+                    <a:lstStyle/>
+                    <a:p>
+                      <a:r>
+                        <a:rPr sz="1100" b="1">
                           <a:solidFill>
                             <a:srgbClr val="1A1A1A"/>
                           </a:solidFill>
@@ -9289,7 +9289,7 @@
                     <a:lstStyle/>
                     <a:p>
                       <a:r>
-                        <a:rPr sz="1150" b="0">
+                        <a:rPr sz="1100" b="0">
                           <a:solidFill>
                             <a:srgbClr val="1A1A1A"/>
                           </a:solidFill>
@@ -9312,7 +9312,7 @@
                     <a:lstStyle/>
                     <a:p>
                       <a:r>
-                        <a:rPr sz="1150" b="0">
+                        <a:rPr sz="1100" b="0">
                           <a:solidFill>
                             <a:srgbClr val="1A1A1A"/>
                           </a:solidFill>
@@ -9330,14 +9330,14 @@
                   </a:tcPr>
                 </a:tc>
               </a:tr>
-              <a:tr h="530352">
-                <a:tc>
-                  <a:txBody>
-                    <a:bodyPr/>
-                    <a:lstStyle/>
-                    <a:p>
-                      <a:r>
-                        <a:rPr sz="1150" b="1">
+              <a:tr h="457200">
+                <a:tc>
+                  <a:txBody>
+                    <a:bodyPr/>
+                    <a:lstStyle/>
+                    <a:p>
+                      <a:r>
+                        <a:rPr sz="1100" b="1">
                           <a:solidFill>
                             <a:srgbClr val="1A1A1A"/>
                           </a:solidFill>
@@ -9360,7 +9360,7 @@
                     <a:lstStyle/>
                     <a:p>
                       <a:r>
-                        <a:rPr sz="1150" b="0">
+                        <a:rPr sz="1100" b="0">
                           <a:solidFill>
                             <a:srgbClr val="1A1A1A"/>
                           </a:solidFill>
@@ -9383,7 +9383,7 @@
                     <a:lstStyle/>
                     <a:p>
                       <a:r>
-                        <a:rPr sz="1150" b="0">
+                        <a:rPr sz="1100" b="0">
                           <a:solidFill>
                             <a:srgbClr val="1A1A1A"/>
                           </a:solidFill>

--- a/docs/proposals/softbank-ultraman-caravan/SB様提示用_1022ミーティング資料.pptx
+++ b/docs/proposals/softbank-ultraman-caravan/SB様提示用_1022ミーティング資料.pptx
@@ -3493,7 +3493,7 @@
                 <a:latin typeface="Meiryo"/>
                 <a:ea typeface="Meiryo"/>
               </a:rPr>
-              <a:t>3. ライン供給計画(2027年1月〜2029年3月)</a:t>
+              <a:t>3. ライン供給計画(2027年1月〜2028年12月)</a:t>
             </a:r>
           </a:p>
         </p:txBody>
@@ -4934,7 +4934,7 @@
                 <a:latin typeface="Meiryo"/>
                 <a:ea typeface="Meiryo"/>
               </a:rPr>
-              <a:t>上表は2027年(104日)。2028年は106日、2029年1〜3月は25日。ライン数の考え方は同じ</a:t>
+              <a:t>上表は2027年(104日)。2028年は106日。ライン数の考え方は同じ</a:t>
             </a:r>
           </a:p>
         </p:txBody>
@@ -4977,7 +4977,7 @@
                           <a:latin typeface="Meiryo"/>
                           <a:ea typeface="Meiryo"/>
                         </a:rPr>
-                        <a:t>27ヶ月合計</a:t>
+                        <a:t>2年間合計</a:t>
                       </a:r>
                     </a:p>
                   </a:txBody>
@@ -5094,7 +5094,7 @@
                           <a:latin typeface="Meiryo"/>
                           <a:ea typeface="Meiryo"/>
                         </a:rPr>
-                        <a:t>235日</a:t>
+                        <a:t>210日</a:t>
                       </a:r>
                     </a:p>
                   </a:txBody>
@@ -5117,7 +5117,7 @@
                           <a:latin typeface="Meiryo"/>
                           <a:ea typeface="Meiryo"/>
                         </a:rPr>
-                        <a:t>3,525現場</a:t>
+                        <a:t>3,150現場</a:t>
                       </a:r>
                     </a:p>
                   </a:txBody>
@@ -5140,7 +5140,7 @@
                           <a:latin typeface="Meiryo"/>
                           <a:ea typeface="Meiryo"/>
                         </a:rPr>
-                        <a:t>3億5,250万円</a:t>
+                        <a:t>3億1,500万円</a:t>
                       </a:r>
                     </a:p>
                   </a:txBody>
@@ -5188,7 +5188,7 @@
                           <a:latin typeface="Meiryo"/>
                           <a:ea typeface="Meiryo"/>
                         </a:rPr>
-                        <a:t>235日</a:t>
+                        <a:t>210日</a:t>
                       </a:r>
                     </a:p>
                   </a:txBody>
@@ -5211,7 +5211,7 @@
                           <a:latin typeface="Meiryo"/>
                           <a:ea typeface="Meiryo"/>
                         </a:rPr>
-                        <a:t>4,005現場</a:t>
+                        <a:t>3,590現場</a:t>
                       </a:r>
                     </a:p>
                   </a:txBody>
@@ -5234,7 +5234,7 @@
                           <a:latin typeface="Meiryo"/>
                           <a:ea typeface="Meiryo"/>
                         </a:rPr>
-                        <a:t>4億50万円</a:t>
+                        <a:t>3億5,900万円</a:t>
                       </a:r>
                     </a:p>
                   </a:txBody>
@@ -5657,7 +5657,7 @@
                           <a:latin typeface="Meiryo"/>
                           <a:ea typeface="Meiryo"/>
                         </a:rPr>
-                        <a:t>27ヶ月の現場数(基準〜最大)</a:t>
+                        <a:t>2年間の現場数(基準〜最大)</a:t>
                       </a:r>
                     </a:p>
                   </a:txBody>
@@ -5797,7 +5797,7 @@
                           <a:latin typeface="Meiryo"/>
                           <a:ea typeface="Meiryo"/>
                         </a:rPr>
-                        <a:t>1,410〜1,602</a:t>
+                        <a:t>1,260〜1,436</a:t>
                       </a:r>
                     </a:p>
                   </a:txBody>
@@ -5937,7 +5937,7 @@
                           <a:latin typeface="Meiryo"/>
                           <a:ea typeface="Meiryo"/>
                         </a:rPr>
-                        <a:t>470〜566</a:t>
+                        <a:t>420〜508</a:t>
                       </a:r>
                     </a:p>
                   </a:txBody>
@@ -6077,7 +6077,7 @@
                           <a:latin typeface="Meiryo"/>
                           <a:ea typeface="Meiryo"/>
                         </a:rPr>
-                        <a:t>470〜566</a:t>
+                        <a:t>420〜508</a:t>
                       </a:r>
                     </a:p>
                   </a:txBody>
@@ -6217,7 +6217,7 @@
                           <a:latin typeface="Meiryo"/>
                           <a:ea typeface="Meiryo"/>
                         </a:rPr>
-                        <a:t>470〜566</a:t>
+                        <a:t>420〜508</a:t>
                       </a:r>
                     </a:p>
                   </a:txBody>
@@ -6357,7 +6357,7 @@
                           <a:latin typeface="Meiryo"/>
                           <a:ea typeface="Meiryo"/>
                         </a:rPr>
-                        <a:t>235</a:t>
+                        <a:t>210</a:t>
                       </a:r>
                     </a:p>
                   </a:txBody>
@@ -6497,7 +6497,7 @@
                           <a:latin typeface="Meiryo"/>
                           <a:ea typeface="Meiryo"/>
                         </a:rPr>
-                        <a:t>235</a:t>
+                        <a:t>210</a:t>
                       </a:r>
                     </a:p>
                   </a:txBody>
@@ -6637,7 +6637,7 @@
                           <a:latin typeface="Meiryo"/>
                           <a:ea typeface="Meiryo"/>
                         </a:rPr>
-                        <a:t>235</a:t>
+                        <a:t>210</a:t>
                       </a:r>
                     </a:p>
                   </a:txBody>
@@ -6777,7 +6777,7 @@
                           <a:latin typeface="Meiryo"/>
                           <a:ea typeface="Meiryo"/>
                         </a:rPr>
-                        <a:t>3,525〜4,005</a:t>
+                        <a:t>3,150〜3,590</a:t>
                       </a:r>
                     </a:p>
                   </a:txBody>
@@ -16248,7 +16248,7 @@
                           <a:latin typeface="Meiryo"/>
                           <a:ea typeface="Meiryo"/>
                         </a:rPr>
-                        <a:t>2027年1月〜2029年3月(2年3ヶ月)。2026年10月末までに締結(1月開始に必要な体制準備と、11月からの制作・申請手続きのため)</a:t>
+                        <a:t>2027年1月〜2028年12月(2年間)。2026年10月末までに締結(1月開始に必要な体制準備と、11月からの制作・申請手続きのため)</a:t>
                       </a:r>
                     </a:p>
                   </a:txBody>
@@ -16532,7 +16532,7 @@
                           <a:latin typeface="Meiryo"/>
                           <a:ea typeface="Meiryo"/>
                         </a:rPr>
-                        <a:t>貴社EDIで発注。IP使用料は契約時に27ヶ月分(4,500万円)を一括前払い、保証分は四半期前払い(ご相談)。最低保証契約のため、期間一括の発注形態をご相談したい</a:t>
+                        <a:t>貴社EDIで発注。IP使用料は契約時に2年分(4,000万円)を一括前払い、保証分は四半期前払い(ご相談)。最低保証契約のため、期間一括の発注形態をご相談したい</a:t>
                       </a:r>
                     </a:p>
                   </a:txBody>
